--- a/docs/FoodBridge_Project_Review.pptx
+++ b/docs/FoodBridge_Project_Review.pptx
@@ -2,20 +2,22 @@
 <file path=ppt/presentation.xml><?xml version="1.0" encoding="utf-8"?>
 <p:presentation xmlns:p="http://schemas.openxmlformats.org/presentationml/2006/main">
   <p:sldMasterIdLst>
-    <p:sldMasterId xmlns:r="http://schemas.openxmlformats.org/officeDocument/2006/relationships" id="2147483648" r:id="Rc58c4b691df14367"/>
+    <p:sldMasterId xmlns:r="http://schemas.openxmlformats.org/officeDocument/2006/relationships" id="2147483648" r:id="R34ddb6235a8e492f"/>
   </p:sldMasterIdLst>
   <p:notesMasterIdLst>
-    <p:notesMasterId xmlns:r="http://schemas.openxmlformats.org/officeDocument/2006/relationships" r:id="R3f9fc88fdb4c4e92"/>
+    <p:notesMasterId xmlns:r="http://schemas.openxmlformats.org/officeDocument/2006/relationships" r:id="R88608b788eff4a39"/>
   </p:notesMasterIdLst>
   <p:sldIdLst>
-    <p:sldId xmlns:r="http://schemas.openxmlformats.org/officeDocument/2006/relationships" id="256" r:id="R7ff05dc14f9e41e0"/>
-    <p:sldId xmlns:r="http://schemas.openxmlformats.org/officeDocument/2006/relationships" id="257" r:id="R88535e5605f74b74"/>
-    <p:sldId xmlns:r="http://schemas.openxmlformats.org/officeDocument/2006/relationships" id="258" r:id="Rd834569fec6a4177"/>
-    <p:sldId xmlns:r="http://schemas.openxmlformats.org/officeDocument/2006/relationships" id="259" r:id="R051c031abe644b4e"/>
-    <p:sldId xmlns:r="http://schemas.openxmlformats.org/officeDocument/2006/relationships" id="260" r:id="Rbbbdc6eeffd547a6"/>
-    <p:sldId xmlns:r="http://schemas.openxmlformats.org/officeDocument/2006/relationships" id="261" r:id="R105cf3e4d3ba4c61"/>
-    <p:sldId xmlns:r="http://schemas.openxmlformats.org/officeDocument/2006/relationships" id="262" r:id="R3801eaea19934a76"/>
-    <p:sldId xmlns:r="http://schemas.openxmlformats.org/officeDocument/2006/relationships" id="263" r:id="R9556ffe63e4b4d8c"/>
+    <p:sldId xmlns:r="http://schemas.openxmlformats.org/officeDocument/2006/relationships" id="256" r:id="R7cfb1b3f8152482b"/>
+    <p:sldId xmlns:r="http://schemas.openxmlformats.org/officeDocument/2006/relationships" id="257" r:id="R3104b29e4ea8412b"/>
+    <p:sldId xmlns:r="http://schemas.openxmlformats.org/officeDocument/2006/relationships" id="258" r:id="Reebcf2dc49674160"/>
+    <p:sldId xmlns:r="http://schemas.openxmlformats.org/officeDocument/2006/relationships" id="259" r:id="R6705056787b04162"/>
+    <p:sldId xmlns:r="http://schemas.openxmlformats.org/officeDocument/2006/relationships" id="260" r:id="Rdcd19829219c4a3b"/>
+    <p:sldId xmlns:r="http://schemas.openxmlformats.org/officeDocument/2006/relationships" id="261" r:id="Ra1970b71e3e246f7"/>
+    <p:sldId xmlns:r="http://schemas.openxmlformats.org/officeDocument/2006/relationships" id="262" r:id="Re9e0b390fdcd4563"/>
+    <p:sldId xmlns:r="http://schemas.openxmlformats.org/officeDocument/2006/relationships" id="263" r:id="Rfbe6cbd320be4e34"/>
+    <p:sldId xmlns:r="http://schemas.openxmlformats.org/officeDocument/2006/relationships" id="264" r:id="R93ab7a1426f141a4"/>
+    <p:sldId xmlns:r="http://schemas.openxmlformats.org/officeDocument/2006/relationships" id="265" r:id="Rc9943d0f5ae74d93"/>
   </p:sldIdLst>
   <p:sldSz cx="12192000" cy="6858000"/>
   <p:notesSz cx="6858000" cy="9144000"/>
@@ -449,17 +451,77 @@
           <a:lstStyle xmlns:a="http://schemas.openxmlformats.org/drawingml/2006/main"/>
           <a:p xmlns:a="http://schemas.openxmlformats.org/drawingml/2006/main">
             <a:r>
-              <a:t>About 10 seconds. Then move straight on.</a:t>
+              <a:t>Cover. State the project title and the two questions the review answers: how the platform works, and what distinguishes it.</a:t>
             </a:r>
           </a:p>
+        </p:txBody>
+      </p:sp>
+      <p:sp>
+        <p:nvSpPr>
+          <p:cNvPr id="4" name="Slide Number Placeholder 3"/>
+          <p:cNvSpPr>
+            <a:spLocks xmlns:a="http://schemas.openxmlformats.org/drawingml/2006/main" noGrp="1"/>
+          </p:cNvSpPr>
+          <p:nvPr>
+            <p:ph type="sldNum" idx="5"/>
+          </p:nvPr>
+        </p:nvSpPr>
+        <p:spPr/>
+        <p:txBody>
+          <a:bodyPr xmlns:a="http://schemas.openxmlformats.org/drawingml/2006/main"/>
+          <a:lstStyle xmlns:a="http://schemas.openxmlformats.org/drawingml/2006/main"/>
+          <a:p xmlns:a="http://schemas.openxmlformats.org/drawingml/2006/main"/>
+        </p:txBody>
+      </p:sp>
+    </p:spTree>
+  </p:cSld>
+  <p:clrMapOvr>
+    <a:masterClrMapping xmlns:a="http://schemas.openxmlformats.org/drawingml/2006/main"/>
+  </p:clrMapOvr>
+</p:notes>
+</file>
+
+<file path=ppt/notesSlides/notesSlide10.xml><?xml version="1.0" encoding="utf-8"?>
+<p:notes xmlns:p="http://schemas.openxmlformats.org/presentationml/2006/main">
+  <p:cSld>
+    <p:spTree>
+      <p:nvGrpSpPr>
+        <p:cNvPr id="1" name=""/>
+        <p:cNvGrpSpPr/>
+        <p:nvPr/>
+      </p:nvGrpSpPr>
+      <p:grpSpPr>
+        <a:xfrm xmlns:a="http://schemas.openxmlformats.org/drawingml/2006/main"/>
+      </p:grpSpPr>
+      <p:sp>
+        <p:nvSpPr>
+          <p:cNvPr id="2" name="Slide Image Placeholder 1"/>
+          <p:cNvSpPr>
+            <a:spLocks xmlns:a="http://schemas.openxmlformats.org/drawingml/2006/main" noGrp="1"/>
+          </p:cNvSpPr>
+          <p:nvPr>
+            <p:ph type="sldImg" idx="0"/>
+          </p:nvPr>
+        </p:nvSpPr>
+        <p:spPr/>
+      </p:sp>
+      <p:sp>
+        <p:nvSpPr>
+          <p:cNvPr id="3" name="Notes Placeholder 2"/>
+          <p:cNvSpPr>
+            <a:spLocks xmlns:a="http://schemas.openxmlformats.org/drawingml/2006/main" noGrp="1"/>
+          </p:cNvSpPr>
+          <p:nvPr>
+            <p:ph type="body" idx="1"/>
+          </p:nvPr>
+        </p:nvSpPr>
+        <p:spPr/>
+        <p:txBody>
+          <a:bodyPr xmlns:a="http://schemas.openxmlformats.org/drawingml/2006/main"/>
+          <a:lstStyle xmlns:a="http://schemas.openxmlformats.org/drawingml/2006/main"/>
           <a:p xmlns:a="http://schemas.openxmlformats.org/drawingml/2006/main">
             <a:r>
-              <a:t/>
-            </a:r>
-          </a:p>
-          <a:p xmlns:a="http://schemas.openxmlformats.org/drawingml/2006/main">
-            <a:r>
-              <a:t>Deck covers five minutes, the live demo takes the rest of the ten.</a:t>
+              <a:t>Close the slides here and begin the live demonstration of the platform.</a:t>
             </a:r>
           </a:p>
         </p:txBody>
@@ -529,7 +591,7 @@
           <a:lstStyle xmlns:a="http://schemas.openxmlformats.org/drawingml/2006/main"/>
           <a:p xmlns:a="http://schemas.openxmlformats.org/drawingml/2006/main">
             <a:r>
-              <a:t>About 40 seconds. Title, one line of context, then the four problems. The last two are what the engine answers.</a:t>
+              <a:t>The final two points define the problem this project addresses: safety and justification are absent from existing platforms.</a:t>
             </a:r>
           </a:p>
         </p:txBody>
@@ -597,11 +659,7 @@
         <p:txBody>
           <a:bodyPr xmlns:a="http://schemas.openxmlformats.org/drawingml/2006/main"/>
           <a:lstStyle xmlns:a="http://schemas.openxmlformats.org/drawingml/2006/main"/>
-          <a:p xmlns:a="http://schemas.openxmlformats.org/drawingml/2006/main">
-            <a:r>
-              <a:t>About 40 seconds. Say who uses it and that the decision is stored with its reason, then go to architecture.</a:t>
-            </a:r>
-          </a:p>
+          <a:p xmlns:a="http://schemas.openxmlformats.org/drawingml/2006/main"/>
         </p:txBody>
       </p:sp>
       <p:sp>
@@ -667,11 +725,7 @@
         <p:txBody>
           <a:bodyPr xmlns:a="http://schemas.openxmlformats.org/drawingml/2006/main"/>
           <a:lstStyle xmlns:a="http://schemas.openxmlformats.org/drawingml/2006/main"/>
-          <a:p xmlns:a="http://schemas.openxmlformats.org/drawingml/2006/main">
-            <a:r>
-              <a:t>About 40 seconds. Name the four layers, then the entity chain on the right. Do not read every entity aloud.</a:t>
-            </a:r>
-          </a:p>
+          <a:p xmlns:a="http://schemas.openxmlformats.org/drawingml/2006/main"/>
         </p:txBody>
       </p:sp>
       <p:sp>
@@ -737,11 +791,7 @@
         <p:txBody>
           <a:bodyPr xmlns:a="http://schemas.openxmlformats.org/drawingml/2006/main"/>
           <a:lstStyle xmlns:a="http://schemas.openxmlformats.org/drawingml/2006/main"/>
-          <a:p xmlns:a="http://schemas.openxmlformats.org/drawingml/2006/main">
-            <a:r>
-              <a:t>About 50 seconds. Walk the four filters, then the six factors. This is the slide the demo repeats live on screen.</a:t>
-            </a:r>
-          </a:p>
+          <a:p xmlns:a="http://schemas.openxmlformats.org/drawingml/2006/main"/>
         </p:txBody>
       </p:sp>
       <p:sp>
@@ -809,7 +859,7 @@
           <a:lstStyle xmlns:a="http://schemas.openxmlformats.org/drawingml/2006/main"/>
           <a:p xmlns:a="http://schemas.openxmlformats.org/drawingml/2006/main">
             <a:r>
-              <a:t>About 60 seconds and the key slide. Name the rule, then the change I made in my own design. The three assumptions are what I defend.</a:t>
+              <a:t>This is the answer to the question of original contribution. The three assumptions are the values the rule depends on.</a:t>
             </a:r>
           </a:p>
         </p:txBody>
@@ -877,11 +927,7 @@
         <p:txBody>
           <a:bodyPr xmlns:a="http://schemas.openxmlformats.org/drawingml/2006/main"/>
           <a:lstStyle xmlns:a="http://schemas.openxmlformats.org/drawingml/2006/main"/>
-          <a:p xmlns:a="http://schemas.openxmlformats.org/drawingml/2006/main">
-            <a:r>
-              <a:t>About 40 seconds. Read two or three numbers, then the four differences on the right. Then move to the demo.</a:t>
-            </a:r>
-          </a:p>
+          <a:p xmlns:a="http://schemas.openxmlformats.org/drawingml/2006/main"/>
         </p:txBody>
       </p:sp>
       <p:sp>
@@ -947,11 +993,73 @@
         <p:txBody>
           <a:bodyPr xmlns:a="http://schemas.openxmlformats.org/drawingml/2006/main"/>
           <a:lstStyle xmlns:a="http://schemas.openxmlformats.org/drawingml/2006/main"/>
-          <a:p xmlns:a="http://schemas.openxmlformats.org/drawingml/2006/main">
-            <a:r>
-              <a:t>About 20 seconds, then switch to the live demo: localhost:5173, admin login.</a:t>
-            </a:r>
-          </a:p>
+          <a:p xmlns:a="http://schemas.openxmlformats.org/drawingml/2006/main"/>
+        </p:txBody>
+      </p:sp>
+      <p:sp>
+        <p:nvSpPr>
+          <p:cNvPr id="4" name="Slide Number Placeholder 3"/>
+          <p:cNvSpPr>
+            <a:spLocks xmlns:a="http://schemas.openxmlformats.org/drawingml/2006/main" noGrp="1"/>
+          </p:cNvSpPr>
+          <p:nvPr>
+            <p:ph type="sldNum" idx="5"/>
+          </p:nvPr>
+        </p:nvSpPr>
+        <p:spPr/>
+        <p:txBody>
+          <a:bodyPr xmlns:a="http://schemas.openxmlformats.org/drawingml/2006/main"/>
+          <a:lstStyle xmlns:a="http://schemas.openxmlformats.org/drawingml/2006/main"/>
+          <a:p xmlns:a="http://schemas.openxmlformats.org/drawingml/2006/main"/>
+        </p:txBody>
+      </p:sp>
+    </p:spTree>
+  </p:cSld>
+  <p:clrMapOvr>
+    <a:masterClrMapping xmlns:a="http://schemas.openxmlformats.org/drawingml/2006/main"/>
+  </p:clrMapOvr>
+</p:notes>
+</file>
+
+<file path=ppt/notesSlides/notesSlide9.xml><?xml version="1.0" encoding="utf-8"?>
+<p:notes xmlns:p="http://schemas.openxmlformats.org/presentationml/2006/main">
+  <p:cSld>
+    <p:spTree>
+      <p:nvGrpSpPr>
+        <p:cNvPr id="1" name=""/>
+        <p:cNvGrpSpPr/>
+        <p:nvPr/>
+      </p:nvGrpSpPr>
+      <p:grpSpPr>
+        <a:xfrm xmlns:a="http://schemas.openxmlformats.org/drawingml/2006/main"/>
+      </p:grpSpPr>
+      <p:sp>
+        <p:nvSpPr>
+          <p:cNvPr id="2" name="Slide Image Placeholder 1"/>
+          <p:cNvSpPr>
+            <a:spLocks xmlns:a="http://schemas.openxmlformats.org/drawingml/2006/main" noGrp="1"/>
+          </p:cNvSpPr>
+          <p:nvPr>
+            <p:ph type="sldImg" idx="0"/>
+          </p:nvPr>
+        </p:nvSpPr>
+        <p:spPr/>
+      </p:sp>
+      <p:sp>
+        <p:nvSpPr>
+          <p:cNvPr id="3" name="Notes Placeholder 2"/>
+          <p:cNvSpPr>
+            <a:spLocks xmlns:a="http://schemas.openxmlformats.org/drawingml/2006/main" noGrp="1"/>
+          </p:cNvSpPr>
+          <p:nvPr>
+            <p:ph type="body" idx="1"/>
+          </p:nvPr>
+        </p:nvSpPr>
+        <p:spPr/>
+        <p:txBody>
+          <a:bodyPr xmlns:a="http://schemas.openxmlformats.org/drawingml/2006/main"/>
+          <a:lstStyle xmlns:a="http://schemas.openxmlformats.org/drawingml/2006/main"/>
+          <a:p xmlns:a="http://schemas.openxmlformats.org/drawingml/2006/main"/>
         </p:txBody>
       </p:sp>
       <p:sp>
@@ -996,7 +1104,7 @@
           <p:cNvPr id="3" name="Title">
             <a:extLst xmlns:a="http://schemas.openxmlformats.org/drawingml/2006/main">
               <a:ext uri="{FF2B5EF4-FFF2-40B4-BE49-F238E27FC236}">
-                <a16:creationId xmlns:a16="http://schemas.microsoft.com/office/drawing/2014/main" id="{4CB20593-8BE2-400F-A7D1-389BAD97EF3D}"/>
+                <a16:creationId xmlns:a16="http://schemas.microsoft.com/office/drawing/2014/main" id="{F76F41E0-EB6A-4B3A-B63B-727BBBEDAA6A}"/>
               </a:ext>
             </a:extLst>
           </p:cNvPr>
@@ -1153,7 +1261,7 @@
           <p:cNvPr id="2" name="Subtitle">
             <a:extLst xmlns:a="http://schemas.openxmlformats.org/drawingml/2006/main">
               <a:ext uri="{FF2B5EF4-FFF2-40B4-BE49-F238E27FC236}">
-                <a16:creationId xmlns:a16="http://schemas.microsoft.com/office/drawing/2014/main" id="{BD03DB36-0837-483C-A752-9BD2EAA6E8B5}"/>
+                <a16:creationId xmlns:a16="http://schemas.microsoft.com/office/drawing/2014/main" id="{260467F6-8D23-4138-BA55-951E84DA3011}"/>
               </a:ext>
             </a:extLst>
           </p:cNvPr>
@@ -1327,7 +1435,7 @@
           <p:cNvPr id="2" name="Section title">
             <a:extLst xmlns:a="http://schemas.openxmlformats.org/drawingml/2006/main">
               <a:ext uri="{FF2B5EF4-FFF2-40B4-BE49-F238E27FC236}">
-                <a16:creationId xmlns:a16="http://schemas.microsoft.com/office/drawing/2014/main" id="{8B932983-0BE1-496F-A547-1F5FED304FDF}"/>
+                <a16:creationId xmlns:a16="http://schemas.microsoft.com/office/drawing/2014/main" id="{EAE30AA0-AA9C-4819-8F41-BDA9E55F9CE4}"/>
               </a:ext>
             </a:extLst>
           </p:cNvPr>
@@ -1501,7 +1609,7 @@
           <p:cNvPr id="3" name="Title">
             <a:extLst xmlns:a="http://schemas.openxmlformats.org/drawingml/2006/main">
               <a:ext uri="{FF2B5EF4-FFF2-40B4-BE49-F238E27FC236}">
-                <a16:creationId xmlns:a16="http://schemas.microsoft.com/office/drawing/2014/main" id="{4C719564-8CFF-4B44-9834-D35D5246983D}"/>
+                <a16:creationId xmlns:a16="http://schemas.microsoft.com/office/drawing/2014/main" id="{E8D4F5C0-A614-42E9-B519-BCB2D0D471F4}"/>
               </a:ext>
             </a:extLst>
           </p:cNvPr>
@@ -1658,7 +1766,7 @@
           <p:cNvPr id="2" name="Body">
             <a:extLst xmlns:a="http://schemas.openxmlformats.org/drawingml/2006/main">
               <a:ext uri="{FF2B5EF4-FFF2-40B4-BE49-F238E27FC236}">
-                <a16:creationId xmlns:a16="http://schemas.microsoft.com/office/drawing/2014/main" id="{7F3D5AB6-3F04-473C-941D-263391D25188}"/>
+                <a16:creationId xmlns:a16="http://schemas.microsoft.com/office/drawing/2014/main" id="{7BBFDA2F-A41B-4966-AD49-0169D8C3D63F}"/>
               </a:ext>
             </a:extLst>
           </p:cNvPr>
@@ -1832,7 +1940,7 @@
           <p:cNvPr id="4" name="Title">
             <a:extLst xmlns:a="http://schemas.openxmlformats.org/drawingml/2006/main">
               <a:ext uri="{FF2B5EF4-FFF2-40B4-BE49-F238E27FC236}">
-                <a16:creationId xmlns:a16="http://schemas.microsoft.com/office/drawing/2014/main" id="{7C46E764-1F72-4176-832E-3D159B181C81}"/>
+                <a16:creationId xmlns:a16="http://schemas.microsoft.com/office/drawing/2014/main" id="{D37D4087-6501-4261-BF3B-B5313709068B}"/>
               </a:ext>
             </a:extLst>
           </p:cNvPr>
@@ -1989,7 +2097,7 @@
           <p:cNvPr id="2" name="Left column">
             <a:extLst xmlns:a="http://schemas.openxmlformats.org/drawingml/2006/main">
               <a:ext uri="{FF2B5EF4-FFF2-40B4-BE49-F238E27FC236}">
-                <a16:creationId xmlns:a16="http://schemas.microsoft.com/office/drawing/2014/main" id="{C73D08DB-D2D9-4625-88A2-1AA563CEC0EE}"/>
+                <a16:creationId xmlns:a16="http://schemas.microsoft.com/office/drawing/2014/main" id="{C6E39595-AB7D-415B-85C7-FEA65006FDB7}"/>
               </a:ext>
             </a:extLst>
           </p:cNvPr>
@@ -2146,7 +2254,7 @@
           <p:cNvPr id="3" name="Right column">
             <a:extLst xmlns:a="http://schemas.openxmlformats.org/drawingml/2006/main">
               <a:ext uri="{FF2B5EF4-FFF2-40B4-BE49-F238E27FC236}">
-                <a16:creationId xmlns:a16="http://schemas.microsoft.com/office/drawing/2014/main" id="{4D834ABA-EC9F-4CE3-B32E-DD956A37710D}"/>
+                <a16:creationId xmlns:a16="http://schemas.microsoft.com/office/drawing/2014/main" id="{62CE44A6-2AF7-43E6-BC73-7D359C6FD7ED}"/>
               </a:ext>
             </a:extLst>
           </p:cNvPr>
@@ -2320,7 +2428,7 @@
           <p:cNvPr id="3" name="Title">
             <a:extLst xmlns:a="http://schemas.openxmlformats.org/drawingml/2006/main">
               <a:ext uri="{FF2B5EF4-FFF2-40B4-BE49-F238E27FC236}">
-                <a16:creationId xmlns:a16="http://schemas.microsoft.com/office/drawing/2014/main" id="{14C33202-82B1-4F6A-8CFB-AB25D4F2EC8A}"/>
+                <a16:creationId xmlns:a16="http://schemas.microsoft.com/office/drawing/2014/main" id="{1CBE46C0-8A1B-4332-8C04-9F56E5B67FDB}"/>
               </a:ext>
             </a:extLst>
           </p:cNvPr>
@@ -2477,7 +2585,7 @@
           <p:cNvPr id="2" name="Left column">
             <a:extLst xmlns:a="http://schemas.openxmlformats.org/drawingml/2006/main">
               <a:ext uri="{FF2B5EF4-FFF2-40B4-BE49-F238E27FC236}">
-                <a16:creationId xmlns:a16="http://schemas.microsoft.com/office/drawing/2014/main" id="{AE4483B5-D2E5-44F9-9AEC-A8663A6A8C68}"/>
+                <a16:creationId xmlns:a16="http://schemas.microsoft.com/office/drawing/2014/main" id="{68FD1876-B446-46A3-991F-6FD7E435C1BB}"/>
               </a:ext>
             </a:extLst>
           </p:cNvPr>
@@ -2672,12 +2780,12 @@
   </p:cSld>
   <p:clrMap bg1="lt1" tx1="dk1" bg2="lt2" tx2="dk2" accent1="accent1" accent2="accent2" accent3="accent3" accent4="accent4" accent5="accent5" accent6="accent6" hlink="hlink" folHlink="folHlink"/>
   <p:sldLayoutIdLst>
-    <p:sldLayoutId xmlns:r="http://schemas.openxmlformats.org/officeDocument/2006/relationships" id="2147483649" r:id="R930449b2772148eb"/>
-    <p:sldLayoutId xmlns:r="http://schemas.openxmlformats.org/officeDocument/2006/relationships" id="2147483650" r:id="Rd4fe8d893df445fa"/>
-    <p:sldLayoutId xmlns:r="http://schemas.openxmlformats.org/officeDocument/2006/relationships" id="2147483651" r:id="R3f94f09c4cc24eb8"/>
-    <p:sldLayoutId xmlns:r="http://schemas.openxmlformats.org/officeDocument/2006/relationships" id="2147483652" r:id="R2ccaf08c017043d7"/>
-    <p:sldLayoutId xmlns:r="http://schemas.openxmlformats.org/officeDocument/2006/relationships" id="2147483653" r:id="R9f252efbc8f04842"/>
-    <p:sldLayoutId xmlns:r="http://schemas.openxmlformats.org/officeDocument/2006/relationships" id="2147483654" r:id="R3e044614711646af"/>
+    <p:sldLayoutId xmlns:r="http://schemas.openxmlformats.org/officeDocument/2006/relationships" id="2147483649" r:id="Rcbee40ce7de84947"/>
+    <p:sldLayoutId xmlns:r="http://schemas.openxmlformats.org/officeDocument/2006/relationships" id="2147483650" r:id="Re6b8b4761d0b45d7"/>
+    <p:sldLayoutId xmlns:r="http://schemas.openxmlformats.org/officeDocument/2006/relationships" id="2147483651" r:id="R11390447112e4fcc"/>
+    <p:sldLayoutId xmlns:r="http://schemas.openxmlformats.org/officeDocument/2006/relationships" id="2147483652" r:id="R1755882daf954b7b"/>
+    <p:sldLayoutId xmlns:r="http://schemas.openxmlformats.org/officeDocument/2006/relationships" id="2147483653" r:id="R8f342d6136d840a2"/>
+    <p:sldLayoutId xmlns:r="http://schemas.openxmlformats.org/officeDocument/2006/relationships" id="2147483654" r:id="Re2ec0d9b3b174254"/>
   </p:sldLayoutIdLst>
   <p:txStyles>
     <p:titleStyle>
@@ -3228,7 +3336,7 @@
           <p:cNvPr id="7" name="">
             <a:extLst xmlns:a="http://schemas.openxmlformats.org/drawingml/2006/main">
               <a:ext uri="{FF2B5EF4-FFF2-40B4-BE49-F238E27FC236}">
-                <a16:creationId xmlns:a16="http://schemas.microsoft.com/office/drawing/2014/main" id="{41D6B05B-B4F8-4922-9AE1-EE44066AD636}"/>
+                <a16:creationId xmlns:a16="http://schemas.microsoft.com/office/drawing/2014/main" id="{41447E2A-BD34-4234-B648-8DD32AB33AD3}"/>
               </a:ext>
             </a:extLst>
           </p:cNvPr>
@@ -3238,7 +3346,7 @@
           <p:nvPr/>
         </p:nvPicPr>
         <p:blipFill>
-          <a:blip xmlns:r="http://schemas.openxmlformats.org/officeDocument/2006/relationships" xmlns:a="http://schemas.openxmlformats.org/drawingml/2006/main" r:embed="Rcc2042434b464dee"/>
+          <a:blip xmlns:r="http://schemas.openxmlformats.org/officeDocument/2006/relationships" xmlns:a="http://schemas.openxmlformats.org/drawingml/2006/main" r:embed="R47a163051683434f"/>
           <a:stretch xmlns:a="http://schemas.openxmlformats.org/drawingml/2006/main"/>
         </p:blipFill>
         <p:spPr>
@@ -3256,7 +3364,7 @@
           <p:cNvPr id="2" name="">
             <a:extLst xmlns:a="http://schemas.openxmlformats.org/drawingml/2006/main">
               <a:ext uri="{FF2B5EF4-FFF2-40B4-BE49-F238E27FC236}">
-                <a16:creationId xmlns:a16="http://schemas.microsoft.com/office/drawing/2014/main" id="{06EA4A2F-48AD-47A8-92D3-1C9D25A4187B}"/>
+                <a16:creationId xmlns:a16="http://schemas.microsoft.com/office/drawing/2014/main" id="{CE7B3210-A2BD-4A08-AD99-8B7544ED3EFF}"/>
               </a:ext>
             </a:extLst>
           </p:cNvPr>
@@ -3267,8 +3375,8 @@
         </p:nvSpPr>
         <p:spPr>
           <a:xfrm xmlns:a="http://schemas.openxmlformats.org/drawingml/2006/main">
-            <a:off x="685800" y="2247900"/>
-            <a:ext cx="10820400" cy="685800"/>
+            <a:off x="685800" y="2209800"/>
+            <a:ext cx="10820400" cy="666750"/>
           </a:xfrm>
           <a:prstGeom xmlns:a="http://schemas.openxmlformats.org/drawingml/2006/main" prst="rect">
             <a:avLst/>
@@ -3285,7 +3393,7 @@
           </a:bodyPr>
           <a:lstStyle xmlns:a="http://schemas.openxmlformats.org/drawingml/2006/main">
             <a:defPPr>
-              <a:defRPr sz="4050" b="1">
+              <a:defRPr sz="3900" b="1">
                 <a:solidFill>
                   <a:srgbClr val="131A24"/>
                 </a:solidFill>
@@ -3297,7 +3405,7 @@
           </a:lstStyle>
           <a:p xmlns:a="http://schemas.openxmlformats.org/drawingml/2006/main">
             <a:pPr>
-              <a:defRPr sz="4050" b="1">
+              <a:defRPr sz="3900" b="1">
                 <a:solidFill>
                   <a:srgbClr val="131A24"/>
                 </a:solidFill>
@@ -3307,7 +3415,7 @@
               </a:defRPr>
             </a:pPr>
             <a:r>
-              <a:rPr sz="4050" b="1">
+              <a:rPr sz="3900" b="1">
                 <a:solidFill>
                   <a:srgbClr val="131A24"/>
                 </a:solidFill>
@@ -3325,7 +3433,7 @@
           <p:cNvPr id="3" name="">
             <a:extLst xmlns:a="http://schemas.openxmlformats.org/drawingml/2006/main">
               <a:ext uri="{FF2B5EF4-FFF2-40B4-BE49-F238E27FC236}">
-                <a16:creationId xmlns:a16="http://schemas.microsoft.com/office/drawing/2014/main" id="{2DFF1BD3-2081-4EA1-8E52-7B55D39091DD}"/>
+                <a16:creationId xmlns:a16="http://schemas.microsoft.com/office/drawing/2014/main" id="{FB0029A7-A8DB-4088-A41A-8F7173791542}"/>
               </a:ext>
             </a:extLst>
           </p:cNvPr>
@@ -3336,8 +3444,8 @@
         </p:nvSpPr>
         <p:spPr>
           <a:xfrm xmlns:a="http://schemas.openxmlformats.org/drawingml/2006/main">
-            <a:off x="685800" y="3009900"/>
-            <a:ext cx="9334500" cy="381000"/>
+            <a:off x="685800" y="2933700"/>
+            <a:ext cx="9525000" cy="381000"/>
           </a:xfrm>
           <a:prstGeom xmlns:a="http://schemas.openxmlformats.org/drawingml/2006/main" prst="rect">
             <a:avLst/>
@@ -3354,7 +3462,7 @@
           </a:bodyPr>
           <a:lstStyle xmlns:a="http://schemas.openxmlformats.org/drawingml/2006/main">
             <a:defPPr>
-              <a:defRPr sz="1725" b="0">
+              <a:defRPr sz="1650" b="0">
                 <a:solidFill>
                   <a:srgbClr val="52606F"/>
                 </a:solidFill>
@@ -3366,7 +3474,7 @@
           </a:lstStyle>
           <a:p xmlns:a="http://schemas.openxmlformats.org/drawingml/2006/main">
             <a:pPr>
-              <a:defRPr sz="1725" b="0">
+              <a:defRPr sz="1650" b="0">
                 <a:solidFill>
                   <a:srgbClr val="52606F"/>
                 </a:solidFill>
@@ -3376,7 +3484,7 @@
               </a:defRPr>
             </a:pPr>
             <a:r>
-              <a:rPr sz="1725" b="0">
+              <a:rPr sz="1650" b="0">
                 <a:solidFill>
                   <a:srgbClr val="52606F"/>
                 </a:solidFill>
@@ -3384,7 +3492,7 @@
                 <a:ea typeface="Arial"/>
                 <a:cs typeface="Arial"/>
               </a:rPr>
-              <a:t>Intelligent Food Rescue Coordination and Resource Allocation Platform</a:t>
+              <a:t>An Intelligent Food Rescue Coordination and Resource Allocation Platform</a:t>
             </a:r>
           </a:p>
         </p:txBody>
@@ -3394,7 +3502,7 @@
           <p:cNvPr id="4" name="">
             <a:extLst xmlns:a="http://schemas.openxmlformats.org/drawingml/2006/main">
               <a:ext uri="{FF2B5EF4-FFF2-40B4-BE49-F238E27FC236}">
-                <a16:creationId xmlns:a16="http://schemas.microsoft.com/office/drawing/2014/main" id="{E38863A7-6AF2-406D-86A0-87207F528D40}"/>
+                <a16:creationId xmlns:a16="http://schemas.microsoft.com/office/drawing/2014/main" id="{4C995206-7948-4D52-BEB1-5A358BD4839C}"/>
               </a:ext>
             </a:extLst>
           </p:cNvPr>
@@ -3405,7 +3513,7 @@
         </p:nvSpPr>
         <p:spPr>
           <a:xfrm xmlns:a="http://schemas.openxmlformats.org/drawingml/2006/main">
-            <a:off x="685800" y="3695700"/>
+            <a:off x="685800" y="3619500"/>
             <a:ext cx="2857500" cy="19050"/>
           </a:xfrm>
           <a:prstGeom xmlns:a="http://schemas.openxmlformats.org/drawingml/2006/main" prst="rect">
@@ -3425,7 +3533,7 @@
           <p:cNvPr id="5" name="">
             <a:extLst xmlns:a="http://schemas.openxmlformats.org/drawingml/2006/main">
               <a:ext uri="{FF2B5EF4-FFF2-40B4-BE49-F238E27FC236}">
-                <a16:creationId xmlns:a16="http://schemas.microsoft.com/office/drawing/2014/main" id="{8A094B69-97D5-4DF4-9193-D6DF988CEA7E}"/>
+                <a16:creationId xmlns:a16="http://schemas.microsoft.com/office/drawing/2014/main" id="{27598159-8E5F-4479-A90D-23CB897E27FB}"/>
               </a:ext>
             </a:extLst>
           </p:cNvPr>
@@ -3436,7 +3544,7 @@
         </p:nvSpPr>
         <p:spPr>
           <a:xfrm xmlns:a="http://schemas.openxmlformats.org/drawingml/2006/main">
-            <a:off x="685800" y="3905250"/>
+            <a:off x="685800" y="3829050"/>
             <a:ext cx="10820400" cy="266700"/>
           </a:xfrm>
           <a:prstGeom xmlns:a="http://schemas.openxmlformats.org/drawingml/2006/main" prst="rect">
@@ -3454,7 +3562,7 @@
           </a:bodyPr>
           <a:lstStyle xmlns:a="http://schemas.openxmlformats.org/drawingml/2006/main">
             <a:defPPr>
-              <a:defRPr sz="1350" b="0">
+              <a:defRPr sz="1275" b="0">
                 <a:solidFill>
                   <a:srgbClr val="8A94A3"/>
                 </a:solidFill>
@@ -3466,7 +3574,7 @@
           </a:lstStyle>
           <a:p xmlns:a="http://schemas.openxmlformats.org/drawingml/2006/main">
             <a:pPr>
-              <a:defRPr sz="1350" b="0">
+              <a:defRPr sz="1275" b="0">
                 <a:solidFill>
                   <a:srgbClr val="8A94A3"/>
                 </a:solidFill>
@@ -3476,7 +3584,7 @@
               </a:defRPr>
             </a:pPr>
             <a:r>
-              <a:rPr sz="1350" b="0">
+              <a:rPr sz="1275" b="0">
                 <a:solidFill>
                   <a:srgbClr val="8A94A3"/>
                 </a:solidFill>
@@ -3484,7 +3592,7 @@
                 <a:ea typeface="Arial"/>
                 <a:cs typeface="Arial"/>
               </a:rPr>
-              <a:t>Project review</a:t>
+              <a:t>Software Engineering Laboratory · Project Review</a:t>
             </a:r>
           </a:p>
         </p:txBody>
@@ -3494,7 +3602,7 @@
           <p:cNvPr id="6" name="">
             <a:extLst xmlns:a="http://schemas.openxmlformats.org/drawingml/2006/main">
               <a:ext uri="{FF2B5EF4-FFF2-40B4-BE49-F238E27FC236}">
-                <a16:creationId xmlns:a16="http://schemas.microsoft.com/office/drawing/2014/main" id="{59AF71BC-4238-4549-B605-7E2C1579F1B2}"/>
+                <a16:creationId xmlns:a16="http://schemas.microsoft.com/office/drawing/2014/main" id="{2B4777DE-E874-4CB3-9A81-E9B175F21C8C}"/>
               </a:ext>
             </a:extLst>
           </p:cNvPr>
@@ -3505,7 +3613,7 @@
         </p:nvSpPr>
         <p:spPr>
           <a:xfrm xmlns:a="http://schemas.openxmlformats.org/drawingml/2006/main">
-            <a:off x="685800" y="4191000"/>
+            <a:off x="685800" y="4114800"/>
             <a:ext cx="10820400" cy="304800"/>
           </a:xfrm>
           <a:prstGeom xmlns:a="http://schemas.openxmlformats.org/drawingml/2006/main" prst="rect">
@@ -3523,7 +3631,7 @@
           </a:bodyPr>
           <a:lstStyle xmlns:a="http://schemas.openxmlformats.org/drawingml/2006/main">
             <a:defPPr>
-              <a:defRPr sz="1650" b="1">
+              <a:defRPr sz="1575" b="1">
                 <a:solidFill>
                   <a:srgbClr val="131A24"/>
                 </a:solidFill>
@@ -3535,7 +3643,7 @@
           </a:lstStyle>
           <a:p xmlns:a="http://schemas.openxmlformats.org/drawingml/2006/main">
             <a:pPr>
-              <a:defRPr sz="1650" b="1">
+              <a:defRPr sz="1575" b="1">
                 <a:solidFill>
                   <a:srgbClr val="131A24"/>
                 </a:solidFill>
@@ -3545,7 +3653,7 @@
               </a:defRPr>
             </a:pPr>
             <a:r>
-              <a:rPr sz="1650" b="1">
+              <a:rPr sz="1575" b="1">
                 <a:solidFill>
                   <a:srgbClr val="131A24"/>
                 </a:solidFill>
@@ -3553,7 +3661,7 @@
                 <a:ea typeface="Arial"/>
                 <a:cs typeface="Arial"/>
               </a:rPr>
-              <a:t>Adithyan S Nair, 24BAI1621</a:t>
+              <a:t>Adithyan S Nair · Register number 24BAI1621</a:t>
             </a:r>
           </a:p>
         </p:txBody>
@@ -3561,7 +3669,651 @@
     </p:spTree>
     <p:extLst>
       <p:ext uri="{BB962C8B-B14F-4D97-AF65-F5344CB8AC3E}">
-        <p14:creationId xmlns:p14="http://schemas.microsoft.com/office/powerpoint/2010/main" val="689663540"/>
+        <p14:creationId xmlns:p14="http://schemas.microsoft.com/office/powerpoint/2010/main" val="834215799"/>
+      </p:ext>
+    </p:extLst>
+  </p:cSld>
+</p:sld>
+</file>
+
+<file path=ppt/slides/slide10.xml><?xml version="1.0" encoding="utf-8"?>
+<p:sld xmlns:p="http://schemas.openxmlformats.org/presentationml/2006/main">
+  <p:cSld>
+    <p:bg>
+      <p:bgPr>
+        <a:solidFill xmlns:a="http://schemas.openxmlformats.org/drawingml/2006/main">
+          <a:srgbClr val="FFFFFF"/>
+        </a:solidFill>
+      </p:bgPr>
+    </p:bg>
+    <p:spTree>
+      <p:nvGrpSpPr>
+        <p:cNvPr id="1" name=""/>
+        <p:cNvGrpSpPr/>
+        <p:nvPr/>
+      </p:nvGrpSpPr>
+      <p:grpSpPr>
+        <a:xfrm xmlns:a="http://schemas.openxmlformats.org/drawingml/2006/main"/>
+      </p:grpSpPr>
+      <p:sp>
+        <p:nvSpPr>
+          <p:cNvPr id="8" name="slide-title">
+            <a:extLst xmlns:a="http://schemas.openxmlformats.org/drawingml/2006/main">
+              <a:ext uri="{FF2B5EF4-FFF2-40B4-BE49-F238E27FC236}">
+                <a16:creationId xmlns:a16="http://schemas.microsoft.com/office/drawing/2014/main" id="{CADFF864-8CBD-4879-AC33-4336B4973314}"/>
+              </a:ext>
+            </a:extLst>
+          </p:cNvPr>
+          <p:cNvSpPr>
+            <a:spLocks xmlns:a="http://schemas.openxmlformats.org/drawingml/2006/main" noGrp="1"/>
+          </p:cNvSpPr>
+          <p:nvPr/>
+        </p:nvSpPr>
+        <p:spPr>
+          <a:xfrm xmlns:a="http://schemas.openxmlformats.org/drawingml/2006/main">
+            <a:off x="685800" y="495300"/>
+            <a:ext cx="10820400" cy="514350"/>
+          </a:xfrm>
+          <a:prstGeom xmlns:a="http://schemas.openxmlformats.org/drawingml/2006/main" prst="rect">
+            <a:avLst/>
+          </a:prstGeom>
+          <a:noFill xmlns:a="http://schemas.openxmlformats.org/drawingml/2006/main"/>
+          <a:ln xmlns:a="http://schemas.openxmlformats.org/drawingml/2006/main" w="0">
+            <a:noFill/>
+            <a:prstDash val="solid"/>
+          </a:ln>
+        </p:spPr>
+        <p:txBody>
+          <a:bodyPr xmlns:a="http://schemas.openxmlformats.org/drawingml/2006/main">
+            <a:noAutofit/>
+          </a:bodyPr>
+          <a:lstStyle xmlns:a="http://schemas.openxmlformats.org/drawingml/2006/main">
+            <a:defPPr>
+              <a:defRPr sz="3000" b="1">
+                <a:solidFill>
+                  <a:srgbClr val="131A24"/>
+                </a:solidFill>
+                <a:latin typeface="Arial"/>
+                <a:ea typeface="Arial"/>
+                <a:cs typeface="Arial"/>
+              </a:defRPr>
+            </a:defPPr>
+          </a:lstStyle>
+          <a:p xmlns:a="http://schemas.openxmlformats.org/drawingml/2006/main">
+            <a:pPr>
+              <a:defRPr sz="3000" b="1">
+                <a:solidFill>
+                  <a:srgbClr val="131A24"/>
+                </a:solidFill>
+                <a:latin typeface="Arial"/>
+                <a:ea typeface="Arial"/>
+                <a:cs typeface="Arial"/>
+              </a:defRPr>
+            </a:pPr>
+            <a:r>
+              <a:rPr sz="3000" b="1">
+                <a:solidFill>
+                  <a:srgbClr val="131A24"/>
+                </a:solidFill>
+                <a:latin typeface="Arial"/>
+                <a:ea typeface="Arial"/>
+                <a:cs typeface="Arial"/>
+              </a:rPr>
+              <a:t>Limitations and future work</a:t>
+            </a:r>
+          </a:p>
+        </p:txBody>
+      </p:sp>
+      <p:sp>
+        <p:nvSpPr>
+          <p:cNvPr id="2" name="slide-lead">
+            <a:extLst xmlns:a="http://schemas.openxmlformats.org/drawingml/2006/main">
+              <a:ext uri="{FF2B5EF4-FFF2-40B4-BE49-F238E27FC236}">
+                <a16:creationId xmlns:a16="http://schemas.microsoft.com/office/drawing/2014/main" id="{9EAD16F7-0BBA-474B-9938-AD2D017AE82F}"/>
+              </a:ext>
+            </a:extLst>
+          </p:cNvPr>
+          <p:cNvSpPr>
+            <a:spLocks xmlns:a="http://schemas.openxmlformats.org/drawingml/2006/main" noGrp="1"/>
+          </p:cNvSpPr>
+          <p:nvPr/>
+        </p:nvSpPr>
+        <p:spPr>
+          <a:xfrm xmlns:a="http://schemas.openxmlformats.org/drawingml/2006/main">
+            <a:off x="685800" y="1066800"/>
+            <a:ext cx="10820400" cy="323850"/>
+          </a:xfrm>
+          <a:prstGeom xmlns:a="http://schemas.openxmlformats.org/drawingml/2006/main" prst="rect">
+            <a:avLst/>
+          </a:prstGeom>
+          <a:noFill xmlns:a="http://schemas.openxmlformats.org/drawingml/2006/main"/>
+          <a:ln xmlns:a="http://schemas.openxmlformats.org/drawingml/2006/main" w="0">
+            <a:noFill/>
+            <a:prstDash val="solid"/>
+          </a:ln>
+        </p:spPr>
+        <p:txBody>
+          <a:bodyPr xmlns:a="http://schemas.openxmlformats.org/drawingml/2006/main">
+            <a:noAutofit/>
+          </a:bodyPr>
+          <a:lstStyle xmlns:a="http://schemas.openxmlformats.org/drawingml/2006/main">
+            <a:defPPr>
+              <a:defRPr sz="1575" b="0">
+                <a:solidFill>
+                  <a:srgbClr val="52606F"/>
+                </a:solidFill>
+                <a:latin typeface="Arial"/>
+                <a:ea typeface="Arial"/>
+                <a:cs typeface="Arial"/>
+              </a:defRPr>
+            </a:defPPr>
+          </a:lstStyle>
+          <a:p xmlns:a="http://schemas.openxmlformats.org/drawingml/2006/main">
+            <a:pPr>
+              <a:defRPr sz="1575" b="0">
+                <a:solidFill>
+                  <a:srgbClr val="52606F"/>
+                </a:solidFill>
+                <a:latin typeface="Arial"/>
+                <a:ea typeface="Arial"/>
+                <a:cs typeface="Arial"/>
+              </a:defRPr>
+            </a:pPr>
+            <a:r>
+              <a:rPr sz="1575" b="0">
+                <a:solidFill>
+                  <a:srgbClr val="52606F"/>
+                </a:solidFill>
+                <a:latin typeface="Arial"/>
+                <a:ea typeface="Arial"/>
+                <a:cs typeface="Arial"/>
+              </a:rPr>
+              <a:t>Stated explicitly, with the corresponding improvement for each limitation.</a:t>
+            </a:r>
+          </a:p>
+        </p:txBody>
+      </p:sp>
+      <p:sp>
+        <p:nvSpPr>
+          <p:cNvPr id="3" name="title-rule">
+            <a:extLst xmlns:a="http://schemas.openxmlformats.org/drawingml/2006/main">
+              <a:ext uri="{FF2B5EF4-FFF2-40B4-BE49-F238E27FC236}">
+                <a16:creationId xmlns:a16="http://schemas.microsoft.com/office/drawing/2014/main" id="{D285418A-22D7-411D-BCF8-F6C46E157555}"/>
+              </a:ext>
+            </a:extLst>
+          </p:cNvPr>
+          <p:cNvSpPr>
+            <a:spLocks xmlns:a="http://schemas.openxmlformats.org/drawingml/2006/main" noGrp="1"/>
+          </p:cNvSpPr>
+          <p:nvPr/>
+        </p:nvSpPr>
+        <p:spPr>
+          <a:xfrm xmlns:a="http://schemas.openxmlformats.org/drawingml/2006/main">
+            <a:off x="685800" y="1504950"/>
+            <a:ext cx="10820400" cy="9525"/>
+          </a:xfrm>
+          <a:prstGeom xmlns:a="http://schemas.openxmlformats.org/drawingml/2006/main" prst="rect">
+            <a:avLst/>
+          </a:prstGeom>
+          <a:solidFill xmlns:a="http://schemas.openxmlformats.org/drawingml/2006/main">
+            <a:srgbClr val="E1E5EA"/>
+          </a:solidFill>
+          <a:ln xmlns:a="http://schemas.openxmlformats.org/drawingml/2006/main" w="0">
+            <a:noFill/>
+            <a:prstDash val="solid"/>
+          </a:ln>
+        </p:spPr>
+      </p:sp>
+      <p:sp>
+        <p:nvSpPr>
+          <p:cNvPr id="4" name="">
+            <a:extLst xmlns:a="http://schemas.openxmlformats.org/drawingml/2006/main">
+              <a:ext uri="{FF2B5EF4-FFF2-40B4-BE49-F238E27FC236}">
+                <a16:creationId xmlns:a16="http://schemas.microsoft.com/office/drawing/2014/main" id="{8738FD18-F3E5-4B18-9D5E-679078B0B2C1}"/>
+              </a:ext>
+            </a:extLst>
+          </p:cNvPr>
+          <p:cNvSpPr>
+            <a:spLocks xmlns:a="http://schemas.openxmlformats.org/drawingml/2006/main" noGrp="1"/>
+          </p:cNvSpPr>
+          <p:nvPr/>
+        </p:nvSpPr>
+        <p:spPr>
+          <a:xfrm xmlns:a="http://schemas.openxmlformats.org/drawingml/2006/main">
+            <a:off x="685800" y="1771650"/>
+            <a:ext cx="10820400" cy="266700"/>
+          </a:xfrm>
+          <a:prstGeom xmlns:a="http://schemas.openxmlformats.org/drawingml/2006/main" prst="rect">
+            <a:avLst/>
+          </a:prstGeom>
+          <a:noFill xmlns:a="http://schemas.openxmlformats.org/drawingml/2006/main"/>
+          <a:ln xmlns:a="http://schemas.openxmlformats.org/drawingml/2006/main" w="0">
+            <a:noFill/>
+            <a:prstDash val="solid"/>
+          </a:ln>
+        </p:spPr>
+        <p:txBody>
+          <a:bodyPr xmlns:a="http://schemas.openxmlformats.org/drawingml/2006/main">
+            <a:noAutofit/>
+          </a:bodyPr>
+          <a:lstStyle xmlns:a="http://schemas.openxmlformats.org/drawingml/2006/main">
+            <a:defPPr>
+              <a:defRPr sz="1275" b="1">
+                <a:solidFill>
+                  <a:srgbClr val="131A24"/>
+                </a:solidFill>
+                <a:latin typeface="Arial"/>
+                <a:ea typeface="Arial"/>
+                <a:cs typeface="Arial"/>
+              </a:defRPr>
+            </a:defPPr>
+          </a:lstStyle>
+          <a:p xmlns:a="http://schemas.openxmlformats.org/drawingml/2006/main">
+            <a:pPr>
+              <a:defRPr sz="1275" b="1">
+                <a:solidFill>
+                  <a:srgbClr val="131A24"/>
+                </a:solidFill>
+                <a:latin typeface="Arial"/>
+                <a:ea typeface="Arial"/>
+                <a:cs typeface="Arial"/>
+              </a:defRPr>
+            </a:pPr>
+            <a:r>
+              <a:rPr sz="1275" b="1">
+                <a:solidFill>
+                  <a:srgbClr val="131A24"/>
+                </a:solidFill>
+                <a:latin typeface="Arial"/>
+                <a:ea typeface="Arial"/>
+                <a:cs typeface="Arial"/>
+              </a:rPr>
+              <a:t>Limitations</a:t>
+            </a:r>
+          </a:p>
+        </p:txBody>
+      </p:sp>
+      <p:sp>
+        <p:nvSpPr>
+          <p:cNvPr id="5" name="">
+            <a:extLst xmlns:a="http://schemas.openxmlformats.org/drawingml/2006/main">
+              <a:ext uri="{FF2B5EF4-FFF2-40B4-BE49-F238E27FC236}">
+                <a16:creationId xmlns:a16="http://schemas.microsoft.com/office/drawing/2014/main" id="{9CFB7D00-7236-422E-9E6A-D31211A75ED3}"/>
+              </a:ext>
+            </a:extLst>
+          </p:cNvPr>
+          <p:cNvSpPr>
+            <a:spLocks xmlns:a="http://schemas.openxmlformats.org/drawingml/2006/main" noGrp="1"/>
+          </p:cNvSpPr>
+          <p:nvPr/>
+        </p:nvSpPr>
+        <p:spPr>
+          <a:xfrm xmlns:a="http://schemas.openxmlformats.org/drawingml/2006/main">
+            <a:off x="685800" y="2133600"/>
+            <a:ext cx="4953000" cy="3619500"/>
+          </a:xfrm>
+          <a:prstGeom xmlns:a="http://schemas.openxmlformats.org/drawingml/2006/main" prst="rect">
+            <a:avLst/>
+          </a:prstGeom>
+          <a:noFill xmlns:a="http://schemas.openxmlformats.org/drawingml/2006/main"/>
+          <a:ln xmlns:a="http://schemas.openxmlformats.org/drawingml/2006/main" w="0">
+            <a:noFill/>
+            <a:prstDash val="solid"/>
+          </a:ln>
+        </p:spPr>
+        <p:txBody>
+          <a:bodyPr xmlns:a="http://schemas.openxmlformats.org/drawingml/2006/main">
+            <a:noAutofit/>
+          </a:bodyPr>
+          <a:lstStyle xmlns:a="http://schemas.openxmlformats.org/drawingml/2006/main">
+            <a:defPPr>
+              <a:defRPr sz="1275">
+                <a:solidFill>
+                  <a:srgbClr val="131A24"/>
+                </a:solidFill>
+                <a:latin typeface="Arial"/>
+                <a:ea typeface="Arial"/>
+                <a:cs typeface="Arial"/>
+              </a:defRPr>
+            </a:defPPr>
+          </a:lstStyle>
+          <a:p xmlns:a="http://schemas.openxmlformats.org/drawingml/2006/main">
+            <a:pPr marL="228600" indent="-114300">
+              <a:spcAft>
+                <a:spcPts val="1600"/>
+              </a:spcAft>
+              <a:buChar char="•"/>
+              <a:defRPr sz="1275">
+                <a:solidFill>
+                  <a:srgbClr val="131A24"/>
+                </a:solidFill>
+                <a:latin typeface="Arial"/>
+                <a:ea typeface="Arial"/>
+                <a:cs typeface="Arial"/>
+              </a:defRPr>
+            </a:pPr>
+            <a:r>
+              <a:rPr sz="1275">
+                <a:solidFill>
+                  <a:srgbClr val="131A24"/>
+                </a:solidFill>
+                <a:latin typeface="Arial"/>
+                <a:ea typeface="Arial"/>
+                <a:cs typeface="Arial"/>
+              </a:rPr>
+              <a:t>Distances are calculated as straight lines; road routing and live traffic are not included.</a:t>
+            </a:r>
+          </a:p>
+          <a:p xmlns:a="http://schemas.openxmlformats.org/drawingml/2006/main">
+            <a:pPr marL="228600" indent="-114300">
+              <a:spcAft>
+                <a:spcPts val="1600"/>
+              </a:spcAft>
+              <a:buChar char="•"/>
+              <a:defRPr sz="1275">
+                <a:solidFill>
+                  <a:srgbClr val="131A24"/>
+                </a:solidFill>
+                <a:latin typeface="Arial"/>
+                <a:ea typeface="Arial"/>
+                <a:cs typeface="Arial"/>
+              </a:defRPr>
+            </a:pPr>
+            <a:r>
+              <a:rPr sz="1275">
+                <a:solidFill>
+                  <a:srgbClr val="131A24"/>
+                </a:solidFill>
+                <a:latin typeface="Arial"/>
+                <a:ea typeface="Arial"/>
+                <a:cs typeface="Arial"/>
+              </a:rPr>
+              <a:t>A single average travel speed is applied to all volunteers.</a:t>
+            </a:r>
+          </a:p>
+          <a:p xmlns:a="http://schemas.openxmlformats.org/drawingml/2006/main">
+            <a:pPr marL="228600" indent="-114300">
+              <a:spcAft>
+                <a:spcPts val="1600"/>
+              </a:spcAft>
+              <a:buChar char="•"/>
+              <a:defRPr sz="1275">
+                <a:solidFill>
+                  <a:srgbClr val="131A24"/>
+                </a:solidFill>
+                <a:latin typeface="Arial"/>
+                <a:ea typeface="Arial"/>
+                <a:cs typeface="Arial"/>
+              </a:defRPr>
+            </a:pPr>
+            <a:r>
+              <a:rPr sz="1275">
+                <a:solidFill>
+                  <a:srgbClr val="131A24"/>
+                </a:solidFill>
+                <a:latin typeface="Arial"/>
+                <a:ea typeface="Arial"/>
+                <a:cs typeface="Arial"/>
+              </a:rPr>
+              <a:t>Locations are stored as coordinates; there is no map input or address lookup.</a:t>
+            </a:r>
+          </a:p>
+          <a:p xmlns:a="http://schemas.openxmlformats.org/drawingml/2006/main">
+            <a:pPr marL="228600" indent="-114300">
+              <a:spcAft>
+                <a:spcPts val="1600"/>
+              </a:spcAft>
+              <a:buChar char="•"/>
+              <a:defRPr sz="1275">
+                <a:solidFill>
+                  <a:srgbClr val="131A24"/>
+                </a:solidFill>
+                <a:latin typeface="Arial"/>
+                <a:ea typeface="Arial"/>
+                <a:cs typeface="Arial"/>
+              </a:defRPr>
+            </a:pPr>
+            <a:r>
+              <a:rPr sz="1275">
+                <a:solidFill>
+                  <a:srgbClr val="131A24"/>
+                </a:solidFill>
+                <a:latin typeface="Arial"/>
+                <a:ea typeface="Arial"/>
+                <a:cs typeface="Arial"/>
+              </a:rPr>
+              <a:t>Delivery tracking records status changes only; GPS positions are not streamed.</a:t>
+            </a:r>
+          </a:p>
+        </p:txBody>
+      </p:sp>
+      <p:sp>
+        <p:nvSpPr>
+          <p:cNvPr id="6" name="">
+            <a:extLst xmlns:a="http://schemas.openxmlformats.org/drawingml/2006/main">
+              <a:ext uri="{FF2B5EF4-FFF2-40B4-BE49-F238E27FC236}">
+                <a16:creationId xmlns:a16="http://schemas.microsoft.com/office/drawing/2014/main" id="{C1E6D0D4-AF7E-4141-B6AF-5DFBACBDD992}"/>
+              </a:ext>
+            </a:extLst>
+          </p:cNvPr>
+          <p:cNvSpPr>
+            <a:spLocks xmlns:a="http://schemas.openxmlformats.org/drawingml/2006/main" noGrp="1"/>
+          </p:cNvSpPr>
+          <p:nvPr/>
+        </p:nvSpPr>
+        <p:spPr>
+          <a:xfrm xmlns:a="http://schemas.openxmlformats.org/drawingml/2006/main">
+            <a:off x="6477000" y="1771650"/>
+            <a:ext cx="5029200" cy="266700"/>
+          </a:xfrm>
+          <a:prstGeom xmlns:a="http://schemas.openxmlformats.org/drawingml/2006/main" prst="rect">
+            <a:avLst/>
+          </a:prstGeom>
+          <a:noFill xmlns:a="http://schemas.openxmlformats.org/drawingml/2006/main"/>
+          <a:ln xmlns:a="http://schemas.openxmlformats.org/drawingml/2006/main" w="0">
+            <a:noFill/>
+            <a:prstDash val="solid"/>
+          </a:ln>
+        </p:spPr>
+        <p:txBody>
+          <a:bodyPr xmlns:a="http://schemas.openxmlformats.org/drawingml/2006/main">
+            <a:noAutofit/>
+          </a:bodyPr>
+          <a:lstStyle xmlns:a="http://schemas.openxmlformats.org/drawingml/2006/main">
+            <a:defPPr>
+              <a:defRPr sz="1275" b="1">
+                <a:solidFill>
+                  <a:srgbClr val="131A24"/>
+                </a:solidFill>
+                <a:latin typeface="Arial"/>
+                <a:ea typeface="Arial"/>
+                <a:cs typeface="Arial"/>
+              </a:defRPr>
+            </a:defPPr>
+          </a:lstStyle>
+          <a:p xmlns:a="http://schemas.openxmlformats.org/drawingml/2006/main">
+            <a:pPr>
+              <a:defRPr sz="1275" b="1">
+                <a:solidFill>
+                  <a:srgbClr val="131A24"/>
+                </a:solidFill>
+                <a:latin typeface="Arial"/>
+                <a:ea typeface="Arial"/>
+                <a:cs typeface="Arial"/>
+              </a:defRPr>
+            </a:pPr>
+            <a:r>
+              <a:rPr sz="1275" b="1">
+                <a:solidFill>
+                  <a:srgbClr val="131A24"/>
+                </a:solidFill>
+                <a:latin typeface="Arial"/>
+                <a:ea typeface="Arial"/>
+                <a:cs typeface="Arial"/>
+              </a:rPr>
+              <a:t>Future work</a:t>
+            </a:r>
+          </a:p>
+        </p:txBody>
+      </p:sp>
+      <p:sp>
+        <p:nvSpPr>
+          <p:cNvPr id="7" name="">
+            <a:extLst xmlns:a="http://schemas.openxmlformats.org/drawingml/2006/main">
+              <a:ext uri="{FF2B5EF4-FFF2-40B4-BE49-F238E27FC236}">
+                <a16:creationId xmlns:a16="http://schemas.microsoft.com/office/drawing/2014/main" id="{B52F5FF0-BD49-4B6B-B16D-C349AE52EFC1}"/>
+              </a:ext>
+            </a:extLst>
+          </p:cNvPr>
+          <p:cNvSpPr>
+            <a:spLocks xmlns:a="http://schemas.openxmlformats.org/drawingml/2006/main" noGrp="1"/>
+          </p:cNvSpPr>
+          <p:nvPr/>
+        </p:nvSpPr>
+        <p:spPr>
+          <a:xfrm xmlns:a="http://schemas.openxmlformats.org/drawingml/2006/main">
+            <a:off x="6477000" y="2133600"/>
+            <a:ext cx="5029200" cy="3619500"/>
+          </a:xfrm>
+          <a:prstGeom xmlns:a="http://schemas.openxmlformats.org/drawingml/2006/main" prst="rect">
+            <a:avLst/>
+          </a:prstGeom>
+          <a:noFill xmlns:a="http://schemas.openxmlformats.org/drawingml/2006/main"/>
+          <a:ln xmlns:a="http://schemas.openxmlformats.org/drawingml/2006/main" w="0">
+            <a:noFill/>
+            <a:prstDash val="solid"/>
+          </a:ln>
+        </p:spPr>
+        <p:txBody>
+          <a:bodyPr xmlns:a="http://schemas.openxmlformats.org/drawingml/2006/main">
+            <a:noAutofit/>
+          </a:bodyPr>
+          <a:lstStyle xmlns:a="http://schemas.openxmlformats.org/drawingml/2006/main">
+            <a:defPPr>
+              <a:defRPr sz="1275">
+                <a:solidFill>
+                  <a:srgbClr val="131A24"/>
+                </a:solidFill>
+                <a:latin typeface="Arial"/>
+                <a:ea typeface="Arial"/>
+                <a:cs typeface="Arial"/>
+              </a:defRPr>
+            </a:defPPr>
+          </a:lstStyle>
+          <a:p xmlns:a="http://schemas.openxmlformats.org/drawingml/2006/main">
+            <a:pPr marL="228600" indent="-114300">
+              <a:spcAft>
+                <a:spcPts val="1600"/>
+              </a:spcAft>
+              <a:buChar char="•"/>
+              <a:defRPr sz="1275">
+                <a:solidFill>
+                  <a:srgbClr val="131A24"/>
+                </a:solidFill>
+                <a:latin typeface="Arial"/>
+                <a:ea typeface="Arial"/>
+                <a:cs typeface="Arial"/>
+              </a:defRPr>
+            </a:pPr>
+            <a:r>
+              <a:rPr sz="1275">
+                <a:solidFill>
+                  <a:srgbClr val="131A24"/>
+                </a:solidFill>
+                <a:latin typeface="Arial"/>
+                <a:ea typeface="Arial"/>
+                <a:cs typeface="Arial"/>
+              </a:rPr>
+              <a:t>Route aware arrival estimates using a mapping service.</a:t>
+            </a:r>
+          </a:p>
+          <a:p xmlns:a="http://schemas.openxmlformats.org/drawingml/2006/main">
+            <a:pPr marL="228600" indent="-114300">
+              <a:spcAft>
+                <a:spcPts val="1600"/>
+              </a:spcAft>
+              <a:buChar char="•"/>
+              <a:defRPr sz="1275">
+                <a:solidFill>
+                  <a:srgbClr val="131A24"/>
+                </a:solidFill>
+                <a:latin typeface="Arial"/>
+                <a:ea typeface="Arial"/>
+                <a:cs typeface="Arial"/>
+              </a:defRPr>
+            </a:pPr>
+            <a:r>
+              <a:rPr sz="1275">
+                <a:solidFill>
+                  <a:srgbClr val="131A24"/>
+                </a:solidFill>
+                <a:latin typeface="Arial"/>
+                <a:ea typeface="Arial"/>
+                <a:cs typeface="Arial"/>
+              </a:rPr>
+              <a:t>Map based location entry and per vehicle travel speeds.</a:t>
+            </a:r>
+          </a:p>
+          <a:p xmlns:a="http://schemas.openxmlformats.org/drawingml/2006/main">
+            <a:pPr marL="228600" indent="-114300">
+              <a:spcAft>
+                <a:spcPts val="1600"/>
+              </a:spcAft>
+              <a:buChar char="•"/>
+              <a:defRPr sz="1275">
+                <a:solidFill>
+                  <a:srgbClr val="131A24"/>
+                </a:solidFill>
+                <a:latin typeface="Arial"/>
+                <a:ea typeface="Arial"/>
+                <a:cs typeface="Arial"/>
+              </a:defRPr>
+            </a:pPr>
+            <a:r>
+              <a:rPr sz="1275">
+                <a:solidFill>
+                  <a:srgbClr val="131A24"/>
+                </a:solidFill>
+                <a:latin typeface="Arial"/>
+                <a:ea typeface="Arial"/>
+                <a:cs typeface="Arial"/>
+              </a:rPr>
+              <a:t>A reliability score for volunteers derived from accept, decline and completion history.</a:t>
+            </a:r>
+          </a:p>
+          <a:p xmlns:a="http://schemas.openxmlformats.org/drawingml/2006/main">
+            <a:pPr marL="228600" indent="-114300">
+              <a:spcAft>
+                <a:spcPts val="1600"/>
+              </a:spcAft>
+              <a:buChar char="•"/>
+              <a:defRPr sz="1275">
+                <a:solidFill>
+                  <a:srgbClr val="131A24"/>
+                </a:solidFill>
+                <a:latin typeface="Arial"/>
+                <a:ea typeface="Arial"/>
+                <a:cs typeface="Arial"/>
+              </a:defRPr>
+            </a:pPr>
+            <a:r>
+              <a:rPr sz="1275">
+                <a:solidFill>
+                  <a:srgbClr val="131A24"/>
+                </a:solidFill>
+                <a:latin typeface="Arial"/>
+                <a:ea typeface="Arial"/>
+                <a:cs typeface="Arial"/>
+              </a:rPr>
+              <a:t>Deployment, and SMS or WhatsApp notifications for organizations that do not use the application.</a:t>
+            </a:r>
+          </a:p>
+        </p:txBody>
+      </p:sp>
+    </p:spTree>
+    <p:extLst>
+      <p:ext uri="{BB962C8B-B14F-4D97-AF65-F5344CB8AC3E}">
+        <p14:creationId xmlns:p14="http://schemas.microsoft.com/office/powerpoint/2010/main" val="57701514"/>
       </p:ext>
     </p:extLst>
   </p:cSld>
@@ -3592,7 +4344,7 @@
           <p:cNvPr id="6" name="slide-title">
             <a:extLst xmlns:a="http://schemas.openxmlformats.org/drawingml/2006/main">
               <a:ext uri="{FF2B5EF4-FFF2-40B4-BE49-F238E27FC236}">
-                <a16:creationId xmlns:a16="http://schemas.microsoft.com/office/drawing/2014/main" id="{785D96CB-EE04-41B6-A513-B9CBB46D5F0B}"/>
+                <a16:creationId xmlns:a16="http://schemas.microsoft.com/office/drawing/2014/main" id="{2882AC03-698C-4472-8D93-5D600C3B2B5D}"/>
               </a:ext>
             </a:extLst>
           </p:cNvPr>
@@ -3651,7 +4403,7 @@
                 <a:ea typeface="Arial"/>
                 <a:cs typeface="Arial"/>
               </a:rPr>
-              <a:t>The problem, and where existing platforms stop</a:t>
+              <a:t>Problem statement and the gap in existing platforms</a:t>
             </a:r>
           </a:p>
         </p:txBody>
@@ -3661,7 +4413,7 @@
           <p:cNvPr id="2" name="slide-lead">
             <a:extLst xmlns:a="http://schemas.openxmlformats.org/drawingml/2006/main">
               <a:ext uri="{FF2B5EF4-FFF2-40B4-BE49-F238E27FC236}">
-                <a16:creationId xmlns:a16="http://schemas.microsoft.com/office/drawing/2014/main" id="{7FE6D8C4-9A99-49C7-B892-F8E65F12AFF9}"/>
+                <a16:creationId xmlns:a16="http://schemas.microsoft.com/office/drawing/2014/main" id="{CE6CB539-B0F3-4315-A8CA-6F5EE1B5C946}"/>
               </a:ext>
             </a:extLst>
           </p:cNvPr>
@@ -3720,7 +4472,7 @@
                 <a:ea typeface="Arial"/>
                 <a:cs typeface="Arial"/>
               </a:rPr>
-              <a:t>Surplus food is thrown away while the organizations that need it run short.</a:t>
+              <a:t>Surplus food is discarded while the organizations that require it operate short of supply.</a:t>
             </a:r>
           </a:p>
         </p:txBody>
@@ -3730,7 +4482,7 @@
           <p:cNvPr id="3" name="title-rule">
             <a:extLst xmlns:a="http://schemas.openxmlformats.org/drawingml/2006/main">
               <a:ext uri="{FF2B5EF4-FFF2-40B4-BE49-F238E27FC236}">
-                <a16:creationId xmlns:a16="http://schemas.microsoft.com/office/drawing/2014/main" id="{EB1E572C-B731-4F91-BE31-3682BAC31A3F}"/>
+                <a16:creationId xmlns:a16="http://schemas.microsoft.com/office/drawing/2014/main" id="{B596F400-1A12-4ED6-8D0D-8FEBBEA7FFF1}"/>
               </a:ext>
             </a:extLst>
           </p:cNvPr>
@@ -3761,7 +4513,7 @@
           <p:cNvPr id="4" name="">
             <a:extLst xmlns:a="http://schemas.openxmlformats.org/drawingml/2006/main">
               <a:ext uri="{FF2B5EF4-FFF2-40B4-BE49-F238E27FC236}">
-                <a16:creationId xmlns:a16="http://schemas.microsoft.com/office/drawing/2014/main" id="{BCF32874-59A1-42CB-93E3-FAF1992B05E5}"/>
+                <a16:creationId xmlns:a16="http://schemas.microsoft.com/office/drawing/2014/main" id="{7D85989B-8D50-4804-B073-CBC4C44A457D}"/>
               </a:ext>
             </a:extLst>
           </p:cNvPr>
@@ -3773,7 +4525,7 @@
         <p:spPr>
           <a:xfrm xmlns:a="http://schemas.openxmlformats.org/drawingml/2006/main">
             <a:off x="685800" y="1905000"/>
-            <a:ext cx="10820400" cy="2857500"/>
+            <a:ext cx="10820400" cy="3048000"/>
           </a:xfrm>
           <a:prstGeom xmlns:a="http://schemas.openxmlformats.org/drawingml/2006/main" prst="rect">
             <a:avLst/>
@@ -3790,7 +4542,7 @@
           </a:bodyPr>
           <a:lstStyle xmlns:a="http://schemas.openxmlformats.org/drawingml/2006/main">
             <a:defPPr>
-              <a:defRPr sz="1575">
+              <a:defRPr sz="1500">
                 <a:solidFill>
                   <a:srgbClr val="131A24"/>
                 </a:solidFill>
@@ -3806,7 +4558,7 @@
                 <a:spcPts val="1800"/>
               </a:spcAft>
               <a:buChar char="•"/>
-              <a:defRPr sz="1575">
+              <a:defRPr sz="1500">
                 <a:solidFill>
                   <a:srgbClr val="131A24"/>
                 </a:solidFill>
@@ -3816,7 +4568,7 @@
               </a:defRPr>
             </a:pPr>
             <a:r>
-              <a:rPr sz="1575">
+              <a:rPr sz="1500">
                 <a:solidFill>
                   <a:srgbClr val="131A24"/>
                 </a:solidFill>
@@ -3824,7 +4576,7 @@
                 <a:ea typeface="Arial"/>
                 <a:cs typeface="Arial"/>
               </a:rPr>
-              <a:t>Coordinating a donation means phone calls and messages, so food is collected late or missed.</a:t>
+              <a:t>Donations are coordinated through telephone calls and messaging applications, which delays collection and results in lost donations.</a:t>
             </a:r>
           </a:p>
           <a:p xmlns:a="http://schemas.openxmlformats.org/drawingml/2006/main">
@@ -3833,7 +4585,7 @@
                 <a:spcPts val="1800"/>
               </a:spcAft>
               <a:buChar char="•"/>
-              <a:defRPr sz="1575">
+              <a:defRPr sz="1500">
                 <a:solidFill>
                   <a:srgbClr val="131A24"/>
                 </a:solidFill>
@@ -3843,7 +4595,7 @@
               </a:defRPr>
             </a:pPr>
             <a:r>
-              <a:rPr sz="1575">
+              <a:rPr sz="1500">
                 <a:solidFill>
                   <a:srgbClr val="131A24"/>
                 </a:solidFill>
@@ -3851,7 +4603,7 @@
                 <a:ea typeface="Arial"/>
                 <a:cs typeface="Arial"/>
               </a:rPr>
-              <a:t>Most donation platforms publish a listing and let the first organization that claims it take the food.</a:t>
+              <a:t>Most donation platforms publish a listing and allocate the food to the first organization that claims it.</a:t>
             </a:r>
           </a:p>
           <a:p xmlns:a="http://schemas.openxmlformats.org/drawingml/2006/main">
@@ -3860,7 +4612,7 @@
                 <a:spcPts val="1800"/>
               </a:spcAft>
               <a:buChar char="•"/>
-              <a:defRPr sz="1575">
+              <a:defRPr sz="1500">
                 <a:solidFill>
                   <a:srgbClr val="131A24"/>
                 </a:solidFill>
@@ -3870,7 +4622,7 @@
               </a:defRPr>
             </a:pPr>
             <a:r>
-              <a:rPr sz="1575">
+              <a:rPr sz="1500">
                 <a:solidFill>
                   <a:srgbClr val="131A24"/>
                 </a:solidFill>
@@ -3878,7 +4630,7 @@
                 <a:ea typeface="Arial"/>
                 <a:cs typeface="Arial"/>
               </a:rPr>
-              <a:t>Nobody checks whether the food can arrive before it expires, or whether one partner takes most of it.</a:t>
+              <a:t>They do not verify that the food can reach the recipient before its safe consumption window closes.</a:t>
             </a:r>
           </a:p>
           <a:p xmlns:a="http://schemas.openxmlformats.org/drawingml/2006/main">
@@ -3887,7 +4639,7 @@
                 <a:spcPts val="1800"/>
               </a:spcAft>
               <a:buChar char="•"/>
-              <a:defRPr sz="1575">
+              <a:defRPr sz="1500">
                 <a:solidFill>
                   <a:srgbClr val="131A24"/>
                 </a:solidFill>
@@ -3897,7 +4649,7 @@
               </a:defRPr>
             </a:pPr>
             <a:r>
-              <a:rPr sz="1575">
+              <a:rPr sz="1500">
                 <a:solidFill>
                   <a:srgbClr val="131A24"/>
                 </a:solidFill>
@@ -3905,7 +4657,7 @@
                 <a:ea typeface="Arial"/>
                 <a:cs typeface="Arial"/>
               </a:rPr>
-              <a:t>Reports count kilograms donated and never explain why one organization was chosen.</a:t>
+              <a:t>They neither measure cumulative distribution across organizations nor record the reasoning behind a selection.</a:t>
             </a:r>
           </a:p>
         </p:txBody>
@@ -3915,7 +4667,7 @@
           <p:cNvPr id="5" name="">
             <a:extLst xmlns:a="http://schemas.openxmlformats.org/drawingml/2006/main">
               <a:ext uri="{FF2B5EF4-FFF2-40B4-BE49-F238E27FC236}">
-                <a16:creationId xmlns:a16="http://schemas.microsoft.com/office/drawing/2014/main" id="{2D528C8F-3F83-4D24-B76C-55ED77236A5C}"/>
+                <a16:creationId xmlns:a16="http://schemas.microsoft.com/office/drawing/2014/main" id="{9AE03512-EC11-4C07-BD87-0455613D3EBD}"/>
               </a:ext>
             </a:extLst>
           </p:cNvPr>
@@ -3926,7 +4678,7 @@
         </p:nvSpPr>
         <p:spPr>
           <a:xfrm xmlns:a="http://schemas.openxmlformats.org/drawingml/2006/main">
-            <a:off x="685800" y="5334000"/>
+            <a:off x="685800" y="5467350"/>
             <a:ext cx="10820400" cy="228600"/>
           </a:xfrm>
           <a:prstGeom xmlns:a="http://schemas.openxmlformats.org/drawingml/2006/main" prst="rect">
@@ -3974,7 +4726,7 @@
                 <a:ea typeface="Arial"/>
                 <a:cs typeface="Arial"/>
               </a:rPr>
-              <a:t>Assessment from my requirement study, not a published benchmark.</a:t>
+              <a:t>Assessment derived from the requirement study conducted for this project; not a published benchmark.</a:t>
             </a:r>
           </a:p>
         </p:txBody>
@@ -3982,7 +4734,7 @@
     </p:spTree>
     <p:extLst>
       <p:ext uri="{BB962C8B-B14F-4D97-AF65-F5344CB8AC3E}">
-        <p14:creationId xmlns:p14="http://schemas.microsoft.com/office/powerpoint/2010/main" val="1401564318"/>
+        <p14:creationId xmlns:p14="http://schemas.microsoft.com/office/powerpoint/2010/main" val="1671226012"/>
       </p:ext>
     </p:extLst>
   </p:cSld>
@@ -4010,10 +4762,10 @@
       </p:grpSpPr>
       <p:sp>
         <p:nvSpPr>
-          <p:cNvPr id="28" name="slide-title">
+          <p:cNvPr id="6" name="slide-title">
             <a:extLst xmlns:a="http://schemas.openxmlformats.org/drawingml/2006/main">
               <a:ext uri="{FF2B5EF4-FFF2-40B4-BE49-F238E27FC236}">
-                <a16:creationId xmlns:a16="http://schemas.microsoft.com/office/drawing/2014/main" id="{37DDA584-8BAA-4770-923F-68A4CC0109E4}"/>
+                <a16:creationId xmlns:a16="http://schemas.microsoft.com/office/drawing/2014/main" id="{89B539FD-7431-4107-BB92-624EEE617605}"/>
               </a:ext>
             </a:extLst>
           </p:cNvPr>
@@ -4072,7 +4824,7 @@
                 <a:ea typeface="Arial"/>
                 <a:cs typeface="Arial"/>
               </a:rPr>
-              <a:t>What FoodBridge does</a:t>
+              <a:t>Differentiating features</a:t>
             </a:r>
           </a:p>
         </p:txBody>
@@ -4082,7 +4834,7 @@
           <p:cNvPr id="2" name="slide-lead">
             <a:extLst xmlns:a="http://schemas.openxmlformats.org/drawingml/2006/main">
               <a:ext uri="{FF2B5EF4-FFF2-40B4-BE49-F238E27FC236}">
-                <a16:creationId xmlns:a16="http://schemas.microsoft.com/office/drawing/2014/main" id="{2122B23B-2842-4498-A823-F80227BB8634}"/>
+                <a16:creationId xmlns:a16="http://schemas.microsoft.com/office/drawing/2014/main" id="{CD6605DF-128D-49E8-88F3-D0A582778D0F}"/>
               </a:ext>
             </a:extLst>
           </p:cNvPr>
@@ -4141,7 +4893,7 @@
                 <a:ea typeface="Arial"/>
                 <a:cs typeface="Arial"/>
               </a:rPr>
-              <a:t>The engine decides who receives each donation, and explains why.</a:t>
+              <a:t>Six design decisions separate FoodBridge from existing platforms and manual coordination.</a:t>
             </a:r>
           </a:p>
         </p:txBody>
@@ -4151,7 +4903,7 @@
           <p:cNvPr id="3" name="title-rule">
             <a:extLst xmlns:a="http://schemas.openxmlformats.org/drawingml/2006/main">
               <a:ext uri="{FF2B5EF4-FFF2-40B4-BE49-F238E27FC236}">
-                <a16:creationId xmlns:a16="http://schemas.microsoft.com/office/drawing/2014/main" id="{3DD45F3A-4040-49B7-9F42-673078647450}"/>
+                <a16:creationId xmlns:a16="http://schemas.microsoft.com/office/drawing/2014/main" id="{AB3E182A-CDD8-4396-8B47-EB897C79AFC2}"/>
               </a:ext>
             </a:extLst>
           </p:cNvPr>
@@ -4177,47 +4929,529 @@
           </a:ln>
         </p:spPr>
       </p:sp>
-      <p:sp>
-        <p:nvSpPr>
-          <p:cNvPr id="4" name="flow-Donation registered">
+      <p:graphicFrame>
+        <p:nvGraphicFramePr>
+          <p:cNvPr id="4" name="">
             <a:extLst xmlns:a="http://schemas.openxmlformats.org/drawingml/2006/main">
               <a:ext uri="{FF2B5EF4-FFF2-40B4-BE49-F238E27FC236}">
-                <a16:creationId xmlns:a16="http://schemas.microsoft.com/office/drawing/2014/main" id="{F5B464D2-197B-4830-8285-F7E872649572}"/>
+                <a16:creationId xmlns:a16="http://schemas.microsoft.com/office/drawing/2014/main" id="{75EA5F0A-CDEC-44E8-87C5-BD460CC80888}"/>
               </a:ext>
             </a:extLst>
           </p:cNvPr>
-          <p:cNvSpPr>
-            <a:spLocks xmlns:a="http://schemas.openxmlformats.org/drawingml/2006/main" noGrp="1"/>
-          </p:cNvSpPr>
+          <p:cNvGraphicFramePr/>
           <p:nvPr/>
-        </p:nvSpPr>
-        <p:spPr>
-          <a:xfrm xmlns:a="http://schemas.openxmlformats.org/drawingml/2006/main">
-            <a:off x="685800" y="1981200"/>
-            <a:ext cx="1428750" cy="990600"/>
-          </a:xfrm>
-          <a:prstGeom xmlns:a="http://schemas.openxmlformats.org/drawingml/2006/main" prst="roundRect">
-            <a:avLst>
-              <a:gd name="adj" fmla="val 7692"/>
-            </a:avLst>
-          </a:prstGeom>
-          <a:solidFill xmlns:a="http://schemas.openxmlformats.org/drawingml/2006/main">
-            <a:srgbClr val="FFFFFF"/>
-          </a:solidFill>
-          <a:ln xmlns:a="http://schemas.openxmlformats.org/drawingml/2006/main" w="9525">
-            <a:solidFill>
-              <a:srgbClr val="E1E5EA"/>
-            </a:solidFill>
-            <a:prstDash val="solid"/>
-          </a:ln>
-        </p:spPr>
-      </p:sp>
+        </p:nvGraphicFramePr>
+        <p:xfrm>
+          <a:off xmlns:a="http://schemas.openxmlformats.org/drawingml/2006/main" x="685800" y="1866900"/>
+          <a:ext xmlns:a="http://schemas.openxmlformats.org/drawingml/2006/main" cx="10820400" cy="3543300"/>
+        </p:xfrm>
+        <a:graphic xmlns:a="http://schemas.openxmlformats.org/drawingml/2006/main">
+          <a:graphicData uri="http://schemas.openxmlformats.org/drawingml/2006/table">
+            <a:tbl>
+              <a:tblPr/>
+              <a:tblGrid>
+                <a:gridCol w="2380488"/>
+                <a:gridCol w="3895344"/>
+                <a:gridCol w="4544568"/>
+              </a:tblGrid>
+              <a:tr h="506186">
+                <a:tc>
+                  <a:txBody>
+                    <a:bodyPr>
+                      <a:noAutofit/>
+                    </a:bodyPr>
+                    <a:lstStyle/>
+                    <a:p>
+                      <a:r>
+                        <a:rPr sz="1050" b="1">
+                          <a:solidFill>
+                            <a:srgbClr val="131A24"/>
+                          </a:solidFill>
+                          <a:latin typeface="Arial"/>
+                          <a:ea typeface="Arial"/>
+                          <a:cs typeface="Arial"/>
+                        </a:rPr>
+                        <a:t>Design decision</a:t>
+                      </a:r>
+                    </a:p>
+                  </a:txBody>
+                  <a:tcPr marL="91440" marR="91440" marT="45720" marB="45720">
+                    <a:solidFill>
+                      <a:srgbClr val="F5F7F8"/>
+                    </a:solidFill>
+                  </a:tcPr>
+                </a:tc>
+                <a:tc>
+                  <a:txBody>
+                    <a:bodyPr>
+                      <a:noAutofit/>
+                    </a:bodyPr>
+                    <a:lstStyle/>
+                    <a:p>
+                      <a:r>
+                        <a:rPr sz="1050" b="1">
+                          <a:solidFill>
+                            <a:srgbClr val="131A24"/>
+                          </a:solidFill>
+                          <a:latin typeface="Arial"/>
+                          <a:ea typeface="Arial"/>
+                          <a:cs typeface="Arial"/>
+                        </a:rPr>
+                        <a:t>Typical platforms</a:t>
+                      </a:r>
+                    </a:p>
+                  </a:txBody>
+                  <a:tcPr marL="91440" marR="91440" marT="45720" marB="45720">
+                    <a:solidFill>
+                      <a:srgbClr val="F5F7F8"/>
+                    </a:solidFill>
+                  </a:tcPr>
+                </a:tc>
+                <a:tc>
+                  <a:txBody>
+                    <a:bodyPr>
+                      <a:noAutofit/>
+                    </a:bodyPr>
+                    <a:lstStyle/>
+                    <a:p>
+                      <a:r>
+                        <a:rPr sz="1050" b="1">
+                          <a:solidFill>
+                            <a:srgbClr val="131A24"/>
+                          </a:solidFill>
+                          <a:latin typeface="Arial"/>
+                          <a:ea typeface="Arial"/>
+                          <a:cs typeface="Arial"/>
+                        </a:rPr>
+                        <a:t>FoodBridge</a:t>
+                      </a:r>
+                    </a:p>
+                  </a:txBody>
+                  <a:tcPr marL="91440" marR="91440" marT="45720" marB="45720">
+                    <a:solidFill>
+                      <a:srgbClr val="F5F7F8"/>
+                    </a:solidFill>
+                  </a:tcPr>
+                </a:tc>
+              </a:tr>
+              <a:tr h="506186">
+                <a:tc>
+                  <a:txBody>
+                    <a:bodyPr>
+                      <a:noAutofit/>
+                    </a:bodyPr>
+                    <a:lstStyle/>
+                    <a:p>
+                      <a:r>
+                        <a:rPr sz="1050">
+                          <a:solidFill>
+                            <a:srgbClr val="131A24"/>
+                          </a:solidFill>
+                          <a:latin typeface="Arial"/>
+                          <a:ea typeface="Arial"/>
+                          <a:cs typeface="Arial"/>
+                        </a:rPr>
+                        <a:t>Recipient selection</a:t>
+                      </a:r>
+                    </a:p>
+                  </a:txBody>
+                  <a:tcPr marL="91440" marR="91440" marT="45720" marB="45720"/>
+                </a:tc>
+                <a:tc>
+                  <a:txBody>
+                    <a:bodyPr>
+                      <a:noAutofit/>
+                    </a:bodyPr>
+                    <a:lstStyle/>
+                    <a:p>
+                      <a:r>
+                        <a:rPr sz="1050">
+                          <a:solidFill>
+                            <a:srgbClr val="131A24"/>
+                          </a:solidFill>
+                          <a:latin typeface="Arial"/>
+                          <a:ea typeface="Arial"/>
+                          <a:cs typeface="Arial"/>
+                        </a:rPr>
+                        <a:t>Allocated to the first organization that claims the listing</a:t>
+                      </a:r>
+                    </a:p>
+                  </a:txBody>
+                  <a:tcPr marL="91440" marR="91440" marT="45720" marB="45720"/>
+                </a:tc>
+                <a:tc>
+                  <a:txBody>
+                    <a:bodyPr>
+                      <a:noAutofit/>
+                    </a:bodyPr>
+                    <a:lstStyle/>
+                    <a:p>
+                      <a:r>
+                        <a:rPr sz="1050">
+                          <a:solidFill>
+                            <a:srgbClr val="131A24"/>
+                          </a:solidFill>
+                          <a:latin typeface="Arial"/>
+                          <a:ea typeface="Arial"/>
+                          <a:cs typeface="Arial"/>
+                        </a:rPr>
+                        <a:t>All eligible organizations are ranked by the decision engine</a:t>
+                      </a:r>
+                    </a:p>
+                  </a:txBody>
+                  <a:tcPr marL="91440" marR="91440" marT="45720" marB="45720"/>
+                </a:tc>
+              </a:tr>
+              <a:tr h="506186">
+                <a:tc>
+                  <a:txBody>
+                    <a:bodyPr>
+                      <a:noAutofit/>
+                    </a:bodyPr>
+                    <a:lstStyle/>
+                    <a:p>
+                      <a:r>
+                        <a:rPr sz="1050">
+                          <a:solidFill>
+                            <a:srgbClr val="131A24"/>
+                          </a:solidFill>
+                          <a:latin typeface="Arial"/>
+                          <a:ea typeface="Arial"/>
+                          <a:cs typeface="Arial"/>
+                        </a:rPr>
+                        <a:t>Food safety</a:t>
+                      </a:r>
+                    </a:p>
+                  </a:txBody>
+                  <a:tcPr marL="91440" marR="91440" marT="45720" marB="45720"/>
+                </a:tc>
+                <a:tc>
+                  <a:txBody>
+                    <a:bodyPr>
+                      <a:noAutofit/>
+                    </a:bodyPr>
+                    <a:lstStyle/>
+                    <a:p>
+                      <a:r>
+                        <a:rPr sz="1050">
+                          <a:solidFill>
+                            <a:srgbClr val="131A24"/>
+                          </a:solidFill>
+                          <a:latin typeface="Arial"/>
+                          <a:ea typeface="Arial"/>
+                          <a:cs typeface="Arial"/>
+                        </a:rPr>
+                        <a:t>Expiry time displayed to the claimant</a:t>
+                      </a:r>
+                    </a:p>
+                  </a:txBody>
+                  <a:tcPr marL="91440" marR="91440" marT="45720" marB="45720"/>
+                </a:tc>
+                <a:tc>
+                  <a:txBody>
+                    <a:bodyPr>
+                      <a:noAutofit/>
+                    </a:bodyPr>
+                    <a:lstStyle/>
+                    <a:p>
+                      <a:r>
+                        <a:rPr sz="1050">
+                          <a:solidFill>
+                            <a:srgbClr val="131A24"/>
+                          </a:solidFill>
+                          <a:latin typeface="Arial"/>
+                          <a:ea typeface="Arial"/>
+                          <a:cs typeface="Arial"/>
+                        </a:rPr>
+                        <a:t>Organizations that cannot receive the food in time are excluded</a:t>
+                      </a:r>
+                    </a:p>
+                  </a:txBody>
+                  <a:tcPr marL="91440" marR="91440" marT="45720" marB="45720"/>
+                </a:tc>
+              </a:tr>
+              <a:tr h="506186">
+                <a:tc>
+                  <a:txBody>
+                    <a:bodyPr>
+                      <a:noAutofit/>
+                    </a:bodyPr>
+                    <a:lstStyle/>
+                    <a:p>
+                      <a:r>
+                        <a:rPr sz="1050">
+                          <a:solidFill>
+                            <a:srgbClr val="131A24"/>
+                          </a:solidFill>
+                          <a:latin typeface="Arial"/>
+                          <a:ea typeface="Arial"/>
+                          <a:cs typeface="Arial"/>
+                        </a:rPr>
+                        <a:t>Equitable distribution</a:t>
+                      </a:r>
+                    </a:p>
+                  </a:txBody>
+                  <a:tcPr marL="91440" marR="91440" marT="45720" marB="45720"/>
+                </a:tc>
+                <a:tc>
+                  <a:txBody>
+                    <a:bodyPr>
+                      <a:noAutofit/>
+                    </a:bodyPr>
+                    <a:lstStyle/>
+                    <a:p>
+                      <a:r>
+                        <a:rPr sz="1050">
+                          <a:solidFill>
+                            <a:srgbClr val="131A24"/>
+                          </a:solidFill>
+                          <a:latin typeface="Arial"/>
+                          <a:ea typeface="Arial"/>
+                          <a:cs typeface="Arial"/>
+                        </a:rPr>
+                        <a:t>Not measured</a:t>
+                      </a:r>
+                    </a:p>
+                  </a:txBody>
+                  <a:tcPr marL="91440" marR="91440" marT="45720" marB="45720"/>
+                </a:tc>
+                <a:tc>
+                  <a:txBody>
+                    <a:bodyPr>
+                      <a:noAutofit/>
+                    </a:bodyPr>
+                    <a:lstStyle/>
+                    <a:p>
+                      <a:r>
+                        <a:rPr sz="1050">
+                          <a:solidFill>
+                            <a:srgbClr val="131A24"/>
+                          </a:solidFill>
+                          <a:latin typeface="Arial"/>
+                          <a:ea typeface="Arial"/>
+                          <a:cs typeface="Arial"/>
+                        </a:rPr>
+                        <a:t>Quantities received in the previous 30 days influence the score</a:t>
+                      </a:r>
+                    </a:p>
+                  </a:txBody>
+                  <a:tcPr marL="91440" marR="91440" marT="45720" marB="45720"/>
+                </a:tc>
+              </a:tr>
+              <a:tr h="506186">
+                <a:tc>
+                  <a:txBody>
+                    <a:bodyPr>
+                      <a:noAutofit/>
+                    </a:bodyPr>
+                    <a:lstStyle/>
+                    <a:p>
+                      <a:r>
+                        <a:rPr sz="1050">
+                          <a:solidFill>
+                            <a:srgbClr val="131A24"/>
+                          </a:solidFill>
+                          <a:latin typeface="Arial"/>
+                          <a:ea typeface="Arial"/>
+                          <a:cs typeface="Arial"/>
+                        </a:rPr>
+                        <a:t>Transparency</a:t>
+                      </a:r>
+                    </a:p>
+                  </a:txBody>
+                  <a:tcPr marL="91440" marR="91440" marT="45720" marB="45720"/>
+                </a:tc>
+                <a:tc>
+                  <a:txBody>
+                    <a:bodyPr>
+                      <a:noAutofit/>
+                    </a:bodyPr>
+                    <a:lstStyle/>
+                    <a:p>
+                      <a:r>
+                        <a:rPr sz="1050">
+                          <a:solidFill>
+                            <a:srgbClr val="131A24"/>
+                          </a:solidFill>
+                          <a:latin typeface="Arial"/>
+                          <a:ea typeface="Arial"/>
+                          <a:cs typeface="Arial"/>
+                        </a:rPr>
+                        <a:t>No recorded justification</a:t>
+                      </a:r>
+                    </a:p>
+                  </a:txBody>
+                  <a:tcPr marL="91440" marR="91440" marT="45720" marB="45720"/>
+                </a:tc>
+                <a:tc>
+                  <a:txBody>
+                    <a:bodyPr>
+                      <a:noAutofit/>
+                    </a:bodyPr>
+                    <a:lstStyle/>
+                    <a:p>
+                      <a:r>
+                        <a:rPr sz="1050">
+                          <a:solidFill>
+                            <a:srgbClr val="131A24"/>
+                          </a:solidFill>
+                          <a:latin typeface="Arial"/>
+                          <a:ea typeface="Arial"/>
+                          <a:cs typeface="Arial"/>
+                        </a:rPr>
+                        <a:t>A written explanation is stored with every allocation</a:t>
+                      </a:r>
+                    </a:p>
+                  </a:txBody>
+                  <a:tcPr marL="91440" marR="91440" marT="45720" marB="45720"/>
+                </a:tc>
+              </a:tr>
+              <a:tr h="506186">
+                <a:tc>
+                  <a:txBody>
+                    <a:bodyPr>
+                      <a:noAutofit/>
+                    </a:bodyPr>
+                    <a:lstStyle/>
+                    <a:p>
+                      <a:r>
+                        <a:rPr sz="1050">
+                          <a:solidFill>
+                            <a:srgbClr val="131A24"/>
+                          </a:solidFill>
+                          <a:latin typeface="Arial"/>
+                          <a:ea typeface="Arial"/>
+                          <a:cs typeface="Arial"/>
+                        </a:rPr>
+                        <a:t>Volunteer coordination</a:t>
+                      </a:r>
+                    </a:p>
+                  </a:txBody>
+                  <a:tcPr marL="91440" marR="91440" marT="45720" marB="45720"/>
+                </a:tc>
+                <a:tc>
+                  <a:txBody>
+                    <a:bodyPr>
+                      <a:noAutofit/>
+                    </a:bodyPr>
+                    <a:lstStyle/>
+                    <a:p>
+                      <a:r>
+                        <a:rPr sz="1050">
+                          <a:solidFill>
+                            <a:srgbClr val="131A24"/>
+                          </a:solidFill>
+                          <a:latin typeface="Arial"/>
+                          <a:ea typeface="Arial"/>
+                          <a:cs typeface="Arial"/>
+                        </a:rPr>
+                        <a:t>Arranged privately between donor and recipient</a:t>
+                      </a:r>
+                    </a:p>
+                  </a:txBody>
+                  <a:tcPr marL="91440" marR="91440" marT="45720" marB="45720"/>
+                </a:tc>
+                <a:tc>
+                  <a:txBody>
+                    <a:bodyPr>
+                      <a:noAutofit/>
+                    </a:bodyPr>
+                    <a:lstStyle/>
+                    <a:p>
+                      <a:r>
+                        <a:rPr sz="1050">
+                          <a:solidFill>
+                            <a:srgbClr val="131A24"/>
+                          </a:solidFill>
+                          <a:latin typeface="Arial"/>
+                          <a:ea typeface="Arial"/>
+                          <a:cs typeface="Arial"/>
+                        </a:rPr>
+                        <a:t>Volunteers are matched by distance, workload and experience</a:t>
+                      </a:r>
+                    </a:p>
+                  </a:txBody>
+                  <a:tcPr marL="91440" marR="91440" marT="45720" marB="45720"/>
+                </a:tc>
+              </a:tr>
+              <a:tr h="506186">
+                <a:tc>
+                  <a:txBody>
+                    <a:bodyPr>
+                      <a:noAutofit/>
+                    </a:bodyPr>
+                    <a:lstStyle/>
+                    <a:p>
+                      <a:r>
+                        <a:rPr sz="1050">
+                          <a:solidFill>
+                            <a:srgbClr val="131A24"/>
+                          </a:solidFill>
+                          <a:latin typeface="Arial"/>
+                          <a:ea typeface="Arial"/>
+                          <a:cs typeface="Arial"/>
+                        </a:rPr>
+                        <a:t>Accountability</a:t>
+                      </a:r>
+                    </a:p>
+                  </a:txBody>
+                  <a:tcPr marL="91440" marR="91440" marT="45720" marB="45720"/>
+                </a:tc>
+                <a:tc>
+                  <a:txBody>
+                    <a:bodyPr>
+                      <a:noAutofit/>
+                    </a:bodyPr>
+                    <a:lstStyle/>
+                    <a:p>
+                      <a:r>
+                        <a:rPr sz="1050">
+                          <a:solidFill>
+                            <a:srgbClr val="131A24"/>
+                          </a:solidFill>
+                          <a:latin typeface="Arial"/>
+                          <a:ea typeface="Arial"/>
+                          <a:cs typeface="Arial"/>
+                        </a:rPr>
+                        <a:t>Basic donation history</a:t>
+                      </a:r>
+                    </a:p>
+                  </a:txBody>
+                  <a:tcPr marL="91440" marR="91440" marT="45720" marB="45720"/>
+                </a:tc>
+                <a:tc>
+                  <a:txBody>
+                    <a:bodyPr>
+                      <a:noAutofit/>
+                    </a:bodyPr>
+                    <a:lstStyle/>
+                    <a:p>
+                      <a:r>
+                        <a:rPr sz="1050">
+                          <a:solidFill>
+                            <a:srgbClr val="131A24"/>
+                          </a:solidFill>
+                          <a:latin typeface="Arial"/>
+                          <a:ea typeface="Arial"/>
+                          <a:cs typeface="Arial"/>
+                        </a:rPr>
+                        <a:t>Every action is recorded in the audit log</a:t>
+                      </a:r>
+                    </a:p>
+                  </a:txBody>
+                  <a:tcPr marL="91440" marR="91440" marT="45720" marB="45720"/>
+                </a:tc>
+              </a:tr>
+            </a:tbl>
+          </a:graphicData>
+        </a:graphic>
+      </p:graphicFrame>
       <p:sp>
         <p:nvSpPr>
           <p:cNvPr id="5" name="">
             <a:extLst xmlns:a="http://schemas.openxmlformats.org/drawingml/2006/main">
               <a:ext uri="{FF2B5EF4-FFF2-40B4-BE49-F238E27FC236}">
-                <a16:creationId xmlns:a16="http://schemas.microsoft.com/office/drawing/2014/main" id="{DACC4165-2F6F-41BF-9795-BDF32FA9D0C8}"/>
+                <a16:creationId xmlns:a16="http://schemas.microsoft.com/office/drawing/2014/main" id="{BFF87692-A083-4727-9349-A09FA3A57CF4}"/>
               </a:ext>
             </a:extLst>
           </p:cNvPr>
@@ -4228,8 +5462,8 @@
         </p:nvSpPr>
         <p:spPr>
           <a:xfrm xmlns:a="http://schemas.openxmlformats.org/drawingml/2006/main">
-            <a:off x="781050" y="2114550"/>
-            <a:ext cx="1238250" cy="381000"/>
+            <a:off x="685800" y="5600700"/>
+            <a:ext cx="10820400" cy="228600"/>
           </a:xfrm>
           <a:prstGeom xmlns:a="http://schemas.openxmlformats.org/drawingml/2006/main" prst="rect">
             <a:avLst/>
@@ -4246,9 +5480,9 @@
           </a:bodyPr>
           <a:lstStyle xmlns:a="http://schemas.openxmlformats.org/drawingml/2006/main">
             <a:defPPr>
-              <a:defRPr sz="1125" b="1">
-                <a:solidFill>
-                  <a:srgbClr val="131A24"/>
+              <a:defRPr sz="1125" b="0">
+                <a:solidFill>
+                  <a:srgbClr val="8A94A3"/>
                 </a:solidFill>
                 <a:latin typeface="Arial"/>
                 <a:ea typeface="Arial"/>
@@ -4258,9 +5492,9 @@
           </a:lstStyle>
           <a:p xmlns:a="http://schemas.openxmlformats.org/drawingml/2006/main">
             <a:pPr>
-              <a:defRPr sz="1125" b="1">
-                <a:solidFill>
-                  <a:srgbClr val="131A24"/>
+              <a:defRPr sz="1125" b="0">
+                <a:solidFill>
+                  <a:srgbClr val="8A94A3"/>
                 </a:solidFill>
                 <a:latin typeface="Arial"/>
                 <a:ea typeface="Arial"/>
@@ -4268,1212 +5502,23 @@
               </a:defRPr>
             </a:pPr>
             <a:r>
-              <a:rPr sz="1125" b="1">
-                <a:solidFill>
-                  <a:srgbClr val="131A24"/>
+              <a:rPr sz="1125" b="0">
+                <a:solidFill>
+                  <a:srgbClr val="8A94A3"/>
                 </a:solidFill>
                 <a:latin typeface="Arial"/>
                 <a:ea typeface="Arial"/>
                 <a:cs typeface="Arial"/>
               </a:rPr>
-              <a:t>Donation registered</a:t>
+              <a:t>Assessment based on the platforms and process examined during the requirement study.</a:t>
             </a:r>
           </a:p>
         </p:txBody>
       </p:sp>
-      <p:sp>
-        <p:nvSpPr>
-          <p:cNvPr id="6" name="">
-            <a:extLst xmlns:a="http://schemas.openxmlformats.org/drawingml/2006/main">
-              <a:ext uri="{FF2B5EF4-FFF2-40B4-BE49-F238E27FC236}">
-                <a16:creationId xmlns:a16="http://schemas.microsoft.com/office/drawing/2014/main" id="{E8EB79D5-8099-49E6-A4B9-611157F4856D}"/>
-              </a:ext>
-            </a:extLst>
-          </p:cNvPr>
-          <p:cNvSpPr>
-            <a:spLocks xmlns:a="http://schemas.openxmlformats.org/drawingml/2006/main" noGrp="1"/>
-          </p:cNvSpPr>
-          <p:nvPr/>
-        </p:nvSpPr>
-        <p:spPr>
-          <a:xfrm xmlns:a="http://schemas.openxmlformats.org/drawingml/2006/main">
-            <a:off x="781050" y="2476500"/>
-            <a:ext cx="1238250" cy="381000"/>
-          </a:xfrm>
-          <a:prstGeom xmlns:a="http://schemas.openxmlformats.org/drawingml/2006/main" prst="rect">
-            <a:avLst/>
-          </a:prstGeom>
-          <a:noFill xmlns:a="http://schemas.openxmlformats.org/drawingml/2006/main"/>
-          <a:ln xmlns:a="http://schemas.openxmlformats.org/drawingml/2006/main" w="0">
-            <a:noFill/>
-            <a:prstDash val="solid"/>
-          </a:ln>
-        </p:spPr>
-        <p:txBody>
-          <a:bodyPr xmlns:a="http://schemas.openxmlformats.org/drawingml/2006/main">
-            <a:noAutofit/>
-          </a:bodyPr>
-          <a:lstStyle xmlns:a="http://schemas.openxmlformats.org/drawingml/2006/main">
-            <a:defPPr>
-              <a:defRPr sz="938" b="0">
-                <a:solidFill>
-                  <a:srgbClr val="52606F"/>
-                </a:solidFill>
-                <a:latin typeface="Arial"/>
-                <a:ea typeface="Arial"/>
-                <a:cs typeface="Arial"/>
-              </a:defRPr>
-            </a:defPPr>
-          </a:lstStyle>
-          <a:p xmlns:a="http://schemas.openxmlformats.org/drawingml/2006/main">
-            <a:pPr>
-              <a:defRPr sz="938" b="0">
-                <a:solidFill>
-                  <a:srgbClr val="52606F"/>
-                </a:solidFill>
-                <a:latin typeface="Arial"/>
-                <a:ea typeface="Arial"/>
-                <a:cs typeface="Arial"/>
-              </a:defRPr>
-            </a:pPr>
-            <a:r>
-              <a:rPr sz="938" b="0">
-                <a:solidFill>
-                  <a:srgbClr val="52606F"/>
-                </a:solidFill>
-                <a:latin typeface="Arial"/>
-                <a:ea typeface="Arial"/>
-                <a:cs typeface="Arial"/>
-              </a:rPr>
-              <a:t>donor enters details</a:t>
-            </a:r>
-          </a:p>
-        </p:txBody>
-      </p:sp>
-      <p:sp>
-        <p:nvSpPr>
-          <p:cNvPr id="7" name="">
-            <a:extLst xmlns:a="http://schemas.openxmlformats.org/drawingml/2006/main">
-              <a:ext uri="{FF2B5EF4-FFF2-40B4-BE49-F238E27FC236}">
-                <a16:creationId xmlns:a16="http://schemas.microsoft.com/office/drawing/2014/main" id="{00D8B391-6921-45BB-948F-BB325D41E1D0}"/>
-              </a:ext>
-            </a:extLst>
-          </p:cNvPr>
-          <p:cNvSpPr>
-            <a:spLocks xmlns:a="http://schemas.openxmlformats.org/drawingml/2006/main" noGrp="1"/>
-          </p:cNvSpPr>
-          <p:nvPr/>
-        </p:nvSpPr>
-        <p:spPr>
-          <a:xfrm xmlns:a="http://schemas.openxmlformats.org/drawingml/2006/main">
-            <a:off x="2171700" y="2400300"/>
-            <a:ext cx="228600" cy="152400"/>
-          </a:xfrm>
-          <a:prstGeom xmlns:a="http://schemas.openxmlformats.org/drawingml/2006/main" prst="rightArrow">
-            <a:avLst/>
-          </a:prstGeom>
-          <a:solidFill xmlns:a="http://schemas.openxmlformats.org/drawingml/2006/main">
-            <a:srgbClr val="8A94A3"/>
-          </a:solidFill>
-          <a:ln xmlns:a="http://schemas.openxmlformats.org/drawingml/2006/main" w="0">
-            <a:noFill/>
-            <a:prstDash val="solid"/>
-          </a:ln>
-        </p:spPr>
-      </p:sp>
-      <p:sp>
-        <p:nvSpPr>
-          <p:cNvPr id="8" name="flow-Engine ranks recipients">
-            <a:extLst xmlns:a="http://schemas.openxmlformats.org/drawingml/2006/main">
-              <a:ext uri="{FF2B5EF4-FFF2-40B4-BE49-F238E27FC236}">
-                <a16:creationId xmlns:a16="http://schemas.microsoft.com/office/drawing/2014/main" id="{5E9F5168-4466-4B61-B2FB-495E9E003E22}"/>
-              </a:ext>
-            </a:extLst>
-          </p:cNvPr>
-          <p:cNvSpPr>
-            <a:spLocks xmlns:a="http://schemas.openxmlformats.org/drawingml/2006/main" noGrp="1"/>
-          </p:cNvSpPr>
-          <p:nvPr/>
-        </p:nvSpPr>
-        <p:spPr>
-          <a:xfrm xmlns:a="http://schemas.openxmlformats.org/drawingml/2006/main">
-            <a:off x="2457450" y="1981200"/>
-            <a:ext cx="1428750" cy="990600"/>
-          </a:xfrm>
-          <a:prstGeom xmlns:a="http://schemas.openxmlformats.org/drawingml/2006/main" prst="roundRect">
-            <a:avLst>
-              <a:gd name="adj" fmla="val 7692"/>
-            </a:avLst>
-          </a:prstGeom>
-          <a:solidFill xmlns:a="http://schemas.openxmlformats.org/drawingml/2006/main">
-            <a:srgbClr val="FFFFFF"/>
-          </a:solidFill>
-          <a:ln xmlns:a="http://schemas.openxmlformats.org/drawingml/2006/main" w="9525">
-            <a:solidFill>
-              <a:srgbClr val="E1E5EA"/>
-            </a:solidFill>
-            <a:prstDash val="solid"/>
-          </a:ln>
-        </p:spPr>
-      </p:sp>
-      <p:sp>
-        <p:nvSpPr>
-          <p:cNvPr id="9" name="">
-            <a:extLst xmlns:a="http://schemas.openxmlformats.org/drawingml/2006/main">
-              <a:ext uri="{FF2B5EF4-FFF2-40B4-BE49-F238E27FC236}">
-                <a16:creationId xmlns:a16="http://schemas.microsoft.com/office/drawing/2014/main" id="{8C0413BD-B876-4AE5-BF3D-8D15E3E1E1D5}"/>
-              </a:ext>
-            </a:extLst>
-          </p:cNvPr>
-          <p:cNvSpPr>
-            <a:spLocks xmlns:a="http://schemas.openxmlformats.org/drawingml/2006/main" noGrp="1"/>
-          </p:cNvSpPr>
-          <p:nvPr/>
-        </p:nvSpPr>
-        <p:spPr>
-          <a:xfrm xmlns:a="http://schemas.openxmlformats.org/drawingml/2006/main">
-            <a:off x="2552700" y="2114550"/>
-            <a:ext cx="1238250" cy="381000"/>
-          </a:xfrm>
-          <a:prstGeom xmlns:a="http://schemas.openxmlformats.org/drawingml/2006/main" prst="rect">
-            <a:avLst/>
-          </a:prstGeom>
-          <a:noFill xmlns:a="http://schemas.openxmlformats.org/drawingml/2006/main"/>
-          <a:ln xmlns:a="http://schemas.openxmlformats.org/drawingml/2006/main" w="0">
-            <a:noFill/>
-            <a:prstDash val="solid"/>
-          </a:ln>
-        </p:spPr>
-        <p:txBody>
-          <a:bodyPr xmlns:a="http://schemas.openxmlformats.org/drawingml/2006/main">
-            <a:noAutofit/>
-          </a:bodyPr>
-          <a:lstStyle xmlns:a="http://schemas.openxmlformats.org/drawingml/2006/main">
-            <a:defPPr>
-              <a:defRPr sz="1125" b="1">
-                <a:solidFill>
-                  <a:srgbClr val="131A24"/>
-                </a:solidFill>
-                <a:latin typeface="Arial"/>
-                <a:ea typeface="Arial"/>
-                <a:cs typeface="Arial"/>
-              </a:defRPr>
-            </a:defPPr>
-          </a:lstStyle>
-          <a:p xmlns:a="http://schemas.openxmlformats.org/drawingml/2006/main">
-            <a:pPr>
-              <a:defRPr sz="1125" b="1">
-                <a:solidFill>
-                  <a:srgbClr val="131A24"/>
-                </a:solidFill>
-                <a:latin typeface="Arial"/>
-                <a:ea typeface="Arial"/>
-                <a:cs typeface="Arial"/>
-              </a:defRPr>
-            </a:pPr>
-            <a:r>
-              <a:rPr sz="1125" b="1">
-                <a:solidFill>
-                  <a:srgbClr val="131A24"/>
-                </a:solidFill>
-                <a:latin typeface="Arial"/>
-                <a:ea typeface="Arial"/>
-                <a:cs typeface="Arial"/>
-              </a:rPr>
-              <a:t>Engine ranks recipients</a:t>
-            </a:r>
-          </a:p>
-        </p:txBody>
-      </p:sp>
-      <p:sp>
-        <p:nvSpPr>
-          <p:cNvPr id="10" name="">
-            <a:extLst xmlns:a="http://schemas.openxmlformats.org/drawingml/2006/main">
-              <a:ext uri="{FF2B5EF4-FFF2-40B4-BE49-F238E27FC236}">
-                <a16:creationId xmlns:a16="http://schemas.microsoft.com/office/drawing/2014/main" id="{91655E80-1A03-4636-BD9F-EF45D5680AAC}"/>
-              </a:ext>
-            </a:extLst>
-          </p:cNvPr>
-          <p:cNvSpPr>
-            <a:spLocks xmlns:a="http://schemas.openxmlformats.org/drawingml/2006/main" noGrp="1"/>
-          </p:cNvSpPr>
-          <p:nvPr/>
-        </p:nvSpPr>
-        <p:spPr>
-          <a:xfrm xmlns:a="http://schemas.openxmlformats.org/drawingml/2006/main">
-            <a:off x="2552700" y="2476500"/>
-            <a:ext cx="1238250" cy="381000"/>
-          </a:xfrm>
-          <a:prstGeom xmlns:a="http://schemas.openxmlformats.org/drawingml/2006/main" prst="rect">
-            <a:avLst/>
-          </a:prstGeom>
-          <a:noFill xmlns:a="http://schemas.openxmlformats.org/drawingml/2006/main"/>
-          <a:ln xmlns:a="http://schemas.openxmlformats.org/drawingml/2006/main" w="0">
-            <a:noFill/>
-            <a:prstDash val="solid"/>
-          </a:ln>
-        </p:spPr>
-        <p:txBody>
-          <a:bodyPr xmlns:a="http://schemas.openxmlformats.org/drawingml/2006/main">
-            <a:noAutofit/>
-          </a:bodyPr>
-          <a:lstStyle xmlns:a="http://schemas.openxmlformats.org/drawingml/2006/main">
-            <a:defPPr>
-              <a:defRPr sz="938" b="0">
-                <a:solidFill>
-                  <a:srgbClr val="52606F"/>
-                </a:solidFill>
-                <a:latin typeface="Arial"/>
-                <a:ea typeface="Arial"/>
-                <a:cs typeface="Arial"/>
-              </a:defRPr>
-            </a:defPPr>
-          </a:lstStyle>
-          <a:p xmlns:a="http://schemas.openxmlformats.org/drawingml/2006/main">
-            <a:pPr>
-              <a:defRPr sz="938" b="0">
-                <a:solidFill>
-                  <a:srgbClr val="52606F"/>
-                </a:solidFill>
-                <a:latin typeface="Arial"/>
-                <a:ea typeface="Arial"/>
-                <a:cs typeface="Arial"/>
-              </a:defRPr>
-            </a:pPr>
-            <a:r>
-              <a:rPr sz="938" b="0">
-                <a:solidFill>
-                  <a:srgbClr val="52606F"/>
-                </a:solidFill>
-                <a:latin typeface="Arial"/>
-                <a:ea typeface="Arial"/>
-                <a:cs typeface="Arial"/>
-              </a:rPr>
-              <a:t>filters, then scores</a:t>
-            </a:r>
-          </a:p>
-        </p:txBody>
-      </p:sp>
-      <p:sp>
-        <p:nvSpPr>
-          <p:cNvPr id="11" name="">
-            <a:extLst xmlns:a="http://schemas.openxmlformats.org/drawingml/2006/main">
-              <a:ext uri="{FF2B5EF4-FFF2-40B4-BE49-F238E27FC236}">
-                <a16:creationId xmlns:a16="http://schemas.microsoft.com/office/drawing/2014/main" id="{9BDDF7D9-07B9-4E74-BC7C-33E5F68E61E3}"/>
-              </a:ext>
-            </a:extLst>
-          </p:cNvPr>
-          <p:cNvSpPr>
-            <a:spLocks xmlns:a="http://schemas.openxmlformats.org/drawingml/2006/main" noGrp="1"/>
-          </p:cNvSpPr>
-          <p:nvPr/>
-        </p:nvSpPr>
-        <p:spPr>
-          <a:xfrm xmlns:a="http://schemas.openxmlformats.org/drawingml/2006/main">
-            <a:off x="3943350" y="2400300"/>
-            <a:ext cx="228600" cy="152400"/>
-          </a:xfrm>
-          <a:prstGeom xmlns:a="http://schemas.openxmlformats.org/drawingml/2006/main" prst="rightArrow">
-            <a:avLst/>
-          </a:prstGeom>
-          <a:solidFill xmlns:a="http://schemas.openxmlformats.org/drawingml/2006/main">
-            <a:srgbClr val="8A94A3"/>
-          </a:solidFill>
-          <a:ln xmlns:a="http://schemas.openxmlformats.org/drawingml/2006/main" w="0">
-            <a:noFill/>
-            <a:prstDash val="solid"/>
-          </a:ln>
-        </p:spPr>
-      </p:sp>
-      <p:sp>
-        <p:nvSpPr>
-          <p:cNvPr id="12" name="flow-Recipient accepts">
-            <a:extLst xmlns:a="http://schemas.openxmlformats.org/drawingml/2006/main">
-              <a:ext uri="{FF2B5EF4-FFF2-40B4-BE49-F238E27FC236}">
-                <a16:creationId xmlns:a16="http://schemas.microsoft.com/office/drawing/2014/main" id="{9A4B0454-9D68-4BC9-9124-86291BB13A94}"/>
-              </a:ext>
-            </a:extLst>
-          </p:cNvPr>
-          <p:cNvSpPr>
-            <a:spLocks xmlns:a="http://schemas.openxmlformats.org/drawingml/2006/main" noGrp="1"/>
-          </p:cNvSpPr>
-          <p:nvPr/>
-        </p:nvSpPr>
-        <p:spPr>
-          <a:xfrm xmlns:a="http://schemas.openxmlformats.org/drawingml/2006/main">
-            <a:off x="4229100" y="1981200"/>
-            <a:ext cx="1428750" cy="990600"/>
-          </a:xfrm>
-          <a:prstGeom xmlns:a="http://schemas.openxmlformats.org/drawingml/2006/main" prst="roundRect">
-            <a:avLst>
-              <a:gd name="adj" fmla="val 7692"/>
-            </a:avLst>
-          </a:prstGeom>
-          <a:solidFill xmlns:a="http://schemas.openxmlformats.org/drawingml/2006/main">
-            <a:srgbClr val="FFFFFF"/>
-          </a:solidFill>
-          <a:ln xmlns:a="http://schemas.openxmlformats.org/drawingml/2006/main" w="9525">
-            <a:solidFill>
-              <a:srgbClr val="E1E5EA"/>
-            </a:solidFill>
-            <a:prstDash val="solid"/>
-          </a:ln>
-        </p:spPr>
-      </p:sp>
-      <p:sp>
-        <p:nvSpPr>
-          <p:cNvPr id="13" name="">
-            <a:extLst xmlns:a="http://schemas.openxmlformats.org/drawingml/2006/main">
-              <a:ext uri="{FF2B5EF4-FFF2-40B4-BE49-F238E27FC236}">
-                <a16:creationId xmlns:a16="http://schemas.microsoft.com/office/drawing/2014/main" id="{63F9A782-A040-4E79-9617-3772613D5B6E}"/>
-              </a:ext>
-            </a:extLst>
-          </p:cNvPr>
-          <p:cNvSpPr>
-            <a:spLocks xmlns:a="http://schemas.openxmlformats.org/drawingml/2006/main" noGrp="1"/>
-          </p:cNvSpPr>
-          <p:nvPr/>
-        </p:nvSpPr>
-        <p:spPr>
-          <a:xfrm xmlns:a="http://schemas.openxmlformats.org/drawingml/2006/main">
-            <a:off x="4324350" y="2114550"/>
-            <a:ext cx="1238250" cy="381000"/>
-          </a:xfrm>
-          <a:prstGeom xmlns:a="http://schemas.openxmlformats.org/drawingml/2006/main" prst="rect">
-            <a:avLst/>
-          </a:prstGeom>
-          <a:noFill xmlns:a="http://schemas.openxmlformats.org/drawingml/2006/main"/>
-          <a:ln xmlns:a="http://schemas.openxmlformats.org/drawingml/2006/main" w="0">
-            <a:noFill/>
-            <a:prstDash val="solid"/>
-          </a:ln>
-        </p:spPr>
-        <p:txBody>
-          <a:bodyPr xmlns:a="http://schemas.openxmlformats.org/drawingml/2006/main">
-            <a:noAutofit/>
-          </a:bodyPr>
-          <a:lstStyle xmlns:a="http://schemas.openxmlformats.org/drawingml/2006/main">
-            <a:defPPr>
-              <a:defRPr sz="1125" b="1">
-                <a:solidFill>
-                  <a:srgbClr val="131A24"/>
-                </a:solidFill>
-                <a:latin typeface="Arial"/>
-                <a:ea typeface="Arial"/>
-                <a:cs typeface="Arial"/>
-              </a:defRPr>
-            </a:defPPr>
-          </a:lstStyle>
-          <a:p xmlns:a="http://schemas.openxmlformats.org/drawingml/2006/main">
-            <a:pPr>
-              <a:defRPr sz="1125" b="1">
-                <a:solidFill>
-                  <a:srgbClr val="131A24"/>
-                </a:solidFill>
-                <a:latin typeface="Arial"/>
-                <a:ea typeface="Arial"/>
-                <a:cs typeface="Arial"/>
-              </a:defRPr>
-            </a:pPr>
-            <a:r>
-              <a:rPr sz="1125" b="1">
-                <a:solidFill>
-                  <a:srgbClr val="131A24"/>
-                </a:solidFill>
-                <a:latin typeface="Arial"/>
-                <a:ea typeface="Arial"/>
-                <a:cs typeface="Arial"/>
-              </a:rPr>
-              <a:t>Recipient accepts</a:t>
-            </a:r>
-          </a:p>
-        </p:txBody>
-      </p:sp>
-      <p:sp>
-        <p:nvSpPr>
-          <p:cNvPr id="14" name="">
-            <a:extLst xmlns:a="http://schemas.openxmlformats.org/drawingml/2006/main">
-              <a:ext uri="{FF2B5EF4-FFF2-40B4-BE49-F238E27FC236}">
-                <a16:creationId xmlns:a16="http://schemas.microsoft.com/office/drawing/2014/main" id="{C14A36A4-58F8-44B7-B58D-B94EB03F72FF}"/>
-              </a:ext>
-            </a:extLst>
-          </p:cNvPr>
-          <p:cNvSpPr>
-            <a:spLocks xmlns:a="http://schemas.openxmlformats.org/drawingml/2006/main" noGrp="1"/>
-          </p:cNvSpPr>
-          <p:nvPr/>
-        </p:nvSpPr>
-        <p:spPr>
-          <a:xfrm xmlns:a="http://schemas.openxmlformats.org/drawingml/2006/main">
-            <a:off x="4324350" y="2476500"/>
-            <a:ext cx="1238250" cy="381000"/>
-          </a:xfrm>
-          <a:prstGeom xmlns:a="http://schemas.openxmlformats.org/drawingml/2006/main" prst="rect">
-            <a:avLst/>
-          </a:prstGeom>
-          <a:noFill xmlns:a="http://schemas.openxmlformats.org/drawingml/2006/main"/>
-          <a:ln xmlns:a="http://schemas.openxmlformats.org/drawingml/2006/main" w="0">
-            <a:noFill/>
-            <a:prstDash val="solid"/>
-          </a:ln>
-        </p:spPr>
-        <p:txBody>
-          <a:bodyPr xmlns:a="http://schemas.openxmlformats.org/drawingml/2006/main">
-            <a:noAutofit/>
-          </a:bodyPr>
-          <a:lstStyle xmlns:a="http://schemas.openxmlformats.org/drawingml/2006/main">
-            <a:defPPr>
-              <a:defRPr sz="938" b="0">
-                <a:solidFill>
-                  <a:srgbClr val="52606F"/>
-                </a:solidFill>
-                <a:latin typeface="Arial"/>
-                <a:ea typeface="Arial"/>
-                <a:cs typeface="Arial"/>
-              </a:defRPr>
-            </a:defPPr>
-          </a:lstStyle>
-          <a:p xmlns:a="http://schemas.openxmlformats.org/drawingml/2006/main">
-            <a:pPr>
-              <a:defRPr sz="938" b="0">
-                <a:solidFill>
-                  <a:srgbClr val="52606F"/>
-                </a:solidFill>
-                <a:latin typeface="Arial"/>
-                <a:ea typeface="Arial"/>
-                <a:cs typeface="Arial"/>
-              </a:defRPr>
-            </a:pPr>
-            <a:r>
-              <a:rPr sz="938" b="0">
-                <a:solidFill>
-                  <a:srgbClr val="52606F"/>
-                </a:solidFill>
-                <a:latin typeface="Arial"/>
-                <a:ea typeface="Arial"/>
-                <a:cs typeface="Arial"/>
-              </a:rPr>
-              <a:t>with the reason</a:t>
-            </a:r>
-          </a:p>
-        </p:txBody>
-      </p:sp>
-      <p:sp>
-        <p:nvSpPr>
-          <p:cNvPr id="15" name="">
-            <a:extLst xmlns:a="http://schemas.openxmlformats.org/drawingml/2006/main">
-              <a:ext uri="{FF2B5EF4-FFF2-40B4-BE49-F238E27FC236}">
-                <a16:creationId xmlns:a16="http://schemas.microsoft.com/office/drawing/2014/main" id="{E7B5ADD0-9859-46B3-ADDF-1618F9828452}"/>
-              </a:ext>
-            </a:extLst>
-          </p:cNvPr>
-          <p:cNvSpPr>
-            <a:spLocks xmlns:a="http://schemas.openxmlformats.org/drawingml/2006/main" noGrp="1"/>
-          </p:cNvSpPr>
-          <p:nvPr/>
-        </p:nvSpPr>
-        <p:spPr>
-          <a:xfrm xmlns:a="http://schemas.openxmlformats.org/drawingml/2006/main">
-            <a:off x="5715000" y="2400300"/>
-            <a:ext cx="228600" cy="152400"/>
-          </a:xfrm>
-          <a:prstGeom xmlns:a="http://schemas.openxmlformats.org/drawingml/2006/main" prst="rightArrow">
-            <a:avLst/>
-          </a:prstGeom>
-          <a:solidFill xmlns:a="http://schemas.openxmlformats.org/drawingml/2006/main">
-            <a:srgbClr val="8A94A3"/>
-          </a:solidFill>
-          <a:ln xmlns:a="http://schemas.openxmlformats.org/drawingml/2006/main" w="0">
-            <a:noFill/>
-            <a:prstDash val="solid"/>
-          </a:ln>
-        </p:spPr>
-      </p:sp>
-      <p:sp>
-        <p:nvSpPr>
-          <p:cNvPr id="16" name="flow-Volunteer collects">
-            <a:extLst xmlns:a="http://schemas.openxmlformats.org/drawingml/2006/main">
-              <a:ext uri="{FF2B5EF4-FFF2-40B4-BE49-F238E27FC236}">
-                <a16:creationId xmlns:a16="http://schemas.microsoft.com/office/drawing/2014/main" id="{6C0109FD-4E33-45B6-AC7D-35AA3F65871F}"/>
-              </a:ext>
-            </a:extLst>
-          </p:cNvPr>
-          <p:cNvSpPr>
-            <a:spLocks xmlns:a="http://schemas.openxmlformats.org/drawingml/2006/main" noGrp="1"/>
-          </p:cNvSpPr>
-          <p:nvPr/>
-        </p:nvSpPr>
-        <p:spPr>
-          <a:xfrm xmlns:a="http://schemas.openxmlformats.org/drawingml/2006/main">
-            <a:off x="6000750" y="1981200"/>
-            <a:ext cx="1428750" cy="990600"/>
-          </a:xfrm>
-          <a:prstGeom xmlns:a="http://schemas.openxmlformats.org/drawingml/2006/main" prst="roundRect">
-            <a:avLst>
-              <a:gd name="adj" fmla="val 7692"/>
-            </a:avLst>
-          </a:prstGeom>
-          <a:solidFill xmlns:a="http://schemas.openxmlformats.org/drawingml/2006/main">
-            <a:srgbClr val="FFFFFF"/>
-          </a:solidFill>
-          <a:ln xmlns:a="http://schemas.openxmlformats.org/drawingml/2006/main" w="9525">
-            <a:solidFill>
-              <a:srgbClr val="E1E5EA"/>
-            </a:solidFill>
-            <a:prstDash val="solid"/>
-          </a:ln>
-        </p:spPr>
-      </p:sp>
-      <p:sp>
-        <p:nvSpPr>
-          <p:cNvPr id="17" name="">
-            <a:extLst xmlns:a="http://schemas.openxmlformats.org/drawingml/2006/main">
-              <a:ext uri="{FF2B5EF4-FFF2-40B4-BE49-F238E27FC236}">
-                <a16:creationId xmlns:a16="http://schemas.microsoft.com/office/drawing/2014/main" id="{8CD24486-4D32-4B1F-BE6F-8581A9F7F640}"/>
-              </a:ext>
-            </a:extLst>
-          </p:cNvPr>
-          <p:cNvSpPr>
-            <a:spLocks xmlns:a="http://schemas.openxmlformats.org/drawingml/2006/main" noGrp="1"/>
-          </p:cNvSpPr>
-          <p:nvPr/>
-        </p:nvSpPr>
-        <p:spPr>
-          <a:xfrm xmlns:a="http://schemas.openxmlformats.org/drawingml/2006/main">
-            <a:off x="6096000" y="2114550"/>
-            <a:ext cx="1238250" cy="381000"/>
-          </a:xfrm>
-          <a:prstGeom xmlns:a="http://schemas.openxmlformats.org/drawingml/2006/main" prst="rect">
-            <a:avLst/>
-          </a:prstGeom>
-          <a:noFill xmlns:a="http://schemas.openxmlformats.org/drawingml/2006/main"/>
-          <a:ln xmlns:a="http://schemas.openxmlformats.org/drawingml/2006/main" w="0">
-            <a:noFill/>
-            <a:prstDash val="solid"/>
-          </a:ln>
-        </p:spPr>
-        <p:txBody>
-          <a:bodyPr xmlns:a="http://schemas.openxmlformats.org/drawingml/2006/main">
-            <a:noAutofit/>
-          </a:bodyPr>
-          <a:lstStyle xmlns:a="http://schemas.openxmlformats.org/drawingml/2006/main">
-            <a:defPPr>
-              <a:defRPr sz="1125" b="1">
-                <a:solidFill>
-                  <a:srgbClr val="131A24"/>
-                </a:solidFill>
-                <a:latin typeface="Arial"/>
-                <a:ea typeface="Arial"/>
-                <a:cs typeface="Arial"/>
-              </a:defRPr>
-            </a:defPPr>
-          </a:lstStyle>
-          <a:p xmlns:a="http://schemas.openxmlformats.org/drawingml/2006/main">
-            <a:pPr>
-              <a:defRPr sz="1125" b="1">
-                <a:solidFill>
-                  <a:srgbClr val="131A24"/>
-                </a:solidFill>
-                <a:latin typeface="Arial"/>
-                <a:ea typeface="Arial"/>
-                <a:cs typeface="Arial"/>
-              </a:defRPr>
-            </a:pPr>
-            <a:r>
-              <a:rPr sz="1125" b="1">
-                <a:solidFill>
-                  <a:srgbClr val="131A24"/>
-                </a:solidFill>
-                <a:latin typeface="Arial"/>
-                <a:ea typeface="Arial"/>
-                <a:cs typeface="Arial"/>
-              </a:rPr>
-              <a:t>Volunteer collects</a:t>
-            </a:r>
-          </a:p>
-        </p:txBody>
-      </p:sp>
-      <p:sp>
-        <p:nvSpPr>
-          <p:cNvPr id="18" name="">
-            <a:extLst xmlns:a="http://schemas.openxmlformats.org/drawingml/2006/main">
-              <a:ext uri="{FF2B5EF4-FFF2-40B4-BE49-F238E27FC236}">
-                <a16:creationId xmlns:a16="http://schemas.microsoft.com/office/drawing/2014/main" id="{4AF754DD-FAA3-4565-97C1-9A391F75849A}"/>
-              </a:ext>
-            </a:extLst>
-          </p:cNvPr>
-          <p:cNvSpPr>
-            <a:spLocks xmlns:a="http://schemas.openxmlformats.org/drawingml/2006/main" noGrp="1"/>
-          </p:cNvSpPr>
-          <p:nvPr/>
-        </p:nvSpPr>
-        <p:spPr>
-          <a:xfrm xmlns:a="http://schemas.openxmlformats.org/drawingml/2006/main">
-            <a:off x="6096000" y="2476500"/>
-            <a:ext cx="1238250" cy="381000"/>
-          </a:xfrm>
-          <a:prstGeom xmlns:a="http://schemas.openxmlformats.org/drawingml/2006/main" prst="rect">
-            <a:avLst/>
-          </a:prstGeom>
-          <a:noFill xmlns:a="http://schemas.openxmlformats.org/drawingml/2006/main"/>
-          <a:ln xmlns:a="http://schemas.openxmlformats.org/drawingml/2006/main" w="0">
-            <a:noFill/>
-            <a:prstDash val="solid"/>
-          </a:ln>
-        </p:spPr>
-        <p:txBody>
-          <a:bodyPr xmlns:a="http://schemas.openxmlformats.org/drawingml/2006/main">
-            <a:noAutofit/>
-          </a:bodyPr>
-          <a:lstStyle xmlns:a="http://schemas.openxmlformats.org/drawingml/2006/main">
-            <a:defPPr>
-              <a:defRPr sz="938" b="0">
-                <a:solidFill>
-                  <a:srgbClr val="52606F"/>
-                </a:solidFill>
-                <a:latin typeface="Arial"/>
-                <a:ea typeface="Arial"/>
-                <a:cs typeface="Arial"/>
-              </a:defRPr>
-            </a:defPPr>
-          </a:lstStyle>
-          <a:p xmlns:a="http://schemas.openxmlformats.org/drawingml/2006/main">
-            <a:pPr>
-              <a:defRPr sz="938" b="0">
-                <a:solidFill>
-                  <a:srgbClr val="52606F"/>
-                </a:solidFill>
-                <a:latin typeface="Arial"/>
-                <a:ea typeface="Arial"/>
-                <a:cs typeface="Arial"/>
-              </a:defRPr>
-            </a:pPr>
-            <a:r>
-              <a:rPr sz="938" b="0">
-                <a:solidFill>
-                  <a:srgbClr val="52606F"/>
-                </a:solidFill>
-                <a:latin typeface="Arial"/>
-                <a:ea typeface="Arial"/>
-                <a:cs typeface="Arial"/>
-              </a:rPr>
-              <a:t>matched by distance</a:t>
-            </a:r>
-          </a:p>
-        </p:txBody>
-      </p:sp>
-      <p:sp>
-        <p:nvSpPr>
-          <p:cNvPr id="19" name="">
-            <a:extLst xmlns:a="http://schemas.openxmlformats.org/drawingml/2006/main">
-              <a:ext uri="{FF2B5EF4-FFF2-40B4-BE49-F238E27FC236}">
-                <a16:creationId xmlns:a16="http://schemas.microsoft.com/office/drawing/2014/main" id="{EAD1B9F4-DBE7-4278-95BD-6437464E469A}"/>
-              </a:ext>
-            </a:extLst>
-          </p:cNvPr>
-          <p:cNvSpPr>
-            <a:spLocks xmlns:a="http://schemas.openxmlformats.org/drawingml/2006/main" noGrp="1"/>
-          </p:cNvSpPr>
-          <p:nvPr/>
-        </p:nvSpPr>
-        <p:spPr>
-          <a:xfrm xmlns:a="http://schemas.openxmlformats.org/drawingml/2006/main">
-            <a:off x="7486650" y="2400300"/>
-            <a:ext cx="228600" cy="152400"/>
-          </a:xfrm>
-          <a:prstGeom xmlns:a="http://schemas.openxmlformats.org/drawingml/2006/main" prst="rightArrow">
-            <a:avLst/>
-          </a:prstGeom>
-          <a:solidFill xmlns:a="http://schemas.openxmlformats.org/drawingml/2006/main">
-            <a:srgbClr val="8A94A3"/>
-          </a:solidFill>
-          <a:ln xmlns:a="http://schemas.openxmlformats.org/drawingml/2006/main" w="0">
-            <a:noFill/>
-            <a:prstDash val="solid"/>
-          </a:ln>
-        </p:spPr>
-      </p:sp>
-      <p:sp>
-        <p:nvSpPr>
-          <p:cNvPr id="20" name="flow-Delivered">
-            <a:extLst xmlns:a="http://schemas.openxmlformats.org/drawingml/2006/main">
-              <a:ext uri="{FF2B5EF4-FFF2-40B4-BE49-F238E27FC236}">
-                <a16:creationId xmlns:a16="http://schemas.microsoft.com/office/drawing/2014/main" id="{CED9583D-6168-43D9-BBEB-FE1F19045E2A}"/>
-              </a:ext>
-            </a:extLst>
-          </p:cNvPr>
-          <p:cNvSpPr>
-            <a:spLocks xmlns:a="http://schemas.openxmlformats.org/drawingml/2006/main" noGrp="1"/>
-          </p:cNvSpPr>
-          <p:nvPr/>
-        </p:nvSpPr>
-        <p:spPr>
-          <a:xfrm xmlns:a="http://schemas.openxmlformats.org/drawingml/2006/main">
-            <a:off x="7772400" y="1981200"/>
-            <a:ext cx="1428750" cy="990600"/>
-          </a:xfrm>
-          <a:prstGeom xmlns:a="http://schemas.openxmlformats.org/drawingml/2006/main" prst="roundRect">
-            <a:avLst>
-              <a:gd name="adj" fmla="val 7692"/>
-            </a:avLst>
-          </a:prstGeom>
-          <a:solidFill xmlns:a="http://schemas.openxmlformats.org/drawingml/2006/main">
-            <a:srgbClr val="FFFFFF"/>
-          </a:solidFill>
-          <a:ln xmlns:a="http://schemas.openxmlformats.org/drawingml/2006/main" w="9525">
-            <a:solidFill>
-              <a:srgbClr val="E1E5EA"/>
-            </a:solidFill>
-            <a:prstDash val="solid"/>
-          </a:ln>
-        </p:spPr>
-      </p:sp>
-      <p:sp>
-        <p:nvSpPr>
-          <p:cNvPr id="21" name="">
-            <a:extLst xmlns:a="http://schemas.openxmlformats.org/drawingml/2006/main">
-              <a:ext uri="{FF2B5EF4-FFF2-40B4-BE49-F238E27FC236}">
-                <a16:creationId xmlns:a16="http://schemas.microsoft.com/office/drawing/2014/main" id="{642E29BD-C09E-4C0C-8F9B-8CBEEAC0736F}"/>
-              </a:ext>
-            </a:extLst>
-          </p:cNvPr>
-          <p:cNvSpPr>
-            <a:spLocks xmlns:a="http://schemas.openxmlformats.org/drawingml/2006/main" noGrp="1"/>
-          </p:cNvSpPr>
-          <p:nvPr/>
-        </p:nvSpPr>
-        <p:spPr>
-          <a:xfrm xmlns:a="http://schemas.openxmlformats.org/drawingml/2006/main">
-            <a:off x="7867650" y="2114550"/>
-            <a:ext cx="1238250" cy="381000"/>
-          </a:xfrm>
-          <a:prstGeom xmlns:a="http://schemas.openxmlformats.org/drawingml/2006/main" prst="rect">
-            <a:avLst/>
-          </a:prstGeom>
-          <a:noFill xmlns:a="http://schemas.openxmlformats.org/drawingml/2006/main"/>
-          <a:ln xmlns:a="http://schemas.openxmlformats.org/drawingml/2006/main" w="0">
-            <a:noFill/>
-            <a:prstDash val="solid"/>
-          </a:ln>
-        </p:spPr>
-        <p:txBody>
-          <a:bodyPr xmlns:a="http://schemas.openxmlformats.org/drawingml/2006/main">
-            <a:noAutofit/>
-          </a:bodyPr>
-          <a:lstStyle xmlns:a="http://schemas.openxmlformats.org/drawingml/2006/main">
-            <a:defPPr>
-              <a:defRPr sz="1125" b="1">
-                <a:solidFill>
-                  <a:srgbClr val="131A24"/>
-                </a:solidFill>
-                <a:latin typeface="Arial"/>
-                <a:ea typeface="Arial"/>
-                <a:cs typeface="Arial"/>
-              </a:defRPr>
-            </a:defPPr>
-          </a:lstStyle>
-          <a:p xmlns:a="http://schemas.openxmlformats.org/drawingml/2006/main">
-            <a:pPr>
-              <a:defRPr sz="1125" b="1">
-                <a:solidFill>
-                  <a:srgbClr val="131A24"/>
-                </a:solidFill>
-                <a:latin typeface="Arial"/>
-                <a:ea typeface="Arial"/>
-                <a:cs typeface="Arial"/>
-              </a:defRPr>
-            </a:pPr>
-            <a:r>
-              <a:rPr sz="1125" b="1">
-                <a:solidFill>
-                  <a:srgbClr val="131A24"/>
-                </a:solidFill>
-                <a:latin typeface="Arial"/>
-                <a:ea typeface="Arial"/>
-                <a:cs typeface="Arial"/>
-              </a:rPr>
-              <a:t>Delivered</a:t>
-            </a:r>
-          </a:p>
-        </p:txBody>
-      </p:sp>
-      <p:sp>
-        <p:nvSpPr>
-          <p:cNvPr id="22" name="">
-            <a:extLst xmlns:a="http://schemas.openxmlformats.org/drawingml/2006/main">
-              <a:ext uri="{FF2B5EF4-FFF2-40B4-BE49-F238E27FC236}">
-                <a16:creationId xmlns:a16="http://schemas.microsoft.com/office/drawing/2014/main" id="{86A7CE81-E7A7-480B-A6A1-A98E85E37FE9}"/>
-              </a:ext>
-            </a:extLst>
-          </p:cNvPr>
-          <p:cNvSpPr>
-            <a:spLocks xmlns:a="http://schemas.openxmlformats.org/drawingml/2006/main" noGrp="1"/>
-          </p:cNvSpPr>
-          <p:nvPr/>
-        </p:nvSpPr>
-        <p:spPr>
-          <a:xfrm xmlns:a="http://schemas.openxmlformats.org/drawingml/2006/main">
-            <a:off x="7867650" y="2476500"/>
-            <a:ext cx="1238250" cy="381000"/>
-          </a:xfrm>
-          <a:prstGeom xmlns:a="http://schemas.openxmlformats.org/drawingml/2006/main" prst="rect">
-            <a:avLst/>
-          </a:prstGeom>
-          <a:noFill xmlns:a="http://schemas.openxmlformats.org/drawingml/2006/main"/>
-          <a:ln xmlns:a="http://schemas.openxmlformats.org/drawingml/2006/main" w="0">
-            <a:noFill/>
-            <a:prstDash val="solid"/>
-          </a:ln>
-        </p:spPr>
-        <p:txBody>
-          <a:bodyPr xmlns:a="http://schemas.openxmlformats.org/drawingml/2006/main">
-            <a:noAutofit/>
-          </a:bodyPr>
-          <a:lstStyle xmlns:a="http://schemas.openxmlformats.org/drawingml/2006/main">
-            <a:defPPr>
-              <a:defRPr sz="938" b="0">
-                <a:solidFill>
-                  <a:srgbClr val="52606F"/>
-                </a:solidFill>
-                <a:latin typeface="Arial"/>
-                <a:ea typeface="Arial"/>
-                <a:cs typeface="Arial"/>
-              </a:defRPr>
-            </a:defPPr>
-          </a:lstStyle>
-          <a:p xmlns:a="http://schemas.openxmlformats.org/drawingml/2006/main">
-            <a:pPr>
-              <a:defRPr sz="938" b="0">
-                <a:solidFill>
-                  <a:srgbClr val="52606F"/>
-                </a:solidFill>
-                <a:latin typeface="Arial"/>
-                <a:ea typeface="Arial"/>
-                <a:cs typeface="Arial"/>
-              </a:defRPr>
-            </a:pPr>
-            <a:r>
-              <a:rPr sz="938" b="0">
-                <a:solidFill>
-                  <a:srgbClr val="52606F"/>
-                </a:solidFill>
-                <a:latin typeface="Arial"/>
-                <a:ea typeface="Arial"/>
-                <a:cs typeface="Arial"/>
-              </a:rPr>
-              <a:t>tracked to handover</a:t>
-            </a:r>
-          </a:p>
-        </p:txBody>
-      </p:sp>
-      <p:sp>
-        <p:nvSpPr>
-          <p:cNvPr id="23" name="">
-            <a:extLst xmlns:a="http://schemas.openxmlformats.org/drawingml/2006/main">
-              <a:ext uri="{FF2B5EF4-FFF2-40B4-BE49-F238E27FC236}">
-                <a16:creationId xmlns:a16="http://schemas.microsoft.com/office/drawing/2014/main" id="{597DD9A2-CC70-4CC1-83BD-BC4BBBB89966}"/>
-              </a:ext>
-            </a:extLst>
-          </p:cNvPr>
-          <p:cNvSpPr>
-            <a:spLocks xmlns:a="http://schemas.openxmlformats.org/drawingml/2006/main" noGrp="1"/>
-          </p:cNvSpPr>
-          <p:nvPr/>
-        </p:nvSpPr>
-        <p:spPr>
-          <a:xfrm xmlns:a="http://schemas.openxmlformats.org/drawingml/2006/main">
-            <a:off x="9258300" y="2400300"/>
-            <a:ext cx="228600" cy="152400"/>
-          </a:xfrm>
-          <a:prstGeom xmlns:a="http://schemas.openxmlformats.org/drawingml/2006/main" prst="rightArrow">
-            <a:avLst/>
-          </a:prstGeom>
-          <a:solidFill xmlns:a="http://schemas.openxmlformats.org/drawingml/2006/main">
-            <a:srgbClr val="8A94A3"/>
-          </a:solidFill>
-          <a:ln xmlns:a="http://schemas.openxmlformats.org/drawingml/2006/main" w="0">
-            <a:noFill/>
-            <a:prstDash val="solid"/>
-          </a:ln>
-        </p:spPr>
-      </p:sp>
-      <p:sp>
-        <p:nvSpPr>
-          <p:cNvPr id="24" name="flow-Reports update">
-            <a:extLst xmlns:a="http://schemas.openxmlformats.org/drawingml/2006/main">
-              <a:ext uri="{FF2B5EF4-FFF2-40B4-BE49-F238E27FC236}">
-                <a16:creationId xmlns:a16="http://schemas.microsoft.com/office/drawing/2014/main" id="{39C0D567-C5CF-443F-8AE2-F9A332880AD6}"/>
-              </a:ext>
-            </a:extLst>
-          </p:cNvPr>
-          <p:cNvSpPr>
-            <a:spLocks xmlns:a="http://schemas.openxmlformats.org/drawingml/2006/main" noGrp="1"/>
-          </p:cNvSpPr>
-          <p:nvPr/>
-        </p:nvSpPr>
-        <p:spPr>
-          <a:xfrm xmlns:a="http://schemas.openxmlformats.org/drawingml/2006/main">
-            <a:off x="9544050" y="1981200"/>
-            <a:ext cx="1428750" cy="990600"/>
-          </a:xfrm>
-          <a:prstGeom xmlns:a="http://schemas.openxmlformats.org/drawingml/2006/main" prst="roundRect">
-            <a:avLst>
-              <a:gd name="adj" fmla="val 7692"/>
-            </a:avLst>
-          </a:prstGeom>
-          <a:solidFill xmlns:a="http://schemas.openxmlformats.org/drawingml/2006/main">
-            <a:srgbClr val="FFFFFF"/>
-          </a:solidFill>
-          <a:ln xmlns:a="http://schemas.openxmlformats.org/drawingml/2006/main" w="9525">
-            <a:solidFill>
-              <a:srgbClr val="E1E5EA"/>
-            </a:solidFill>
-            <a:prstDash val="solid"/>
-          </a:ln>
-        </p:spPr>
-      </p:sp>
-      <p:sp>
-        <p:nvSpPr>
-          <p:cNvPr id="25" name="">
-            <a:extLst xmlns:a="http://schemas.openxmlformats.org/drawingml/2006/main">
-              <a:ext uri="{FF2B5EF4-FFF2-40B4-BE49-F238E27FC236}">
-                <a16:creationId xmlns:a16="http://schemas.microsoft.com/office/drawing/2014/main" id="{E3264104-8761-466A-AAD0-27CB7F87A8E1}"/>
-              </a:ext>
-            </a:extLst>
-          </p:cNvPr>
-          <p:cNvSpPr>
-            <a:spLocks xmlns:a="http://schemas.openxmlformats.org/drawingml/2006/main" noGrp="1"/>
-          </p:cNvSpPr>
-          <p:nvPr/>
-        </p:nvSpPr>
-        <p:spPr>
-          <a:xfrm xmlns:a="http://schemas.openxmlformats.org/drawingml/2006/main">
-            <a:off x="9639300" y="2114550"/>
-            <a:ext cx="1238250" cy="381000"/>
-          </a:xfrm>
-          <a:prstGeom xmlns:a="http://schemas.openxmlformats.org/drawingml/2006/main" prst="rect">
-            <a:avLst/>
-          </a:prstGeom>
-          <a:noFill xmlns:a="http://schemas.openxmlformats.org/drawingml/2006/main"/>
-          <a:ln xmlns:a="http://schemas.openxmlformats.org/drawingml/2006/main" w="0">
-            <a:noFill/>
-            <a:prstDash val="solid"/>
-          </a:ln>
-        </p:spPr>
-        <p:txBody>
-          <a:bodyPr xmlns:a="http://schemas.openxmlformats.org/drawingml/2006/main">
-            <a:noAutofit/>
-          </a:bodyPr>
-          <a:lstStyle xmlns:a="http://schemas.openxmlformats.org/drawingml/2006/main">
-            <a:defPPr>
-              <a:defRPr sz="1125" b="1">
-                <a:solidFill>
-                  <a:srgbClr val="131A24"/>
-                </a:solidFill>
-                <a:latin typeface="Arial"/>
-                <a:ea typeface="Arial"/>
-                <a:cs typeface="Arial"/>
-              </a:defRPr>
-            </a:defPPr>
-          </a:lstStyle>
-          <a:p xmlns:a="http://schemas.openxmlformats.org/drawingml/2006/main">
-            <a:pPr>
-              <a:defRPr sz="1125" b="1">
-                <a:solidFill>
-                  <a:srgbClr val="131A24"/>
-                </a:solidFill>
-                <a:latin typeface="Arial"/>
-                <a:ea typeface="Arial"/>
-                <a:cs typeface="Arial"/>
-              </a:defRPr>
-            </a:pPr>
-            <a:r>
-              <a:rPr sz="1125" b="1">
-                <a:solidFill>
-                  <a:srgbClr val="131A24"/>
-                </a:solidFill>
-                <a:latin typeface="Arial"/>
-                <a:ea typeface="Arial"/>
-                <a:cs typeface="Arial"/>
-              </a:rPr>
-              <a:t>Reports update</a:t>
-            </a:r>
-          </a:p>
-        </p:txBody>
-      </p:sp>
-      <p:sp>
-        <p:nvSpPr>
-          <p:cNvPr id="26" name="">
-            <a:extLst xmlns:a="http://schemas.openxmlformats.org/drawingml/2006/main">
-              <a:ext uri="{FF2B5EF4-FFF2-40B4-BE49-F238E27FC236}">
-                <a16:creationId xmlns:a16="http://schemas.microsoft.com/office/drawing/2014/main" id="{41A245A4-CBE7-4EA7-94EB-79344D61DAA1}"/>
-              </a:ext>
-            </a:extLst>
-          </p:cNvPr>
-          <p:cNvSpPr>
-            <a:spLocks xmlns:a="http://schemas.openxmlformats.org/drawingml/2006/main" noGrp="1"/>
-          </p:cNvSpPr>
-          <p:nvPr/>
-        </p:nvSpPr>
-        <p:spPr>
-          <a:xfrm xmlns:a="http://schemas.openxmlformats.org/drawingml/2006/main">
-            <a:off x="9639300" y="2476500"/>
-            <a:ext cx="1238250" cy="381000"/>
-          </a:xfrm>
-          <a:prstGeom xmlns:a="http://schemas.openxmlformats.org/drawingml/2006/main" prst="rect">
-            <a:avLst/>
-          </a:prstGeom>
-          <a:noFill xmlns:a="http://schemas.openxmlformats.org/drawingml/2006/main"/>
-          <a:ln xmlns:a="http://schemas.openxmlformats.org/drawingml/2006/main" w="0">
-            <a:noFill/>
-            <a:prstDash val="solid"/>
-          </a:ln>
-        </p:spPr>
-        <p:txBody>
-          <a:bodyPr xmlns:a="http://schemas.openxmlformats.org/drawingml/2006/main">
-            <a:noAutofit/>
-          </a:bodyPr>
-          <a:lstStyle xmlns:a="http://schemas.openxmlformats.org/drawingml/2006/main">
-            <a:defPPr>
-              <a:defRPr sz="938" b="0">
-                <a:solidFill>
-                  <a:srgbClr val="52606F"/>
-                </a:solidFill>
-                <a:latin typeface="Arial"/>
-                <a:ea typeface="Arial"/>
-                <a:cs typeface="Arial"/>
-              </a:defRPr>
-            </a:defPPr>
-          </a:lstStyle>
-          <a:p xmlns:a="http://schemas.openxmlformats.org/drawingml/2006/main">
-            <a:pPr>
-              <a:defRPr sz="938" b="0">
-                <a:solidFill>
-                  <a:srgbClr val="52606F"/>
-                </a:solidFill>
-                <a:latin typeface="Arial"/>
-                <a:ea typeface="Arial"/>
-                <a:cs typeface="Arial"/>
-              </a:defRPr>
-            </a:pPr>
-            <a:r>
-              <a:rPr sz="938" b="0">
-                <a:solidFill>
-                  <a:srgbClr val="52606F"/>
-                </a:solidFill>
-                <a:latin typeface="Arial"/>
-                <a:ea typeface="Arial"/>
-                <a:cs typeface="Arial"/>
-              </a:rPr>
-              <a:t>rescues and audit</a:t>
-            </a:r>
-          </a:p>
-        </p:txBody>
-      </p:sp>
-      <p:sp>
-        <p:nvSpPr>
-          <p:cNvPr id="27" name="">
-            <a:extLst xmlns:a="http://schemas.openxmlformats.org/drawingml/2006/main">
-              <a:ext uri="{FF2B5EF4-FFF2-40B4-BE49-F238E27FC236}">
-                <a16:creationId xmlns:a16="http://schemas.microsoft.com/office/drawing/2014/main" id="{78A046A4-AB87-44F8-B4AC-1BEC1ADDAC16}"/>
-              </a:ext>
-            </a:extLst>
-          </p:cNvPr>
-          <p:cNvSpPr>
-            <a:spLocks xmlns:a="http://schemas.openxmlformats.org/drawingml/2006/main" noGrp="1"/>
-          </p:cNvSpPr>
-          <p:nvPr/>
-        </p:nvSpPr>
-        <p:spPr>
-          <a:xfrm xmlns:a="http://schemas.openxmlformats.org/drawingml/2006/main">
-            <a:off x="685800" y="3543300"/>
-            <a:ext cx="10820400" cy="2095500"/>
-          </a:xfrm>
-          <a:prstGeom xmlns:a="http://schemas.openxmlformats.org/drawingml/2006/main" prst="rect">
-            <a:avLst/>
-          </a:prstGeom>
-          <a:noFill xmlns:a="http://schemas.openxmlformats.org/drawingml/2006/main"/>
-          <a:ln xmlns:a="http://schemas.openxmlformats.org/drawingml/2006/main" w="0">
-            <a:noFill/>
-            <a:prstDash val="solid"/>
-          </a:ln>
-        </p:spPr>
-        <p:txBody>
-          <a:bodyPr xmlns:a="http://schemas.openxmlformats.org/drawingml/2006/main">
-            <a:noAutofit/>
-          </a:bodyPr>
-          <a:lstStyle xmlns:a="http://schemas.openxmlformats.org/drawingml/2006/main">
-            <a:defPPr>
-              <a:defRPr sz="1575">
-                <a:solidFill>
-                  <a:srgbClr val="131A24"/>
-                </a:solidFill>
-                <a:latin typeface="Arial"/>
-                <a:ea typeface="Arial"/>
-                <a:cs typeface="Arial"/>
-              </a:defRPr>
-            </a:defPPr>
-          </a:lstStyle>
-          <a:p xmlns:a="http://schemas.openxmlformats.org/drawingml/2006/main">
-            <a:pPr marL="228600" indent="-114300">
-              <a:spcAft>
-                <a:spcPts val="1600"/>
-              </a:spcAft>
-              <a:buChar char="•"/>
-              <a:defRPr sz="1575">
-                <a:solidFill>
-                  <a:srgbClr val="131A24"/>
-                </a:solidFill>
-                <a:latin typeface="Arial"/>
-                <a:ea typeface="Arial"/>
-                <a:cs typeface="Arial"/>
-              </a:defRPr>
-            </a:pPr>
-            <a:r>
-              <a:rPr sz="1575">
-                <a:solidFill>
-                  <a:srgbClr val="131A24"/>
-                </a:solidFill>
-                <a:latin typeface="Arial"/>
-                <a:ea typeface="Arial"/>
-                <a:cs typeface="Arial"/>
-              </a:rPr>
-              <a:t>Four roles use it: donors, recipient organizations, volunteers and the administrator.</a:t>
-            </a:r>
-          </a:p>
-          <a:p xmlns:a="http://schemas.openxmlformats.org/drawingml/2006/main">
-            <a:pPr marL="228600" indent="-114300">
-              <a:spcAft>
-                <a:spcPts val="1600"/>
-              </a:spcAft>
-              <a:buChar char="•"/>
-              <a:defRPr sz="1575">
-                <a:solidFill>
-                  <a:srgbClr val="131A24"/>
-                </a:solidFill>
-                <a:latin typeface="Arial"/>
-                <a:ea typeface="Arial"/>
-                <a:cs typeface="Arial"/>
-              </a:defRPr>
-            </a:pPr>
-            <a:r>
-              <a:rPr sz="1575">
-                <a:solidFill>
-                  <a:srgbClr val="131A24"/>
-                </a:solidFill>
-                <a:latin typeface="Arial"/>
-                <a:ea typeface="Arial"/>
-                <a:cs typeface="Arial"/>
-              </a:rPr>
-              <a:t>Every allocation stores its score, the factor breakdown and a written explanation.</a:t>
-            </a:r>
-          </a:p>
-        </p:txBody>
-      </p:sp>
     </p:spTree>
     <p:extLst>
       <p:ext uri="{BB962C8B-B14F-4D97-AF65-F5344CB8AC3E}">
-        <p14:creationId xmlns:p14="http://schemas.microsoft.com/office/powerpoint/2010/main" val="487348175"/>
+        <p14:creationId xmlns:p14="http://schemas.microsoft.com/office/powerpoint/2010/main" val="1867080313"/>
       </p:ext>
     </p:extLst>
   </p:cSld>
@@ -5501,10 +5546,10 @@
       </p:grpSpPr>
       <p:sp>
         <p:nvSpPr>
-          <p:cNvPr id="30" name="slide-title">
+          <p:cNvPr id="28" name="slide-title">
             <a:extLst xmlns:a="http://schemas.openxmlformats.org/drawingml/2006/main">
               <a:ext uri="{FF2B5EF4-FFF2-40B4-BE49-F238E27FC236}">
-                <a16:creationId xmlns:a16="http://schemas.microsoft.com/office/drawing/2014/main" id="{E2F33ABD-3C02-496C-9E5D-7C1B683A559C}"/>
+                <a16:creationId xmlns:a16="http://schemas.microsoft.com/office/drawing/2014/main" id="{77B17EB2-686C-4965-BDF3-45053624BD11}"/>
               </a:ext>
             </a:extLst>
           </p:cNvPr>
@@ -5563,7 +5608,7 @@
                 <a:ea typeface="Arial"/>
                 <a:cs typeface="Arial"/>
               </a:rPr>
-              <a:t>Architecture and data</a:t>
+              <a:t>Functional scope</a:t>
             </a:r>
           </a:p>
         </p:txBody>
@@ -5573,7 +5618,7 @@
           <p:cNvPr id="2" name="slide-lead">
             <a:extLst xmlns:a="http://schemas.openxmlformats.org/drawingml/2006/main">
               <a:ext uri="{FF2B5EF4-FFF2-40B4-BE49-F238E27FC236}">
-                <a16:creationId xmlns:a16="http://schemas.microsoft.com/office/drawing/2014/main" id="{222BDE01-2460-496B-81F1-AD1B2CF2063D}"/>
+                <a16:creationId xmlns:a16="http://schemas.microsoft.com/office/drawing/2014/main" id="{B7DD30C3-6D61-4AB3-A058-AD336764662E}"/>
               </a:ext>
             </a:extLst>
           </p:cNvPr>
@@ -5632,7 +5677,7 @@
                 <a:ea typeface="Arial"/>
                 <a:cs typeface="Arial"/>
               </a:rPr>
-              <a:t>Four layers, and twelve entities in third normal form.</a:t>
+              <a:t>Four actors and sixteen use cases, all implemented in the running system.</a:t>
             </a:r>
           </a:p>
         </p:txBody>
@@ -5642,7 +5687,7 @@
           <p:cNvPr id="3" name="title-rule">
             <a:extLst xmlns:a="http://schemas.openxmlformats.org/drawingml/2006/main">
               <a:ext uri="{FF2B5EF4-FFF2-40B4-BE49-F238E27FC236}">
-                <a16:creationId xmlns:a16="http://schemas.microsoft.com/office/drawing/2014/main" id="{B6A1B48B-051C-4C2F-9C71-F3480864E3D5}"/>
+                <a16:creationId xmlns:a16="http://schemas.microsoft.com/office/drawing/2014/main" id="{EB42269D-9FB1-4BA9-BC3D-93AF8AD5C064}"/>
               </a:ext>
             </a:extLst>
           </p:cNvPr>
@@ -5670,10 +5715,10 @@
       </p:sp>
       <p:sp>
         <p:nvSpPr>
-          <p:cNvPr id="4" name="layer-Presentation">
+          <p:cNvPr id="4" name="flow-Donation registered">
             <a:extLst xmlns:a="http://schemas.openxmlformats.org/drawingml/2006/main">
               <a:ext uri="{FF2B5EF4-FFF2-40B4-BE49-F238E27FC236}">
-                <a16:creationId xmlns:a16="http://schemas.microsoft.com/office/drawing/2014/main" id="{E56DD208-0FDA-49C6-8257-B4474687BCCA}"/>
+                <a16:creationId xmlns:a16="http://schemas.microsoft.com/office/drawing/2014/main" id="{2E13E6CF-3809-42F3-B87D-66B9F1742892}"/>
               </a:ext>
             </a:extLst>
           </p:cNvPr>
@@ -5684,704 +5729,12 @@
         </p:nvSpPr>
         <p:spPr>
           <a:xfrm xmlns:a="http://schemas.openxmlformats.org/drawingml/2006/main">
-            <a:off x="685800" y="1809750"/>
-            <a:ext cx="5905500" cy="647700"/>
+            <a:off x="685800" y="2038350"/>
+            <a:ext cx="1428750" cy="990600"/>
           </a:xfrm>
           <a:prstGeom xmlns:a="http://schemas.openxmlformats.org/drawingml/2006/main" prst="roundRect">
             <a:avLst>
-              <a:gd name="adj" fmla="val 11765"/>
-            </a:avLst>
-          </a:prstGeom>
-          <a:solidFill xmlns:a="http://schemas.openxmlformats.org/drawingml/2006/main">
-            <a:srgbClr val="F5F7F8"/>
-          </a:solidFill>
-          <a:ln xmlns:a="http://schemas.openxmlformats.org/drawingml/2006/main" w="9525">
-            <a:solidFill>
-              <a:srgbClr val="E1E5EA"/>
-            </a:solidFill>
-            <a:prstDash val="solid"/>
-          </a:ln>
-        </p:spPr>
-      </p:sp>
-      <p:sp>
-        <p:nvSpPr>
-          <p:cNvPr id="5" name="">
-            <a:extLst xmlns:a="http://schemas.openxmlformats.org/drawingml/2006/main">
-              <a:ext uri="{FF2B5EF4-FFF2-40B4-BE49-F238E27FC236}">
-                <a16:creationId xmlns:a16="http://schemas.microsoft.com/office/drawing/2014/main" id="{BD9FC544-DAA4-46A4-8607-72436986F561}"/>
-              </a:ext>
-            </a:extLst>
-          </p:cNvPr>
-          <p:cNvSpPr>
-            <a:spLocks xmlns:a="http://schemas.openxmlformats.org/drawingml/2006/main" noGrp="1"/>
-          </p:cNvSpPr>
-          <p:nvPr/>
-        </p:nvSpPr>
-        <p:spPr>
-          <a:xfrm xmlns:a="http://schemas.openxmlformats.org/drawingml/2006/main">
-            <a:off x="876300" y="2000250"/>
-            <a:ext cx="1714500" cy="285750"/>
-          </a:xfrm>
-          <a:prstGeom xmlns:a="http://schemas.openxmlformats.org/drawingml/2006/main" prst="rect">
-            <a:avLst/>
-          </a:prstGeom>
-          <a:noFill xmlns:a="http://schemas.openxmlformats.org/drawingml/2006/main"/>
-          <a:ln xmlns:a="http://schemas.openxmlformats.org/drawingml/2006/main" w="0">
-            <a:noFill/>
-            <a:prstDash val="solid"/>
-          </a:ln>
-        </p:spPr>
-        <p:txBody>
-          <a:bodyPr xmlns:a="http://schemas.openxmlformats.org/drawingml/2006/main">
-            <a:noAutofit/>
-          </a:bodyPr>
-          <a:lstStyle xmlns:a="http://schemas.openxmlformats.org/drawingml/2006/main">
-            <a:defPPr>
-              <a:defRPr sz="1350" b="1">
-                <a:solidFill>
-                  <a:srgbClr val="131A24"/>
-                </a:solidFill>
-                <a:latin typeface="Arial"/>
-                <a:ea typeface="Arial"/>
-                <a:cs typeface="Arial"/>
-              </a:defRPr>
-            </a:defPPr>
-          </a:lstStyle>
-          <a:p xmlns:a="http://schemas.openxmlformats.org/drawingml/2006/main">
-            <a:pPr>
-              <a:defRPr sz="1350" b="1">
-                <a:solidFill>
-                  <a:srgbClr val="131A24"/>
-                </a:solidFill>
-                <a:latin typeface="Arial"/>
-                <a:ea typeface="Arial"/>
-                <a:cs typeface="Arial"/>
-              </a:defRPr>
-            </a:pPr>
-            <a:r>
-              <a:rPr sz="1350" b="1">
-                <a:solidFill>
-                  <a:srgbClr val="131A24"/>
-                </a:solidFill>
-                <a:latin typeface="Arial"/>
-                <a:ea typeface="Arial"/>
-                <a:cs typeface="Arial"/>
-              </a:rPr>
-              <a:t>Presentation</a:t>
-            </a:r>
-          </a:p>
-        </p:txBody>
-      </p:sp>
-      <p:sp>
-        <p:nvSpPr>
-          <p:cNvPr id="6" name="">
-            <a:extLst xmlns:a="http://schemas.openxmlformats.org/drawingml/2006/main">
-              <a:ext uri="{FF2B5EF4-FFF2-40B4-BE49-F238E27FC236}">
-                <a16:creationId xmlns:a16="http://schemas.microsoft.com/office/drawing/2014/main" id="{879ABA33-55AD-4EC1-8358-E75DC84032B0}"/>
-              </a:ext>
-            </a:extLst>
-          </p:cNvPr>
-          <p:cNvSpPr>
-            <a:spLocks xmlns:a="http://schemas.openxmlformats.org/drawingml/2006/main" noGrp="1"/>
-          </p:cNvSpPr>
-          <p:nvPr/>
-        </p:nvSpPr>
-        <p:spPr>
-          <a:xfrm xmlns:a="http://schemas.openxmlformats.org/drawingml/2006/main">
-            <a:off x="2628900" y="2019300"/>
-            <a:ext cx="3810000" cy="266700"/>
-          </a:xfrm>
-          <a:prstGeom xmlns:a="http://schemas.openxmlformats.org/drawingml/2006/main" prst="rect">
-            <a:avLst/>
-          </a:prstGeom>
-          <a:noFill xmlns:a="http://schemas.openxmlformats.org/drawingml/2006/main"/>
-          <a:ln xmlns:a="http://schemas.openxmlformats.org/drawingml/2006/main" w="0">
-            <a:noFill/>
-            <a:prstDash val="solid"/>
-          </a:ln>
-        </p:spPr>
-        <p:txBody>
-          <a:bodyPr xmlns:a="http://schemas.openxmlformats.org/drawingml/2006/main">
-            <a:noAutofit/>
-          </a:bodyPr>
-          <a:lstStyle xmlns:a="http://schemas.openxmlformats.org/drawingml/2006/main">
-            <a:defPPr>
-              <a:defRPr sz="1125" b="0">
-                <a:solidFill>
-                  <a:srgbClr val="52606F"/>
-                </a:solidFill>
-                <a:latin typeface="Arial"/>
-                <a:ea typeface="Arial"/>
-                <a:cs typeface="Arial"/>
-              </a:defRPr>
-            </a:defPPr>
-          </a:lstStyle>
-          <a:p xmlns:a="http://schemas.openxmlformats.org/drawingml/2006/main">
-            <a:pPr>
-              <a:defRPr sz="1125" b="0">
-                <a:solidFill>
-                  <a:srgbClr val="52606F"/>
-                </a:solidFill>
-                <a:latin typeface="Arial"/>
-                <a:ea typeface="Arial"/>
-                <a:cs typeface="Arial"/>
-              </a:defRPr>
-            </a:pPr>
-            <a:r>
-              <a:rPr sz="1125" b="0">
-                <a:solidFill>
-                  <a:srgbClr val="52606F"/>
-                </a:solidFill>
-                <a:latin typeface="Arial"/>
-                <a:ea typeface="Arial"/>
-                <a:cs typeface="Arial"/>
-              </a:rPr>
-              <a:t>React single page app. Four role workspaces.</a:t>
-            </a:r>
-          </a:p>
-        </p:txBody>
-      </p:sp>
-      <p:sp>
-        <p:nvSpPr>
-          <p:cNvPr id="7" name="layer-Application">
-            <a:extLst xmlns:a="http://schemas.openxmlformats.org/drawingml/2006/main">
-              <a:ext uri="{FF2B5EF4-FFF2-40B4-BE49-F238E27FC236}">
-                <a16:creationId xmlns:a16="http://schemas.microsoft.com/office/drawing/2014/main" id="{439CAF8C-F319-452E-94CA-E55BB054CAF3}"/>
-              </a:ext>
-            </a:extLst>
-          </p:cNvPr>
-          <p:cNvSpPr>
-            <a:spLocks xmlns:a="http://schemas.openxmlformats.org/drawingml/2006/main" noGrp="1"/>
-          </p:cNvSpPr>
-          <p:nvPr/>
-        </p:nvSpPr>
-        <p:spPr>
-          <a:xfrm xmlns:a="http://schemas.openxmlformats.org/drawingml/2006/main">
-            <a:off x="685800" y="2609850"/>
-            <a:ext cx="5905500" cy="647700"/>
-          </a:xfrm>
-          <a:prstGeom xmlns:a="http://schemas.openxmlformats.org/drawingml/2006/main" prst="roundRect">
-            <a:avLst>
-              <a:gd name="adj" fmla="val 11765"/>
-            </a:avLst>
-          </a:prstGeom>
-          <a:solidFill xmlns:a="http://schemas.openxmlformats.org/drawingml/2006/main">
-            <a:srgbClr val="F5F7F8"/>
-          </a:solidFill>
-          <a:ln xmlns:a="http://schemas.openxmlformats.org/drawingml/2006/main" w="9525">
-            <a:solidFill>
-              <a:srgbClr val="E1E5EA"/>
-            </a:solidFill>
-            <a:prstDash val="solid"/>
-          </a:ln>
-        </p:spPr>
-      </p:sp>
-      <p:sp>
-        <p:nvSpPr>
-          <p:cNvPr id="8" name="">
-            <a:extLst xmlns:a="http://schemas.openxmlformats.org/drawingml/2006/main">
-              <a:ext uri="{FF2B5EF4-FFF2-40B4-BE49-F238E27FC236}">
-                <a16:creationId xmlns:a16="http://schemas.microsoft.com/office/drawing/2014/main" id="{B4FD68A4-40C8-4A13-851B-6E87C2550A7B}"/>
-              </a:ext>
-            </a:extLst>
-          </p:cNvPr>
-          <p:cNvSpPr>
-            <a:spLocks xmlns:a="http://schemas.openxmlformats.org/drawingml/2006/main" noGrp="1"/>
-          </p:cNvSpPr>
-          <p:nvPr/>
-        </p:nvSpPr>
-        <p:spPr>
-          <a:xfrm xmlns:a="http://schemas.openxmlformats.org/drawingml/2006/main">
-            <a:off x="876300" y="2800350"/>
-            <a:ext cx="1714500" cy="285750"/>
-          </a:xfrm>
-          <a:prstGeom xmlns:a="http://schemas.openxmlformats.org/drawingml/2006/main" prst="rect">
-            <a:avLst/>
-          </a:prstGeom>
-          <a:noFill xmlns:a="http://schemas.openxmlformats.org/drawingml/2006/main"/>
-          <a:ln xmlns:a="http://schemas.openxmlformats.org/drawingml/2006/main" w="0">
-            <a:noFill/>
-            <a:prstDash val="solid"/>
-          </a:ln>
-        </p:spPr>
-        <p:txBody>
-          <a:bodyPr xmlns:a="http://schemas.openxmlformats.org/drawingml/2006/main">
-            <a:noAutofit/>
-          </a:bodyPr>
-          <a:lstStyle xmlns:a="http://schemas.openxmlformats.org/drawingml/2006/main">
-            <a:defPPr>
-              <a:defRPr sz="1350" b="1">
-                <a:solidFill>
-                  <a:srgbClr val="131A24"/>
-                </a:solidFill>
-                <a:latin typeface="Arial"/>
-                <a:ea typeface="Arial"/>
-                <a:cs typeface="Arial"/>
-              </a:defRPr>
-            </a:defPPr>
-          </a:lstStyle>
-          <a:p xmlns:a="http://schemas.openxmlformats.org/drawingml/2006/main">
-            <a:pPr>
-              <a:defRPr sz="1350" b="1">
-                <a:solidFill>
-                  <a:srgbClr val="131A24"/>
-                </a:solidFill>
-                <a:latin typeface="Arial"/>
-                <a:ea typeface="Arial"/>
-                <a:cs typeface="Arial"/>
-              </a:defRPr>
-            </a:pPr>
-            <a:r>
-              <a:rPr sz="1350" b="1">
-                <a:solidFill>
-                  <a:srgbClr val="131A24"/>
-                </a:solidFill>
-                <a:latin typeface="Arial"/>
-                <a:ea typeface="Arial"/>
-                <a:cs typeface="Arial"/>
-              </a:rPr>
-              <a:t>Application</a:t>
-            </a:r>
-          </a:p>
-        </p:txBody>
-      </p:sp>
-      <p:sp>
-        <p:nvSpPr>
-          <p:cNvPr id="9" name="">
-            <a:extLst xmlns:a="http://schemas.openxmlformats.org/drawingml/2006/main">
-              <a:ext uri="{FF2B5EF4-FFF2-40B4-BE49-F238E27FC236}">
-                <a16:creationId xmlns:a16="http://schemas.microsoft.com/office/drawing/2014/main" id="{7074C130-E9B0-4DF1-81F2-B28ACBC5C920}"/>
-              </a:ext>
-            </a:extLst>
-          </p:cNvPr>
-          <p:cNvSpPr>
-            <a:spLocks xmlns:a="http://schemas.openxmlformats.org/drawingml/2006/main" noGrp="1"/>
-          </p:cNvSpPr>
-          <p:nvPr/>
-        </p:nvSpPr>
-        <p:spPr>
-          <a:xfrm xmlns:a="http://schemas.openxmlformats.org/drawingml/2006/main">
-            <a:off x="2628900" y="2819400"/>
-            <a:ext cx="3810000" cy="266700"/>
-          </a:xfrm>
-          <a:prstGeom xmlns:a="http://schemas.openxmlformats.org/drawingml/2006/main" prst="rect">
-            <a:avLst/>
-          </a:prstGeom>
-          <a:noFill xmlns:a="http://schemas.openxmlformats.org/drawingml/2006/main"/>
-          <a:ln xmlns:a="http://schemas.openxmlformats.org/drawingml/2006/main" w="0">
-            <a:noFill/>
-            <a:prstDash val="solid"/>
-          </a:ln>
-        </p:spPr>
-        <p:txBody>
-          <a:bodyPr xmlns:a="http://schemas.openxmlformats.org/drawingml/2006/main">
-            <a:noAutofit/>
-          </a:bodyPr>
-          <a:lstStyle xmlns:a="http://schemas.openxmlformats.org/drawingml/2006/main">
-            <a:defPPr>
-              <a:defRPr sz="1125" b="0">
-                <a:solidFill>
-                  <a:srgbClr val="52606F"/>
-                </a:solidFill>
-                <a:latin typeface="Arial"/>
-                <a:ea typeface="Arial"/>
-                <a:cs typeface="Arial"/>
-              </a:defRPr>
-            </a:defPPr>
-          </a:lstStyle>
-          <a:p xmlns:a="http://schemas.openxmlformats.org/drawingml/2006/main">
-            <a:pPr>
-              <a:defRPr sz="1125" b="0">
-                <a:solidFill>
-                  <a:srgbClr val="52606F"/>
-                </a:solidFill>
-                <a:latin typeface="Arial"/>
-                <a:ea typeface="Arial"/>
-                <a:cs typeface="Arial"/>
-              </a:defRPr>
-            </a:pPr>
-            <a:r>
-              <a:rPr sz="1125" b="0">
-                <a:solidFill>
-                  <a:srgbClr val="52606F"/>
-                </a:solidFill>
-                <a:latin typeface="Arial"/>
-                <a:ea typeface="Arial"/>
-                <a:cs typeface="Arial"/>
-              </a:rPr>
-              <a:t>Spring Boot REST API. Authentication and endpoints.</a:t>
-            </a:r>
-          </a:p>
-        </p:txBody>
-      </p:sp>
-      <p:sp>
-        <p:nvSpPr>
-          <p:cNvPr id="10" name="layer-Business logic">
-            <a:extLst xmlns:a="http://schemas.openxmlformats.org/drawingml/2006/main">
-              <a:ext uri="{FF2B5EF4-FFF2-40B4-BE49-F238E27FC236}">
-                <a16:creationId xmlns:a16="http://schemas.microsoft.com/office/drawing/2014/main" id="{7EB64951-9955-4A8B-8595-E055C0AB958B}"/>
-              </a:ext>
-            </a:extLst>
-          </p:cNvPr>
-          <p:cNvSpPr>
-            <a:spLocks xmlns:a="http://schemas.openxmlformats.org/drawingml/2006/main" noGrp="1"/>
-          </p:cNvSpPr>
-          <p:nvPr/>
-        </p:nvSpPr>
-        <p:spPr>
-          <a:xfrm xmlns:a="http://schemas.openxmlformats.org/drawingml/2006/main">
-            <a:off x="685800" y="3409950"/>
-            <a:ext cx="5905500" cy="647700"/>
-          </a:xfrm>
-          <a:prstGeom xmlns:a="http://schemas.openxmlformats.org/drawingml/2006/main" prst="roundRect">
-            <a:avLst>
-              <a:gd name="adj" fmla="val 11765"/>
-            </a:avLst>
-          </a:prstGeom>
-          <a:solidFill xmlns:a="http://schemas.openxmlformats.org/drawingml/2006/main">
-            <a:srgbClr val="F5F7F8"/>
-          </a:solidFill>
-          <a:ln xmlns:a="http://schemas.openxmlformats.org/drawingml/2006/main" w="9525">
-            <a:solidFill>
-              <a:srgbClr val="E1E5EA"/>
-            </a:solidFill>
-            <a:prstDash val="solid"/>
-          </a:ln>
-        </p:spPr>
-      </p:sp>
-      <p:sp>
-        <p:nvSpPr>
-          <p:cNvPr id="11" name="">
-            <a:extLst xmlns:a="http://schemas.openxmlformats.org/drawingml/2006/main">
-              <a:ext uri="{FF2B5EF4-FFF2-40B4-BE49-F238E27FC236}">
-                <a16:creationId xmlns:a16="http://schemas.microsoft.com/office/drawing/2014/main" id="{0E58E29F-B61A-4800-97AB-663925F9A9F0}"/>
-              </a:ext>
-            </a:extLst>
-          </p:cNvPr>
-          <p:cNvSpPr>
-            <a:spLocks xmlns:a="http://schemas.openxmlformats.org/drawingml/2006/main" noGrp="1"/>
-          </p:cNvSpPr>
-          <p:nvPr/>
-        </p:nvSpPr>
-        <p:spPr>
-          <a:xfrm xmlns:a="http://schemas.openxmlformats.org/drawingml/2006/main">
-            <a:off x="876300" y="3600450"/>
-            <a:ext cx="1714500" cy="285750"/>
-          </a:xfrm>
-          <a:prstGeom xmlns:a="http://schemas.openxmlformats.org/drawingml/2006/main" prst="rect">
-            <a:avLst/>
-          </a:prstGeom>
-          <a:noFill xmlns:a="http://schemas.openxmlformats.org/drawingml/2006/main"/>
-          <a:ln xmlns:a="http://schemas.openxmlformats.org/drawingml/2006/main" w="0">
-            <a:noFill/>
-            <a:prstDash val="solid"/>
-          </a:ln>
-        </p:spPr>
-        <p:txBody>
-          <a:bodyPr xmlns:a="http://schemas.openxmlformats.org/drawingml/2006/main">
-            <a:noAutofit/>
-          </a:bodyPr>
-          <a:lstStyle xmlns:a="http://schemas.openxmlformats.org/drawingml/2006/main">
-            <a:defPPr>
-              <a:defRPr sz="1350" b="1">
-                <a:solidFill>
-                  <a:srgbClr val="131A24"/>
-                </a:solidFill>
-                <a:latin typeface="Arial"/>
-                <a:ea typeface="Arial"/>
-                <a:cs typeface="Arial"/>
-              </a:defRPr>
-            </a:defPPr>
-          </a:lstStyle>
-          <a:p xmlns:a="http://schemas.openxmlformats.org/drawingml/2006/main">
-            <a:pPr>
-              <a:defRPr sz="1350" b="1">
-                <a:solidFill>
-                  <a:srgbClr val="131A24"/>
-                </a:solidFill>
-                <a:latin typeface="Arial"/>
-                <a:ea typeface="Arial"/>
-                <a:cs typeface="Arial"/>
-              </a:defRPr>
-            </a:pPr>
-            <a:r>
-              <a:rPr sz="1350" b="1">
-                <a:solidFill>
-                  <a:srgbClr val="131A24"/>
-                </a:solidFill>
-                <a:latin typeface="Arial"/>
-                <a:ea typeface="Arial"/>
-                <a:cs typeface="Arial"/>
-              </a:rPr>
-              <a:t>Business logic</a:t>
-            </a:r>
-          </a:p>
-        </p:txBody>
-      </p:sp>
-      <p:sp>
-        <p:nvSpPr>
-          <p:cNvPr id="12" name="">
-            <a:extLst xmlns:a="http://schemas.openxmlformats.org/drawingml/2006/main">
-              <a:ext uri="{FF2B5EF4-FFF2-40B4-BE49-F238E27FC236}">
-                <a16:creationId xmlns:a16="http://schemas.microsoft.com/office/drawing/2014/main" id="{9FC722DE-833D-42F3-AE30-E4DAEF185F4F}"/>
-              </a:ext>
-            </a:extLst>
-          </p:cNvPr>
-          <p:cNvSpPr>
-            <a:spLocks xmlns:a="http://schemas.openxmlformats.org/drawingml/2006/main" noGrp="1"/>
-          </p:cNvSpPr>
-          <p:nvPr/>
-        </p:nvSpPr>
-        <p:spPr>
-          <a:xfrm xmlns:a="http://schemas.openxmlformats.org/drawingml/2006/main">
-            <a:off x="2628900" y="3619500"/>
-            <a:ext cx="3810000" cy="266700"/>
-          </a:xfrm>
-          <a:prstGeom xmlns:a="http://schemas.openxmlformats.org/drawingml/2006/main" prst="rect">
-            <a:avLst/>
-          </a:prstGeom>
-          <a:noFill xmlns:a="http://schemas.openxmlformats.org/drawingml/2006/main"/>
-          <a:ln xmlns:a="http://schemas.openxmlformats.org/drawingml/2006/main" w="0">
-            <a:noFill/>
-            <a:prstDash val="solid"/>
-          </a:ln>
-        </p:spPr>
-        <p:txBody>
-          <a:bodyPr xmlns:a="http://schemas.openxmlformats.org/drawingml/2006/main">
-            <a:noAutofit/>
-          </a:bodyPr>
-          <a:lstStyle xmlns:a="http://schemas.openxmlformats.org/drawingml/2006/main">
-            <a:defPPr>
-              <a:defRPr sz="1125" b="0">
-                <a:solidFill>
-                  <a:srgbClr val="52606F"/>
-                </a:solidFill>
-                <a:latin typeface="Arial"/>
-                <a:ea typeface="Arial"/>
-                <a:cs typeface="Arial"/>
-              </a:defRPr>
-            </a:defPPr>
-          </a:lstStyle>
-          <a:p xmlns:a="http://schemas.openxmlformats.org/drawingml/2006/main">
-            <a:pPr>
-              <a:defRPr sz="1125" b="0">
-                <a:solidFill>
-                  <a:srgbClr val="52606F"/>
-                </a:solidFill>
-                <a:latin typeface="Arial"/>
-                <a:ea typeface="Arial"/>
-                <a:cs typeface="Arial"/>
-              </a:defRPr>
-            </a:pPr>
-            <a:r>
-              <a:rPr sz="1125" b="0">
-                <a:solidFill>
-                  <a:srgbClr val="52606F"/>
-                </a:solidFill>
-                <a:latin typeface="Arial"/>
-                <a:ea typeface="Arial"/>
-                <a:cs typeface="Arial"/>
-              </a:rPr>
-              <a:t>Services, including the allocation engine.</a:t>
-            </a:r>
-          </a:p>
-        </p:txBody>
-      </p:sp>
-      <p:sp>
-        <p:nvSpPr>
-          <p:cNvPr id="13" name="layer-Data">
-            <a:extLst xmlns:a="http://schemas.openxmlformats.org/drawingml/2006/main">
-              <a:ext uri="{FF2B5EF4-FFF2-40B4-BE49-F238E27FC236}">
-                <a16:creationId xmlns:a16="http://schemas.microsoft.com/office/drawing/2014/main" id="{EA4215D0-6A04-4497-BD91-1EFDF4D1B561}"/>
-              </a:ext>
-            </a:extLst>
-          </p:cNvPr>
-          <p:cNvSpPr>
-            <a:spLocks xmlns:a="http://schemas.openxmlformats.org/drawingml/2006/main" noGrp="1"/>
-          </p:cNvSpPr>
-          <p:nvPr/>
-        </p:nvSpPr>
-        <p:spPr>
-          <a:xfrm xmlns:a="http://schemas.openxmlformats.org/drawingml/2006/main">
-            <a:off x="685800" y="4210050"/>
-            <a:ext cx="5905500" cy="647700"/>
-          </a:xfrm>
-          <a:prstGeom xmlns:a="http://schemas.openxmlformats.org/drawingml/2006/main" prst="roundRect">
-            <a:avLst>
-              <a:gd name="adj" fmla="val 11765"/>
-            </a:avLst>
-          </a:prstGeom>
-          <a:solidFill xmlns:a="http://schemas.openxmlformats.org/drawingml/2006/main">
-            <a:srgbClr val="F5F7F8"/>
-          </a:solidFill>
-          <a:ln xmlns:a="http://schemas.openxmlformats.org/drawingml/2006/main" w="9525">
-            <a:solidFill>
-              <a:srgbClr val="E1E5EA"/>
-            </a:solidFill>
-            <a:prstDash val="solid"/>
-          </a:ln>
-        </p:spPr>
-      </p:sp>
-      <p:sp>
-        <p:nvSpPr>
-          <p:cNvPr id="14" name="">
-            <a:extLst xmlns:a="http://schemas.openxmlformats.org/drawingml/2006/main">
-              <a:ext uri="{FF2B5EF4-FFF2-40B4-BE49-F238E27FC236}">
-                <a16:creationId xmlns:a16="http://schemas.microsoft.com/office/drawing/2014/main" id="{244B6759-292D-4562-9EB5-066492363714}"/>
-              </a:ext>
-            </a:extLst>
-          </p:cNvPr>
-          <p:cNvSpPr>
-            <a:spLocks xmlns:a="http://schemas.openxmlformats.org/drawingml/2006/main" noGrp="1"/>
-          </p:cNvSpPr>
-          <p:nvPr/>
-        </p:nvSpPr>
-        <p:spPr>
-          <a:xfrm xmlns:a="http://schemas.openxmlformats.org/drawingml/2006/main">
-            <a:off x="876300" y="4400550"/>
-            <a:ext cx="1714500" cy="285750"/>
-          </a:xfrm>
-          <a:prstGeom xmlns:a="http://schemas.openxmlformats.org/drawingml/2006/main" prst="rect">
-            <a:avLst/>
-          </a:prstGeom>
-          <a:noFill xmlns:a="http://schemas.openxmlformats.org/drawingml/2006/main"/>
-          <a:ln xmlns:a="http://schemas.openxmlformats.org/drawingml/2006/main" w="0">
-            <a:noFill/>
-            <a:prstDash val="solid"/>
-          </a:ln>
-        </p:spPr>
-        <p:txBody>
-          <a:bodyPr xmlns:a="http://schemas.openxmlformats.org/drawingml/2006/main">
-            <a:noAutofit/>
-          </a:bodyPr>
-          <a:lstStyle xmlns:a="http://schemas.openxmlformats.org/drawingml/2006/main">
-            <a:defPPr>
-              <a:defRPr sz="1350" b="1">
-                <a:solidFill>
-                  <a:srgbClr val="131A24"/>
-                </a:solidFill>
-                <a:latin typeface="Arial"/>
-                <a:ea typeface="Arial"/>
-                <a:cs typeface="Arial"/>
-              </a:defRPr>
-            </a:defPPr>
-          </a:lstStyle>
-          <a:p xmlns:a="http://schemas.openxmlformats.org/drawingml/2006/main">
-            <a:pPr>
-              <a:defRPr sz="1350" b="1">
-                <a:solidFill>
-                  <a:srgbClr val="131A24"/>
-                </a:solidFill>
-                <a:latin typeface="Arial"/>
-                <a:ea typeface="Arial"/>
-                <a:cs typeface="Arial"/>
-              </a:defRPr>
-            </a:pPr>
-            <a:r>
-              <a:rPr sz="1350" b="1">
-                <a:solidFill>
-                  <a:srgbClr val="131A24"/>
-                </a:solidFill>
-                <a:latin typeface="Arial"/>
-                <a:ea typeface="Arial"/>
-                <a:cs typeface="Arial"/>
-              </a:rPr>
-              <a:t>Data</a:t>
-            </a:r>
-          </a:p>
-        </p:txBody>
-      </p:sp>
-      <p:sp>
-        <p:nvSpPr>
-          <p:cNvPr id="15" name="">
-            <a:extLst xmlns:a="http://schemas.openxmlformats.org/drawingml/2006/main">
-              <a:ext uri="{FF2B5EF4-FFF2-40B4-BE49-F238E27FC236}">
-                <a16:creationId xmlns:a16="http://schemas.microsoft.com/office/drawing/2014/main" id="{DEDD5F03-6028-4D68-A4A1-AF3DF2AB32C4}"/>
-              </a:ext>
-            </a:extLst>
-          </p:cNvPr>
-          <p:cNvSpPr>
-            <a:spLocks xmlns:a="http://schemas.openxmlformats.org/drawingml/2006/main" noGrp="1"/>
-          </p:cNvSpPr>
-          <p:nvPr/>
-        </p:nvSpPr>
-        <p:spPr>
-          <a:xfrm xmlns:a="http://schemas.openxmlformats.org/drawingml/2006/main">
-            <a:off x="2628900" y="4419600"/>
-            <a:ext cx="3810000" cy="266700"/>
-          </a:xfrm>
-          <a:prstGeom xmlns:a="http://schemas.openxmlformats.org/drawingml/2006/main" prst="rect">
-            <a:avLst/>
-          </a:prstGeom>
-          <a:noFill xmlns:a="http://schemas.openxmlformats.org/drawingml/2006/main"/>
-          <a:ln xmlns:a="http://schemas.openxmlformats.org/drawingml/2006/main" w="0">
-            <a:noFill/>
-            <a:prstDash val="solid"/>
-          </a:ln>
-        </p:spPr>
-        <p:txBody>
-          <a:bodyPr xmlns:a="http://schemas.openxmlformats.org/drawingml/2006/main">
-            <a:noAutofit/>
-          </a:bodyPr>
-          <a:lstStyle xmlns:a="http://schemas.openxmlformats.org/drawingml/2006/main">
-            <a:defPPr>
-              <a:defRPr sz="1125" b="0">
-                <a:solidFill>
-                  <a:srgbClr val="52606F"/>
-                </a:solidFill>
-                <a:latin typeface="Arial"/>
-                <a:ea typeface="Arial"/>
-                <a:cs typeface="Arial"/>
-              </a:defRPr>
-            </a:defPPr>
-          </a:lstStyle>
-          <a:p xmlns:a="http://schemas.openxmlformats.org/drawingml/2006/main">
-            <a:pPr>
-              <a:defRPr sz="1125" b="0">
-                <a:solidFill>
-                  <a:srgbClr val="52606F"/>
-                </a:solidFill>
-                <a:latin typeface="Arial"/>
-                <a:ea typeface="Arial"/>
-                <a:cs typeface="Arial"/>
-              </a:defRPr>
-            </a:pPr>
-            <a:r>
-              <a:rPr sz="1125" b="0">
-                <a:solidFill>
-                  <a:srgbClr val="52606F"/>
-                </a:solidFill>
-                <a:latin typeface="Arial"/>
-                <a:ea typeface="Arial"/>
-                <a:cs typeface="Arial"/>
-              </a:rPr>
-              <a:t>Spring Data JPA over MySQL.</a:t>
-            </a:r>
-          </a:p>
-        </p:txBody>
-      </p:sp>
-      <p:sp>
-        <p:nvSpPr>
-          <p:cNvPr id="16" name="flow-User">
-            <a:extLst xmlns:a="http://schemas.openxmlformats.org/drawingml/2006/main">
-              <a:ext uri="{FF2B5EF4-FFF2-40B4-BE49-F238E27FC236}">
-                <a16:creationId xmlns:a16="http://schemas.microsoft.com/office/drawing/2014/main" id="{E21683F6-E25E-44CD-8DDB-3DB70D19B386}"/>
-              </a:ext>
-            </a:extLst>
-          </p:cNvPr>
-          <p:cNvSpPr>
-            <a:spLocks xmlns:a="http://schemas.openxmlformats.org/drawingml/2006/main" noGrp="1"/>
-          </p:cNvSpPr>
-          <p:nvPr/>
-        </p:nvSpPr>
-        <p:spPr>
-          <a:xfrm xmlns:a="http://schemas.openxmlformats.org/drawingml/2006/main">
-            <a:off x="7124700" y="1809750"/>
-            <a:ext cx="2857500" cy="419100"/>
-          </a:xfrm>
-          <a:prstGeom xmlns:a="http://schemas.openxmlformats.org/drawingml/2006/main" prst="roundRect">
-            <a:avLst>
-              <a:gd name="adj" fmla="val 18182"/>
+              <a:gd name="adj" fmla="val 7692"/>
             </a:avLst>
           </a:prstGeom>
           <a:solidFill xmlns:a="http://schemas.openxmlformats.org/drawingml/2006/main">
@@ -6397,10 +5750,10 @@
       </p:sp>
       <p:sp>
         <p:nvSpPr>
-          <p:cNvPr id="17" name="">
+          <p:cNvPr id="5" name="">
             <a:extLst xmlns:a="http://schemas.openxmlformats.org/drawingml/2006/main">
               <a:ext uri="{FF2B5EF4-FFF2-40B4-BE49-F238E27FC236}">
-                <a16:creationId xmlns:a16="http://schemas.microsoft.com/office/drawing/2014/main" id="{C33C4AED-488C-45A5-AFAC-6886B417DB29}"/>
+                <a16:creationId xmlns:a16="http://schemas.microsoft.com/office/drawing/2014/main" id="{E3AC78C6-6A9A-45D1-9E8F-DAB35DB5376E}"/>
               </a:ext>
             </a:extLst>
           </p:cNvPr>
@@ -6411,8 +5764,8 @@
         </p:nvSpPr>
         <p:spPr>
           <a:xfrm xmlns:a="http://schemas.openxmlformats.org/drawingml/2006/main">
-            <a:off x="7219950" y="1943100"/>
-            <a:ext cx="2667000" cy="381000"/>
+            <a:off x="781050" y="2171700"/>
+            <a:ext cx="1238250" cy="381000"/>
           </a:xfrm>
           <a:prstGeom xmlns:a="http://schemas.openxmlformats.org/drawingml/2006/main" prst="rect">
             <a:avLst/>
@@ -6459,17 +5812,17 @@
                 <a:ea typeface="Arial"/>
                 <a:cs typeface="Arial"/>
               </a:rPr>
-              <a:t>User</a:t>
+              <a:t>Donation registered</a:t>
             </a:r>
           </a:p>
         </p:txBody>
       </p:sp>
       <p:sp>
         <p:nvSpPr>
-          <p:cNvPr id="18" name="flow-Donor">
+          <p:cNvPr id="6" name="">
             <a:extLst xmlns:a="http://schemas.openxmlformats.org/drawingml/2006/main">
               <a:ext uri="{FF2B5EF4-FFF2-40B4-BE49-F238E27FC236}">
-                <a16:creationId xmlns:a16="http://schemas.microsoft.com/office/drawing/2014/main" id="{7641B98A-B905-4BE1-A1DE-217420B7A9D5}"/>
+                <a16:creationId xmlns:a16="http://schemas.microsoft.com/office/drawing/2014/main" id="{28158BB2-8F5F-4738-A105-539CFB3614BE}"/>
               </a:ext>
             </a:extLst>
           </p:cNvPr>
@@ -6480,12 +5833,112 @@
         </p:nvSpPr>
         <p:spPr>
           <a:xfrm xmlns:a="http://schemas.openxmlformats.org/drawingml/2006/main">
-            <a:off x="7124700" y="2305050"/>
-            <a:ext cx="2857500" cy="419100"/>
+            <a:off x="781050" y="2533650"/>
+            <a:ext cx="1238250" cy="381000"/>
+          </a:xfrm>
+          <a:prstGeom xmlns:a="http://schemas.openxmlformats.org/drawingml/2006/main" prst="rect">
+            <a:avLst/>
+          </a:prstGeom>
+          <a:noFill xmlns:a="http://schemas.openxmlformats.org/drawingml/2006/main"/>
+          <a:ln xmlns:a="http://schemas.openxmlformats.org/drawingml/2006/main" w="0">
+            <a:noFill/>
+            <a:prstDash val="solid"/>
+          </a:ln>
+        </p:spPr>
+        <p:txBody>
+          <a:bodyPr xmlns:a="http://schemas.openxmlformats.org/drawingml/2006/main">
+            <a:noAutofit/>
+          </a:bodyPr>
+          <a:lstStyle xmlns:a="http://schemas.openxmlformats.org/drawingml/2006/main">
+            <a:defPPr>
+              <a:defRPr sz="938" b="0">
+                <a:solidFill>
+                  <a:srgbClr val="52606F"/>
+                </a:solidFill>
+                <a:latin typeface="Arial"/>
+                <a:ea typeface="Arial"/>
+                <a:cs typeface="Arial"/>
+              </a:defRPr>
+            </a:defPPr>
+          </a:lstStyle>
+          <a:p xmlns:a="http://schemas.openxmlformats.org/drawingml/2006/main">
+            <a:pPr>
+              <a:defRPr sz="938" b="0">
+                <a:solidFill>
+                  <a:srgbClr val="52606F"/>
+                </a:solidFill>
+                <a:latin typeface="Arial"/>
+                <a:ea typeface="Arial"/>
+                <a:cs typeface="Arial"/>
+              </a:defRPr>
+            </a:pPr>
+            <a:r>
+              <a:rPr sz="938" b="0">
+                <a:solidFill>
+                  <a:srgbClr val="52606F"/>
+                </a:solidFill>
+                <a:latin typeface="Arial"/>
+                <a:ea typeface="Arial"/>
+                <a:cs typeface="Arial"/>
+              </a:rPr>
+              <a:t>donor submits details</a:t>
+            </a:r>
+          </a:p>
+        </p:txBody>
+      </p:sp>
+      <p:sp>
+        <p:nvSpPr>
+          <p:cNvPr id="7" name="">
+            <a:extLst xmlns:a="http://schemas.openxmlformats.org/drawingml/2006/main">
+              <a:ext uri="{FF2B5EF4-FFF2-40B4-BE49-F238E27FC236}">
+                <a16:creationId xmlns:a16="http://schemas.microsoft.com/office/drawing/2014/main" id="{9CA3B303-F36F-401A-B279-CC1ED34271A6}"/>
+              </a:ext>
+            </a:extLst>
+          </p:cNvPr>
+          <p:cNvSpPr>
+            <a:spLocks xmlns:a="http://schemas.openxmlformats.org/drawingml/2006/main" noGrp="1"/>
+          </p:cNvSpPr>
+          <p:nvPr/>
+        </p:nvSpPr>
+        <p:spPr>
+          <a:xfrm xmlns:a="http://schemas.openxmlformats.org/drawingml/2006/main">
+            <a:off x="2171700" y="2457450"/>
+            <a:ext cx="228600" cy="152400"/>
+          </a:xfrm>
+          <a:prstGeom xmlns:a="http://schemas.openxmlformats.org/drawingml/2006/main" prst="rightArrow">
+            <a:avLst/>
+          </a:prstGeom>
+          <a:solidFill xmlns:a="http://schemas.openxmlformats.org/drawingml/2006/main">
+            <a:srgbClr val="8A94A3"/>
+          </a:solidFill>
+          <a:ln xmlns:a="http://schemas.openxmlformats.org/drawingml/2006/main" w="0">
+            <a:noFill/>
+            <a:prstDash val="solid"/>
+          </a:ln>
+        </p:spPr>
+      </p:sp>
+      <p:sp>
+        <p:nvSpPr>
+          <p:cNvPr id="8" name="flow-Engine ranks recipients">
+            <a:extLst xmlns:a="http://schemas.openxmlformats.org/drawingml/2006/main">
+              <a:ext uri="{FF2B5EF4-FFF2-40B4-BE49-F238E27FC236}">
+                <a16:creationId xmlns:a16="http://schemas.microsoft.com/office/drawing/2014/main" id="{76FC2C93-2DA2-4B72-9D86-26B480358AB4}"/>
+              </a:ext>
+            </a:extLst>
+          </p:cNvPr>
+          <p:cNvSpPr>
+            <a:spLocks xmlns:a="http://schemas.openxmlformats.org/drawingml/2006/main" noGrp="1"/>
+          </p:cNvSpPr>
+          <p:nvPr/>
+        </p:nvSpPr>
+        <p:spPr>
+          <a:xfrm xmlns:a="http://schemas.openxmlformats.org/drawingml/2006/main">
+            <a:off x="2457450" y="2038350"/>
+            <a:ext cx="1428750" cy="990600"/>
           </a:xfrm>
           <a:prstGeom xmlns:a="http://schemas.openxmlformats.org/drawingml/2006/main" prst="roundRect">
             <a:avLst>
-              <a:gd name="adj" fmla="val 18182"/>
+              <a:gd name="adj" fmla="val 7692"/>
             </a:avLst>
           </a:prstGeom>
           <a:solidFill xmlns:a="http://schemas.openxmlformats.org/drawingml/2006/main">
@@ -6501,10 +5954,10 @@
       </p:sp>
       <p:sp>
         <p:nvSpPr>
-          <p:cNvPr id="19" name="">
+          <p:cNvPr id="9" name="">
             <a:extLst xmlns:a="http://schemas.openxmlformats.org/drawingml/2006/main">
               <a:ext uri="{FF2B5EF4-FFF2-40B4-BE49-F238E27FC236}">
-                <a16:creationId xmlns:a16="http://schemas.microsoft.com/office/drawing/2014/main" id="{756D00EF-6E70-4566-AB1E-7C6411CB6A38}"/>
+                <a16:creationId xmlns:a16="http://schemas.microsoft.com/office/drawing/2014/main" id="{38110290-AA22-441D-A1AD-F91B415F3862}"/>
               </a:ext>
             </a:extLst>
           </p:cNvPr>
@@ -6515,8 +5968,8 @@
         </p:nvSpPr>
         <p:spPr>
           <a:xfrm xmlns:a="http://schemas.openxmlformats.org/drawingml/2006/main">
-            <a:off x="7219950" y="2438400"/>
-            <a:ext cx="2667000" cy="381000"/>
+            <a:off x="2552700" y="2171700"/>
+            <a:ext cx="1238250" cy="381000"/>
           </a:xfrm>
           <a:prstGeom xmlns:a="http://schemas.openxmlformats.org/drawingml/2006/main" prst="rect">
             <a:avLst/>
@@ -6563,17 +6016,17 @@
                 <a:ea typeface="Arial"/>
                 <a:cs typeface="Arial"/>
               </a:rPr>
-              <a:t>Donor</a:t>
+              <a:t>Engine ranks recipients</a:t>
             </a:r>
           </a:p>
         </p:txBody>
       </p:sp>
       <p:sp>
         <p:nvSpPr>
-          <p:cNvPr id="20" name="flow-Food donation">
+          <p:cNvPr id="10" name="">
             <a:extLst xmlns:a="http://schemas.openxmlformats.org/drawingml/2006/main">
               <a:ext uri="{FF2B5EF4-FFF2-40B4-BE49-F238E27FC236}">
-                <a16:creationId xmlns:a16="http://schemas.microsoft.com/office/drawing/2014/main" id="{6D778760-477A-4C7A-817C-AA7B6D812AA8}"/>
+                <a16:creationId xmlns:a16="http://schemas.microsoft.com/office/drawing/2014/main" id="{3AF2E221-9F4F-4F63-A2F5-FF027A6D04C7}"/>
               </a:ext>
             </a:extLst>
           </p:cNvPr>
@@ -6584,12 +6037,112 @@
         </p:nvSpPr>
         <p:spPr>
           <a:xfrm xmlns:a="http://schemas.openxmlformats.org/drawingml/2006/main">
-            <a:off x="7124700" y="2800350"/>
-            <a:ext cx="2857500" cy="419100"/>
+            <a:off x="2552700" y="2533650"/>
+            <a:ext cx="1238250" cy="381000"/>
+          </a:xfrm>
+          <a:prstGeom xmlns:a="http://schemas.openxmlformats.org/drawingml/2006/main" prst="rect">
+            <a:avLst/>
+          </a:prstGeom>
+          <a:noFill xmlns:a="http://schemas.openxmlformats.org/drawingml/2006/main"/>
+          <a:ln xmlns:a="http://schemas.openxmlformats.org/drawingml/2006/main" w="0">
+            <a:noFill/>
+            <a:prstDash val="solid"/>
+          </a:ln>
+        </p:spPr>
+        <p:txBody>
+          <a:bodyPr xmlns:a="http://schemas.openxmlformats.org/drawingml/2006/main">
+            <a:noAutofit/>
+          </a:bodyPr>
+          <a:lstStyle xmlns:a="http://schemas.openxmlformats.org/drawingml/2006/main">
+            <a:defPPr>
+              <a:defRPr sz="938" b="0">
+                <a:solidFill>
+                  <a:srgbClr val="52606F"/>
+                </a:solidFill>
+                <a:latin typeface="Arial"/>
+                <a:ea typeface="Arial"/>
+                <a:cs typeface="Arial"/>
+              </a:defRPr>
+            </a:defPPr>
+          </a:lstStyle>
+          <a:p xmlns:a="http://schemas.openxmlformats.org/drawingml/2006/main">
+            <a:pPr>
+              <a:defRPr sz="938" b="0">
+                <a:solidFill>
+                  <a:srgbClr val="52606F"/>
+                </a:solidFill>
+                <a:latin typeface="Arial"/>
+                <a:ea typeface="Arial"/>
+                <a:cs typeface="Arial"/>
+              </a:defRPr>
+            </a:pPr>
+            <a:r>
+              <a:rPr sz="938" b="0">
+                <a:solidFill>
+                  <a:srgbClr val="52606F"/>
+                </a:solidFill>
+                <a:latin typeface="Arial"/>
+                <a:ea typeface="Arial"/>
+                <a:cs typeface="Arial"/>
+              </a:rPr>
+              <a:t>constraints, then scoring</a:t>
+            </a:r>
+          </a:p>
+        </p:txBody>
+      </p:sp>
+      <p:sp>
+        <p:nvSpPr>
+          <p:cNvPr id="11" name="">
+            <a:extLst xmlns:a="http://schemas.openxmlformats.org/drawingml/2006/main">
+              <a:ext uri="{FF2B5EF4-FFF2-40B4-BE49-F238E27FC236}">
+                <a16:creationId xmlns:a16="http://schemas.microsoft.com/office/drawing/2014/main" id="{BBD0050E-B788-4379-B455-0532795A5995}"/>
+              </a:ext>
+            </a:extLst>
+          </p:cNvPr>
+          <p:cNvSpPr>
+            <a:spLocks xmlns:a="http://schemas.openxmlformats.org/drawingml/2006/main" noGrp="1"/>
+          </p:cNvSpPr>
+          <p:nvPr/>
+        </p:nvSpPr>
+        <p:spPr>
+          <a:xfrm xmlns:a="http://schemas.openxmlformats.org/drawingml/2006/main">
+            <a:off x="3943350" y="2457450"/>
+            <a:ext cx="228600" cy="152400"/>
+          </a:xfrm>
+          <a:prstGeom xmlns:a="http://schemas.openxmlformats.org/drawingml/2006/main" prst="rightArrow">
+            <a:avLst/>
+          </a:prstGeom>
+          <a:solidFill xmlns:a="http://schemas.openxmlformats.org/drawingml/2006/main">
+            <a:srgbClr val="8A94A3"/>
+          </a:solidFill>
+          <a:ln xmlns:a="http://schemas.openxmlformats.org/drawingml/2006/main" w="0">
+            <a:noFill/>
+            <a:prstDash val="solid"/>
+          </a:ln>
+        </p:spPr>
+      </p:sp>
+      <p:sp>
+        <p:nvSpPr>
+          <p:cNvPr id="12" name="flow-Recipient accepts">
+            <a:extLst xmlns:a="http://schemas.openxmlformats.org/drawingml/2006/main">
+              <a:ext uri="{FF2B5EF4-FFF2-40B4-BE49-F238E27FC236}">
+                <a16:creationId xmlns:a16="http://schemas.microsoft.com/office/drawing/2014/main" id="{1717B9D7-F36C-49D6-BF99-79FB3EA3DA70}"/>
+              </a:ext>
+            </a:extLst>
+          </p:cNvPr>
+          <p:cNvSpPr>
+            <a:spLocks xmlns:a="http://schemas.openxmlformats.org/drawingml/2006/main" noGrp="1"/>
+          </p:cNvSpPr>
+          <p:nvPr/>
+        </p:nvSpPr>
+        <p:spPr>
+          <a:xfrm xmlns:a="http://schemas.openxmlformats.org/drawingml/2006/main">
+            <a:off x="4229100" y="2038350"/>
+            <a:ext cx="1428750" cy="990600"/>
           </a:xfrm>
           <a:prstGeom xmlns:a="http://schemas.openxmlformats.org/drawingml/2006/main" prst="roundRect">
             <a:avLst>
-              <a:gd name="adj" fmla="val 18182"/>
+              <a:gd name="adj" fmla="val 7692"/>
             </a:avLst>
           </a:prstGeom>
           <a:solidFill xmlns:a="http://schemas.openxmlformats.org/drawingml/2006/main">
@@ -6605,10 +6158,10 @@
       </p:sp>
       <p:sp>
         <p:nvSpPr>
-          <p:cNvPr id="21" name="">
+          <p:cNvPr id="13" name="">
             <a:extLst xmlns:a="http://schemas.openxmlformats.org/drawingml/2006/main">
               <a:ext uri="{FF2B5EF4-FFF2-40B4-BE49-F238E27FC236}">
-                <a16:creationId xmlns:a16="http://schemas.microsoft.com/office/drawing/2014/main" id="{0D4DD9A7-8A0D-4057-97B3-53DEB4A7BCB2}"/>
+                <a16:creationId xmlns:a16="http://schemas.microsoft.com/office/drawing/2014/main" id="{E1BF04A8-0394-4627-9326-631738EE14E9}"/>
               </a:ext>
             </a:extLst>
           </p:cNvPr>
@@ -6619,8 +6172,8 @@
         </p:nvSpPr>
         <p:spPr>
           <a:xfrm xmlns:a="http://schemas.openxmlformats.org/drawingml/2006/main">
-            <a:off x="7219950" y="2933700"/>
-            <a:ext cx="2667000" cy="381000"/>
+            <a:off x="4324350" y="2171700"/>
+            <a:ext cx="1238250" cy="381000"/>
           </a:xfrm>
           <a:prstGeom xmlns:a="http://schemas.openxmlformats.org/drawingml/2006/main" prst="rect">
             <a:avLst/>
@@ -6667,17 +6220,17 @@
                 <a:ea typeface="Arial"/>
                 <a:cs typeface="Arial"/>
               </a:rPr>
-              <a:t>Food donation</a:t>
+              <a:t>Recipient accepts</a:t>
             </a:r>
           </a:p>
         </p:txBody>
       </p:sp>
       <p:sp>
         <p:nvSpPr>
-          <p:cNvPr id="22" name="flow-Allocation">
+          <p:cNvPr id="14" name="">
             <a:extLst xmlns:a="http://schemas.openxmlformats.org/drawingml/2006/main">
               <a:ext uri="{FF2B5EF4-FFF2-40B4-BE49-F238E27FC236}">
-                <a16:creationId xmlns:a16="http://schemas.microsoft.com/office/drawing/2014/main" id="{5A0DA93D-E0A3-4EC7-B98A-2F6B054D8A67}"/>
+                <a16:creationId xmlns:a16="http://schemas.microsoft.com/office/drawing/2014/main" id="{BE94ADEC-A521-4FAF-A7D0-8C4810D1A533}"/>
               </a:ext>
             </a:extLst>
           </p:cNvPr>
@@ -6688,12 +6241,112 @@
         </p:nvSpPr>
         <p:spPr>
           <a:xfrm xmlns:a="http://schemas.openxmlformats.org/drawingml/2006/main">
-            <a:off x="7124700" y="3295650"/>
-            <a:ext cx="2857500" cy="419100"/>
+            <a:off x="4324350" y="2533650"/>
+            <a:ext cx="1238250" cy="381000"/>
+          </a:xfrm>
+          <a:prstGeom xmlns:a="http://schemas.openxmlformats.org/drawingml/2006/main" prst="rect">
+            <a:avLst/>
+          </a:prstGeom>
+          <a:noFill xmlns:a="http://schemas.openxmlformats.org/drawingml/2006/main"/>
+          <a:ln xmlns:a="http://schemas.openxmlformats.org/drawingml/2006/main" w="0">
+            <a:noFill/>
+            <a:prstDash val="solid"/>
+          </a:ln>
+        </p:spPr>
+        <p:txBody>
+          <a:bodyPr xmlns:a="http://schemas.openxmlformats.org/drawingml/2006/main">
+            <a:noAutofit/>
+          </a:bodyPr>
+          <a:lstStyle xmlns:a="http://schemas.openxmlformats.org/drawingml/2006/main">
+            <a:defPPr>
+              <a:defRPr sz="938" b="0">
+                <a:solidFill>
+                  <a:srgbClr val="52606F"/>
+                </a:solidFill>
+                <a:latin typeface="Arial"/>
+                <a:ea typeface="Arial"/>
+                <a:cs typeface="Arial"/>
+              </a:defRPr>
+            </a:defPPr>
+          </a:lstStyle>
+          <a:p xmlns:a="http://schemas.openxmlformats.org/drawingml/2006/main">
+            <a:pPr>
+              <a:defRPr sz="938" b="0">
+                <a:solidFill>
+                  <a:srgbClr val="52606F"/>
+                </a:solidFill>
+                <a:latin typeface="Arial"/>
+                <a:ea typeface="Arial"/>
+                <a:cs typeface="Arial"/>
+              </a:defRPr>
+            </a:pPr>
+            <a:r>
+              <a:rPr sz="938" b="0">
+                <a:solidFill>
+                  <a:srgbClr val="52606F"/>
+                </a:solidFill>
+                <a:latin typeface="Arial"/>
+                <a:ea typeface="Arial"/>
+                <a:cs typeface="Arial"/>
+              </a:rPr>
+              <a:t>decision visible</a:t>
+            </a:r>
+          </a:p>
+        </p:txBody>
+      </p:sp>
+      <p:sp>
+        <p:nvSpPr>
+          <p:cNvPr id="15" name="">
+            <a:extLst xmlns:a="http://schemas.openxmlformats.org/drawingml/2006/main">
+              <a:ext uri="{FF2B5EF4-FFF2-40B4-BE49-F238E27FC236}">
+                <a16:creationId xmlns:a16="http://schemas.microsoft.com/office/drawing/2014/main" id="{1E57E974-2BBA-4045-B971-7947B9002DD9}"/>
+              </a:ext>
+            </a:extLst>
+          </p:cNvPr>
+          <p:cNvSpPr>
+            <a:spLocks xmlns:a="http://schemas.openxmlformats.org/drawingml/2006/main" noGrp="1"/>
+          </p:cNvSpPr>
+          <p:nvPr/>
+        </p:nvSpPr>
+        <p:spPr>
+          <a:xfrm xmlns:a="http://schemas.openxmlformats.org/drawingml/2006/main">
+            <a:off x="5715000" y="2457450"/>
+            <a:ext cx="228600" cy="152400"/>
+          </a:xfrm>
+          <a:prstGeom xmlns:a="http://schemas.openxmlformats.org/drawingml/2006/main" prst="rightArrow">
+            <a:avLst/>
+          </a:prstGeom>
+          <a:solidFill xmlns:a="http://schemas.openxmlformats.org/drawingml/2006/main">
+            <a:srgbClr val="8A94A3"/>
+          </a:solidFill>
+          <a:ln xmlns:a="http://schemas.openxmlformats.org/drawingml/2006/main" w="0">
+            <a:noFill/>
+            <a:prstDash val="solid"/>
+          </a:ln>
+        </p:spPr>
+      </p:sp>
+      <p:sp>
+        <p:nvSpPr>
+          <p:cNvPr id="16" name="flow-Volunteer collects">
+            <a:extLst xmlns:a="http://schemas.openxmlformats.org/drawingml/2006/main">
+              <a:ext uri="{FF2B5EF4-FFF2-40B4-BE49-F238E27FC236}">
+                <a16:creationId xmlns:a16="http://schemas.microsoft.com/office/drawing/2014/main" id="{A9F32C6D-4913-42C3-AB49-8A684276A5CD}"/>
+              </a:ext>
+            </a:extLst>
+          </p:cNvPr>
+          <p:cNvSpPr>
+            <a:spLocks xmlns:a="http://schemas.openxmlformats.org/drawingml/2006/main" noGrp="1"/>
+          </p:cNvSpPr>
+          <p:nvPr/>
+        </p:nvSpPr>
+        <p:spPr>
+          <a:xfrm xmlns:a="http://schemas.openxmlformats.org/drawingml/2006/main">
+            <a:off x="6000750" y="2038350"/>
+            <a:ext cx="1428750" cy="990600"/>
           </a:xfrm>
           <a:prstGeom xmlns:a="http://schemas.openxmlformats.org/drawingml/2006/main" prst="roundRect">
             <a:avLst>
-              <a:gd name="adj" fmla="val 18182"/>
+              <a:gd name="adj" fmla="val 7692"/>
             </a:avLst>
           </a:prstGeom>
           <a:solidFill xmlns:a="http://schemas.openxmlformats.org/drawingml/2006/main">
@@ -6709,10 +6362,10 @@
       </p:sp>
       <p:sp>
         <p:nvSpPr>
-          <p:cNvPr id="23" name="">
+          <p:cNvPr id="17" name="">
             <a:extLst xmlns:a="http://schemas.openxmlformats.org/drawingml/2006/main">
               <a:ext uri="{FF2B5EF4-FFF2-40B4-BE49-F238E27FC236}">
-                <a16:creationId xmlns:a16="http://schemas.microsoft.com/office/drawing/2014/main" id="{30AF3D32-655F-433A-AAC3-23072E1337A0}"/>
+                <a16:creationId xmlns:a16="http://schemas.microsoft.com/office/drawing/2014/main" id="{FBDA1317-37C0-44F8-BD5D-ABBE8F74EE4C}"/>
               </a:ext>
             </a:extLst>
           </p:cNvPr>
@@ -6723,8 +6376,8 @@
         </p:nvSpPr>
         <p:spPr>
           <a:xfrm xmlns:a="http://schemas.openxmlformats.org/drawingml/2006/main">
-            <a:off x="7219950" y="3429000"/>
-            <a:ext cx="2667000" cy="381000"/>
+            <a:off x="6096000" y="2171700"/>
+            <a:ext cx="1238250" cy="381000"/>
           </a:xfrm>
           <a:prstGeom xmlns:a="http://schemas.openxmlformats.org/drawingml/2006/main" prst="rect">
             <a:avLst/>
@@ -6771,17 +6424,17 @@
                 <a:ea typeface="Arial"/>
                 <a:cs typeface="Arial"/>
               </a:rPr>
-              <a:t>Allocation</a:t>
+              <a:t>Volunteer collects</a:t>
             </a:r>
           </a:p>
         </p:txBody>
       </p:sp>
       <p:sp>
         <p:nvSpPr>
-          <p:cNvPr id="24" name="flow-Assignment">
+          <p:cNvPr id="18" name="">
             <a:extLst xmlns:a="http://schemas.openxmlformats.org/drawingml/2006/main">
               <a:ext uri="{FF2B5EF4-FFF2-40B4-BE49-F238E27FC236}">
-                <a16:creationId xmlns:a16="http://schemas.microsoft.com/office/drawing/2014/main" id="{139103F5-847E-4DDA-986A-9E4EEAAE4FA6}"/>
+                <a16:creationId xmlns:a16="http://schemas.microsoft.com/office/drawing/2014/main" id="{5CF575F3-93B6-4F44-92FF-53C343B3DC48}"/>
               </a:ext>
             </a:extLst>
           </p:cNvPr>
@@ -6792,12 +6445,112 @@
         </p:nvSpPr>
         <p:spPr>
           <a:xfrm xmlns:a="http://schemas.openxmlformats.org/drawingml/2006/main">
-            <a:off x="7124700" y="3790950"/>
-            <a:ext cx="2857500" cy="419100"/>
+            <a:off x="6096000" y="2533650"/>
+            <a:ext cx="1238250" cy="381000"/>
+          </a:xfrm>
+          <a:prstGeom xmlns:a="http://schemas.openxmlformats.org/drawingml/2006/main" prst="rect">
+            <a:avLst/>
+          </a:prstGeom>
+          <a:noFill xmlns:a="http://schemas.openxmlformats.org/drawingml/2006/main"/>
+          <a:ln xmlns:a="http://schemas.openxmlformats.org/drawingml/2006/main" w="0">
+            <a:noFill/>
+            <a:prstDash val="solid"/>
+          </a:ln>
+        </p:spPr>
+        <p:txBody>
+          <a:bodyPr xmlns:a="http://schemas.openxmlformats.org/drawingml/2006/main">
+            <a:noAutofit/>
+          </a:bodyPr>
+          <a:lstStyle xmlns:a="http://schemas.openxmlformats.org/drawingml/2006/main">
+            <a:defPPr>
+              <a:defRPr sz="938" b="0">
+                <a:solidFill>
+                  <a:srgbClr val="52606F"/>
+                </a:solidFill>
+                <a:latin typeface="Arial"/>
+                <a:ea typeface="Arial"/>
+                <a:cs typeface="Arial"/>
+              </a:defRPr>
+            </a:defPPr>
+          </a:lstStyle>
+          <a:p xmlns:a="http://schemas.openxmlformats.org/drawingml/2006/main">
+            <a:pPr>
+              <a:defRPr sz="938" b="0">
+                <a:solidFill>
+                  <a:srgbClr val="52606F"/>
+                </a:solidFill>
+                <a:latin typeface="Arial"/>
+                <a:ea typeface="Arial"/>
+                <a:cs typeface="Arial"/>
+              </a:defRPr>
+            </a:pPr>
+            <a:r>
+              <a:rPr sz="938" b="0">
+                <a:solidFill>
+                  <a:srgbClr val="52606F"/>
+                </a:solidFill>
+                <a:latin typeface="Arial"/>
+                <a:ea typeface="Arial"/>
+                <a:cs typeface="Arial"/>
+              </a:rPr>
+              <a:t>matched by distance</a:t>
+            </a:r>
+          </a:p>
+        </p:txBody>
+      </p:sp>
+      <p:sp>
+        <p:nvSpPr>
+          <p:cNvPr id="19" name="">
+            <a:extLst xmlns:a="http://schemas.openxmlformats.org/drawingml/2006/main">
+              <a:ext uri="{FF2B5EF4-FFF2-40B4-BE49-F238E27FC236}">
+                <a16:creationId xmlns:a16="http://schemas.microsoft.com/office/drawing/2014/main" id="{F40E0E8F-6BB7-47AF-B022-CE771A258535}"/>
+              </a:ext>
+            </a:extLst>
+          </p:cNvPr>
+          <p:cNvSpPr>
+            <a:spLocks xmlns:a="http://schemas.openxmlformats.org/drawingml/2006/main" noGrp="1"/>
+          </p:cNvSpPr>
+          <p:nvPr/>
+        </p:nvSpPr>
+        <p:spPr>
+          <a:xfrm xmlns:a="http://schemas.openxmlformats.org/drawingml/2006/main">
+            <a:off x="7486650" y="2457450"/>
+            <a:ext cx="228600" cy="152400"/>
+          </a:xfrm>
+          <a:prstGeom xmlns:a="http://schemas.openxmlformats.org/drawingml/2006/main" prst="rightArrow">
+            <a:avLst/>
+          </a:prstGeom>
+          <a:solidFill xmlns:a="http://schemas.openxmlformats.org/drawingml/2006/main">
+            <a:srgbClr val="8A94A3"/>
+          </a:solidFill>
+          <a:ln xmlns:a="http://schemas.openxmlformats.org/drawingml/2006/main" w="0">
+            <a:noFill/>
+            <a:prstDash val="solid"/>
+          </a:ln>
+        </p:spPr>
+      </p:sp>
+      <p:sp>
+        <p:nvSpPr>
+          <p:cNvPr id="20" name="flow-Delivered">
+            <a:extLst xmlns:a="http://schemas.openxmlformats.org/drawingml/2006/main">
+              <a:ext uri="{FF2B5EF4-FFF2-40B4-BE49-F238E27FC236}">
+                <a16:creationId xmlns:a16="http://schemas.microsoft.com/office/drawing/2014/main" id="{899B436C-D69F-45B3-A3BD-98DEB15060E6}"/>
+              </a:ext>
+            </a:extLst>
+          </p:cNvPr>
+          <p:cNvSpPr>
+            <a:spLocks xmlns:a="http://schemas.openxmlformats.org/drawingml/2006/main" noGrp="1"/>
+          </p:cNvSpPr>
+          <p:nvPr/>
+        </p:nvSpPr>
+        <p:spPr>
+          <a:xfrm xmlns:a="http://schemas.openxmlformats.org/drawingml/2006/main">
+            <a:off x="7772400" y="2038350"/>
+            <a:ext cx="1428750" cy="990600"/>
           </a:xfrm>
           <a:prstGeom xmlns:a="http://schemas.openxmlformats.org/drawingml/2006/main" prst="roundRect">
             <a:avLst>
-              <a:gd name="adj" fmla="val 18182"/>
+              <a:gd name="adj" fmla="val 7692"/>
             </a:avLst>
           </a:prstGeom>
           <a:solidFill xmlns:a="http://schemas.openxmlformats.org/drawingml/2006/main">
@@ -6813,10 +6566,10 @@
       </p:sp>
       <p:sp>
         <p:nvSpPr>
-          <p:cNvPr id="25" name="">
+          <p:cNvPr id="21" name="">
             <a:extLst xmlns:a="http://schemas.openxmlformats.org/drawingml/2006/main">
               <a:ext uri="{FF2B5EF4-FFF2-40B4-BE49-F238E27FC236}">
-                <a16:creationId xmlns:a16="http://schemas.microsoft.com/office/drawing/2014/main" id="{32742A26-6862-4239-A033-36F4C3EAF0CF}"/>
+                <a16:creationId xmlns:a16="http://schemas.microsoft.com/office/drawing/2014/main" id="{651181B1-0B6B-4278-B686-9FCD0F0ED1A0}"/>
               </a:ext>
             </a:extLst>
           </p:cNvPr>
@@ -6827,8 +6580,8 @@
         </p:nvSpPr>
         <p:spPr>
           <a:xfrm xmlns:a="http://schemas.openxmlformats.org/drawingml/2006/main">
-            <a:off x="7219950" y="3924300"/>
-            <a:ext cx="2667000" cy="381000"/>
+            <a:off x="7867650" y="2171700"/>
+            <a:ext cx="1238250" cy="381000"/>
           </a:xfrm>
           <a:prstGeom xmlns:a="http://schemas.openxmlformats.org/drawingml/2006/main" prst="rect">
             <a:avLst/>
@@ -6875,17 +6628,17 @@
                 <a:ea typeface="Arial"/>
                 <a:cs typeface="Arial"/>
               </a:rPr>
-              <a:t>Assignment</a:t>
+              <a:t>Delivered</a:t>
             </a:r>
           </a:p>
         </p:txBody>
       </p:sp>
       <p:sp>
         <p:nvSpPr>
-          <p:cNvPr id="26" name="flow-Delivery">
+          <p:cNvPr id="22" name="">
             <a:extLst xmlns:a="http://schemas.openxmlformats.org/drawingml/2006/main">
               <a:ext uri="{FF2B5EF4-FFF2-40B4-BE49-F238E27FC236}">
-                <a16:creationId xmlns:a16="http://schemas.microsoft.com/office/drawing/2014/main" id="{4CA1BE7F-C185-44E4-9676-8B0BF091B7C3}"/>
+                <a16:creationId xmlns:a16="http://schemas.microsoft.com/office/drawing/2014/main" id="{3C2EDB4F-E2DC-4B79-8695-E2A70B230352}"/>
               </a:ext>
             </a:extLst>
           </p:cNvPr>
@@ -6896,12 +6649,112 @@
         </p:nvSpPr>
         <p:spPr>
           <a:xfrm xmlns:a="http://schemas.openxmlformats.org/drawingml/2006/main">
-            <a:off x="7124700" y="4286250"/>
-            <a:ext cx="2857500" cy="419100"/>
+            <a:off x="7867650" y="2533650"/>
+            <a:ext cx="1238250" cy="381000"/>
+          </a:xfrm>
+          <a:prstGeom xmlns:a="http://schemas.openxmlformats.org/drawingml/2006/main" prst="rect">
+            <a:avLst/>
+          </a:prstGeom>
+          <a:noFill xmlns:a="http://schemas.openxmlformats.org/drawingml/2006/main"/>
+          <a:ln xmlns:a="http://schemas.openxmlformats.org/drawingml/2006/main" w="0">
+            <a:noFill/>
+            <a:prstDash val="solid"/>
+          </a:ln>
+        </p:spPr>
+        <p:txBody>
+          <a:bodyPr xmlns:a="http://schemas.openxmlformats.org/drawingml/2006/main">
+            <a:noAutofit/>
+          </a:bodyPr>
+          <a:lstStyle xmlns:a="http://schemas.openxmlformats.org/drawingml/2006/main">
+            <a:defPPr>
+              <a:defRPr sz="938" b="0">
+                <a:solidFill>
+                  <a:srgbClr val="52606F"/>
+                </a:solidFill>
+                <a:latin typeface="Arial"/>
+                <a:ea typeface="Arial"/>
+                <a:cs typeface="Arial"/>
+              </a:defRPr>
+            </a:defPPr>
+          </a:lstStyle>
+          <a:p xmlns:a="http://schemas.openxmlformats.org/drawingml/2006/main">
+            <a:pPr>
+              <a:defRPr sz="938" b="0">
+                <a:solidFill>
+                  <a:srgbClr val="52606F"/>
+                </a:solidFill>
+                <a:latin typeface="Arial"/>
+                <a:ea typeface="Arial"/>
+                <a:cs typeface="Arial"/>
+              </a:defRPr>
+            </a:pPr>
+            <a:r>
+              <a:rPr sz="938" b="0">
+                <a:solidFill>
+                  <a:srgbClr val="52606F"/>
+                </a:solidFill>
+                <a:latin typeface="Arial"/>
+                <a:ea typeface="Arial"/>
+                <a:cs typeface="Arial"/>
+              </a:rPr>
+              <a:t>tracked to handover</a:t>
+            </a:r>
+          </a:p>
+        </p:txBody>
+      </p:sp>
+      <p:sp>
+        <p:nvSpPr>
+          <p:cNvPr id="23" name="">
+            <a:extLst xmlns:a="http://schemas.openxmlformats.org/drawingml/2006/main">
+              <a:ext uri="{FF2B5EF4-FFF2-40B4-BE49-F238E27FC236}">
+                <a16:creationId xmlns:a16="http://schemas.microsoft.com/office/drawing/2014/main" id="{EFAC09A6-D1CD-4C60-8B37-4CA3015E4487}"/>
+              </a:ext>
+            </a:extLst>
+          </p:cNvPr>
+          <p:cNvSpPr>
+            <a:spLocks xmlns:a="http://schemas.openxmlformats.org/drawingml/2006/main" noGrp="1"/>
+          </p:cNvSpPr>
+          <p:nvPr/>
+        </p:nvSpPr>
+        <p:spPr>
+          <a:xfrm xmlns:a="http://schemas.openxmlformats.org/drawingml/2006/main">
+            <a:off x="9258300" y="2457450"/>
+            <a:ext cx="228600" cy="152400"/>
+          </a:xfrm>
+          <a:prstGeom xmlns:a="http://schemas.openxmlformats.org/drawingml/2006/main" prst="rightArrow">
+            <a:avLst/>
+          </a:prstGeom>
+          <a:solidFill xmlns:a="http://schemas.openxmlformats.org/drawingml/2006/main">
+            <a:srgbClr val="8A94A3"/>
+          </a:solidFill>
+          <a:ln xmlns:a="http://schemas.openxmlformats.org/drawingml/2006/main" w="0">
+            <a:noFill/>
+            <a:prstDash val="solid"/>
+          </a:ln>
+        </p:spPr>
+      </p:sp>
+      <p:sp>
+        <p:nvSpPr>
+          <p:cNvPr id="24" name="flow-Reports update">
+            <a:extLst xmlns:a="http://schemas.openxmlformats.org/drawingml/2006/main">
+              <a:ext uri="{FF2B5EF4-FFF2-40B4-BE49-F238E27FC236}">
+                <a16:creationId xmlns:a16="http://schemas.microsoft.com/office/drawing/2014/main" id="{8B8DC02C-3EE8-4164-A851-8CBE271F5579}"/>
+              </a:ext>
+            </a:extLst>
+          </p:cNvPr>
+          <p:cNvSpPr>
+            <a:spLocks xmlns:a="http://schemas.openxmlformats.org/drawingml/2006/main" noGrp="1"/>
+          </p:cNvSpPr>
+          <p:nvPr/>
+        </p:nvSpPr>
+        <p:spPr>
+          <a:xfrm xmlns:a="http://schemas.openxmlformats.org/drawingml/2006/main">
+            <a:off x="9544050" y="2038350"/>
+            <a:ext cx="1428750" cy="990600"/>
           </a:xfrm>
           <a:prstGeom xmlns:a="http://schemas.openxmlformats.org/drawingml/2006/main" prst="roundRect">
             <a:avLst>
-              <a:gd name="adj" fmla="val 18182"/>
+              <a:gd name="adj" fmla="val 7692"/>
             </a:avLst>
           </a:prstGeom>
           <a:solidFill xmlns:a="http://schemas.openxmlformats.org/drawingml/2006/main">
@@ -6917,10 +6770,10 @@
       </p:sp>
       <p:sp>
         <p:nvSpPr>
-          <p:cNvPr id="27" name="">
+          <p:cNvPr id="25" name="">
             <a:extLst xmlns:a="http://schemas.openxmlformats.org/drawingml/2006/main">
               <a:ext uri="{FF2B5EF4-FFF2-40B4-BE49-F238E27FC236}">
-                <a16:creationId xmlns:a16="http://schemas.microsoft.com/office/drawing/2014/main" id="{66F67F2E-A827-44DE-9A23-2FC0B0A0F8AD}"/>
+                <a16:creationId xmlns:a16="http://schemas.microsoft.com/office/drawing/2014/main" id="{6E33F6C2-E545-43B5-8C4E-5AD08AD28F3B}"/>
               </a:ext>
             </a:extLst>
           </p:cNvPr>
@@ -6931,8 +6784,8 @@
         </p:nvSpPr>
         <p:spPr>
           <a:xfrm xmlns:a="http://schemas.openxmlformats.org/drawingml/2006/main">
-            <a:off x="7219950" y="4419600"/>
-            <a:ext cx="2667000" cy="381000"/>
+            <a:off x="9639300" y="2171700"/>
+            <a:ext cx="1238250" cy="381000"/>
           </a:xfrm>
           <a:prstGeom xmlns:a="http://schemas.openxmlformats.org/drawingml/2006/main" prst="rect">
             <a:avLst/>
@@ -6979,17 +6832,17 @@
                 <a:ea typeface="Arial"/>
                 <a:cs typeface="Arial"/>
               </a:rPr>
-              <a:t>Delivery</a:t>
+              <a:t>Reports update</a:t>
             </a:r>
           </a:p>
         </p:txBody>
       </p:sp>
       <p:sp>
         <p:nvSpPr>
-          <p:cNvPr id="28" name="">
+          <p:cNvPr id="26" name="">
             <a:extLst xmlns:a="http://schemas.openxmlformats.org/drawingml/2006/main">
               <a:ext uri="{FF2B5EF4-FFF2-40B4-BE49-F238E27FC236}">
-                <a16:creationId xmlns:a16="http://schemas.microsoft.com/office/drawing/2014/main" id="{616FDCF5-CC9D-4578-9F27-E22BC3847DD6}"/>
+                <a16:creationId xmlns:a16="http://schemas.microsoft.com/office/drawing/2014/main" id="{8F0E12FC-270B-4316-BB06-AED34602B9EC}"/>
               </a:ext>
             </a:extLst>
           </p:cNvPr>
@@ -7000,8 +6853,8 @@
         </p:nvSpPr>
         <p:spPr>
           <a:xfrm xmlns:a="http://schemas.openxmlformats.org/drawingml/2006/main">
-            <a:off x="7124700" y="4876800"/>
-            <a:ext cx="4381500" cy="571500"/>
+            <a:off x="9639300" y="2533650"/>
+            <a:ext cx="1238250" cy="381000"/>
           </a:xfrm>
           <a:prstGeom xmlns:a="http://schemas.openxmlformats.org/drawingml/2006/main" prst="rect">
             <a:avLst/>
@@ -7018,7 +6871,7 @@
           </a:bodyPr>
           <a:lstStyle xmlns:a="http://schemas.openxmlformats.org/drawingml/2006/main">
             <a:defPPr>
-              <a:defRPr sz="1125" b="0">
+              <a:defRPr sz="938" b="0">
                 <a:solidFill>
                   <a:srgbClr val="52606F"/>
                 </a:solidFill>
@@ -7030,7 +6883,7 @@
           </a:lstStyle>
           <a:p xmlns:a="http://schemas.openxmlformats.org/drawingml/2006/main">
             <a:pPr>
-              <a:defRPr sz="1125" b="0">
+              <a:defRPr sz="938" b="0">
                 <a:solidFill>
                   <a:srgbClr val="52606F"/>
                 </a:solidFill>
@@ -7040,7 +6893,7 @@
               </a:defRPr>
             </a:pPr>
             <a:r>
-              <a:rPr sz="1125" b="0">
+              <a:rPr sz="938" b="0">
                 <a:solidFill>
                   <a:srgbClr val="52606F"/>
                 </a:solidFill>
@@ -7048,17 +6901,17 @@
                 <a:ea typeface="Arial"/>
                 <a:cs typeface="Arial"/>
               </a:rPr>
-              <a:t>Plus recipient organizations, volunteers, food categories, preferences, notifications and audit logs.</a:t>
+              <a:t>rescues and audit</a:t>
             </a:r>
           </a:p>
         </p:txBody>
       </p:sp>
       <p:sp>
         <p:nvSpPr>
-          <p:cNvPr id="29" name="">
+          <p:cNvPr id="27" name="">
             <a:extLst xmlns:a="http://schemas.openxmlformats.org/drawingml/2006/main">
               <a:ext uri="{FF2B5EF4-FFF2-40B4-BE49-F238E27FC236}">
-                <a16:creationId xmlns:a16="http://schemas.microsoft.com/office/drawing/2014/main" id="{D6123E3C-B7DB-47CC-88E8-F38FE04B4E06}"/>
+                <a16:creationId xmlns:a16="http://schemas.microsoft.com/office/drawing/2014/main" id="{8EC91AD0-77A2-44DB-9343-26263CD35FA5}"/>
               </a:ext>
             </a:extLst>
           </p:cNvPr>
@@ -7069,8 +6922,8 @@
         </p:nvSpPr>
         <p:spPr>
           <a:xfrm xmlns:a="http://schemas.openxmlformats.org/drawingml/2006/main">
-            <a:off x="685800" y="5829300"/>
-            <a:ext cx="10820400" cy="228600"/>
+            <a:off x="685800" y="3543300"/>
+            <a:ext cx="10820400" cy="2667000"/>
           </a:xfrm>
           <a:prstGeom xmlns:a="http://schemas.openxmlformats.org/drawingml/2006/main" prst="rect">
             <a:avLst/>
@@ -7087,9 +6940,9 @@
           </a:bodyPr>
           <a:lstStyle xmlns:a="http://schemas.openxmlformats.org/drawingml/2006/main">
             <a:defPPr>
-              <a:defRPr sz="1125" b="0">
-                <a:solidFill>
-                  <a:srgbClr val="8A94A3"/>
+              <a:defRPr sz="1425">
+                <a:solidFill>
+                  <a:srgbClr val="131A24"/>
                 </a:solidFill>
                 <a:latin typeface="Arial"/>
                 <a:ea typeface="Arial"/>
@@ -7098,10 +6951,14 @@
             </a:defPPr>
           </a:lstStyle>
           <a:p xmlns:a="http://schemas.openxmlformats.org/drawingml/2006/main">
-            <a:pPr>
-              <a:defRPr sz="1125" b="0">
-                <a:solidFill>
-                  <a:srgbClr val="8A94A3"/>
+            <a:pPr marL="228600" indent="-114300">
+              <a:spcAft>
+                <a:spcPts val="1600"/>
+              </a:spcAft>
+              <a:buChar char="•"/>
+              <a:defRPr sz="1425">
+                <a:solidFill>
+                  <a:srgbClr val="131A24"/>
                 </a:solidFill>
                 <a:latin typeface="Arial"/>
                 <a:ea typeface="Arial"/>
@@ -7109,15 +6966,69 @@
               </a:defRPr>
             </a:pPr>
             <a:r>
-              <a:rPr sz="1125" b="0">
-                <a:solidFill>
-                  <a:srgbClr val="8A94A3"/>
+              <a:rPr sz="1425">
+                <a:solidFill>
+                  <a:srgbClr val="131A24"/>
                 </a:solidFill>
                 <a:latin typeface="Arial"/>
                 <a:ea typeface="Arial"/>
                 <a:cs typeface="Arial"/>
               </a:rPr>
-              <a:t>Security: JWT at login, role checks on every request, ownership checks on every record.</a:t>
+              <a:t>The workflow proceeds from donation registration to a confirmed delivery, with the allocation decision recorded at each stage.</a:t>
+            </a:r>
+          </a:p>
+          <a:p xmlns:a="http://schemas.openxmlformats.org/drawingml/2006/main">
+            <a:pPr marL="228600" indent="-114300">
+              <a:spcAft>
+                <a:spcPts val="1600"/>
+              </a:spcAft>
+              <a:buChar char="•"/>
+              <a:defRPr sz="1425">
+                <a:solidFill>
+                  <a:srgbClr val="131A24"/>
+                </a:solidFill>
+                <a:latin typeface="Arial"/>
+                <a:ea typeface="Arial"/>
+                <a:cs typeface="Arial"/>
+              </a:defRPr>
+            </a:pPr>
+            <a:r>
+              <a:rPr sz="1425">
+                <a:solidFill>
+                  <a:srgbClr val="131A24"/>
+                </a:solidFill>
+                <a:latin typeface="Arial"/>
+                <a:ea typeface="Arial"/>
+                <a:cs typeface="Arial"/>
+              </a:rPr>
+              <a:t>Each role workspace exposes only the functions that the actor is authorised to perform.</a:t>
+            </a:r>
+          </a:p>
+          <a:p xmlns:a="http://schemas.openxmlformats.org/drawingml/2006/main">
+            <a:pPr marL="228600" indent="-114300">
+              <a:spcAft>
+                <a:spcPts val="1600"/>
+              </a:spcAft>
+              <a:buChar char="•"/>
+              <a:defRPr sz="1425">
+                <a:solidFill>
+                  <a:srgbClr val="131A24"/>
+                </a:solidFill>
+                <a:latin typeface="Arial"/>
+                <a:ea typeface="Arial"/>
+                <a:cs typeface="Arial"/>
+              </a:defRPr>
+            </a:pPr>
+            <a:r>
+              <a:rPr sz="1425">
+                <a:solidFill>
+                  <a:srgbClr val="131A24"/>
+                </a:solidFill>
+                <a:latin typeface="Arial"/>
+                <a:ea typeface="Arial"/>
+                <a:cs typeface="Arial"/>
+              </a:rPr>
+              <a:t>The engine operates on the server; the browser presents decisions and collects responses.</a:t>
             </a:r>
           </a:p>
         </p:txBody>
@@ -7125,7 +7036,7 @@
     </p:spTree>
     <p:extLst>
       <p:ext uri="{BB962C8B-B14F-4D97-AF65-F5344CB8AC3E}">
-        <p14:creationId xmlns:p14="http://schemas.microsoft.com/office/powerpoint/2010/main" val="575903449"/>
+        <p14:creationId xmlns:p14="http://schemas.microsoft.com/office/powerpoint/2010/main" val="264892678"/>
       </p:ext>
     </p:extLst>
   </p:cSld>
@@ -7156,7 +7067,7 @@
           <p:cNvPr id="16" name="slide-title">
             <a:extLst xmlns:a="http://schemas.openxmlformats.org/drawingml/2006/main">
               <a:ext uri="{FF2B5EF4-FFF2-40B4-BE49-F238E27FC236}">
-                <a16:creationId xmlns:a16="http://schemas.microsoft.com/office/drawing/2014/main" id="{897A36C1-116D-4446-929F-A2FA5EDED450}"/>
+                <a16:creationId xmlns:a16="http://schemas.microsoft.com/office/drawing/2014/main" id="{A8A69A7C-B46A-4F2F-B779-32F70E6896A4}"/>
               </a:ext>
             </a:extLst>
           </p:cNvPr>
@@ -7215,7 +7126,7 @@
                 <a:ea typeface="Arial"/>
                 <a:cs typeface="Arial"/>
               </a:rPr>
-              <a:t>How the engine chooses a recipient</a:t>
+              <a:t>Allocation methodology</a:t>
             </a:r>
           </a:p>
         </p:txBody>
@@ -7225,7 +7136,7 @@
           <p:cNvPr id="2" name="slide-lead">
             <a:extLst xmlns:a="http://schemas.openxmlformats.org/drawingml/2006/main">
               <a:ext uri="{FF2B5EF4-FFF2-40B4-BE49-F238E27FC236}">
-                <a16:creationId xmlns:a16="http://schemas.microsoft.com/office/drawing/2014/main" id="{3138B292-1D38-4499-9779-540D5567E6D7}"/>
+                <a16:creationId xmlns:a16="http://schemas.microsoft.com/office/drawing/2014/main" id="{A65DD892-6CDE-4928-B7DB-D272274F3296}"/>
               </a:ext>
             </a:extLst>
           </p:cNvPr>
@@ -7284,7 +7195,7 @@
                 <a:ea typeface="Arial"/>
                 <a:cs typeface="Arial"/>
               </a:rPr>
-              <a:t>Four eligibility checks run first, then six weighted factors decide the ranking.</a:t>
+              <a:t>Four eligibility constraints are applied first; six weighted factors then determine the ranking.</a:t>
             </a:r>
           </a:p>
         </p:txBody>
@@ -7294,7 +7205,7 @@
           <p:cNvPr id="3" name="title-rule">
             <a:extLst xmlns:a="http://schemas.openxmlformats.org/drawingml/2006/main">
               <a:ext uri="{FF2B5EF4-FFF2-40B4-BE49-F238E27FC236}">
-                <a16:creationId xmlns:a16="http://schemas.microsoft.com/office/drawing/2014/main" id="{2E2377E5-8B34-4D23-A418-73F5E144C401}"/>
+                <a16:creationId xmlns:a16="http://schemas.microsoft.com/office/drawing/2014/main" id="{A5C068B8-56A2-403E-A8F5-5A363209112F}"/>
               </a:ext>
             </a:extLst>
           </p:cNvPr>
@@ -7325,7 +7236,7 @@
           <p:cNvPr id="4" name="flow-Verified organization">
             <a:extLst xmlns:a="http://schemas.openxmlformats.org/drawingml/2006/main">
               <a:ext uri="{FF2B5EF4-FFF2-40B4-BE49-F238E27FC236}">
-                <a16:creationId xmlns:a16="http://schemas.microsoft.com/office/drawing/2014/main" id="{ADEFCF1C-44B9-4090-8B3B-BC23EEA93792}"/>
+                <a16:creationId xmlns:a16="http://schemas.microsoft.com/office/drawing/2014/main" id="{E6352121-D19B-4B0B-871D-AC73CF2BEFD1}"/>
               </a:ext>
             </a:extLst>
           </p:cNvPr>
@@ -7360,7 +7271,7 @@
           <p:cNvPr id="5" name="">
             <a:extLst xmlns:a="http://schemas.openxmlformats.org/drawingml/2006/main">
               <a:ext uri="{FF2B5EF4-FFF2-40B4-BE49-F238E27FC236}">
-                <a16:creationId xmlns:a16="http://schemas.microsoft.com/office/drawing/2014/main" id="{D4489C9C-B21D-4AFF-B03D-519906ADACC3}"/>
+                <a16:creationId xmlns:a16="http://schemas.microsoft.com/office/drawing/2014/main" id="{7086E342-7555-47B0-93F4-99BF838162CD}"/>
               </a:ext>
             </a:extLst>
           </p:cNvPr>
@@ -7429,7 +7340,7 @@
           <p:cNvPr id="6" name="">
             <a:extLst xmlns:a="http://schemas.openxmlformats.org/drawingml/2006/main">
               <a:ext uri="{FF2B5EF4-FFF2-40B4-BE49-F238E27FC236}">
-                <a16:creationId xmlns:a16="http://schemas.microsoft.com/office/drawing/2014/main" id="{BE57BC1D-18D9-4B1F-A914-9F1DDF53CBF2}"/>
+                <a16:creationId xmlns:a16="http://schemas.microsoft.com/office/drawing/2014/main" id="{0A6E79C8-8039-4B03-A756-9486937BDDE4}"/>
               </a:ext>
             </a:extLst>
           </p:cNvPr>
@@ -7457,10 +7368,10 @@
       </p:sp>
       <p:sp>
         <p:nvSpPr>
-          <p:cNvPr id="7" name="flow-Free storage for the loa">
+          <p:cNvPr id="7" name="flow-Sufficient free storage">
             <a:extLst xmlns:a="http://schemas.openxmlformats.org/drawingml/2006/main">
               <a:ext uri="{FF2B5EF4-FFF2-40B4-BE49-F238E27FC236}">
-                <a16:creationId xmlns:a16="http://schemas.microsoft.com/office/drawing/2014/main" id="{C484A320-4661-4E6E-901B-B66D9B079168}"/>
+                <a16:creationId xmlns:a16="http://schemas.microsoft.com/office/drawing/2014/main" id="{B818FF2D-73F0-4DAF-A5C0-9B84F3B1D8B0}"/>
               </a:ext>
             </a:extLst>
           </p:cNvPr>
@@ -7495,7 +7406,7 @@
           <p:cNvPr id="8" name="">
             <a:extLst xmlns:a="http://schemas.openxmlformats.org/drawingml/2006/main">
               <a:ext uri="{FF2B5EF4-FFF2-40B4-BE49-F238E27FC236}">
-                <a16:creationId xmlns:a16="http://schemas.microsoft.com/office/drawing/2014/main" id="{FD1B7D98-A3A3-42D5-A13C-05B0C7C85E14}"/>
+                <a16:creationId xmlns:a16="http://schemas.microsoft.com/office/drawing/2014/main" id="{93AA7D86-9812-4294-AE79-6E4C8CD6BA9F}"/>
               </a:ext>
             </a:extLst>
           </p:cNvPr>
@@ -7554,7 +7465,7 @@
                 <a:ea typeface="Arial"/>
                 <a:cs typeface="Arial"/>
               </a:rPr>
-              <a:t>Free storage for the load</a:t>
+              <a:t>Sufficient free storage</a:t>
             </a:r>
           </a:p>
         </p:txBody>
@@ -7564,7 +7475,7 @@
           <p:cNvPr id="9" name="">
             <a:extLst xmlns:a="http://schemas.openxmlformats.org/drawingml/2006/main">
               <a:ext uri="{FF2B5EF4-FFF2-40B4-BE49-F238E27FC236}">
-                <a16:creationId xmlns:a16="http://schemas.microsoft.com/office/drawing/2014/main" id="{6CB42E39-2E10-4EE8-BA23-C2D9FDFBFB7A}"/>
+                <a16:creationId xmlns:a16="http://schemas.microsoft.com/office/drawing/2014/main" id="{D8F5DAD6-C105-41FD-A72B-0ECBDE87F0B4}"/>
               </a:ext>
             </a:extLst>
           </p:cNvPr>
@@ -7595,7 +7506,7 @@
           <p:cNvPr id="10" name="flow-Category accepted">
             <a:extLst xmlns:a="http://schemas.openxmlformats.org/drawingml/2006/main">
               <a:ext uri="{FF2B5EF4-FFF2-40B4-BE49-F238E27FC236}">
-                <a16:creationId xmlns:a16="http://schemas.microsoft.com/office/drawing/2014/main" id="{3DEAE576-9C50-4B54-A14E-1EE5FC676181}"/>
+                <a16:creationId xmlns:a16="http://schemas.microsoft.com/office/drawing/2014/main" id="{DE6D3ABA-822D-4D71-A806-F4DA985EE604}"/>
               </a:ext>
             </a:extLst>
           </p:cNvPr>
@@ -7630,7 +7541,7 @@
           <p:cNvPr id="11" name="">
             <a:extLst xmlns:a="http://schemas.openxmlformats.org/drawingml/2006/main">
               <a:ext uri="{FF2B5EF4-FFF2-40B4-BE49-F238E27FC236}">
-                <a16:creationId xmlns:a16="http://schemas.microsoft.com/office/drawing/2014/main" id="{C10DDE57-4541-4E8F-AE01-A2BE368A96C0}"/>
+                <a16:creationId xmlns:a16="http://schemas.microsoft.com/office/drawing/2014/main" id="{A38390E9-0EA1-43B2-A34C-6588A7E0CED6}"/>
               </a:ext>
             </a:extLst>
           </p:cNvPr>
@@ -7699,7 +7610,7 @@
           <p:cNvPr id="12" name="">
             <a:extLst xmlns:a="http://schemas.openxmlformats.org/drawingml/2006/main">
               <a:ext uri="{FF2B5EF4-FFF2-40B4-BE49-F238E27FC236}">
-                <a16:creationId xmlns:a16="http://schemas.microsoft.com/office/drawing/2014/main" id="{444E3A4F-9DBB-4B72-B186-BB82BAA0D1B6}"/>
+                <a16:creationId xmlns:a16="http://schemas.microsoft.com/office/drawing/2014/main" id="{D625176A-17C7-45A9-859B-0A7C0D270D8F}"/>
               </a:ext>
             </a:extLst>
           </p:cNvPr>
@@ -7727,10 +7638,10 @@
       </p:sp>
       <p:sp>
         <p:nvSpPr>
-          <p:cNvPr id="13" name="flow-Can arrive safely">
+          <p:cNvPr id="13" name="flow-Safe arrival feasible">
             <a:extLst xmlns:a="http://schemas.openxmlformats.org/drawingml/2006/main">
               <a:ext uri="{FF2B5EF4-FFF2-40B4-BE49-F238E27FC236}">
-                <a16:creationId xmlns:a16="http://schemas.microsoft.com/office/drawing/2014/main" id="{70D860EB-B144-480E-8233-8851B34B7D0B}"/>
+                <a16:creationId xmlns:a16="http://schemas.microsoft.com/office/drawing/2014/main" id="{4A3FBFAB-6BA7-42EE-AD21-1932E431B22B}"/>
               </a:ext>
             </a:extLst>
           </p:cNvPr>
@@ -7765,7 +7676,7 @@
           <p:cNvPr id="14" name="">
             <a:extLst xmlns:a="http://schemas.openxmlformats.org/drawingml/2006/main">
               <a:ext uri="{FF2B5EF4-FFF2-40B4-BE49-F238E27FC236}">
-                <a16:creationId xmlns:a16="http://schemas.microsoft.com/office/drawing/2014/main" id="{958BF5D0-AAD5-4ADF-88BB-DBE6AE0DAA75}"/>
+                <a16:creationId xmlns:a16="http://schemas.microsoft.com/office/drawing/2014/main" id="{F602F6E3-4427-48DB-8EE0-E8AC67ADDFBE}"/>
               </a:ext>
             </a:extLst>
           </p:cNvPr>
@@ -7824,7 +7735,7 @@
                 <a:ea typeface="Arial"/>
                 <a:cs typeface="Arial"/>
               </a:rPr>
-              <a:t>Can arrive safely</a:t>
+              <a:t>Safe arrival feasible</a:t>
             </a:r>
           </a:p>
         </p:txBody>
@@ -7834,7 +7745,7 @@
           <p:cNvPr id="15" name="">
             <a:extLst xmlns:a="http://schemas.openxmlformats.org/drawingml/2006/main">
               <a:ext uri="{FF2B5EF4-FFF2-40B4-BE49-F238E27FC236}">
-                <a16:creationId xmlns:a16="http://schemas.microsoft.com/office/drawing/2014/main" id="{411E2E68-0C4C-454F-AD43-DA145C9C1866}"/>
+                <a16:creationId xmlns:a16="http://schemas.microsoft.com/office/drawing/2014/main" id="{6D4F1703-5253-4250-B084-8F3EC5CB49F2}"/>
               </a:ext>
             </a:extLst>
           </p:cNvPr>
@@ -7850,9 +7761,9 @@
             <a:tbl>
               <a:tblPr/>
               <a:tblGrid>
-                <a:gridCol w="2190750"/>
-                <a:gridCol w="1143000"/>
-                <a:gridCol w="7486650"/>
+                <a:gridCol w="2095500"/>
+                <a:gridCol w="1047750"/>
+                <a:gridCol w="7677150"/>
               </a:tblGrid>
               <a:tr h="408214">
                 <a:tc>
@@ -7923,7 +7834,7 @@
                           <a:ea typeface="Arial"/>
                           <a:cs typeface="Arial"/>
                         </a:rPr>
-                        <a:t>What it measures</a:t>
+                        <a:t>Basis of measurement</a:t>
                       </a:r>
                     </a:p>
                   </a:txBody>
@@ -7995,7 +7906,7 @@
                           <a:ea typeface="Arial"/>
                           <a:cs typeface="Arial"/>
                         </a:rPr>
-                        <a:t>How soon the food expires, weighted by how quickly this recipient can collect it</a:t>
+                        <a:t>Time remaining before the food becomes unsafe, weighted by the recipient's collection speed</a:t>
                       </a:r>
                     </a:p>
                   </a:txBody>
@@ -8063,7 +7974,7 @@
                           <a:ea typeface="Arial"/>
                           <a:cs typeface="Arial"/>
                         </a:rPr>
-                        <a:t>How well the donation size matches the registered demand</a:t>
+                        <a:t>Correspondence between the donation quantity and the registered demand</a:t>
                       </a:r>
                     </a:p>
                   </a:txBody>
@@ -8131,7 +8042,7 @@
                           <a:ea typeface="Arial"/>
                           <a:cs typeface="Arial"/>
                         </a:rPr>
-                        <a:t>Whether the load fits in remaining storage without overloading it</a:t>
+                        <a:t>Remaining storage capacity after intake</a:t>
                       </a:r>
                     </a:p>
                   </a:txBody>
@@ -8267,7 +8178,7 @@
                           <a:ea typeface="Arial"/>
                           <a:cs typeface="Arial"/>
                         </a:rPr>
-                        <a:t>Whether the organization accepts this category</a:t>
+                        <a:t>Whether the organization accepts the food category</a:t>
                       </a:r>
                     </a:p>
                   </a:txBody>
@@ -8335,7 +8246,7 @@
                           <a:ea typeface="Arial"/>
                           <a:cs typeface="Arial"/>
                         </a:rPr>
-                        <a:t>How much the organization received in the last 30 days</a:t>
+                        <a:t>Quantity received by the organization during the previous 30 days</a:t>
                       </a:r>
                     </a:p>
                   </a:txBody>
@@ -8349,7 +8260,7 @@
     </p:spTree>
     <p:extLst>
       <p:ext uri="{BB962C8B-B14F-4D97-AF65-F5344CB8AC3E}">
-        <p14:creationId xmlns:p14="http://schemas.microsoft.com/office/powerpoint/2010/main" val="1300546277"/>
+        <p14:creationId xmlns:p14="http://schemas.microsoft.com/office/powerpoint/2010/main" val="38310853"/>
       </p:ext>
     </p:extLst>
   </p:cSld>
@@ -8380,7 +8291,7 @@
           <p:cNvPr id="8" name="slide-title">
             <a:extLst xmlns:a="http://schemas.openxmlformats.org/drawingml/2006/main">
               <a:ext uri="{FF2B5EF4-FFF2-40B4-BE49-F238E27FC236}">
-                <a16:creationId xmlns:a16="http://schemas.microsoft.com/office/drawing/2014/main" id="{703D103C-72B6-4CEB-BC8B-12367B2454D9}"/>
+                <a16:creationId xmlns:a16="http://schemas.microsoft.com/office/drawing/2014/main" id="{7C1DC4F3-E779-4675-B876-608F12F77AC8}"/>
               </a:ext>
             </a:extLst>
           </p:cNvPr>
@@ -8439,7 +8350,7 @@
                 <a:ea typeface="Arial"/>
                 <a:cs typeface="Arial"/>
               </a:rPr>
-              <a:t>Food-safety arrival rule</a:t>
+              <a:t>Original contribution: the food-safety arrival rule</a:t>
             </a:r>
           </a:p>
         </p:txBody>
@@ -8449,7 +8360,7 @@
           <p:cNvPr id="2" name="slide-lead">
             <a:extLst xmlns:a="http://schemas.openxmlformats.org/drawingml/2006/main">
               <a:ext uri="{FF2B5EF4-FFF2-40B4-BE49-F238E27FC236}">
-                <a16:creationId xmlns:a16="http://schemas.microsoft.com/office/drawing/2014/main" id="{514F396F-643F-484D-9D9E-076A6C5DD518}"/>
+                <a16:creationId xmlns:a16="http://schemas.microsoft.com/office/drawing/2014/main" id="{39E99AF6-0746-4CDD-BE8A-9A5DE7400C9A}"/>
               </a:ext>
             </a:extLst>
           </p:cNvPr>
@@ -8508,7 +8419,7 @@
                 <a:ea typeface="Arial"/>
                 <a:cs typeface="Arial"/>
               </a:rPr>
-              <a:t>The rule I added. Food must be able to arrive while it is still safe to serve.</a:t>
+              <a:t>A constraint introduced in this project. Food must be able to arrive while it remains safe to serve.</a:t>
             </a:r>
           </a:p>
         </p:txBody>
@@ -8518,7 +8429,7 @@
           <p:cNvPr id="3" name="title-rule">
             <a:extLst xmlns:a="http://schemas.openxmlformats.org/drawingml/2006/main">
               <a:ext uri="{FF2B5EF4-FFF2-40B4-BE49-F238E27FC236}">
-                <a16:creationId xmlns:a16="http://schemas.microsoft.com/office/drawing/2014/main" id="{D92127B3-674A-41D2-B77B-572127702BB3}"/>
+                <a16:creationId xmlns:a16="http://schemas.microsoft.com/office/drawing/2014/main" id="{F7CA7AE4-75A3-44C6-9245-081544D4F427}"/>
               </a:ext>
             </a:extLst>
           </p:cNvPr>
@@ -8549,7 +8460,7 @@
           <p:cNvPr id="4" name="">
             <a:extLst xmlns:a="http://schemas.openxmlformats.org/drawingml/2006/main">
               <a:ext uri="{FF2B5EF4-FFF2-40B4-BE49-F238E27FC236}">
-                <a16:creationId xmlns:a16="http://schemas.microsoft.com/office/drawing/2014/main" id="{ACD2CC58-BEA2-40EF-8731-3E8134B4C864}"/>
+                <a16:creationId xmlns:a16="http://schemas.microsoft.com/office/drawing/2014/main" id="{B66856B0-5F4A-4C91-A9D4-B7C2BC7FAC01}"/>
               </a:ext>
             </a:extLst>
           </p:cNvPr>
@@ -8560,8 +8471,8 @@
         </p:nvSpPr>
         <p:spPr>
           <a:xfrm xmlns:a="http://schemas.openxmlformats.org/drawingml/2006/main">
-            <a:off x="685800" y="1866900"/>
-            <a:ext cx="5715000" cy="3143250"/>
+            <a:off x="685800" y="1981200"/>
+            <a:ext cx="5619750" cy="3048000"/>
           </a:xfrm>
           <a:prstGeom xmlns:a="http://schemas.openxmlformats.org/drawingml/2006/main" prst="rect">
             <a:avLst/>
@@ -8578,7 +8489,7 @@
           </a:bodyPr>
           <a:lstStyle xmlns:a="http://schemas.openxmlformats.org/drawingml/2006/main">
             <a:defPPr>
-              <a:defRPr sz="1350">
+              <a:defRPr sz="1275">
                 <a:solidFill>
                   <a:srgbClr val="131A24"/>
                 </a:solidFill>
@@ -8594,7 +8505,7 @@
                 <a:spcPts val="1400"/>
               </a:spcAft>
               <a:buChar char="•"/>
-              <a:defRPr sz="1350">
+              <a:defRPr sz="1275">
                 <a:solidFill>
                   <a:srgbClr val="131A24"/>
                 </a:solidFill>
@@ -8604,7 +8515,7 @@
               </a:defRPr>
             </a:pPr>
             <a:r>
-              <a:rPr sz="1350">
+              <a:rPr sz="1275">
                 <a:solidFill>
                   <a:srgbClr val="131A24"/>
                 </a:solidFill>
@@ -8612,7 +8523,7 @@
                 <a:ea typeface="Arial"/>
                 <a:cs typeface="Arial"/>
               </a:rPr>
-              <a:t>The engine estimates pickup to handover time for each organization from the distance, and adds handling time.</a:t>
+              <a:t>The engine estimates the pickup to handover duration for each candidate organization from the travel distance and a handling allowance.</a:t>
             </a:r>
           </a:p>
           <a:p xmlns:a="http://schemas.openxmlformats.org/drawingml/2006/main">
@@ -8621,7 +8532,7 @@
                 <a:spcPts val="1400"/>
               </a:spcAft>
               <a:buChar char="•"/>
-              <a:defRPr sz="1350">
+              <a:defRPr sz="1275">
                 <a:solidFill>
                   <a:srgbClr val="131A24"/>
                 </a:solidFill>
@@ -8631,7 +8542,7 @@
               </a:defRPr>
             </a:pPr>
             <a:r>
-              <a:rPr sz="1350">
+              <a:rPr sz="1275">
                 <a:solidFill>
                   <a:srgbClr val="131A24"/>
                 </a:solidFill>
@@ -8639,7 +8550,7 @@
                 <a:ea typeface="Arial"/>
                 <a:cs typeface="Arial"/>
               </a:rPr>
-              <a:t>That estimate is compared with the time left on the safe window, keeping sixty minutes free for serving.</a:t>
+              <a:t>The estimate is compared with the remaining safe window, retaining sixty minutes for serving.</a:t>
             </a:r>
           </a:p>
           <a:p xmlns:a="http://schemas.openxmlformats.org/drawingml/2006/main">
@@ -8648,7 +8559,7 @@
                 <a:spcPts val="1400"/>
               </a:spcAft>
               <a:buChar char="•"/>
-              <a:defRPr sz="1350">
+              <a:defRPr sz="1275">
                 <a:solidFill>
                   <a:srgbClr val="131A24"/>
                 </a:solidFill>
@@ -8658,7 +8569,7 @@
               </a:defRPr>
             </a:pPr>
             <a:r>
-              <a:rPr sz="1350">
+              <a:rPr sz="1275">
                 <a:solidFill>
                   <a:srgbClr val="131A24"/>
                 </a:solidFill>
@@ -8666,7 +8577,7 @@
                 <a:ea typeface="Arial"/>
                 <a:cs typeface="Arial"/>
               </a:rPr>
-              <a:t>Organizations that cannot make it are excluded with a written reason, not just scored lower.</a:t>
+              <a:t>Organizations that cannot arrive in time are excluded, and the reason is stored on the allocation.</a:t>
             </a:r>
           </a:p>
           <a:p xmlns:a="http://schemas.openxmlformats.org/drawingml/2006/main">
@@ -8675,7 +8586,7 @@
                 <a:spcPts val="1400"/>
               </a:spcAft>
               <a:buChar char="•"/>
-              <a:defRPr sz="1350">
+              <a:defRPr sz="1275">
                 <a:solidFill>
                   <a:srgbClr val="131A24"/>
                 </a:solidFill>
@@ -8685,7 +8596,7 @@
               </a:defRPr>
             </a:pPr>
             <a:r>
-              <a:rPr sz="1350">
+              <a:rPr sz="1275">
                 <a:solidFill>
                   <a:srgbClr val="131A24"/>
                 </a:solidFill>
@@ -8693,7 +8604,7 @@
                 <a:ea typeface="Arial"/>
                 <a:cs typeface="Arial"/>
               </a:rPr>
-              <a:t>I first had distance as a lower score. Late arrival is unsafe, so it became a hard rule in front of scoring.</a:t>
+              <a:t>Distance was initially treated as a scoring factor. Because late arrival is a safety failure rather than a lower priority, it was implemented as a hard constraint.</a:t>
             </a:r>
           </a:p>
         </p:txBody>
@@ -8703,7 +8614,7 @@
           <p:cNvPr id="5" name="">
             <a:extLst xmlns:a="http://schemas.openxmlformats.org/drawingml/2006/main">
               <a:ext uri="{FF2B5EF4-FFF2-40B4-BE49-F238E27FC236}">
-                <a16:creationId xmlns:a16="http://schemas.microsoft.com/office/drawing/2014/main" id="{85790458-2384-42BD-97D4-08628EDECC27}"/>
+                <a16:creationId xmlns:a16="http://schemas.microsoft.com/office/drawing/2014/main" id="{155723FF-EA16-4E62-91B2-F82BC95F2DDC}"/>
               </a:ext>
             </a:extLst>
           </p:cNvPr>
@@ -8711,19 +8622,19 @@
           <p:nvPr/>
         </p:nvGraphicFramePr>
         <p:xfrm>
-          <a:off xmlns:a="http://schemas.openxmlformats.org/drawingml/2006/main" x="6858000" y="1866900"/>
-          <a:ext xmlns:a="http://schemas.openxmlformats.org/drawingml/2006/main" cx="4648200" cy="2857500"/>
+          <a:off xmlns:a="http://schemas.openxmlformats.org/drawingml/2006/main" x="6762750" y="1981200"/>
+          <a:ext xmlns:a="http://schemas.openxmlformats.org/drawingml/2006/main" cx="4743450" cy="2552700"/>
         </p:xfrm>
         <a:graphic xmlns:a="http://schemas.openxmlformats.org/drawingml/2006/main">
           <a:graphicData uri="http://schemas.openxmlformats.org/drawingml/2006/table">
             <a:tbl>
               <a:tblPr/>
               <a:tblGrid>
-                <a:gridCol w="1733550"/>
+                <a:gridCol w="1779411"/>
                 <a:gridCol w="1047750"/>
-                <a:gridCol w="1866900"/>
+                <a:gridCol w="1916289"/>
               </a:tblGrid>
-              <a:tr h="714375">
+              <a:tr h="638175">
                 <a:tc>
                   <a:txBody>
                     <a:bodyPr>
@@ -8803,7 +8714,7 @@
                   </a:tcPr>
                 </a:tc>
               </a:tr>
-              <a:tr h="714375">
+              <a:tr h="638175">
                 <a:tc>
                   <a:txBody>
                     <a:bodyPr>
@@ -8864,14 +8775,14 @@
                           <a:ea typeface="Arial"/>
                           <a:cs typeface="Arial"/>
                         </a:rPr>
-                        <a:t>Eligible, 15 min to spare</a:t>
+                        <a:t>Eligible, 15 minutes to spare</a:t>
                       </a:r>
                     </a:p>
                   </a:txBody>
                   <a:tcPr marL="91440" marR="91440" marT="45720" marB="45720"/>
                 </a:tc>
               </a:tr>
-              <a:tr h="714375">
+              <a:tr h="638175">
                 <a:tc>
                   <a:txBody>
                     <a:bodyPr>
@@ -8932,14 +8843,14 @@
                           <a:ea typeface="Arial"/>
                           <a:cs typeface="Arial"/>
                         </a:rPr>
-                        <a:t>Eligible, 15 min to spare</a:t>
+                        <a:t>Eligible, 15 minutes to spare</a:t>
                       </a:r>
                     </a:p>
                   </a:txBody>
                   <a:tcPr marL="91440" marR="91440" marT="45720" marB="45720"/>
                 </a:tc>
               </a:tr>
-              <a:tr h="714375">
+              <a:tr h="638175">
                 <a:tc>
                   <a:txBody>
                     <a:bodyPr>
@@ -9000,7 +8911,7 @@
                           <a:ea typeface="Arial"/>
                           <a:cs typeface="Arial"/>
                         </a:rPr>
-                        <a:t>Excluded, needed 65 to 85 min against 60 available</a:t>
+                        <a:t>Excluded, 65 to 85 minutes required against 60 available</a:t>
                       </a:r>
                     </a:p>
                   </a:txBody>
@@ -9016,7 +8927,7 @@
           <p:cNvPr id="6" name="">
             <a:extLst xmlns:a="http://schemas.openxmlformats.org/drawingml/2006/main">
               <a:ext uri="{FF2B5EF4-FFF2-40B4-BE49-F238E27FC236}">
-                <a16:creationId xmlns:a16="http://schemas.microsoft.com/office/drawing/2014/main" id="{D3C4B44E-9B55-4EB5-9FF5-6A012B9F3703}"/>
+                <a16:creationId xmlns:a16="http://schemas.microsoft.com/office/drawing/2014/main" id="{602FF57D-AD8D-4285-8590-DA97B8F30BAE}"/>
               </a:ext>
             </a:extLst>
           </p:cNvPr>
@@ -9027,8 +8938,8 @@
         </p:nvSpPr>
         <p:spPr>
           <a:xfrm xmlns:a="http://schemas.openxmlformats.org/drawingml/2006/main">
-            <a:off x="6858000" y="4857750"/>
-            <a:ext cx="4648200" cy="438150"/>
+            <a:off x="6762750" y="4686300"/>
+            <a:ext cx="4743450" cy="419100"/>
           </a:xfrm>
           <a:prstGeom xmlns:a="http://schemas.openxmlformats.org/drawingml/2006/main" prst="rect">
             <a:avLst/>
@@ -9075,7 +8986,7 @@
                 <a:ea typeface="Arial"/>
                 <a:cs typeface="Arial"/>
               </a:rPr>
-              <a:t>Assumptions: 20 km/h city travel, 10 minutes handling, 60 minutes serving buffer.</a:t>
+              <a:t>Assumptions: 20 km/h urban travel, 10 minutes handling, 60 minutes serving buffer.</a:t>
             </a:r>
           </a:p>
         </p:txBody>
@@ -9085,7 +8996,7 @@
           <p:cNvPr id="7" name="">
             <a:extLst xmlns:a="http://schemas.openxmlformats.org/drawingml/2006/main">
               <a:ext uri="{FF2B5EF4-FFF2-40B4-BE49-F238E27FC236}">
-                <a16:creationId xmlns:a16="http://schemas.microsoft.com/office/drawing/2014/main" id="{057EAE56-31E1-4963-A711-DE565CBC2849}"/>
+                <a16:creationId xmlns:a16="http://schemas.microsoft.com/office/drawing/2014/main" id="{2A4D6A2D-6C93-4F20-804B-05BC405CB424}"/>
               </a:ext>
             </a:extLst>
           </p:cNvPr>
@@ -9096,7 +9007,7 @@
         </p:nvSpPr>
         <p:spPr>
           <a:xfrm xmlns:a="http://schemas.openxmlformats.org/drawingml/2006/main">
-            <a:off x="685800" y="5772150"/>
+            <a:off x="685800" y="5753100"/>
             <a:ext cx="10820400" cy="228600"/>
           </a:xfrm>
           <a:prstGeom xmlns:a="http://schemas.openxmlformats.org/drawingml/2006/main" prst="rect">
@@ -9144,7 +9055,7 @@
                 <a:ea typeface="Arial"/>
                 <a:cs typeface="Arial"/>
               </a:rPr>
-              <a:t>Output of the running engine on 16 October 2026, seeded dataset.</a:t>
+              <a:t>Engine output recorded on 16 October 2026 from the seeded dataset.</a:t>
             </a:r>
           </a:p>
         </p:txBody>
@@ -9152,7 +9063,7 @@
     </p:spTree>
     <p:extLst>
       <p:ext uri="{BB962C8B-B14F-4D97-AF65-F5344CB8AC3E}">
-        <p14:creationId xmlns:p14="http://schemas.microsoft.com/office/powerpoint/2010/main" val="1987894322"/>
+        <p14:creationId xmlns:p14="http://schemas.microsoft.com/office/powerpoint/2010/main" val="1948774898"/>
       </p:ext>
     </p:extLst>
   </p:cSld>
@@ -9180,10 +9091,10 @@
       </p:grpSpPr>
       <p:sp>
         <p:nvSpPr>
-          <p:cNvPr id="17" name="slide-title">
+          <p:cNvPr id="7" name="slide-title">
             <a:extLst xmlns:a="http://schemas.openxmlformats.org/drawingml/2006/main">
               <a:ext uri="{FF2B5EF4-FFF2-40B4-BE49-F238E27FC236}">
-                <a16:creationId xmlns:a16="http://schemas.microsoft.com/office/drawing/2014/main" id="{4AC1B699-DD3E-45A6-B514-377F2B8291F1}"/>
+                <a16:creationId xmlns:a16="http://schemas.microsoft.com/office/drawing/2014/main" id="{453F484C-D1CE-4E12-B6CA-512B5649BD7D}"/>
               </a:ext>
             </a:extLst>
           </p:cNvPr>
@@ -9242,7 +9153,7 @@
                 <a:ea typeface="Arial"/>
                 <a:cs typeface="Arial"/>
               </a:rPr>
-              <a:t>Results, and how it differs</a:t>
+              <a:t>System architecture</a:t>
             </a:r>
           </a:p>
         </p:txBody>
@@ -9252,7 +9163,7 @@
           <p:cNvPr id="2" name="slide-lead">
             <a:extLst xmlns:a="http://schemas.openxmlformats.org/drawingml/2006/main">
               <a:ext uri="{FF2B5EF4-FFF2-40B4-BE49-F238E27FC236}">
-                <a16:creationId xmlns:a16="http://schemas.microsoft.com/office/drawing/2014/main" id="{941370F9-B7FE-42BF-8949-9AD04B356CE7}"/>
+                <a16:creationId xmlns:a16="http://schemas.microsoft.com/office/drawing/2014/main" id="{5F9083AE-FDC8-49E1-BF02-C428374B0FC0}"/>
               </a:ext>
             </a:extLst>
           </p:cNvPr>
@@ -9311,7 +9222,7 @@
                 <a:ea typeface="Arial"/>
                 <a:cs typeface="Arial"/>
               </a:rPr>
-              <a:t>Numbers come from two weeks of seeded operation in the running system.</a:t>
+              <a:t>The layered architecture submitted in the design phase, implemented as specified.</a:t>
             </a:r>
           </a:p>
         </p:txBody>
@@ -9321,7 +9232,7 @@
           <p:cNvPr id="3" name="title-rule">
             <a:extLst xmlns:a="http://schemas.openxmlformats.org/drawingml/2006/main">
               <a:ext uri="{FF2B5EF4-FFF2-40B4-BE49-F238E27FC236}">
-                <a16:creationId xmlns:a16="http://schemas.microsoft.com/office/drawing/2014/main" id="{226405BF-667A-42D1-95DB-59B8D50F0304}"/>
+                <a16:creationId xmlns:a16="http://schemas.microsoft.com/office/drawing/2014/main" id="{2807768E-5B6F-4095-B75C-58D0D8C335F4}"/>
               </a:ext>
             </a:extLst>
           </p:cNvPr>
@@ -9352,7 +9263,7 @@
           <p:cNvPr id="4" name="">
             <a:extLst xmlns:a="http://schemas.openxmlformats.org/drawingml/2006/main">
               <a:ext uri="{FF2B5EF4-FFF2-40B4-BE49-F238E27FC236}">
-                <a16:creationId xmlns:a16="http://schemas.microsoft.com/office/drawing/2014/main" id="{D706C488-F7CE-40CF-990D-9A7ADC2B81B8}"/>
+                <a16:creationId xmlns:a16="http://schemas.microsoft.com/office/drawing/2014/main" id="{9C56AC5A-1513-4857-8553-34087F0D3F2C}"/>
               </a:ext>
             </a:extLst>
           </p:cNvPr>
@@ -9363,8 +9274,8 @@
         </p:nvSpPr>
         <p:spPr>
           <a:xfrm xmlns:a="http://schemas.openxmlformats.org/drawingml/2006/main">
-            <a:off x="685800" y="1905000"/>
-            <a:ext cx="2476500" cy="419100"/>
+            <a:off x="685800" y="1981200"/>
+            <a:ext cx="4476750" cy="2476500"/>
           </a:xfrm>
           <a:prstGeom xmlns:a="http://schemas.openxmlformats.org/drawingml/2006/main" prst="rect">
             <a:avLst/>
@@ -9381,9 +9292,9 @@
           </a:bodyPr>
           <a:lstStyle xmlns:a="http://schemas.openxmlformats.org/drawingml/2006/main">
             <a:defPPr>
-              <a:defRPr sz="2550" b="1">
-                <a:solidFill>
-                  <a:srgbClr val="0E7C57"/>
+              <a:defRPr sz="1200">
+                <a:solidFill>
+                  <a:srgbClr val="131A24"/>
                 </a:solidFill>
                 <a:latin typeface="Arial"/>
                 <a:ea typeface="Arial"/>
@@ -9392,10 +9303,14 @@
             </a:defPPr>
           </a:lstStyle>
           <a:p xmlns:a="http://schemas.openxmlformats.org/drawingml/2006/main">
-            <a:pPr>
-              <a:defRPr sz="2550" b="1">
-                <a:solidFill>
-                  <a:srgbClr val="0E7C57"/>
+            <a:pPr marL="228600" indent="-114300">
+              <a:spcAft>
+                <a:spcPts val="1600"/>
+              </a:spcAft>
+              <a:buChar char="•"/>
+              <a:defRPr sz="1200">
+                <a:solidFill>
+                  <a:srgbClr val="131A24"/>
                 </a:solidFill>
                 <a:latin typeface="Arial"/>
                 <a:ea typeface="Arial"/>
@@ -9403,37 +9318,119 @@
               </a:defRPr>
             </a:pPr>
             <a:r>
-              <a:rPr sz="2550" b="1">
-                <a:solidFill>
-                  <a:srgbClr val="0E7C57"/>
+              <a:rPr sz="1200">
+                <a:solidFill>
+                  <a:srgbClr val="131A24"/>
                 </a:solidFill>
                 <a:latin typeface="Arial"/>
                 <a:ea typeface="Arial"/>
                 <a:cs typeface="Arial"/>
               </a:rPr>
-              <a:t>16</a:t>
+              <a:t>Four layers: React presentation, Spring Boot REST application, business logic including the allocation engine, and JPA over MySQL.</a:t>
+            </a:r>
+          </a:p>
+          <a:p xmlns:a="http://schemas.openxmlformats.org/drawingml/2006/main">
+            <a:pPr marL="228600" indent="-114300">
+              <a:spcAft>
+                <a:spcPts val="1600"/>
+              </a:spcAft>
+              <a:buChar char="•"/>
+              <a:defRPr sz="1200">
+                <a:solidFill>
+                  <a:srgbClr val="131A24"/>
+                </a:solidFill>
+                <a:latin typeface="Arial"/>
+                <a:ea typeface="Arial"/>
+                <a:cs typeface="Arial"/>
+              </a:defRPr>
+            </a:pPr>
+            <a:r>
+              <a:rPr sz="1200">
+                <a:solidFill>
+                  <a:srgbClr val="131A24"/>
+                </a:solidFill>
+                <a:latin typeface="Arial"/>
+                <a:ea typeface="Arial"/>
+                <a:cs typeface="Arial"/>
+              </a:rPr>
+              <a:t>Authentication issues a JWT at login; the server verifies the role and the ownership of each record.</a:t>
+            </a:r>
+          </a:p>
+          <a:p xmlns:a="http://schemas.openxmlformats.org/drawingml/2006/main">
+            <a:pPr marL="228600" indent="-114300">
+              <a:spcAft>
+                <a:spcPts val="1600"/>
+              </a:spcAft>
+              <a:buChar char="•"/>
+              <a:defRPr sz="1200">
+                <a:solidFill>
+                  <a:srgbClr val="131A24"/>
+                </a:solidFill>
+                <a:latin typeface="Arial"/>
+                <a:ea typeface="Arial"/>
+                <a:cs typeface="Arial"/>
+              </a:defRPr>
+            </a:pPr>
+            <a:r>
+              <a:rPr sz="1200">
+                <a:solidFill>
+                  <a:srgbClr val="131A24"/>
+                </a:solidFill>
+                <a:latin typeface="Arial"/>
+                <a:ea typeface="Arial"/>
+                <a:cs typeface="Arial"/>
+              </a:rPr>
+              <a:t>The allocation engine is an independent service, which keeps decision rules separate from the domain classes.</a:t>
             </a:r>
           </a:p>
         </p:txBody>
       </p:sp>
-      <p:sp>
-        <p:nvSpPr>
+      <p:pic>
+        <p:nvPicPr>
           <p:cNvPr id="5" name="">
             <a:extLst xmlns:a="http://schemas.openxmlformats.org/drawingml/2006/main">
               <a:ext uri="{FF2B5EF4-FFF2-40B4-BE49-F238E27FC236}">
-                <a16:creationId xmlns:a16="http://schemas.microsoft.com/office/drawing/2014/main" id="{AD1D3580-C25B-4799-9072-D70C399BE5AC}"/>
+                <a16:creationId xmlns:a16="http://schemas.microsoft.com/office/drawing/2014/main" id="{E2AFA96B-FEFB-4B58-91E0-FA0317695B24}"/>
               </a:ext>
             </a:extLst>
           </p:cNvPr>
-          <p:cNvSpPr>
-            <a:spLocks xmlns:a="http://schemas.openxmlformats.org/drawingml/2006/main" noGrp="1"/>
-          </p:cNvSpPr>
+          <p:cNvPicPr>
+            <a:picLocks xmlns:a="http://schemas.openxmlformats.org/drawingml/2006/main" noChangeAspect="1"/>
+          </p:cNvPicPr>
           <p:nvPr/>
-        </p:nvSpPr>
+        </p:nvPicPr>
+        <p:blipFill>
+          <a:blip xmlns:r="http://schemas.openxmlformats.org/officeDocument/2006/relationships" xmlns:a="http://schemas.openxmlformats.org/drawingml/2006/main" r:embed="Re3a710d1becf43fb"/>
+          <a:stretch xmlns:a="http://schemas.openxmlformats.org/drawingml/2006/main"/>
+        </p:blipFill>
         <p:spPr>
           <a:xfrm xmlns:a="http://schemas.openxmlformats.org/drawingml/2006/main">
-            <a:off x="685800" y="2343150"/>
-            <a:ext cx="2476500" cy="304800"/>
+            <a:off x="5689934" y="1676400"/>
+            <a:ext cx="4812632" cy="4762500"/>
+          </a:xfrm>
+          <a:prstGeom xmlns:a="http://schemas.openxmlformats.org/drawingml/2006/main" prst="rect">
+            <a:avLst/>
+          </a:prstGeom>
+        </p:spPr>
+      </p:pic>
+      <p:sp>
+        <p:nvSpPr>
+          <p:cNvPr id="6" name="">
+            <a:extLst xmlns:a="http://schemas.openxmlformats.org/drawingml/2006/main">
+              <a:ext uri="{FF2B5EF4-FFF2-40B4-BE49-F238E27FC236}">
+                <a16:creationId xmlns:a16="http://schemas.microsoft.com/office/drawing/2014/main" id="{0C7DC1D8-2B5C-46C9-A36F-02B36E36FA6F}"/>
+              </a:ext>
+            </a:extLst>
+          </p:cNvPr>
+          <p:cNvSpPr>
+            <a:spLocks xmlns:a="http://schemas.openxmlformats.org/drawingml/2006/main" noGrp="1"/>
+          </p:cNvSpPr>
+          <p:nvPr/>
+        </p:nvSpPr>
+        <p:spPr>
+          <a:xfrm xmlns:a="http://schemas.openxmlformats.org/drawingml/2006/main">
+            <a:off x="685800" y="5753100"/>
+            <a:ext cx="10820400" cy="228600"/>
           </a:xfrm>
           <a:prstGeom xmlns:a="http://schemas.openxmlformats.org/drawingml/2006/main" prst="rect">
             <a:avLst/>
@@ -9450,9 +9447,9 @@
           </a:bodyPr>
           <a:lstStyle xmlns:a="http://schemas.openxmlformats.org/drawingml/2006/main">
             <a:defPPr>
-              <a:defRPr sz="1200" b="0">
-                <a:solidFill>
-                  <a:srgbClr val="52606F"/>
+              <a:defRPr sz="1125" b="0">
+                <a:solidFill>
+                  <a:srgbClr val="8A94A3"/>
                 </a:solidFill>
                 <a:latin typeface="Arial"/>
                 <a:ea typeface="Arial"/>
@@ -9462,9 +9459,9 @@
           </a:lstStyle>
           <a:p xmlns:a="http://schemas.openxmlformats.org/drawingml/2006/main">
             <a:pPr>
-              <a:defRPr sz="1200" b="0">
-                <a:solidFill>
-                  <a:srgbClr val="52606F"/>
+              <a:defRPr sz="1125" b="0">
+                <a:solidFill>
+                  <a:srgbClr val="8A94A3"/>
                 </a:solidFill>
                 <a:latin typeface="Arial"/>
                 <a:ea typeface="Arial"/>
@@ -9472,867 +9469,23 @@
               </a:defRPr>
             </a:pPr>
             <a:r>
-              <a:rPr sz="1200" b="0">
-                <a:solidFill>
-                  <a:srgbClr val="52606F"/>
+              <a:rPr sz="1125" b="0">
+                <a:solidFill>
+                  <a:srgbClr val="8A94A3"/>
                 </a:solidFill>
                 <a:latin typeface="Arial"/>
                 <a:ea typeface="Arial"/>
                 <a:cs typeface="Arial"/>
               </a:rPr>
-              <a:t>donations registered</a:t>
+              <a:t>Figure: overall layered system architecture, Lab 3 submission.</a:t>
             </a:r>
           </a:p>
         </p:txBody>
       </p:sp>
-      <p:sp>
-        <p:nvSpPr>
-          <p:cNvPr id="6" name="">
-            <a:extLst xmlns:a="http://schemas.openxmlformats.org/drawingml/2006/main">
-              <a:ext uri="{FF2B5EF4-FFF2-40B4-BE49-F238E27FC236}">
-                <a16:creationId xmlns:a16="http://schemas.microsoft.com/office/drawing/2014/main" id="{09B89458-02B1-4C7D-80AF-41D637409CEA}"/>
-              </a:ext>
-            </a:extLst>
-          </p:cNvPr>
-          <p:cNvSpPr>
-            <a:spLocks xmlns:a="http://schemas.openxmlformats.org/drawingml/2006/main" noGrp="1"/>
-          </p:cNvSpPr>
-          <p:nvPr/>
-        </p:nvSpPr>
-        <p:spPr>
-          <a:xfrm xmlns:a="http://schemas.openxmlformats.org/drawingml/2006/main">
-            <a:off x="3448050" y="1905000"/>
-            <a:ext cx="2476500" cy="419100"/>
-          </a:xfrm>
-          <a:prstGeom xmlns:a="http://schemas.openxmlformats.org/drawingml/2006/main" prst="rect">
-            <a:avLst/>
-          </a:prstGeom>
-          <a:noFill xmlns:a="http://schemas.openxmlformats.org/drawingml/2006/main"/>
-          <a:ln xmlns:a="http://schemas.openxmlformats.org/drawingml/2006/main" w="0">
-            <a:noFill/>
-            <a:prstDash val="solid"/>
-          </a:ln>
-        </p:spPr>
-        <p:txBody>
-          <a:bodyPr xmlns:a="http://schemas.openxmlformats.org/drawingml/2006/main">
-            <a:noAutofit/>
-          </a:bodyPr>
-          <a:lstStyle xmlns:a="http://schemas.openxmlformats.org/drawingml/2006/main">
-            <a:defPPr>
-              <a:defRPr sz="2550" b="1">
-                <a:solidFill>
-                  <a:srgbClr val="0E7C57"/>
-                </a:solidFill>
-                <a:latin typeface="Arial"/>
-                <a:ea typeface="Arial"/>
-                <a:cs typeface="Arial"/>
-              </a:defRPr>
-            </a:defPPr>
-          </a:lstStyle>
-          <a:p xmlns:a="http://schemas.openxmlformats.org/drawingml/2006/main">
-            <a:pPr>
-              <a:defRPr sz="2550" b="1">
-                <a:solidFill>
-                  <a:srgbClr val="0E7C57"/>
-                </a:solidFill>
-                <a:latin typeface="Arial"/>
-                <a:ea typeface="Arial"/>
-                <a:cs typeface="Arial"/>
-              </a:defRPr>
-            </a:pPr>
-            <a:r>
-              <a:rPr sz="2550" b="1">
-                <a:solidFill>
-                  <a:srgbClr val="0E7C57"/>
-                </a:solidFill>
-                <a:latin typeface="Arial"/>
-                <a:ea typeface="Arial"/>
-                <a:cs typeface="Arial"/>
-              </a:rPr>
-              <a:t>414 kg</a:t>
-            </a:r>
-          </a:p>
-        </p:txBody>
-      </p:sp>
-      <p:sp>
-        <p:nvSpPr>
-          <p:cNvPr id="7" name="">
-            <a:extLst xmlns:a="http://schemas.openxmlformats.org/drawingml/2006/main">
-              <a:ext uri="{FF2B5EF4-FFF2-40B4-BE49-F238E27FC236}">
-                <a16:creationId xmlns:a16="http://schemas.microsoft.com/office/drawing/2014/main" id="{06E2FA0F-BCEC-49F7-B3A4-058800C7AD95}"/>
-              </a:ext>
-            </a:extLst>
-          </p:cNvPr>
-          <p:cNvSpPr>
-            <a:spLocks xmlns:a="http://schemas.openxmlformats.org/drawingml/2006/main" noGrp="1"/>
-          </p:cNvSpPr>
-          <p:nvPr/>
-        </p:nvSpPr>
-        <p:spPr>
-          <a:xfrm xmlns:a="http://schemas.openxmlformats.org/drawingml/2006/main">
-            <a:off x="3448050" y="2343150"/>
-            <a:ext cx="2476500" cy="304800"/>
-          </a:xfrm>
-          <a:prstGeom xmlns:a="http://schemas.openxmlformats.org/drawingml/2006/main" prst="rect">
-            <a:avLst/>
-          </a:prstGeom>
-          <a:noFill xmlns:a="http://schemas.openxmlformats.org/drawingml/2006/main"/>
-          <a:ln xmlns:a="http://schemas.openxmlformats.org/drawingml/2006/main" w="0">
-            <a:noFill/>
-            <a:prstDash val="solid"/>
-          </a:ln>
-        </p:spPr>
-        <p:txBody>
-          <a:bodyPr xmlns:a="http://schemas.openxmlformats.org/drawingml/2006/main">
-            <a:noAutofit/>
-          </a:bodyPr>
-          <a:lstStyle xmlns:a="http://schemas.openxmlformats.org/drawingml/2006/main">
-            <a:defPPr>
-              <a:defRPr sz="1200" b="0">
-                <a:solidFill>
-                  <a:srgbClr val="52606F"/>
-                </a:solidFill>
-                <a:latin typeface="Arial"/>
-                <a:ea typeface="Arial"/>
-                <a:cs typeface="Arial"/>
-              </a:defRPr>
-            </a:defPPr>
-          </a:lstStyle>
-          <a:p xmlns:a="http://schemas.openxmlformats.org/drawingml/2006/main">
-            <a:pPr>
-              <a:defRPr sz="1200" b="0">
-                <a:solidFill>
-                  <a:srgbClr val="52606F"/>
-                </a:solidFill>
-                <a:latin typeface="Arial"/>
-                <a:ea typeface="Arial"/>
-                <a:cs typeface="Arial"/>
-              </a:defRPr>
-            </a:pPr>
-            <a:r>
-              <a:rPr sz="1200" b="0">
-                <a:solidFill>
-                  <a:srgbClr val="52606F"/>
-                </a:solidFill>
-                <a:latin typeface="Arial"/>
-                <a:ea typeface="Arial"/>
-                <a:cs typeface="Arial"/>
-              </a:rPr>
-              <a:t>food rescued</a:t>
-            </a:r>
-          </a:p>
-        </p:txBody>
-      </p:sp>
-      <p:sp>
-        <p:nvSpPr>
-          <p:cNvPr id="8" name="">
-            <a:extLst xmlns:a="http://schemas.openxmlformats.org/drawingml/2006/main">
-              <a:ext uri="{FF2B5EF4-FFF2-40B4-BE49-F238E27FC236}">
-                <a16:creationId xmlns:a16="http://schemas.microsoft.com/office/drawing/2014/main" id="{DD062E75-70B7-4E93-9701-7A603BC12072}"/>
-              </a:ext>
-            </a:extLst>
-          </p:cNvPr>
-          <p:cNvSpPr>
-            <a:spLocks xmlns:a="http://schemas.openxmlformats.org/drawingml/2006/main" noGrp="1"/>
-          </p:cNvSpPr>
-          <p:nvPr/>
-        </p:nvSpPr>
-        <p:spPr>
-          <a:xfrm xmlns:a="http://schemas.openxmlformats.org/drawingml/2006/main">
-            <a:off x="685800" y="2933700"/>
-            <a:ext cx="2476500" cy="419100"/>
-          </a:xfrm>
-          <a:prstGeom xmlns:a="http://schemas.openxmlformats.org/drawingml/2006/main" prst="rect">
-            <a:avLst/>
-          </a:prstGeom>
-          <a:noFill xmlns:a="http://schemas.openxmlformats.org/drawingml/2006/main"/>
-          <a:ln xmlns:a="http://schemas.openxmlformats.org/drawingml/2006/main" w="0">
-            <a:noFill/>
-            <a:prstDash val="solid"/>
-          </a:ln>
-        </p:spPr>
-        <p:txBody>
-          <a:bodyPr xmlns:a="http://schemas.openxmlformats.org/drawingml/2006/main">
-            <a:noAutofit/>
-          </a:bodyPr>
-          <a:lstStyle xmlns:a="http://schemas.openxmlformats.org/drawingml/2006/main">
-            <a:defPPr>
-              <a:defRPr sz="2550" b="1">
-                <a:solidFill>
-                  <a:srgbClr val="0E7C57"/>
-                </a:solidFill>
-                <a:latin typeface="Arial"/>
-                <a:ea typeface="Arial"/>
-                <a:cs typeface="Arial"/>
-              </a:defRPr>
-            </a:defPPr>
-          </a:lstStyle>
-          <a:p xmlns:a="http://schemas.openxmlformats.org/drawingml/2006/main">
-            <a:pPr>
-              <a:defRPr sz="2550" b="1">
-                <a:solidFill>
-                  <a:srgbClr val="0E7C57"/>
-                </a:solidFill>
-                <a:latin typeface="Arial"/>
-                <a:ea typeface="Arial"/>
-                <a:cs typeface="Arial"/>
-              </a:defRPr>
-            </a:pPr>
-            <a:r>
-              <a:rPr sz="2550" b="1">
-                <a:solidFill>
-                  <a:srgbClr val="0E7C57"/>
-                </a:solidFill>
-                <a:latin typeface="Arial"/>
-                <a:ea typeface="Arial"/>
-                <a:cs typeface="Arial"/>
-              </a:rPr>
-              <a:t>1,035</a:t>
-            </a:r>
-          </a:p>
-        </p:txBody>
-      </p:sp>
-      <p:sp>
-        <p:nvSpPr>
-          <p:cNvPr id="9" name="">
-            <a:extLst xmlns:a="http://schemas.openxmlformats.org/drawingml/2006/main">
-              <a:ext uri="{FF2B5EF4-FFF2-40B4-BE49-F238E27FC236}">
-                <a16:creationId xmlns:a16="http://schemas.microsoft.com/office/drawing/2014/main" id="{1993F26D-F0F0-42B0-AA27-C1787ABEE055}"/>
-              </a:ext>
-            </a:extLst>
-          </p:cNvPr>
-          <p:cNvSpPr>
-            <a:spLocks xmlns:a="http://schemas.openxmlformats.org/drawingml/2006/main" noGrp="1"/>
-          </p:cNvSpPr>
-          <p:nvPr/>
-        </p:nvSpPr>
-        <p:spPr>
-          <a:xfrm xmlns:a="http://schemas.openxmlformats.org/drawingml/2006/main">
-            <a:off x="685800" y="3371850"/>
-            <a:ext cx="2476500" cy="304800"/>
-          </a:xfrm>
-          <a:prstGeom xmlns:a="http://schemas.openxmlformats.org/drawingml/2006/main" prst="rect">
-            <a:avLst/>
-          </a:prstGeom>
-          <a:noFill xmlns:a="http://schemas.openxmlformats.org/drawingml/2006/main"/>
-          <a:ln xmlns:a="http://schemas.openxmlformats.org/drawingml/2006/main" w="0">
-            <a:noFill/>
-            <a:prstDash val="solid"/>
-          </a:ln>
-        </p:spPr>
-        <p:txBody>
-          <a:bodyPr xmlns:a="http://schemas.openxmlformats.org/drawingml/2006/main">
-            <a:noAutofit/>
-          </a:bodyPr>
-          <a:lstStyle xmlns:a="http://schemas.openxmlformats.org/drawingml/2006/main">
-            <a:defPPr>
-              <a:defRPr sz="1200" b="0">
-                <a:solidFill>
-                  <a:srgbClr val="52606F"/>
-                </a:solidFill>
-                <a:latin typeface="Arial"/>
-                <a:ea typeface="Arial"/>
-                <a:cs typeface="Arial"/>
-              </a:defRPr>
-            </a:defPPr>
-          </a:lstStyle>
-          <a:p xmlns:a="http://schemas.openxmlformats.org/drawingml/2006/main">
-            <a:pPr>
-              <a:defRPr sz="1200" b="0">
-                <a:solidFill>
-                  <a:srgbClr val="52606F"/>
-                </a:solidFill>
-                <a:latin typeface="Arial"/>
-                <a:ea typeface="Arial"/>
-                <a:cs typeface="Arial"/>
-              </a:defRPr>
-            </a:pPr>
-            <a:r>
-              <a:rPr sz="1200" b="0">
-                <a:solidFill>
-                  <a:srgbClr val="52606F"/>
-                </a:solidFill>
-                <a:latin typeface="Arial"/>
-                <a:ea typeface="Arial"/>
-                <a:cs typeface="Arial"/>
-              </a:rPr>
-              <a:t>meals equivalent</a:t>
-            </a:r>
-          </a:p>
-        </p:txBody>
-      </p:sp>
-      <p:sp>
-        <p:nvSpPr>
-          <p:cNvPr id="10" name="">
-            <a:extLst xmlns:a="http://schemas.openxmlformats.org/drawingml/2006/main">
-              <a:ext uri="{FF2B5EF4-FFF2-40B4-BE49-F238E27FC236}">
-                <a16:creationId xmlns:a16="http://schemas.microsoft.com/office/drawing/2014/main" id="{CD08583A-3A5B-4DEE-842B-9B1620A5CDA5}"/>
-              </a:ext>
-            </a:extLst>
-          </p:cNvPr>
-          <p:cNvSpPr>
-            <a:spLocks xmlns:a="http://schemas.openxmlformats.org/drawingml/2006/main" noGrp="1"/>
-          </p:cNvSpPr>
-          <p:nvPr/>
-        </p:nvSpPr>
-        <p:spPr>
-          <a:xfrm xmlns:a="http://schemas.openxmlformats.org/drawingml/2006/main">
-            <a:off x="3448050" y="2933700"/>
-            <a:ext cx="2476500" cy="419100"/>
-          </a:xfrm>
-          <a:prstGeom xmlns:a="http://schemas.openxmlformats.org/drawingml/2006/main" prst="rect">
-            <a:avLst/>
-          </a:prstGeom>
-          <a:noFill xmlns:a="http://schemas.openxmlformats.org/drawingml/2006/main"/>
-          <a:ln xmlns:a="http://schemas.openxmlformats.org/drawingml/2006/main" w="0">
-            <a:noFill/>
-            <a:prstDash val="solid"/>
-          </a:ln>
-        </p:spPr>
-        <p:txBody>
-          <a:bodyPr xmlns:a="http://schemas.openxmlformats.org/drawingml/2006/main">
-            <a:noAutofit/>
-          </a:bodyPr>
-          <a:lstStyle xmlns:a="http://schemas.openxmlformats.org/drawingml/2006/main">
-            <a:defPPr>
-              <a:defRPr sz="2550" b="1">
-                <a:solidFill>
-                  <a:srgbClr val="0E7C57"/>
-                </a:solidFill>
-                <a:latin typeface="Arial"/>
-                <a:ea typeface="Arial"/>
-                <a:cs typeface="Arial"/>
-              </a:defRPr>
-            </a:defPPr>
-          </a:lstStyle>
-          <a:p xmlns:a="http://schemas.openxmlformats.org/drawingml/2006/main">
-            <a:pPr>
-              <a:defRPr sz="2550" b="1">
-                <a:solidFill>
-                  <a:srgbClr val="0E7C57"/>
-                </a:solidFill>
-                <a:latin typeface="Arial"/>
-                <a:ea typeface="Arial"/>
-                <a:cs typeface="Arial"/>
-              </a:defRPr>
-            </a:pPr>
-            <a:r>
-              <a:rPr sz="2550" b="1">
-                <a:solidFill>
-                  <a:srgbClr val="0E7C57"/>
-                </a:solidFill>
-                <a:latin typeface="Arial"/>
-                <a:ea typeface="Arial"/>
-                <a:cs typeface="Arial"/>
-              </a:rPr>
-              <a:t>91.7%</a:t>
-            </a:r>
-          </a:p>
-        </p:txBody>
-      </p:sp>
-      <p:sp>
-        <p:nvSpPr>
-          <p:cNvPr id="11" name="">
-            <a:extLst xmlns:a="http://schemas.openxmlformats.org/drawingml/2006/main">
-              <a:ext uri="{FF2B5EF4-FFF2-40B4-BE49-F238E27FC236}">
-                <a16:creationId xmlns:a16="http://schemas.microsoft.com/office/drawing/2014/main" id="{C3394BFD-8863-4907-BADF-06646080A2D7}"/>
-              </a:ext>
-            </a:extLst>
-          </p:cNvPr>
-          <p:cNvSpPr>
-            <a:spLocks xmlns:a="http://schemas.openxmlformats.org/drawingml/2006/main" noGrp="1"/>
-          </p:cNvSpPr>
-          <p:nvPr/>
-        </p:nvSpPr>
-        <p:spPr>
-          <a:xfrm xmlns:a="http://schemas.openxmlformats.org/drawingml/2006/main">
-            <a:off x="3448050" y="3371850"/>
-            <a:ext cx="2476500" cy="304800"/>
-          </a:xfrm>
-          <a:prstGeom xmlns:a="http://schemas.openxmlformats.org/drawingml/2006/main" prst="rect">
-            <a:avLst/>
-          </a:prstGeom>
-          <a:noFill xmlns:a="http://schemas.openxmlformats.org/drawingml/2006/main"/>
-          <a:ln xmlns:a="http://schemas.openxmlformats.org/drawingml/2006/main" w="0">
-            <a:noFill/>
-            <a:prstDash val="solid"/>
-          </a:ln>
-        </p:spPr>
-        <p:txBody>
-          <a:bodyPr xmlns:a="http://schemas.openxmlformats.org/drawingml/2006/main">
-            <a:noAutofit/>
-          </a:bodyPr>
-          <a:lstStyle xmlns:a="http://schemas.openxmlformats.org/drawingml/2006/main">
-            <a:defPPr>
-              <a:defRPr sz="1200" b="0">
-                <a:solidFill>
-                  <a:srgbClr val="52606F"/>
-                </a:solidFill>
-                <a:latin typeface="Arial"/>
-                <a:ea typeface="Arial"/>
-                <a:cs typeface="Arial"/>
-              </a:defRPr>
-            </a:defPPr>
-          </a:lstStyle>
-          <a:p xmlns:a="http://schemas.openxmlformats.org/drawingml/2006/main">
-            <a:pPr>
-              <a:defRPr sz="1200" b="0">
-                <a:solidFill>
-                  <a:srgbClr val="52606F"/>
-                </a:solidFill>
-                <a:latin typeface="Arial"/>
-                <a:ea typeface="Arial"/>
-                <a:cs typeface="Arial"/>
-              </a:defRPr>
-            </a:pPr>
-            <a:r>
-              <a:rPr sz="1200" b="0">
-                <a:solidFill>
-                  <a:srgbClr val="52606F"/>
-                </a:solidFill>
-                <a:latin typeface="Arial"/>
-                <a:ea typeface="Arial"/>
-                <a:cs typeface="Arial"/>
-              </a:rPr>
-              <a:t>allocations accepted</a:t>
-            </a:r>
-          </a:p>
-        </p:txBody>
-      </p:sp>
-      <p:sp>
-        <p:nvSpPr>
-          <p:cNvPr id="12" name="">
-            <a:extLst xmlns:a="http://schemas.openxmlformats.org/drawingml/2006/main">
-              <a:ext uri="{FF2B5EF4-FFF2-40B4-BE49-F238E27FC236}">
-                <a16:creationId xmlns:a16="http://schemas.microsoft.com/office/drawing/2014/main" id="{BA66A922-7929-44CE-BA58-C653FEA73966}"/>
-              </a:ext>
-            </a:extLst>
-          </p:cNvPr>
-          <p:cNvSpPr>
-            <a:spLocks xmlns:a="http://schemas.openxmlformats.org/drawingml/2006/main" noGrp="1"/>
-          </p:cNvSpPr>
-          <p:nvPr/>
-        </p:nvSpPr>
-        <p:spPr>
-          <a:xfrm xmlns:a="http://schemas.openxmlformats.org/drawingml/2006/main">
-            <a:off x="685800" y="3962400"/>
-            <a:ext cx="2476500" cy="419100"/>
-          </a:xfrm>
-          <a:prstGeom xmlns:a="http://schemas.openxmlformats.org/drawingml/2006/main" prst="rect">
-            <a:avLst/>
-          </a:prstGeom>
-          <a:noFill xmlns:a="http://schemas.openxmlformats.org/drawingml/2006/main"/>
-          <a:ln xmlns:a="http://schemas.openxmlformats.org/drawingml/2006/main" w="0">
-            <a:noFill/>
-            <a:prstDash val="solid"/>
-          </a:ln>
-        </p:spPr>
-        <p:txBody>
-          <a:bodyPr xmlns:a="http://schemas.openxmlformats.org/drawingml/2006/main">
-            <a:noAutofit/>
-          </a:bodyPr>
-          <a:lstStyle xmlns:a="http://schemas.openxmlformats.org/drawingml/2006/main">
-            <a:defPPr>
-              <a:defRPr sz="2550" b="1">
-                <a:solidFill>
-                  <a:srgbClr val="0E7C57"/>
-                </a:solidFill>
-                <a:latin typeface="Arial"/>
-                <a:ea typeface="Arial"/>
-                <a:cs typeface="Arial"/>
-              </a:defRPr>
-            </a:defPPr>
-          </a:lstStyle>
-          <a:p xmlns:a="http://schemas.openxmlformats.org/drawingml/2006/main">
-            <a:pPr>
-              <a:defRPr sz="2550" b="1">
-                <a:solidFill>
-                  <a:srgbClr val="0E7C57"/>
-                </a:solidFill>
-                <a:latin typeface="Arial"/>
-                <a:ea typeface="Arial"/>
-                <a:cs typeface="Arial"/>
-              </a:defRPr>
-            </a:pPr>
-            <a:r>
-              <a:rPr sz="2550" b="1">
-                <a:solidFill>
-                  <a:srgbClr val="0E7C57"/>
-                </a:solidFill>
-                <a:latin typeface="Arial"/>
-                <a:ea typeface="Arial"/>
-                <a:cs typeface="Arial"/>
-              </a:rPr>
-              <a:t>56 min</a:t>
-            </a:r>
-          </a:p>
-        </p:txBody>
-      </p:sp>
-      <p:sp>
-        <p:nvSpPr>
-          <p:cNvPr id="13" name="">
-            <a:extLst xmlns:a="http://schemas.openxmlformats.org/drawingml/2006/main">
-              <a:ext uri="{FF2B5EF4-FFF2-40B4-BE49-F238E27FC236}">
-                <a16:creationId xmlns:a16="http://schemas.microsoft.com/office/drawing/2014/main" id="{C7817C64-11FB-4F0A-BD40-FD74755DB3D1}"/>
-              </a:ext>
-            </a:extLst>
-          </p:cNvPr>
-          <p:cNvSpPr>
-            <a:spLocks xmlns:a="http://schemas.openxmlformats.org/drawingml/2006/main" noGrp="1"/>
-          </p:cNvSpPr>
-          <p:nvPr/>
-        </p:nvSpPr>
-        <p:spPr>
-          <a:xfrm xmlns:a="http://schemas.openxmlformats.org/drawingml/2006/main">
-            <a:off x="685800" y="4400550"/>
-            <a:ext cx="2476500" cy="304800"/>
-          </a:xfrm>
-          <a:prstGeom xmlns:a="http://schemas.openxmlformats.org/drawingml/2006/main" prst="rect">
-            <a:avLst/>
-          </a:prstGeom>
-          <a:noFill xmlns:a="http://schemas.openxmlformats.org/drawingml/2006/main"/>
-          <a:ln xmlns:a="http://schemas.openxmlformats.org/drawingml/2006/main" w="0">
-            <a:noFill/>
-            <a:prstDash val="solid"/>
-          </a:ln>
-        </p:spPr>
-        <p:txBody>
-          <a:bodyPr xmlns:a="http://schemas.openxmlformats.org/drawingml/2006/main">
-            <a:noAutofit/>
-          </a:bodyPr>
-          <a:lstStyle xmlns:a="http://schemas.openxmlformats.org/drawingml/2006/main">
-            <a:defPPr>
-              <a:defRPr sz="1200" b="0">
-                <a:solidFill>
-                  <a:srgbClr val="52606F"/>
-                </a:solidFill>
-                <a:latin typeface="Arial"/>
-                <a:ea typeface="Arial"/>
-                <a:cs typeface="Arial"/>
-              </a:defRPr>
-            </a:defPPr>
-          </a:lstStyle>
-          <a:p xmlns:a="http://schemas.openxmlformats.org/drawingml/2006/main">
-            <a:pPr>
-              <a:defRPr sz="1200" b="0">
-                <a:solidFill>
-                  <a:srgbClr val="52606F"/>
-                </a:solidFill>
-                <a:latin typeface="Arial"/>
-                <a:ea typeface="Arial"/>
-                <a:cs typeface="Arial"/>
-              </a:defRPr>
-            </a:pPr>
-            <a:r>
-              <a:rPr sz="1200" b="0">
-                <a:solidFill>
-                  <a:srgbClr val="52606F"/>
-                </a:solidFill>
-                <a:latin typeface="Arial"/>
-                <a:ea typeface="Arial"/>
-                <a:cs typeface="Arial"/>
-              </a:rPr>
-              <a:t>pickup to confirmation</a:t>
-            </a:r>
-          </a:p>
-        </p:txBody>
-      </p:sp>
-      <p:sp>
-        <p:nvSpPr>
-          <p:cNvPr id="14" name="">
-            <a:extLst xmlns:a="http://schemas.openxmlformats.org/drawingml/2006/main">
-              <a:ext uri="{FF2B5EF4-FFF2-40B4-BE49-F238E27FC236}">
-                <a16:creationId xmlns:a16="http://schemas.microsoft.com/office/drawing/2014/main" id="{D8F58DD5-4688-49AA-A065-EB0644F89EC1}"/>
-              </a:ext>
-            </a:extLst>
-          </p:cNvPr>
-          <p:cNvSpPr>
-            <a:spLocks xmlns:a="http://schemas.openxmlformats.org/drawingml/2006/main" noGrp="1"/>
-          </p:cNvSpPr>
-          <p:nvPr/>
-        </p:nvSpPr>
-        <p:spPr>
-          <a:xfrm xmlns:a="http://schemas.openxmlformats.org/drawingml/2006/main">
-            <a:off x="3448050" y="3962400"/>
-            <a:ext cx="2476500" cy="419100"/>
-          </a:xfrm>
-          <a:prstGeom xmlns:a="http://schemas.openxmlformats.org/drawingml/2006/main" prst="rect">
-            <a:avLst/>
-          </a:prstGeom>
-          <a:noFill xmlns:a="http://schemas.openxmlformats.org/drawingml/2006/main"/>
-          <a:ln xmlns:a="http://schemas.openxmlformats.org/drawingml/2006/main" w="0">
-            <a:noFill/>
-            <a:prstDash val="solid"/>
-          </a:ln>
-        </p:spPr>
-        <p:txBody>
-          <a:bodyPr xmlns:a="http://schemas.openxmlformats.org/drawingml/2006/main">
-            <a:noAutofit/>
-          </a:bodyPr>
-          <a:lstStyle xmlns:a="http://schemas.openxmlformats.org/drawingml/2006/main">
-            <a:defPPr>
-              <a:defRPr sz="2550" b="1">
-                <a:solidFill>
-                  <a:srgbClr val="0E7C57"/>
-                </a:solidFill>
-                <a:latin typeface="Arial"/>
-                <a:ea typeface="Arial"/>
-                <a:cs typeface="Arial"/>
-              </a:defRPr>
-            </a:defPPr>
-          </a:lstStyle>
-          <a:p xmlns:a="http://schemas.openxmlformats.org/drawingml/2006/main">
-            <a:pPr>
-              <a:defRPr sz="2550" b="1">
-                <a:solidFill>
-                  <a:srgbClr val="0E7C57"/>
-                </a:solidFill>
-                <a:latin typeface="Arial"/>
-                <a:ea typeface="Arial"/>
-                <a:cs typeface="Arial"/>
-              </a:defRPr>
-            </a:pPr>
-            <a:r>
-              <a:rPr sz="2550" b="1">
-                <a:solidFill>
-                  <a:srgbClr val="0E7C57"/>
-                </a:solidFill>
-                <a:latin typeface="Arial"/>
-                <a:ea typeface="Arial"/>
-                <a:cs typeface="Arial"/>
-              </a:rPr>
-              <a:t>9 of 9</a:t>
-            </a:r>
-          </a:p>
-        </p:txBody>
-      </p:sp>
-      <p:sp>
-        <p:nvSpPr>
-          <p:cNvPr id="15" name="">
-            <a:extLst xmlns:a="http://schemas.openxmlformats.org/drawingml/2006/main">
-              <a:ext uri="{FF2B5EF4-FFF2-40B4-BE49-F238E27FC236}">
-                <a16:creationId xmlns:a16="http://schemas.microsoft.com/office/drawing/2014/main" id="{7F489652-9647-41B0-B9D7-9281CA5A4C9B}"/>
-              </a:ext>
-            </a:extLst>
-          </p:cNvPr>
-          <p:cNvSpPr>
-            <a:spLocks xmlns:a="http://schemas.openxmlformats.org/drawingml/2006/main" noGrp="1"/>
-          </p:cNvSpPr>
-          <p:nvPr/>
-        </p:nvSpPr>
-        <p:spPr>
-          <a:xfrm xmlns:a="http://schemas.openxmlformats.org/drawingml/2006/main">
-            <a:off x="3448050" y="4400550"/>
-            <a:ext cx="2476500" cy="304800"/>
-          </a:xfrm>
-          <a:prstGeom xmlns:a="http://schemas.openxmlformats.org/drawingml/2006/main" prst="rect">
-            <a:avLst/>
-          </a:prstGeom>
-          <a:noFill xmlns:a="http://schemas.openxmlformats.org/drawingml/2006/main"/>
-          <a:ln xmlns:a="http://schemas.openxmlformats.org/drawingml/2006/main" w="0">
-            <a:noFill/>
-            <a:prstDash val="solid"/>
-          </a:ln>
-        </p:spPr>
-        <p:txBody>
-          <a:bodyPr xmlns:a="http://schemas.openxmlformats.org/drawingml/2006/main">
-            <a:noAutofit/>
-          </a:bodyPr>
-          <a:lstStyle xmlns:a="http://schemas.openxmlformats.org/drawingml/2006/main">
-            <a:defPPr>
-              <a:defRPr sz="1200" b="0">
-                <a:solidFill>
-                  <a:srgbClr val="52606F"/>
-                </a:solidFill>
-                <a:latin typeface="Arial"/>
-                <a:ea typeface="Arial"/>
-                <a:cs typeface="Arial"/>
-              </a:defRPr>
-            </a:defPPr>
-          </a:lstStyle>
-          <a:p xmlns:a="http://schemas.openxmlformats.org/drawingml/2006/main">
-            <a:pPr>
-              <a:defRPr sz="1200" b="0">
-                <a:solidFill>
-                  <a:srgbClr val="52606F"/>
-                </a:solidFill>
-                <a:latin typeface="Arial"/>
-                <a:ea typeface="Arial"/>
-                <a:cs typeface="Arial"/>
-              </a:defRPr>
-            </a:pPr>
-            <a:r>
-              <a:rPr sz="1200" b="0">
-                <a:solidFill>
-                  <a:srgbClr val="52606F"/>
-                </a:solidFill>
-                <a:latin typeface="Arial"/>
-                <a:ea typeface="Arial"/>
-                <a:cs typeface="Arial"/>
-              </a:rPr>
-              <a:t>automated tests pass</a:t>
-            </a:r>
-          </a:p>
-        </p:txBody>
-      </p:sp>
-      <p:sp>
-        <p:nvSpPr>
-          <p:cNvPr id="16" name="">
-            <a:extLst xmlns:a="http://schemas.openxmlformats.org/drawingml/2006/main">
-              <a:ext uri="{FF2B5EF4-FFF2-40B4-BE49-F238E27FC236}">
-                <a16:creationId xmlns:a16="http://schemas.microsoft.com/office/drawing/2014/main" id="{826F6171-CC55-4011-8133-E46CF788527D}"/>
-              </a:ext>
-            </a:extLst>
-          </p:cNvPr>
-          <p:cNvSpPr>
-            <a:spLocks xmlns:a="http://schemas.openxmlformats.org/drawingml/2006/main" noGrp="1"/>
-          </p:cNvSpPr>
-          <p:nvPr/>
-        </p:nvSpPr>
-        <p:spPr>
-          <a:xfrm xmlns:a="http://schemas.openxmlformats.org/drawingml/2006/main">
-            <a:off x="6477000" y="1866900"/>
-            <a:ext cx="5029200" cy="4000500"/>
-          </a:xfrm>
-          <a:prstGeom xmlns:a="http://schemas.openxmlformats.org/drawingml/2006/main" prst="rect">
-            <a:avLst/>
-          </a:prstGeom>
-          <a:noFill xmlns:a="http://schemas.openxmlformats.org/drawingml/2006/main"/>
-          <a:ln xmlns:a="http://schemas.openxmlformats.org/drawingml/2006/main" w="0">
-            <a:noFill/>
-            <a:prstDash val="solid"/>
-          </a:ln>
-        </p:spPr>
-        <p:txBody>
-          <a:bodyPr xmlns:a="http://schemas.openxmlformats.org/drawingml/2006/main">
-            <a:noAutofit/>
-          </a:bodyPr>
-          <a:lstStyle xmlns:a="http://schemas.openxmlformats.org/drawingml/2006/main">
-            <a:defPPr>
-              <a:defRPr sz="1350">
-                <a:solidFill>
-                  <a:srgbClr val="131A24"/>
-                </a:solidFill>
-                <a:latin typeface="Arial"/>
-                <a:ea typeface="Arial"/>
-                <a:cs typeface="Arial"/>
-              </a:defRPr>
-            </a:defPPr>
-          </a:lstStyle>
-          <a:p xmlns:a="http://schemas.openxmlformats.org/drawingml/2006/main">
-            <a:pPr marL="228600" indent="-114300">
-              <a:spcAft>
-                <a:spcPts val="1800"/>
-              </a:spcAft>
-              <a:buChar char="•"/>
-              <a:defRPr sz="1350">
-                <a:solidFill>
-                  <a:srgbClr val="131A24"/>
-                </a:solidFill>
-                <a:latin typeface="Arial"/>
-                <a:ea typeface="Arial"/>
-                <a:cs typeface="Arial"/>
-              </a:defRPr>
-            </a:pPr>
-            <a:r>
-              <a:rPr sz="1350">
-                <a:solidFill>
-                  <a:srgbClr val="131A24"/>
-                </a:solidFill>
-                <a:latin typeface="Arial"/>
-                <a:ea typeface="Arial"/>
-                <a:cs typeface="Arial"/>
-              </a:rPr>
-              <a:t>The first organization to claim the food does not win. The engine ranks every eligible one.</a:t>
-            </a:r>
-          </a:p>
-          <a:p xmlns:a="http://schemas.openxmlformats.org/drawingml/2006/main">
-            <a:pPr marL="228600" indent="-114300">
-              <a:spcAft>
-                <a:spcPts val="1800"/>
-              </a:spcAft>
-              <a:buChar char="•"/>
-              <a:defRPr sz="1350">
-                <a:solidFill>
-                  <a:srgbClr val="131A24"/>
-                </a:solidFill>
-                <a:latin typeface="Arial"/>
-                <a:ea typeface="Arial"/>
-                <a:cs typeface="Arial"/>
-              </a:defRPr>
-            </a:pPr>
-            <a:r>
-              <a:rPr sz="1350">
-                <a:solidFill>
-                  <a:srgbClr val="131A24"/>
-                </a:solidFill>
-                <a:latin typeface="Arial"/>
-                <a:ea typeface="Arial"/>
-                <a:cs typeface="Arial"/>
-              </a:rPr>
-              <a:t>Arrival safety is a rule that excludes, not a warning that is shown.</a:t>
-            </a:r>
-          </a:p>
-          <a:p xmlns:a="http://schemas.openxmlformats.org/drawingml/2006/main">
-            <a:pPr marL="228600" indent="-114300">
-              <a:spcAft>
-                <a:spcPts val="1800"/>
-              </a:spcAft>
-              <a:buChar char="•"/>
-              <a:defRPr sz="1350">
-                <a:solidFill>
-                  <a:srgbClr val="131A24"/>
-                </a:solidFill>
-                <a:latin typeface="Arial"/>
-                <a:ea typeface="Arial"/>
-                <a:cs typeface="Arial"/>
-              </a:defRPr>
-            </a:pPr>
-            <a:r>
-              <a:rPr sz="1350">
-                <a:solidFill>
-                  <a:srgbClr val="131A24"/>
-                </a:solidFill>
-                <a:latin typeface="Arial"/>
-                <a:ea typeface="Arial"/>
-                <a:cs typeface="Arial"/>
-              </a:rPr>
-              <a:t>Recent amounts received affect the score, so distribution balances over time.</a:t>
-            </a:r>
-          </a:p>
-          <a:p xmlns:a="http://schemas.openxmlformats.org/drawingml/2006/main">
-            <a:pPr marL="228600" indent="-114300">
-              <a:spcAft>
-                <a:spcPts val="1800"/>
-              </a:spcAft>
-              <a:buChar char="•"/>
-              <a:defRPr sz="1350">
-                <a:solidFill>
-                  <a:srgbClr val="131A24"/>
-                </a:solidFill>
-                <a:latin typeface="Arial"/>
-                <a:ea typeface="Arial"/>
-                <a:cs typeface="Arial"/>
-              </a:defRPr>
-            </a:pPr>
-            <a:r>
-              <a:rPr sz="1350">
-                <a:solidFill>
-                  <a:srgbClr val="131A24"/>
-                </a:solidFill>
-                <a:latin typeface="Arial"/>
-                <a:ea typeface="Arial"/>
-                <a:cs typeface="Arial"/>
-              </a:rPr>
-              <a:t>Every decision carries a written reason and an audit entry.</a:t>
-            </a:r>
-          </a:p>
-        </p:txBody>
-      </p:sp>
     </p:spTree>
     <p:extLst>
       <p:ext uri="{BB962C8B-B14F-4D97-AF65-F5344CB8AC3E}">
-        <p14:creationId xmlns:p14="http://schemas.microsoft.com/office/powerpoint/2010/main" val="1567413964"/>
+        <p14:creationId xmlns:p14="http://schemas.microsoft.com/office/powerpoint/2010/main" val="1835746613"/>
       </p:ext>
     </p:extLst>
   </p:cSld>
@@ -10360,10 +9513,10 @@
       </p:grpSpPr>
       <p:sp>
         <p:nvSpPr>
-          <p:cNvPr id="6" name="slide-title">
+          <p:cNvPr id="7" name="slide-title">
             <a:extLst xmlns:a="http://schemas.openxmlformats.org/drawingml/2006/main">
               <a:ext uri="{FF2B5EF4-FFF2-40B4-BE49-F238E27FC236}">
-                <a16:creationId xmlns:a16="http://schemas.microsoft.com/office/drawing/2014/main" id="{8401D227-473F-4027-A71C-E57CCB001D81}"/>
+                <a16:creationId xmlns:a16="http://schemas.microsoft.com/office/drawing/2014/main" id="{0192D80C-0EAB-4F1B-BEDA-07B723444A47}"/>
               </a:ext>
             </a:extLst>
           </p:cNvPr>
@@ -10422,7 +9575,7 @@
                 <a:ea typeface="Arial"/>
                 <a:cs typeface="Arial"/>
               </a:rPr>
-              <a:t>Limitations and next steps</a:t>
+              <a:t>Database design</a:t>
             </a:r>
           </a:p>
         </p:txBody>
@@ -10432,7 +9585,7 @@
           <p:cNvPr id="2" name="slide-lead">
             <a:extLst xmlns:a="http://schemas.openxmlformats.org/drawingml/2006/main">
               <a:ext uri="{FF2B5EF4-FFF2-40B4-BE49-F238E27FC236}">
-                <a16:creationId xmlns:a16="http://schemas.microsoft.com/office/drawing/2014/main" id="{A46D52A4-3089-4BE0-A699-C1819D6FD881}"/>
+                <a16:creationId xmlns:a16="http://schemas.microsoft.com/office/drawing/2014/main" id="{686099FB-BF65-4A0F-BD3F-7C7758BFE1B7}"/>
               </a:ext>
             </a:extLst>
           </p:cNvPr>
@@ -10491,7 +9644,7 @@
                 <a:ea typeface="Arial"/>
                 <a:cs typeface="Arial"/>
               </a:rPr>
-              <a:t>What the current build does not do, and what I would build next.</a:t>
+              <a:t>The entity relationship model submitted in the design phase, implemented as twelve tables.</a:t>
             </a:r>
           </a:p>
         </p:txBody>
@@ -10501,7 +9654,7 @@
           <p:cNvPr id="3" name="title-rule">
             <a:extLst xmlns:a="http://schemas.openxmlformats.org/drawingml/2006/main">
               <a:ext uri="{FF2B5EF4-FFF2-40B4-BE49-F238E27FC236}">
-                <a16:creationId xmlns:a16="http://schemas.microsoft.com/office/drawing/2014/main" id="{8FC307C9-BCE6-4596-A191-82058CED0EDF}"/>
+                <a16:creationId xmlns:a16="http://schemas.microsoft.com/office/drawing/2014/main" id="{DB6D6407-329D-4518-A156-A37DF0139807}"/>
               </a:ext>
             </a:extLst>
           </p:cNvPr>
@@ -10532,7 +9685,7 @@
           <p:cNvPr id="4" name="">
             <a:extLst xmlns:a="http://schemas.openxmlformats.org/drawingml/2006/main">
               <a:ext uri="{FF2B5EF4-FFF2-40B4-BE49-F238E27FC236}">
-                <a16:creationId xmlns:a16="http://schemas.microsoft.com/office/drawing/2014/main" id="{6595B94F-4130-42CA-9AA1-D438E3D03CF8}"/>
+                <a16:creationId xmlns:a16="http://schemas.microsoft.com/office/drawing/2014/main" id="{9B194D4E-B08B-4564-81CF-08A147C8B756}"/>
               </a:ext>
             </a:extLst>
           </p:cNvPr>
@@ -10543,8 +9696,8 @@
         </p:nvSpPr>
         <p:spPr>
           <a:xfrm xmlns:a="http://schemas.openxmlformats.org/drawingml/2006/main">
-            <a:off x="685800" y="1905000"/>
-            <a:ext cx="4953000" cy="3619500"/>
+            <a:off x="685800" y="2057400"/>
+            <a:ext cx="4095750" cy="2286000"/>
           </a:xfrm>
           <a:prstGeom xmlns:a="http://schemas.openxmlformats.org/drawingml/2006/main" prst="rect">
             <a:avLst/>
@@ -10561,7 +9714,7 @@
           </a:bodyPr>
           <a:lstStyle xmlns:a="http://schemas.openxmlformats.org/drawingml/2006/main">
             <a:defPPr>
-              <a:defRPr sz="1350">
+              <a:defRPr sz="1200">
                 <a:solidFill>
                   <a:srgbClr val="131A24"/>
                 </a:solidFill>
@@ -10577,7 +9730,7 @@
                 <a:spcPts val="1600"/>
               </a:spcAft>
               <a:buChar char="•"/>
-              <a:defRPr sz="1350">
+              <a:defRPr sz="1200">
                 <a:solidFill>
                   <a:srgbClr val="131A24"/>
                 </a:solidFill>
@@ -10587,7 +9740,7 @@
               </a:defRPr>
             </a:pPr>
             <a:r>
-              <a:rPr sz="1350">
+              <a:rPr sz="1200">
                 <a:solidFill>
                   <a:srgbClr val="131A24"/>
                 </a:solidFill>
@@ -10595,7 +9748,7 @@
                 <a:ea typeface="Arial"/>
                 <a:cs typeface="Arial"/>
               </a:rPr>
-              <a:t>Straight line distances, no road routing or live traffic.</a:t>
+              <a:t>Twelve entities in third normal form.</a:t>
             </a:r>
           </a:p>
           <a:p xmlns:a="http://schemas.openxmlformats.org/drawingml/2006/main">
@@ -10604,7 +9757,7 @@
                 <a:spcPts val="1600"/>
               </a:spcAft>
               <a:buChar char="•"/>
-              <a:defRPr sz="1350">
+              <a:defRPr sz="1200">
                 <a:solidFill>
                   <a:srgbClr val="131A24"/>
                 </a:solidFill>
@@ -10614,7 +9767,7 @@
               </a:defRPr>
             </a:pPr>
             <a:r>
-              <a:rPr sz="1350">
+              <a:rPr sz="1200">
                 <a:solidFill>
                   <a:srgbClr val="131A24"/>
                 </a:solidFill>
@@ -10622,7 +9775,7 @@
                 <a:ea typeface="Arial"/>
                 <a:cs typeface="Arial"/>
               </a:rPr>
-              <a:t>One average speed for all volunteers, so bikes and cars are treated alike.</a:t>
+              <a:t>Allocation, assignment and delivery are modelled separately, so a decision, a task and a delivery are tracked independently.</a:t>
             </a:r>
           </a:p>
           <a:p xmlns:a="http://schemas.openxmlformats.org/drawingml/2006/main">
@@ -10631,7 +9784,7 @@
                 <a:spcPts val="1600"/>
               </a:spcAft>
               <a:buChar char="•"/>
-              <a:defRPr sz="1350">
+              <a:defRPr sz="1200">
                 <a:solidFill>
                   <a:srgbClr val="131A24"/>
                 </a:solidFill>
@@ -10641,7 +9794,7 @@
               </a:defRPr>
             </a:pPr>
             <a:r>
-              <a:rPr sz="1350">
+              <a:rPr sz="1200">
                 <a:solidFill>
                   <a:srgbClr val="131A24"/>
                 </a:solidFill>
@@ -10649,56 +9802,57 @@
                 <a:ea typeface="Arial"/>
                 <a:cs typeface="Arial"/>
               </a:rPr>
-              <a:t>No map picker or address lookup, and no GPS during delivery.</a:t>
-            </a:r>
-          </a:p>
-          <a:p xmlns:a="http://schemas.openxmlformats.org/drawingml/2006/main">
-            <a:pPr marL="228600" indent="-114300">
-              <a:spcAft>
-                <a:spcPts val="1600"/>
-              </a:spcAft>
-              <a:buChar char="•"/>
-              <a:defRPr sz="1350">
-                <a:solidFill>
-                  <a:srgbClr val="131A24"/>
-                </a:solidFill>
-                <a:latin typeface="Arial"/>
-                <a:ea typeface="Arial"/>
-                <a:cs typeface="Arial"/>
-              </a:defRPr>
-            </a:pPr>
-            <a:r>
-              <a:rPr sz="1350">
-                <a:solidFill>
-                  <a:srgbClr val="131A24"/>
-                </a:solidFill>
-                <a:latin typeface="Arial"/>
-                <a:ea typeface="Arial"/>
-                <a:cs typeface="Arial"/>
-              </a:rPr>
-              <a:t>Fixed weights instead of a model trained on real history.</a:t>
+              <a:t>Recipient food preferences resolve the many to many relationship between organizations and categories.</a:t>
             </a:r>
           </a:p>
         </p:txBody>
       </p:sp>
-      <p:sp>
-        <p:nvSpPr>
+      <p:pic>
+        <p:nvPicPr>
           <p:cNvPr id="5" name="">
             <a:extLst xmlns:a="http://schemas.openxmlformats.org/drawingml/2006/main">
               <a:ext uri="{FF2B5EF4-FFF2-40B4-BE49-F238E27FC236}">
-                <a16:creationId xmlns:a16="http://schemas.microsoft.com/office/drawing/2014/main" id="{FA298F27-5FCE-4265-AB88-9E1A2CAC95BD}"/>
+                <a16:creationId xmlns:a16="http://schemas.microsoft.com/office/drawing/2014/main" id="{6A7CB3B3-4F24-48BA-B6B5-636A4FA7A101}"/>
               </a:ext>
             </a:extLst>
           </p:cNvPr>
-          <p:cNvSpPr>
-            <a:spLocks xmlns:a="http://schemas.openxmlformats.org/drawingml/2006/main" noGrp="1"/>
-          </p:cNvSpPr>
+          <p:cNvPicPr>
+            <a:picLocks xmlns:a="http://schemas.openxmlformats.org/drawingml/2006/main" noChangeAspect="1"/>
+          </p:cNvPicPr>
           <p:nvPr/>
-        </p:nvSpPr>
+        </p:nvPicPr>
+        <p:blipFill>
+          <a:blip xmlns:r="http://schemas.openxmlformats.org/officeDocument/2006/relationships" xmlns:a="http://schemas.openxmlformats.org/drawingml/2006/main" r:embed="R695c9971f9634f85"/>
+          <a:stretch xmlns:a="http://schemas.openxmlformats.org/drawingml/2006/main"/>
+        </p:blipFill>
         <p:spPr>
           <a:xfrm xmlns:a="http://schemas.openxmlformats.org/drawingml/2006/main">
-            <a:off x="6477000" y="1905000"/>
-            <a:ext cx="5029200" cy="3619500"/>
+            <a:off x="5145061" y="1638300"/>
+            <a:ext cx="5902377" cy="4800600"/>
+          </a:xfrm>
+          <a:prstGeom xmlns:a="http://schemas.openxmlformats.org/drawingml/2006/main" prst="rect">
+            <a:avLst/>
+          </a:prstGeom>
+        </p:spPr>
+      </p:pic>
+      <p:sp>
+        <p:nvSpPr>
+          <p:cNvPr id="6" name="">
+            <a:extLst xmlns:a="http://schemas.openxmlformats.org/drawingml/2006/main">
+              <a:ext uri="{FF2B5EF4-FFF2-40B4-BE49-F238E27FC236}">
+                <a16:creationId xmlns:a16="http://schemas.microsoft.com/office/drawing/2014/main" id="{7DD45DC2-C814-4051-8C07-AFD208C6BCDE}"/>
+              </a:ext>
+            </a:extLst>
+          </p:cNvPr>
+          <p:cNvSpPr>
+            <a:spLocks xmlns:a="http://schemas.openxmlformats.org/drawingml/2006/main" noGrp="1"/>
+          </p:cNvSpPr>
+          <p:nvPr/>
+        </p:nvSpPr>
+        <p:spPr>
+          <a:xfrm xmlns:a="http://schemas.openxmlformats.org/drawingml/2006/main">
+            <a:off x="685800" y="5753100"/>
+            <a:ext cx="10820400" cy="228600"/>
           </a:xfrm>
           <a:prstGeom xmlns:a="http://schemas.openxmlformats.org/drawingml/2006/main" prst="rect">
             <a:avLst/>
@@ -10715,7 +9869,1102 @@
           </a:bodyPr>
           <a:lstStyle xmlns:a="http://schemas.openxmlformats.org/drawingml/2006/main">
             <a:defPPr>
-              <a:defRPr sz="1350">
+              <a:defRPr sz="1125" b="0">
+                <a:solidFill>
+                  <a:srgbClr val="8A94A3"/>
+                </a:solidFill>
+                <a:latin typeface="Arial"/>
+                <a:ea typeface="Arial"/>
+                <a:cs typeface="Arial"/>
+              </a:defRPr>
+            </a:defPPr>
+          </a:lstStyle>
+          <a:p xmlns:a="http://schemas.openxmlformats.org/drawingml/2006/main">
+            <a:pPr>
+              <a:defRPr sz="1125" b="0">
+                <a:solidFill>
+                  <a:srgbClr val="8A94A3"/>
+                </a:solidFill>
+                <a:latin typeface="Arial"/>
+                <a:ea typeface="Arial"/>
+                <a:cs typeface="Arial"/>
+              </a:defRPr>
+            </a:pPr>
+            <a:r>
+              <a:rPr sz="1125" b="0">
+                <a:solidFill>
+                  <a:srgbClr val="8A94A3"/>
+                </a:solidFill>
+                <a:latin typeface="Arial"/>
+                <a:ea typeface="Arial"/>
+                <a:cs typeface="Arial"/>
+              </a:rPr>
+              <a:t>Figure: entity relationship diagram, Lab 4 submission.</a:t>
+            </a:r>
+          </a:p>
+        </p:txBody>
+      </p:sp>
+    </p:spTree>
+    <p:extLst>
+      <p:ext uri="{BB962C8B-B14F-4D97-AF65-F5344CB8AC3E}">
+        <p14:creationId xmlns:p14="http://schemas.microsoft.com/office/powerpoint/2010/main" val="321439508"/>
+      </p:ext>
+    </p:extLst>
+  </p:cSld>
+</p:sld>
+</file>
+
+<file path=ppt/slides/slide9.xml><?xml version="1.0" encoding="utf-8"?>
+<p:sld xmlns:p="http://schemas.openxmlformats.org/presentationml/2006/main">
+  <p:cSld>
+    <p:bg>
+      <p:bgPr>
+        <a:solidFill xmlns:a="http://schemas.openxmlformats.org/drawingml/2006/main">
+          <a:srgbClr val="FFFFFF"/>
+        </a:solidFill>
+      </p:bgPr>
+    </p:bg>
+    <p:spTree>
+      <p:nvGrpSpPr>
+        <p:cNvPr id="1" name=""/>
+        <p:cNvGrpSpPr/>
+        <p:nvPr/>
+      </p:nvGrpSpPr>
+      <p:grpSpPr>
+        <a:xfrm xmlns:a="http://schemas.openxmlformats.org/drawingml/2006/main"/>
+      </p:grpSpPr>
+      <p:sp>
+        <p:nvSpPr>
+          <p:cNvPr id="17" name="slide-title">
+            <a:extLst xmlns:a="http://schemas.openxmlformats.org/drawingml/2006/main">
+              <a:ext uri="{FF2B5EF4-FFF2-40B4-BE49-F238E27FC236}">
+                <a16:creationId xmlns:a16="http://schemas.microsoft.com/office/drawing/2014/main" id="{9CCF6E53-A1F6-4F5D-B095-076309827B78}"/>
+              </a:ext>
+            </a:extLst>
+          </p:cNvPr>
+          <p:cNvSpPr>
+            <a:spLocks xmlns:a="http://schemas.openxmlformats.org/drawingml/2006/main" noGrp="1"/>
+          </p:cNvSpPr>
+          <p:nvPr/>
+        </p:nvSpPr>
+        <p:spPr>
+          <a:xfrm xmlns:a="http://schemas.openxmlformats.org/drawingml/2006/main">
+            <a:off x="685800" y="495300"/>
+            <a:ext cx="10820400" cy="514350"/>
+          </a:xfrm>
+          <a:prstGeom xmlns:a="http://schemas.openxmlformats.org/drawingml/2006/main" prst="rect">
+            <a:avLst/>
+          </a:prstGeom>
+          <a:noFill xmlns:a="http://schemas.openxmlformats.org/drawingml/2006/main"/>
+          <a:ln xmlns:a="http://schemas.openxmlformats.org/drawingml/2006/main" w="0">
+            <a:noFill/>
+            <a:prstDash val="solid"/>
+          </a:ln>
+        </p:spPr>
+        <p:txBody>
+          <a:bodyPr xmlns:a="http://schemas.openxmlformats.org/drawingml/2006/main">
+            <a:noAutofit/>
+          </a:bodyPr>
+          <a:lstStyle xmlns:a="http://schemas.openxmlformats.org/drawingml/2006/main">
+            <a:defPPr>
+              <a:defRPr sz="3000" b="1">
+                <a:solidFill>
+                  <a:srgbClr val="131A24"/>
+                </a:solidFill>
+                <a:latin typeface="Arial"/>
+                <a:ea typeface="Arial"/>
+                <a:cs typeface="Arial"/>
+              </a:defRPr>
+            </a:defPPr>
+          </a:lstStyle>
+          <a:p xmlns:a="http://schemas.openxmlformats.org/drawingml/2006/main">
+            <a:pPr>
+              <a:defRPr sz="3000" b="1">
+                <a:solidFill>
+                  <a:srgbClr val="131A24"/>
+                </a:solidFill>
+                <a:latin typeface="Arial"/>
+                <a:ea typeface="Arial"/>
+                <a:cs typeface="Arial"/>
+              </a:defRPr>
+            </a:pPr>
+            <a:r>
+              <a:rPr sz="3000" b="1">
+                <a:solidFill>
+                  <a:srgbClr val="131A24"/>
+                </a:solidFill>
+                <a:latin typeface="Arial"/>
+                <a:ea typeface="Arial"/>
+                <a:cs typeface="Arial"/>
+              </a:rPr>
+              <a:t>Results and verification</a:t>
+            </a:r>
+          </a:p>
+        </p:txBody>
+      </p:sp>
+      <p:sp>
+        <p:nvSpPr>
+          <p:cNvPr id="2" name="slide-lead">
+            <a:extLst xmlns:a="http://schemas.openxmlformats.org/drawingml/2006/main">
+              <a:ext uri="{FF2B5EF4-FFF2-40B4-BE49-F238E27FC236}">
+                <a16:creationId xmlns:a16="http://schemas.microsoft.com/office/drawing/2014/main" id="{72854574-9AA8-4C68-86D3-95F7FDC9A6D0}"/>
+              </a:ext>
+            </a:extLst>
+          </p:cNvPr>
+          <p:cNvSpPr>
+            <a:spLocks xmlns:a="http://schemas.openxmlformats.org/drawingml/2006/main" noGrp="1"/>
+          </p:cNvSpPr>
+          <p:nvPr/>
+        </p:nvSpPr>
+        <p:spPr>
+          <a:xfrm xmlns:a="http://schemas.openxmlformats.org/drawingml/2006/main">
+            <a:off x="685800" y="1066800"/>
+            <a:ext cx="10820400" cy="323850"/>
+          </a:xfrm>
+          <a:prstGeom xmlns:a="http://schemas.openxmlformats.org/drawingml/2006/main" prst="rect">
+            <a:avLst/>
+          </a:prstGeom>
+          <a:noFill xmlns:a="http://schemas.openxmlformats.org/drawingml/2006/main"/>
+          <a:ln xmlns:a="http://schemas.openxmlformats.org/drawingml/2006/main" w="0">
+            <a:noFill/>
+            <a:prstDash val="solid"/>
+          </a:ln>
+        </p:spPr>
+        <p:txBody>
+          <a:bodyPr xmlns:a="http://schemas.openxmlformats.org/drawingml/2006/main">
+            <a:noAutofit/>
+          </a:bodyPr>
+          <a:lstStyle xmlns:a="http://schemas.openxmlformats.org/drawingml/2006/main">
+            <a:defPPr>
+              <a:defRPr sz="1575" b="0">
+                <a:solidFill>
+                  <a:srgbClr val="52606F"/>
+                </a:solidFill>
+                <a:latin typeface="Arial"/>
+                <a:ea typeface="Arial"/>
+                <a:cs typeface="Arial"/>
+              </a:defRPr>
+            </a:defPPr>
+          </a:lstStyle>
+          <a:p xmlns:a="http://schemas.openxmlformats.org/drawingml/2006/main">
+            <a:pPr>
+              <a:defRPr sz="1575" b="0">
+                <a:solidFill>
+                  <a:srgbClr val="52606F"/>
+                </a:solidFill>
+                <a:latin typeface="Arial"/>
+                <a:ea typeface="Arial"/>
+                <a:cs typeface="Arial"/>
+              </a:defRPr>
+            </a:pPr>
+            <a:r>
+              <a:rPr sz="1575" b="0">
+                <a:solidFill>
+                  <a:srgbClr val="52606F"/>
+                </a:solidFill>
+                <a:latin typeface="Arial"/>
+                <a:ea typeface="Arial"/>
+                <a:cs typeface="Arial"/>
+              </a:rPr>
+              <a:t>Measurements taken from the running system with the seeded dataset.</a:t>
+            </a:r>
+          </a:p>
+        </p:txBody>
+      </p:sp>
+      <p:sp>
+        <p:nvSpPr>
+          <p:cNvPr id="3" name="title-rule">
+            <a:extLst xmlns:a="http://schemas.openxmlformats.org/drawingml/2006/main">
+              <a:ext uri="{FF2B5EF4-FFF2-40B4-BE49-F238E27FC236}">
+                <a16:creationId xmlns:a16="http://schemas.microsoft.com/office/drawing/2014/main" id="{44D6116A-853C-4296-9CBD-3FFDFE2BF9A3}"/>
+              </a:ext>
+            </a:extLst>
+          </p:cNvPr>
+          <p:cNvSpPr>
+            <a:spLocks xmlns:a="http://schemas.openxmlformats.org/drawingml/2006/main" noGrp="1"/>
+          </p:cNvSpPr>
+          <p:nvPr/>
+        </p:nvSpPr>
+        <p:spPr>
+          <a:xfrm xmlns:a="http://schemas.openxmlformats.org/drawingml/2006/main">
+            <a:off x="685800" y="1504950"/>
+            <a:ext cx="10820400" cy="9525"/>
+          </a:xfrm>
+          <a:prstGeom xmlns:a="http://schemas.openxmlformats.org/drawingml/2006/main" prst="rect">
+            <a:avLst/>
+          </a:prstGeom>
+          <a:solidFill xmlns:a="http://schemas.openxmlformats.org/drawingml/2006/main">
+            <a:srgbClr val="E1E5EA"/>
+          </a:solidFill>
+          <a:ln xmlns:a="http://schemas.openxmlformats.org/drawingml/2006/main" w="0">
+            <a:noFill/>
+            <a:prstDash val="solid"/>
+          </a:ln>
+        </p:spPr>
+      </p:sp>
+      <p:sp>
+        <p:nvSpPr>
+          <p:cNvPr id="4" name="">
+            <a:extLst xmlns:a="http://schemas.openxmlformats.org/drawingml/2006/main">
+              <a:ext uri="{FF2B5EF4-FFF2-40B4-BE49-F238E27FC236}">
+                <a16:creationId xmlns:a16="http://schemas.microsoft.com/office/drawing/2014/main" id="{71832D99-F926-44FA-A762-FD7661E9AC57}"/>
+              </a:ext>
+            </a:extLst>
+          </p:cNvPr>
+          <p:cNvSpPr>
+            <a:spLocks xmlns:a="http://schemas.openxmlformats.org/drawingml/2006/main" noGrp="1"/>
+          </p:cNvSpPr>
+          <p:nvPr/>
+        </p:nvSpPr>
+        <p:spPr>
+          <a:xfrm xmlns:a="http://schemas.openxmlformats.org/drawingml/2006/main">
+            <a:off x="685800" y="1905000"/>
+            <a:ext cx="3238500" cy="438150"/>
+          </a:xfrm>
+          <a:prstGeom xmlns:a="http://schemas.openxmlformats.org/drawingml/2006/main" prst="rect">
+            <a:avLst/>
+          </a:prstGeom>
+          <a:noFill xmlns:a="http://schemas.openxmlformats.org/drawingml/2006/main"/>
+          <a:ln xmlns:a="http://schemas.openxmlformats.org/drawingml/2006/main" w="0">
+            <a:noFill/>
+            <a:prstDash val="solid"/>
+          </a:ln>
+        </p:spPr>
+        <p:txBody>
+          <a:bodyPr xmlns:a="http://schemas.openxmlformats.org/drawingml/2006/main">
+            <a:noAutofit/>
+          </a:bodyPr>
+          <a:lstStyle xmlns:a="http://schemas.openxmlformats.org/drawingml/2006/main">
+            <a:defPPr>
+              <a:defRPr sz="2550" b="1">
+                <a:solidFill>
+                  <a:srgbClr val="0E7C57"/>
+                </a:solidFill>
+                <a:latin typeface="Arial"/>
+                <a:ea typeface="Arial"/>
+                <a:cs typeface="Arial"/>
+              </a:defRPr>
+            </a:defPPr>
+          </a:lstStyle>
+          <a:p xmlns:a="http://schemas.openxmlformats.org/drawingml/2006/main">
+            <a:pPr>
+              <a:defRPr sz="2550" b="1">
+                <a:solidFill>
+                  <a:srgbClr val="0E7C57"/>
+                </a:solidFill>
+                <a:latin typeface="Arial"/>
+                <a:ea typeface="Arial"/>
+                <a:cs typeface="Arial"/>
+              </a:defRPr>
+            </a:pPr>
+            <a:r>
+              <a:rPr sz="2550" b="1">
+                <a:solidFill>
+                  <a:srgbClr val="0E7C57"/>
+                </a:solidFill>
+                <a:latin typeface="Arial"/>
+                <a:ea typeface="Arial"/>
+                <a:cs typeface="Arial"/>
+              </a:rPr>
+              <a:t>16</a:t>
+            </a:r>
+          </a:p>
+        </p:txBody>
+      </p:sp>
+      <p:sp>
+        <p:nvSpPr>
+          <p:cNvPr id="5" name="">
+            <a:extLst xmlns:a="http://schemas.openxmlformats.org/drawingml/2006/main">
+              <a:ext uri="{FF2B5EF4-FFF2-40B4-BE49-F238E27FC236}">
+                <a16:creationId xmlns:a16="http://schemas.microsoft.com/office/drawing/2014/main" id="{74614E94-B7FC-4CD4-9A42-677A42FBEADD}"/>
+              </a:ext>
+            </a:extLst>
+          </p:cNvPr>
+          <p:cNvSpPr>
+            <a:spLocks xmlns:a="http://schemas.openxmlformats.org/drawingml/2006/main" noGrp="1"/>
+          </p:cNvSpPr>
+          <p:nvPr/>
+        </p:nvSpPr>
+        <p:spPr>
+          <a:xfrm xmlns:a="http://schemas.openxmlformats.org/drawingml/2006/main">
+            <a:off x="685800" y="2362200"/>
+            <a:ext cx="3238500" cy="304800"/>
+          </a:xfrm>
+          <a:prstGeom xmlns:a="http://schemas.openxmlformats.org/drawingml/2006/main" prst="rect">
+            <a:avLst/>
+          </a:prstGeom>
+          <a:noFill xmlns:a="http://schemas.openxmlformats.org/drawingml/2006/main"/>
+          <a:ln xmlns:a="http://schemas.openxmlformats.org/drawingml/2006/main" w="0">
+            <a:noFill/>
+            <a:prstDash val="solid"/>
+          </a:ln>
+        </p:spPr>
+        <p:txBody>
+          <a:bodyPr xmlns:a="http://schemas.openxmlformats.org/drawingml/2006/main">
+            <a:noAutofit/>
+          </a:bodyPr>
+          <a:lstStyle xmlns:a="http://schemas.openxmlformats.org/drawingml/2006/main">
+            <a:defPPr>
+              <a:defRPr sz="1200" b="0">
+                <a:solidFill>
+                  <a:srgbClr val="52606F"/>
+                </a:solidFill>
+                <a:latin typeface="Arial"/>
+                <a:ea typeface="Arial"/>
+                <a:cs typeface="Arial"/>
+              </a:defRPr>
+            </a:defPPr>
+          </a:lstStyle>
+          <a:p xmlns:a="http://schemas.openxmlformats.org/drawingml/2006/main">
+            <a:pPr>
+              <a:defRPr sz="1200" b="0">
+                <a:solidFill>
+                  <a:srgbClr val="52606F"/>
+                </a:solidFill>
+                <a:latin typeface="Arial"/>
+                <a:ea typeface="Arial"/>
+                <a:cs typeface="Arial"/>
+              </a:defRPr>
+            </a:pPr>
+            <a:r>
+              <a:rPr sz="1200" b="0">
+                <a:solidFill>
+                  <a:srgbClr val="52606F"/>
+                </a:solidFill>
+                <a:latin typeface="Arial"/>
+                <a:ea typeface="Arial"/>
+                <a:cs typeface="Arial"/>
+              </a:rPr>
+              <a:t>donations registered</a:t>
+            </a:r>
+          </a:p>
+        </p:txBody>
+      </p:sp>
+      <p:sp>
+        <p:nvSpPr>
+          <p:cNvPr id="6" name="">
+            <a:extLst xmlns:a="http://schemas.openxmlformats.org/drawingml/2006/main">
+              <a:ext uri="{FF2B5EF4-FFF2-40B4-BE49-F238E27FC236}">
+                <a16:creationId xmlns:a16="http://schemas.microsoft.com/office/drawing/2014/main" id="{AE317221-4E94-480E-8555-17F7BCCAB3B3}"/>
+              </a:ext>
+            </a:extLst>
+          </p:cNvPr>
+          <p:cNvSpPr>
+            <a:spLocks xmlns:a="http://schemas.openxmlformats.org/drawingml/2006/main" noGrp="1"/>
+          </p:cNvSpPr>
+          <p:nvPr/>
+        </p:nvSpPr>
+        <p:spPr>
+          <a:xfrm xmlns:a="http://schemas.openxmlformats.org/drawingml/2006/main">
+            <a:off x="4305300" y="1905000"/>
+            <a:ext cx="3238500" cy="438150"/>
+          </a:xfrm>
+          <a:prstGeom xmlns:a="http://schemas.openxmlformats.org/drawingml/2006/main" prst="rect">
+            <a:avLst/>
+          </a:prstGeom>
+          <a:noFill xmlns:a="http://schemas.openxmlformats.org/drawingml/2006/main"/>
+          <a:ln xmlns:a="http://schemas.openxmlformats.org/drawingml/2006/main" w="0">
+            <a:noFill/>
+            <a:prstDash val="solid"/>
+          </a:ln>
+        </p:spPr>
+        <p:txBody>
+          <a:bodyPr xmlns:a="http://schemas.openxmlformats.org/drawingml/2006/main">
+            <a:noAutofit/>
+          </a:bodyPr>
+          <a:lstStyle xmlns:a="http://schemas.openxmlformats.org/drawingml/2006/main">
+            <a:defPPr>
+              <a:defRPr sz="2550" b="1">
+                <a:solidFill>
+                  <a:srgbClr val="0E7C57"/>
+                </a:solidFill>
+                <a:latin typeface="Arial"/>
+                <a:ea typeface="Arial"/>
+                <a:cs typeface="Arial"/>
+              </a:defRPr>
+            </a:defPPr>
+          </a:lstStyle>
+          <a:p xmlns:a="http://schemas.openxmlformats.org/drawingml/2006/main">
+            <a:pPr>
+              <a:defRPr sz="2550" b="1">
+                <a:solidFill>
+                  <a:srgbClr val="0E7C57"/>
+                </a:solidFill>
+                <a:latin typeface="Arial"/>
+                <a:ea typeface="Arial"/>
+                <a:cs typeface="Arial"/>
+              </a:defRPr>
+            </a:pPr>
+            <a:r>
+              <a:rPr sz="2550" b="1">
+                <a:solidFill>
+                  <a:srgbClr val="0E7C57"/>
+                </a:solidFill>
+                <a:latin typeface="Arial"/>
+                <a:ea typeface="Arial"/>
+                <a:cs typeface="Arial"/>
+              </a:rPr>
+              <a:t>414 kg</a:t>
+            </a:r>
+          </a:p>
+        </p:txBody>
+      </p:sp>
+      <p:sp>
+        <p:nvSpPr>
+          <p:cNvPr id="7" name="">
+            <a:extLst xmlns:a="http://schemas.openxmlformats.org/drawingml/2006/main">
+              <a:ext uri="{FF2B5EF4-FFF2-40B4-BE49-F238E27FC236}">
+                <a16:creationId xmlns:a16="http://schemas.microsoft.com/office/drawing/2014/main" id="{C4F6E19D-BC51-48D3-8B4A-75F3603A4AEC}"/>
+              </a:ext>
+            </a:extLst>
+          </p:cNvPr>
+          <p:cNvSpPr>
+            <a:spLocks xmlns:a="http://schemas.openxmlformats.org/drawingml/2006/main" noGrp="1"/>
+          </p:cNvSpPr>
+          <p:nvPr/>
+        </p:nvSpPr>
+        <p:spPr>
+          <a:xfrm xmlns:a="http://schemas.openxmlformats.org/drawingml/2006/main">
+            <a:off x="4305300" y="2362200"/>
+            <a:ext cx="3238500" cy="304800"/>
+          </a:xfrm>
+          <a:prstGeom xmlns:a="http://schemas.openxmlformats.org/drawingml/2006/main" prst="rect">
+            <a:avLst/>
+          </a:prstGeom>
+          <a:noFill xmlns:a="http://schemas.openxmlformats.org/drawingml/2006/main"/>
+          <a:ln xmlns:a="http://schemas.openxmlformats.org/drawingml/2006/main" w="0">
+            <a:noFill/>
+            <a:prstDash val="solid"/>
+          </a:ln>
+        </p:spPr>
+        <p:txBody>
+          <a:bodyPr xmlns:a="http://schemas.openxmlformats.org/drawingml/2006/main">
+            <a:noAutofit/>
+          </a:bodyPr>
+          <a:lstStyle xmlns:a="http://schemas.openxmlformats.org/drawingml/2006/main">
+            <a:defPPr>
+              <a:defRPr sz="1200" b="0">
+                <a:solidFill>
+                  <a:srgbClr val="52606F"/>
+                </a:solidFill>
+                <a:latin typeface="Arial"/>
+                <a:ea typeface="Arial"/>
+                <a:cs typeface="Arial"/>
+              </a:defRPr>
+            </a:defPPr>
+          </a:lstStyle>
+          <a:p xmlns:a="http://schemas.openxmlformats.org/drawingml/2006/main">
+            <a:pPr>
+              <a:defRPr sz="1200" b="0">
+                <a:solidFill>
+                  <a:srgbClr val="52606F"/>
+                </a:solidFill>
+                <a:latin typeface="Arial"/>
+                <a:ea typeface="Arial"/>
+                <a:cs typeface="Arial"/>
+              </a:defRPr>
+            </a:pPr>
+            <a:r>
+              <a:rPr sz="1200" b="0">
+                <a:solidFill>
+                  <a:srgbClr val="52606F"/>
+                </a:solidFill>
+                <a:latin typeface="Arial"/>
+                <a:ea typeface="Arial"/>
+                <a:cs typeface="Arial"/>
+              </a:rPr>
+              <a:t>food rescued</a:t>
+            </a:r>
+          </a:p>
+        </p:txBody>
+      </p:sp>
+      <p:sp>
+        <p:nvSpPr>
+          <p:cNvPr id="8" name="">
+            <a:extLst xmlns:a="http://schemas.openxmlformats.org/drawingml/2006/main">
+              <a:ext uri="{FF2B5EF4-FFF2-40B4-BE49-F238E27FC236}">
+                <a16:creationId xmlns:a16="http://schemas.microsoft.com/office/drawing/2014/main" id="{E5343CE7-4966-4B59-BAB2-53D4A0C368B2}"/>
+              </a:ext>
+            </a:extLst>
+          </p:cNvPr>
+          <p:cNvSpPr>
+            <a:spLocks xmlns:a="http://schemas.openxmlformats.org/drawingml/2006/main" noGrp="1"/>
+          </p:cNvSpPr>
+          <p:nvPr/>
+        </p:nvSpPr>
+        <p:spPr>
+          <a:xfrm xmlns:a="http://schemas.openxmlformats.org/drawingml/2006/main">
+            <a:off x="7924800" y="1905000"/>
+            <a:ext cx="3238500" cy="438150"/>
+          </a:xfrm>
+          <a:prstGeom xmlns:a="http://schemas.openxmlformats.org/drawingml/2006/main" prst="rect">
+            <a:avLst/>
+          </a:prstGeom>
+          <a:noFill xmlns:a="http://schemas.openxmlformats.org/drawingml/2006/main"/>
+          <a:ln xmlns:a="http://schemas.openxmlformats.org/drawingml/2006/main" w="0">
+            <a:noFill/>
+            <a:prstDash val="solid"/>
+          </a:ln>
+        </p:spPr>
+        <p:txBody>
+          <a:bodyPr xmlns:a="http://schemas.openxmlformats.org/drawingml/2006/main">
+            <a:noAutofit/>
+          </a:bodyPr>
+          <a:lstStyle xmlns:a="http://schemas.openxmlformats.org/drawingml/2006/main">
+            <a:defPPr>
+              <a:defRPr sz="2550" b="1">
+                <a:solidFill>
+                  <a:srgbClr val="0E7C57"/>
+                </a:solidFill>
+                <a:latin typeface="Arial"/>
+                <a:ea typeface="Arial"/>
+                <a:cs typeface="Arial"/>
+              </a:defRPr>
+            </a:defPPr>
+          </a:lstStyle>
+          <a:p xmlns:a="http://schemas.openxmlformats.org/drawingml/2006/main">
+            <a:pPr>
+              <a:defRPr sz="2550" b="1">
+                <a:solidFill>
+                  <a:srgbClr val="0E7C57"/>
+                </a:solidFill>
+                <a:latin typeface="Arial"/>
+                <a:ea typeface="Arial"/>
+                <a:cs typeface="Arial"/>
+              </a:defRPr>
+            </a:pPr>
+            <a:r>
+              <a:rPr sz="2550" b="1">
+                <a:solidFill>
+                  <a:srgbClr val="0E7C57"/>
+                </a:solidFill>
+                <a:latin typeface="Arial"/>
+                <a:ea typeface="Arial"/>
+                <a:cs typeface="Arial"/>
+              </a:rPr>
+              <a:t>1,035</a:t>
+            </a:r>
+          </a:p>
+        </p:txBody>
+      </p:sp>
+      <p:sp>
+        <p:nvSpPr>
+          <p:cNvPr id="9" name="">
+            <a:extLst xmlns:a="http://schemas.openxmlformats.org/drawingml/2006/main">
+              <a:ext uri="{FF2B5EF4-FFF2-40B4-BE49-F238E27FC236}">
+                <a16:creationId xmlns:a16="http://schemas.microsoft.com/office/drawing/2014/main" id="{44AB3A78-DAF7-41B3-BD72-736B6A9488DC}"/>
+              </a:ext>
+            </a:extLst>
+          </p:cNvPr>
+          <p:cNvSpPr>
+            <a:spLocks xmlns:a="http://schemas.openxmlformats.org/drawingml/2006/main" noGrp="1"/>
+          </p:cNvSpPr>
+          <p:nvPr/>
+        </p:nvSpPr>
+        <p:spPr>
+          <a:xfrm xmlns:a="http://schemas.openxmlformats.org/drawingml/2006/main">
+            <a:off x="7924800" y="2362200"/>
+            <a:ext cx="3238500" cy="304800"/>
+          </a:xfrm>
+          <a:prstGeom xmlns:a="http://schemas.openxmlformats.org/drawingml/2006/main" prst="rect">
+            <a:avLst/>
+          </a:prstGeom>
+          <a:noFill xmlns:a="http://schemas.openxmlformats.org/drawingml/2006/main"/>
+          <a:ln xmlns:a="http://schemas.openxmlformats.org/drawingml/2006/main" w="0">
+            <a:noFill/>
+            <a:prstDash val="solid"/>
+          </a:ln>
+        </p:spPr>
+        <p:txBody>
+          <a:bodyPr xmlns:a="http://schemas.openxmlformats.org/drawingml/2006/main">
+            <a:noAutofit/>
+          </a:bodyPr>
+          <a:lstStyle xmlns:a="http://schemas.openxmlformats.org/drawingml/2006/main">
+            <a:defPPr>
+              <a:defRPr sz="1200" b="0">
+                <a:solidFill>
+                  <a:srgbClr val="52606F"/>
+                </a:solidFill>
+                <a:latin typeface="Arial"/>
+                <a:ea typeface="Arial"/>
+                <a:cs typeface="Arial"/>
+              </a:defRPr>
+            </a:defPPr>
+          </a:lstStyle>
+          <a:p xmlns:a="http://schemas.openxmlformats.org/drawingml/2006/main">
+            <a:pPr>
+              <a:defRPr sz="1200" b="0">
+                <a:solidFill>
+                  <a:srgbClr val="52606F"/>
+                </a:solidFill>
+                <a:latin typeface="Arial"/>
+                <a:ea typeface="Arial"/>
+                <a:cs typeface="Arial"/>
+              </a:defRPr>
+            </a:pPr>
+            <a:r>
+              <a:rPr sz="1200" b="0">
+                <a:solidFill>
+                  <a:srgbClr val="52606F"/>
+                </a:solidFill>
+                <a:latin typeface="Arial"/>
+                <a:ea typeface="Arial"/>
+                <a:cs typeface="Arial"/>
+              </a:rPr>
+              <a:t>meals equivalent</a:t>
+            </a:r>
+          </a:p>
+        </p:txBody>
+      </p:sp>
+      <p:sp>
+        <p:nvSpPr>
+          <p:cNvPr id="10" name="">
+            <a:extLst xmlns:a="http://schemas.openxmlformats.org/drawingml/2006/main">
+              <a:ext uri="{FF2B5EF4-FFF2-40B4-BE49-F238E27FC236}">
+                <a16:creationId xmlns:a16="http://schemas.microsoft.com/office/drawing/2014/main" id="{89EFD438-7D78-4FBD-B1EE-1D9E075A604B}"/>
+              </a:ext>
+            </a:extLst>
+          </p:cNvPr>
+          <p:cNvSpPr>
+            <a:spLocks xmlns:a="http://schemas.openxmlformats.org/drawingml/2006/main" noGrp="1"/>
+          </p:cNvSpPr>
+          <p:nvPr/>
+        </p:nvSpPr>
+        <p:spPr>
+          <a:xfrm xmlns:a="http://schemas.openxmlformats.org/drawingml/2006/main">
+            <a:off x="685800" y="3028950"/>
+            <a:ext cx="3238500" cy="438150"/>
+          </a:xfrm>
+          <a:prstGeom xmlns:a="http://schemas.openxmlformats.org/drawingml/2006/main" prst="rect">
+            <a:avLst/>
+          </a:prstGeom>
+          <a:noFill xmlns:a="http://schemas.openxmlformats.org/drawingml/2006/main"/>
+          <a:ln xmlns:a="http://schemas.openxmlformats.org/drawingml/2006/main" w="0">
+            <a:noFill/>
+            <a:prstDash val="solid"/>
+          </a:ln>
+        </p:spPr>
+        <p:txBody>
+          <a:bodyPr xmlns:a="http://schemas.openxmlformats.org/drawingml/2006/main">
+            <a:noAutofit/>
+          </a:bodyPr>
+          <a:lstStyle xmlns:a="http://schemas.openxmlformats.org/drawingml/2006/main">
+            <a:defPPr>
+              <a:defRPr sz="2550" b="1">
+                <a:solidFill>
+                  <a:srgbClr val="0E7C57"/>
+                </a:solidFill>
+                <a:latin typeface="Arial"/>
+                <a:ea typeface="Arial"/>
+                <a:cs typeface="Arial"/>
+              </a:defRPr>
+            </a:defPPr>
+          </a:lstStyle>
+          <a:p xmlns:a="http://schemas.openxmlformats.org/drawingml/2006/main">
+            <a:pPr>
+              <a:defRPr sz="2550" b="1">
+                <a:solidFill>
+                  <a:srgbClr val="0E7C57"/>
+                </a:solidFill>
+                <a:latin typeface="Arial"/>
+                <a:ea typeface="Arial"/>
+                <a:cs typeface="Arial"/>
+              </a:defRPr>
+            </a:pPr>
+            <a:r>
+              <a:rPr sz="2550" b="1">
+                <a:solidFill>
+                  <a:srgbClr val="0E7C57"/>
+                </a:solidFill>
+                <a:latin typeface="Arial"/>
+                <a:ea typeface="Arial"/>
+                <a:cs typeface="Arial"/>
+              </a:rPr>
+              <a:t>91.7%</a:t>
+            </a:r>
+          </a:p>
+        </p:txBody>
+      </p:sp>
+      <p:sp>
+        <p:nvSpPr>
+          <p:cNvPr id="11" name="">
+            <a:extLst xmlns:a="http://schemas.openxmlformats.org/drawingml/2006/main">
+              <a:ext uri="{FF2B5EF4-FFF2-40B4-BE49-F238E27FC236}">
+                <a16:creationId xmlns:a16="http://schemas.microsoft.com/office/drawing/2014/main" id="{E85B8BA8-DE25-4EF3-BF77-AE43BE130654}"/>
+              </a:ext>
+            </a:extLst>
+          </p:cNvPr>
+          <p:cNvSpPr>
+            <a:spLocks xmlns:a="http://schemas.openxmlformats.org/drawingml/2006/main" noGrp="1"/>
+          </p:cNvSpPr>
+          <p:nvPr/>
+        </p:nvSpPr>
+        <p:spPr>
+          <a:xfrm xmlns:a="http://schemas.openxmlformats.org/drawingml/2006/main">
+            <a:off x="685800" y="3486150"/>
+            <a:ext cx="3238500" cy="304800"/>
+          </a:xfrm>
+          <a:prstGeom xmlns:a="http://schemas.openxmlformats.org/drawingml/2006/main" prst="rect">
+            <a:avLst/>
+          </a:prstGeom>
+          <a:noFill xmlns:a="http://schemas.openxmlformats.org/drawingml/2006/main"/>
+          <a:ln xmlns:a="http://schemas.openxmlformats.org/drawingml/2006/main" w="0">
+            <a:noFill/>
+            <a:prstDash val="solid"/>
+          </a:ln>
+        </p:spPr>
+        <p:txBody>
+          <a:bodyPr xmlns:a="http://schemas.openxmlformats.org/drawingml/2006/main">
+            <a:noAutofit/>
+          </a:bodyPr>
+          <a:lstStyle xmlns:a="http://schemas.openxmlformats.org/drawingml/2006/main">
+            <a:defPPr>
+              <a:defRPr sz="1200" b="0">
+                <a:solidFill>
+                  <a:srgbClr val="52606F"/>
+                </a:solidFill>
+                <a:latin typeface="Arial"/>
+                <a:ea typeface="Arial"/>
+                <a:cs typeface="Arial"/>
+              </a:defRPr>
+            </a:defPPr>
+          </a:lstStyle>
+          <a:p xmlns:a="http://schemas.openxmlformats.org/drawingml/2006/main">
+            <a:pPr>
+              <a:defRPr sz="1200" b="0">
+                <a:solidFill>
+                  <a:srgbClr val="52606F"/>
+                </a:solidFill>
+                <a:latin typeface="Arial"/>
+                <a:ea typeface="Arial"/>
+                <a:cs typeface="Arial"/>
+              </a:defRPr>
+            </a:pPr>
+            <a:r>
+              <a:rPr sz="1200" b="0">
+                <a:solidFill>
+                  <a:srgbClr val="52606F"/>
+                </a:solidFill>
+                <a:latin typeface="Arial"/>
+                <a:ea typeface="Arial"/>
+                <a:cs typeface="Arial"/>
+              </a:rPr>
+              <a:t>allocations accepted</a:t>
+            </a:r>
+          </a:p>
+        </p:txBody>
+      </p:sp>
+      <p:sp>
+        <p:nvSpPr>
+          <p:cNvPr id="12" name="">
+            <a:extLst xmlns:a="http://schemas.openxmlformats.org/drawingml/2006/main">
+              <a:ext uri="{FF2B5EF4-FFF2-40B4-BE49-F238E27FC236}">
+                <a16:creationId xmlns:a16="http://schemas.microsoft.com/office/drawing/2014/main" id="{5DD5B215-A11F-438B-A2AE-AE2C7E72A168}"/>
+              </a:ext>
+            </a:extLst>
+          </p:cNvPr>
+          <p:cNvSpPr>
+            <a:spLocks xmlns:a="http://schemas.openxmlformats.org/drawingml/2006/main" noGrp="1"/>
+          </p:cNvSpPr>
+          <p:nvPr/>
+        </p:nvSpPr>
+        <p:spPr>
+          <a:xfrm xmlns:a="http://schemas.openxmlformats.org/drawingml/2006/main">
+            <a:off x="4305300" y="3028950"/>
+            <a:ext cx="3238500" cy="438150"/>
+          </a:xfrm>
+          <a:prstGeom xmlns:a="http://schemas.openxmlformats.org/drawingml/2006/main" prst="rect">
+            <a:avLst/>
+          </a:prstGeom>
+          <a:noFill xmlns:a="http://schemas.openxmlformats.org/drawingml/2006/main"/>
+          <a:ln xmlns:a="http://schemas.openxmlformats.org/drawingml/2006/main" w="0">
+            <a:noFill/>
+            <a:prstDash val="solid"/>
+          </a:ln>
+        </p:spPr>
+        <p:txBody>
+          <a:bodyPr xmlns:a="http://schemas.openxmlformats.org/drawingml/2006/main">
+            <a:noAutofit/>
+          </a:bodyPr>
+          <a:lstStyle xmlns:a="http://schemas.openxmlformats.org/drawingml/2006/main">
+            <a:defPPr>
+              <a:defRPr sz="2550" b="1">
+                <a:solidFill>
+                  <a:srgbClr val="0E7C57"/>
+                </a:solidFill>
+                <a:latin typeface="Arial"/>
+                <a:ea typeface="Arial"/>
+                <a:cs typeface="Arial"/>
+              </a:defRPr>
+            </a:defPPr>
+          </a:lstStyle>
+          <a:p xmlns:a="http://schemas.openxmlformats.org/drawingml/2006/main">
+            <a:pPr>
+              <a:defRPr sz="2550" b="1">
+                <a:solidFill>
+                  <a:srgbClr val="0E7C57"/>
+                </a:solidFill>
+                <a:latin typeface="Arial"/>
+                <a:ea typeface="Arial"/>
+                <a:cs typeface="Arial"/>
+              </a:defRPr>
+            </a:pPr>
+            <a:r>
+              <a:rPr sz="2550" b="1">
+                <a:solidFill>
+                  <a:srgbClr val="0E7C57"/>
+                </a:solidFill>
+                <a:latin typeface="Arial"/>
+                <a:ea typeface="Arial"/>
+                <a:cs typeface="Arial"/>
+              </a:rPr>
+              <a:t>56 minutes</a:t>
+            </a:r>
+          </a:p>
+        </p:txBody>
+      </p:sp>
+      <p:sp>
+        <p:nvSpPr>
+          <p:cNvPr id="13" name="">
+            <a:extLst xmlns:a="http://schemas.openxmlformats.org/drawingml/2006/main">
+              <a:ext uri="{FF2B5EF4-FFF2-40B4-BE49-F238E27FC236}">
+                <a16:creationId xmlns:a16="http://schemas.microsoft.com/office/drawing/2014/main" id="{F18C581C-08CB-48C4-8649-0F1F0538AA66}"/>
+              </a:ext>
+            </a:extLst>
+          </p:cNvPr>
+          <p:cNvSpPr>
+            <a:spLocks xmlns:a="http://schemas.openxmlformats.org/drawingml/2006/main" noGrp="1"/>
+          </p:cNvSpPr>
+          <p:nvPr/>
+        </p:nvSpPr>
+        <p:spPr>
+          <a:xfrm xmlns:a="http://schemas.openxmlformats.org/drawingml/2006/main">
+            <a:off x="4305300" y="3486150"/>
+            <a:ext cx="3238500" cy="304800"/>
+          </a:xfrm>
+          <a:prstGeom xmlns:a="http://schemas.openxmlformats.org/drawingml/2006/main" prst="rect">
+            <a:avLst/>
+          </a:prstGeom>
+          <a:noFill xmlns:a="http://schemas.openxmlformats.org/drawingml/2006/main"/>
+          <a:ln xmlns:a="http://schemas.openxmlformats.org/drawingml/2006/main" w="0">
+            <a:noFill/>
+            <a:prstDash val="solid"/>
+          </a:ln>
+        </p:spPr>
+        <p:txBody>
+          <a:bodyPr xmlns:a="http://schemas.openxmlformats.org/drawingml/2006/main">
+            <a:noAutofit/>
+          </a:bodyPr>
+          <a:lstStyle xmlns:a="http://schemas.openxmlformats.org/drawingml/2006/main">
+            <a:defPPr>
+              <a:defRPr sz="1200" b="0">
+                <a:solidFill>
+                  <a:srgbClr val="52606F"/>
+                </a:solidFill>
+                <a:latin typeface="Arial"/>
+                <a:ea typeface="Arial"/>
+                <a:cs typeface="Arial"/>
+              </a:defRPr>
+            </a:defPPr>
+          </a:lstStyle>
+          <a:p xmlns:a="http://schemas.openxmlformats.org/drawingml/2006/main">
+            <a:pPr>
+              <a:defRPr sz="1200" b="0">
+                <a:solidFill>
+                  <a:srgbClr val="52606F"/>
+                </a:solidFill>
+                <a:latin typeface="Arial"/>
+                <a:ea typeface="Arial"/>
+                <a:cs typeface="Arial"/>
+              </a:defRPr>
+            </a:pPr>
+            <a:r>
+              <a:rPr sz="1200" b="0">
+                <a:solidFill>
+                  <a:srgbClr val="52606F"/>
+                </a:solidFill>
+                <a:latin typeface="Arial"/>
+                <a:ea typeface="Arial"/>
+                <a:cs typeface="Arial"/>
+              </a:rPr>
+              <a:t>pickup to confirmation</a:t>
+            </a:r>
+          </a:p>
+        </p:txBody>
+      </p:sp>
+      <p:sp>
+        <p:nvSpPr>
+          <p:cNvPr id="14" name="">
+            <a:extLst xmlns:a="http://schemas.openxmlformats.org/drawingml/2006/main">
+              <a:ext uri="{FF2B5EF4-FFF2-40B4-BE49-F238E27FC236}">
+                <a16:creationId xmlns:a16="http://schemas.microsoft.com/office/drawing/2014/main" id="{204F20CD-88C8-41E8-B21C-1E21F5C0F29D}"/>
+              </a:ext>
+            </a:extLst>
+          </p:cNvPr>
+          <p:cNvSpPr>
+            <a:spLocks xmlns:a="http://schemas.openxmlformats.org/drawingml/2006/main" noGrp="1"/>
+          </p:cNvSpPr>
+          <p:nvPr/>
+        </p:nvSpPr>
+        <p:spPr>
+          <a:xfrm xmlns:a="http://schemas.openxmlformats.org/drawingml/2006/main">
+            <a:off x="7924800" y="3028950"/>
+            <a:ext cx="3238500" cy="438150"/>
+          </a:xfrm>
+          <a:prstGeom xmlns:a="http://schemas.openxmlformats.org/drawingml/2006/main" prst="rect">
+            <a:avLst/>
+          </a:prstGeom>
+          <a:noFill xmlns:a="http://schemas.openxmlformats.org/drawingml/2006/main"/>
+          <a:ln xmlns:a="http://schemas.openxmlformats.org/drawingml/2006/main" w="0">
+            <a:noFill/>
+            <a:prstDash val="solid"/>
+          </a:ln>
+        </p:spPr>
+        <p:txBody>
+          <a:bodyPr xmlns:a="http://schemas.openxmlformats.org/drawingml/2006/main">
+            <a:noAutofit/>
+          </a:bodyPr>
+          <a:lstStyle xmlns:a="http://schemas.openxmlformats.org/drawingml/2006/main">
+            <a:defPPr>
+              <a:defRPr sz="2550" b="1">
+                <a:solidFill>
+                  <a:srgbClr val="0E7C57"/>
+                </a:solidFill>
+                <a:latin typeface="Arial"/>
+                <a:ea typeface="Arial"/>
+                <a:cs typeface="Arial"/>
+              </a:defRPr>
+            </a:defPPr>
+          </a:lstStyle>
+          <a:p xmlns:a="http://schemas.openxmlformats.org/drawingml/2006/main">
+            <a:pPr>
+              <a:defRPr sz="2550" b="1">
+                <a:solidFill>
+                  <a:srgbClr val="0E7C57"/>
+                </a:solidFill>
+                <a:latin typeface="Arial"/>
+                <a:ea typeface="Arial"/>
+                <a:cs typeface="Arial"/>
+              </a:defRPr>
+            </a:pPr>
+            <a:r>
+              <a:rPr sz="2550" b="1">
+                <a:solidFill>
+                  <a:srgbClr val="0E7C57"/>
+                </a:solidFill>
+                <a:latin typeface="Arial"/>
+                <a:ea typeface="Arial"/>
+                <a:cs typeface="Arial"/>
+              </a:rPr>
+              <a:t>9 of 9</a:t>
+            </a:r>
+          </a:p>
+        </p:txBody>
+      </p:sp>
+      <p:sp>
+        <p:nvSpPr>
+          <p:cNvPr id="15" name="">
+            <a:extLst xmlns:a="http://schemas.openxmlformats.org/drawingml/2006/main">
+              <a:ext uri="{FF2B5EF4-FFF2-40B4-BE49-F238E27FC236}">
+                <a16:creationId xmlns:a16="http://schemas.microsoft.com/office/drawing/2014/main" id="{D75B94A0-5081-49A9-8682-EF4581C78519}"/>
+              </a:ext>
+            </a:extLst>
+          </p:cNvPr>
+          <p:cNvSpPr>
+            <a:spLocks xmlns:a="http://schemas.openxmlformats.org/drawingml/2006/main" noGrp="1"/>
+          </p:cNvSpPr>
+          <p:nvPr/>
+        </p:nvSpPr>
+        <p:spPr>
+          <a:xfrm xmlns:a="http://schemas.openxmlformats.org/drawingml/2006/main">
+            <a:off x="7924800" y="3486150"/>
+            <a:ext cx="3238500" cy="304800"/>
+          </a:xfrm>
+          <a:prstGeom xmlns:a="http://schemas.openxmlformats.org/drawingml/2006/main" prst="rect">
+            <a:avLst/>
+          </a:prstGeom>
+          <a:noFill xmlns:a="http://schemas.openxmlformats.org/drawingml/2006/main"/>
+          <a:ln xmlns:a="http://schemas.openxmlformats.org/drawingml/2006/main" w="0">
+            <a:noFill/>
+            <a:prstDash val="solid"/>
+          </a:ln>
+        </p:spPr>
+        <p:txBody>
+          <a:bodyPr xmlns:a="http://schemas.openxmlformats.org/drawingml/2006/main">
+            <a:noAutofit/>
+          </a:bodyPr>
+          <a:lstStyle xmlns:a="http://schemas.openxmlformats.org/drawingml/2006/main">
+            <a:defPPr>
+              <a:defRPr sz="1200" b="0">
+                <a:solidFill>
+                  <a:srgbClr val="52606F"/>
+                </a:solidFill>
+                <a:latin typeface="Arial"/>
+                <a:ea typeface="Arial"/>
+                <a:cs typeface="Arial"/>
+              </a:defRPr>
+            </a:defPPr>
+          </a:lstStyle>
+          <a:p xmlns:a="http://schemas.openxmlformats.org/drawingml/2006/main">
+            <a:pPr>
+              <a:defRPr sz="1200" b="0">
+                <a:solidFill>
+                  <a:srgbClr val="52606F"/>
+                </a:solidFill>
+                <a:latin typeface="Arial"/>
+                <a:ea typeface="Arial"/>
+                <a:cs typeface="Arial"/>
+              </a:defRPr>
+            </a:pPr>
+            <a:r>
+              <a:rPr sz="1200" b="0">
+                <a:solidFill>
+                  <a:srgbClr val="52606F"/>
+                </a:solidFill>
+                <a:latin typeface="Arial"/>
+                <a:ea typeface="Arial"/>
+                <a:cs typeface="Arial"/>
+              </a:rPr>
+              <a:t>automated tests pass</a:t>
+            </a:r>
+          </a:p>
+        </p:txBody>
+      </p:sp>
+      <p:sp>
+        <p:nvSpPr>
+          <p:cNvPr id="16" name="">
+            <a:extLst xmlns:a="http://schemas.openxmlformats.org/drawingml/2006/main">
+              <a:ext uri="{FF2B5EF4-FFF2-40B4-BE49-F238E27FC236}">
+                <a16:creationId xmlns:a16="http://schemas.microsoft.com/office/drawing/2014/main" id="{AE654176-CC5A-4F60-88DF-3C6E3EFE2256}"/>
+              </a:ext>
+            </a:extLst>
+          </p:cNvPr>
+          <p:cNvSpPr>
+            <a:spLocks xmlns:a="http://schemas.openxmlformats.org/drawingml/2006/main" noGrp="1"/>
+          </p:cNvSpPr>
+          <p:nvPr/>
+        </p:nvSpPr>
+        <p:spPr>
+          <a:xfrm xmlns:a="http://schemas.openxmlformats.org/drawingml/2006/main">
+            <a:off x="685800" y="4305300"/>
+            <a:ext cx="10820400" cy="1905000"/>
+          </a:xfrm>
+          <a:prstGeom xmlns:a="http://schemas.openxmlformats.org/drawingml/2006/main" prst="rect">
+            <a:avLst/>
+          </a:prstGeom>
+          <a:noFill xmlns:a="http://schemas.openxmlformats.org/drawingml/2006/main"/>
+          <a:ln xmlns:a="http://schemas.openxmlformats.org/drawingml/2006/main" w="0">
+            <a:noFill/>
+            <a:prstDash val="solid"/>
+          </a:ln>
+        </p:spPr>
+        <p:txBody>
+          <a:bodyPr xmlns:a="http://schemas.openxmlformats.org/drawingml/2006/main">
+            <a:noAutofit/>
+          </a:bodyPr>
+          <a:lstStyle xmlns:a="http://schemas.openxmlformats.org/drawingml/2006/main">
+            <a:defPPr>
+              <a:defRPr sz="1275">
                 <a:solidFill>
                   <a:srgbClr val="131A24"/>
                 </a:solidFill>
@@ -10728,10 +10977,10 @@
           <a:p xmlns:a="http://schemas.openxmlformats.org/drawingml/2006/main">
             <a:pPr marL="228600" indent="-114300">
               <a:spcAft>
-                <a:spcPts val="1600"/>
+                <a:spcPts val="1200"/>
               </a:spcAft>
               <a:buChar char="•"/>
-              <a:defRPr sz="1350">
+              <a:defRPr sz="1275">
                 <a:solidFill>
                   <a:srgbClr val="131A24"/>
                 </a:solidFill>
@@ -10741,7 +10990,7 @@
               </a:defRPr>
             </a:pPr>
             <a:r>
-              <a:rPr sz="1350">
+              <a:rPr sz="1275">
                 <a:solidFill>
                   <a:srgbClr val="131A24"/>
                 </a:solidFill>
@@ -10749,16 +10998,16 @@
                 <a:ea typeface="Arial"/>
                 <a:cs typeface="Arial"/>
               </a:rPr>
-              <a:t>Route aware arrival estimates with a mapping service.</a:t>
+              <a:t>Nine automated tests cover the eligibility constraints, the scoring model, the fairness factor, the arrival rule and access control.</a:t>
             </a:r>
           </a:p>
           <a:p xmlns:a="http://schemas.openxmlformats.org/drawingml/2006/main">
             <a:pPr marL="228600" indent="-114300">
               <a:spcAft>
-                <a:spcPts val="1600"/>
+                <a:spcPts val="1200"/>
               </a:spcAft>
               <a:buChar char="•"/>
-              <a:defRPr sz="1350">
+              <a:defRPr sz="1275">
                 <a:solidFill>
                   <a:srgbClr val="131A24"/>
                 </a:solidFill>
@@ -10768,7 +11017,7 @@
               </a:defRPr>
             </a:pPr>
             <a:r>
-              <a:rPr sz="1350">
+              <a:rPr sz="1275">
                 <a:solidFill>
                   <a:srgbClr val="131A24"/>
                 </a:solidFill>
@@ -10776,16 +11025,16 @@
                 <a:ea typeface="Arial"/>
                 <a:cs typeface="Arial"/>
               </a:rPr>
-              <a:t>Map based location input and per vehicle speeds.</a:t>
+              <a:t>Eighteen API checks confirm the role restrictions, including rejection of unauthorised requests with 401 and 403 responses.</a:t>
             </a:r>
           </a:p>
           <a:p xmlns:a="http://schemas.openxmlformats.org/drawingml/2006/main">
             <a:pPr marL="228600" indent="-114300">
               <a:spcAft>
-                <a:spcPts val="1600"/>
+                <a:spcPts val="1200"/>
               </a:spcAft>
               <a:buChar char="•"/>
-              <a:defRPr sz="1350">
+              <a:defRPr sz="1275">
                 <a:solidFill>
                   <a:srgbClr val="131A24"/>
                 </a:solidFill>
@@ -10795,7 +11044,7 @@
               </a:defRPr>
             </a:pPr>
             <a:r>
-              <a:rPr sz="1350">
+              <a:rPr sz="1275">
                 <a:solidFill>
                   <a:srgbClr val="131A24"/>
                 </a:solidFill>
@@ -10803,34 +11052,7 @@
                 <a:ea typeface="Arial"/>
                 <a:cs typeface="Arial"/>
               </a:rPr>
-              <a:t>Volunteer reliability score from accept, decline and completion history.</a:t>
-            </a:r>
-          </a:p>
-          <a:p xmlns:a="http://schemas.openxmlformats.org/drawingml/2006/main">
-            <a:pPr marL="228600" indent="-114300">
-              <a:spcAft>
-                <a:spcPts val="1600"/>
-              </a:spcAft>
-              <a:buChar char="•"/>
-              <a:defRPr sz="1350">
-                <a:solidFill>
-                  <a:srgbClr val="131A24"/>
-                </a:solidFill>
-                <a:latin typeface="Arial"/>
-                <a:ea typeface="Arial"/>
-                <a:cs typeface="Arial"/>
-              </a:defRPr>
-            </a:pPr>
-            <a:r>
-              <a:rPr sz="1350">
-                <a:solidFill>
-                  <a:srgbClr val="131A24"/>
-                </a:solidFill>
-                <a:latin typeface="Arial"/>
-                <a:ea typeface="Arial"/>
-                <a:cs typeface="Arial"/>
-              </a:rPr>
-              <a:t>Deployment and SMS or WhatsApp alerts for organizations outside the app.</a:t>
+              <a:t>A complete rescue was executed end to end: donation, allocation, volunteer assignment, delivery and confirmation.</a:t>
             </a:r>
           </a:p>
         </p:txBody>
@@ -10838,7 +11060,7 @@
     </p:spTree>
     <p:extLst>
       <p:ext uri="{BB962C8B-B14F-4D97-AF65-F5344CB8AC3E}">
-        <p14:creationId xmlns:p14="http://schemas.microsoft.com/office/powerpoint/2010/main" val="1425782783"/>
+        <p14:creationId xmlns:p14="http://schemas.microsoft.com/office/powerpoint/2010/main" val="1427507030"/>
       </p:ext>
     </p:extLst>
   </p:cSld>

--- a/docs/FoodBridge_Project_Review.pptx
+++ b/docs/FoodBridge_Project_Review.pptx
@@ -2,22 +2,22 @@
 <file path=ppt/presentation.xml><?xml version="1.0" encoding="utf-8"?>
 <p:presentation xmlns:p="http://schemas.openxmlformats.org/presentationml/2006/main">
   <p:sldMasterIdLst>
-    <p:sldMasterId xmlns:r="http://schemas.openxmlformats.org/officeDocument/2006/relationships" id="2147483648" r:id="R34ddb6235a8e492f"/>
+    <p:sldMasterId xmlns:r="http://schemas.openxmlformats.org/officeDocument/2006/relationships" id="2147483648" r:id="R2997cc355cf4414a"/>
   </p:sldMasterIdLst>
   <p:notesMasterIdLst>
-    <p:notesMasterId xmlns:r="http://schemas.openxmlformats.org/officeDocument/2006/relationships" r:id="R88608b788eff4a39"/>
+    <p:notesMasterId xmlns:r="http://schemas.openxmlformats.org/officeDocument/2006/relationships" r:id="Rd2bcf79e84c74f9e"/>
   </p:notesMasterIdLst>
   <p:sldIdLst>
-    <p:sldId xmlns:r="http://schemas.openxmlformats.org/officeDocument/2006/relationships" id="256" r:id="R7cfb1b3f8152482b"/>
-    <p:sldId xmlns:r="http://schemas.openxmlformats.org/officeDocument/2006/relationships" id="257" r:id="R3104b29e4ea8412b"/>
-    <p:sldId xmlns:r="http://schemas.openxmlformats.org/officeDocument/2006/relationships" id="258" r:id="Reebcf2dc49674160"/>
-    <p:sldId xmlns:r="http://schemas.openxmlformats.org/officeDocument/2006/relationships" id="259" r:id="R6705056787b04162"/>
-    <p:sldId xmlns:r="http://schemas.openxmlformats.org/officeDocument/2006/relationships" id="260" r:id="Rdcd19829219c4a3b"/>
-    <p:sldId xmlns:r="http://schemas.openxmlformats.org/officeDocument/2006/relationships" id="261" r:id="Ra1970b71e3e246f7"/>
-    <p:sldId xmlns:r="http://schemas.openxmlformats.org/officeDocument/2006/relationships" id="262" r:id="Re9e0b390fdcd4563"/>
-    <p:sldId xmlns:r="http://schemas.openxmlformats.org/officeDocument/2006/relationships" id="263" r:id="Rfbe6cbd320be4e34"/>
-    <p:sldId xmlns:r="http://schemas.openxmlformats.org/officeDocument/2006/relationships" id="264" r:id="R93ab7a1426f141a4"/>
-    <p:sldId xmlns:r="http://schemas.openxmlformats.org/officeDocument/2006/relationships" id="265" r:id="Rc9943d0f5ae74d93"/>
+    <p:sldId xmlns:r="http://schemas.openxmlformats.org/officeDocument/2006/relationships" id="256" r:id="R40df262a2a3e4ef3"/>
+    <p:sldId xmlns:r="http://schemas.openxmlformats.org/officeDocument/2006/relationships" id="257" r:id="R233ec4bf111542d4"/>
+    <p:sldId xmlns:r="http://schemas.openxmlformats.org/officeDocument/2006/relationships" id="258" r:id="Rded3c8e24b1f4e2a"/>
+    <p:sldId xmlns:r="http://schemas.openxmlformats.org/officeDocument/2006/relationships" id="259" r:id="Ra893f3e762c146cd"/>
+    <p:sldId xmlns:r="http://schemas.openxmlformats.org/officeDocument/2006/relationships" id="260" r:id="R8c03a03c7c6e44f3"/>
+    <p:sldId xmlns:r="http://schemas.openxmlformats.org/officeDocument/2006/relationships" id="261" r:id="R1b57c96a11f24bab"/>
+    <p:sldId xmlns:r="http://schemas.openxmlformats.org/officeDocument/2006/relationships" id="262" r:id="Rbd94185ed086440f"/>
+    <p:sldId xmlns:r="http://schemas.openxmlformats.org/officeDocument/2006/relationships" id="263" r:id="R632005beed55401f"/>
+    <p:sldId xmlns:r="http://schemas.openxmlformats.org/officeDocument/2006/relationships" id="264" r:id="R1a16d6aaf07c4d6f"/>
+    <p:sldId xmlns:r="http://schemas.openxmlformats.org/officeDocument/2006/relationships" id="265" r:id="R16e7be827af54dd6"/>
   </p:sldIdLst>
   <p:sldSz cx="12192000" cy="6858000"/>
   <p:notesSz cx="6858000" cy="9144000"/>
@@ -451,7 +451,7 @@
           <a:lstStyle xmlns:a="http://schemas.openxmlformats.org/drawingml/2006/main"/>
           <a:p xmlns:a="http://schemas.openxmlformats.org/drawingml/2006/main">
             <a:r>
-              <a:t>Cover. State the project title and the two questions the review answers: how the platform works, and what distinguishes it.</a:t>
+              <a:t>About 10 seconds. Title, then one sentence: this review covers how the platform works and what distinguishes it. Move on quickly.</a:t>
             </a:r>
           </a:p>
         </p:txBody>
@@ -521,7 +521,7 @@
           <a:lstStyle xmlns:a="http://schemas.openxmlformats.org/drawingml/2006/main"/>
           <a:p xmlns:a="http://schemas.openxmlformats.org/drawingml/2006/main">
             <a:r>
-              <a:t>Close the slides here and begin the live demonstration of the platform.</a:t>
+              <a:t>About 20 seconds, then switch to the live demonstration. Open localhost:5173, sign in as administrator, open the Allocation Engine and use the urgent donation at the top of the queue. Preview decision reproduces the table on slide 6, then Run and allocate. Sign in as the recipient to accept, as the volunteer to collect, deliver and mark it delivered, then as the recipient again to confirm receipt. Finish on Reports and Analytics for the figures on slide 9.</a:t>
             </a:r>
           </a:p>
         </p:txBody>
@@ -591,7 +591,7 @@
           <a:lstStyle xmlns:a="http://schemas.openxmlformats.org/drawingml/2006/main"/>
           <a:p xmlns:a="http://schemas.openxmlformats.org/drawingml/2006/main">
             <a:r>
-              <a:t>The final two points define the problem this project addresses: safety and justification are absent from existing platforms.</a:t>
+              <a:t>About 30 seconds. The last two points are the gap this project fills: safety and justification. Do not elaborate here, slide 3 covers it.</a:t>
             </a:r>
           </a:p>
         </p:txBody>
@@ -659,7 +659,11 @@
         <p:txBody>
           <a:bodyPr xmlns:a="http://schemas.openxmlformats.org/drawingml/2006/main"/>
           <a:lstStyle xmlns:a="http://schemas.openxmlformats.org/drawingml/2006/main"/>
-          <a:p xmlns:a="http://schemas.openxmlformats.org/drawingml/2006/main"/>
+          <a:p xmlns:a="http://schemas.openxmlformats.org/drawingml/2006/main">
+            <a:r>
+              <a:t>About 40 seconds, and the main emphasis of the review. Read two rows only and state that the remaining four are in the table.</a:t>
+            </a:r>
+          </a:p>
         </p:txBody>
       </p:sp>
       <p:sp>
@@ -725,7 +729,11 @@
         <p:txBody>
           <a:bodyPr xmlns:a="http://schemas.openxmlformats.org/drawingml/2006/main"/>
           <a:lstStyle xmlns:a="http://schemas.openxmlformats.org/drawingml/2006/main"/>
-          <a:p xmlns:a="http://schemas.openxmlformats.org/drawingml/2006/main"/>
+          <a:p xmlns:a="http://schemas.openxmlformats.org/drawingml/2006/main">
+            <a:r>
+              <a:t>About 25 seconds. Name the four actors and the sequence; the demonstration follows the same path on screen.</a:t>
+            </a:r>
+          </a:p>
         </p:txBody>
       </p:sp>
       <p:sp>
@@ -791,7 +799,11 @@
         <p:txBody>
           <a:bodyPr xmlns:a="http://schemas.openxmlformats.org/drawingml/2006/main"/>
           <a:lstStyle xmlns:a="http://schemas.openxmlformats.org/drawingml/2006/main"/>
-          <a:p xmlns:a="http://schemas.openxmlformats.org/drawingml/2006/main"/>
+          <a:p xmlns:a="http://schemas.openxmlformats.org/drawingml/2006/main">
+            <a:r>
+              <a:t>About 40 seconds. The four constraints first, then the six factors. Do not read every row aloud.</a:t>
+            </a:r>
+          </a:p>
         </p:txBody>
       </p:sp>
       <p:sp>
@@ -859,7 +871,7 @@
           <a:lstStyle xmlns:a="http://schemas.openxmlformats.org/drawingml/2006/main"/>
           <a:p xmlns:a="http://schemas.openxmlformats.org/drawingml/2006/main">
             <a:r>
-              <a:t>This is the answer to the question of original contribution. The three assumptions are the values the rule depends on.</a:t>
+              <a:t>About 50 seconds, the key slide. State the rule, explain why it is a hard constraint rather than a score, give the three assumptions, then the recorded result.</a:t>
             </a:r>
           </a:p>
         </p:txBody>
@@ -927,7 +939,11 @@
         <p:txBody>
           <a:bodyPr xmlns:a="http://schemas.openxmlformats.org/drawingml/2006/main"/>
           <a:lstStyle xmlns:a="http://schemas.openxmlformats.org/drawingml/2006/main"/>
-          <a:p xmlns:a="http://schemas.openxmlformats.org/drawingml/2006/main"/>
+          <a:p xmlns:a="http://schemas.openxmlformats.org/drawingml/2006/main">
+            <a:r>
+              <a:t>About 30 seconds. Point at the submitted diagram, name the four layers, and mention JWT and the server side checks.</a:t>
+            </a:r>
+          </a:p>
         </p:txBody>
       </p:sp>
       <p:sp>
@@ -993,7 +1009,11 @@
         <p:txBody>
           <a:bodyPr xmlns:a="http://schemas.openxmlformats.org/drawingml/2006/main"/>
           <a:lstStyle xmlns:a="http://schemas.openxmlformats.org/drawingml/2006/main"/>
-          <a:p xmlns:a="http://schemas.openxmlformats.org/drawingml/2006/main"/>
+          <a:p xmlns:a="http://schemas.openxmlformats.org/drawingml/2006/main">
+            <a:r>
+              <a:t>About 25 seconds. Twelve entities in third normal form, and the reason allocation, assignment and delivery are separate.</a:t>
+            </a:r>
+          </a:p>
         </p:txBody>
       </p:sp>
       <p:sp>
@@ -1059,7 +1079,11 @@
         <p:txBody>
           <a:bodyPr xmlns:a="http://schemas.openxmlformats.org/drawingml/2006/main"/>
           <a:lstStyle xmlns:a="http://schemas.openxmlformats.org/drawingml/2006/main"/>
-          <a:p xmlns:a="http://schemas.openxmlformats.org/drawingml/2006/main"/>
+          <a:p xmlns:a="http://schemas.openxmlformats.org/drawingml/2006/main">
+            <a:r>
+              <a:t>About 30 seconds. Read two or three figures, then the verification lines. The live reports reproduce these numbers.</a:t>
+            </a:r>
+          </a:p>
         </p:txBody>
       </p:sp>
       <p:sp>
@@ -1104,7 +1128,7 @@
           <p:cNvPr id="3" name="Title">
             <a:extLst xmlns:a="http://schemas.openxmlformats.org/drawingml/2006/main">
               <a:ext uri="{FF2B5EF4-FFF2-40B4-BE49-F238E27FC236}">
-                <a16:creationId xmlns:a16="http://schemas.microsoft.com/office/drawing/2014/main" id="{F76F41E0-EB6A-4B3A-B63B-727BBBEDAA6A}"/>
+                <a16:creationId xmlns:a16="http://schemas.microsoft.com/office/drawing/2014/main" id="{30F08FFD-D713-4721-9E97-5AB140AC5DB1}"/>
               </a:ext>
             </a:extLst>
           </p:cNvPr>
@@ -1261,7 +1285,7 @@
           <p:cNvPr id="2" name="Subtitle">
             <a:extLst xmlns:a="http://schemas.openxmlformats.org/drawingml/2006/main">
               <a:ext uri="{FF2B5EF4-FFF2-40B4-BE49-F238E27FC236}">
-                <a16:creationId xmlns:a16="http://schemas.microsoft.com/office/drawing/2014/main" id="{260467F6-8D23-4138-BA55-951E84DA3011}"/>
+                <a16:creationId xmlns:a16="http://schemas.microsoft.com/office/drawing/2014/main" id="{3DC2C094-D7DE-4BB8-A9CD-E3B5B918F7B0}"/>
               </a:ext>
             </a:extLst>
           </p:cNvPr>
@@ -1435,7 +1459,7 @@
           <p:cNvPr id="2" name="Section title">
             <a:extLst xmlns:a="http://schemas.openxmlformats.org/drawingml/2006/main">
               <a:ext uri="{FF2B5EF4-FFF2-40B4-BE49-F238E27FC236}">
-                <a16:creationId xmlns:a16="http://schemas.microsoft.com/office/drawing/2014/main" id="{EAE30AA0-AA9C-4819-8F41-BDA9E55F9CE4}"/>
+                <a16:creationId xmlns:a16="http://schemas.microsoft.com/office/drawing/2014/main" id="{9D5566E6-6036-4B71-8FCC-FBF0046A71A8}"/>
               </a:ext>
             </a:extLst>
           </p:cNvPr>
@@ -1609,7 +1633,7 @@
           <p:cNvPr id="3" name="Title">
             <a:extLst xmlns:a="http://schemas.openxmlformats.org/drawingml/2006/main">
               <a:ext uri="{FF2B5EF4-FFF2-40B4-BE49-F238E27FC236}">
-                <a16:creationId xmlns:a16="http://schemas.microsoft.com/office/drawing/2014/main" id="{E8D4F5C0-A614-42E9-B519-BCB2D0D471F4}"/>
+                <a16:creationId xmlns:a16="http://schemas.microsoft.com/office/drawing/2014/main" id="{177EA7C1-0D6E-4ABA-B5BF-BA3F2EC331F7}"/>
               </a:ext>
             </a:extLst>
           </p:cNvPr>
@@ -1766,7 +1790,7 @@
           <p:cNvPr id="2" name="Body">
             <a:extLst xmlns:a="http://schemas.openxmlformats.org/drawingml/2006/main">
               <a:ext uri="{FF2B5EF4-FFF2-40B4-BE49-F238E27FC236}">
-                <a16:creationId xmlns:a16="http://schemas.microsoft.com/office/drawing/2014/main" id="{7BBFDA2F-A41B-4966-AD49-0169D8C3D63F}"/>
+                <a16:creationId xmlns:a16="http://schemas.microsoft.com/office/drawing/2014/main" id="{E87538EC-4139-475F-B8DB-71A4084B9CC8}"/>
               </a:ext>
             </a:extLst>
           </p:cNvPr>
@@ -1940,7 +1964,7 @@
           <p:cNvPr id="4" name="Title">
             <a:extLst xmlns:a="http://schemas.openxmlformats.org/drawingml/2006/main">
               <a:ext uri="{FF2B5EF4-FFF2-40B4-BE49-F238E27FC236}">
-                <a16:creationId xmlns:a16="http://schemas.microsoft.com/office/drawing/2014/main" id="{D37D4087-6501-4261-BF3B-B5313709068B}"/>
+                <a16:creationId xmlns:a16="http://schemas.microsoft.com/office/drawing/2014/main" id="{F6C19DE9-D2A4-4459-90FB-04DF018F7D93}"/>
               </a:ext>
             </a:extLst>
           </p:cNvPr>
@@ -2097,7 +2121,7 @@
           <p:cNvPr id="2" name="Left column">
             <a:extLst xmlns:a="http://schemas.openxmlformats.org/drawingml/2006/main">
               <a:ext uri="{FF2B5EF4-FFF2-40B4-BE49-F238E27FC236}">
-                <a16:creationId xmlns:a16="http://schemas.microsoft.com/office/drawing/2014/main" id="{C6E39595-AB7D-415B-85C7-FEA65006FDB7}"/>
+                <a16:creationId xmlns:a16="http://schemas.microsoft.com/office/drawing/2014/main" id="{F8E6F062-37FD-494A-84C7-35F4501A9BFB}"/>
               </a:ext>
             </a:extLst>
           </p:cNvPr>
@@ -2254,7 +2278,7 @@
           <p:cNvPr id="3" name="Right column">
             <a:extLst xmlns:a="http://schemas.openxmlformats.org/drawingml/2006/main">
               <a:ext uri="{FF2B5EF4-FFF2-40B4-BE49-F238E27FC236}">
-                <a16:creationId xmlns:a16="http://schemas.microsoft.com/office/drawing/2014/main" id="{62CE44A6-2AF7-43E6-BC73-7D359C6FD7ED}"/>
+                <a16:creationId xmlns:a16="http://schemas.microsoft.com/office/drawing/2014/main" id="{7A93EA39-7F03-4B66-AF6B-B58250CEB79C}"/>
               </a:ext>
             </a:extLst>
           </p:cNvPr>
@@ -2428,7 +2452,7 @@
           <p:cNvPr id="3" name="Title">
             <a:extLst xmlns:a="http://schemas.openxmlformats.org/drawingml/2006/main">
               <a:ext uri="{FF2B5EF4-FFF2-40B4-BE49-F238E27FC236}">
-                <a16:creationId xmlns:a16="http://schemas.microsoft.com/office/drawing/2014/main" id="{1CBE46C0-8A1B-4332-8C04-9F56E5B67FDB}"/>
+                <a16:creationId xmlns:a16="http://schemas.microsoft.com/office/drawing/2014/main" id="{6BAD64C7-91F4-4E47-B31B-4769D9E76947}"/>
               </a:ext>
             </a:extLst>
           </p:cNvPr>
@@ -2585,7 +2609,7 @@
           <p:cNvPr id="2" name="Left column">
             <a:extLst xmlns:a="http://schemas.openxmlformats.org/drawingml/2006/main">
               <a:ext uri="{FF2B5EF4-FFF2-40B4-BE49-F238E27FC236}">
-                <a16:creationId xmlns:a16="http://schemas.microsoft.com/office/drawing/2014/main" id="{68FD1876-B446-46A3-991F-6FD7E435C1BB}"/>
+                <a16:creationId xmlns:a16="http://schemas.microsoft.com/office/drawing/2014/main" id="{3C558B3D-99C7-45AD-A762-2D111D3399F2}"/>
               </a:ext>
             </a:extLst>
           </p:cNvPr>
@@ -2780,12 +2804,12 @@
   </p:cSld>
   <p:clrMap bg1="lt1" tx1="dk1" bg2="lt2" tx2="dk2" accent1="accent1" accent2="accent2" accent3="accent3" accent4="accent4" accent5="accent5" accent6="accent6" hlink="hlink" folHlink="folHlink"/>
   <p:sldLayoutIdLst>
-    <p:sldLayoutId xmlns:r="http://schemas.openxmlformats.org/officeDocument/2006/relationships" id="2147483649" r:id="Rcbee40ce7de84947"/>
-    <p:sldLayoutId xmlns:r="http://schemas.openxmlformats.org/officeDocument/2006/relationships" id="2147483650" r:id="Re6b8b4761d0b45d7"/>
-    <p:sldLayoutId xmlns:r="http://schemas.openxmlformats.org/officeDocument/2006/relationships" id="2147483651" r:id="R11390447112e4fcc"/>
-    <p:sldLayoutId xmlns:r="http://schemas.openxmlformats.org/officeDocument/2006/relationships" id="2147483652" r:id="R1755882daf954b7b"/>
-    <p:sldLayoutId xmlns:r="http://schemas.openxmlformats.org/officeDocument/2006/relationships" id="2147483653" r:id="R8f342d6136d840a2"/>
-    <p:sldLayoutId xmlns:r="http://schemas.openxmlformats.org/officeDocument/2006/relationships" id="2147483654" r:id="Re2ec0d9b3b174254"/>
+    <p:sldLayoutId xmlns:r="http://schemas.openxmlformats.org/officeDocument/2006/relationships" id="2147483649" r:id="Ra9d05586b4b84d72"/>
+    <p:sldLayoutId xmlns:r="http://schemas.openxmlformats.org/officeDocument/2006/relationships" id="2147483650" r:id="R4449b291464b4533"/>
+    <p:sldLayoutId xmlns:r="http://schemas.openxmlformats.org/officeDocument/2006/relationships" id="2147483651" r:id="R53cbe0be4ae74ab7"/>
+    <p:sldLayoutId xmlns:r="http://schemas.openxmlformats.org/officeDocument/2006/relationships" id="2147483652" r:id="R35febde9cede47eb"/>
+    <p:sldLayoutId xmlns:r="http://schemas.openxmlformats.org/officeDocument/2006/relationships" id="2147483653" r:id="Rac435a57b8cd4661"/>
+    <p:sldLayoutId xmlns:r="http://schemas.openxmlformats.org/officeDocument/2006/relationships" id="2147483654" r:id="Rfde13663878749ac"/>
   </p:sldLayoutIdLst>
   <p:txStyles>
     <p:titleStyle>
@@ -3336,7 +3360,7 @@
           <p:cNvPr id="7" name="">
             <a:extLst xmlns:a="http://schemas.openxmlformats.org/drawingml/2006/main">
               <a:ext uri="{FF2B5EF4-FFF2-40B4-BE49-F238E27FC236}">
-                <a16:creationId xmlns:a16="http://schemas.microsoft.com/office/drawing/2014/main" id="{41447E2A-BD34-4234-B648-8DD32AB33AD3}"/>
+                <a16:creationId xmlns:a16="http://schemas.microsoft.com/office/drawing/2014/main" id="{7803F117-FB4F-41BB-88EC-F216E1374F89}"/>
               </a:ext>
             </a:extLst>
           </p:cNvPr>
@@ -3346,7 +3370,7 @@
           <p:nvPr/>
         </p:nvPicPr>
         <p:blipFill>
-          <a:blip xmlns:r="http://schemas.openxmlformats.org/officeDocument/2006/relationships" xmlns:a="http://schemas.openxmlformats.org/drawingml/2006/main" r:embed="R47a163051683434f"/>
+          <a:blip xmlns:r="http://schemas.openxmlformats.org/officeDocument/2006/relationships" xmlns:a="http://schemas.openxmlformats.org/drawingml/2006/main" r:embed="R8d1bf92740da4f39"/>
           <a:stretch xmlns:a="http://schemas.openxmlformats.org/drawingml/2006/main"/>
         </p:blipFill>
         <p:spPr>
@@ -3364,7 +3388,7 @@
           <p:cNvPr id="2" name="">
             <a:extLst xmlns:a="http://schemas.openxmlformats.org/drawingml/2006/main">
               <a:ext uri="{FF2B5EF4-FFF2-40B4-BE49-F238E27FC236}">
-                <a16:creationId xmlns:a16="http://schemas.microsoft.com/office/drawing/2014/main" id="{CE7B3210-A2BD-4A08-AD99-8B7544ED3EFF}"/>
+                <a16:creationId xmlns:a16="http://schemas.microsoft.com/office/drawing/2014/main" id="{AAA83703-9E42-40EF-B447-E363702170F0}"/>
               </a:ext>
             </a:extLst>
           </p:cNvPr>
@@ -3433,7 +3457,7 @@
           <p:cNvPr id="3" name="">
             <a:extLst xmlns:a="http://schemas.openxmlformats.org/drawingml/2006/main">
               <a:ext uri="{FF2B5EF4-FFF2-40B4-BE49-F238E27FC236}">
-                <a16:creationId xmlns:a16="http://schemas.microsoft.com/office/drawing/2014/main" id="{FB0029A7-A8DB-4088-A41A-8F7173791542}"/>
+                <a16:creationId xmlns:a16="http://schemas.microsoft.com/office/drawing/2014/main" id="{CC934BD5-1681-4A98-BC02-97A60A127340}"/>
               </a:ext>
             </a:extLst>
           </p:cNvPr>
@@ -3502,7 +3526,7 @@
           <p:cNvPr id="4" name="">
             <a:extLst xmlns:a="http://schemas.openxmlformats.org/drawingml/2006/main">
               <a:ext uri="{FF2B5EF4-FFF2-40B4-BE49-F238E27FC236}">
-                <a16:creationId xmlns:a16="http://schemas.microsoft.com/office/drawing/2014/main" id="{4C995206-7948-4D52-BEB1-5A358BD4839C}"/>
+                <a16:creationId xmlns:a16="http://schemas.microsoft.com/office/drawing/2014/main" id="{3769B8AC-9181-4849-B744-A9F89E03D301}"/>
               </a:ext>
             </a:extLst>
           </p:cNvPr>
@@ -3533,7 +3557,7 @@
           <p:cNvPr id="5" name="">
             <a:extLst xmlns:a="http://schemas.openxmlformats.org/drawingml/2006/main">
               <a:ext uri="{FF2B5EF4-FFF2-40B4-BE49-F238E27FC236}">
-                <a16:creationId xmlns:a16="http://schemas.microsoft.com/office/drawing/2014/main" id="{27598159-8E5F-4479-A90D-23CB897E27FB}"/>
+                <a16:creationId xmlns:a16="http://schemas.microsoft.com/office/drawing/2014/main" id="{F44584E7-6E51-4A37-AD76-9DDF126D8DFE}"/>
               </a:ext>
             </a:extLst>
           </p:cNvPr>
@@ -3602,7 +3626,7 @@
           <p:cNvPr id="6" name="">
             <a:extLst xmlns:a="http://schemas.openxmlformats.org/drawingml/2006/main">
               <a:ext uri="{FF2B5EF4-FFF2-40B4-BE49-F238E27FC236}">
-                <a16:creationId xmlns:a16="http://schemas.microsoft.com/office/drawing/2014/main" id="{2B4777DE-E874-4CB3-9A81-E9B175F21C8C}"/>
+                <a16:creationId xmlns:a16="http://schemas.microsoft.com/office/drawing/2014/main" id="{5CA4C4E8-F0AD-4BFD-94D0-CBDEF1D3806D}"/>
               </a:ext>
             </a:extLst>
           </p:cNvPr>
@@ -3669,7 +3693,7 @@
     </p:spTree>
     <p:extLst>
       <p:ext uri="{BB962C8B-B14F-4D97-AF65-F5344CB8AC3E}">
-        <p14:creationId xmlns:p14="http://schemas.microsoft.com/office/powerpoint/2010/main" val="834215799"/>
+        <p14:creationId xmlns:p14="http://schemas.microsoft.com/office/powerpoint/2010/main" val="1264910561"/>
       </p:ext>
     </p:extLst>
   </p:cSld>
@@ -3697,10 +3721,79 @@
       </p:grpSpPr>
       <p:sp>
         <p:nvSpPr>
-          <p:cNvPr id="8" name="slide-title">
+          <p:cNvPr id="9" name="">
             <a:extLst xmlns:a="http://schemas.openxmlformats.org/drawingml/2006/main">
               <a:ext uri="{FF2B5EF4-FFF2-40B4-BE49-F238E27FC236}">
-                <a16:creationId xmlns:a16="http://schemas.microsoft.com/office/drawing/2014/main" id="{CADFF864-8CBD-4879-AC33-4336B4973314}"/>
+                <a16:creationId xmlns:a16="http://schemas.microsoft.com/office/drawing/2014/main" id="{F8AF45CF-EDC7-4926-B9AE-0C3281756219}"/>
+              </a:ext>
+            </a:extLst>
+          </p:cNvPr>
+          <p:cNvSpPr>
+            <a:spLocks xmlns:a="http://schemas.openxmlformats.org/drawingml/2006/main" noGrp="1"/>
+          </p:cNvSpPr>
+          <p:nvPr/>
+        </p:nvSpPr>
+        <p:spPr>
+          <a:xfrm xmlns:a="http://schemas.openxmlformats.org/drawingml/2006/main">
+            <a:off x="9906000" y="552450"/>
+            <a:ext cx="1600200" cy="228600"/>
+          </a:xfrm>
+          <a:prstGeom xmlns:a="http://schemas.openxmlformats.org/drawingml/2006/main" prst="rect">
+            <a:avLst/>
+          </a:prstGeom>
+          <a:noFill xmlns:a="http://schemas.openxmlformats.org/drawingml/2006/main"/>
+          <a:ln xmlns:a="http://schemas.openxmlformats.org/drawingml/2006/main" w="0">
+            <a:noFill/>
+            <a:prstDash val="solid"/>
+          </a:ln>
+        </p:spPr>
+        <p:txBody>
+          <a:bodyPr xmlns:a="http://schemas.openxmlformats.org/drawingml/2006/main">
+            <a:noAutofit/>
+          </a:bodyPr>
+          <a:lstStyle xmlns:a="http://schemas.openxmlformats.org/drawingml/2006/main">
+            <a:defPPr>
+              <a:defRPr sz="975" b="0">
+                <a:solidFill>
+                  <a:srgbClr val="8A94A3"/>
+                </a:solidFill>
+                <a:latin typeface="Arial"/>
+                <a:ea typeface="Arial"/>
+                <a:cs typeface="Arial"/>
+              </a:defRPr>
+            </a:defPPr>
+          </a:lstStyle>
+          <a:p xmlns:a="http://schemas.openxmlformats.org/drawingml/2006/main">
+            <a:pPr>
+              <a:defRPr sz="975" b="0">
+                <a:solidFill>
+                  <a:srgbClr val="8A94A3"/>
+                </a:solidFill>
+                <a:latin typeface="Arial"/>
+                <a:ea typeface="Arial"/>
+                <a:cs typeface="Arial"/>
+              </a:defRPr>
+            </a:pPr>
+            <a:r>
+              <a:rPr sz="975" b="0">
+                <a:solidFill>
+                  <a:srgbClr val="8A94A3"/>
+                </a:solidFill>
+                <a:latin typeface="Arial"/>
+                <a:ea typeface="Arial"/>
+                <a:cs typeface="Arial"/>
+              </a:rPr>
+              <a:t>10 / 10</a:t>
+            </a:r>
+          </a:p>
+        </p:txBody>
+      </p:sp>
+      <p:sp>
+        <p:nvSpPr>
+          <p:cNvPr id="2" name="slide-title">
+            <a:extLst xmlns:a="http://schemas.openxmlformats.org/drawingml/2006/main">
+              <a:ext uri="{FF2B5EF4-FFF2-40B4-BE49-F238E27FC236}">
+                <a16:creationId xmlns:a16="http://schemas.microsoft.com/office/drawing/2014/main" id="{2BF4B391-A78D-41E4-A0DB-F98D891239A5}"/>
               </a:ext>
             </a:extLst>
           </p:cNvPr>
@@ -3766,10 +3859,10 @@
       </p:sp>
       <p:sp>
         <p:nvSpPr>
-          <p:cNvPr id="2" name="slide-lead">
+          <p:cNvPr id="3" name="slide-lead">
             <a:extLst xmlns:a="http://schemas.openxmlformats.org/drawingml/2006/main">
               <a:ext uri="{FF2B5EF4-FFF2-40B4-BE49-F238E27FC236}">
-                <a16:creationId xmlns:a16="http://schemas.microsoft.com/office/drawing/2014/main" id="{9EAD16F7-0BBA-474B-9938-AD2D017AE82F}"/>
+                <a16:creationId xmlns:a16="http://schemas.microsoft.com/office/drawing/2014/main" id="{50B1C235-FD64-45D3-9A98-A4BA5D8337BB}"/>
               </a:ext>
             </a:extLst>
           </p:cNvPr>
@@ -3835,10 +3928,10 @@
       </p:sp>
       <p:sp>
         <p:nvSpPr>
-          <p:cNvPr id="3" name="title-rule">
+          <p:cNvPr id="4" name="title-rule">
             <a:extLst xmlns:a="http://schemas.openxmlformats.org/drawingml/2006/main">
               <a:ext uri="{FF2B5EF4-FFF2-40B4-BE49-F238E27FC236}">
-                <a16:creationId xmlns:a16="http://schemas.microsoft.com/office/drawing/2014/main" id="{D285418A-22D7-411D-BCF8-F6C46E157555}"/>
+                <a16:creationId xmlns:a16="http://schemas.microsoft.com/office/drawing/2014/main" id="{EB323F36-9912-4A32-9227-AA40A9CC7D81}"/>
               </a:ext>
             </a:extLst>
           </p:cNvPr>
@@ -3866,10 +3959,10 @@
       </p:sp>
       <p:sp>
         <p:nvSpPr>
-          <p:cNvPr id="4" name="">
+          <p:cNvPr id="5" name="">
             <a:extLst xmlns:a="http://schemas.openxmlformats.org/drawingml/2006/main">
               <a:ext uri="{FF2B5EF4-FFF2-40B4-BE49-F238E27FC236}">
-                <a16:creationId xmlns:a16="http://schemas.microsoft.com/office/drawing/2014/main" id="{8738FD18-F3E5-4B18-9D5E-679078B0B2C1}"/>
+                <a16:creationId xmlns:a16="http://schemas.microsoft.com/office/drawing/2014/main" id="{6E75C2A9-200D-4D84-8EF5-6AEABFD4412B}"/>
               </a:ext>
             </a:extLst>
           </p:cNvPr>
@@ -3935,10 +4028,10 @@
       </p:sp>
       <p:sp>
         <p:nvSpPr>
-          <p:cNvPr id="5" name="">
+          <p:cNvPr id="6" name="">
             <a:extLst xmlns:a="http://schemas.openxmlformats.org/drawingml/2006/main">
               <a:ext uri="{FF2B5EF4-FFF2-40B4-BE49-F238E27FC236}">
-                <a16:creationId xmlns:a16="http://schemas.microsoft.com/office/drawing/2014/main" id="{9CFB7D00-7236-422E-9E6A-D31211A75ED3}"/>
+                <a16:creationId xmlns:a16="http://schemas.microsoft.com/office/drawing/2014/main" id="{000F5FC2-F6FB-4D25-826A-578868629B0B}"/>
               </a:ext>
             </a:extLst>
           </p:cNvPr>
@@ -4089,10 +4182,10 @@
       </p:sp>
       <p:sp>
         <p:nvSpPr>
-          <p:cNvPr id="6" name="">
+          <p:cNvPr id="7" name="">
             <a:extLst xmlns:a="http://schemas.openxmlformats.org/drawingml/2006/main">
               <a:ext uri="{FF2B5EF4-FFF2-40B4-BE49-F238E27FC236}">
-                <a16:creationId xmlns:a16="http://schemas.microsoft.com/office/drawing/2014/main" id="{C1E6D0D4-AF7E-4141-B6AF-5DFBACBDD992}"/>
+                <a16:creationId xmlns:a16="http://schemas.microsoft.com/office/drawing/2014/main" id="{8558097C-894A-4FF6-B051-E73CF0CC9208}"/>
               </a:ext>
             </a:extLst>
           </p:cNvPr>
@@ -4158,10 +4251,10 @@
       </p:sp>
       <p:sp>
         <p:nvSpPr>
-          <p:cNvPr id="7" name="">
+          <p:cNvPr id="8" name="">
             <a:extLst xmlns:a="http://schemas.openxmlformats.org/drawingml/2006/main">
               <a:ext uri="{FF2B5EF4-FFF2-40B4-BE49-F238E27FC236}">
-                <a16:creationId xmlns:a16="http://schemas.microsoft.com/office/drawing/2014/main" id="{B52F5FF0-BD49-4B6B-B16D-C349AE52EFC1}"/>
+                <a16:creationId xmlns:a16="http://schemas.microsoft.com/office/drawing/2014/main" id="{73ECEDF0-D229-4090-8EF4-AA225934C51B}"/>
               </a:ext>
             </a:extLst>
           </p:cNvPr>
@@ -4313,7 +4406,7 @@
     </p:spTree>
     <p:extLst>
       <p:ext uri="{BB962C8B-B14F-4D97-AF65-F5344CB8AC3E}">
-        <p14:creationId xmlns:p14="http://schemas.microsoft.com/office/powerpoint/2010/main" val="57701514"/>
+        <p14:creationId xmlns:p14="http://schemas.microsoft.com/office/powerpoint/2010/main" val="274963172"/>
       </p:ext>
     </p:extLst>
   </p:cSld>
@@ -4341,10 +4434,79 @@
       </p:grpSpPr>
       <p:sp>
         <p:nvSpPr>
-          <p:cNvPr id="6" name="slide-title">
+          <p:cNvPr id="7" name="">
             <a:extLst xmlns:a="http://schemas.openxmlformats.org/drawingml/2006/main">
               <a:ext uri="{FF2B5EF4-FFF2-40B4-BE49-F238E27FC236}">
-                <a16:creationId xmlns:a16="http://schemas.microsoft.com/office/drawing/2014/main" id="{2882AC03-698C-4472-8D93-5D600C3B2B5D}"/>
+                <a16:creationId xmlns:a16="http://schemas.microsoft.com/office/drawing/2014/main" id="{63D70C23-E566-4375-B664-6286F851F721}"/>
+              </a:ext>
+            </a:extLst>
+          </p:cNvPr>
+          <p:cNvSpPr>
+            <a:spLocks xmlns:a="http://schemas.openxmlformats.org/drawingml/2006/main" noGrp="1"/>
+          </p:cNvSpPr>
+          <p:nvPr/>
+        </p:nvSpPr>
+        <p:spPr>
+          <a:xfrm xmlns:a="http://schemas.openxmlformats.org/drawingml/2006/main">
+            <a:off x="9906000" y="552450"/>
+            <a:ext cx="1600200" cy="228600"/>
+          </a:xfrm>
+          <a:prstGeom xmlns:a="http://schemas.openxmlformats.org/drawingml/2006/main" prst="rect">
+            <a:avLst/>
+          </a:prstGeom>
+          <a:noFill xmlns:a="http://schemas.openxmlformats.org/drawingml/2006/main"/>
+          <a:ln xmlns:a="http://schemas.openxmlformats.org/drawingml/2006/main" w="0">
+            <a:noFill/>
+            <a:prstDash val="solid"/>
+          </a:ln>
+        </p:spPr>
+        <p:txBody>
+          <a:bodyPr xmlns:a="http://schemas.openxmlformats.org/drawingml/2006/main">
+            <a:noAutofit/>
+          </a:bodyPr>
+          <a:lstStyle xmlns:a="http://schemas.openxmlformats.org/drawingml/2006/main">
+            <a:defPPr>
+              <a:defRPr sz="975" b="0">
+                <a:solidFill>
+                  <a:srgbClr val="8A94A3"/>
+                </a:solidFill>
+                <a:latin typeface="Arial"/>
+                <a:ea typeface="Arial"/>
+                <a:cs typeface="Arial"/>
+              </a:defRPr>
+            </a:defPPr>
+          </a:lstStyle>
+          <a:p xmlns:a="http://schemas.openxmlformats.org/drawingml/2006/main">
+            <a:pPr>
+              <a:defRPr sz="975" b="0">
+                <a:solidFill>
+                  <a:srgbClr val="8A94A3"/>
+                </a:solidFill>
+                <a:latin typeface="Arial"/>
+                <a:ea typeface="Arial"/>
+                <a:cs typeface="Arial"/>
+              </a:defRPr>
+            </a:pPr>
+            <a:r>
+              <a:rPr sz="975" b="0">
+                <a:solidFill>
+                  <a:srgbClr val="8A94A3"/>
+                </a:solidFill>
+                <a:latin typeface="Arial"/>
+                <a:ea typeface="Arial"/>
+                <a:cs typeface="Arial"/>
+              </a:rPr>
+              <a:t>2 / 10</a:t>
+            </a:r>
+          </a:p>
+        </p:txBody>
+      </p:sp>
+      <p:sp>
+        <p:nvSpPr>
+          <p:cNvPr id="2" name="slide-title">
+            <a:extLst xmlns:a="http://schemas.openxmlformats.org/drawingml/2006/main">
+              <a:ext uri="{FF2B5EF4-FFF2-40B4-BE49-F238E27FC236}">
+                <a16:creationId xmlns:a16="http://schemas.microsoft.com/office/drawing/2014/main" id="{9E25F9E3-2EDF-4D51-B038-48DAA0957551}"/>
               </a:ext>
             </a:extLst>
           </p:cNvPr>
@@ -4410,10 +4572,10 @@
       </p:sp>
       <p:sp>
         <p:nvSpPr>
-          <p:cNvPr id="2" name="slide-lead">
+          <p:cNvPr id="3" name="slide-lead">
             <a:extLst xmlns:a="http://schemas.openxmlformats.org/drawingml/2006/main">
               <a:ext uri="{FF2B5EF4-FFF2-40B4-BE49-F238E27FC236}">
-                <a16:creationId xmlns:a16="http://schemas.microsoft.com/office/drawing/2014/main" id="{CE6CB539-B0F3-4315-A8CA-6F5EE1B5C946}"/>
+                <a16:creationId xmlns:a16="http://schemas.microsoft.com/office/drawing/2014/main" id="{5B01DF31-4490-4071-8D2C-B4EBFD68D626}"/>
               </a:ext>
             </a:extLst>
           </p:cNvPr>
@@ -4479,10 +4641,10 @@
       </p:sp>
       <p:sp>
         <p:nvSpPr>
-          <p:cNvPr id="3" name="title-rule">
+          <p:cNvPr id="4" name="title-rule">
             <a:extLst xmlns:a="http://schemas.openxmlformats.org/drawingml/2006/main">
               <a:ext uri="{FF2B5EF4-FFF2-40B4-BE49-F238E27FC236}">
-                <a16:creationId xmlns:a16="http://schemas.microsoft.com/office/drawing/2014/main" id="{B596F400-1A12-4ED6-8D0D-8FEBBEA7FFF1}"/>
+                <a16:creationId xmlns:a16="http://schemas.microsoft.com/office/drawing/2014/main" id="{ACD38377-596C-432D-A905-5B93B3278BC7}"/>
               </a:ext>
             </a:extLst>
           </p:cNvPr>
@@ -4510,10 +4672,10 @@
       </p:sp>
       <p:sp>
         <p:nvSpPr>
-          <p:cNvPr id="4" name="">
+          <p:cNvPr id="5" name="">
             <a:extLst xmlns:a="http://schemas.openxmlformats.org/drawingml/2006/main">
               <a:ext uri="{FF2B5EF4-FFF2-40B4-BE49-F238E27FC236}">
-                <a16:creationId xmlns:a16="http://schemas.microsoft.com/office/drawing/2014/main" id="{7D85989B-8D50-4804-B073-CBC4C44A457D}"/>
+                <a16:creationId xmlns:a16="http://schemas.microsoft.com/office/drawing/2014/main" id="{3546BCD1-5B5C-4D5C-89DB-78249666581D}"/>
               </a:ext>
             </a:extLst>
           </p:cNvPr>
@@ -4664,10 +4826,10 @@
       </p:sp>
       <p:sp>
         <p:nvSpPr>
-          <p:cNvPr id="5" name="">
+          <p:cNvPr id="6" name="">
             <a:extLst xmlns:a="http://schemas.openxmlformats.org/drawingml/2006/main">
               <a:ext uri="{FF2B5EF4-FFF2-40B4-BE49-F238E27FC236}">
-                <a16:creationId xmlns:a16="http://schemas.microsoft.com/office/drawing/2014/main" id="{9AE03512-EC11-4C07-BD87-0455613D3EBD}"/>
+                <a16:creationId xmlns:a16="http://schemas.microsoft.com/office/drawing/2014/main" id="{F39F343D-DB46-4530-B879-5D447E75EAAD}"/>
               </a:ext>
             </a:extLst>
           </p:cNvPr>
@@ -4734,7 +4896,7 @@
     </p:spTree>
     <p:extLst>
       <p:ext uri="{BB962C8B-B14F-4D97-AF65-F5344CB8AC3E}">
-        <p14:creationId xmlns:p14="http://schemas.microsoft.com/office/powerpoint/2010/main" val="1671226012"/>
+        <p14:creationId xmlns:p14="http://schemas.microsoft.com/office/powerpoint/2010/main" val="771386058"/>
       </p:ext>
     </p:extLst>
   </p:cSld>
@@ -4762,10 +4924,79 @@
       </p:grpSpPr>
       <p:sp>
         <p:nvSpPr>
-          <p:cNvPr id="6" name="slide-title">
+          <p:cNvPr id="7" name="">
             <a:extLst xmlns:a="http://schemas.openxmlformats.org/drawingml/2006/main">
               <a:ext uri="{FF2B5EF4-FFF2-40B4-BE49-F238E27FC236}">
-                <a16:creationId xmlns:a16="http://schemas.microsoft.com/office/drawing/2014/main" id="{89B539FD-7431-4107-BB92-624EEE617605}"/>
+                <a16:creationId xmlns:a16="http://schemas.microsoft.com/office/drawing/2014/main" id="{9DF8445D-6FAA-451F-9782-742EC9904EFD}"/>
+              </a:ext>
+            </a:extLst>
+          </p:cNvPr>
+          <p:cNvSpPr>
+            <a:spLocks xmlns:a="http://schemas.openxmlformats.org/drawingml/2006/main" noGrp="1"/>
+          </p:cNvSpPr>
+          <p:nvPr/>
+        </p:nvSpPr>
+        <p:spPr>
+          <a:xfrm xmlns:a="http://schemas.openxmlformats.org/drawingml/2006/main">
+            <a:off x="9906000" y="552450"/>
+            <a:ext cx="1600200" cy="228600"/>
+          </a:xfrm>
+          <a:prstGeom xmlns:a="http://schemas.openxmlformats.org/drawingml/2006/main" prst="rect">
+            <a:avLst/>
+          </a:prstGeom>
+          <a:noFill xmlns:a="http://schemas.openxmlformats.org/drawingml/2006/main"/>
+          <a:ln xmlns:a="http://schemas.openxmlformats.org/drawingml/2006/main" w="0">
+            <a:noFill/>
+            <a:prstDash val="solid"/>
+          </a:ln>
+        </p:spPr>
+        <p:txBody>
+          <a:bodyPr xmlns:a="http://schemas.openxmlformats.org/drawingml/2006/main">
+            <a:noAutofit/>
+          </a:bodyPr>
+          <a:lstStyle xmlns:a="http://schemas.openxmlformats.org/drawingml/2006/main">
+            <a:defPPr>
+              <a:defRPr sz="975" b="0">
+                <a:solidFill>
+                  <a:srgbClr val="8A94A3"/>
+                </a:solidFill>
+                <a:latin typeface="Arial"/>
+                <a:ea typeface="Arial"/>
+                <a:cs typeface="Arial"/>
+              </a:defRPr>
+            </a:defPPr>
+          </a:lstStyle>
+          <a:p xmlns:a="http://schemas.openxmlformats.org/drawingml/2006/main">
+            <a:pPr>
+              <a:defRPr sz="975" b="0">
+                <a:solidFill>
+                  <a:srgbClr val="8A94A3"/>
+                </a:solidFill>
+                <a:latin typeface="Arial"/>
+                <a:ea typeface="Arial"/>
+                <a:cs typeface="Arial"/>
+              </a:defRPr>
+            </a:pPr>
+            <a:r>
+              <a:rPr sz="975" b="0">
+                <a:solidFill>
+                  <a:srgbClr val="8A94A3"/>
+                </a:solidFill>
+                <a:latin typeface="Arial"/>
+                <a:ea typeface="Arial"/>
+                <a:cs typeface="Arial"/>
+              </a:rPr>
+              <a:t>3 / 10</a:t>
+            </a:r>
+          </a:p>
+        </p:txBody>
+      </p:sp>
+      <p:sp>
+        <p:nvSpPr>
+          <p:cNvPr id="2" name="slide-title">
+            <a:extLst xmlns:a="http://schemas.openxmlformats.org/drawingml/2006/main">
+              <a:ext uri="{FF2B5EF4-FFF2-40B4-BE49-F238E27FC236}">
+                <a16:creationId xmlns:a16="http://schemas.microsoft.com/office/drawing/2014/main" id="{E511E956-74AF-4CDE-9C2F-FDC489DB4B88}"/>
               </a:ext>
             </a:extLst>
           </p:cNvPr>
@@ -4831,10 +5062,10 @@
       </p:sp>
       <p:sp>
         <p:nvSpPr>
-          <p:cNvPr id="2" name="slide-lead">
+          <p:cNvPr id="3" name="slide-lead">
             <a:extLst xmlns:a="http://schemas.openxmlformats.org/drawingml/2006/main">
               <a:ext uri="{FF2B5EF4-FFF2-40B4-BE49-F238E27FC236}">
-                <a16:creationId xmlns:a16="http://schemas.microsoft.com/office/drawing/2014/main" id="{CD6605DF-128D-49E8-88F3-D0A582778D0F}"/>
+                <a16:creationId xmlns:a16="http://schemas.microsoft.com/office/drawing/2014/main" id="{CB8BC447-188B-498F-BB4E-A915A1948468}"/>
               </a:ext>
             </a:extLst>
           </p:cNvPr>
@@ -4900,10 +5131,10 @@
       </p:sp>
       <p:sp>
         <p:nvSpPr>
-          <p:cNvPr id="3" name="title-rule">
+          <p:cNvPr id="4" name="title-rule">
             <a:extLst xmlns:a="http://schemas.openxmlformats.org/drawingml/2006/main">
               <a:ext uri="{FF2B5EF4-FFF2-40B4-BE49-F238E27FC236}">
-                <a16:creationId xmlns:a16="http://schemas.microsoft.com/office/drawing/2014/main" id="{AB3E182A-CDD8-4396-8B47-EB897C79AFC2}"/>
+                <a16:creationId xmlns:a16="http://schemas.microsoft.com/office/drawing/2014/main" id="{34FCDC96-0E22-4954-9D24-00F729E82C40}"/>
               </a:ext>
             </a:extLst>
           </p:cNvPr>
@@ -4931,10 +5162,10 @@
       </p:sp>
       <p:graphicFrame>
         <p:nvGraphicFramePr>
-          <p:cNvPr id="4" name="">
+          <p:cNvPr id="5" name="">
             <a:extLst xmlns:a="http://schemas.openxmlformats.org/drawingml/2006/main">
               <a:ext uri="{FF2B5EF4-FFF2-40B4-BE49-F238E27FC236}">
-                <a16:creationId xmlns:a16="http://schemas.microsoft.com/office/drawing/2014/main" id="{75EA5F0A-CDEC-44E8-87C5-BD460CC80888}"/>
+                <a16:creationId xmlns:a16="http://schemas.microsoft.com/office/drawing/2014/main" id="{561290B9-0CD4-4AB4-B52D-5F443F706E4A}"/>
               </a:ext>
             </a:extLst>
           </p:cNvPr>
@@ -5448,10 +5679,10 @@
       </p:graphicFrame>
       <p:sp>
         <p:nvSpPr>
-          <p:cNvPr id="5" name="">
+          <p:cNvPr id="6" name="">
             <a:extLst xmlns:a="http://schemas.openxmlformats.org/drawingml/2006/main">
               <a:ext uri="{FF2B5EF4-FFF2-40B4-BE49-F238E27FC236}">
-                <a16:creationId xmlns:a16="http://schemas.microsoft.com/office/drawing/2014/main" id="{BFF87692-A083-4727-9349-A09FA3A57CF4}"/>
+                <a16:creationId xmlns:a16="http://schemas.microsoft.com/office/drawing/2014/main" id="{ED5B225C-46B1-407A-87A7-26F3718DD430}"/>
               </a:ext>
             </a:extLst>
           </p:cNvPr>
@@ -5518,7 +5749,7 @@
     </p:spTree>
     <p:extLst>
       <p:ext uri="{BB962C8B-B14F-4D97-AF65-F5344CB8AC3E}">
-        <p14:creationId xmlns:p14="http://schemas.microsoft.com/office/powerpoint/2010/main" val="1867080313"/>
+        <p14:creationId xmlns:p14="http://schemas.microsoft.com/office/powerpoint/2010/main" val="620210820"/>
       </p:ext>
     </p:extLst>
   </p:cSld>
@@ -5546,10 +5777,79 @@
       </p:grpSpPr>
       <p:sp>
         <p:nvSpPr>
-          <p:cNvPr id="28" name="slide-title">
+          <p:cNvPr id="29" name="">
             <a:extLst xmlns:a="http://schemas.openxmlformats.org/drawingml/2006/main">
               <a:ext uri="{FF2B5EF4-FFF2-40B4-BE49-F238E27FC236}">
-                <a16:creationId xmlns:a16="http://schemas.microsoft.com/office/drawing/2014/main" id="{77B17EB2-686C-4965-BDF3-45053624BD11}"/>
+                <a16:creationId xmlns:a16="http://schemas.microsoft.com/office/drawing/2014/main" id="{DC6E6878-76FD-4449-8972-CABA218221CF}"/>
+              </a:ext>
+            </a:extLst>
+          </p:cNvPr>
+          <p:cNvSpPr>
+            <a:spLocks xmlns:a="http://schemas.openxmlformats.org/drawingml/2006/main" noGrp="1"/>
+          </p:cNvSpPr>
+          <p:nvPr/>
+        </p:nvSpPr>
+        <p:spPr>
+          <a:xfrm xmlns:a="http://schemas.openxmlformats.org/drawingml/2006/main">
+            <a:off x="9906000" y="552450"/>
+            <a:ext cx="1600200" cy="228600"/>
+          </a:xfrm>
+          <a:prstGeom xmlns:a="http://schemas.openxmlformats.org/drawingml/2006/main" prst="rect">
+            <a:avLst/>
+          </a:prstGeom>
+          <a:noFill xmlns:a="http://schemas.openxmlformats.org/drawingml/2006/main"/>
+          <a:ln xmlns:a="http://schemas.openxmlformats.org/drawingml/2006/main" w="0">
+            <a:noFill/>
+            <a:prstDash val="solid"/>
+          </a:ln>
+        </p:spPr>
+        <p:txBody>
+          <a:bodyPr xmlns:a="http://schemas.openxmlformats.org/drawingml/2006/main">
+            <a:noAutofit/>
+          </a:bodyPr>
+          <a:lstStyle xmlns:a="http://schemas.openxmlformats.org/drawingml/2006/main">
+            <a:defPPr>
+              <a:defRPr sz="975" b="0">
+                <a:solidFill>
+                  <a:srgbClr val="8A94A3"/>
+                </a:solidFill>
+                <a:latin typeface="Arial"/>
+                <a:ea typeface="Arial"/>
+                <a:cs typeface="Arial"/>
+              </a:defRPr>
+            </a:defPPr>
+          </a:lstStyle>
+          <a:p xmlns:a="http://schemas.openxmlformats.org/drawingml/2006/main">
+            <a:pPr>
+              <a:defRPr sz="975" b="0">
+                <a:solidFill>
+                  <a:srgbClr val="8A94A3"/>
+                </a:solidFill>
+                <a:latin typeface="Arial"/>
+                <a:ea typeface="Arial"/>
+                <a:cs typeface="Arial"/>
+              </a:defRPr>
+            </a:pPr>
+            <a:r>
+              <a:rPr sz="975" b="0">
+                <a:solidFill>
+                  <a:srgbClr val="8A94A3"/>
+                </a:solidFill>
+                <a:latin typeface="Arial"/>
+                <a:ea typeface="Arial"/>
+                <a:cs typeface="Arial"/>
+              </a:rPr>
+              <a:t>4 / 10</a:t>
+            </a:r>
+          </a:p>
+        </p:txBody>
+      </p:sp>
+      <p:sp>
+        <p:nvSpPr>
+          <p:cNvPr id="2" name="slide-title">
+            <a:extLst xmlns:a="http://schemas.openxmlformats.org/drawingml/2006/main">
+              <a:ext uri="{FF2B5EF4-FFF2-40B4-BE49-F238E27FC236}">
+                <a16:creationId xmlns:a16="http://schemas.microsoft.com/office/drawing/2014/main" id="{801E302E-187A-447A-86CD-1B1A8F453873}"/>
               </a:ext>
             </a:extLst>
           </p:cNvPr>
@@ -5615,10 +5915,10 @@
       </p:sp>
       <p:sp>
         <p:nvSpPr>
-          <p:cNvPr id="2" name="slide-lead">
+          <p:cNvPr id="3" name="slide-lead">
             <a:extLst xmlns:a="http://schemas.openxmlformats.org/drawingml/2006/main">
               <a:ext uri="{FF2B5EF4-FFF2-40B4-BE49-F238E27FC236}">
-                <a16:creationId xmlns:a16="http://schemas.microsoft.com/office/drawing/2014/main" id="{B7DD30C3-6D61-4AB3-A058-AD336764662E}"/>
+                <a16:creationId xmlns:a16="http://schemas.microsoft.com/office/drawing/2014/main" id="{8C07C81E-D83A-4032-90DE-1CC35CFBD585}"/>
               </a:ext>
             </a:extLst>
           </p:cNvPr>
@@ -5684,10 +5984,10 @@
       </p:sp>
       <p:sp>
         <p:nvSpPr>
-          <p:cNvPr id="3" name="title-rule">
+          <p:cNvPr id="4" name="title-rule">
             <a:extLst xmlns:a="http://schemas.openxmlformats.org/drawingml/2006/main">
               <a:ext uri="{FF2B5EF4-FFF2-40B4-BE49-F238E27FC236}">
-                <a16:creationId xmlns:a16="http://schemas.microsoft.com/office/drawing/2014/main" id="{EB42269D-9FB1-4BA9-BC3D-93AF8AD5C064}"/>
+                <a16:creationId xmlns:a16="http://schemas.microsoft.com/office/drawing/2014/main" id="{2CF428CA-86DC-4437-889C-9B51091408B6}"/>
               </a:ext>
             </a:extLst>
           </p:cNvPr>
@@ -5715,10 +6015,10 @@
       </p:sp>
       <p:sp>
         <p:nvSpPr>
-          <p:cNvPr id="4" name="flow-Donation registered">
+          <p:cNvPr id="5" name="flow-Donation registered">
             <a:extLst xmlns:a="http://schemas.openxmlformats.org/drawingml/2006/main">
               <a:ext uri="{FF2B5EF4-FFF2-40B4-BE49-F238E27FC236}">
-                <a16:creationId xmlns:a16="http://schemas.microsoft.com/office/drawing/2014/main" id="{2E13E6CF-3809-42F3-B87D-66B9F1742892}"/>
+                <a16:creationId xmlns:a16="http://schemas.microsoft.com/office/drawing/2014/main" id="{A77193FC-A53F-4FB3-9BE1-2B556B51A6C6}"/>
               </a:ext>
             </a:extLst>
           </p:cNvPr>
@@ -5750,10 +6050,10 @@
       </p:sp>
       <p:sp>
         <p:nvSpPr>
-          <p:cNvPr id="5" name="">
+          <p:cNvPr id="6" name="">
             <a:extLst xmlns:a="http://schemas.openxmlformats.org/drawingml/2006/main">
               <a:ext uri="{FF2B5EF4-FFF2-40B4-BE49-F238E27FC236}">
-                <a16:creationId xmlns:a16="http://schemas.microsoft.com/office/drawing/2014/main" id="{E3AC78C6-6A9A-45D1-9E8F-DAB35DB5376E}"/>
+                <a16:creationId xmlns:a16="http://schemas.microsoft.com/office/drawing/2014/main" id="{9A3CCF73-472F-42E9-AAA8-AC802C331ABA}"/>
               </a:ext>
             </a:extLst>
           </p:cNvPr>
@@ -5819,10 +6119,10 @@
       </p:sp>
       <p:sp>
         <p:nvSpPr>
-          <p:cNvPr id="6" name="">
+          <p:cNvPr id="7" name="">
             <a:extLst xmlns:a="http://schemas.openxmlformats.org/drawingml/2006/main">
               <a:ext uri="{FF2B5EF4-FFF2-40B4-BE49-F238E27FC236}">
-                <a16:creationId xmlns:a16="http://schemas.microsoft.com/office/drawing/2014/main" id="{28158BB2-8F5F-4738-A105-539CFB3614BE}"/>
+                <a16:creationId xmlns:a16="http://schemas.microsoft.com/office/drawing/2014/main" id="{ECDC5B81-159B-48D0-A05C-CE31581959A0}"/>
               </a:ext>
             </a:extLst>
           </p:cNvPr>
@@ -5888,10 +6188,10 @@
       </p:sp>
       <p:sp>
         <p:nvSpPr>
-          <p:cNvPr id="7" name="">
+          <p:cNvPr id="8" name="">
             <a:extLst xmlns:a="http://schemas.openxmlformats.org/drawingml/2006/main">
               <a:ext uri="{FF2B5EF4-FFF2-40B4-BE49-F238E27FC236}">
-                <a16:creationId xmlns:a16="http://schemas.microsoft.com/office/drawing/2014/main" id="{9CA3B303-F36F-401A-B279-CC1ED34271A6}"/>
+                <a16:creationId xmlns:a16="http://schemas.microsoft.com/office/drawing/2014/main" id="{B7E7D6C0-7E71-4F1F-B0FF-3CEDD736FEDF}"/>
               </a:ext>
             </a:extLst>
           </p:cNvPr>
@@ -5919,10 +6219,10 @@
       </p:sp>
       <p:sp>
         <p:nvSpPr>
-          <p:cNvPr id="8" name="flow-Engine ranks recipients">
+          <p:cNvPr id="9" name="flow-Engine ranks recipients">
             <a:extLst xmlns:a="http://schemas.openxmlformats.org/drawingml/2006/main">
               <a:ext uri="{FF2B5EF4-FFF2-40B4-BE49-F238E27FC236}">
-                <a16:creationId xmlns:a16="http://schemas.microsoft.com/office/drawing/2014/main" id="{76FC2C93-2DA2-4B72-9D86-26B480358AB4}"/>
+                <a16:creationId xmlns:a16="http://schemas.microsoft.com/office/drawing/2014/main" id="{20CDD4A0-589F-40EE-85DC-F8F8D614074B}"/>
               </a:ext>
             </a:extLst>
           </p:cNvPr>
@@ -5954,10 +6254,10 @@
       </p:sp>
       <p:sp>
         <p:nvSpPr>
-          <p:cNvPr id="9" name="">
+          <p:cNvPr id="10" name="">
             <a:extLst xmlns:a="http://schemas.openxmlformats.org/drawingml/2006/main">
               <a:ext uri="{FF2B5EF4-FFF2-40B4-BE49-F238E27FC236}">
-                <a16:creationId xmlns:a16="http://schemas.microsoft.com/office/drawing/2014/main" id="{38110290-AA22-441D-A1AD-F91B415F3862}"/>
+                <a16:creationId xmlns:a16="http://schemas.microsoft.com/office/drawing/2014/main" id="{B3EFB688-372C-4935-8CC3-7587248D529E}"/>
               </a:ext>
             </a:extLst>
           </p:cNvPr>
@@ -6023,10 +6323,10 @@
       </p:sp>
       <p:sp>
         <p:nvSpPr>
-          <p:cNvPr id="10" name="">
+          <p:cNvPr id="11" name="">
             <a:extLst xmlns:a="http://schemas.openxmlformats.org/drawingml/2006/main">
               <a:ext uri="{FF2B5EF4-FFF2-40B4-BE49-F238E27FC236}">
-                <a16:creationId xmlns:a16="http://schemas.microsoft.com/office/drawing/2014/main" id="{3AF2E221-9F4F-4F63-A2F5-FF027A6D04C7}"/>
+                <a16:creationId xmlns:a16="http://schemas.microsoft.com/office/drawing/2014/main" id="{FFBE704D-5F84-4230-815E-53032C3C6FDD}"/>
               </a:ext>
             </a:extLst>
           </p:cNvPr>
@@ -6092,10 +6392,10 @@
       </p:sp>
       <p:sp>
         <p:nvSpPr>
-          <p:cNvPr id="11" name="">
+          <p:cNvPr id="12" name="">
             <a:extLst xmlns:a="http://schemas.openxmlformats.org/drawingml/2006/main">
               <a:ext uri="{FF2B5EF4-FFF2-40B4-BE49-F238E27FC236}">
-                <a16:creationId xmlns:a16="http://schemas.microsoft.com/office/drawing/2014/main" id="{BBD0050E-B788-4379-B455-0532795A5995}"/>
+                <a16:creationId xmlns:a16="http://schemas.microsoft.com/office/drawing/2014/main" id="{3769E8A7-A2EB-42EB-9524-639FB23791B2}"/>
               </a:ext>
             </a:extLst>
           </p:cNvPr>
@@ -6123,10 +6423,10 @@
       </p:sp>
       <p:sp>
         <p:nvSpPr>
-          <p:cNvPr id="12" name="flow-Recipient accepts">
+          <p:cNvPr id="13" name="flow-Recipient accepts">
             <a:extLst xmlns:a="http://schemas.openxmlformats.org/drawingml/2006/main">
               <a:ext uri="{FF2B5EF4-FFF2-40B4-BE49-F238E27FC236}">
-                <a16:creationId xmlns:a16="http://schemas.microsoft.com/office/drawing/2014/main" id="{1717B9D7-F36C-49D6-BF99-79FB3EA3DA70}"/>
+                <a16:creationId xmlns:a16="http://schemas.microsoft.com/office/drawing/2014/main" id="{FF0735AD-5B04-4712-8ECF-F3F90A7B54F1}"/>
               </a:ext>
             </a:extLst>
           </p:cNvPr>
@@ -6158,10 +6458,10 @@
       </p:sp>
       <p:sp>
         <p:nvSpPr>
-          <p:cNvPr id="13" name="">
+          <p:cNvPr id="14" name="">
             <a:extLst xmlns:a="http://schemas.openxmlformats.org/drawingml/2006/main">
               <a:ext uri="{FF2B5EF4-FFF2-40B4-BE49-F238E27FC236}">
-                <a16:creationId xmlns:a16="http://schemas.microsoft.com/office/drawing/2014/main" id="{E1BF04A8-0394-4627-9326-631738EE14E9}"/>
+                <a16:creationId xmlns:a16="http://schemas.microsoft.com/office/drawing/2014/main" id="{76C3600D-D088-404A-8E4D-66C1A9A65283}"/>
               </a:ext>
             </a:extLst>
           </p:cNvPr>
@@ -6227,10 +6527,10 @@
       </p:sp>
       <p:sp>
         <p:nvSpPr>
-          <p:cNvPr id="14" name="">
+          <p:cNvPr id="15" name="">
             <a:extLst xmlns:a="http://schemas.openxmlformats.org/drawingml/2006/main">
               <a:ext uri="{FF2B5EF4-FFF2-40B4-BE49-F238E27FC236}">
-                <a16:creationId xmlns:a16="http://schemas.microsoft.com/office/drawing/2014/main" id="{BE94ADEC-A521-4FAF-A7D0-8C4810D1A533}"/>
+                <a16:creationId xmlns:a16="http://schemas.microsoft.com/office/drawing/2014/main" id="{C28CD99B-63A6-4A7C-AEE4-8F0678F1B675}"/>
               </a:ext>
             </a:extLst>
           </p:cNvPr>
@@ -6296,10 +6596,10 @@
       </p:sp>
       <p:sp>
         <p:nvSpPr>
-          <p:cNvPr id="15" name="">
+          <p:cNvPr id="16" name="">
             <a:extLst xmlns:a="http://schemas.openxmlformats.org/drawingml/2006/main">
               <a:ext uri="{FF2B5EF4-FFF2-40B4-BE49-F238E27FC236}">
-                <a16:creationId xmlns:a16="http://schemas.microsoft.com/office/drawing/2014/main" id="{1E57E974-2BBA-4045-B971-7947B9002DD9}"/>
+                <a16:creationId xmlns:a16="http://schemas.microsoft.com/office/drawing/2014/main" id="{5A9E6D00-7CB2-4585-AEB3-76238A666773}"/>
               </a:ext>
             </a:extLst>
           </p:cNvPr>
@@ -6327,10 +6627,10 @@
       </p:sp>
       <p:sp>
         <p:nvSpPr>
-          <p:cNvPr id="16" name="flow-Volunteer collects">
+          <p:cNvPr id="17" name="flow-Volunteer collects">
             <a:extLst xmlns:a="http://schemas.openxmlformats.org/drawingml/2006/main">
               <a:ext uri="{FF2B5EF4-FFF2-40B4-BE49-F238E27FC236}">
-                <a16:creationId xmlns:a16="http://schemas.microsoft.com/office/drawing/2014/main" id="{A9F32C6D-4913-42C3-AB49-8A684276A5CD}"/>
+                <a16:creationId xmlns:a16="http://schemas.microsoft.com/office/drawing/2014/main" id="{68AB2616-32AB-4F17-8587-730275C8E18D}"/>
               </a:ext>
             </a:extLst>
           </p:cNvPr>
@@ -6362,10 +6662,10 @@
       </p:sp>
       <p:sp>
         <p:nvSpPr>
-          <p:cNvPr id="17" name="">
+          <p:cNvPr id="18" name="">
             <a:extLst xmlns:a="http://schemas.openxmlformats.org/drawingml/2006/main">
               <a:ext uri="{FF2B5EF4-FFF2-40B4-BE49-F238E27FC236}">
-                <a16:creationId xmlns:a16="http://schemas.microsoft.com/office/drawing/2014/main" id="{FBDA1317-37C0-44F8-BD5D-ABBE8F74EE4C}"/>
+                <a16:creationId xmlns:a16="http://schemas.microsoft.com/office/drawing/2014/main" id="{A49B4B5C-60E1-486D-9445-B279A7ACD7C5}"/>
               </a:ext>
             </a:extLst>
           </p:cNvPr>
@@ -6431,10 +6731,10 @@
       </p:sp>
       <p:sp>
         <p:nvSpPr>
-          <p:cNvPr id="18" name="">
+          <p:cNvPr id="19" name="">
             <a:extLst xmlns:a="http://schemas.openxmlformats.org/drawingml/2006/main">
               <a:ext uri="{FF2B5EF4-FFF2-40B4-BE49-F238E27FC236}">
-                <a16:creationId xmlns:a16="http://schemas.microsoft.com/office/drawing/2014/main" id="{5CF575F3-93B6-4F44-92FF-53C343B3DC48}"/>
+                <a16:creationId xmlns:a16="http://schemas.microsoft.com/office/drawing/2014/main" id="{008EA760-081A-4193-868C-F97B030E4BA2}"/>
               </a:ext>
             </a:extLst>
           </p:cNvPr>
@@ -6500,10 +6800,10 @@
       </p:sp>
       <p:sp>
         <p:nvSpPr>
-          <p:cNvPr id="19" name="">
+          <p:cNvPr id="20" name="">
             <a:extLst xmlns:a="http://schemas.openxmlformats.org/drawingml/2006/main">
               <a:ext uri="{FF2B5EF4-FFF2-40B4-BE49-F238E27FC236}">
-                <a16:creationId xmlns:a16="http://schemas.microsoft.com/office/drawing/2014/main" id="{F40E0E8F-6BB7-47AF-B022-CE771A258535}"/>
+                <a16:creationId xmlns:a16="http://schemas.microsoft.com/office/drawing/2014/main" id="{707B8AE9-CAAE-48CE-AED0-E6218783B678}"/>
               </a:ext>
             </a:extLst>
           </p:cNvPr>
@@ -6531,10 +6831,10 @@
       </p:sp>
       <p:sp>
         <p:nvSpPr>
-          <p:cNvPr id="20" name="flow-Delivered">
+          <p:cNvPr id="21" name="flow-Delivered">
             <a:extLst xmlns:a="http://schemas.openxmlformats.org/drawingml/2006/main">
               <a:ext uri="{FF2B5EF4-FFF2-40B4-BE49-F238E27FC236}">
-                <a16:creationId xmlns:a16="http://schemas.microsoft.com/office/drawing/2014/main" id="{899B436C-D69F-45B3-A3BD-98DEB15060E6}"/>
+                <a16:creationId xmlns:a16="http://schemas.microsoft.com/office/drawing/2014/main" id="{18818453-3312-4C33-9812-0727038EEAF0}"/>
               </a:ext>
             </a:extLst>
           </p:cNvPr>
@@ -6566,10 +6866,10 @@
       </p:sp>
       <p:sp>
         <p:nvSpPr>
-          <p:cNvPr id="21" name="">
+          <p:cNvPr id="22" name="">
             <a:extLst xmlns:a="http://schemas.openxmlformats.org/drawingml/2006/main">
               <a:ext uri="{FF2B5EF4-FFF2-40B4-BE49-F238E27FC236}">
-                <a16:creationId xmlns:a16="http://schemas.microsoft.com/office/drawing/2014/main" id="{651181B1-0B6B-4278-B686-9FCD0F0ED1A0}"/>
+                <a16:creationId xmlns:a16="http://schemas.microsoft.com/office/drawing/2014/main" id="{3A430D6B-CA58-4FBF-8201-8C564FCE548F}"/>
               </a:ext>
             </a:extLst>
           </p:cNvPr>
@@ -6635,10 +6935,10 @@
       </p:sp>
       <p:sp>
         <p:nvSpPr>
-          <p:cNvPr id="22" name="">
+          <p:cNvPr id="23" name="">
             <a:extLst xmlns:a="http://schemas.openxmlformats.org/drawingml/2006/main">
               <a:ext uri="{FF2B5EF4-FFF2-40B4-BE49-F238E27FC236}">
-                <a16:creationId xmlns:a16="http://schemas.microsoft.com/office/drawing/2014/main" id="{3C2EDB4F-E2DC-4B79-8695-E2A70B230352}"/>
+                <a16:creationId xmlns:a16="http://schemas.microsoft.com/office/drawing/2014/main" id="{54115679-2080-4CBE-8BDF-126ECCAFBAD5}"/>
               </a:ext>
             </a:extLst>
           </p:cNvPr>
@@ -6704,10 +7004,10 @@
       </p:sp>
       <p:sp>
         <p:nvSpPr>
-          <p:cNvPr id="23" name="">
+          <p:cNvPr id="24" name="">
             <a:extLst xmlns:a="http://schemas.openxmlformats.org/drawingml/2006/main">
               <a:ext uri="{FF2B5EF4-FFF2-40B4-BE49-F238E27FC236}">
-                <a16:creationId xmlns:a16="http://schemas.microsoft.com/office/drawing/2014/main" id="{EFAC09A6-D1CD-4C60-8B37-4CA3015E4487}"/>
+                <a16:creationId xmlns:a16="http://schemas.microsoft.com/office/drawing/2014/main" id="{23BCEA2D-E2FC-4597-9505-96554758D865}"/>
               </a:ext>
             </a:extLst>
           </p:cNvPr>
@@ -6735,10 +7035,10 @@
       </p:sp>
       <p:sp>
         <p:nvSpPr>
-          <p:cNvPr id="24" name="flow-Reports update">
+          <p:cNvPr id="25" name="flow-Reports update">
             <a:extLst xmlns:a="http://schemas.openxmlformats.org/drawingml/2006/main">
               <a:ext uri="{FF2B5EF4-FFF2-40B4-BE49-F238E27FC236}">
-                <a16:creationId xmlns:a16="http://schemas.microsoft.com/office/drawing/2014/main" id="{8B8DC02C-3EE8-4164-A851-8CBE271F5579}"/>
+                <a16:creationId xmlns:a16="http://schemas.microsoft.com/office/drawing/2014/main" id="{1E38C2D0-EA07-4CFE-83DD-C42CFEBE5C44}"/>
               </a:ext>
             </a:extLst>
           </p:cNvPr>
@@ -6770,10 +7070,10 @@
       </p:sp>
       <p:sp>
         <p:nvSpPr>
-          <p:cNvPr id="25" name="">
+          <p:cNvPr id="26" name="">
             <a:extLst xmlns:a="http://schemas.openxmlformats.org/drawingml/2006/main">
               <a:ext uri="{FF2B5EF4-FFF2-40B4-BE49-F238E27FC236}">
-                <a16:creationId xmlns:a16="http://schemas.microsoft.com/office/drawing/2014/main" id="{6E33F6C2-E545-43B5-8C4E-5AD08AD28F3B}"/>
+                <a16:creationId xmlns:a16="http://schemas.microsoft.com/office/drawing/2014/main" id="{8D44B3B8-5B79-4FA4-B5B0-3F0F3B1F2935}"/>
               </a:ext>
             </a:extLst>
           </p:cNvPr>
@@ -6839,10 +7139,10 @@
       </p:sp>
       <p:sp>
         <p:nvSpPr>
-          <p:cNvPr id="26" name="">
+          <p:cNvPr id="27" name="">
             <a:extLst xmlns:a="http://schemas.openxmlformats.org/drawingml/2006/main">
               <a:ext uri="{FF2B5EF4-FFF2-40B4-BE49-F238E27FC236}">
-                <a16:creationId xmlns:a16="http://schemas.microsoft.com/office/drawing/2014/main" id="{8F0E12FC-270B-4316-BB06-AED34602B9EC}"/>
+                <a16:creationId xmlns:a16="http://schemas.microsoft.com/office/drawing/2014/main" id="{B33D5A3F-E2AB-4A7D-B963-3B6114EB06CE}"/>
               </a:ext>
             </a:extLst>
           </p:cNvPr>
@@ -6908,10 +7208,10 @@
       </p:sp>
       <p:sp>
         <p:nvSpPr>
-          <p:cNvPr id="27" name="">
+          <p:cNvPr id="28" name="">
             <a:extLst xmlns:a="http://schemas.openxmlformats.org/drawingml/2006/main">
               <a:ext uri="{FF2B5EF4-FFF2-40B4-BE49-F238E27FC236}">
-                <a16:creationId xmlns:a16="http://schemas.microsoft.com/office/drawing/2014/main" id="{8EC91AD0-77A2-44DB-9343-26263CD35FA5}"/>
+                <a16:creationId xmlns:a16="http://schemas.microsoft.com/office/drawing/2014/main" id="{B65F9E5E-D721-4B19-BBA0-3ADA2178E585}"/>
               </a:ext>
             </a:extLst>
           </p:cNvPr>
@@ -7036,7 +7336,7 @@
     </p:spTree>
     <p:extLst>
       <p:ext uri="{BB962C8B-B14F-4D97-AF65-F5344CB8AC3E}">
-        <p14:creationId xmlns:p14="http://schemas.microsoft.com/office/powerpoint/2010/main" val="264892678"/>
+        <p14:creationId xmlns:p14="http://schemas.microsoft.com/office/powerpoint/2010/main" val="1174392729"/>
       </p:ext>
     </p:extLst>
   </p:cSld>
@@ -7064,10 +7364,79 @@
       </p:grpSpPr>
       <p:sp>
         <p:nvSpPr>
-          <p:cNvPr id="16" name="slide-title">
+          <p:cNvPr id="17" name="">
             <a:extLst xmlns:a="http://schemas.openxmlformats.org/drawingml/2006/main">
               <a:ext uri="{FF2B5EF4-FFF2-40B4-BE49-F238E27FC236}">
-                <a16:creationId xmlns:a16="http://schemas.microsoft.com/office/drawing/2014/main" id="{A8A69A7C-B46A-4F2F-B779-32F70E6896A4}"/>
+                <a16:creationId xmlns:a16="http://schemas.microsoft.com/office/drawing/2014/main" id="{05247537-0558-4EA0-96EE-5E091BC8D511}"/>
+              </a:ext>
+            </a:extLst>
+          </p:cNvPr>
+          <p:cNvSpPr>
+            <a:spLocks xmlns:a="http://schemas.openxmlformats.org/drawingml/2006/main" noGrp="1"/>
+          </p:cNvSpPr>
+          <p:nvPr/>
+        </p:nvSpPr>
+        <p:spPr>
+          <a:xfrm xmlns:a="http://schemas.openxmlformats.org/drawingml/2006/main">
+            <a:off x="9906000" y="552450"/>
+            <a:ext cx="1600200" cy="228600"/>
+          </a:xfrm>
+          <a:prstGeom xmlns:a="http://schemas.openxmlformats.org/drawingml/2006/main" prst="rect">
+            <a:avLst/>
+          </a:prstGeom>
+          <a:noFill xmlns:a="http://schemas.openxmlformats.org/drawingml/2006/main"/>
+          <a:ln xmlns:a="http://schemas.openxmlformats.org/drawingml/2006/main" w="0">
+            <a:noFill/>
+            <a:prstDash val="solid"/>
+          </a:ln>
+        </p:spPr>
+        <p:txBody>
+          <a:bodyPr xmlns:a="http://schemas.openxmlformats.org/drawingml/2006/main">
+            <a:noAutofit/>
+          </a:bodyPr>
+          <a:lstStyle xmlns:a="http://schemas.openxmlformats.org/drawingml/2006/main">
+            <a:defPPr>
+              <a:defRPr sz="975" b="0">
+                <a:solidFill>
+                  <a:srgbClr val="8A94A3"/>
+                </a:solidFill>
+                <a:latin typeface="Arial"/>
+                <a:ea typeface="Arial"/>
+                <a:cs typeface="Arial"/>
+              </a:defRPr>
+            </a:defPPr>
+          </a:lstStyle>
+          <a:p xmlns:a="http://schemas.openxmlformats.org/drawingml/2006/main">
+            <a:pPr>
+              <a:defRPr sz="975" b="0">
+                <a:solidFill>
+                  <a:srgbClr val="8A94A3"/>
+                </a:solidFill>
+                <a:latin typeface="Arial"/>
+                <a:ea typeface="Arial"/>
+                <a:cs typeface="Arial"/>
+              </a:defRPr>
+            </a:pPr>
+            <a:r>
+              <a:rPr sz="975" b="0">
+                <a:solidFill>
+                  <a:srgbClr val="8A94A3"/>
+                </a:solidFill>
+                <a:latin typeface="Arial"/>
+                <a:ea typeface="Arial"/>
+                <a:cs typeface="Arial"/>
+              </a:rPr>
+              <a:t>5 / 10</a:t>
+            </a:r>
+          </a:p>
+        </p:txBody>
+      </p:sp>
+      <p:sp>
+        <p:nvSpPr>
+          <p:cNvPr id="2" name="slide-title">
+            <a:extLst xmlns:a="http://schemas.openxmlformats.org/drawingml/2006/main">
+              <a:ext uri="{FF2B5EF4-FFF2-40B4-BE49-F238E27FC236}">
+                <a16:creationId xmlns:a16="http://schemas.microsoft.com/office/drawing/2014/main" id="{58A28E88-71E5-4B17-9994-2077F330245F}"/>
               </a:ext>
             </a:extLst>
           </p:cNvPr>
@@ -7133,10 +7502,10 @@
       </p:sp>
       <p:sp>
         <p:nvSpPr>
-          <p:cNvPr id="2" name="slide-lead">
+          <p:cNvPr id="3" name="slide-lead">
             <a:extLst xmlns:a="http://schemas.openxmlformats.org/drawingml/2006/main">
               <a:ext uri="{FF2B5EF4-FFF2-40B4-BE49-F238E27FC236}">
-                <a16:creationId xmlns:a16="http://schemas.microsoft.com/office/drawing/2014/main" id="{A65DD892-6CDE-4928-B7DB-D272274F3296}"/>
+                <a16:creationId xmlns:a16="http://schemas.microsoft.com/office/drawing/2014/main" id="{2EB507D3-9C05-4801-85FA-42331EC0342E}"/>
               </a:ext>
             </a:extLst>
           </p:cNvPr>
@@ -7202,10 +7571,10 @@
       </p:sp>
       <p:sp>
         <p:nvSpPr>
-          <p:cNvPr id="3" name="title-rule">
+          <p:cNvPr id="4" name="title-rule">
             <a:extLst xmlns:a="http://schemas.openxmlformats.org/drawingml/2006/main">
               <a:ext uri="{FF2B5EF4-FFF2-40B4-BE49-F238E27FC236}">
-                <a16:creationId xmlns:a16="http://schemas.microsoft.com/office/drawing/2014/main" id="{A5C068B8-56A2-403E-A8F5-5A363209112F}"/>
+                <a16:creationId xmlns:a16="http://schemas.microsoft.com/office/drawing/2014/main" id="{E4A558E2-DD14-4E33-9B61-A6B601AE800E}"/>
               </a:ext>
             </a:extLst>
           </p:cNvPr>
@@ -7233,10 +7602,10 @@
       </p:sp>
       <p:sp>
         <p:nvSpPr>
-          <p:cNvPr id="4" name="flow-Verified organization">
+          <p:cNvPr id="5" name="flow-Verified organization">
             <a:extLst xmlns:a="http://schemas.openxmlformats.org/drawingml/2006/main">
               <a:ext uri="{FF2B5EF4-FFF2-40B4-BE49-F238E27FC236}">
-                <a16:creationId xmlns:a16="http://schemas.microsoft.com/office/drawing/2014/main" id="{E6352121-D19B-4B0B-871D-AC73CF2BEFD1}"/>
+                <a16:creationId xmlns:a16="http://schemas.microsoft.com/office/drawing/2014/main" id="{6874194E-A8C2-4795-BB21-3A3535C0CC14}"/>
               </a:ext>
             </a:extLst>
           </p:cNvPr>
@@ -7268,10 +7637,10 @@
       </p:sp>
       <p:sp>
         <p:nvSpPr>
-          <p:cNvPr id="5" name="">
+          <p:cNvPr id="6" name="">
             <a:extLst xmlns:a="http://schemas.openxmlformats.org/drawingml/2006/main">
               <a:ext uri="{FF2B5EF4-FFF2-40B4-BE49-F238E27FC236}">
-                <a16:creationId xmlns:a16="http://schemas.microsoft.com/office/drawing/2014/main" id="{7086E342-7555-47B0-93F4-99BF838162CD}"/>
+                <a16:creationId xmlns:a16="http://schemas.microsoft.com/office/drawing/2014/main" id="{6F14FDAE-A329-4D87-90B4-4C3504C8D5E6}"/>
               </a:ext>
             </a:extLst>
           </p:cNvPr>
@@ -7337,10 +7706,10 @@
       </p:sp>
       <p:sp>
         <p:nvSpPr>
-          <p:cNvPr id="6" name="">
+          <p:cNvPr id="7" name="">
             <a:extLst xmlns:a="http://schemas.openxmlformats.org/drawingml/2006/main">
               <a:ext uri="{FF2B5EF4-FFF2-40B4-BE49-F238E27FC236}">
-                <a16:creationId xmlns:a16="http://schemas.microsoft.com/office/drawing/2014/main" id="{0A6E79C8-8039-4B03-A756-9486937BDDE4}"/>
+                <a16:creationId xmlns:a16="http://schemas.microsoft.com/office/drawing/2014/main" id="{659DE63A-E602-4407-ACE9-8AEE7F0CB301}"/>
               </a:ext>
             </a:extLst>
           </p:cNvPr>
@@ -7368,10 +7737,10 @@
       </p:sp>
       <p:sp>
         <p:nvSpPr>
-          <p:cNvPr id="7" name="flow-Sufficient free storage">
+          <p:cNvPr id="8" name="flow-Sufficient free storage">
             <a:extLst xmlns:a="http://schemas.openxmlformats.org/drawingml/2006/main">
               <a:ext uri="{FF2B5EF4-FFF2-40B4-BE49-F238E27FC236}">
-                <a16:creationId xmlns:a16="http://schemas.microsoft.com/office/drawing/2014/main" id="{B818FF2D-73F0-4DAF-A5C0-9B84F3B1D8B0}"/>
+                <a16:creationId xmlns:a16="http://schemas.microsoft.com/office/drawing/2014/main" id="{B57661CE-44E3-471D-87E7-EF4D5360E99F}"/>
               </a:ext>
             </a:extLst>
           </p:cNvPr>
@@ -7403,10 +7772,10 @@
       </p:sp>
       <p:sp>
         <p:nvSpPr>
-          <p:cNvPr id="8" name="">
+          <p:cNvPr id="9" name="">
             <a:extLst xmlns:a="http://schemas.openxmlformats.org/drawingml/2006/main">
               <a:ext uri="{FF2B5EF4-FFF2-40B4-BE49-F238E27FC236}">
-                <a16:creationId xmlns:a16="http://schemas.microsoft.com/office/drawing/2014/main" id="{93AA7D86-9812-4294-AE79-6E4C8CD6BA9F}"/>
+                <a16:creationId xmlns:a16="http://schemas.microsoft.com/office/drawing/2014/main" id="{444F9BA8-38DD-4CE0-A5B9-E8BC0E4E4297}"/>
               </a:ext>
             </a:extLst>
           </p:cNvPr>
@@ -7472,10 +7841,10 @@
       </p:sp>
       <p:sp>
         <p:nvSpPr>
-          <p:cNvPr id="9" name="">
+          <p:cNvPr id="10" name="">
             <a:extLst xmlns:a="http://schemas.openxmlformats.org/drawingml/2006/main">
               <a:ext uri="{FF2B5EF4-FFF2-40B4-BE49-F238E27FC236}">
-                <a16:creationId xmlns:a16="http://schemas.microsoft.com/office/drawing/2014/main" id="{D8F5DAD6-C105-41FD-A72B-0ECBDE87F0B4}"/>
+                <a16:creationId xmlns:a16="http://schemas.microsoft.com/office/drawing/2014/main" id="{77FA1D2B-9251-454E-BD8F-6BC2D81FC086}"/>
               </a:ext>
             </a:extLst>
           </p:cNvPr>
@@ -7503,10 +7872,10 @@
       </p:sp>
       <p:sp>
         <p:nvSpPr>
-          <p:cNvPr id="10" name="flow-Category accepted">
+          <p:cNvPr id="11" name="flow-Category accepted">
             <a:extLst xmlns:a="http://schemas.openxmlformats.org/drawingml/2006/main">
               <a:ext uri="{FF2B5EF4-FFF2-40B4-BE49-F238E27FC236}">
-                <a16:creationId xmlns:a16="http://schemas.microsoft.com/office/drawing/2014/main" id="{DE6D3ABA-822D-4D71-A806-F4DA985EE604}"/>
+                <a16:creationId xmlns:a16="http://schemas.microsoft.com/office/drawing/2014/main" id="{B1BC4466-DAB2-47DB-BFB2-96D0C0BF1DD5}"/>
               </a:ext>
             </a:extLst>
           </p:cNvPr>
@@ -7538,10 +7907,10 @@
       </p:sp>
       <p:sp>
         <p:nvSpPr>
-          <p:cNvPr id="11" name="">
+          <p:cNvPr id="12" name="">
             <a:extLst xmlns:a="http://schemas.openxmlformats.org/drawingml/2006/main">
               <a:ext uri="{FF2B5EF4-FFF2-40B4-BE49-F238E27FC236}">
-                <a16:creationId xmlns:a16="http://schemas.microsoft.com/office/drawing/2014/main" id="{A38390E9-0EA1-43B2-A34C-6588A7E0CED6}"/>
+                <a16:creationId xmlns:a16="http://schemas.microsoft.com/office/drawing/2014/main" id="{EC5A170E-90B2-4312-B202-3A7AED4C2B1D}"/>
               </a:ext>
             </a:extLst>
           </p:cNvPr>
@@ -7607,10 +7976,10 @@
       </p:sp>
       <p:sp>
         <p:nvSpPr>
-          <p:cNvPr id="12" name="">
+          <p:cNvPr id="13" name="">
             <a:extLst xmlns:a="http://schemas.openxmlformats.org/drawingml/2006/main">
               <a:ext uri="{FF2B5EF4-FFF2-40B4-BE49-F238E27FC236}">
-                <a16:creationId xmlns:a16="http://schemas.microsoft.com/office/drawing/2014/main" id="{D625176A-17C7-45A9-859B-0A7C0D270D8F}"/>
+                <a16:creationId xmlns:a16="http://schemas.microsoft.com/office/drawing/2014/main" id="{F1FA620A-4C6B-43EA-AD96-6A94EC0A7406}"/>
               </a:ext>
             </a:extLst>
           </p:cNvPr>
@@ -7638,10 +8007,10 @@
       </p:sp>
       <p:sp>
         <p:nvSpPr>
-          <p:cNvPr id="13" name="flow-Safe arrival feasible">
+          <p:cNvPr id="14" name="flow-Safe arrival feasible">
             <a:extLst xmlns:a="http://schemas.openxmlformats.org/drawingml/2006/main">
               <a:ext uri="{FF2B5EF4-FFF2-40B4-BE49-F238E27FC236}">
-                <a16:creationId xmlns:a16="http://schemas.microsoft.com/office/drawing/2014/main" id="{4A3FBFAB-6BA7-42EE-AD21-1932E431B22B}"/>
+                <a16:creationId xmlns:a16="http://schemas.microsoft.com/office/drawing/2014/main" id="{94FB40AD-59B3-4F7A-91AE-3E99B4A63D56}"/>
               </a:ext>
             </a:extLst>
           </p:cNvPr>
@@ -7673,10 +8042,10 @@
       </p:sp>
       <p:sp>
         <p:nvSpPr>
-          <p:cNvPr id="14" name="">
+          <p:cNvPr id="15" name="">
             <a:extLst xmlns:a="http://schemas.openxmlformats.org/drawingml/2006/main">
               <a:ext uri="{FF2B5EF4-FFF2-40B4-BE49-F238E27FC236}">
-                <a16:creationId xmlns:a16="http://schemas.microsoft.com/office/drawing/2014/main" id="{F602F6E3-4427-48DB-8EE0-E8AC67ADDFBE}"/>
+                <a16:creationId xmlns:a16="http://schemas.microsoft.com/office/drawing/2014/main" id="{23AB785E-DDFF-420A-8331-A4B63884E2D6}"/>
               </a:ext>
             </a:extLst>
           </p:cNvPr>
@@ -7742,10 +8111,10 @@
       </p:sp>
       <p:graphicFrame>
         <p:nvGraphicFramePr>
-          <p:cNvPr id="15" name="">
+          <p:cNvPr id="16" name="">
             <a:extLst xmlns:a="http://schemas.openxmlformats.org/drawingml/2006/main">
               <a:ext uri="{FF2B5EF4-FFF2-40B4-BE49-F238E27FC236}">
-                <a16:creationId xmlns:a16="http://schemas.microsoft.com/office/drawing/2014/main" id="{6D4F1703-5253-4250-B084-8F3EC5CB49F2}"/>
+                <a16:creationId xmlns:a16="http://schemas.microsoft.com/office/drawing/2014/main" id="{EB8CCEF4-7E82-4EB3-9DD2-8C9CA3B6B93D}"/>
               </a:ext>
             </a:extLst>
           </p:cNvPr>
@@ -8260,7 +8629,7 @@
     </p:spTree>
     <p:extLst>
       <p:ext uri="{BB962C8B-B14F-4D97-AF65-F5344CB8AC3E}">
-        <p14:creationId xmlns:p14="http://schemas.microsoft.com/office/powerpoint/2010/main" val="38310853"/>
+        <p14:creationId xmlns:p14="http://schemas.microsoft.com/office/powerpoint/2010/main" val="143537874"/>
       </p:ext>
     </p:extLst>
   </p:cSld>
@@ -8288,10 +8657,79 @@
       </p:grpSpPr>
       <p:sp>
         <p:nvSpPr>
-          <p:cNvPr id="8" name="slide-title">
+          <p:cNvPr id="9" name="">
             <a:extLst xmlns:a="http://schemas.openxmlformats.org/drawingml/2006/main">
               <a:ext uri="{FF2B5EF4-FFF2-40B4-BE49-F238E27FC236}">
-                <a16:creationId xmlns:a16="http://schemas.microsoft.com/office/drawing/2014/main" id="{7C1DC4F3-E779-4675-B876-608F12F77AC8}"/>
+                <a16:creationId xmlns:a16="http://schemas.microsoft.com/office/drawing/2014/main" id="{48723FFB-F9D0-4565-BC32-E1A27C676F07}"/>
+              </a:ext>
+            </a:extLst>
+          </p:cNvPr>
+          <p:cNvSpPr>
+            <a:spLocks xmlns:a="http://schemas.openxmlformats.org/drawingml/2006/main" noGrp="1"/>
+          </p:cNvSpPr>
+          <p:nvPr/>
+        </p:nvSpPr>
+        <p:spPr>
+          <a:xfrm xmlns:a="http://schemas.openxmlformats.org/drawingml/2006/main">
+            <a:off x="9906000" y="552450"/>
+            <a:ext cx="1600200" cy="228600"/>
+          </a:xfrm>
+          <a:prstGeom xmlns:a="http://schemas.openxmlformats.org/drawingml/2006/main" prst="rect">
+            <a:avLst/>
+          </a:prstGeom>
+          <a:noFill xmlns:a="http://schemas.openxmlformats.org/drawingml/2006/main"/>
+          <a:ln xmlns:a="http://schemas.openxmlformats.org/drawingml/2006/main" w="0">
+            <a:noFill/>
+            <a:prstDash val="solid"/>
+          </a:ln>
+        </p:spPr>
+        <p:txBody>
+          <a:bodyPr xmlns:a="http://schemas.openxmlformats.org/drawingml/2006/main">
+            <a:noAutofit/>
+          </a:bodyPr>
+          <a:lstStyle xmlns:a="http://schemas.openxmlformats.org/drawingml/2006/main">
+            <a:defPPr>
+              <a:defRPr sz="975" b="0">
+                <a:solidFill>
+                  <a:srgbClr val="8A94A3"/>
+                </a:solidFill>
+                <a:latin typeface="Arial"/>
+                <a:ea typeface="Arial"/>
+                <a:cs typeface="Arial"/>
+              </a:defRPr>
+            </a:defPPr>
+          </a:lstStyle>
+          <a:p xmlns:a="http://schemas.openxmlformats.org/drawingml/2006/main">
+            <a:pPr>
+              <a:defRPr sz="975" b="0">
+                <a:solidFill>
+                  <a:srgbClr val="8A94A3"/>
+                </a:solidFill>
+                <a:latin typeface="Arial"/>
+                <a:ea typeface="Arial"/>
+                <a:cs typeface="Arial"/>
+              </a:defRPr>
+            </a:pPr>
+            <a:r>
+              <a:rPr sz="975" b="0">
+                <a:solidFill>
+                  <a:srgbClr val="8A94A3"/>
+                </a:solidFill>
+                <a:latin typeface="Arial"/>
+                <a:ea typeface="Arial"/>
+                <a:cs typeface="Arial"/>
+              </a:rPr>
+              <a:t>6 / 10</a:t>
+            </a:r>
+          </a:p>
+        </p:txBody>
+      </p:sp>
+      <p:sp>
+        <p:nvSpPr>
+          <p:cNvPr id="2" name="slide-title">
+            <a:extLst xmlns:a="http://schemas.openxmlformats.org/drawingml/2006/main">
+              <a:ext uri="{FF2B5EF4-FFF2-40B4-BE49-F238E27FC236}">
+                <a16:creationId xmlns:a16="http://schemas.microsoft.com/office/drawing/2014/main" id="{AB3B984B-06C6-4B91-83A7-B9F8CA7ECC55}"/>
               </a:ext>
             </a:extLst>
           </p:cNvPr>
@@ -8357,10 +8795,10 @@
       </p:sp>
       <p:sp>
         <p:nvSpPr>
-          <p:cNvPr id="2" name="slide-lead">
+          <p:cNvPr id="3" name="slide-lead">
             <a:extLst xmlns:a="http://schemas.openxmlformats.org/drawingml/2006/main">
               <a:ext uri="{FF2B5EF4-FFF2-40B4-BE49-F238E27FC236}">
-                <a16:creationId xmlns:a16="http://schemas.microsoft.com/office/drawing/2014/main" id="{39E99AF6-0746-4CDD-BE8A-9A5DE7400C9A}"/>
+                <a16:creationId xmlns:a16="http://schemas.microsoft.com/office/drawing/2014/main" id="{65DCB607-DDF4-4503-9593-0635391F0081}"/>
               </a:ext>
             </a:extLst>
           </p:cNvPr>
@@ -8426,10 +8864,10 @@
       </p:sp>
       <p:sp>
         <p:nvSpPr>
-          <p:cNvPr id="3" name="title-rule">
+          <p:cNvPr id="4" name="title-rule">
             <a:extLst xmlns:a="http://schemas.openxmlformats.org/drawingml/2006/main">
               <a:ext uri="{FF2B5EF4-FFF2-40B4-BE49-F238E27FC236}">
-                <a16:creationId xmlns:a16="http://schemas.microsoft.com/office/drawing/2014/main" id="{F7CA7AE4-75A3-44C6-9245-081544D4F427}"/>
+                <a16:creationId xmlns:a16="http://schemas.microsoft.com/office/drawing/2014/main" id="{4DAFFD3B-08C5-489D-952E-A77DEDF3FE3D}"/>
               </a:ext>
             </a:extLst>
           </p:cNvPr>
@@ -8457,10 +8895,10 @@
       </p:sp>
       <p:sp>
         <p:nvSpPr>
-          <p:cNvPr id="4" name="">
+          <p:cNvPr id="5" name="">
             <a:extLst xmlns:a="http://schemas.openxmlformats.org/drawingml/2006/main">
               <a:ext uri="{FF2B5EF4-FFF2-40B4-BE49-F238E27FC236}">
-                <a16:creationId xmlns:a16="http://schemas.microsoft.com/office/drawing/2014/main" id="{B66856B0-5F4A-4C91-A9D4-B7C2BC7FAC01}"/>
+                <a16:creationId xmlns:a16="http://schemas.microsoft.com/office/drawing/2014/main" id="{A0FFB62A-FF47-4C13-AE14-A07C6C030DB6}"/>
               </a:ext>
             </a:extLst>
           </p:cNvPr>
@@ -8611,10 +9049,10 @@
       </p:sp>
       <p:graphicFrame>
         <p:nvGraphicFramePr>
-          <p:cNvPr id="5" name="">
+          <p:cNvPr id="6" name="">
             <a:extLst xmlns:a="http://schemas.openxmlformats.org/drawingml/2006/main">
               <a:ext uri="{FF2B5EF4-FFF2-40B4-BE49-F238E27FC236}">
-                <a16:creationId xmlns:a16="http://schemas.microsoft.com/office/drawing/2014/main" id="{155723FF-EA16-4E62-91B2-F82BC95F2DDC}"/>
+                <a16:creationId xmlns:a16="http://schemas.microsoft.com/office/drawing/2014/main" id="{5573B96E-6255-43A9-9672-3E27054EEA58}"/>
               </a:ext>
             </a:extLst>
           </p:cNvPr>
@@ -8924,10 +9362,10 @@
       </p:graphicFrame>
       <p:sp>
         <p:nvSpPr>
-          <p:cNvPr id="6" name="">
+          <p:cNvPr id="7" name="">
             <a:extLst xmlns:a="http://schemas.openxmlformats.org/drawingml/2006/main">
               <a:ext uri="{FF2B5EF4-FFF2-40B4-BE49-F238E27FC236}">
-                <a16:creationId xmlns:a16="http://schemas.microsoft.com/office/drawing/2014/main" id="{602FF57D-AD8D-4285-8590-DA97B8F30BAE}"/>
+                <a16:creationId xmlns:a16="http://schemas.microsoft.com/office/drawing/2014/main" id="{F15B3B74-62EB-4E24-B85D-8BB2BCF9CCC3}"/>
               </a:ext>
             </a:extLst>
           </p:cNvPr>
@@ -8993,10 +9431,10 @@
       </p:sp>
       <p:sp>
         <p:nvSpPr>
-          <p:cNvPr id="7" name="">
+          <p:cNvPr id="8" name="">
             <a:extLst xmlns:a="http://schemas.openxmlformats.org/drawingml/2006/main">
               <a:ext uri="{FF2B5EF4-FFF2-40B4-BE49-F238E27FC236}">
-                <a16:creationId xmlns:a16="http://schemas.microsoft.com/office/drawing/2014/main" id="{2A4D6A2D-6C93-4F20-804B-05BC405CB424}"/>
+                <a16:creationId xmlns:a16="http://schemas.microsoft.com/office/drawing/2014/main" id="{B6FCA08B-74DC-4C4A-80A9-E941E9BABDCD}"/>
               </a:ext>
             </a:extLst>
           </p:cNvPr>
@@ -9063,7 +9501,7 @@
     </p:spTree>
     <p:extLst>
       <p:ext uri="{BB962C8B-B14F-4D97-AF65-F5344CB8AC3E}">
-        <p14:creationId xmlns:p14="http://schemas.microsoft.com/office/powerpoint/2010/main" val="1948774898"/>
+        <p14:creationId xmlns:p14="http://schemas.microsoft.com/office/powerpoint/2010/main" val="1569713441"/>
       </p:ext>
     </p:extLst>
   </p:cSld>
@@ -9091,10 +9529,79 @@
       </p:grpSpPr>
       <p:sp>
         <p:nvSpPr>
-          <p:cNvPr id="7" name="slide-title">
+          <p:cNvPr id="8" name="">
             <a:extLst xmlns:a="http://schemas.openxmlformats.org/drawingml/2006/main">
               <a:ext uri="{FF2B5EF4-FFF2-40B4-BE49-F238E27FC236}">
-                <a16:creationId xmlns:a16="http://schemas.microsoft.com/office/drawing/2014/main" id="{453F484C-D1CE-4E12-B6CA-512B5649BD7D}"/>
+                <a16:creationId xmlns:a16="http://schemas.microsoft.com/office/drawing/2014/main" id="{DCFAB488-3943-43A4-8E9A-253391755B8A}"/>
+              </a:ext>
+            </a:extLst>
+          </p:cNvPr>
+          <p:cNvSpPr>
+            <a:spLocks xmlns:a="http://schemas.openxmlformats.org/drawingml/2006/main" noGrp="1"/>
+          </p:cNvSpPr>
+          <p:nvPr/>
+        </p:nvSpPr>
+        <p:spPr>
+          <a:xfrm xmlns:a="http://schemas.openxmlformats.org/drawingml/2006/main">
+            <a:off x="9906000" y="552450"/>
+            <a:ext cx="1600200" cy="228600"/>
+          </a:xfrm>
+          <a:prstGeom xmlns:a="http://schemas.openxmlformats.org/drawingml/2006/main" prst="rect">
+            <a:avLst/>
+          </a:prstGeom>
+          <a:noFill xmlns:a="http://schemas.openxmlformats.org/drawingml/2006/main"/>
+          <a:ln xmlns:a="http://schemas.openxmlformats.org/drawingml/2006/main" w="0">
+            <a:noFill/>
+            <a:prstDash val="solid"/>
+          </a:ln>
+        </p:spPr>
+        <p:txBody>
+          <a:bodyPr xmlns:a="http://schemas.openxmlformats.org/drawingml/2006/main">
+            <a:noAutofit/>
+          </a:bodyPr>
+          <a:lstStyle xmlns:a="http://schemas.openxmlformats.org/drawingml/2006/main">
+            <a:defPPr>
+              <a:defRPr sz="975" b="0">
+                <a:solidFill>
+                  <a:srgbClr val="8A94A3"/>
+                </a:solidFill>
+                <a:latin typeface="Arial"/>
+                <a:ea typeface="Arial"/>
+                <a:cs typeface="Arial"/>
+              </a:defRPr>
+            </a:defPPr>
+          </a:lstStyle>
+          <a:p xmlns:a="http://schemas.openxmlformats.org/drawingml/2006/main">
+            <a:pPr>
+              <a:defRPr sz="975" b="0">
+                <a:solidFill>
+                  <a:srgbClr val="8A94A3"/>
+                </a:solidFill>
+                <a:latin typeface="Arial"/>
+                <a:ea typeface="Arial"/>
+                <a:cs typeface="Arial"/>
+              </a:defRPr>
+            </a:pPr>
+            <a:r>
+              <a:rPr sz="975" b="0">
+                <a:solidFill>
+                  <a:srgbClr val="8A94A3"/>
+                </a:solidFill>
+                <a:latin typeface="Arial"/>
+                <a:ea typeface="Arial"/>
+                <a:cs typeface="Arial"/>
+              </a:rPr>
+              <a:t>7 / 10</a:t>
+            </a:r>
+          </a:p>
+        </p:txBody>
+      </p:sp>
+      <p:sp>
+        <p:nvSpPr>
+          <p:cNvPr id="2" name="slide-title">
+            <a:extLst xmlns:a="http://schemas.openxmlformats.org/drawingml/2006/main">
+              <a:ext uri="{FF2B5EF4-FFF2-40B4-BE49-F238E27FC236}">
+                <a16:creationId xmlns:a16="http://schemas.microsoft.com/office/drawing/2014/main" id="{4284586E-F07E-4874-AC9F-76F19CA89DFC}"/>
               </a:ext>
             </a:extLst>
           </p:cNvPr>
@@ -9160,10 +9667,10 @@
       </p:sp>
       <p:sp>
         <p:nvSpPr>
-          <p:cNvPr id="2" name="slide-lead">
+          <p:cNvPr id="3" name="slide-lead">
             <a:extLst xmlns:a="http://schemas.openxmlformats.org/drawingml/2006/main">
               <a:ext uri="{FF2B5EF4-FFF2-40B4-BE49-F238E27FC236}">
-                <a16:creationId xmlns:a16="http://schemas.microsoft.com/office/drawing/2014/main" id="{5F9083AE-FDC8-49E1-BF02-C428374B0FC0}"/>
+                <a16:creationId xmlns:a16="http://schemas.microsoft.com/office/drawing/2014/main" id="{2D2FCC4E-22F0-4D55-81E8-D601F25F9544}"/>
               </a:ext>
             </a:extLst>
           </p:cNvPr>
@@ -9229,10 +9736,10 @@
       </p:sp>
       <p:sp>
         <p:nvSpPr>
-          <p:cNvPr id="3" name="title-rule">
+          <p:cNvPr id="4" name="title-rule">
             <a:extLst xmlns:a="http://schemas.openxmlformats.org/drawingml/2006/main">
               <a:ext uri="{FF2B5EF4-FFF2-40B4-BE49-F238E27FC236}">
-                <a16:creationId xmlns:a16="http://schemas.microsoft.com/office/drawing/2014/main" id="{2807768E-5B6F-4095-B75C-58D0D8C335F4}"/>
+                <a16:creationId xmlns:a16="http://schemas.microsoft.com/office/drawing/2014/main" id="{5DFA8683-6964-45C5-8449-0402F9CF1A9B}"/>
               </a:ext>
             </a:extLst>
           </p:cNvPr>
@@ -9260,10 +9767,10 @@
       </p:sp>
       <p:sp>
         <p:nvSpPr>
-          <p:cNvPr id="4" name="">
+          <p:cNvPr id="5" name="">
             <a:extLst xmlns:a="http://schemas.openxmlformats.org/drawingml/2006/main">
               <a:ext uri="{FF2B5EF4-FFF2-40B4-BE49-F238E27FC236}">
-                <a16:creationId xmlns:a16="http://schemas.microsoft.com/office/drawing/2014/main" id="{9C56AC5A-1513-4857-8553-34087F0D3F2C}"/>
+                <a16:creationId xmlns:a16="http://schemas.microsoft.com/office/drawing/2014/main" id="{AED90E97-470F-4642-A056-B90CA900E9DA}"/>
               </a:ext>
             </a:extLst>
           </p:cNvPr>
@@ -9387,10 +9894,10 @@
       </p:sp>
       <p:pic>
         <p:nvPicPr>
-          <p:cNvPr id="5" name="">
+          <p:cNvPr id="6" name="">
             <a:extLst xmlns:a="http://schemas.openxmlformats.org/drawingml/2006/main">
               <a:ext uri="{FF2B5EF4-FFF2-40B4-BE49-F238E27FC236}">
-                <a16:creationId xmlns:a16="http://schemas.microsoft.com/office/drawing/2014/main" id="{E2AFA96B-FEFB-4B58-91E0-FA0317695B24}"/>
+                <a16:creationId xmlns:a16="http://schemas.microsoft.com/office/drawing/2014/main" id="{6E30508E-550C-486D-877F-255CF8547F30}"/>
               </a:ext>
             </a:extLst>
           </p:cNvPr>
@@ -9400,7 +9907,7 @@
           <p:nvPr/>
         </p:nvPicPr>
         <p:blipFill>
-          <a:blip xmlns:r="http://schemas.openxmlformats.org/officeDocument/2006/relationships" xmlns:a="http://schemas.openxmlformats.org/drawingml/2006/main" r:embed="Re3a710d1becf43fb"/>
+          <a:blip xmlns:r="http://schemas.openxmlformats.org/officeDocument/2006/relationships" xmlns:a="http://schemas.openxmlformats.org/drawingml/2006/main" r:embed="R18dc9e5d9e7f4bd7"/>
           <a:stretch xmlns:a="http://schemas.openxmlformats.org/drawingml/2006/main"/>
         </p:blipFill>
         <p:spPr>
@@ -9415,10 +9922,10 @@
       </p:pic>
       <p:sp>
         <p:nvSpPr>
-          <p:cNvPr id="6" name="">
+          <p:cNvPr id="7" name="">
             <a:extLst xmlns:a="http://schemas.openxmlformats.org/drawingml/2006/main">
               <a:ext uri="{FF2B5EF4-FFF2-40B4-BE49-F238E27FC236}">
-                <a16:creationId xmlns:a16="http://schemas.microsoft.com/office/drawing/2014/main" id="{0C7DC1D8-2B5C-46C9-A36F-02B36E36FA6F}"/>
+                <a16:creationId xmlns:a16="http://schemas.microsoft.com/office/drawing/2014/main" id="{29BA8E67-73DC-4D42-B0C9-49D2E3AAE785}"/>
               </a:ext>
             </a:extLst>
           </p:cNvPr>
@@ -9485,7 +9992,7 @@
     </p:spTree>
     <p:extLst>
       <p:ext uri="{BB962C8B-B14F-4D97-AF65-F5344CB8AC3E}">
-        <p14:creationId xmlns:p14="http://schemas.microsoft.com/office/powerpoint/2010/main" val="1835746613"/>
+        <p14:creationId xmlns:p14="http://schemas.microsoft.com/office/powerpoint/2010/main" val="1569514512"/>
       </p:ext>
     </p:extLst>
   </p:cSld>
@@ -9513,10 +10020,79 @@
       </p:grpSpPr>
       <p:sp>
         <p:nvSpPr>
-          <p:cNvPr id="7" name="slide-title">
+          <p:cNvPr id="8" name="">
             <a:extLst xmlns:a="http://schemas.openxmlformats.org/drawingml/2006/main">
               <a:ext uri="{FF2B5EF4-FFF2-40B4-BE49-F238E27FC236}">
-                <a16:creationId xmlns:a16="http://schemas.microsoft.com/office/drawing/2014/main" id="{0192D80C-0EAB-4F1B-BEDA-07B723444A47}"/>
+                <a16:creationId xmlns:a16="http://schemas.microsoft.com/office/drawing/2014/main" id="{FDFDAFC2-D577-4B95-AE77-DE6C73AAC29B}"/>
+              </a:ext>
+            </a:extLst>
+          </p:cNvPr>
+          <p:cNvSpPr>
+            <a:spLocks xmlns:a="http://schemas.openxmlformats.org/drawingml/2006/main" noGrp="1"/>
+          </p:cNvSpPr>
+          <p:nvPr/>
+        </p:nvSpPr>
+        <p:spPr>
+          <a:xfrm xmlns:a="http://schemas.openxmlformats.org/drawingml/2006/main">
+            <a:off x="9906000" y="552450"/>
+            <a:ext cx="1600200" cy="228600"/>
+          </a:xfrm>
+          <a:prstGeom xmlns:a="http://schemas.openxmlformats.org/drawingml/2006/main" prst="rect">
+            <a:avLst/>
+          </a:prstGeom>
+          <a:noFill xmlns:a="http://schemas.openxmlformats.org/drawingml/2006/main"/>
+          <a:ln xmlns:a="http://schemas.openxmlformats.org/drawingml/2006/main" w="0">
+            <a:noFill/>
+            <a:prstDash val="solid"/>
+          </a:ln>
+        </p:spPr>
+        <p:txBody>
+          <a:bodyPr xmlns:a="http://schemas.openxmlformats.org/drawingml/2006/main">
+            <a:noAutofit/>
+          </a:bodyPr>
+          <a:lstStyle xmlns:a="http://schemas.openxmlformats.org/drawingml/2006/main">
+            <a:defPPr>
+              <a:defRPr sz="975" b="0">
+                <a:solidFill>
+                  <a:srgbClr val="8A94A3"/>
+                </a:solidFill>
+                <a:latin typeface="Arial"/>
+                <a:ea typeface="Arial"/>
+                <a:cs typeface="Arial"/>
+              </a:defRPr>
+            </a:defPPr>
+          </a:lstStyle>
+          <a:p xmlns:a="http://schemas.openxmlformats.org/drawingml/2006/main">
+            <a:pPr>
+              <a:defRPr sz="975" b="0">
+                <a:solidFill>
+                  <a:srgbClr val="8A94A3"/>
+                </a:solidFill>
+                <a:latin typeface="Arial"/>
+                <a:ea typeface="Arial"/>
+                <a:cs typeface="Arial"/>
+              </a:defRPr>
+            </a:pPr>
+            <a:r>
+              <a:rPr sz="975" b="0">
+                <a:solidFill>
+                  <a:srgbClr val="8A94A3"/>
+                </a:solidFill>
+                <a:latin typeface="Arial"/>
+                <a:ea typeface="Arial"/>
+                <a:cs typeface="Arial"/>
+              </a:rPr>
+              <a:t>8 / 10</a:t>
+            </a:r>
+          </a:p>
+        </p:txBody>
+      </p:sp>
+      <p:sp>
+        <p:nvSpPr>
+          <p:cNvPr id="2" name="slide-title">
+            <a:extLst xmlns:a="http://schemas.openxmlformats.org/drawingml/2006/main">
+              <a:ext uri="{FF2B5EF4-FFF2-40B4-BE49-F238E27FC236}">
+                <a16:creationId xmlns:a16="http://schemas.microsoft.com/office/drawing/2014/main" id="{F11C8DD1-09F2-440C-92FF-1BE968448174}"/>
               </a:ext>
             </a:extLst>
           </p:cNvPr>
@@ -9582,10 +10158,10 @@
       </p:sp>
       <p:sp>
         <p:nvSpPr>
-          <p:cNvPr id="2" name="slide-lead">
+          <p:cNvPr id="3" name="slide-lead">
             <a:extLst xmlns:a="http://schemas.openxmlformats.org/drawingml/2006/main">
               <a:ext uri="{FF2B5EF4-FFF2-40B4-BE49-F238E27FC236}">
-                <a16:creationId xmlns:a16="http://schemas.microsoft.com/office/drawing/2014/main" id="{686099FB-BF65-4A0F-BD3F-7C7758BFE1B7}"/>
+                <a16:creationId xmlns:a16="http://schemas.microsoft.com/office/drawing/2014/main" id="{6D50D0B7-9BB1-4C3B-AC4A-490CCBA0CFCD}"/>
               </a:ext>
             </a:extLst>
           </p:cNvPr>
@@ -9651,10 +10227,10 @@
       </p:sp>
       <p:sp>
         <p:nvSpPr>
-          <p:cNvPr id="3" name="title-rule">
+          <p:cNvPr id="4" name="title-rule">
             <a:extLst xmlns:a="http://schemas.openxmlformats.org/drawingml/2006/main">
               <a:ext uri="{FF2B5EF4-FFF2-40B4-BE49-F238E27FC236}">
-                <a16:creationId xmlns:a16="http://schemas.microsoft.com/office/drawing/2014/main" id="{DB6D6407-329D-4518-A156-A37DF0139807}"/>
+                <a16:creationId xmlns:a16="http://schemas.microsoft.com/office/drawing/2014/main" id="{A642BAF4-BF6C-4E71-8E46-0304B18DF1C7}"/>
               </a:ext>
             </a:extLst>
           </p:cNvPr>
@@ -9682,10 +10258,10 @@
       </p:sp>
       <p:sp>
         <p:nvSpPr>
-          <p:cNvPr id="4" name="">
+          <p:cNvPr id="5" name="">
             <a:extLst xmlns:a="http://schemas.openxmlformats.org/drawingml/2006/main">
               <a:ext uri="{FF2B5EF4-FFF2-40B4-BE49-F238E27FC236}">
-                <a16:creationId xmlns:a16="http://schemas.microsoft.com/office/drawing/2014/main" id="{9B194D4E-B08B-4564-81CF-08A147C8B756}"/>
+                <a16:creationId xmlns:a16="http://schemas.microsoft.com/office/drawing/2014/main" id="{73975328-5D85-432E-8EA0-EFA6A81C491B}"/>
               </a:ext>
             </a:extLst>
           </p:cNvPr>
@@ -9809,10 +10385,10 @@
       </p:sp>
       <p:pic>
         <p:nvPicPr>
-          <p:cNvPr id="5" name="">
+          <p:cNvPr id="6" name="">
             <a:extLst xmlns:a="http://schemas.openxmlformats.org/drawingml/2006/main">
               <a:ext uri="{FF2B5EF4-FFF2-40B4-BE49-F238E27FC236}">
-                <a16:creationId xmlns:a16="http://schemas.microsoft.com/office/drawing/2014/main" id="{6A7CB3B3-4F24-48BA-B6B5-636A4FA7A101}"/>
+                <a16:creationId xmlns:a16="http://schemas.microsoft.com/office/drawing/2014/main" id="{E57CBE58-8E6C-4140-8AC0-6A9281C1D704}"/>
               </a:ext>
             </a:extLst>
           </p:cNvPr>
@@ -9822,7 +10398,7 @@
           <p:nvPr/>
         </p:nvPicPr>
         <p:blipFill>
-          <a:blip xmlns:r="http://schemas.openxmlformats.org/officeDocument/2006/relationships" xmlns:a="http://schemas.openxmlformats.org/drawingml/2006/main" r:embed="R695c9971f9634f85"/>
+          <a:blip xmlns:r="http://schemas.openxmlformats.org/officeDocument/2006/relationships" xmlns:a="http://schemas.openxmlformats.org/drawingml/2006/main" r:embed="R225593049ccb4d4b"/>
           <a:stretch xmlns:a="http://schemas.openxmlformats.org/drawingml/2006/main"/>
         </p:blipFill>
         <p:spPr>
@@ -9837,10 +10413,10 @@
       </p:pic>
       <p:sp>
         <p:nvSpPr>
-          <p:cNvPr id="6" name="">
+          <p:cNvPr id="7" name="">
             <a:extLst xmlns:a="http://schemas.openxmlformats.org/drawingml/2006/main">
               <a:ext uri="{FF2B5EF4-FFF2-40B4-BE49-F238E27FC236}">
-                <a16:creationId xmlns:a16="http://schemas.microsoft.com/office/drawing/2014/main" id="{7DD45DC2-C814-4051-8C07-AFD208C6BCDE}"/>
+                <a16:creationId xmlns:a16="http://schemas.microsoft.com/office/drawing/2014/main" id="{40F177A4-DD1C-41CE-8A80-FEB9E2E9B823}"/>
               </a:ext>
             </a:extLst>
           </p:cNvPr>
@@ -9907,7 +10483,7 @@
     </p:spTree>
     <p:extLst>
       <p:ext uri="{BB962C8B-B14F-4D97-AF65-F5344CB8AC3E}">
-        <p14:creationId xmlns:p14="http://schemas.microsoft.com/office/powerpoint/2010/main" val="321439508"/>
+        <p14:creationId xmlns:p14="http://schemas.microsoft.com/office/powerpoint/2010/main" val="1090157441"/>
       </p:ext>
     </p:extLst>
   </p:cSld>
@@ -9935,10 +10511,79 @@
       </p:grpSpPr>
       <p:sp>
         <p:nvSpPr>
-          <p:cNvPr id="17" name="slide-title">
+          <p:cNvPr id="18" name="">
             <a:extLst xmlns:a="http://schemas.openxmlformats.org/drawingml/2006/main">
               <a:ext uri="{FF2B5EF4-FFF2-40B4-BE49-F238E27FC236}">
-                <a16:creationId xmlns:a16="http://schemas.microsoft.com/office/drawing/2014/main" id="{9CCF6E53-A1F6-4F5D-B095-076309827B78}"/>
+                <a16:creationId xmlns:a16="http://schemas.microsoft.com/office/drawing/2014/main" id="{8859560D-A113-4E5E-938B-6791FC9CBDFC}"/>
+              </a:ext>
+            </a:extLst>
+          </p:cNvPr>
+          <p:cNvSpPr>
+            <a:spLocks xmlns:a="http://schemas.openxmlformats.org/drawingml/2006/main" noGrp="1"/>
+          </p:cNvSpPr>
+          <p:nvPr/>
+        </p:nvSpPr>
+        <p:spPr>
+          <a:xfrm xmlns:a="http://schemas.openxmlformats.org/drawingml/2006/main">
+            <a:off x="9906000" y="552450"/>
+            <a:ext cx="1600200" cy="228600"/>
+          </a:xfrm>
+          <a:prstGeom xmlns:a="http://schemas.openxmlformats.org/drawingml/2006/main" prst="rect">
+            <a:avLst/>
+          </a:prstGeom>
+          <a:noFill xmlns:a="http://schemas.openxmlformats.org/drawingml/2006/main"/>
+          <a:ln xmlns:a="http://schemas.openxmlformats.org/drawingml/2006/main" w="0">
+            <a:noFill/>
+            <a:prstDash val="solid"/>
+          </a:ln>
+        </p:spPr>
+        <p:txBody>
+          <a:bodyPr xmlns:a="http://schemas.openxmlformats.org/drawingml/2006/main">
+            <a:noAutofit/>
+          </a:bodyPr>
+          <a:lstStyle xmlns:a="http://schemas.openxmlformats.org/drawingml/2006/main">
+            <a:defPPr>
+              <a:defRPr sz="975" b="0">
+                <a:solidFill>
+                  <a:srgbClr val="8A94A3"/>
+                </a:solidFill>
+                <a:latin typeface="Arial"/>
+                <a:ea typeface="Arial"/>
+                <a:cs typeface="Arial"/>
+              </a:defRPr>
+            </a:defPPr>
+          </a:lstStyle>
+          <a:p xmlns:a="http://schemas.openxmlformats.org/drawingml/2006/main">
+            <a:pPr>
+              <a:defRPr sz="975" b="0">
+                <a:solidFill>
+                  <a:srgbClr val="8A94A3"/>
+                </a:solidFill>
+                <a:latin typeface="Arial"/>
+                <a:ea typeface="Arial"/>
+                <a:cs typeface="Arial"/>
+              </a:defRPr>
+            </a:pPr>
+            <a:r>
+              <a:rPr sz="975" b="0">
+                <a:solidFill>
+                  <a:srgbClr val="8A94A3"/>
+                </a:solidFill>
+                <a:latin typeface="Arial"/>
+                <a:ea typeface="Arial"/>
+                <a:cs typeface="Arial"/>
+              </a:rPr>
+              <a:t>9 / 10</a:t>
+            </a:r>
+          </a:p>
+        </p:txBody>
+      </p:sp>
+      <p:sp>
+        <p:nvSpPr>
+          <p:cNvPr id="2" name="slide-title">
+            <a:extLst xmlns:a="http://schemas.openxmlformats.org/drawingml/2006/main">
+              <a:ext uri="{FF2B5EF4-FFF2-40B4-BE49-F238E27FC236}">
+                <a16:creationId xmlns:a16="http://schemas.microsoft.com/office/drawing/2014/main" id="{DA087916-2C03-460D-94E6-8D6AC9561138}"/>
               </a:ext>
             </a:extLst>
           </p:cNvPr>
@@ -10004,10 +10649,10 @@
       </p:sp>
       <p:sp>
         <p:nvSpPr>
-          <p:cNvPr id="2" name="slide-lead">
+          <p:cNvPr id="3" name="slide-lead">
             <a:extLst xmlns:a="http://schemas.openxmlformats.org/drawingml/2006/main">
               <a:ext uri="{FF2B5EF4-FFF2-40B4-BE49-F238E27FC236}">
-                <a16:creationId xmlns:a16="http://schemas.microsoft.com/office/drawing/2014/main" id="{72854574-9AA8-4C68-86D3-95F7FDC9A6D0}"/>
+                <a16:creationId xmlns:a16="http://schemas.microsoft.com/office/drawing/2014/main" id="{0976BC35-3E0E-48B6-A0C1-E48D60CA65C6}"/>
               </a:ext>
             </a:extLst>
           </p:cNvPr>
@@ -10073,10 +10718,10 @@
       </p:sp>
       <p:sp>
         <p:nvSpPr>
-          <p:cNvPr id="3" name="title-rule">
+          <p:cNvPr id="4" name="title-rule">
             <a:extLst xmlns:a="http://schemas.openxmlformats.org/drawingml/2006/main">
               <a:ext uri="{FF2B5EF4-FFF2-40B4-BE49-F238E27FC236}">
-                <a16:creationId xmlns:a16="http://schemas.microsoft.com/office/drawing/2014/main" id="{44D6116A-853C-4296-9CBD-3FFDFE2BF9A3}"/>
+                <a16:creationId xmlns:a16="http://schemas.microsoft.com/office/drawing/2014/main" id="{716DF08B-D282-47B7-9B00-77B80BA68D23}"/>
               </a:ext>
             </a:extLst>
           </p:cNvPr>
@@ -10104,10 +10749,10 @@
       </p:sp>
       <p:sp>
         <p:nvSpPr>
-          <p:cNvPr id="4" name="">
+          <p:cNvPr id="5" name="">
             <a:extLst xmlns:a="http://schemas.openxmlformats.org/drawingml/2006/main">
               <a:ext uri="{FF2B5EF4-FFF2-40B4-BE49-F238E27FC236}">
-                <a16:creationId xmlns:a16="http://schemas.microsoft.com/office/drawing/2014/main" id="{71832D99-F926-44FA-A762-FD7661E9AC57}"/>
+                <a16:creationId xmlns:a16="http://schemas.microsoft.com/office/drawing/2014/main" id="{73366023-FE8B-43F9-8998-27843A7B3FCE}"/>
               </a:ext>
             </a:extLst>
           </p:cNvPr>
@@ -10173,10 +10818,10 @@
       </p:sp>
       <p:sp>
         <p:nvSpPr>
-          <p:cNvPr id="5" name="">
+          <p:cNvPr id="6" name="">
             <a:extLst xmlns:a="http://schemas.openxmlformats.org/drawingml/2006/main">
               <a:ext uri="{FF2B5EF4-FFF2-40B4-BE49-F238E27FC236}">
-                <a16:creationId xmlns:a16="http://schemas.microsoft.com/office/drawing/2014/main" id="{74614E94-B7FC-4CD4-9A42-677A42FBEADD}"/>
+                <a16:creationId xmlns:a16="http://schemas.microsoft.com/office/drawing/2014/main" id="{5B8DC7BA-9147-4860-8299-8254F7B5A848}"/>
               </a:ext>
             </a:extLst>
           </p:cNvPr>
@@ -10242,10 +10887,10 @@
       </p:sp>
       <p:sp>
         <p:nvSpPr>
-          <p:cNvPr id="6" name="">
+          <p:cNvPr id="7" name="">
             <a:extLst xmlns:a="http://schemas.openxmlformats.org/drawingml/2006/main">
               <a:ext uri="{FF2B5EF4-FFF2-40B4-BE49-F238E27FC236}">
-                <a16:creationId xmlns:a16="http://schemas.microsoft.com/office/drawing/2014/main" id="{AE317221-4E94-480E-8555-17F7BCCAB3B3}"/>
+                <a16:creationId xmlns:a16="http://schemas.microsoft.com/office/drawing/2014/main" id="{C53AFBA2-9E2E-407A-A094-3F72833BFB12}"/>
               </a:ext>
             </a:extLst>
           </p:cNvPr>
@@ -10311,10 +10956,10 @@
       </p:sp>
       <p:sp>
         <p:nvSpPr>
-          <p:cNvPr id="7" name="">
+          <p:cNvPr id="8" name="">
             <a:extLst xmlns:a="http://schemas.openxmlformats.org/drawingml/2006/main">
               <a:ext uri="{FF2B5EF4-FFF2-40B4-BE49-F238E27FC236}">
-                <a16:creationId xmlns:a16="http://schemas.microsoft.com/office/drawing/2014/main" id="{C4F6E19D-BC51-48D3-8B4A-75F3603A4AEC}"/>
+                <a16:creationId xmlns:a16="http://schemas.microsoft.com/office/drawing/2014/main" id="{8B28DE9D-0958-4560-9DCD-F00D1EFB9358}"/>
               </a:ext>
             </a:extLst>
           </p:cNvPr>
@@ -10380,10 +11025,10 @@
       </p:sp>
       <p:sp>
         <p:nvSpPr>
-          <p:cNvPr id="8" name="">
+          <p:cNvPr id="9" name="">
             <a:extLst xmlns:a="http://schemas.openxmlformats.org/drawingml/2006/main">
               <a:ext uri="{FF2B5EF4-FFF2-40B4-BE49-F238E27FC236}">
-                <a16:creationId xmlns:a16="http://schemas.microsoft.com/office/drawing/2014/main" id="{E5343CE7-4966-4B59-BAB2-53D4A0C368B2}"/>
+                <a16:creationId xmlns:a16="http://schemas.microsoft.com/office/drawing/2014/main" id="{0E08F124-5C4D-44AC-A992-B21090419F93}"/>
               </a:ext>
             </a:extLst>
           </p:cNvPr>
@@ -10449,10 +11094,10 @@
       </p:sp>
       <p:sp>
         <p:nvSpPr>
-          <p:cNvPr id="9" name="">
+          <p:cNvPr id="10" name="">
             <a:extLst xmlns:a="http://schemas.openxmlformats.org/drawingml/2006/main">
               <a:ext uri="{FF2B5EF4-FFF2-40B4-BE49-F238E27FC236}">
-                <a16:creationId xmlns:a16="http://schemas.microsoft.com/office/drawing/2014/main" id="{44AB3A78-DAF7-41B3-BD72-736B6A9488DC}"/>
+                <a16:creationId xmlns:a16="http://schemas.microsoft.com/office/drawing/2014/main" id="{BDAF4D86-8686-4820-8F5B-CC0AD2732D78}"/>
               </a:ext>
             </a:extLst>
           </p:cNvPr>
@@ -10518,10 +11163,10 @@
       </p:sp>
       <p:sp>
         <p:nvSpPr>
-          <p:cNvPr id="10" name="">
+          <p:cNvPr id="11" name="">
             <a:extLst xmlns:a="http://schemas.openxmlformats.org/drawingml/2006/main">
               <a:ext uri="{FF2B5EF4-FFF2-40B4-BE49-F238E27FC236}">
-                <a16:creationId xmlns:a16="http://schemas.microsoft.com/office/drawing/2014/main" id="{89EFD438-7D78-4FBD-B1EE-1D9E075A604B}"/>
+                <a16:creationId xmlns:a16="http://schemas.microsoft.com/office/drawing/2014/main" id="{2AE901AE-9E8D-4132-B14C-75F0895B9EF4}"/>
               </a:ext>
             </a:extLst>
           </p:cNvPr>
@@ -10587,10 +11232,10 @@
       </p:sp>
       <p:sp>
         <p:nvSpPr>
-          <p:cNvPr id="11" name="">
+          <p:cNvPr id="12" name="">
             <a:extLst xmlns:a="http://schemas.openxmlformats.org/drawingml/2006/main">
               <a:ext uri="{FF2B5EF4-FFF2-40B4-BE49-F238E27FC236}">
-                <a16:creationId xmlns:a16="http://schemas.microsoft.com/office/drawing/2014/main" id="{E85B8BA8-DE25-4EF3-BF77-AE43BE130654}"/>
+                <a16:creationId xmlns:a16="http://schemas.microsoft.com/office/drawing/2014/main" id="{6119F18B-85EB-4C34-8D8A-595F6B8DD2A6}"/>
               </a:ext>
             </a:extLst>
           </p:cNvPr>
@@ -10656,10 +11301,10 @@
       </p:sp>
       <p:sp>
         <p:nvSpPr>
-          <p:cNvPr id="12" name="">
+          <p:cNvPr id="13" name="">
             <a:extLst xmlns:a="http://schemas.openxmlformats.org/drawingml/2006/main">
               <a:ext uri="{FF2B5EF4-FFF2-40B4-BE49-F238E27FC236}">
-                <a16:creationId xmlns:a16="http://schemas.microsoft.com/office/drawing/2014/main" id="{5DD5B215-A11F-438B-A2AE-AE2C7E72A168}"/>
+                <a16:creationId xmlns:a16="http://schemas.microsoft.com/office/drawing/2014/main" id="{96CE4052-0E40-4114-AE02-10D3364ECE92}"/>
               </a:ext>
             </a:extLst>
           </p:cNvPr>
@@ -10725,10 +11370,10 @@
       </p:sp>
       <p:sp>
         <p:nvSpPr>
-          <p:cNvPr id="13" name="">
+          <p:cNvPr id="14" name="">
             <a:extLst xmlns:a="http://schemas.openxmlformats.org/drawingml/2006/main">
               <a:ext uri="{FF2B5EF4-FFF2-40B4-BE49-F238E27FC236}">
-                <a16:creationId xmlns:a16="http://schemas.microsoft.com/office/drawing/2014/main" id="{F18C581C-08CB-48C4-8649-0F1F0538AA66}"/>
+                <a16:creationId xmlns:a16="http://schemas.microsoft.com/office/drawing/2014/main" id="{795EE869-5F43-4883-9E8D-7BC081507D91}"/>
               </a:ext>
             </a:extLst>
           </p:cNvPr>
@@ -10794,10 +11439,10 @@
       </p:sp>
       <p:sp>
         <p:nvSpPr>
-          <p:cNvPr id="14" name="">
+          <p:cNvPr id="15" name="">
             <a:extLst xmlns:a="http://schemas.openxmlformats.org/drawingml/2006/main">
               <a:ext uri="{FF2B5EF4-FFF2-40B4-BE49-F238E27FC236}">
-                <a16:creationId xmlns:a16="http://schemas.microsoft.com/office/drawing/2014/main" id="{204F20CD-88C8-41E8-B21C-1E21F5C0F29D}"/>
+                <a16:creationId xmlns:a16="http://schemas.microsoft.com/office/drawing/2014/main" id="{47A911F2-F7C8-4063-A76B-41170D34D87B}"/>
               </a:ext>
             </a:extLst>
           </p:cNvPr>
@@ -10863,10 +11508,10 @@
       </p:sp>
       <p:sp>
         <p:nvSpPr>
-          <p:cNvPr id="15" name="">
+          <p:cNvPr id="16" name="">
             <a:extLst xmlns:a="http://schemas.openxmlformats.org/drawingml/2006/main">
               <a:ext uri="{FF2B5EF4-FFF2-40B4-BE49-F238E27FC236}">
-                <a16:creationId xmlns:a16="http://schemas.microsoft.com/office/drawing/2014/main" id="{D75B94A0-5081-49A9-8682-EF4581C78519}"/>
+                <a16:creationId xmlns:a16="http://schemas.microsoft.com/office/drawing/2014/main" id="{D87AA2DA-3D24-48E0-9BF4-EF3186431D63}"/>
               </a:ext>
             </a:extLst>
           </p:cNvPr>
@@ -10932,10 +11577,10 @@
       </p:sp>
       <p:sp>
         <p:nvSpPr>
-          <p:cNvPr id="16" name="">
+          <p:cNvPr id="17" name="">
             <a:extLst xmlns:a="http://schemas.openxmlformats.org/drawingml/2006/main">
               <a:ext uri="{FF2B5EF4-FFF2-40B4-BE49-F238E27FC236}">
-                <a16:creationId xmlns:a16="http://schemas.microsoft.com/office/drawing/2014/main" id="{AE654176-CC5A-4F60-88DF-3C6E3EFE2256}"/>
+                <a16:creationId xmlns:a16="http://schemas.microsoft.com/office/drawing/2014/main" id="{E7C77AFE-5E8E-4C30-877C-0942A679C950}"/>
               </a:ext>
             </a:extLst>
           </p:cNvPr>
@@ -11060,7 +11705,7 @@
     </p:spTree>
     <p:extLst>
       <p:ext uri="{BB962C8B-B14F-4D97-AF65-F5344CB8AC3E}">
-        <p14:creationId xmlns:p14="http://schemas.microsoft.com/office/powerpoint/2010/main" val="1427507030"/>
+        <p14:creationId xmlns:p14="http://schemas.microsoft.com/office/powerpoint/2010/main" val="582891391"/>
       </p:ext>
     </p:extLst>
   </p:cSld>

--- a/docs/FoodBridge_Project_Review.pptx
+++ b/docs/FoodBridge_Project_Review.pptx
@@ -2,22 +2,22 @@
 <file path=ppt/presentation.xml><?xml version="1.0" encoding="utf-8"?>
 <p:presentation xmlns:p="http://schemas.openxmlformats.org/presentationml/2006/main">
   <p:sldMasterIdLst>
-    <p:sldMasterId xmlns:r="http://schemas.openxmlformats.org/officeDocument/2006/relationships" id="2147483648" r:id="R2997cc355cf4414a"/>
+    <p:sldMasterId xmlns:r="http://schemas.openxmlformats.org/officeDocument/2006/relationships" id="2147483648" r:id="R86e99215941846d8"/>
   </p:sldMasterIdLst>
   <p:notesMasterIdLst>
-    <p:notesMasterId xmlns:r="http://schemas.openxmlformats.org/officeDocument/2006/relationships" r:id="Rd2bcf79e84c74f9e"/>
+    <p:notesMasterId xmlns:r="http://schemas.openxmlformats.org/officeDocument/2006/relationships" r:id="R687e9e970a074d9d"/>
   </p:notesMasterIdLst>
   <p:sldIdLst>
-    <p:sldId xmlns:r="http://schemas.openxmlformats.org/officeDocument/2006/relationships" id="256" r:id="R40df262a2a3e4ef3"/>
-    <p:sldId xmlns:r="http://schemas.openxmlformats.org/officeDocument/2006/relationships" id="257" r:id="R233ec4bf111542d4"/>
-    <p:sldId xmlns:r="http://schemas.openxmlformats.org/officeDocument/2006/relationships" id="258" r:id="Rded3c8e24b1f4e2a"/>
-    <p:sldId xmlns:r="http://schemas.openxmlformats.org/officeDocument/2006/relationships" id="259" r:id="Ra893f3e762c146cd"/>
-    <p:sldId xmlns:r="http://schemas.openxmlformats.org/officeDocument/2006/relationships" id="260" r:id="R8c03a03c7c6e44f3"/>
-    <p:sldId xmlns:r="http://schemas.openxmlformats.org/officeDocument/2006/relationships" id="261" r:id="R1b57c96a11f24bab"/>
-    <p:sldId xmlns:r="http://schemas.openxmlformats.org/officeDocument/2006/relationships" id="262" r:id="Rbd94185ed086440f"/>
-    <p:sldId xmlns:r="http://schemas.openxmlformats.org/officeDocument/2006/relationships" id="263" r:id="R632005beed55401f"/>
-    <p:sldId xmlns:r="http://schemas.openxmlformats.org/officeDocument/2006/relationships" id="264" r:id="R1a16d6aaf07c4d6f"/>
-    <p:sldId xmlns:r="http://schemas.openxmlformats.org/officeDocument/2006/relationships" id="265" r:id="R16e7be827af54dd6"/>
+    <p:sldId xmlns:r="http://schemas.openxmlformats.org/officeDocument/2006/relationships" id="256" r:id="Rd9240eea9c514a23"/>
+    <p:sldId xmlns:r="http://schemas.openxmlformats.org/officeDocument/2006/relationships" id="257" r:id="R6377a5db567849c3"/>
+    <p:sldId xmlns:r="http://schemas.openxmlformats.org/officeDocument/2006/relationships" id="258" r:id="R3593137fda7c407b"/>
+    <p:sldId xmlns:r="http://schemas.openxmlformats.org/officeDocument/2006/relationships" id="259" r:id="R9c06c330a28b4fc0"/>
+    <p:sldId xmlns:r="http://schemas.openxmlformats.org/officeDocument/2006/relationships" id="260" r:id="R35c03b5de28d4ef2"/>
+    <p:sldId xmlns:r="http://schemas.openxmlformats.org/officeDocument/2006/relationships" id="261" r:id="Ra4c934b50fae4b7e"/>
+    <p:sldId xmlns:r="http://schemas.openxmlformats.org/officeDocument/2006/relationships" id="262" r:id="R7f34c98d00f9426d"/>
+    <p:sldId xmlns:r="http://schemas.openxmlformats.org/officeDocument/2006/relationships" id="263" r:id="Rf70f03e843b44c62"/>
+    <p:sldId xmlns:r="http://schemas.openxmlformats.org/officeDocument/2006/relationships" id="264" r:id="Rd600b616c6ac4002"/>
+    <p:sldId xmlns:r="http://schemas.openxmlformats.org/officeDocument/2006/relationships" id="265" r:id="R8ef577847b4c456f"/>
   </p:sldIdLst>
   <p:sldSz cx="12192000" cy="6858000"/>
   <p:notesSz cx="6858000" cy="9144000"/>
@@ -941,7 +941,7 @@
           <a:lstStyle xmlns:a="http://schemas.openxmlformats.org/drawingml/2006/main"/>
           <a:p xmlns:a="http://schemas.openxmlformats.org/drawingml/2006/main">
             <a:r>
-              <a:t>About 30 seconds. Point at the submitted diagram, name the four layers, and mention JWT and the server side checks.</a:t>
+              <a:t>About 30 seconds. Point at the submitted diagram, name the four layers, and mention JWT and the server side checks. If asked how a box maps to the code: Login and Signup pages plus the four role dashboards, EnginePage and AnalyticsPage in React. AuthController, DonationController, RecipientController, VolunteerController, AllocationController, NotificationController, AnalyticsController and AdminController. AuthService, DonationService, RecipientService, VolunteerService, DeliveryService, AllocationEngineService, NotificationService, AnalyticsService and AdminService. Twelve Spring Data repositories over twelve MySQL tables. Supporting components: SecurityConfig with JwtService and JwtAuthFilter, jakarta validation on the request objects, GlobalExceptionHandler, AuditService, and transactional service methods. Logging runs through the framework logger, SLF4J.</a:t>
             </a:r>
           </a:p>
         </p:txBody>
@@ -1128,7 +1128,7 @@
           <p:cNvPr id="3" name="Title">
             <a:extLst xmlns:a="http://schemas.openxmlformats.org/drawingml/2006/main">
               <a:ext uri="{FF2B5EF4-FFF2-40B4-BE49-F238E27FC236}">
-                <a16:creationId xmlns:a16="http://schemas.microsoft.com/office/drawing/2014/main" id="{30F08FFD-D713-4721-9E97-5AB140AC5DB1}"/>
+                <a16:creationId xmlns:a16="http://schemas.microsoft.com/office/drawing/2014/main" id="{A981B870-E13F-41FF-860F-E6BD0D354C4A}"/>
               </a:ext>
             </a:extLst>
           </p:cNvPr>
@@ -1285,7 +1285,7 @@
           <p:cNvPr id="2" name="Subtitle">
             <a:extLst xmlns:a="http://schemas.openxmlformats.org/drawingml/2006/main">
               <a:ext uri="{FF2B5EF4-FFF2-40B4-BE49-F238E27FC236}">
-                <a16:creationId xmlns:a16="http://schemas.microsoft.com/office/drawing/2014/main" id="{3DC2C094-D7DE-4BB8-A9CD-E3B5B918F7B0}"/>
+                <a16:creationId xmlns:a16="http://schemas.microsoft.com/office/drawing/2014/main" id="{CFF4B9A0-21F4-4D76-AFF8-48C9C9EB4FE5}"/>
               </a:ext>
             </a:extLst>
           </p:cNvPr>
@@ -1459,7 +1459,7 @@
           <p:cNvPr id="2" name="Section title">
             <a:extLst xmlns:a="http://schemas.openxmlformats.org/drawingml/2006/main">
               <a:ext uri="{FF2B5EF4-FFF2-40B4-BE49-F238E27FC236}">
-                <a16:creationId xmlns:a16="http://schemas.microsoft.com/office/drawing/2014/main" id="{9D5566E6-6036-4B71-8FCC-FBF0046A71A8}"/>
+                <a16:creationId xmlns:a16="http://schemas.microsoft.com/office/drawing/2014/main" id="{B40E0166-176F-4ED8-8E8A-5D43F8A610AD}"/>
               </a:ext>
             </a:extLst>
           </p:cNvPr>
@@ -1633,7 +1633,7 @@
           <p:cNvPr id="3" name="Title">
             <a:extLst xmlns:a="http://schemas.openxmlformats.org/drawingml/2006/main">
               <a:ext uri="{FF2B5EF4-FFF2-40B4-BE49-F238E27FC236}">
-                <a16:creationId xmlns:a16="http://schemas.microsoft.com/office/drawing/2014/main" id="{177EA7C1-0D6E-4ABA-B5BF-BA3F2EC331F7}"/>
+                <a16:creationId xmlns:a16="http://schemas.microsoft.com/office/drawing/2014/main" id="{0B1C1FE1-D2AE-4786-A04C-DD783E68FE45}"/>
               </a:ext>
             </a:extLst>
           </p:cNvPr>
@@ -1790,7 +1790,7 @@
           <p:cNvPr id="2" name="Body">
             <a:extLst xmlns:a="http://schemas.openxmlformats.org/drawingml/2006/main">
               <a:ext uri="{FF2B5EF4-FFF2-40B4-BE49-F238E27FC236}">
-                <a16:creationId xmlns:a16="http://schemas.microsoft.com/office/drawing/2014/main" id="{E87538EC-4139-475F-B8DB-71A4084B9CC8}"/>
+                <a16:creationId xmlns:a16="http://schemas.microsoft.com/office/drawing/2014/main" id="{AA27D377-4E06-482B-AC59-07A343B3DE3C}"/>
               </a:ext>
             </a:extLst>
           </p:cNvPr>
@@ -1964,7 +1964,7 @@
           <p:cNvPr id="4" name="Title">
             <a:extLst xmlns:a="http://schemas.openxmlformats.org/drawingml/2006/main">
               <a:ext uri="{FF2B5EF4-FFF2-40B4-BE49-F238E27FC236}">
-                <a16:creationId xmlns:a16="http://schemas.microsoft.com/office/drawing/2014/main" id="{F6C19DE9-D2A4-4459-90FB-04DF018F7D93}"/>
+                <a16:creationId xmlns:a16="http://schemas.microsoft.com/office/drawing/2014/main" id="{EA08DBA5-3215-4A67-B722-C8297C931370}"/>
               </a:ext>
             </a:extLst>
           </p:cNvPr>
@@ -2121,7 +2121,7 @@
           <p:cNvPr id="2" name="Left column">
             <a:extLst xmlns:a="http://schemas.openxmlformats.org/drawingml/2006/main">
               <a:ext uri="{FF2B5EF4-FFF2-40B4-BE49-F238E27FC236}">
-                <a16:creationId xmlns:a16="http://schemas.microsoft.com/office/drawing/2014/main" id="{F8E6F062-37FD-494A-84C7-35F4501A9BFB}"/>
+                <a16:creationId xmlns:a16="http://schemas.microsoft.com/office/drawing/2014/main" id="{05CC8C88-4A46-4B79-904F-33B948045C6D}"/>
               </a:ext>
             </a:extLst>
           </p:cNvPr>
@@ -2278,7 +2278,7 @@
           <p:cNvPr id="3" name="Right column">
             <a:extLst xmlns:a="http://schemas.openxmlformats.org/drawingml/2006/main">
               <a:ext uri="{FF2B5EF4-FFF2-40B4-BE49-F238E27FC236}">
-                <a16:creationId xmlns:a16="http://schemas.microsoft.com/office/drawing/2014/main" id="{7A93EA39-7F03-4B66-AF6B-B58250CEB79C}"/>
+                <a16:creationId xmlns:a16="http://schemas.microsoft.com/office/drawing/2014/main" id="{11199C75-73E7-4331-9924-D666E81E5D45}"/>
               </a:ext>
             </a:extLst>
           </p:cNvPr>
@@ -2452,7 +2452,7 @@
           <p:cNvPr id="3" name="Title">
             <a:extLst xmlns:a="http://schemas.openxmlformats.org/drawingml/2006/main">
               <a:ext uri="{FF2B5EF4-FFF2-40B4-BE49-F238E27FC236}">
-                <a16:creationId xmlns:a16="http://schemas.microsoft.com/office/drawing/2014/main" id="{6BAD64C7-91F4-4E47-B31B-4769D9E76947}"/>
+                <a16:creationId xmlns:a16="http://schemas.microsoft.com/office/drawing/2014/main" id="{4BB992AF-2169-4C1F-BC09-8DA1F359FE00}"/>
               </a:ext>
             </a:extLst>
           </p:cNvPr>
@@ -2609,7 +2609,7 @@
           <p:cNvPr id="2" name="Left column">
             <a:extLst xmlns:a="http://schemas.openxmlformats.org/drawingml/2006/main">
               <a:ext uri="{FF2B5EF4-FFF2-40B4-BE49-F238E27FC236}">
-                <a16:creationId xmlns:a16="http://schemas.microsoft.com/office/drawing/2014/main" id="{3C558B3D-99C7-45AD-A762-2D111D3399F2}"/>
+                <a16:creationId xmlns:a16="http://schemas.microsoft.com/office/drawing/2014/main" id="{FFBFFCF6-4364-4D94-BDEB-5DA58E7C07C0}"/>
               </a:ext>
             </a:extLst>
           </p:cNvPr>
@@ -2804,12 +2804,12 @@
   </p:cSld>
   <p:clrMap bg1="lt1" tx1="dk1" bg2="lt2" tx2="dk2" accent1="accent1" accent2="accent2" accent3="accent3" accent4="accent4" accent5="accent5" accent6="accent6" hlink="hlink" folHlink="folHlink"/>
   <p:sldLayoutIdLst>
-    <p:sldLayoutId xmlns:r="http://schemas.openxmlformats.org/officeDocument/2006/relationships" id="2147483649" r:id="Ra9d05586b4b84d72"/>
-    <p:sldLayoutId xmlns:r="http://schemas.openxmlformats.org/officeDocument/2006/relationships" id="2147483650" r:id="R4449b291464b4533"/>
-    <p:sldLayoutId xmlns:r="http://schemas.openxmlformats.org/officeDocument/2006/relationships" id="2147483651" r:id="R53cbe0be4ae74ab7"/>
-    <p:sldLayoutId xmlns:r="http://schemas.openxmlformats.org/officeDocument/2006/relationships" id="2147483652" r:id="R35febde9cede47eb"/>
-    <p:sldLayoutId xmlns:r="http://schemas.openxmlformats.org/officeDocument/2006/relationships" id="2147483653" r:id="Rac435a57b8cd4661"/>
-    <p:sldLayoutId xmlns:r="http://schemas.openxmlformats.org/officeDocument/2006/relationships" id="2147483654" r:id="Rfde13663878749ac"/>
+    <p:sldLayoutId xmlns:r="http://schemas.openxmlformats.org/officeDocument/2006/relationships" id="2147483649" r:id="R38f0d07892ef4b1d"/>
+    <p:sldLayoutId xmlns:r="http://schemas.openxmlformats.org/officeDocument/2006/relationships" id="2147483650" r:id="R1883358d918743d5"/>
+    <p:sldLayoutId xmlns:r="http://schemas.openxmlformats.org/officeDocument/2006/relationships" id="2147483651" r:id="R3156696ceff14b14"/>
+    <p:sldLayoutId xmlns:r="http://schemas.openxmlformats.org/officeDocument/2006/relationships" id="2147483652" r:id="R434f95b8decd4a97"/>
+    <p:sldLayoutId xmlns:r="http://schemas.openxmlformats.org/officeDocument/2006/relationships" id="2147483653" r:id="R3f6b6495aebd489f"/>
+    <p:sldLayoutId xmlns:r="http://schemas.openxmlformats.org/officeDocument/2006/relationships" id="2147483654" r:id="Rd0b9cead6a8142d6"/>
   </p:sldLayoutIdLst>
   <p:txStyles>
     <p:titleStyle>
@@ -3360,7 +3360,7 @@
           <p:cNvPr id="7" name="">
             <a:extLst xmlns:a="http://schemas.openxmlformats.org/drawingml/2006/main">
               <a:ext uri="{FF2B5EF4-FFF2-40B4-BE49-F238E27FC236}">
-                <a16:creationId xmlns:a16="http://schemas.microsoft.com/office/drawing/2014/main" id="{7803F117-FB4F-41BB-88EC-F216E1374F89}"/>
+                <a16:creationId xmlns:a16="http://schemas.microsoft.com/office/drawing/2014/main" id="{5B325CFC-B04C-4A86-BE5B-15BDEEDCD5C4}"/>
               </a:ext>
             </a:extLst>
           </p:cNvPr>
@@ -3370,7 +3370,7 @@
           <p:nvPr/>
         </p:nvPicPr>
         <p:blipFill>
-          <a:blip xmlns:r="http://schemas.openxmlformats.org/officeDocument/2006/relationships" xmlns:a="http://schemas.openxmlformats.org/drawingml/2006/main" r:embed="R8d1bf92740da4f39"/>
+          <a:blip xmlns:r="http://schemas.openxmlformats.org/officeDocument/2006/relationships" xmlns:a="http://schemas.openxmlformats.org/drawingml/2006/main" r:embed="R1a80bbf84bd243b0"/>
           <a:stretch xmlns:a="http://schemas.openxmlformats.org/drawingml/2006/main"/>
         </p:blipFill>
         <p:spPr>
@@ -3388,7 +3388,7 @@
           <p:cNvPr id="2" name="">
             <a:extLst xmlns:a="http://schemas.openxmlformats.org/drawingml/2006/main">
               <a:ext uri="{FF2B5EF4-FFF2-40B4-BE49-F238E27FC236}">
-                <a16:creationId xmlns:a16="http://schemas.microsoft.com/office/drawing/2014/main" id="{AAA83703-9E42-40EF-B447-E363702170F0}"/>
+                <a16:creationId xmlns:a16="http://schemas.microsoft.com/office/drawing/2014/main" id="{C7AE58C6-60D9-4068-A71B-A39FB6B76516}"/>
               </a:ext>
             </a:extLst>
           </p:cNvPr>
@@ -3457,7 +3457,7 @@
           <p:cNvPr id="3" name="">
             <a:extLst xmlns:a="http://schemas.openxmlformats.org/drawingml/2006/main">
               <a:ext uri="{FF2B5EF4-FFF2-40B4-BE49-F238E27FC236}">
-                <a16:creationId xmlns:a16="http://schemas.microsoft.com/office/drawing/2014/main" id="{CC934BD5-1681-4A98-BC02-97A60A127340}"/>
+                <a16:creationId xmlns:a16="http://schemas.microsoft.com/office/drawing/2014/main" id="{3AC662E4-65EE-4C1C-851C-361EA325BBE0}"/>
               </a:ext>
             </a:extLst>
           </p:cNvPr>
@@ -3526,7 +3526,7 @@
           <p:cNvPr id="4" name="">
             <a:extLst xmlns:a="http://schemas.openxmlformats.org/drawingml/2006/main">
               <a:ext uri="{FF2B5EF4-FFF2-40B4-BE49-F238E27FC236}">
-                <a16:creationId xmlns:a16="http://schemas.microsoft.com/office/drawing/2014/main" id="{3769B8AC-9181-4849-B744-A9F89E03D301}"/>
+                <a16:creationId xmlns:a16="http://schemas.microsoft.com/office/drawing/2014/main" id="{FB08770A-C19C-45D6-A740-799661655FAE}"/>
               </a:ext>
             </a:extLst>
           </p:cNvPr>
@@ -3557,7 +3557,7 @@
           <p:cNvPr id="5" name="">
             <a:extLst xmlns:a="http://schemas.openxmlformats.org/drawingml/2006/main">
               <a:ext uri="{FF2B5EF4-FFF2-40B4-BE49-F238E27FC236}">
-                <a16:creationId xmlns:a16="http://schemas.microsoft.com/office/drawing/2014/main" id="{F44584E7-6E51-4A37-AD76-9DDF126D8DFE}"/>
+                <a16:creationId xmlns:a16="http://schemas.microsoft.com/office/drawing/2014/main" id="{040A0684-45C0-4197-8192-C89D1725060A}"/>
               </a:ext>
             </a:extLst>
           </p:cNvPr>
@@ -3626,7 +3626,7 @@
           <p:cNvPr id="6" name="">
             <a:extLst xmlns:a="http://schemas.openxmlformats.org/drawingml/2006/main">
               <a:ext uri="{FF2B5EF4-FFF2-40B4-BE49-F238E27FC236}">
-                <a16:creationId xmlns:a16="http://schemas.microsoft.com/office/drawing/2014/main" id="{5CA4C4E8-F0AD-4BFD-94D0-CBDEF1D3806D}"/>
+                <a16:creationId xmlns:a16="http://schemas.microsoft.com/office/drawing/2014/main" id="{63B9CE8B-F3DC-4B3A-88F1-A27BBC1AD288}"/>
               </a:ext>
             </a:extLst>
           </p:cNvPr>
@@ -3693,7 +3693,7 @@
     </p:spTree>
     <p:extLst>
       <p:ext uri="{BB962C8B-B14F-4D97-AF65-F5344CB8AC3E}">
-        <p14:creationId xmlns:p14="http://schemas.microsoft.com/office/powerpoint/2010/main" val="1264910561"/>
+        <p14:creationId xmlns:p14="http://schemas.microsoft.com/office/powerpoint/2010/main" val="1742829626"/>
       </p:ext>
     </p:extLst>
   </p:cSld>
@@ -3724,7 +3724,7 @@
           <p:cNvPr id="9" name="">
             <a:extLst xmlns:a="http://schemas.openxmlformats.org/drawingml/2006/main">
               <a:ext uri="{FF2B5EF4-FFF2-40B4-BE49-F238E27FC236}">
-                <a16:creationId xmlns:a16="http://schemas.microsoft.com/office/drawing/2014/main" id="{F8AF45CF-EDC7-4926-B9AE-0C3281756219}"/>
+                <a16:creationId xmlns:a16="http://schemas.microsoft.com/office/drawing/2014/main" id="{70A81199-A4F1-4177-9D08-729D11C45BD2}"/>
               </a:ext>
             </a:extLst>
           </p:cNvPr>
@@ -3793,7 +3793,7 @@
           <p:cNvPr id="2" name="slide-title">
             <a:extLst xmlns:a="http://schemas.openxmlformats.org/drawingml/2006/main">
               <a:ext uri="{FF2B5EF4-FFF2-40B4-BE49-F238E27FC236}">
-                <a16:creationId xmlns:a16="http://schemas.microsoft.com/office/drawing/2014/main" id="{2BF4B391-A78D-41E4-A0DB-F98D891239A5}"/>
+                <a16:creationId xmlns:a16="http://schemas.microsoft.com/office/drawing/2014/main" id="{997876BE-37F6-4263-833B-2EE25B3C5506}"/>
               </a:ext>
             </a:extLst>
           </p:cNvPr>
@@ -3862,7 +3862,7 @@
           <p:cNvPr id="3" name="slide-lead">
             <a:extLst xmlns:a="http://schemas.openxmlformats.org/drawingml/2006/main">
               <a:ext uri="{FF2B5EF4-FFF2-40B4-BE49-F238E27FC236}">
-                <a16:creationId xmlns:a16="http://schemas.microsoft.com/office/drawing/2014/main" id="{50B1C235-FD64-45D3-9A98-A4BA5D8337BB}"/>
+                <a16:creationId xmlns:a16="http://schemas.microsoft.com/office/drawing/2014/main" id="{3690A88B-51AD-4689-9D3B-582F586F2C3B}"/>
               </a:ext>
             </a:extLst>
           </p:cNvPr>
@@ -3931,7 +3931,7 @@
           <p:cNvPr id="4" name="title-rule">
             <a:extLst xmlns:a="http://schemas.openxmlformats.org/drawingml/2006/main">
               <a:ext uri="{FF2B5EF4-FFF2-40B4-BE49-F238E27FC236}">
-                <a16:creationId xmlns:a16="http://schemas.microsoft.com/office/drawing/2014/main" id="{EB323F36-9912-4A32-9227-AA40A9CC7D81}"/>
+                <a16:creationId xmlns:a16="http://schemas.microsoft.com/office/drawing/2014/main" id="{B2F53B46-E3B4-426F-8FC9-6AE6132084AF}"/>
               </a:ext>
             </a:extLst>
           </p:cNvPr>
@@ -3962,7 +3962,7 @@
           <p:cNvPr id="5" name="">
             <a:extLst xmlns:a="http://schemas.openxmlformats.org/drawingml/2006/main">
               <a:ext uri="{FF2B5EF4-FFF2-40B4-BE49-F238E27FC236}">
-                <a16:creationId xmlns:a16="http://schemas.microsoft.com/office/drawing/2014/main" id="{6E75C2A9-200D-4D84-8EF5-6AEABFD4412B}"/>
+                <a16:creationId xmlns:a16="http://schemas.microsoft.com/office/drawing/2014/main" id="{0DF0DA91-80F2-4519-B823-F00054651838}"/>
               </a:ext>
             </a:extLst>
           </p:cNvPr>
@@ -4031,7 +4031,7 @@
           <p:cNvPr id="6" name="">
             <a:extLst xmlns:a="http://schemas.openxmlformats.org/drawingml/2006/main">
               <a:ext uri="{FF2B5EF4-FFF2-40B4-BE49-F238E27FC236}">
-                <a16:creationId xmlns:a16="http://schemas.microsoft.com/office/drawing/2014/main" id="{000F5FC2-F6FB-4D25-826A-578868629B0B}"/>
+                <a16:creationId xmlns:a16="http://schemas.microsoft.com/office/drawing/2014/main" id="{55F17960-8DB5-417B-A238-C24791ECE5F8}"/>
               </a:ext>
             </a:extLst>
           </p:cNvPr>
@@ -4185,7 +4185,7 @@
           <p:cNvPr id="7" name="">
             <a:extLst xmlns:a="http://schemas.openxmlformats.org/drawingml/2006/main">
               <a:ext uri="{FF2B5EF4-FFF2-40B4-BE49-F238E27FC236}">
-                <a16:creationId xmlns:a16="http://schemas.microsoft.com/office/drawing/2014/main" id="{8558097C-894A-4FF6-B051-E73CF0CC9208}"/>
+                <a16:creationId xmlns:a16="http://schemas.microsoft.com/office/drawing/2014/main" id="{41573E89-DF57-47B9-A657-A75514BEE6F3}"/>
               </a:ext>
             </a:extLst>
           </p:cNvPr>
@@ -4254,7 +4254,7 @@
           <p:cNvPr id="8" name="">
             <a:extLst xmlns:a="http://schemas.openxmlformats.org/drawingml/2006/main">
               <a:ext uri="{FF2B5EF4-FFF2-40B4-BE49-F238E27FC236}">
-                <a16:creationId xmlns:a16="http://schemas.microsoft.com/office/drawing/2014/main" id="{73ECEDF0-D229-4090-8EF4-AA225934C51B}"/>
+                <a16:creationId xmlns:a16="http://schemas.microsoft.com/office/drawing/2014/main" id="{6248217F-C4AF-4924-91B3-81908B8E3D0B}"/>
               </a:ext>
             </a:extLst>
           </p:cNvPr>
@@ -4406,7 +4406,7 @@
     </p:spTree>
     <p:extLst>
       <p:ext uri="{BB962C8B-B14F-4D97-AF65-F5344CB8AC3E}">
-        <p14:creationId xmlns:p14="http://schemas.microsoft.com/office/powerpoint/2010/main" val="274963172"/>
+        <p14:creationId xmlns:p14="http://schemas.microsoft.com/office/powerpoint/2010/main" val="1025850689"/>
       </p:ext>
     </p:extLst>
   </p:cSld>
@@ -4437,7 +4437,7 @@
           <p:cNvPr id="7" name="">
             <a:extLst xmlns:a="http://schemas.openxmlformats.org/drawingml/2006/main">
               <a:ext uri="{FF2B5EF4-FFF2-40B4-BE49-F238E27FC236}">
-                <a16:creationId xmlns:a16="http://schemas.microsoft.com/office/drawing/2014/main" id="{63D70C23-E566-4375-B664-6286F851F721}"/>
+                <a16:creationId xmlns:a16="http://schemas.microsoft.com/office/drawing/2014/main" id="{48478906-EE34-43F9-8676-85C8675392CF}"/>
               </a:ext>
             </a:extLst>
           </p:cNvPr>
@@ -4506,7 +4506,7 @@
           <p:cNvPr id="2" name="slide-title">
             <a:extLst xmlns:a="http://schemas.openxmlformats.org/drawingml/2006/main">
               <a:ext uri="{FF2B5EF4-FFF2-40B4-BE49-F238E27FC236}">
-                <a16:creationId xmlns:a16="http://schemas.microsoft.com/office/drawing/2014/main" id="{9E25F9E3-2EDF-4D51-B038-48DAA0957551}"/>
+                <a16:creationId xmlns:a16="http://schemas.microsoft.com/office/drawing/2014/main" id="{90B1EA3D-D19A-44E0-B512-93B8CA405BD2}"/>
               </a:ext>
             </a:extLst>
           </p:cNvPr>
@@ -4575,7 +4575,7 @@
           <p:cNvPr id="3" name="slide-lead">
             <a:extLst xmlns:a="http://schemas.openxmlformats.org/drawingml/2006/main">
               <a:ext uri="{FF2B5EF4-FFF2-40B4-BE49-F238E27FC236}">
-                <a16:creationId xmlns:a16="http://schemas.microsoft.com/office/drawing/2014/main" id="{5B01DF31-4490-4071-8D2C-B4EBFD68D626}"/>
+                <a16:creationId xmlns:a16="http://schemas.microsoft.com/office/drawing/2014/main" id="{B9C887B4-FEE2-4759-AC88-E1C946935EEE}"/>
               </a:ext>
             </a:extLst>
           </p:cNvPr>
@@ -4644,7 +4644,7 @@
           <p:cNvPr id="4" name="title-rule">
             <a:extLst xmlns:a="http://schemas.openxmlformats.org/drawingml/2006/main">
               <a:ext uri="{FF2B5EF4-FFF2-40B4-BE49-F238E27FC236}">
-                <a16:creationId xmlns:a16="http://schemas.microsoft.com/office/drawing/2014/main" id="{ACD38377-596C-432D-A905-5B93B3278BC7}"/>
+                <a16:creationId xmlns:a16="http://schemas.microsoft.com/office/drawing/2014/main" id="{757A336A-AA6E-46BA-8911-F01C710589FA}"/>
               </a:ext>
             </a:extLst>
           </p:cNvPr>
@@ -4675,7 +4675,7 @@
           <p:cNvPr id="5" name="">
             <a:extLst xmlns:a="http://schemas.openxmlformats.org/drawingml/2006/main">
               <a:ext uri="{FF2B5EF4-FFF2-40B4-BE49-F238E27FC236}">
-                <a16:creationId xmlns:a16="http://schemas.microsoft.com/office/drawing/2014/main" id="{3546BCD1-5B5C-4D5C-89DB-78249666581D}"/>
+                <a16:creationId xmlns:a16="http://schemas.microsoft.com/office/drawing/2014/main" id="{A8813F7E-B3FB-4343-B262-68B8814C84A3}"/>
               </a:ext>
             </a:extLst>
           </p:cNvPr>
@@ -4829,7 +4829,7 @@
           <p:cNvPr id="6" name="">
             <a:extLst xmlns:a="http://schemas.openxmlformats.org/drawingml/2006/main">
               <a:ext uri="{FF2B5EF4-FFF2-40B4-BE49-F238E27FC236}">
-                <a16:creationId xmlns:a16="http://schemas.microsoft.com/office/drawing/2014/main" id="{F39F343D-DB46-4530-B879-5D447E75EAAD}"/>
+                <a16:creationId xmlns:a16="http://schemas.microsoft.com/office/drawing/2014/main" id="{9EF04B92-0047-4C47-86EA-9D04D6C1A82F}"/>
               </a:ext>
             </a:extLst>
           </p:cNvPr>
@@ -4896,7 +4896,7 @@
     </p:spTree>
     <p:extLst>
       <p:ext uri="{BB962C8B-B14F-4D97-AF65-F5344CB8AC3E}">
-        <p14:creationId xmlns:p14="http://schemas.microsoft.com/office/powerpoint/2010/main" val="771386058"/>
+        <p14:creationId xmlns:p14="http://schemas.microsoft.com/office/powerpoint/2010/main" val="246075698"/>
       </p:ext>
     </p:extLst>
   </p:cSld>
@@ -4927,7 +4927,7 @@
           <p:cNvPr id="7" name="">
             <a:extLst xmlns:a="http://schemas.openxmlformats.org/drawingml/2006/main">
               <a:ext uri="{FF2B5EF4-FFF2-40B4-BE49-F238E27FC236}">
-                <a16:creationId xmlns:a16="http://schemas.microsoft.com/office/drawing/2014/main" id="{9DF8445D-6FAA-451F-9782-742EC9904EFD}"/>
+                <a16:creationId xmlns:a16="http://schemas.microsoft.com/office/drawing/2014/main" id="{93D2A180-560C-47AC-A550-31EFB4CD770B}"/>
               </a:ext>
             </a:extLst>
           </p:cNvPr>
@@ -4996,7 +4996,7 @@
           <p:cNvPr id="2" name="slide-title">
             <a:extLst xmlns:a="http://schemas.openxmlformats.org/drawingml/2006/main">
               <a:ext uri="{FF2B5EF4-FFF2-40B4-BE49-F238E27FC236}">
-                <a16:creationId xmlns:a16="http://schemas.microsoft.com/office/drawing/2014/main" id="{E511E956-74AF-4CDE-9C2F-FDC489DB4B88}"/>
+                <a16:creationId xmlns:a16="http://schemas.microsoft.com/office/drawing/2014/main" id="{9768DE46-FFE2-4CBF-81A0-1BCE9CF3DCD3}"/>
               </a:ext>
             </a:extLst>
           </p:cNvPr>
@@ -5065,7 +5065,7 @@
           <p:cNvPr id="3" name="slide-lead">
             <a:extLst xmlns:a="http://schemas.openxmlformats.org/drawingml/2006/main">
               <a:ext uri="{FF2B5EF4-FFF2-40B4-BE49-F238E27FC236}">
-                <a16:creationId xmlns:a16="http://schemas.microsoft.com/office/drawing/2014/main" id="{CB8BC447-188B-498F-BB4E-A915A1948468}"/>
+                <a16:creationId xmlns:a16="http://schemas.microsoft.com/office/drawing/2014/main" id="{1F056ECA-325C-47E8-A7D6-B63C271AE84A}"/>
               </a:ext>
             </a:extLst>
           </p:cNvPr>
@@ -5134,7 +5134,7 @@
           <p:cNvPr id="4" name="title-rule">
             <a:extLst xmlns:a="http://schemas.openxmlformats.org/drawingml/2006/main">
               <a:ext uri="{FF2B5EF4-FFF2-40B4-BE49-F238E27FC236}">
-                <a16:creationId xmlns:a16="http://schemas.microsoft.com/office/drawing/2014/main" id="{34FCDC96-0E22-4954-9D24-00F729E82C40}"/>
+                <a16:creationId xmlns:a16="http://schemas.microsoft.com/office/drawing/2014/main" id="{326816BC-79C3-496F-90C7-BB04E6F888DB}"/>
               </a:ext>
             </a:extLst>
           </p:cNvPr>
@@ -5165,7 +5165,7 @@
           <p:cNvPr id="5" name="">
             <a:extLst xmlns:a="http://schemas.openxmlformats.org/drawingml/2006/main">
               <a:ext uri="{FF2B5EF4-FFF2-40B4-BE49-F238E27FC236}">
-                <a16:creationId xmlns:a16="http://schemas.microsoft.com/office/drawing/2014/main" id="{561290B9-0CD4-4AB4-B52D-5F443F706E4A}"/>
+                <a16:creationId xmlns:a16="http://schemas.microsoft.com/office/drawing/2014/main" id="{CAE94DE5-8D8E-46FD-B5BE-DB164FE2C46D}"/>
               </a:ext>
             </a:extLst>
           </p:cNvPr>
@@ -5682,7 +5682,7 @@
           <p:cNvPr id="6" name="">
             <a:extLst xmlns:a="http://schemas.openxmlformats.org/drawingml/2006/main">
               <a:ext uri="{FF2B5EF4-FFF2-40B4-BE49-F238E27FC236}">
-                <a16:creationId xmlns:a16="http://schemas.microsoft.com/office/drawing/2014/main" id="{ED5B225C-46B1-407A-87A7-26F3718DD430}"/>
+                <a16:creationId xmlns:a16="http://schemas.microsoft.com/office/drawing/2014/main" id="{245F3E5C-1540-4D13-88C3-517CC868B3AF}"/>
               </a:ext>
             </a:extLst>
           </p:cNvPr>
@@ -5749,7 +5749,7 @@
     </p:spTree>
     <p:extLst>
       <p:ext uri="{BB962C8B-B14F-4D97-AF65-F5344CB8AC3E}">
-        <p14:creationId xmlns:p14="http://schemas.microsoft.com/office/powerpoint/2010/main" val="620210820"/>
+        <p14:creationId xmlns:p14="http://schemas.microsoft.com/office/powerpoint/2010/main" val="2050482470"/>
       </p:ext>
     </p:extLst>
   </p:cSld>
@@ -5780,7 +5780,7 @@
           <p:cNvPr id="29" name="">
             <a:extLst xmlns:a="http://schemas.openxmlformats.org/drawingml/2006/main">
               <a:ext uri="{FF2B5EF4-FFF2-40B4-BE49-F238E27FC236}">
-                <a16:creationId xmlns:a16="http://schemas.microsoft.com/office/drawing/2014/main" id="{DC6E6878-76FD-4449-8972-CABA218221CF}"/>
+                <a16:creationId xmlns:a16="http://schemas.microsoft.com/office/drawing/2014/main" id="{840A9456-C345-4EC9-8E26-A366D41DFF14}"/>
               </a:ext>
             </a:extLst>
           </p:cNvPr>
@@ -5849,7 +5849,7 @@
           <p:cNvPr id="2" name="slide-title">
             <a:extLst xmlns:a="http://schemas.openxmlformats.org/drawingml/2006/main">
               <a:ext uri="{FF2B5EF4-FFF2-40B4-BE49-F238E27FC236}">
-                <a16:creationId xmlns:a16="http://schemas.microsoft.com/office/drawing/2014/main" id="{801E302E-187A-447A-86CD-1B1A8F453873}"/>
+                <a16:creationId xmlns:a16="http://schemas.microsoft.com/office/drawing/2014/main" id="{AEB2A442-458C-41D7-8756-1B0BAC9F5ADC}"/>
               </a:ext>
             </a:extLst>
           </p:cNvPr>
@@ -5918,7 +5918,7 @@
           <p:cNvPr id="3" name="slide-lead">
             <a:extLst xmlns:a="http://schemas.openxmlformats.org/drawingml/2006/main">
               <a:ext uri="{FF2B5EF4-FFF2-40B4-BE49-F238E27FC236}">
-                <a16:creationId xmlns:a16="http://schemas.microsoft.com/office/drawing/2014/main" id="{8C07C81E-D83A-4032-90DE-1CC35CFBD585}"/>
+                <a16:creationId xmlns:a16="http://schemas.microsoft.com/office/drawing/2014/main" id="{0CAA238A-F487-4E32-BC2C-7B5FEC2A6C78}"/>
               </a:ext>
             </a:extLst>
           </p:cNvPr>
@@ -5987,7 +5987,7 @@
           <p:cNvPr id="4" name="title-rule">
             <a:extLst xmlns:a="http://schemas.openxmlformats.org/drawingml/2006/main">
               <a:ext uri="{FF2B5EF4-FFF2-40B4-BE49-F238E27FC236}">
-                <a16:creationId xmlns:a16="http://schemas.microsoft.com/office/drawing/2014/main" id="{2CF428CA-86DC-4437-889C-9B51091408B6}"/>
+                <a16:creationId xmlns:a16="http://schemas.microsoft.com/office/drawing/2014/main" id="{1DDB2FDA-1530-41F2-B69E-B3CCCD358082}"/>
               </a:ext>
             </a:extLst>
           </p:cNvPr>
@@ -6018,7 +6018,7 @@
           <p:cNvPr id="5" name="flow-Donation registered">
             <a:extLst xmlns:a="http://schemas.openxmlformats.org/drawingml/2006/main">
               <a:ext uri="{FF2B5EF4-FFF2-40B4-BE49-F238E27FC236}">
-                <a16:creationId xmlns:a16="http://schemas.microsoft.com/office/drawing/2014/main" id="{A77193FC-A53F-4FB3-9BE1-2B556B51A6C6}"/>
+                <a16:creationId xmlns:a16="http://schemas.microsoft.com/office/drawing/2014/main" id="{3F6763F5-35E3-4ADE-88B5-4C2BE6313191}"/>
               </a:ext>
             </a:extLst>
           </p:cNvPr>
@@ -6053,7 +6053,7 @@
           <p:cNvPr id="6" name="">
             <a:extLst xmlns:a="http://schemas.openxmlformats.org/drawingml/2006/main">
               <a:ext uri="{FF2B5EF4-FFF2-40B4-BE49-F238E27FC236}">
-                <a16:creationId xmlns:a16="http://schemas.microsoft.com/office/drawing/2014/main" id="{9A3CCF73-472F-42E9-AAA8-AC802C331ABA}"/>
+                <a16:creationId xmlns:a16="http://schemas.microsoft.com/office/drawing/2014/main" id="{0A42004A-9ED4-4CCE-A91B-C453E89BCA10}"/>
               </a:ext>
             </a:extLst>
           </p:cNvPr>
@@ -6122,7 +6122,7 @@
           <p:cNvPr id="7" name="">
             <a:extLst xmlns:a="http://schemas.openxmlformats.org/drawingml/2006/main">
               <a:ext uri="{FF2B5EF4-FFF2-40B4-BE49-F238E27FC236}">
-                <a16:creationId xmlns:a16="http://schemas.microsoft.com/office/drawing/2014/main" id="{ECDC5B81-159B-48D0-A05C-CE31581959A0}"/>
+                <a16:creationId xmlns:a16="http://schemas.microsoft.com/office/drawing/2014/main" id="{81B72C06-33EE-4FB4-9D8E-DA7248F12C5F}"/>
               </a:ext>
             </a:extLst>
           </p:cNvPr>
@@ -6191,7 +6191,7 @@
           <p:cNvPr id="8" name="">
             <a:extLst xmlns:a="http://schemas.openxmlformats.org/drawingml/2006/main">
               <a:ext uri="{FF2B5EF4-FFF2-40B4-BE49-F238E27FC236}">
-                <a16:creationId xmlns:a16="http://schemas.microsoft.com/office/drawing/2014/main" id="{B7E7D6C0-7E71-4F1F-B0FF-3CEDD736FEDF}"/>
+                <a16:creationId xmlns:a16="http://schemas.microsoft.com/office/drawing/2014/main" id="{C5CC7FE8-9E09-4BC6-88DB-D2148AC0BD5B}"/>
               </a:ext>
             </a:extLst>
           </p:cNvPr>
@@ -6222,7 +6222,7 @@
           <p:cNvPr id="9" name="flow-Engine ranks recipients">
             <a:extLst xmlns:a="http://schemas.openxmlformats.org/drawingml/2006/main">
               <a:ext uri="{FF2B5EF4-FFF2-40B4-BE49-F238E27FC236}">
-                <a16:creationId xmlns:a16="http://schemas.microsoft.com/office/drawing/2014/main" id="{20CDD4A0-589F-40EE-85DC-F8F8D614074B}"/>
+                <a16:creationId xmlns:a16="http://schemas.microsoft.com/office/drawing/2014/main" id="{D82AE36B-52AC-458C-94A2-C7B43654E913}"/>
               </a:ext>
             </a:extLst>
           </p:cNvPr>
@@ -6257,7 +6257,7 @@
           <p:cNvPr id="10" name="">
             <a:extLst xmlns:a="http://schemas.openxmlformats.org/drawingml/2006/main">
               <a:ext uri="{FF2B5EF4-FFF2-40B4-BE49-F238E27FC236}">
-                <a16:creationId xmlns:a16="http://schemas.microsoft.com/office/drawing/2014/main" id="{B3EFB688-372C-4935-8CC3-7587248D529E}"/>
+                <a16:creationId xmlns:a16="http://schemas.microsoft.com/office/drawing/2014/main" id="{9EFABDAE-E97F-40AB-A388-7660FD1BA47C}"/>
               </a:ext>
             </a:extLst>
           </p:cNvPr>
@@ -6326,7 +6326,7 @@
           <p:cNvPr id="11" name="">
             <a:extLst xmlns:a="http://schemas.openxmlformats.org/drawingml/2006/main">
               <a:ext uri="{FF2B5EF4-FFF2-40B4-BE49-F238E27FC236}">
-                <a16:creationId xmlns:a16="http://schemas.microsoft.com/office/drawing/2014/main" id="{FFBE704D-5F84-4230-815E-53032C3C6FDD}"/>
+                <a16:creationId xmlns:a16="http://schemas.microsoft.com/office/drawing/2014/main" id="{D3A09F6D-F4E5-4C81-AA3F-F6954754675D}"/>
               </a:ext>
             </a:extLst>
           </p:cNvPr>
@@ -6395,7 +6395,7 @@
           <p:cNvPr id="12" name="">
             <a:extLst xmlns:a="http://schemas.openxmlformats.org/drawingml/2006/main">
               <a:ext uri="{FF2B5EF4-FFF2-40B4-BE49-F238E27FC236}">
-                <a16:creationId xmlns:a16="http://schemas.microsoft.com/office/drawing/2014/main" id="{3769E8A7-A2EB-42EB-9524-639FB23791B2}"/>
+                <a16:creationId xmlns:a16="http://schemas.microsoft.com/office/drawing/2014/main" id="{8AE92F97-B388-4153-B7D8-DC6FF5B819F6}"/>
               </a:ext>
             </a:extLst>
           </p:cNvPr>
@@ -6426,7 +6426,7 @@
           <p:cNvPr id="13" name="flow-Recipient accepts">
             <a:extLst xmlns:a="http://schemas.openxmlformats.org/drawingml/2006/main">
               <a:ext uri="{FF2B5EF4-FFF2-40B4-BE49-F238E27FC236}">
-                <a16:creationId xmlns:a16="http://schemas.microsoft.com/office/drawing/2014/main" id="{FF0735AD-5B04-4712-8ECF-F3F90A7B54F1}"/>
+                <a16:creationId xmlns:a16="http://schemas.microsoft.com/office/drawing/2014/main" id="{297BCCBF-3D61-435E-9541-39A4CF5E2120}"/>
               </a:ext>
             </a:extLst>
           </p:cNvPr>
@@ -6461,7 +6461,7 @@
           <p:cNvPr id="14" name="">
             <a:extLst xmlns:a="http://schemas.openxmlformats.org/drawingml/2006/main">
               <a:ext uri="{FF2B5EF4-FFF2-40B4-BE49-F238E27FC236}">
-                <a16:creationId xmlns:a16="http://schemas.microsoft.com/office/drawing/2014/main" id="{76C3600D-D088-404A-8E4D-66C1A9A65283}"/>
+                <a16:creationId xmlns:a16="http://schemas.microsoft.com/office/drawing/2014/main" id="{9C8DE7D7-A96F-493C-A72A-F456F039E6C5}"/>
               </a:ext>
             </a:extLst>
           </p:cNvPr>
@@ -6530,7 +6530,7 @@
           <p:cNvPr id="15" name="">
             <a:extLst xmlns:a="http://schemas.openxmlformats.org/drawingml/2006/main">
               <a:ext uri="{FF2B5EF4-FFF2-40B4-BE49-F238E27FC236}">
-                <a16:creationId xmlns:a16="http://schemas.microsoft.com/office/drawing/2014/main" id="{C28CD99B-63A6-4A7C-AEE4-8F0678F1B675}"/>
+                <a16:creationId xmlns:a16="http://schemas.microsoft.com/office/drawing/2014/main" id="{A7492570-A0CF-43F5-9F6B-8A054176F8D0}"/>
               </a:ext>
             </a:extLst>
           </p:cNvPr>
@@ -6599,7 +6599,7 @@
           <p:cNvPr id="16" name="">
             <a:extLst xmlns:a="http://schemas.openxmlformats.org/drawingml/2006/main">
               <a:ext uri="{FF2B5EF4-FFF2-40B4-BE49-F238E27FC236}">
-                <a16:creationId xmlns:a16="http://schemas.microsoft.com/office/drawing/2014/main" id="{5A9E6D00-7CB2-4585-AEB3-76238A666773}"/>
+                <a16:creationId xmlns:a16="http://schemas.microsoft.com/office/drawing/2014/main" id="{D2202C63-51FD-4ABE-AD11-C59E4640B312}"/>
               </a:ext>
             </a:extLst>
           </p:cNvPr>
@@ -6630,7 +6630,7 @@
           <p:cNvPr id="17" name="flow-Volunteer collects">
             <a:extLst xmlns:a="http://schemas.openxmlformats.org/drawingml/2006/main">
               <a:ext uri="{FF2B5EF4-FFF2-40B4-BE49-F238E27FC236}">
-                <a16:creationId xmlns:a16="http://schemas.microsoft.com/office/drawing/2014/main" id="{68AB2616-32AB-4F17-8587-730275C8E18D}"/>
+                <a16:creationId xmlns:a16="http://schemas.microsoft.com/office/drawing/2014/main" id="{530D18E1-7E02-4AE9-A292-C54659144B6A}"/>
               </a:ext>
             </a:extLst>
           </p:cNvPr>
@@ -6665,7 +6665,7 @@
           <p:cNvPr id="18" name="">
             <a:extLst xmlns:a="http://schemas.openxmlformats.org/drawingml/2006/main">
               <a:ext uri="{FF2B5EF4-FFF2-40B4-BE49-F238E27FC236}">
-                <a16:creationId xmlns:a16="http://schemas.microsoft.com/office/drawing/2014/main" id="{A49B4B5C-60E1-486D-9445-B279A7ACD7C5}"/>
+                <a16:creationId xmlns:a16="http://schemas.microsoft.com/office/drawing/2014/main" id="{DCC161B8-D96F-4725-AC77-E43DF35C384A}"/>
               </a:ext>
             </a:extLst>
           </p:cNvPr>
@@ -6734,7 +6734,7 @@
           <p:cNvPr id="19" name="">
             <a:extLst xmlns:a="http://schemas.openxmlformats.org/drawingml/2006/main">
               <a:ext uri="{FF2B5EF4-FFF2-40B4-BE49-F238E27FC236}">
-                <a16:creationId xmlns:a16="http://schemas.microsoft.com/office/drawing/2014/main" id="{008EA760-081A-4193-868C-F97B030E4BA2}"/>
+                <a16:creationId xmlns:a16="http://schemas.microsoft.com/office/drawing/2014/main" id="{5AE18CBA-1707-47CA-B66D-07796B95C2AE}"/>
               </a:ext>
             </a:extLst>
           </p:cNvPr>
@@ -6803,7 +6803,7 @@
           <p:cNvPr id="20" name="">
             <a:extLst xmlns:a="http://schemas.openxmlformats.org/drawingml/2006/main">
               <a:ext uri="{FF2B5EF4-FFF2-40B4-BE49-F238E27FC236}">
-                <a16:creationId xmlns:a16="http://schemas.microsoft.com/office/drawing/2014/main" id="{707B8AE9-CAAE-48CE-AED0-E6218783B678}"/>
+                <a16:creationId xmlns:a16="http://schemas.microsoft.com/office/drawing/2014/main" id="{6C7BC9E7-FAFD-4362-97A3-EE99CD56980A}"/>
               </a:ext>
             </a:extLst>
           </p:cNvPr>
@@ -6834,7 +6834,7 @@
           <p:cNvPr id="21" name="flow-Delivered">
             <a:extLst xmlns:a="http://schemas.openxmlformats.org/drawingml/2006/main">
               <a:ext uri="{FF2B5EF4-FFF2-40B4-BE49-F238E27FC236}">
-                <a16:creationId xmlns:a16="http://schemas.microsoft.com/office/drawing/2014/main" id="{18818453-3312-4C33-9812-0727038EEAF0}"/>
+                <a16:creationId xmlns:a16="http://schemas.microsoft.com/office/drawing/2014/main" id="{8EFFF1DC-CB41-47D4-9EC2-F2CA63935B88}"/>
               </a:ext>
             </a:extLst>
           </p:cNvPr>
@@ -6869,7 +6869,7 @@
           <p:cNvPr id="22" name="">
             <a:extLst xmlns:a="http://schemas.openxmlformats.org/drawingml/2006/main">
               <a:ext uri="{FF2B5EF4-FFF2-40B4-BE49-F238E27FC236}">
-                <a16:creationId xmlns:a16="http://schemas.microsoft.com/office/drawing/2014/main" id="{3A430D6B-CA58-4FBF-8201-8C564FCE548F}"/>
+                <a16:creationId xmlns:a16="http://schemas.microsoft.com/office/drawing/2014/main" id="{E6FCFE44-B88F-42FB-B6FE-2300F113E1D9}"/>
               </a:ext>
             </a:extLst>
           </p:cNvPr>
@@ -6938,7 +6938,7 @@
           <p:cNvPr id="23" name="">
             <a:extLst xmlns:a="http://schemas.openxmlformats.org/drawingml/2006/main">
               <a:ext uri="{FF2B5EF4-FFF2-40B4-BE49-F238E27FC236}">
-                <a16:creationId xmlns:a16="http://schemas.microsoft.com/office/drawing/2014/main" id="{54115679-2080-4CBE-8BDF-126ECCAFBAD5}"/>
+                <a16:creationId xmlns:a16="http://schemas.microsoft.com/office/drawing/2014/main" id="{87161F6A-8A2B-4019-984F-BB8EB6DD1930}"/>
               </a:ext>
             </a:extLst>
           </p:cNvPr>
@@ -7007,7 +7007,7 @@
           <p:cNvPr id="24" name="">
             <a:extLst xmlns:a="http://schemas.openxmlformats.org/drawingml/2006/main">
               <a:ext uri="{FF2B5EF4-FFF2-40B4-BE49-F238E27FC236}">
-                <a16:creationId xmlns:a16="http://schemas.microsoft.com/office/drawing/2014/main" id="{23BCEA2D-E2FC-4597-9505-96554758D865}"/>
+                <a16:creationId xmlns:a16="http://schemas.microsoft.com/office/drawing/2014/main" id="{11DAAE27-590A-431B-9FF5-A100331E52FD}"/>
               </a:ext>
             </a:extLst>
           </p:cNvPr>
@@ -7038,7 +7038,7 @@
           <p:cNvPr id="25" name="flow-Reports update">
             <a:extLst xmlns:a="http://schemas.openxmlformats.org/drawingml/2006/main">
               <a:ext uri="{FF2B5EF4-FFF2-40B4-BE49-F238E27FC236}">
-                <a16:creationId xmlns:a16="http://schemas.microsoft.com/office/drawing/2014/main" id="{1E38C2D0-EA07-4CFE-83DD-C42CFEBE5C44}"/>
+                <a16:creationId xmlns:a16="http://schemas.microsoft.com/office/drawing/2014/main" id="{B1ACAE33-BD8D-410A-87FB-38B8FB3E92E5}"/>
               </a:ext>
             </a:extLst>
           </p:cNvPr>
@@ -7073,7 +7073,7 @@
           <p:cNvPr id="26" name="">
             <a:extLst xmlns:a="http://schemas.openxmlformats.org/drawingml/2006/main">
               <a:ext uri="{FF2B5EF4-FFF2-40B4-BE49-F238E27FC236}">
-                <a16:creationId xmlns:a16="http://schemas.microsoft.com/office/drawing/2014/main" id="{8D44B3B8-5B79-4FA4-B5B0-3F0F3B1F2935}"/>
+                <a16:creationId xmlns:a16="http://schemas.microsoft.com/office/drawing/2014/main" id="{E2D8B3F5-8EA1-40DA-95C4-F4A5A4E51AA3}"/>
               </a:ext>
             </a:extLst>
           </p:cNvPr>
@@ -7142,7 +7142,7 @@
           <p:cNvPr id="27" name="">
             <a:extLst xmlns:a="http://schemas.openxmlformats.org/drawingml/2006/main">
               <a:ext uri="{FF2B5EF4-FFF2-40B4-BE49-F238E27FC236}">
-                <a16:creationId xmlns:a16="http://schemas.microsoft.com/office/drawing/2014/main" id="{B33D5A3F-E2AB-4A7D-B963-3B6114EB06CE}"/>
+                <a16:creationId xmlns:a16="http://schemas.microsoft.com/office/drawing/2014/main" id="{B7D7B793-D6A7-4CF3-ADF7-3AC71EBE3D30}"/>
               </a:ext>
             </a:extLst>
           </p:cNvPr>
@@ -7211,7 +7211,7 @@
           <p:cNvPr id="28" name="">
             <a:extLst xmlns:a="http://schemas.openxmlformats.org/drawingml/2006/main">
               <a:ext uri="{FF2B5EF4-FFF2-40B4-BE49-F238E27FC236}">
-                <a16:creationId xmlns:a16="http://schemas.microsoft.com/office/drawing/2014/main" id="{B65F9E5E-D721-4B19-BBA0-3ADA2178E585}"/>
+                <a16:creationId xmlns:a16="http://schemas.microsoft.com/office/drawing/2014/main" id="{31730B61-9FFF-496B-80BB-808F7077EC79}"/>
               </a:ext>
             </a:extLst>
           </p:cNvPr>
@@ -7336,7 +7336,7 @@
     </p:spTree>
     <p:extLst>
       <p:ext uri="{BB962C8B-B14F-4D97-AF65-F5344CB8AC3E}">
-        <p14:creationId xmlns:p14="http://schemas.microsoft.com/office/powerpoint/2010/main" val="1174392729"/>
+        <p14:creationId xmlns:p14="http://schemas.microsoft.com/office/powerpoint/2010/main" val="1411199040"/>
       </p:ext>
     </p:extLst>
   </p:cSld>
@@ -7367,7 +7367,7 @@
           <p:cNvPr id="17" name="">
             <a:extLst xmlns:a="http://schemas.openxmlformats.org/drawingml/2006/main">
               <a:ext uri="{FF2B5EF4-FFF2-40B4-BE49-F238E27FC236}">
-                <a16:creationId xmlns:a16="http://schemas.microsoft.com/office/drawing/2014/main" id="{05247537-0558-4EA0-96EE-5E091BC8D511}"/>
+                <a16:creationId xmlns:a16="http://schemas.microsoft.com/office/drawing/2014/main" id="{281D211A-1426-4FEE-B80D-13A8AC5393E8}"/>
               </a:ext>
             </a:extLst>
           </p:cNvPr>
@@ -7436,7 +7436,7 @@
           <p:cNvPr id="2" name="slide-title">
             <a:extLst xmlns:a="http://schemas.openxmlformats.org/drawingml/2006/main">
               <a:ext uri="{FF2B5EF4-FFF2-40B4-BE49-F238E27FC236}">
-                <a16:creationId xmlns:a16="http://schemas.microsoft.com/office/drawing/2014/main" id="{58A28E88-71E5-4B17-9994-2077F330245F}"/>
+                <a16:creationId xmlns:a16="http://schemas.microsoft.com/office/drawing/2014/main" id="{D566BEC3-74A6-45A6-B0B7-9A3E66CA6F77}"/>
               </a:ext>
             </a:extLst>
           </p:cNvPr>
@@ -7505,7 +7505,7 @@
           <p:cNvPr id="3" name="slide-lead">
             <a:extLst xmlns:a="http://schemas.openxmlformats.org/drawingml/2006/main">
               <a:ext uri="{FF2B5EF4-FFF2-40B4-BE49-F238E27FC236}">
-                <a16:creationId xmlns:a16="http://schemas.microsoft.com/office/drawing/2014/main" id="{2EB507D3-9C05-4801-85FA-42331EC0342E}"/>
+                <a16:creationId xmlns:a16="http://schemas.microsoft.com/office/drawing/2014/main" id="{F00743D5-B894-44D9-B819-9E078CC27E29}"/>
               </a:ext>
             </a:extLst>
           </p:cNvPr>
@@ -7574,7 +7574,7 @@
           <p:cNvPr id="4" name="title-rule">
             <a:extLst xmlns:a="http://schemas.openxmlformats.org/drawingml/2006/main">
               <a:ext uri="{FF2B5EF4-FFF2-40B4-BE49-F238E27FC236}">
-                <a16:creationId xmlns:a16="http://schemas.microsoft.com/office/drawing/2014/main" id="{E4A558E2-DD14-4E33-9B61-A6B601AE800E}"/>
+                <a16:creationId xmlns:a16="http://schemas.microsoft.com/office/drawing/2014/main" id="{B5666BE3-894A-4A0D-911B-CFDB61F99D32}"/>
               </a:ext>
             </a:extLst>
           </p:cNvPr>
@@ -7605,7 +7605,7 @@
           <p:cNvPr id="5" name="flow-Verified organization">
             <a:extLst xmlns:a="http://schemas.openxmlformats.org/drawingml/2006/main">
               <a:ext uri="{FF2B5EF4-FFF2-40B4-BE49-F238E27FC236}">
-                <a16:creationId xmlns:a16="http://schemas.microsoft.com/office/drawing/2014/main" id="{6874194E-A8C2-4795-BB21-3A3535C0CC14}"/>
+                <a16:creationId xmlns:a16="http://schemas.microsoft.com/office/drawing/2014/main" id="{806FC91E-402B-40EE-AF77-831090CE0570}"/>
               </a:ext>
             </a:extLst>
           </p:cNvPr>
@@ -7640,7 +7640,7 @@
           <p:cNvPr id="6" name="">
             <a:extLst xmlns:a="http://schemas.openxmlformats.org/drawingml/2006/main">
               <a:ext uri="{FF2B5EF4-FFF2-40B4-BE49-F238E27FC236}">
-                <a16:creationId xmlns:a16="http://schemas.microsoft.com/office/drawing/2014/main" id="{6F14FDAE-A329-4D87-90B4-4C3504C8D5E6}"/>
+                <a16:creationId xmlns:a16="http://schemas.microsoft.com/office/drawing/2014/main" id="{3B32E60A-0C5C-4A84-B060-997BA27C1E7E}"/>
               </a:ext>
             </a:extLst>
           </p:cNvPr>
@@ -7709,7 +7709,7 @@
           <p:cNvPr id="7" name="">
             <a:extLst xmlns:a="http://schemas.openxmlformats.org/drawingml/2006/main">
               <a:ext uri="{FF2B5EF4-FFF2-40B4-BE49-F238E27FC236}">
-                <a16:creationId xmlns:a16="http://schemas.microsoft.com/office/drawing/2014/main" id="{659DE63A-E602-4407-ACE9-8AEE7F0CB301}"/>
+                <a16:creationId xmlns:a16="http://schemas.microsoft.com/office/drawing/2014/main" id="{F670BE05-992E-45B8-8D1B-484F80FA9834}"/>
               </a:ext>
             </a:extLst>
           </p:cNvPr>
@@ -7740,7 +7740,7 @@
           <p:cNvPr id="8" name="flow-Sufficient free storage">
             <a:extLst xmlns:a="http://schemas.openxmlformats.org/drawingml/2006/main">
               <a:ext uri="{FF2B5EF4-FFF2-40B4-BE49-F238E27FC236}">
-                <a16:creationId xmlns:a16="http://schemas.microsoft.com/office/drawing/2014/main" id="{B57661CE-44E3-471D-87E7-EF4D5360E99F}"/>
+                <a16:creationId xmlns:a16="http://schemas.microsoft.com/office/drawing/2014/main" id="{03993384-7629-4877-8B96-2AEBE25FD7AC}"/>
               </a:ext>
             </a:extLst>
           </p:cNvPr>
@@ -7775,7 +7775,7 @@
           <p:cNvPr id="9" name="">
             <a:extLst xmlns:a="http://schemas.openxmlformats.org/drawingml/2006/main">
               <a:ext uri="{FF2B5EF4-FFF2-40B4-BE49-F238E27FC236}">
-                <a16:creationId xmlns:a16="http://schemas.microsoft.com/office/drawing/2014/main" id="{444F9BA8-38DD-4CE0-A5B9-E8BC0E4E4297}"/>
+                <a16:creationId xmlns:a16="http://schemas.microsoft.com/office/drawing/2014/main" id="{AF49C5DC-E8CE-463A-87CB-D763935C372C}"/>
               </a:ext>
             </a:extLst>
           </p:cNvPr>
@@ -7844,7 +7844,7 @@
           <p:cNvPr id="10" name="">
             <a:extLst xmlns:a="http://schemas.openxmlformats.org/drawingml/2006/main">
               <a:ext uri="{FF2B5EF4-FFF2-40B4-BE49-F238E27FC236}">
-                <a16:creationId xmlns:a16="http://schemas.microsoft.com/office/drawing/2014/main" id="{77FA1D2B-9251-454E-BD8F-6BC2D81FC086}"/>
+                <a16:creationId xmlns:a16="http://schemas.microsoft.com/office/drawing/2014/main" id="{C8489F76-2CAB-4344-AF10-8726640F844D}"/>
               </a:ext>
             </a:extLst>
           </p:cNvPr>
@@ -7875,7 +7875,7 @@
           <p:cNvPr id="11" name="flow-Category accepted">
             <a:extLst xmlns:a="http://schemas.openxmlformats.org/drawingml/2006/main">
               <a:ext uri="{FF2B5EF4-FFF2-40B4-BE49-F238E27FC236}">
-                <a16:creationId xmlns:a16="http://schemas.microsoft.com/office/drawing/2014/main" id="{B1BC4466-DAB2-47DB-BFB2-96D0C0BF1DD5}"/>
+                <a16:creationId xmlns:a16="http://schemas.microsoft.com/office/drawing/2014/main" id="{7E5B46A0-03AE-4232-8FBD-6014BDA309EF}"/>
               </a:ext>
             </a:extLst>
           </p:cNvPr>
@@ -7910,7 +7910,7 @@
           <p:cNvPr id="12" name="">
             <a:extLst xmlns:a="http://schemas.openxmlformats.org/drawingml/2006/main">
               <a:ext uri="{FF2B5EF4-FFF2-40B4-BE49-F238E27FC236}">
-                <a16:creationId xmlns:a16="http://schemas.microsoft.com/office/drawing/2014/main" id="{EC5A170E-90B2-4312-B202-3A7AED4C2B1D}"/>
+                <a16:creationId xmlns:a16="http://schemas.microsoft.com/office/drawing/2014/main" id="{8C9C9CBE-898E-453C-8D59-0A1B3C6B6E8D}"/>
               </a:ext>
             </a:extLst>
           </p:cNvPr>
@@ -7979,7 +7979,7 @@
           <p:cNvPr id="13" name="">
             <a:extLst xmlns:a="http://schemas.openxmlformats.org/drawingml/2006/main">
               <a:ext uri="{FF2B5EF4-FFF2-40B4-BE49-F238E27FC236}">
-                <a16:creationId xmlns:a16="http://schemas.microsoft.com/office/drawing/2014/main" id="{F1FA620A-4C6B-43EA-AD96-6A94EC0A7406}"/>
+                <a16:creationId xmlns:a16="http://schemas.microsoft.com/office/drawing/2014/main" id="{9562DA42-E0ED-4175-85E3-A90B72E61E30}"/>
               </a:ext>
             </a:extLst>
           </p:cNvPr>
@@ -8010,7 +8010,7 @@
           <p:cNvPr id="14" name="flow-Safe arrival feasible">
             <a:extLst xmlns:a="http://schemas.openxmlformats.org/drawingml/2006/main">
               <a:ext uri="{FF2B5EF4-FFF2-40B4-BE49-F238E27FC236}">
-                <a16:creationId xmlns:a16="http://schemas.microsoft.com/office/drawing/2014/main" id="{94FB40AD-59B3-4F7A-91AE-3E99B4A63D56}"/>
+                <a16:creationId xmlns:a16="http://schemas.microsoft.com/office/drawing/2014/main" id="{B09F98ED-4789-4358-811B-0047C9A85019}"/>
               </a:ext>
             </a:extLst>
           </p:cNvPr>
@@ -8045,7 +8045,7 @@
           <p:cNvPr id="15" name="">
             <a:extLst xmlns:a="http://schemas.openxmlformats.org/drawingml/2006/main">
               <a:ext uri="{FF2B5EF4-FFF2-40B4-BE49-F238E27FC236}">
-                <a16:creationId xmlns:a16="http://schemas.microsoft.com/office/drawing/2014/main" id="{23AB785E-DDFF-420A-8331-A4B63884E2D6}"/>
+                <a16:creationId xmlns:a16="http://schemas.microsoft.com/office/drawing/2014/main" id="{B971D58A-4F67-46B6-A360-12DA15FF7925}"/>
               </a:ext>
             </a:extLst>
           </p:cNvPr>
@@ -8114,7 +8114,7 @@
           <p:cNvPr id="16" name="">
             <a:extLst xmlns:a="http://schemas.openxmlformats.org/drawingml/2006/main">
               <a:ext uri="{FF2B5EF4-FFF2-40B4-BE49-F238E27FC236}">
-                <a16:creationId xmlns:a16="http://schemas.microsoft.com/office/drawing/2014/main" id="{EB8CCEF4-7E82-4EB3-9DD2-8C9CA3B6B93D}"/>
+                <a16:creationId xmlns:a16="http://schemas.microsoft.com/office/drawing/2014/main" id="{CC02FCA8-65C1-4EB6-98B0-A4F32709074C}"/>
               </a:ext>
             </a:extLst>
           </p:cNvPr>
@@ -8629,7 +8629,7 @@
     </p:spTree>
     <p:extLst>
       <p:ext uri="{BB962C8B-B14F-4D97-AF65-F5344CB8AC3E}">
-        <p14:creationId xmlns:p14="http://schemas.microsoft.com/office/powerpoint/2010/main" val="143537874"/>
+        <p14:creationId xmlns:p14="http://schemas.microsoft.com/office/powerpoint/2010/main" val="750018308"/>
       </p:ext>
     </p:extLst>
   </p:cSld>
@@ -8660,7 +8660,7 @@
           <p:cNvPr id="9" name="">
             <a:extLst xmlns:a="http://schemas.openxmlformats.org/drawingml/2006/main">
               <a:ext uri="{FF2B5EF4-FFF2-40B4-BE49-F238E27FC236}">
-                <a16:creationId xmlns:a16="http://schemas.microsoft.com/office/drawing/2014/main" id="{48723FFB-F9D0-4565-BC32-E1A27C676F07}"/>
+                <a16:creationId xmlns:a16="http://schemas.microsoft.com/office/drawing/2014/main" id="{909E1688-7B78-44D4-9708-6C35D112971C}"/>
               </a:ext>
             </a:extLst>
           </p:cNvPr>
@@ -8729,7 +8729,7 @@
           <p:cNvPr id="2" name="slide-title">
             <a:extLst xmlns:a="http://schemas.openxmlformats.org/drawingml/2006/main">
               <a:ext uri="{FF2B5EF4-FFF2-40B4-BE49-F238E27FC236}">
-                <a16:creationId xmlns:a16="http://schemas.microsoft.com/office/drawing/2014/main" id="{AB3B984B-06C6-4B91-83A7-B9F8CA7ECC55}"/>
+                <a16:creationId xmlns:a16="http://schemas.microsoft.com/office/drawing/2014/main" id="{D202DB67-C81F-499E-926B-2169E6DD2FBB}"/>
               </a:ext>
             </a:extLst>
           </p:cNvPr>
@@ -8798,7 +8798,7 @@
           <p:cNvPr id="3" name="slide-lead">
             <a:extLst xmlns:a="http://schemas.openxmlformats.org/drawingml/2006/main">
               <a:ext uri="{FF2B5EF4-FFF2-40B4-BE49-F238E27FC236}">
-                <a16:creationId xmlns:a16="http://schemas.microsoft.com/office/drawing/2014/main" id="{65DCB607-DDF4-4503-9593-0635391F0081}"/>
+                <a16:creationId xmlns:a16="http://schemas.microsoft.com/office/drawing/2014/main" id="{4900D3EF-3364-4AC5-954E-03C110D25946}"/>
               </a:ext>
             </a:extLst>
           </p:cNvPr>
@@ -8867,7 +8867,7 @@
           <p:cNvPr id="4" name="title-rule">
             <a:extLst xmlns:a="http://schemas.openxmlformats.org/drawingml/2006/main">
               <a:ext uri="{FF2B5EF4-FFF2-40B4-BE49-F238E27FC236}">
-                <a16:creationId xmlns:a16="http://schemas.microsoft.com/office/drawing/2014/main" id="{4DAFFD3B-08C5-489D-952E-A77DEDF3FE3D}"/>
+                <a16:creationId xmlns:a16="http://schemas.microsoft.com/office/drawing/2014/main" id="{7D6C0968-4D10-4CB8-9296-90080EF0A6A1}"/>
               </a:ext>
             </a:extLst>
           </p:cNvPr>
@@ -8898,7 +8898,7 @@
           <p:cNvPr id="5" name="">
             <a:extLst xmlns:a="http://schemas.openxmlformats.org/drawingml/2006/main">
               <a:ext uri="{FF2B5EF4-FFF2-40B4-BE49-F238E27FC236}">
-                <a16:creationId xmlns:a16="http://schemas.microsoft.com/office/drawing/2014/main" id="{A0FFB62A-FF47-4C13-AE14-A07C6C030DB6}"/>
+                <a16:creationId xmlns:a16="http://schemas.microsoft.com/office/drawing/2014/main" id="{FA20378E-8283-4CE2-89FE-677C87755DBB}"/>
               </a:ext>
             </a:extLst>
           </p:cNvPr>
@@ -9052,7 +9052,7 @@
           <p:cNvPr id="6" name="">
             <a:extLst xmlns:a="http://schemas.openxmlformats.org/drawingml/2006/main">
               <a:ext uri="{FF2B5EF4-FFF2-40B4-BE49-F238E27FC236}">
-                <a16:creationId xmlns:a16="http://schemas.microsoft.com/office/drawing/2014/main" id="{5573B96E-6255-43A9-9672-3E27054EEA58}"/>
+                <a16:creationId xmlns:a16="http://schemas.microsoft.com/office/drawing/2014/main" id="{2AC4B914-67BB-4951-8EF2-E6B6A16FD373}"/>
               </a:ext>
             </a:extLst>
           </p:cNvPr>
@@ -9365,7 +9365,7 @@
           <p:cNvPr id="7" name="">
             <a:extLst xmlns:a="http://schemas.openxmlformats.org/drawingml/2006/main">
               <a:ext uri="{FF2B5EF4-FFF2-40B4-BE49-F238E27FC236}">
-                <a16:creationId xmlns:a16="http://schemas.microsoft.com/office/drawing/2014/main" id="{F15B3B74-62EB-4E24-B85D-8BB2BCF9CCC3}"/>
+                <a16:creationId xmlns:a16="http://schemas.microsoft.com/office/drawing/2014/main" id="{9FF15B3C-97CC-4AB4-98B0-AFC07F71BF4B}"/>
               </a:ext>
             </a:extLst>
           </p:cNvPr>
@@ -9434,7 +9434,7 @@
           <p:cNvPr id="8" name="">
             <a:extLst xmlns:a="http://schemas.openxmlformats.org/drawingml/2006/main">
               <a:ext uri="{FF2B5EF4-FFF2-40B4-BE49-F238E27FC236}">
-                <a16:creationId xmlns:a16="http://schemas.microsoft.com/office/drawing/2014/main" id="{B6FCA08B-74DC-4C4A-80A9-E941E9BABDCD}"/>
+                <a16:creationId xmlns:a16="http://schemas.microsoft.com/office/drawing/2014/main" id="{EB025881-7200-44C6-8B2C-CF5C1B59AE95}"/>
               </a:ext>
             </a:extLst>
           </p:cNvPr>
@@ -9501,7 +9501,7 @@
     </p:spTree>
     <p:extLst>
       <p:ext uri="{BB962C8B-B14F-4D97-AF65-F5344CB8AC3E}">
-        <p14:creationId xmlns:p14="http://schemas.microsoft.com/office/powerpoint/2010/main" val="1569713441"/>
+        <p14:creationId xmlns:p14="http://schemas.microsoft.com/office/powerpoint/2010/main" val="1094589810"/>
       </p:ext>
     </p:extLst>
   </p:cSld>
@@ -9532,7 +9532,7 @@
           <p:cNvPr id="8" name="">
             <a:extLst xmlns:a="http://schemas.openxmlformats.org/drawingml/2006/main">
               <a:ext uri="{FF2B5EF4-FFF2-40B4-BE49-F238E27FC236}">
-                <a16:creationId xmlns:a16="http://schemas.microsoft.com/office/drawing/2014/main" id="{DCFAB488-3943-43A4-8E9A-253391755B8A}"/>
+                <a16:creationId xmlns:a16="http://schemas.microsoft.com/office/drawing/2014/main" id="{1F311D37-07E8-488C-8C7B-B120DA7E11D2}"/>
               </a:ext>
             </a:extLst>
           </p:cNvPr>
@@ -9601,7 +9601,7 @@
           <p:cNvPr id="2" name="slide-title">
             <a:extLst xmlns:a="http://schemas.openxmlformats.org/drawingml/2006/main">
               <a:ext uri="{FF2B5EF4-FFF2-40B4-BE49-F238E27FC236}">
-                <a16:creationId xmlns:a16="http://schemas.microsoft.com/office/drawing/2014/main" id="{4284586E-F07E-4874-AC9F-76F19CA89DFC}"/>
+                <a16:creationId xmlns:a16="http://schemas.microsoft.com/office/drawing/2014/main" id="{2E82BF42-3665-4D05-97AD-363DB45282F3}"/>
               </a:ext>
             </a:extLst>
           </p:cNvPr>
@@ -9670,7 +9670,7 @@
           <p:cNvPr id="3" name="slide-lead">
             <a:extLst xmlns:a="http://schemas.openxmlformats.org/drawingml/2006/main">
               <a:ext uri="{FF2B5EF4-FFF2-40B4-BE49-F238E27FC236}">
-                <a16:creationId xmlns:a16="http://schemas.microsoft.com/office/drawing/2014/main" id="{2D2FCC4E-22F0-4D55-81E8-D601F25F9544}"/>
+                <a16:creationId xmlns:a16="http://schemas.microsoft.com/office/drawing/2014/main" id="{A5BA9A03-5093-4D1D-835B-FE7B91F886F3}"/>
               </a:ext>
             </a:extLst>
           </p:cNvPr>
@@ -9739,7 +9739,7 @@
           <p:cNvPr id="4" name="title-rule">
             <a:extLst xmlns:a="http://schemas.openxmlformats.org/drawingml/2006/main">
               <a:ext uri="{FF2B5EF4-FFF2-40B4-BE49-F238E27FC236}">
-                <a16:creationId xmlns:a16="http://schemas.microsoft.com/office/drawing/2014/main" id="{5DFA8683-6964-45C5-8449-0402F9CF1A9B}"/>
+                <a16:creationId xmlns:a16="http://schemas.microsoft.com/office/drawing/2014/main" id="{1794132C-75D2-4E85-965C-2F90783B0095}"/>
               </a:ext>
             </a:extLst>
           </p:cNvPr>
@@ -9770,7 +9770,7 @@
           <p:cNvPr id="5" name="">
             <a:extLst xmlns:a="http://schemas.openxmlformats.org/drawingml/2006/main">
               <a:ext uri="{FF2B5EF4-FFF2-40B4-BE49-F238E27FC236}">
-                <a16:creationId xmlns:a16="http://schemas.microsoft.com/office/drawing/2014/main" id="{AED90E97-470F-4642-A056-B90CA900E9DA}"/>
+                <a16:creationId xmlns:a16="http://schemas.microsoft.com/office/drawing/2014/main" id="{511F74A1-6E80-4829-91E0-C253D0654D40}"/>
               </a:ext>
             </a:extLst>
           </p:cNvPr>
@@ -9897,7 +9897,7 @@
           <p:cNvPr id="6" name="">
             <a:extLst xmlns:a="http://schemas.openxmlformats.org/drawingml/2006/main">
               <a:ext uri="{FF2B5EF4-FFF2-40B4-BE49-F238E27FC236}">
-                <a16:creationId xmlns:a16="http://schemas.microsoft.com/office/drawing/2014/main" id="{6E30508E-550C-486D-877F-255CF8547F30}"/>
+                <a16:creationId xmlns:a16="http://schemas.microsoft.com/office/drawing/2014/main" id="{260403CA-A519-445D-B0D2-415DA19B229E}"/>
               </a:ext>
             </a:extLst>
           </p:cNvPr>
@@ -9907,7 +9907,7 @@
           <p:nvPr/>
         </p:nvPicPr>
         <p:blipFill>
-          <a:blip xmlns:r="http://schemas.openxmlformats.org/officeDocument/2006/relationships" xmlns:a="http://schemas.openxmlformats.org/drawingml/2006/main" r:embed="R18dc9e5d9e7f4bd7"/>
+          <a:blip xmlns:r="http://schemas.openxmlformats.org/officeDocument/2006/relationships" xmlns:a="http://schemas.openxmlformats.org/drawingml/2006/main" r:embed="Ra4394fff797840a7"/>
           <a:stretch xmlns:a="http://schemas.openxmlformats.org/drawingml/2006/main"/>
         </p:blipFill>
         <p:spPr>
@@ -9925,7 +9925,7 @@
           <p:cNvPr id="7" name="">
             <a:extLst xmlns:a="http://schemas.openxmlformats.org/drawingml/2006/main">
               <a:ext uri="{FF2B5EF4-FFF2-40B4-BE49-F238E27FC236}">
-                <a16:creationId xmlns:a16="http://schemas.microsoft.com/office/drawing/2014/main" id="{29BA8E67-73DC-4D42-B0C9-49D2E3AAE785}"/>
+                <a16:creationId xmlns:a16="http://schemas.microsoft.com/office/drawing/2014/main" id="{EED12DB4-5595-4DCB-8E8E-F9A8177CEE93}"/>
               </a:ext>
             </a:extLst>
           </p:cNvPr>
@@ -9992,7 +9992,7 @@
     </p:spTree>
     <p:extLst>
       <p:ext uri="{BB962C8B-B14F-4D97-AF65-F5344CB8AC3E}">
-        <p14:creationId xmlns:p14="http://schemas.microsoft.com/office/powerpoint/2010/main" val="1569514512"/>
+        <p14:creationId xmlns:p14="http://schemas.microsoft.com/office/powerpoint/2010/main" val="48228574"/>
       </p:ext>
     </p:extLst>
   </p:cSld>
@@ -10023,7 +10023,7 @@
           <p:cNvPr id="8" name="">
             <a:extLst xmlns:a="http://schemas.openxmlformats.org/drawingml/2006/main">
               <a:ext uri="{FF2B5EF4-FFF2-40B4-BE49-F238E27FC236}">
-                <a16:creationId xmlns:a16="http://schemas.microsoft.com/office/drawing/2014/main" id="{FDFDAFC2-D577-4B95-AE77-DE6C73AAC29B}"/>
+                <a16:creationId xmlns:a16="http://schemas.microsoft.com/office/drawing/2014/main" id="{C8E64BB8-A503-4639-B886-42D6C17C76CB}"/>
               </a:ext>
             </a:extLst>
           </p:cNvPr>
@@ -10092,7 +10092,7 @@
           <p:cNvPr id="2" name="slide-title">
             <a:extLst xmlns:a="http://schemas.openxmlformats.org/drawingml/2006/main">
               <a:ext uri="{FF2B5EF4-FFF2-40B4-BE49-F238E27FC236}">
-                <a16:creationId xmlns:a16="http://schemas.microsoft.com/office/drawing/2014/main" id="{F11C8DD1-09F2-440C-92FF-1BE968448174}"/>
+                <a16:creationId xmlns:a16="http://schemas.microsoft.com/office/drawing/2014/main" id="{03BBB228-39DB-4808-B098-C9799E333F13}"/>
               </a:ext>
             </a:extLst>
           </p:cNvPr>
@@ -10161,7 +10161,7 @@
           <p:cNvPr id="3" name="slide-lead">
             <a:extLst xmlns:a="http://schemas.openxmlformats.org/drawingml/2006/main">
               <a:ext uri="{FF2B5EF4-FFF2-40B4-BE49-F238E27FC236}">
-                <a16:creationId xmlns:a16="http://schemas.microsoft.com/office/drawing/2014/main" id="{6D50D0B7-9BB1-4C3B-AC4A-490CCBA0CFCD}"/>
+                <a16:creationId xmlns:a16="http://schemas.microsoft.com/office/drawing/2014/main" id="{94706A7B-B90F-4875-BDCD-D122C81244BE}"/>
               </a:ext>
             </a:extLst>
           </p:cNvPr>
@@ -10230,7 +10230,7 @@
           <p:cNvPr id="4" name="title-rule">
             <a:extLst xmlns:a="http://schemas.openxmlformats.org/drawingml/2006/main">
               <a:ext uri="{FF2B5EF4-FFF2-40B4-BE49-F238E27FC236}">
-                <a16:creationId xmlns:a16="http://schemas.microsoft.com/office/drawing/2014/main" id="{A642BAF4-BF6C-4E71-8E46-0304B18DF1C7}"/>
+                <a16:creationId xmlns:a16="http://schemas.microsoft.com/office/drawing/2014/main" id="{9525107D-F960-4D69-BA84-A80CB747DDE5}"/>
               </a:ext>
             </a:extLst>
           </p:cNvPr>
@@ -10261,7 +10261,7 @@
           <p:cNvPr id="5" name="">
             <a:extLst xmlns:a="http://schemas.openxmlformats.org/drawingml/2006/main">
               <a:ext uri="{FF2B5EF4-FFF2-40B4-BE49-F238E27FC236}">
-                <a16:creationId xmlns:a16="http://schemas.microsoft.com/office/drawing/2014/main" id="{73975328-5D85-432E-8EA0-EFA6A81C491B}"/>
+                <a16:creationId xmlns:a16="http://schemas.microsoft.com/office/drawing/2014/main" id="{54C111E5-5337-428C-896B-F194C73FA9A8}"/>
               </a:ext>
             </a:extLst>
           </p:cNvPr>
@@ -10388,7 +10388,7 @@
           <p:cNvPr id="6" name="">
             <a:extLst xmlns:a="http://schemas.openxmlformats.org/drawingml/2006/main">
               <a:ext uri="{FF2B5EF4-FFF2-40B4-BE49-F238E27FC236}">
-                <a16:creationId xmlns:a16="http://schemas.microsoft.com/office/drawing/2014/main" id="{E57CBE58-8E6C-4140-8AC0-6A9281C1D704}"/>
+                <a16:creationId xmlns:a16="http://schemas.microsoft.com/office/drawing/2014/main" id="{649E0069-843C-489F-A721-3EF09C3DF436}"/>
               </a:ext>
             </a:extLst>
           </p:cNvPr>
@@ -10398,7 +10398,7 @@
           <p:nvPr/>
         </p:nvPicPr>
         <p:blipFill>
-          <a:blip xmlns:r="http://schemas.openxmlformats.org/officeDocument/2006/relationships" xmlns:a="http://schemas.openxmlformats.org/drawingml/2006/main" r:embed="R225593049ccb4d4b"/>
+          <a:blip xmlns:r="http://schemas.openxmlformats.org/officeDocument/2006/relationships" xmlns:a="http://schemas.openxmlformats.org/drawingml/2006/main" r:embed="R4ec7883e7c8748e3"/>
           <a:stretch xmlns:a="http://schemas.openxmlformats.org/drawingml/2006/main"/>
         </p:blipFill>
         <p:spPr>
@@ -10416,7 +10416,7 @@
           <p:cNvPr id="7" name="">
             <a:extLst xmlns:a="http://schemas.openxmlformats.org/drawingml/2006/main">
               <a:ext uri="{FF2B5EF4-FFF2-40B4-BE49-F238E27FC236}">
-                <a16:creationId xmlns:a16="http://schemas.microsoft.com/office/drawing/2014/main" id="{40F177A4-DD1C-41CE-8A80-FEB9E2E9B823}"/>
+                <a16:creationId xmlns:a16="http://schemas.microsoft.com/office/drawing/2014/main" id="{E52FE573-8401-4ABB-A38C-5BEE91BFE6A0}"/>
               </a:ext>
             </a:extLst>
           </p:cNvPr>
@@ -10483,7 +10483,7 @@
     </p:spTree>
     <p:extLst>
       <p:ext uri="{BB962C8B-B14F-4D97-AF65-F5344CB8AC3E}">
-        <p14:creationId xmlns:p14="http://schemas.microsoft.com/office/powerpoint/2010/main" val="1090157441"/>
+        <p14:creationId xmlns:p14="http://schemas.microsoft.com/office/powerpoint/2010/main" val="1363430436"/>
       </p:ext>
     </p:extLst>
   </p:cSld>
@@ -10514,7 +10514,7 @@
           <p:cNvPr id="18" name="">
             <a:extLst xmlns:a="http://schemas.openxmlformats.org/drawingml/2006/main">
               <a:ext uri="{FF2B5EF4-FFF2-40B4-BE49-F238E27FC236}">
-                <a16:creationId xmlns:a16="http://schemas.microsoft.com/office/drawing/2014/main" id="{8859560D-A113-4E5E-938B-6791FC9CBDFC}"/>
+                <a16:creationId xmlns:a16="http://schemas.microsoft.com/office/drawing/2014/main" id="{7319006A-F2AE-4C1C-B57F-01A7B3DF3BD3}"/>
               </a:ext>
             </a:extLst>
           </p:cNvPr>
@@ -10583,7 +10583,7 @@
           <p:cNvPr id="2" name="slide-title">
             <a:extLst xmlns:a="http://schemas.openxmlformats.org/drawingml/2006/main">
               <a:ext uri="{FF2B5EF4-FFF2-40B4-BE49-F238E27FC236}">
-                <a16:creationId xmlns:a16="http://schemas.microsoft.com/office/drawing/2014/main" id="{DA087916-2C03-460D-94E6-8D6AC9561138}"/>
+                <a16:creationId xmlns:a16="http://schemas.microsoft.com/office/drawing/2014/main" id="{C52C02D8-8BB6-44E0-8D1B-7BA686F91D61}"/>
               </a:ext>
             </a:extLst>
           </p:cNvPr>
@@ -10652,7 +10652,7 @@
           <p:cNvPr id="3" name="slide-lead">
             <a:extLst xmlns:a="http://schemas.openxmlformats.org/drawingml/2006/main">
               <a:ext uri="{FF2B5EF4-FFF2-40B4-BE49-F238E27FC236}">
-                <a16:creationId xmlns:a16="http://schemas.microsoft.com/office/drawing/2014/main" id="{0976BC35-3E0E-48B6-A0C1-E48D60CA65C6}"/>
+                <a16:creationId xmlns:a16="http://schemas.microsoft.com/office/drawing/2014/main" id="{AAAC7111-FCA2-468C-AA69-812E49D2E26E}"/>
               </a:ext>
             </a:extLst>
           </p:cNvPr>
@@ -10721,7 +10721,7 @@
           <p:cNvPr id="4" name="title-rule">
             <a:extLst xmlns:a="http://schemas.openxmlformats.org/drawingml/2006/main">
               <a:ext uri="{FF2B5EF4-FFF2-40B4-BE49-F238E27FC236}">
-                <a16:creationId xmlns:a16="http://schemas.microsoft.com/office/drawing/2014/main" id="{716DF08B-D282-47B7-9B00-77B80BA68D23}"/>
+                <a16:creationId xmlns:a16="http://schemas.microsoft.com/office/drawing/2014/main" id="{DA7514CF-DBD0-400E-B533-0CBCAAF90E7B}"/>
               </a:ext>
             </a:extLst>
           </p:cNvPr>
@@ -10752,7 +10752,7 @@
           <p:cNvPr id="5" name="">
             <a:extLst xmlns:a="http://schemas.openxmlformats.org/drawingml/2006/main">
               <a:ext uri="{FF2B5EF4-FFF2-40B4-BE49-F238E27FC236}">
-                <a16:creationId xmlns:a16="http://schemas.microsoft.com/office/drawing/2014/main" id="{73366023-FE8B-43F9-8998-27843A7B3FCE}"/>
+                <a16:creationId xmlns:a16="http://schemas.microsoft.com/office/drawing/2014/main" id="{285DA173-7525-4B0F-999D-418CAB128901}"/>
               </a:ext>
             </a:extLst>
           </p:cNvPr>
@@ -10821,7 +10821,7 @@
           <p:cNvPr id="6" name="">
             <a:extLst xmlns:a="http://schemas.openxmlformats.org/drawingml/2006/main">
               <a:ext uri="{FF2B5EF4-FFF2-40B4-BE49-F238E27FC236}">
-                <a16:creationId xmlns:a16="http://schemas.microsoft.com/office/drawing/2014/main" id="{5B8DC7BA-9147-4860-8299-8254F7B5A848}"/>
+                <a16:creationId xmlns:a16="http://schemas.microsoft.com/office/drawing/2014/main" id="{A3648B2B-AB85-4C6B-9B08-38E42DBC3EEE}"/>
               </a:ext>
             </a:extLst>
           </p:cNvPr>
@@ -10890,7 +10890,7 @@
           <p:cNvPr id="7" name="">
             <a:extLst xmlns:a="http://schemas.openxmlformats.org/drawingml/2006/main">
               <a:ext uri="{FF2B5EF4-FFF2-40B4-BE49-F238E27FC236}">
-                <a16:creationId xmlns:a16="http://schemas.microsoft.com/office/drawing/2014/main" id="{C53AFBA2-9E2E-407A-A094-3F72833BFB12}"/>
+                <a16:creationId xmlns:a16="http://schemas.microsoft.com/office/drawing/2014/main" id="{10CEF089-0D64-4431-92EB-325363A123EB}"/>
               </a:ext>
             </a:extLst>
           </p:cNvPr>
@@ -10959,7 +10959,7 @@
           <p:cNvPr id="8" name="">
             <a:extLst xmlns:a="http://schemas.openxmlformats.org/drawingml/2006/main">
               <a:ext uri="{FF2B5EF4-FFF2-40B4-BE49-F238E27FC236}">
-                <a16:creationId xmlns:a16="http://schemas.microsoft.com/office/drawing/2014/main" id="{8B28DE9D-0958-4560-9DCD-F00D1EFB9358}"/>
+                <a16:creationId xmlns:a16="http://schemas.microsoft.com/office/drawing/2014/main" id="{532236D2-0839-4F1B-A41C-C643DFA1E5A7}"/>
               </a:ext>
             </a:extLst>
           </p:cNvPr>
@@ -11028,7 +11028,7 @@
           <p:cNvPr id="9" name="">
             <a:extLst xmlns:a="http://schemas.openxmlformats.org/drawingml/2006/main">
               <a:ext uri="{FF2B5EF4-FFF2-40B4-BE49-F238E27FC236}">
-                <a16:creationId xmlns:a16="http://schemas.microsoft.com/office/drawing/2014/main" id="{0E08F124-5C4D-44AC-A992-B21090419F93}"/>
+                <a16:creationId xmlns:a16="http://schemas.microsoft.com/office/drawing/2014/main" id="{66A88774-18AD-4497-8295-EAEB316AA3AE}"/>
               </a:ext>
             </a:extLst>
           </p:cNvPr>
@@ -11097,7 +11097,7 @@
           <p:cNvPr id="10" name="">
             <a:extLst xmlns:a="http://schemas.openxmlformats.org/drawingml/2006/main">
               <a:ext uri="{FF2B5EF4-FFF2-40B4-BE49-F238E27FC236}">
-                <a16:creationId xmlns:a16="http://schemas.microsoft.com/office/drawing/2014/main" id="{BDAF4D86-8686-4820-8F5B-CC0AD2732D78}"/>
+                <a16:creationId xmlns:a16="http://schemas.microsoft.com/office/drawing/2014/main" id="{5ADC71E2-4439-40FD-95B0-FBBDB62A7A4D}"/>
               </a:ext>
             </a:extLst>
           </p:cNvPr>
@@ -11166,7 +11166,7 @@
           <p:cNvPr id="11" name="">
             <a:extLst xmlns:a="http://schemas.openxmlformats.org/drawingml/2006/main">
               <a:ext uri="{FF2B5EF4-FFF2-40B4-BE49-F238E27FC236}">
-                <a16:creationId xmlns:a16="http://schemas.microsoft.com/office/drawing/2014/main" id="{2AE901AE-9E8D-4132-B14C-75F0895B9EF4}"/>
+                <a16:creationId xmlns:a16="http://schemas.microsoft.com/office/drawing/2014/main" id="{E9ACF140-0A44-4B52-8933-F80AB916FD62}"/>
               </a:ext>
             </a:extLst>
           </p:cNvPr>
@@ -11235,7 +11235,7 @@
           <p:cNvPr id="12" name="">
             <a:extLst xmlns:a="http://schemas.openxmlformats.org/drawingml/2006/main">
               <a:ext uri="{FF2B5EF4-FFF2-40B4-BE49-F238E27FC236}">
-                <a16:creationId xmlns:a16="http://schemas.microsoft.com/office/drawing/2014/main" id="{6119F18B-85EB-4C34-8D8A-595F6B8DD2A6}"/>
+                <a16:creationId xmlns:a16="http://schemas.microsoft.com/office/drawing/2014/main" id="{560BBB95-1645-47FA-B14F-699F8158F34E}"/>
               </a:ext>
             </a:extLst>
           </p:cNvPr>
@@ -11304,7 +11304,7 @@
           <p:cNvPr id="13" name="">
             <a:extLst xmlns:a="http://schemas.openxmlformats.org/drawingml/2006/main">
               <a:ext uri="{FF2B5EF4-FFF2-40B4-BE49-F238E27FC236}">
-                <a16:creationId xmlns:a16="http://schemas.microsoft.com/office/drawing/2014/main" id="{96CE4052-0E40-4114-AE02-10D3364ECE92}"/>
+                <a16:creationId xmlns:a16="http://schemas.microsoft.com/office/drawing/2014/main" id="{9111F5AB-437A-4389-8E29-0A1B875FB220}"/>
               </a:ext>
             </a:extLst>
           </p:cNvPr>
@@ -11373,7 +11373,7 @@
           <p:cNvPr id="14" name="">
             <a:extLst xmlns:a="http://schemas.openxmlformats.org/drawingml/2006/main">
               <a:ext uri="{FF2B5EF4-FFF2-40B4-BE49-F238E27FC236}">
-                <a16:creationId xmlns:a16="http://schemas.microsoft.com/office/drawing/2014/main" id="{795EE869-5F43-4883-9E8D-7BC081507D91}"/>
+                <a16:creationId xmlns:a16="http://schemas.microsoft.com/office/drawing/2014/main" id="{29EAAC76-6FD3-422D-BEF9-E6007E6012F6}"/>
               </a:ext>
             </a:extLst>
           </p:cNvPr>
@@ -11442,7 +11442,7 @@
           <p:cNvPr id="15" name="">
             <a:extLst xmlns:a="http://schemas.openxmlformats.org/drawingml/2006/main">
               <a:ext uri="{FF2B5EF4-FFF2-40B4-BE49-F238E27FC236}">
-                <a16:creationId xmlns:a16="http://schemas.microsoft.com/office/drawing/2014/main" id="{47A911F2-F7C8-4063-A76B-41170D34D87B}"/>
+                <a16:creationId xmlns:a16="http://schemas.microsoft.com/office/drawing/2014/main" id="{A2C4B9BA-3684-4530-B21B-5FE84D096E54}"/>
               </a:ext>
             </a:extLst>
           </p:cNvPr>
@@ -11511,7 +11511,7 @@
           <p:cNvPr id="16" name="">
             <a:extLst xmlns:a="http://schemas.openxmlformats.org/drawingml/2006/main">
               <a:ext uri="{FF2B5EF4-FFF2-40B4-BE49-F238E27FC236}">
-                <a16:creationId xmlns:a16="http://schemas.microsoft.com/office/drawing/2014/main" id="{D87AA2DA-3D24-48E0-9BF4-EF3186431D63}"/>
+                <a16:creationId xmlns:a16="http://schemas.microsoft.com/office/drawing/2014/main" id="{5F3FBEA9-0D72-4A13-B2F3-43EA8EB300E8}"/>
               </a:ext>
             </a:extLst>
           </p:cNvPr>
@@ -11580,7 +11580,7 @@
           <p:cNvPr id="17" name="">
             <a:extLst xmlns:a="http://schemas.openxmlformats.org/drawingml/2006/main">
               <a:ext uri="{FF2B5EF4-FFF2-40B4-BE49-F238E27FC236}">
-                <a16:creationId xmlns:a16="http://schemas.microsoft.com/office/drawing/2014/main" id="{E7C77AFE-5E8E-4C30-877C-0942A679C950}"/>
+                <a16:creationId xmlns:a16="http://schemas.microsoft.com/office/drawing/2014/main" id="{11603C69-CBE9-4F89-BEC9-834766960643}"/>
               </a:ext>
             </a:extLst>
           </p:cNvPr>
@@ -11705,7 +11705,7 @@
     </p:spTree>
     <p:extLst>
       <p:ext uri="{BB962C8B-B14F-4D97-AF65-F5344CB8AC3E}">
-        <p14:creationId xmlns:p14="http://schemas.microsoft.com/office/powerpoint/2010/main" val="582891391"/>
+        <p14:creationId xmlns:p14="http://schemas.microsoft.com/office/powerpoint/2010/main" val="1286252605"/>
       </p:ext>
     </p:extLst>
   </p:cSld>

--- a/docs/FoodBridge_Project_Review.pptx
+++ b/docs/FoodBridge_Project_Review.pptx
@@ -2,22 +2,22 @@
 <file path=ppt/presentation.xml><?xml version="1.0" encoding="utf-8"?>
 <p:presentation xmlns:p="http://schemas.openxmlformats.org/presentationml/2006/main">
   <p:sldMasterIdLst>
-    <p:sldMasterId xmlns:r="http://schemas.openxmlformats.org/officeDocument/2006/relationships" id="2147483648" r:id="R86e99215941846d8"/>
+    <p:sldMasterId xmlns:r="http://schemas.openxmlformats.org/officeDocument/2006/relationships" id="2147483648" r:id="R661f5caae9a141a0"/>
   </p:sldMasterIdLst>
   <p:notesMasterIdLst>
-    <p:notesMasterId xmlns:r="http://schemas.openxmlformats.org/officeDocument/2006/relationships" r:id="R687e9e970a074d9d"/>
+    <p:notesMasterId xmlns:r="http://schemas.openxmlformats.org/officeDocument/2006/relationships" r:id="Rcf2988f6731948ed"/>
   </p:notesMasterIdLst>
   <p:sldIdLst>
-    <p:sldId xmlns:r="http://schemas.openxmlformats.org/officeDocument/2006/relationships" id="256" r:id="Rd9240eea9c514a23"/>
-    <p:sldId xmlns:r="http://schemas.openxmlformats.org/officeDocument/2006/relationships" id="257" r:id="R6377a5db567849c3"/>
-    <p:sldId xmlns:r="http://schemas.openxmlformats.org/officeDocument/2006/relationships" id="258" r:id="R3593137fda7c407b"/>
-    <p:sldId xmlns:r="http://schemas.openxmlformats.org/officeDocument/2006/relationships" id="259" r:id="R9c06c330a28b4fc0"/>
-    <p:sldId xmlns:r="http://schemas.openxmlformats.org/officeDocument/2006/relationships" id="260" r:id="R35c03b5de28d4ef2"/>
-    <p:sldId xmlns:r="http://schemas.openxmlformats.org/officeDocument/2006/relationships" id="261" r:id="Ra4c934b50fae4b7e"/>
-    <p:sldId xmlns:r="http://schemas.openxmlformats.org/officeDocument/2006/relationships" id="262" r:id="R7f34c98d00f9426d"/>
-    <p:sldId xmlns:r="http://schemas.openxmlformats.org/officeDocument/2006/relationships" id="263" r:id="Rf70f03e843b44c62"/>
-    <p:sldId xmlns:r="http://schemas.openxmlformats.org/officeDocument/2006/relationships" id="264" r:id="Rd600b616c6ac4002"/>
-    <p:sldId xmlns:r="http://schemas.openxmlformats.org/officeDocument/2006/relationships" id="265" r:id="R8ef577847b4c456f"/>
+    <p:sldId xmlns:r="http://schemas.openxmlformats.org/officeDocument/2006/relationships" id="256" r:id="Rd4d26265687f4f7c"/>
+    <p:sldId xmlns:r="http://schemas.openxmlformats.org/officeDocument/2006/relationships" id="257" r:id="Re6f11986d07a4a95"/>
+    <p:sldId xmlns:r="http://schemas.openxmlformats.org/officeDocument/2006/relationships" id="258" r:id="R967864c929a544e1"/>
+    <p:sldId xmlns:r="http://schemas.openxmlformats.org/officeDocument/2006/relationships" id="259" r:id="R0cc0f6e7463c4fdf"/>
+    <p:sldId xmlns:r="http://schemas.openxmlformats.org/officeDocument/2006/relationships" id="260" r:id="Rdfdc5eb7359d4bae"/>
+    <p:sldId xmlns:r="http://schemas.openxmlformats.org/officeDocument/2006/relationships" id="261" r:id="R45489e9026bf4799"/>
+    <p:sldId xmlns:r="http://schemas.openxmlformats.org/officeDocument/2006/relationships" id="262" r:id="R647abf8063de45e4"/>
+    <p:sldId xmlns:r="http://schemas.openxmlformats.org/officeDocument/2006/relationships" id="263" r:id="Rff092c7a4aa94fd6"/>
+    <p:sldId xmlns:r="http://schemas.openxmlformats.org/officeDocument/2006/relationships" id="264" r:id="R8923450c7be149a5"/>
+    <p:sldId xmlns:r="http://schemas.openxmlformats.org/officeDocument/2006/relationships" id="265" r:id="R3fd0dad00d414f9c"/>
   </p:sldIdLst>
   <p:sldSz cx="12192000" cy="6858000"/>
   <p:notesSz cx="6858000" cy="9144000"/>
@@ -591,7 +591,7 @@
           <a:lstStyle xmlns:a="http://schemas.openxmlformats.org/drawingml/2006/main"/>
           <a:p xmlns:a="http://schemas.openxmlformats.org/drawingml/2006/main">
             <a:r>
-              <a:t>About 30 seconds. The last two points are the gap this project fills: safety and justification. Do not elaborate here, slide 3 covers it.</a:t>
+              <a:t>About 30 seconds. The last two points are the gap this project fills: safety and justification. Do not elaborate here, slide 3 covers it. Note to self: this comparison is my own assessment from the requirement study, not a published benchmark.</a:t>
             </a:r>
           </a:p>
         </p:txBody>
@@ -661,7 +661,7 @@
           <a:lstStyle xmlns:a="http://schemas.openxmlformats.org/drawingml/2006/main"/>
           <a:p xmlns:a="http://schemas.openxmlformats.org/drawingml/2006/main">
             <a:r>
-              <a:t>About 40 seconds, and the main emphasis of the review. Read two rows only and state that the remaining four are in the table.</a:t>
+              <a:t>About 40 seconds, and the main emphasis of the review. Read two rows only and state that the remaining four are in the table. Note to self: the comparison is my assessment from the requirement study, not a published benchmark.</a:t>
             </a:r>
           </a:p>
         </p:txBody>
@@ -871,7 +871,7 @@
           <a:lstStyle xmlns:a="http://schemas.openxmlformats.org/drawingml/2006/main"/>
           <a:p xmlns:a="http://schemas.openxmlformats.org/drawingml/2006/main">
             <a:r>
-              <a:t>About 50 seconds, the key slide. State the rule, explain why it is a hard constraint rather than a score, give the three assumptions, then the recorded result.</a:t>
+              <a:t>About 50 seconds, the key slide. State the rule, explain why it is a hard constraint rather than a score, give the three assumptions, then the recorded result. Note to self: these figures were recorded on 16 October 2026 from the seeded dataset.</a:t>
             </a:r>
           </a:p>
         </p:txBody>
@@ -941,7 +941,7 @@
           <a:lstStyle xmlns:a="http://schemas.openxmlformats.org/drawingml/2006/main"/>
           <a:p xmlns:a="http://schemas.openxmlformats.org/drawingml/2006/main">
             <a:r>
-              <a:t>About 30 seconds. Point at the submitted diagram, name the four layers, and mention JWT and the server side checks. If asked how a box maps to the code: Login and Signup pages plus the four role dashboards, EnginePage and AnalyticsPage in React. AuthController, DonationController, RecipientController, VolunteerController, AllocationController, NotificationController, AnalyticsController and AdminController. AuthService, DonationService, RecipientService, VolunteerService, DeliveryService, AllocationEngineService, NotificationService, AnalyticsService and AdminService. Twelve Spring Data repositories over twelve MySQL tables. Supporting components: SecurityConfig with JwtService and JwtAuthFilter, jakarta validation on the request objects, GlobalExceptionHandler, AuditService, and transactional service methods. Logging runs through the framework logger, SLF4J.</a:t>
+              <a:t>About 30 seconds. Point at the submitted diagram, name the four layers, and mention JWT and the server side checks. Note to self: the diagram is from my Lab 3 submission. If asked how a box maps to the code: Login and Signup pages plus the four role dashboards, EnginePage and AnalyticsPage in React. AuthController, DonationController, RecipientController, VolunteerController, AllocationController, NotificationController, AnalyticsController and AdminController. AuthService, DonationService, RecipientService, VolunteerService, DeliveryService, AllocationEngineService, NotificationService, AnalyticsService and AdminService. Twelve Spring Data repositories over twelve MySQL tables. Supporting components: SecurityConfig with JwtService and JwtAuthFilter, jakarta validation on the request objects, GlobalExceptionHandler, AuditService, and transactional service methods. Logging runs through the framework logger, SLF4J.</a:t>
             </a:r>
           </a:p>
         </p:txBody>
@@ -1011,7 +1011,7 @@
           <a:lstStyle xmlns:a="http://schemas.openxmlformats.org/drawingml/2006/main"/>
           <a:p xmlns:a="http://schemas.openxmlformats.org/drawingml/2006/main">
             <a:r>
-              <a:t>About 25 seconds. Twelve entities in third normal form, and the reason allocation, assignment and delivery are separate.</a:t>
+              <a:t>About 25 seconds. Twelve entities in third normal form, and the reason allocation, assignment and delivery are separate. Note to self: the diagram is from my Lab 4 submission.</a:t>
             </a:r>
           </a:p>
         </p:txBody>
@@ -1128,7 +1128,7 @@
           <p:cNvPr id="3" name="Title">
             <a:extLst xmlns:a="http://schemas.openxmlformats.org/drawingml/2006/main">
               <a:ext uri="{FF2B5EF4-FFF2-40B4-BE49-F238E27FC236}">
-                <a16:creationId xmlns:a16="http://schemas.microsoft.com/office/drawing/2014/main" id="{A981B870-E13F-41FF-860F-E6BD0D354C4A}"/>
+                <a16:creationId xmlns:a16="http://schemas.microsoft.com/office/drawing/2014/main" id="{DA4EF8F4-6897-4A9D-924C-A135E95C1964}"/>
               </a:ext>
             </a:extLst>
           </p:cNvPr>
@@ -1285,7 +1285,7 @@
           <p:cNvPr id="2" name="Subtitle">
             <a:extLst xmlns:a="http://schemas.openxmlformats.org/drawingml/2006/main">
               <a:ext uri="{FF2B5EF4-FFF2-40B4-BE49-F238E27FC236}">
-                <a16:creationId xmlns:a16="http://schemas.microsoft.com/office/drawing/2014/main" id="{CFF4B9A0-21F4-4D76-AFF8-48C9C9EB4FE5}"/>
+                <a16:creationId xmlns:a16="http://schemas.microsoft.com/office/drawing/2014/main" id="{068137C7-15F3-45C1-B25F-D484218ACB7C}"/>
               </a:ext>
             </a:extLst>
           </p:cNvPr>
@@ -1459,7 +1459,7 @@
           <p:cNvPr id="2" name="Section title">
             <a:extLst xmlns:a="http://schemas.openxmlformats.org/drawingml/2006/main">
               <a:ext uri="{FF2B5EF4-FFF2-40B4-BE49-F238E27FC236}">
-                <a16:creationId xmlns:a16="http://schemas.microsoft.com/office/drawing/2014/main" id="{B40E0166-176F-4ED8-8E8A-5D43F8A610AD}"/>
+                <a16:creationId xmlns:a16="http://schemas.microsoft.com/office/drawing/2014/main" id="{7113DDF4-168F-44AB-8E88-B8A61A3453C1}"/>
               </a:ext>
             </a:extLst>
           </p:cNvPr>
@@ -1633,7 +1633,7 @@
           <p:cNvPr id="3" name="Title">
             <a:extLst xmlns:a="http://schemas.openxmlformats.org/drawingml/2006/main">
               <a:ext uri="{FF2B5EF4-FFF2-40B4-BE49-F238E27FC236}">
-                <a16:creationId xmlns:a16="http://schemas.microsoft.com/office/drawing/2014/main" id="{0B1C1FE1-D2AE-4786-A04C-DD783E68FE45}"/>
+                <a16:creationId xmlns:a16="http://schemas.microsoft.com/office/drawing/2014/main" id="{19F22216-3B67-42DE-8400-762252DEA945}"/>
               </a:ext>
             </a:extLst>
           </p:cNvPr>
@@ -1790,7 +1790,7 @@
           <p:cNvPr id="2" name="Body">
             <a:extLst xmlns:a="http://schemas.openxmlformats.org/drawingml/2006/main">
               <a:ext uri="{FF2B5EF4-FFF2-40B4-BE49-F238E27FC236}">
-                <a16:creationId xmlns:a16="http://schemas.microsoft.com/office/drawing/2014/main" id="{AA27D377-4E06-482B-AC59-07A343B3DE3C}"/>
+                <a16:creationId xmlns:a16="http://schemas.microsoft.com/office/drawing/2014/main" id="{1331B23D-57D0-4634-AE61-CBA25F49DAB2}"/>
               </a:ext>
             </a:extLst>
           </p:cNvPr>
@@ -1964,7 +1964,7 @@
           <p:cNvPr id="4" name="Title">
             <a:extLst xmlns:a="http://schemas.openxmlformats.org/drawingml/2006/main">
               <a:ext uri="{FF2B5EF4-FFF2-40B4-BE49-F238E27FC236}">
-                <a16:creationId xmlns:a16="http://schemas.microsoft.com/office/drawing/2014/main" id="{EA08DBA5-3215-4A67-B722-C8297C931370}"/>
+                <a16:creationId xmlns:a16="http://schemas.microsoft.com/office/drawing/2014/main" id="{1E9CD3E4-6D62-4AD6-A0FA-DA8FBF2C095A}"/>
               </a:ext>
             </a:extLst>
           </p:cNvPr>
@@ -2121,7 +2121,7 @@
           <p:cNvPr id="2" name="Left column">
             <a:extLst xmlns:a="http://schemas.openxmlformats.org/drawingml/2006/main">
               <a:ext uri="{FF2B5EF4-FFF2-40B4-BE49-F238E27FC236}">
-                <a16:creationId xmlns:a16="http://schemas.microsoft.com/office/drawing/2014/main" id="{05CC8C88-4A46-4B79-904F-33B948045C6D}"/>
+                <a16:creationId xmlns:a16="http://schemas.microsoft.com/office/drawing/2014/main" id="{AF432DEA-2B71-42F1-A0A0-9A2EEE4268FB}"/>
               </a:ext>
             </a:extLst>
           </p:cNvPr>
@@ -2278,7 +2278,7 @@
           <p:cNvPr id="3" name="Right column">
             <a:extLst xmlns:a="http://schemas.openxmlformats.org/drawingml/2006/main">
               <a:ext uri="{FF2B5EF4-FFF2-40B4-BE49-F238E27FC236}">
-                <a16:creationId xmlns:a16="http://schemas.microsoft.com/office/drawing/2014/main" id="{11199C75-73E7-4331-9924-D666E81E5D45}"/>
+                <a16:creationId xmlns:a16="http://schemas.microsoft.com/office/drawing/2014/main" id="{1B01898F-9898-4690-8A1C-695EDC91DE0A}"/>
               </a:ext>
             </a:extLst>
           </p:cNvPr>
@@ -2452,7 +2452,7 @@
           <p:cNvPr id="3" name="Title">
             <a:extLst xmlns:a="http://schemas.openxmlformats.org/drawingml/2006/main">
               <a:ext uri="{FF2B5EF4-FFF2-40B4-BE49-F238E27FC236}">
-                <a16:creationId xmlns:a16="http://schemas.microsoft.com/office/drawing/2014/main" id="{4BB992AF-2169-4C1F-BC09-8DA1F359FE00}"/>
+                <a16:creationId xmlns:a16="http://schemas.microsoft.com/office/drawing/2014/main" id="{D75162E5-A0E7-4529-BEED-947250BCB88F}"/>
               </a:ext>
             </a:extLst>
           </p:cNvPr>
@@ -2609,7 +2609,7 @@
           <p:cNvPr id="2" name="Left column">
             <a:extLst xmlns:a="http://schemas.openxmlformats.org/drawingml/2006/main">
               <a:ext uri="{FF2B5EF4-FFF2-40B4-BE49-F238E27FC236}">
-                <a16:creationId xmlns:a16="http://schemas.microsoft.com/office/drawing/2014/main" id="{FFBFFCF6-4364-4D94-BDEB-5DA58E7C07C0}"/>
+                <a16:creationId xmlns:a16="http://schemas.microsoft.com/office/drawing/2014/main" id="{3206AB7A-4758-46F8-BE76-E50D90B06E98}"/>
               </a:ext>
             </a:extLst>
           </p:cNvPr>
@@ -2804,12 +2804,12 @@
   </p:cSld>
   <p:clrMap bg1="lt1" tx1="dk1" bg2="lt2" tx2="dk2" accent1="accent1" accent2="accent2" accent3="accent3" accent4="accent4" accent5="accent5" accent6="accent6" hlink="hlink" folHlink="folHlink"/>
   <p:sldLayoutIdLst>
-    <p:sldLayoutId xmlns:r="http://schemas.openxmlformats.org/officeDocument/2006/relationships" id="2147483649" r:id="R38f0d07892ef4b1d"/>
-    <p:sldLayoutId xmlns:r="http://schemas.openxmlformats.org/officeDocument/2006/relationships" id="2147483650" r:id="R1883358d918743d5"/>
-    <p:sldLayoutId xmlns:r="http://schemas.openxmlformats.org/officeDocument/2006/relationships" id="2147483651" r:id="R3156696ceff14b14"/>
-    <p:sldLayoutId xmlns:r="http://schemas.openxmlformats.org/officeDocument/2006/relationships" id="2147483652" r:id="R434f95b8decd4a97"/>
-    <p:sldLayoutId xmlns:r="http://schemas.openxmlformats.org/officeDocument/2006/relationships" id="2147483653" r:id="R3f6b6495aebd489f"/>
-    <p:sldLayoutId xmlns:r="http://schemas.openxmlformats.org/officeDocument/2006/relationships" id="2147483654" r:id="Rd0b9cead6a8142d6"/>
+    <p:sldLayoutId xmlns:r="http://schemas.openxmlformats.org/officeDocument/2006/relationships" id="2147483649" r:id="Refa7251a655f43d5"/>
+    <p:sldLayoutId xmlns:r="http://schemas.openxmlformats.org/officeDocument/2006/relationships" id="2147483650" r:id="Rbd5a86d0303a43cf"/>
+    <p:sldLayoutId xmlns:r="http://schemas.openxmlformats.org/officeDocument/2006/relationships" id="2147483651" r:id="R4c4e61da6d4f4f38"/>
+    <p:sldLayoutId xmlns:r="http://schemas.openxmlformats.org/officeDocument/2006/relationships" id="2147483652" r:id="R1fc36b5947dd4cfb"/>
+    <p:sldLayoutId xmlns:r="http://schemas.openxmlformats.org/officeDocument/2006/relationships" id="2147483653" r:id="Ra8f5841b5b3b43ad"/>
+    <p:sldLayoutId xmlns:r="http://schemas.openxmlformats.org/officeDocument/2006/relationships" id="2147483654" r:id="R7bbf1a806486429c"/>
   </p:sldLayoutIdLst>
   <p:txStyles>
     <p:titleStyle>
@@ -3360,7 +3360,7 @@
           <p:cNvPr id="7" name="">
             <a:extLst xmlns:a="http://schemas.openxmlformats.org/drawingml/2006/main">
               <a:ext uri="{FF2B5EF4-FFF2-40B4-BE49-F238E27FC236}">
-                <a16:creationId xmlns:a16="http://schemas.microsoft.com/office/drawing/2014/main" id="{5B325CFC-B04C-4A86-BE5B-15BDEEDCD5C4}"/>
+                <a16:creationId xmlns:a16="http://schemas.microsoft.com/office/drawing/2014/main" id="{09DECDE6-05D5-4895-A711-D95A2C6B7BCA}"/>
               </a:ext>
             </a:extLst>
           </p:cNvPr>
@@ -3370,7 +3370,7 @@
           <p:nvPr/>
         </p:nvPicPr>
         <p:blipFill>
-          <a:blip xmlns:r="http://schemas.openxmlformats.org/officeDocument/2006/relationships" xmlns:a="http://schemas.openxmlformats.org/drawingml/2006/main" r:embed="R1a80bbf84bd243b0"/>
+          <a:blip xmlns:r="http://schemas.openxmlformats.org/officeDocument/2006/relationships" xmlns:a="http://schemas.openxmlformats.org/drawingml/2006/main" r:embed="Rea9be181901148da"/>
           <a:stretch xmlns:a="http://schemas.openxmlformats.org/drawingml/2006/main"/>
         </p:blipFill>
         <p:spPr>
@@ -3388,7 +3388,7 @@
           <p:cNvPr id="2" name="">
             <a:extLst xmlns:a="http://schemas.openxmlformats.org/drawingml/2006/main">
               <a:ext uri="{FF2B5EF4-FFF2-40B4-BE49-F238E27FC236}">
-                <a16:creationId xmlns:a16="http://schemas.microsoft.com/office/drawing/2014/main" id="{C7AE58C6-60D9-4068-A71B-A39FB6B76516}"/>
+                <a16:creationId xmlns:a16="http://schemas.microsoft.com/office/drawing/2014/main" id="{315FCC8A-6F09-4748-9482-EFAC35EA8EB1}"/>
               </a:ext>
             </a:extLst>
           </p:cNvPr>
@@ -3457,7 +3457,7 @@
           <p:cNvPr id="3" name="">
             <a:extLst xmlns:a="http://schemas.openxmlformats.org/drawingml/2006/main">
               <a:ext uri="{FF2B5EF4-FFF2-40B4-BE49-F238E27FC236}">
-                <a16:creationId xmlns:a16="http://schemas.microsoft.com/office/drawing/2014/main" id="{3AC662E4-65EE-4C1C-851C-361EA325BBE0}"/>
+                <a16:creationId xmlns:a16="http://schemas.microsoft.com/office/drawing/2014/main" id="{755D249B-E1D0-4400-8782-39B3E005FF3D}"/>
               </a:ext>
             </a:extLst>
           </p:cNvPr>
@@ -3526,7 +3526,7 @@
           <p:cNvPr id="4" name="">
             <a:extLst xmlns:a="http://schemas.openxmlformats.org/drawingml/2006/main">
               <a:ext uri="{FF2B5EF4-FFF2-40B4-BE49-F238E27FC236}">
-                <a16:creationId xmlns:a16="http://schemas.microsoft.com/office/drawing/2014/main" id="{FB08770A-C19C-45D6-A740-799661655FAE}"/>
+                <a16:creationId xmlns:a16="http://schemas.microsoft.com/office/drawing/2014/main" id="{B7F877B4-FA49-412C-9F5A-2A6A250C1DA2}"/>
               </a:ext>
             </a:extLst>
           </p:cNvPr>
@@ -3557,7 +3557,7 @@
           <p:cNvPr id="5" name="">
             <a:extLst xmlns:a="http://schemas.openxmlformats.org/drawingml/2006/main">
               <a:ext uri="{FF2B5EF4-FFF2-40B4-BE49-F238E27FC236}">
-                <a16:creationId xmlns:a16="http://schemas.microsoft.com/office/drawing/2014/main" id="{040A0684-45C0-4197-8192-C89D1725060A}"/>
+                <a16:creationId xmlns:a16="http://schemas.microsoft.com/office/drawing/2014/main" id="{CD450E86-FB57-459C-B5FD-CEB2A48962B9}"/>
               </a:ext>
             </a:extLst>
           </p:cNvPr>
@@ -3626,7 +3626,7 @@
           <p:cNvPr id="6" name="">
             <a:extLst xmlns:a="http://schemas.openxmlformats.org/drawingml/2006/main">
               <a:ext uri="{FF2B5EF4-FFF2-40B4-BE49-F238E27FC236}">
-                <a16:creationId xmlns:a16="http://schemas.microsoft.com/office/drawing/2014/main" id="{63B9CE8B-F3DC-4B3A-88F1-A27BBC1AD288}"/>
+                <a16:creationId xmlns:a16="http://schemas.microsoft.com/office/drawing/2014/main" id="{C93D6AFF-ECD0-411E-916C-FD2C3D88A993}"/>
               </a:ext>
             </a:extLst>
           </p:cNvPr>
@@ -3693,7 +3693,7 @@
     </p:spTree>
     <p:extLst>
       <p:ext uri="{BB962C8B-B14F-4D97-AF65-F5344CB8AC3E}">
-        <p14:creationId xmlns:p14="http://schemas.microsoft.com/office/powerpoint/2010/main" val="1742829626"/>
+        <p14:creationId xmlns:p14="http://schemas.microsoft.com/office/powerpoint/2010/main" val="1760120549"/>
       </p:ext>
     </p:extLst>
   </p:cSld>
@@ -3724,7 +3724,7 @@
           <p:cNvPr id="9" name="">
             <a:extLst xmlns:a="http://schemas.openxmlformats.org/drawingml/2006/main">
               <a:ext uri="{FF2B5EF4-FFF2-40B4-BE49-F238E27FC236}">
-                <a16:creationId xmlns:a16="http://schemas.microsoft.com/office/drawing/2014/main" id="{70A81199-A4F1-4177-9D08-729D11C45BD2}"/>
+                <a16:creationId xmlns:a16="http://schemas.microsoft.com/office/drawing/2014/main" id="{7201B7E9-BFA3-40CA-953E-D70D50EBE5BB}"/>
               </a:ext>
             </a:extLst>
           </p:cNvPr>
@@ -3735,7 +3735,7 @@
         </p:nvSpPr>
         <p:spPr>
           <a:xfrm xmlns:a="http://schemas.openxmlformats.org/drawingml/2006/main">
-            <a:off x="9906000" y="552450"/>
+            <a:off x="9906000" y="6438900"/>
             <a:ext cx="1600200" cy="228600"/>
           </a:xfrm>
           <a:prstGeom xmlns:a="http://schemas.openxmlformats.org/drawingml/2006/main" prst="rect">
@@ -3793,7 +3793,7 @@
           <p:cNvPr id="2" name="slide-title">
             <a:extLst xmlns:a="http://schemas.openxmlformats.org/drawingml/2006/main">
               <a:ext uri="{FF2B5EF4-FFF2-40B4-BE49-F238E27FC236}">
-                <a16:creationId xmlns:a16="http://schemas.microsoft.com/office/drawing/2014/main" id="{997876BE-37F6-4263-833B-2EE25B3C5506}"/>
+                <a16:creationId xmlns:a16="http://schemas.microsoft.com/office/drawing/2014/main" id="{16D3828C-E523-4DA7-A1BA-E8E8F8B73A50}"/>
               </a:ext>
             </a:extLst>
           </p:cNvPr>
@@ -3862,7 +3862,7 @@
           <p:cNvPr id="3" name="slide-lead">
             <a:extLst xmlns:a="http://schemas.openxmlformats.org/drawingml/2006/main">
               <a:ext uri="{FF2B5EF4-FFF2-40B4-BE49-F238E27FC236}">
-                <a16:creationId xmlns:a16="http://schemas.microsoft.com/office/drawing/2014/main" id="{3690A88B-51AD-4689-9D3B-582F586F2C3B}"/>
+                <a16:creationId xmlns:a16="http://schemas.microsoft.com/office/drawing/2014/main" id="{3A2569DB-B638-402D-BFCB-D41196E004F3}"/>
               </a:ext>
             </a:extLst>
           </p:cNvPr>
@@ -3931,7 +3931,7 @@
           <p:cNvPr id="4" name="title-rule">
             <a:extLst xmlns:a="http://schemas.openxmlformats.org/drawingml/2006/main">
               <a:ext uri="{FF2B5EF4-FFF2-40B4-BE49-F238E27FC236}">
-                <a16:creationId xmlns:a16="http://schemas.microsoft.com/office/drawing/2014/main" id="{B2F53B46-E3B4-426F-8FC9-6AE6132084AF}"/>
+                <a16:creationId xmlns:a16="http://schemas.microsoft.com/office/drawing/2014/main" id="{207542C6-6C0D-4B25-B772-F3845AE5E4AB}"/>
               </a:ext>
             </a:extLst>
           </p:cNvPr>
@@ -3962,7 +3962,7 @@
           <p:cNvPr id="5" name="">
             <a:extLst xmlns:a="http://schemas.openxmlformats.org/drawingml/2006/main">
               <a:ext uri="{FF2B5EF4-FFF2-40B4-BE49-F238E27FC236}">
-                <a16:creationId xmlns:a16="http://schemas.microsoft.com/office/drawing/2014/main" id="{0DF0DA91-80F2-4519-B823-F00054651838}"/>
+                <a16:creationId xmlns:a16="http://schemas.microsoft.com/office/drawing/2014/main" id="{8E66396F-904F-4410-A714-44AE0B1CF44B}"/>
               </a:ext>
             </a:extLst>
           </p:cNvPr>
@@ -4031,7 +4031,7 @@
           <p:cNvPr id="6" name="">
             <a:extLst xmlns:a="http://schemas.openxmlformats.org/drawingml/2006/main">
               <a:ext uri="{FF2B5EF4-FFF2-40B4-BE49-F238E27FC236}">
-                <a16:creationId xmlns:a16="http://schemas.microsoft.com/office/drawing/2014/main" id="{55F17960-8DB5-417B-A238-C24791ECE5F8}"/>
+                <a16:creationId xmlns:a16="http://schemas.microsoft.com/office/drawing/2014/main" id="{1E0D7280-3947-4607-9201-4AA2304A7AE9}"/>
               </a:ext>
             </a:extLst>
           </p:cNvPr>
@@ -4185,7 +4185,7 @@
           <p:cNvPr id="7" name="">
             <a:extLst xmlns:a="http://schemas.openxmlformats.org/drawingml/2006/main">
               <a:ext uri="{FF2B5EF4-FFF2-40B4-BE49-F238E27FC236}">
-                <a16:creationId xmlns:a16="http://schemas.microsoft.com/office/drawing/2014/main" id="{41573E89-DF57-47B9-A657-A75514BEE6F3}"/>
+                <a16:creationId xmlns:a16="http://schemas.microsoft.com/office/drawing/2014/main" id="{D083D40C-D37F-464F-8663-5CD266E5350E}"/>
               </a:ext>
             </a:extLst>
           </p:cNvPr>
@@ -4254,7 +4254,7 @@
           <p:cNvPr id="8" name="">
             <a:extLst xmlns:a="http://schemas.openxmlformats.org/drawingml/2006/main">
               <a:ext uri="{FF2B5EF4-FFF2-40B4-BE49-F238E27FC236}">
-                <a16:creationId xmlns:a16="http://schemas.microsoft.com/office/drawing/2014/main" id="{6248217F-C4AF-4924-91B3-81908B8E3D0B}"/>
+                <a16:creationId xmlns:a16="http://schemas.microsoft.com/office/drawing/2014/main" id="{658C11AA-4C3B-464F-9204-C06F65BA4554}"/>
               </a:ext>
             </a:extLst>
           </p:cNvPr>
@@ -4406,7 +4406,7 @@
     </p:spTree>
     <p:extLst>
       <p:ext uri="{BB962C8B-B14F-4D97-AF65-F5344CB8AC3E}">
-        <p14:creationId xmlns:p14="http://schemas.microsoft.com/office/powerpoint/2010/main" val="1025850689"/>
+        <p14:creationId xmlns:p14="http://schemas.microsoft.com/office/powerpoint/2010/main" val="2063090144"/>
       </p:ext>
     </p:extLst>
   </p:cSld>
@@ -4434,10 +4434,10 @@
       </p:grpSpPr>
       <p:sp>
         <p:nvSpPr>
-          <p:cNvPr id="7" name="">
+          <p:cNvPr id="6" name="">
             <a:extLst xmlns:a="http://schemas.openxmlformats.org/drawingml/2006/main">
               <a:ext uri="{FF2B5EF4-FFF2-40B4-BE49-F238E27FC236}">
-                <a16:creationId xmlns:a16="http://schemas.microsoft.com/office/drawing/2014/main" id="{48478906-EE34-43F9-8676-85C8675392CF}"/>
+                <a16:creationId xmlns:a16="http://schemas.microsoft.com/office/drawing/2014/main" id="{72765F90-4ACA-40C8-B2C1-30FAF59637D4}"/>
               </a:ext>
             </a:extLst>
           </p:cNvPr>
@@ -4448,7 +4448,7 @@
         </p:nvSpPr>
         <p:spPr>
           <a:xfrm xmlns:a="http://schemas.openxmlformats.org/drawingml/2006/main">
-            <a:off x="9906000" y="552450"/>
+            <a:off x="9906000" y="6438900"/>
             <a:ext cx="1600200" cy="228600"/>
           </a:xfrm>
           <a:prstGeom xmlns:a="http://schemas.openxmlformats.org/drawingml/2006/main" prst="rect">
@@ -4506,7 +4506,7 @@
           <p:cNvPr id="2" name="slide-title">
             <a:extLst xmlns:a="http://schemas.openxmlformats.org/drawingml/2006/main">
               <a:ext uri="{FF2B5EF4-FFF2-40B4-BE49-F238E27FC236}">
-                <a16:creationId xmlns:a16="http://schemas.microsoft.com/office/drawing/2014/main" id="{90B1EA3D-D19A-44E0-B512-93B8CA405BD2}"/>
+                <a16:creationId xmlns:a16="http://schemas.microsoft.com/office/drawing/2014/main" id="{A9707AC9-829B-40C0-85C9-760937993788}"/>
               </a:ext>
             </a:extLst>
           </p:cNvPr>
@@ -4575,7 +4575,7 @@
           <p:cNvPr id="3" name="slide-lead">
             <a:extLst xmlns:a="http://schemas.openxmlformats.org/drawingml/2006/main">
               <a:ext uri="{FF2B5EF4-FFF2-40B4-BE49-F238E27FC236}">
-                <a16:creationId xmlns:a16="http://schemas.microsoft.com/office/drawing/2014/main" id="{B9C887B4-FEE2-4759-AC88-E1C946935EEE}"/>
+                <a16:creationId xmlns:a16="http://schemas.microsoft.com/office/drawing/2014/main" id="{3D419DEB-DB3F-48B6-B1AF-181CDA46462A}"/>
               </a:ext>
             </a:extLst>
           </p:cNvPr>
@@ -4644,7 +4644,7 @@
           <p:cNvPr id="4" name="title-rule">
             <a:extLst xmlns:a="http://schemas.openxmlformats.org/drawingml/2006/main">
               <a:ext uri="{FF2B5EF4-FFF2-40B4-BE49-F238E27FC236}">
-                <a16:creationId xmlns:a16="http://schemas.microsoft.com/office/drawing/2014/main" id="{757A336A-AA6E-46BA-8911-F01C710589FA}"/>
+                <a16:creationId xmlns:a16="http://schemas.microsoft.com/office/drawing/2014/main" id="{EEFE9D56-619A-4851-BC6B-20D7BEB59178}"/>
               </a:ext>
             </a:extLst>
           </p:cNvPr>
@@ -4675,7 +4675,7 @@
           <p:cNvPr id="5" name="">
             <a:extLst xmlns:a="http://schemas.openxmlformats.org/drawingml/2006/main">
               <a:ext uri="{FF2B5EF4-FFF2-40B4-BE49-F238E27FC236}">
-                <a16:creationId xmlns:a16="http://schemas.microsoft.com/office/drawing/2014/main" id="{A8813F7E-B3FB-4343-B262-68B8814C84A3}"/>
+                <a16:creationId xmlns:a16="http://schemas.microsoft.com/office/drawing/2014/main" id="{86F65AD4-161D-434E-A6F3-0747F052B2B0}"/>
               </a:ext>
             </a:extLst>
           </p:cNvPr>
@@ -4824,79 +4824,10 @@
           </a:p>
         </p:txBody>
       </p:sp>
-      <p:sp>
-        <p:nvSpPr>
-          <p:cNvPr id="6" name="">
-            <a:extLst xmlns:a="http://schemas.openxmlformats.org/drawingml/2006/main">
-              <a:ext uri="{FF2B5EF4-FFF2-40B4-BE49-F238E27FC236}">
-                <a16:creationId xmlns:a16="http://schemas.microsoft.com/office/drawing/2014/main" id="{9EF04B92-0047-4C47-86EA-9D04D6C1A82F}"/>
-              </a:ext>
-            </a:extLst>
-          </p:cNvPr>
-          <p:cNvSpPr>
-            <a:spLocks xmlns:a="http://schemas.openxmlformats.org/drawingml/2006/main" noGrp="1"/>
-          </p:cNvSpPr>
-          <p:nvPr/>
-        </p:nvSpPr>
-        <p:spPr>
-          <a:xfrm xmlns:a="http://schemas.openxmlformats.org/drawingml/2006/main">
-            <a:off x="685800" y="5467350"/>
-            <a:ext cx="10820400" cy="228600"/>
-          </a:xfrm>
-          <a:prstGeom xmlns:a="http://schemas.openxmlformats.org/drawingml/2006/main" prst="rect">
-            <a:avLst/>
-          </a:prstGeom>
-          <a:noFill xmlns:a="http://schemas.openxmlformats.org/drawingml/2006/main"/>
-          <a:ln xmlns:a="http://schemas.openxmlformats.org/drawingml/2006/main" w="0">
-            <a:noFill/>
-            <a:prstDash val="solid"/>
-          </a:ln>
-        </p:spPr>
-        <p:txBody>
-          <a:bodyPr xmlns:a="http://schemas.openxmlformats.org/drawingml/2006/main">
-            <a:noAutofit/>
-          </a:bodyPr>
-          <a:lstStyle xmlns:a="http://schemas.openxmlformats.org/drawingml/2006/main">
-            <a:defPPr>
-              <a:defRPr sz="1125" b="0">
-                <a:solidFill>
-                  <a:srgbClr val="8A94A3"/>
-                </a:solidFill>
-                <a:latin typeface="Arial"/>
-                <a:ea typeface="Arial"/>
-                <a:cs typeface="Arial"/>
-              </a:defRPr>
-            </a:defPPr>
-          </a:lstStyle>
-          <a:p xmlns:a="http://schemas.openxmlformats.org/drawingml/2006/main">
-            <a:pPr>
-              <a:defRPr sz="1125" b="0">
-                <a:solidFill>
-                  <a:srgbClr val="8A94A3"/>
-                </a:solidFill>
-                <a:latin typeface="Arial"/>
-                <a:ea typeface="Arial"/>
-                <a:cs typeface="Arial"/>
-              </a:defRPr>
-            </a:pPr>
-            <a:r>
-              <a:rPr sz="1125" b="0">
-                <a:solidFill>
-                  <a:srgbClr val="8A94A3"/>
-                </a:solidFill>
-                <a:latin typeface="Arial"/>
-                <a:ea typeface="Arial"/>
-                <a:cs typeface="Arial"/>
-              </a:rPr>
-              <a:t>Assessment derived from the requirement study conducted for this project; not a published benchmark.</a:t>
-            </a:r>
-          </a:p>
-        </p:txBody>
-      </p:sp>
     </p:spTree>
     <p:extLst>
       <p:ext uri="{BB962C8B-B14F-4D97-AF65-F5344CB8AC3E}">
-        <p14:creationId xmlns:p14="http://schemas.microsoft.com/office/powerpoint/2010/main" val="246075698"/>
+        <p14:creationId xmlns:p14="http://schemas.microsoft.com/office/powerpoint/2010/main" val="336055042"/>
       </p:ext>
     </p:extLst>
   </p:cSld>
@@ -4924,10 +4855,10 @@
       </p:grpSpPr>
       <p:sp>
         <p:nvSpPr>
-          <p:cNvPr id="7" name="">
+          <p:cNvPr id="6" name="">
             <a:extLst xmlns:a="http://schemas.openxmlformats.org/drawingml/2006/main">
               <a:ext uri="{FF2B5EF4-FFF2-40B4-BE49-F238E27FC236}">
-                <a16:creationId xmlns:a16="http://schemas.microsoft.com/office/drawing/2014/main" id="{93D2A180-560C-47AC-A550-31EFB4CD770B}"/>
+                <a16:creationId xmlns:a16="http://schemas.microsoft.com/office/drawing/2014/main" id="{5E7E55CB-E165-4805-B3E3-2CC2FA3E5143}"/>
               </a:ext>
             </a:extLst>
           </p:cNvPr>
@@ -4938,7 +4869,7 @@
         </p:nvSpPr>
         <p:spPr>
           <a:xfrm xmlns:a="http://schemas.openxmlformats.org/drawingml/2006/main">
-            <a:off x="9906000" y="552450"/>
+            <a:off x="9906000" y="6438900"/>
             <a:ext cx="1600200" cy="228600"/>
           </a:xfrm>
           <a:prstGeom xmlns:a="http://schemas.openxmlformats.org/drawingml/2006/main" prst="rect">
@@ -4996,7 +4927,7 @@
           <p:cNvPr id="2" name="slide-title">
             <a:extLst xmlns:a="http://schemas.openxmlformats.org/drawingml/2006/main">
               <a:ext uri="{FF2B5EF4-FFF2-40B4-BE49-F238E27FC236}">
-                <a16:creationId xmlns:a16="http://schemas.microsoft.com/office/drawing/2014/main" id="{9768DE46-FFE2-4CBF-81A0-1BCE9CF3DCD3}"/>
+                <a16:creationId xmlns:a16="http://schemas.microsoft.com/office/drawing/2014/main" id="{822466C5-6B41-49A8-84FF-97EC1D0F14B1}"/>
               </a:ext>
             </a:extLst>
           </p:cNvPr>
@@ -5065,7 +4996,7 @@
           <p:cNvPr id="3" name="slide-lead">
             <a:extLst xmlns:a="http://schemas.openxmlformats.org/drawingml/2006/main">
               <a:ext uri="{FF2B5EF4-FFF2-40B4-BE49-F238E27FC236}">
-                <a16:creationId xmlns:a16="http://schemas.microsoft.com/office/drawing/2014/main" id="{1F056ECA-325C-47E8-A7D6-B63C271AE84A}"/>
+                <a16:creationId xmlns:a16="http://schemas.microsoft.com/office/drawing/2014/main" id="{2BCB0ED5-FC35-417E-8563-EFCEDDE54759}"/>
               </a:ext>
             </a:extLst>
           </p:cNvPr>
@@ -5134,7 +5065,7 @@
           <p:cNvPr id="4" name="title-rule">
             <a:extLst xmlns:a="http://schemas.openxmlformats.org/drawingml/2006/main">
               <a:ext uri="{FF2B5EF4-FFF2-40B4-BE49-F238E27FC236}">
-                <a16:creationId xmlns:a16="http://schemas.microsoft.com/office/drawing/2014/main" id="{326816BC-79C3-496F-90C7-BB04E6F888DB}"/>
+                <a16:creationId xmlns:a16="http://schemas.microsoft.com/office/drawing/2014/main" id="{4AEB2AA4-A9EE-4883-8727-319D17A5B122}"/>
               </a:ext>
             </a:extLst>
           </p:cNvPr>
@@ -5165,7 +5096,7 @@
           <p:cNvPr id="5" name="">
             <a:extLst xmlns:a="http://schemas.openxmlformats.org/drawingml/2006/main">
               <a:ext uri="{FF2B5EF4-FFF2-40B4-BE49-F238E27FC236}">
-                <a16:creationId xmlns:a16="http://schemas.microsoft.com/office/drawing/2014/main" id="{CAE94DE5-8D8E-46FD-B5BE-DB164FE2C46D}"/>
+                <a16:creationId xmlns:a16="http://schemas.microsoft.com/office/drawing/2014/main" id="{39553973-D5D2-42D0-8DD4-ECFC73924B3B}"/>
               </a:ext>
             </a:extLst>
           </p:cNvPr>
@@ -5677,79 +5608,10 @@
           </a:graphicData>
         </a:graphic>
       </p:graphicFrame>
-      <p:sp>
-        <p:nvSpPr>
-          <p:cNvPr id="6" name="">
-            <a:extLst xmlns:a="http://schemas.openxmlformats.org/drawingml/2006/main">
-              <a:ext uri="{FF2B5EF4-FFF2-40B4-BE49-F238E27FC236}">
-                <a16:creationId xmlns:a16="http://schemas.microsoft.com/office/drawing/2014/main" id="{245F3E5C-1540-4D13-88C3-517CC868B3AF}"/>
-              </a:ext>
-            </a:extLst>
-          </p:cNvPr>
-          <p:cNvSpPr>
-            <a:spLocks xmlns:a="http://schemas.openxmlformats.org/drawingml/2006/main" noGrp="1"/>
-          </p:cNvSpPr>
-          <p:nvPr/>
-        </p:nvSpPr>
-        <p:spPr>
-          <a:xfrm xmlns:a="http://schemas.openxmlformats.org/drawingml/2006/main">
-            <a:off x="685800" y="5600700"/>
-            <a:ext cx="10820400" cy="228600"/>
-          </a:xfrm>
-          <a:prstGeom xmlns:a="http://schemas.openxmlformats.org/drawingml/2006/main" prst="rect">
-            <a:avLst/>
-          </a:prstGeom>
-          <a:noFill xmlns:a="http://schemas.openxmlformats.org/drawingml/2006/main"/>
-          <a:ln xmlns:a="http://schemas.openxmlformats.org/drawingml/2006/main" w="0">
-            <a:noFill/>
-            <a:prstDash val="solid"/>
-          </a:ln>
-        </p:spPr>
-        <p:txBody>
-          <a:bodyPr xmlns:a="http://schemas.openxmlformats.org/drawingml/2006/main">
-            <a:noAutofit/>
-          </a:bodyPr>
-          <a:lstStyle xmlns:a="http://schemas.openxmlformats.org/drawingml/2006/main">
-            <a:defPPr>
-              <a:defRPr sz="1125" b="0">
-                <a:solidFill>
-                  <a:srgbClr val="8A94A3"/>
-                </a:solidFill>
-                <a:latin typeface="Arial"/>
-                <a:ea typeface="Arial"/>
-                <a:cs typeface="Arial"/>
-              </a:defRPr>
-            </a:defPPr>
-          </a:lstStyle>
-          <a:p xmlns:a="http://schemas.openxmlformats.org/drawingml/2006/main">
-            <a:pPr>
-              <a:defRPr sz="1125" b="0">
-                <a:solidFill>
-                  <a:srgbClr val="8A94A3"/>
-                </a:solidFill>
-                <a:latin typeface="Arial"/>
-                <a:ea typeface="Arial"/>
-                <a:cs typeface="Arial"/>
-              </a:defRPr>
-            </a:pPr>
-            <a:r>
-              <a:rPr sz="1125" b="0">
-                <a:solidFill>
-                  <a:srgbClr val="8A94A3"/>
-                </a:solidFill>
-                <a:latin typeface="Arial"/>
-                <a:ea typeface="Arial"/>
-                <a:cs typeface="Arial"/>
-              </a:rPr>
-              <a:t>Assessment based on the platforms and process examined during the requirement study.</a:t>
-            </a:r>
-          </a:p>
-        </p:txBody>
-      </p:sp>
     </p:spTree>
     <p:extLst>
       <p:ext uri="{BB962C8B-B14F-4D97-AF65-F5344CB8AC3E}">
-        <p14:creationId xmlns:p14="http://schemas.microsoft.com/office/powerpoint/2010/main" val="2050482470"/>
+        <p14:creationId xmlns:p14="http://schemas.microsoft.com/office/powerpoint/2010/main" val="879858576"/>
       </p:ext>
     </p:extLst>
   </p:cSld>
@@ -5780,7 +5642,7 @@
           <p:cNvPr id="29" name="">
             <a:extLst xmlns:a="http://schemas.openxmlformats.org/drawingml/2006/main">
               <a:ext uri="{FF2B5EF4-FFF2-40B4-BE49-F238E27FC236}">
-                <a16:creationId xmlns:a16="http://schemas.microsoft.com/office/drawing/2014/main" id="{840A9456-C345-4EC9-8E26-A366D41DFF14}"/>
+                <a16:creationId xmlns:a16="http://schemas.microsoft.com/office/drawing/2014/main" id="{0C06C0DF-E129-4F18-B5BF-A5D18B6C1D94}"/>
               </a:ext>
             </a:extLst>
           </p:cNvPr>
@@ -5791,7 +5653,7 @@
         </p:nvSpPr>
         <p:spPr>
           <a:xfrm xmlns:a="http://schemas.openxmlformats.org/drawingml/2006/main">
-            <a:off x="9906000" y="552450"/>
+            <a:off x="9906000" y="6438900"/>
             <a:ext cx="1600200" cy="228600"/>
           </a:xfrm>
           <a:prstGeom xmlns:a="http://schemas.openxmlformats.org/drawingml/2006/main" prst="rect">
@@ -5849,7 +5711,7 @@
           <p:cNvPr id="2" name="slide-title">
             <a:extLst xmlns:a="http://schemas.openxmlformats.org/drawingml/2006/main">
               <a:ext uri="{FF2B5EF4-FFF2-40B4-BE49-F238E27FC236}">
-                <a16:creationId xmlns:a16="http://schemas.microsoft.com/office/drawing/2014/main" id="{AEB2A442-458C-41D7-8756-1B0BAC9F5ADC}"/>
+                <a16:creationId xmlns:a16="http://schemas.microsoft.com/office/drawing/2014/main" id="{07FDBC0C-976B-432C-B8F9-C4D85B1A526B}"/>
               </a:ext>
             </a:extLst>
           </p:cNvPr>
@@ -5918,7 +5780,7 @@
           <p:cNvPr id="3" name="slide-lead">
             <a:extLst xmlns:a="http://schemas.openxmlformats.org/drawingml/2006/main">
               <a:ext uri="{FF2B5EF4-FFF2-40B4-BE49-F238E27FC236}">
-                <a16:creationId xmlns:a16="http://schemas.microsoft.com/office/drawing/2014/main" id="{0CAA238A-F487-4E32-BC2C-7B5FEC2A6C78}"/>
+                <a16:creationId xmlns:a16="http://schemas.microsoft.com/office/drawing/2014/main" id="{79D4048E-7AB9-45DC-B07A-648C3079F25D}"/>
               </a:ext>
             </a:extLst>
           </p:cNvPr>
@@ -5987,7 +5849,7 @@
           <p:cNvPr id="4" name="title-rule">
             <a:extLst xmlns:a="http://schemas.openxmlformats.org/drawingml/2006/main">
               <a:ext uri="{FF2B5EF4-FFF2-40B4-BE49-F238E27FC236}">
-                <a16:creationId xmlns:a16="http://schemas.microsoft.com/office/drawing/2014/main" id="{1DDB2FDA-1530-41F2-B69E-B3CCCD358082}"/>
+                <a16:creationId xmlns:a16="http://schemas.microsoft.com/office/drawing/2014/main" id="{27B41D9F-BC77-427D-AEB8-3115A1F246AC}"/>
               </a:ext>
             </a:extLst>
           </p:cNvPr>
@@ -6018,7 +5880,7 @@
           <p:cNvPr id="5" name="flow-Donation registered">
             <a:extLst xmlns:a="http://schemas.openxmlformats.org/drawingml/2006/main">
               <a:ext uri="{FF2B5EF4-FFF2-40B4-BE49-F238E27FC236}">
-                <a16:creationId xmlns:a16="http://schemas.microsoft.com/office/drawing/2014/main" id="{3F6763F5-35E3-4ADE-88B5-4C2BE6313191}"/>
+                <a16:creationId xmlns:a16="http://schemas.microsoft.com/office/drawing/2014/main" id="{936C115E-4DA4-4143-8F2D-86FF6EE51F10}"/>
               </a:ext>
             </a:extLst>
           </p:cNvPr>
@@ -6053,7 +5915,7 @@
           <p:cNvPr id="6" name="">
             <a:extLst xmlns:a="http://schemas.openxmlformats.org/drawingml/2006/main">
               <a:ext uri="{FF2B5EF4-FFF2-40B4-BE49-F238E27FC236}">
-                <a16:creationId xmlns:a16="http://schemas.microsoft.com/office/drawing/2014/main" id="{0A42004A-9ED4-4CCE-A91B-C453E89BCA10}"/>
+                <a16:creationId xmlns:a16="http://schemas.microsoft.com/office/drawing/2014/main" id="{99EE1ED6-201D-4EFD-B358-B1B49B0ABCC8}"/>
               </a:ext>
             </a:extLst>
           </p:cNvPr>
@@ -6122,7 +5984,7 @@
           <p:cNvPr id="7" name="">
             <a:extLst xmlns:a="http://schemas.openxmlformats.org/drawingml/2006/main">
               <a:ext uri="{FF2B5EF4-FFF2-40B4-BE49-F238E27FC236}">
-                <a16:creationId xmlns:a16="http://schemas.microsoft.com/office/drawing/2014/main" id="{81B72C06-33EE-4FB4-9D8E-DA7248F12C5F}"/>
+                <a16:creationId xmlns:a16="http://schemas.microsoft.com/office/drawing/2014/main" id="{961E156E-42A5-4D9B-A4A9-155BEC51EFF1}"/>
               </a:ext>
             </a:extLst>
           </p:cNvPr>
@@ -6191,7 +6053,7 @@
           <p:cNvPr id="8" name="">
             <a:extLst xmlns:a="http://schemas.openxmlformats.org/drawingml/2006/main">
               <a:ext uri="{FF2B5EF4-FFF2-40B4-BE49-F238E27FC236}">
-                <a16:creationId xmlns:a16="http://schemas.microsoft.com/office/drawing/2014/main" id="{C5CC7FE8-9E09-4BC6-88DB-D2148AC0BD5B}"/>
+                <a16:creationId xmlns:a16="http://schemas.microsoft.com/office/drawing/2014/main" id="{AAEEF22B-9EF2-4712-8CA4-12B3135BCB0C}"/>
               </a:ext>
             </a:extLst>
           </p:cNvPr>
@@ -6222,7 +6084,7 @@
           <p:cNvPr id="9" name="flow-Engine ranks recipients">
             <a:extLst xmlns:a="http://schemas.openxmlformats.org/drawingml/2006/main">
               <a:ext uri="{FF2B5EF4-FFF2-40B4-BE49-F238E27FC236}">
-                <a16:creationId xmlns:a16="http://schemas.microsoft.com/office/drawing/2014/main" id="{D82AE36B-52AC-458C-94A2-C7B43654E913}"/>
+                <a16:creationId xmlns:a16="http://schemas.microsoft.com/office/drawing/2014/main" id="{1A81E838-6955-4931-88BB-130E1E596723}"/>
               </a:ext>
             </a:extLst>
           </p:cNvPr>
@@ -6257,7 +6119,7 @@
           <p:cNvPr id="10" name="">
             <a:extLst xmlns:a="http://schemas.openxmlformats.org/drawingml/2006/main">
               <a:ext uri="{FF2B5EF4-FFF2-40B4-BE49-F238E27FC236}">
-                <a16:creationId xmlns:a16="http://schemas.microsoft.com/office/drawing/2014/main" id="{9EFABDAE-E97F-40AB-A388-7660FD1BA47C}"/>
+                <a16:creationId xmlns:a16="http://schemas.microsoft.com/office/drawing/2014/main" id="{656472FD-8BF4-4615-BFED-FF7E4712CF45}"/>
               </a:ext>
             </a:extLst>
           </p:cNvPr>
@@ -6326,7 +6188,7 @@
           <p:cNvPr id="11" name="">
             <a:extLst xmlns:a="http://schemas.openxmlformats.org/drawingml/2006/main">
               <a:ext uri="{FF2B5EF4-FFF2-40B4-BE49-F238E27FC236}">
-                <a16:creationId xmlns:a16="http://schemas.microsoft.com/office/drawing/2014/main" id="{D3A09F6D-F4E5-4C81-AA3F-F6954754675D}"/>
+                <a16:creationId xmlns:a16="http://schemas.microsoft.com/office/drawing/2014/main" id="{1A872283-02A5-4C5F-BB7A-0F4C34033FF0}"/>
               </a:ext>
             </a:extLst>
           </p:cNvPr>
@@ -6395,7 +6257,7 @@
           <p:cNvPr id="12" name="">
             <a:extLst xmlns:a="http://schemas.openxmlformats.org/drawingml/2006/main">
               <a:ext uri="{FF2B5EF4-FFF2-40B4-BE49-F238E27FC236}">
-                <a16:creationId xmlns:a16="http://schemas.microsoft.com/office/drawing/2014/main" id="{8AE92F97-B388-4153-B7D8-DC6FF5B819F6}"/>
+                <a16:creationId xmlns:a16="http://schemas.microsoft.com/office/drawing/2014/main" id="{55250DF7-AC58-4026-9F8F-E7AF61C8AAE7}"/>
               </a:ext>
             </a:extLst>
           </p:cNvPr>
@@ -6426,7 +6288,7 @@
           <p:cNvPr id="13" name="flow-Recipient accepts">
             <a:extLst xmlns:a="http://schemas.openxmlformats.org/drawingml/2006/main">
               <a:ext uri="{FF2B5EF4-FFF2-40B4-BE49-F238E27FC236}">
-                <a16:creationId xmlns:a16="http://schemas.microsoft.com/office/drawing/2014/main" id="{297BCCBF-3D61-435E-9541-39A4CF5E2120}"/>
+                <a16:creationId xmlns:a16="http://schemas.microsoft.com/office/drawing/2014/main" id="{8C46C6AB-9D50-4160-80A4-E1F3CBC359E0}"/>
               </a:ext>
             </a:extLst>
           </p:cNvPr>
@@ -6461,7 +6323,7 @@
           <p:cNvPr id="14" name="">
             <a:extLst xmlns:a="http://schemas.openxmlformats.org/drawingml/2006/main">
               <a:ext uri="{FF2B5EF4-FFF2-40B4-BE49-F238E27FC236}">
-                <a16:creationId xmlns:a16="http://schemas.microsoft.com/office/drawing/2014/main" id="{9C8DE7D7-A96F-493C-A72A-F456F039E6C5}"/>
+                <a16:creationId xmlns:a16="http://schemas.microsoft.com/office/drawing/2014/main" id="{F021F9E5-AC87-4D29-839D-45DDFBAA0F21}"/>
               </a:ext>
             </a:extLst>
           </p:cNvPr>
@@ -6530,7 +6392,7 @@
           <p:cNvPr id="15" name="">
             <a:extLst xmlns:a="http://schemas.openxmlformats.org/drawingml/2006/main">
               <a:ext uri="{FF2B5EF4-FFF2-40B4-BE49-F238E27FC236}">
-                <a16:creationId xmlns:a16="http://schemas.microsoft.com/office/drawing/2014/main" id="{A7492570-A0CF-43F5-9F6B-8A054176F8D0}"/>
+                <a16:creationId xmlns:a16="http://schemas.microsoft.com/office/drawing/2014/main" id="{CAE87D52-CD57-4471-8E3F-7A8A1993F2B9}"/>
               </a:ext>
             </a:extLst>
           </p:cNvPr>
@@ -6599,7 +6461,7 @@
           <p:cNvPr id="16" name="">
             <a:extLst xmlns:a="http://schemas.openxmlformats.org/drawingml/2006/main">
               <a:ext uri="{FF2B5EF4-FFF2-40B4-BE49-F238E27FC236}">
-                <a16:creationId xmlns:a16="http://schemas.microsoft.com/office/drawing/2014/main" id="{D2202C63-51FD-4ABE-AD11-C59E4640B312}"/>
+                <a16:creationId xmlns:a16="http://schemas.microsoft.com/office/drawing/2014/main" id="{E50C31C9-B8D2-4767-8F2F-D0E0FD567D38}"/>
               </a:ext>
             </a:extLst>
           </p:cNvPr>
@@ -6630,7 +6492,7 @@
           <p:cNvPr id="17" name="flow-Volunteer collects">
             <a:extLst xmlns:a="http://schemas.openxmlformats.org/drawingml/2006/main">
               <a:ext uri="{FF2B5EF4-FFF2-40B4-BE49-F238E27FC236}">
-                <a16:creationId xmlns:a16="http://schemas.microsoft.com/office/drawing/2014/main" id="{530D18E1-7E02-4AE9-A292-C54659144B6A}"/>
+                <a16:creationId xmlns:a16="http://schemas.microsoft.com/office/drawing/2014/main" id="{5C68DFD4-2D3A-449C-8E68-0CB35E259AE5}"/>
               </a:ext>
             </a:extLst>
           </p:cNvPr>
@@ -6665,7 +6527,7 @@
           <p:cNvPr id="18" name="">
             <a:extLst xmlns:a="http://schemas.openxmlformats.org/drawingml/2006/main">
               <a:ext uri="{FF2B5EF4-FFF2-40B4-BE49-F238E27FC236}">
-                <a16:creationId xmlns:a16="http://schemas.microsoft.com/office/drawing/2014/main" id="{DCC161B8-D96F-4725-AC77-E43DF35C384A}"/>
+                <a16:creationId xmlns:a16="http://schemas.microsoft.com/office/drawing/2014/main" id="{7D9E8891-DC3E-4F8E-B6CE-424633B41A43}"/>
               </a:ext>
             </a:extLst>
           </p:cNvPr>
@@ -6734,7 +6596,7 @@
           <p:cNvPr id="19" name="">
             <a:extLst xmlns:a="http://schemas.openxmlformats.org/drawingml/2006/main">
               <a:ext uri="{FF2B5EF4-FFF2-40B4-BE49-F238E27FC236}">
-                <a16:creationId xmlns:a16="http://schemas.microsoft.com/office/drawing/2014/main" id="{5AE18CBA-1707-47CA-B66D-07796B95C2AE}"/>
+                <a16:creationId xmlns:a16="http://schemas.microsoft.com/office/drawing/2014/main" id="{7EBAFA41-8CBD-4742-9848-DEC432E6AB62}"/>
               </a:ext>
             </a:extLst>
           </p:cNvPr>
@@ -6803,7 +6665,7 @@
           <p:cNvPr id="20" name="">
             <a:extLst xmlns:a="http://schemas.openxmlformats.org/drawingml/2006/main">
               <a:ext uri="{FF2B5EF4-FFF2-40B4-BE49-F238E27FC236}">
-                <a16:creationId xmlns:a16="http://schemas.microsoft.com/office/drawing/2014/main" id="{6C7BC9E7-FAFD-4362-97A3-EE99CD56980A}"/>
+                <a16:creationId xmlns:a16="http://schemas.microsoft.com/office/drawing/2014/main" id="{9F43274B-4013-48D9-AE58-C20348F586C4}"/>
               </a:ext>
             </a:extLst>
           </p:cNvPr>
@@ -6834,7 +6696,7 @@
           <p:cNvPr id="21" name="flow-Delivered">
             <a:extLst xmlns:a="http://schemas.openxmlformats.org/drawingml/2006/main">
               <a:ext uri="{FF2B5EF4-FFF2-40B4-BE49-F238E27FC236}">
-                <a16:creationId xmlns:a16="http://schemas.microsoft.com/office/drawing/2014/main" id="{8EFFF1DC-CB41-47D4-9EC2-F2CA63935B88}"/>
+                <a16:creationId xmlns:a16="http://schemas.microsoft.com/office/drawing/2014/main" id="{483686DF-8306-4487-9DC5-0DAD785AC3C7}"/>
               </a:ext>
             </a:extLst>
           </p:cNvPr>
@@ -6869,7 +6731,7 @@
           <p:cNvPr id="22" name="">
             <a:extLst xmlns:a="http://schemas.openxmlformats.org/drawingml/2006/main">
               <a:ext uri="{FF2B5EF4-FFF2-40B4-BE49-F238E27FC236}">
-                <a16:creationId xmlns:a16="http://schemas.microsoft.com/office/drawing/2014/main" id="{E6FCFE44-B88F-42FB-B6FE-2300F113E1D9}"/>
+                <a16:creationId xmlns:a16="http://schemas.microsoft.com/office/drawing/2014/main" id="{84215A05-63C6-44CD-BBD5-15B1332AFA4F}"/>
               </a:ext>
             </a:extLst>
           </p:cNvPr>
@@ -6938,7 +6800,7 @@
           <p:cNvPr id="23" name="">
             <a:extLst xmlns:a="http://schemas.openxmlformats.org/drawingml/2006/main">
               <a:ext uri="{FF2B5EF4-FFF2-40B4-BE49-F238E27FC236}">
-                <a16:creationId xmlns:a16="http://schemas.microsoft.com/office/drawing/2014/main" id="{87161F6A-8A2B-4019-984F-BB8EB6DD1930}"/>
+                <a16:creationId xmlns:a16="http://schemas.microsoft.com/office/drawing/2014/main" id="{16E0659A-F66E-422D-9587-5D1729DAB0FE}"/>
               </a:ext>
             </a:extLst>
           </p:cNvPr>
@@ -7007,7 +6869,7 @@
           <p:cNvPr id="24" name="">
             <a:extLst xmlns:a="http://schemas.openxmlformats.org/drawingml/2006/main">
               <a:ext uri="{FF2B5EF4-FFF2-40B4-BE49-F238E27FC236}">
-                <a16:creationId xmlns:a16="http://schemas.microsoft.com/office/drawing/2014/main" id="{11DAAE27-590A-431B-9FF5-A100331E52FD}"/>
+                <a16:creationId xmlns:a16="http://schemas.microsoft.com/office/drawing/2014/main" id="{95BAABE2-0F23-42E0-BA6F-0AF825713834}"/>
               </a:ext>
             </a:extLst>
           </p:cNvPr>
@@ -7038,7 +6900,7 @@
           <p:cNvPr id="25" name="flow-Reports update">
             <a:extLst xmlns:a="http://schemas.openxmlformats.org/drawingml/2006/main">
               <a:ext uri="{FF2B5EF4-FFF2-40B4-BE49-F238E27FC236}">
-                <a16:creationId xmlns:a16="http://schemas.microsoft.com/office/drawing/2014/main" id="{B1ACAE33-BD8D-410A-87FB-38B8FB3E92E5}"/>
+                <a16:creationId xmlns:a16="http://schemas.microsoft.com/office/drawing/2014/main" id="{D8399FE1-B71F-494C-A7F7-D53DEEF68E65}"/>
               </a:ext>
             </a:extLst>
           </p:cNvPr>
@@ -7073,7 +6935,7 @@
           <p:cNvPr id="26" name="">
             <a:extLst xmlns:a="http://schemas.openxmlformats.org/drawingml/2006/main">
               <a:ext uri="{FF2B5EF4-FFF2-40B4-BE49-F238E27FC236}">
-                <a16:creationId xmlns:a16="http://schemas.microsoft.com/office/drawing/2014/main" id="{E2D8B3F5-8EA1-40DA-95C4-F4A5A4E51AA3}"/>
+                <a16:creationId xmlns:a16="http://schemas.microsoft.com/office/drawing/2014/main" id="{C0F455CA-3707-4FCC-AA4A-A7BBF0F8D1BB}"/>
               </a:ext>
             </a:extLst>
           </p:cNvPr>
@@ -7142,7 +7004,7 @@
           <p:cNvPr id="27" name="">
             <a:extLst xmlns:a="http://schemas.openxmlformats.org/drawingml/2006/main">
               <a:ext uri="{FF2B5EF4-FFF2-40B4-BE49-F238E27FC236}">
-                <a16:creationId xmlns:a16="http://schemas.microsoft.com/office/drawing/2014/main" id="{B7D7B793-D6A7-4CF3-ADF7-3AC71EBE3D30}"/>
+                <a16:creationId xmlns:a16="http://schemas.microsoft.com/office/drawing/2014/main" id="{3BB529E4-B8F5-4FF6-ABE1-B4B112E89BE2}"/>
               </a:ext>
             </a:extLst>
           </p:cNvPr>
@@ -7211,7 +7073,7 @@
           <p:cNvPr id="28" name="">
             <a:extLst xmlns:a="http://schemas.openxmlformats.org/drawingml/2006/main">
               <a:ext uri="{FF2B5EF4-FFF2-40B4-BE49-F238E27FC236}">
-                <a16:creationId xmlns:a16="http://schemas.microsoft.com/office/drawing/2014/main" id="{31730B61-9FFF-496B-80BB-808F7077EC79}"/>
+                <a16:creationId xmlns:a16="http://schemas.microsoft.com/office/drawing/2014/main" id="{01418101-A21B-49EB-9A6B-64F4C62C1528}"/>
               </a:ext>
             </a:extLst>
           </p:cNvPr>
@@ -7336,7 +7198,7 @@
     </p:spTree>
     <p:extLst>
       <p:ext uri="{BB962C8B-B14F-4D97-AF65-F5344CB8AC3E}">
-        <p14:creationId xmlns:p14="http://schemas.microsoft.com/office/powerpoint/2010/main" val="1411199040"/>
+        <p14:creationId xmlns:p14="http://schemas.microsoft.com/office/powerpoint/2010/main" val="833920035"/>
       </p:ext>
     </p:extLst>
   </p:cSld>
@@ -7367,7 +7229,7 @@
           <p:cNvPr id="17" name="">
             <a:extLst xmlns:a="http://schemas.openxmlformats.org/drawingml/2006/main">
               <a:ext uri="{FF2B5EF4-FFF2-40B4-BE49-F238E27FC236}">
-                <a16:creationId xmlns:a16="http://schemas.microsoft.com/office/drawing/2014/main" id="{281D211A-1426-4FEE-B80D-13A8AC5393E8}"/>
+                <a16:creationId xmlns:a16="http://schemas.microsoft.com/office/drawing/2014/main" id="{D7F349BF-C9A2-4616-899B-49398AC81700}"/>
               </a:ext>
             </a:extLst>
           </p:cNvPr>
@@ -7378,7 +7240,7 @@
         </p:nvSpPr>
         <p:spPr>
           <a:xfrm xmlns:a="http://schemas.openxmlformats.org/drawingml/2006/main">
-            <a:off x="9906000" y="552450"/>
+            <a:off x="9906000" y="6438900"/>
             <a:ext cx="1600200" cy="228600"/>
           </a:xfrm>
           <a:prstGeom xmlns:a="http://schemas.openxmlformats.org/drawingml/2006/main" prst="rect">
@@ -7436,7 +7298,7 @@
           <p:cNvPr id="2" name="slide-title">
             <a:extLst xmlns:a="http://schemas.openxmlformats.org/drawingml/2006/main">
               <a:ext uri="{FF2B5EF4-FFF2-40B4-BE49-F238E27FC236}">
-                <a16:creationId xmlns:a16="http://schemas.microsoft.com/office/drawing/2014/main" id="{D566BEC3-74A6-45A6-B0B7-9A3E66CA6F77}"/>
+                <a16:creationId xmlns:a16="http://schemas.microsoft.com/office/drawing/2014/main" id="{EDD3F5E9-5422-4723-903B-24624311A52C}"/>
               </a:ext>
             </a:extLst>
           </p:cNvPr>
@@ -7505,7 +7367,7 @@
           <p:cNvPr id="3" name="slide-lead">
             <a:extLst xmlns:a="http://schemas.openxmlformats.org/drawingml/2006/main">
               <a:ext uri="{FF2B5EF4-FFF2-40B4-BE49-F238E27FC236}">
-                <a16:creationId xmlns:a16="http://schemas.microsoft.com/office/drawing/2014/main" id="{F00743D5-B894-44D9-B819-9E078CC27E29}"/>
+                <a16:creationId xmlns:a16="http://schemas.microsoft.com/office/drawing/2014/main" id="{3D7911D9-C634-43B5-AA5D-4B622ADE2FA5}"/>
               </a:ext>
             </a:extLst>
           </p:cNvPr>
@@ -7574,7 +7436,7 @@
           <p:cNvPr id="4" name="title-rule">
             <a:extLst xmlns:a="http://schemas.openxmlformats.org/drawingml/2006/main">
               <a:ext uri="{FF2B5EF4-FFF2-40B4-BE49-F238E27FC236}">
-                <a16:creationId xmlns:a16="http://schemas.microsoft.com/office/drawing/2014/main" id="{B5666BE3-894A-4A0D-911B-CFDB61F99D32}"/>
+                <a16:creationId xmlns:a16="http://schemas.microsoft.com/office/drawing/2014/main" id="{01333EC2-C3C1-4D7C-8634-8452DD3FF2BE}"/>
               </a:ext>
             </a:extLst>
           </p:cNvPr>
@@ -7605,7 +7467,7 @@
           <p:cNvPr id="5" name="flow-Verified organization">
             <a:extLst xmlns:a="http://schemas.openxmlformats.org/drawingml/2006/main">
               <a:ext uri="{FF2B5EF4-FFF2-40B4-BE49-F238E27FC236}">
-                <a16:creationId xmlns:a16="http://schemas.microsoft.com/office/drawing/2014/main" id="{806FC91E-402B-40EE-AF77-831090CE0570}"/>
+                <a16:creationId xmlns:a16="http://schemas.microsoft.com/office/drawing/2014/main" id="{FCFE8D7E-E550-413E-B6E7-BC9C573CF6FD}"/>
               </a:ext>
             </a:extLst>
           </p:cNvPr>
@@ -7640,7 +7502,7 @@
           <p:cNvPr id="6" name="">
             <a:extLst xmlns:a="http://schemas.openxmlformats.org/drawingml/2006/main">
               <a:ext uri="{FF2B5EF4-FFF2-40B4-BE49-F238E27FC236}">
-                <a16:creationId xmlns:a16="http://schemas.microsoft.com/office/drawing/2014/main" id="{3B32E60A-0C5C-4A84-B060-997BA27C1E7E}"/>
+                <a16:creationId xmlns:a16="http://schemas.microsoft.com/office/drawing/2014/main" id="{CA459886-9F03-4F7A-A983-698C834AAD19}"/>
               </a:ext>
             </a:extLst>
           </p:cNvPr>
@@ -7709,7 +7571,7 @@
           <p:cNvPr id="7" name="">
             <a:extLst xmlns:a="http://schemas.openxmlformats.org/drawingml/2006/main">
               <a:ext uri="{FF2B5EF4-FFF2-40B4-BE49-F238E27FC236}">
-                <a16:creationId xmlns:a16="http://schemas.microsoft.com/office/drawing/2014/main" id="{F670BE05-992E-45B8-8D1B-484F80FA9834}"/>
+                <a16:creationId xmlns:a16="http://schemas.microsoft.com/office/drawing/2014/main" id="{612EA281-F375-464A-928F-731E463D0667}"/>
               </a:ext>
             </a:extLst>
           </p:cNvPr>
@@ -7740,7 +7602,7 @@
           <p:cNvPr id="8" name="flow-Sufficient free storage">
             <a:extLst xmlns:a="http://schemas.openxmlformats.org/drawingml/2006/main">
               <a:ext uri="{FF2B5EF4-FFF2-40B4-BE49-F238E27FC236}">
-                <a16:creationId xmlns:a16="http://schemas.microsoft.com/office/drawing/2014/main" id="{03993384-7629-4877-8B96-2AEBE25FD7AC}"/>
+                <a16:creationId xmlns:a16="http://schemas.microsoft.com/office/drawing/2014/main" id="{45F1AF36-E3E6-46B2-A820-4910CC70D795}"/>
               </a:ext>
             </a:extLst>
           </p:cNvPr>
@@ -7775,7 +7637,7 @@
           <p:cNvPr id="9" name="">
             <a:extLst xmlns:a="http://schemas.openxmlformats.org/drawingml/2006/main">
               <a:ext uri="{FF2B5EF4-FFF2-40B4-BE49-F238E27FC236}">
-                <a16:creationId xmlns:a16="http://schemas.microsoft.com/office/drawing/2014/main" id="{AF49C5DC-E8CE-463A-87CB-D763935C372C}"/>
+                <a16:creationId xmlns:a16="http://schemas.microsoft.com/office/drawing/2014/main" id="{28753955-0EC9-4044-A6BE-51DB6C805B5F}"/>
               </a:ext>
             </a:extLst>
           </p:cNvPr>
@@ -7844,7 +7706,7 @@
           <p:cNvPr id="10" name="">
             <a:extLst xmlns:a="http://schemas.openxmlformats.org/drawingml/2006/main">
               <a:ext uri="{FF2B5EF4-FFF2-40B4-BE49-F238E27FC236}">
-                <a16:creationId xmlns:a16="http://schemas.microsoft.com/office/drawing/2014/main" id="{C8489F76-2CAB-4344-AF10-8726640F844D}"/>
+                <a16:creationId xmlns:a16="http://schemas.microsoft.com/office/drawing/2014/main" id="{20AA4D0D-071C-486D-ACB2-06714E990659}"/>
               </a:ext>
             </a:extLst>
           </p:cNvPr>
@@ -7875,7 +7737,7 @@
           <p:cNvPr id="11" name="flow-Category accepted">
             <a:extLst xmlns:a="http://schemas.openxmlformats.org/drawingml/2006/main">
               <a:ext uri="{FF2B5EF4-FFF2-40B4-BE49-F238E27FC236}">
-                <a16:creationId xmlns:a16="http://schemas.microsoft.com/office/drawing/2014/main" id="{7E5B46A0-03AE-4232-8FBD-6014BDA309EF}"/>
+                <a16:creationId xmlns:a16="http://schemas.microsoft.com/office/drawing/2014/main" id="{3FC5D4D9-1B2C-4399-B7D5-AED2F2FA4966}"/>
               </a:ext>
             </a:extLst>
           </p:cNvPr>
@@ -7910,7 +7772,7 @@
           <p:cNvPr id="12" name="">
             <a:extLst xmlns:a="http://schemas.openxmlformats.org/drawingml/2006/main">
               <a:ext uri="{FF2B5EF4-FFF2-40B4-BE49-F238E27FC236}">
-                <a16:creationId xmlns:a16="http://schemas.microsoft.com/office/drawing/2014/main" id="{8C9C9CBE-898E-453C-8D59-0A1B3C6B6E8D}"/>
+                <a16:creationId xmlns:a16="http://schemas.microsoft.com/office/drawing/2014/main" id="{97DAE427-1CA0-404D-8FB3-DBCD473CDB08}"/>
               </a:ext>
             </a:extLst>
           </p:cNvPr>
@@ -7979,7 +7841,7 @@
           <p:cNvPr id="13" name="">
             <a:extLst xmlns:a="http://schemas.openxmlformats.org/drawingml/2006/main">
               <a:ext uri="{FF2B5EF4-FFF2-40B4-BE49-F238E27FC236}">
-                <a16:creationId xmlns:a16="http://schemas.microsoft.com/office/drawing/2014/main" id="{9562DA42-E0ED-4175-85E3-A90B72E61E30}"/>
+                <a16:creationId xmlns:a16="http://schemas.microsoft.com/office/drawing/2014/main" id="{3054E1B3-9D43-4356-BE29-9B85E9C4E2FD}"/>
               </a:ext>
             </a:extLst>
           </p:cNvPr>
@@ -8010,7 +7872,7 @@
           <p:cNvPr id="14" name="flow-Safe arrival feasible">
             <a:extLst xmlns:a="http://schemas.openxmlformats.org/drawingml/2006/main">
               <a:ext uri="{FF2B5EF4-FFF2-40B4-BE49-F238E27FC236}">
-                <a16:creationId xmlns:a16="http://schemas.microsoft.com/office/drawing/2014/main" id="{B09F98ED-4789-4358-811B-0047C9A85019}"/>
+                <a16:creationId xmlns:a16="http://schemas.microsoft.com/office/drawing/2014/main" id="{1B705E18-EB67-4DE1-AAED-A2694734EE6D}"/>
               </a:ext>
             </a:extLst>
           </p:cNvPr>
@@ -8045,7 +7907,7 @@
           <p:cNvPr id="15" name="">
             <a:extLst xmlns:a="http://schemas.openxmlformats.org/drawingml/2006/main">
               <a:ext uri="{FF2B5EF4-FFF2-40B4-BE49-F238E27FC236}">
-                <a16:creationId xmlns:a16="http://schemas.microsoft.com/office/drawing/2014/main" id="{B971D58A-4F67-46B6-A360-12DA15FF7925}"/>
+                <a16:creationId xmlns:a16="http://schemas.microsoft.com/office/drawing/2014/main" id="{79A6EAE7-EC5B-41DC-A91B-4551D7ED4AAB}"/>
               </a:ext>
             </a:extLst>
           </p:cNvPr>
@@ -8114,7 +7976,7 @@
           <p:cNvPr id="16" name="">
             <a:extLst xmlns:a="http://schemas.openxmlformats.org/drawingml/2006/main">
               <a:ext uri="{FF2B5EF4-FFF2-40B4-BE49-F238E27FC236}">
-                <a16:creationId xmlns:a16="http://schemas.microsoft.com/office/drawing/2014/main" id="{CC02FCA8-65C1-4EB6-98B0-A4F32709074C}"/>
+                <a16:creationId xmlns:a16="http://schemas.microsoft.com/office/drawing/2014/main" id="{8F0C01D0-778F-4D23-9FAB-76D84FA0A109}"/>
               </a:ext>
             </a:extLst>
           </p:cNvPr>
@@ -8629,7 +8491,7 @@
     </p:spTree>
     <p:extLst>
       <p:ext uri="{BB962C8B-B14F-4D97-AF65-F5344CB8AC3E}">
-        <p14:creationId xmlns:p14="http://schemas.microsoft.com/office/powerpoint/2010/main" val="750018308"/>
+        <p14:creationId xmlns:p14="http://schemas.microsoft.com/office/powerpoint/2010/main" val="589813069"/>
       </p:ext>
     </p:extLst>
   </p:cSld>
@@ -8657,10 +8519,10 @@
       </p:grpSpPr>
       <p:sp>
         <p:nvSpPr>
-          <p:cNvPr id="9" name="">
+          <p:cNvPr id="8" name="">
             <a:extLst xmlns:a="http://schemas.openxmlformats.org/drawingml/2006/main">
               <a:ext uri="{FF2B5EF4-FFF2-40B4-BE49-F238E27FC236}">
-                <a16:creationId xmlns:a16="http://schemas.microsoft.com/office/drawing/2014/main" id="{909E1688-7B78-44D4-9708-6C35D112971C}"/>
+                <a16:creationId xmlns:a16="http://schemas.microsoft.com/office/drawing/2014/main" id="{B7AADA1C-6DE9-440B-8540-336CBEFCDE76}"/>
               </a:ext>
             </a:extLst>
           </p:cNvPr>
@@ -8671,7 +8533,7 @@
         </p:nvSpPr>
         <p:spPr>
           <a:xfrm xmlns:a="http://schemas.openxmlformats.org/drawingml/2006/main">
-            <a:off x="9906000" y="552450"/>
+            <a:off x="9906000" y="6438900"/>
             <a:ext cx="1600200" cy="228600"/>
           </a:xfrm>
           <a:prstGeom xmlns:a="http://schemas.openxmlformats.org/drawingml/2006/main" prst="rect">
@@ -8729,7 +8591,7 @@
           <p:cNvPr id="2" name="slide-title">
             <a:extLst xmlns:a="http://schemas.openxmlformats.org/drawingml/2006/main">
               <a:ext uri="{FF2B5EF4-FFF2-40B4-BE49-F238E27FC236}">
-                <a16:creationId xmlns:a16="http://schemas.microsoft.com/office/drawing/2014/main" id="{D202DB67-C81F-499E-926B-2169E6DD2FBB}"/>
+                <a16:creationId xmlns:a16="http://schemas.microsoft.com/office/drawing/2014/main" id="{79FCAE7C-D0CC-4848-A662-F93FF61E6AAF}"/>
               </a:ext>
             </a:extLst>
           </p:cNvPr>
@@ -8798,7 +8660,7 @@
           <p:cNvPr id="3" name="slide-lead">
             <a:extLst xmlns:a="http://schemas.openxmlformats.org/drawingml/2006/main">
               <a:ext uri="{FF2B5EF4-FFF2-40B4-BE49-F238E27FC236}">
-                <a16:creationId xmlns:a16="http://schemas.microsoft.com/office/drawing/2014/main" id="{4900D3EF-3364-4AC5-954E-03C110D25946}"/>
+                <a16:creationId xmlns:a16="http://schemas.microsoft.com/office/drawing/2014/main" id="{78FD5C54-D8A3-47B7-8989-FCC6AFB5956A}"/>
               </a:ext>
             </a:extLst>
           </p:cNvPr>
@@ -8867,7 +8729,7 @@
           <p:cNvPr id="4" name="title-rule">
             <a:extLst xmlns:a="http://schemas.openxmlformats.org/drawingml/2006/main">
               <a:ext uri="{FF2B5EF4-FFF2-40B4-BE49-F238E27FC236}">
-                <a16:creationId xmlns:a16="http://schemas.microsoft.com/office/drawing/2014/main" id="{7D6C0968-4D10-4CB8-9296-90080EF0A6A1}"/>
+                <a16:creationId xmlns:a16="http://schemas.microsoft.com/office/drawing/2014/main" id="{E29CE013-0FFB-4837-9FAB-D30CF6491C66}"/>
               </a:ext>
             </a:extLst>
           </p:cNvPr>
@@ -8898,7 +8760,7 @@
           <p:cNvPr id="5" name="">
             <a:extLst xmlns:a="http://schemas.openxmlformats.org/drawingml/2006/main">
               <a:ext uri="{FF2B5EF4-FFF2-40B4-BE49-F238E27FC236}">
-                <a16:creationId xmlns:a16="http://schemas.microsoft.com/office/drawing/2014/main" id="{FA20378E-8283-4CE2-89FE-677C87755DBB}"/>
+                <a16:creationId xmlns:a16="http://schemas.microsoft.com/office/drawing/2014/main" id="{AF8F83B1-C6AD-4EAB-B0F4-5060ACE56049}"/>
               </a:ext>
             </a:extLst>
           </p:cNvPr>
@@ -9052,7 +8914,7 @@
           <p:cNvPr id="6" name="">
             <a:extLst xmlns:a="http://schemas.openxmlformats.org/drawingml/2006/main">
               <a:ext uri="{FF2B5EF4-FFF2-40B4-BE49-F238E27FC236}">
-                <a16:creationId xmlns:a16="http://schemas.microsoft.com/office/drawing/2014/main" id="{2AC4B914-67BB-4951-8EF2-E6B6A16FD373}"/>
+                <a16:creationId xmlns:a16="http://schemas.microsoft.com/office/drawing/2014/main" id="{47D2D87E-86B1-4AC7-BA20-AC599DC3424D}"/>
               </a:ext>
             </a:extLst>
           </p:cNvPr>
@@ -9365,7 +9227,7 @@
           <p:cNvPr id="7" name="">
             <a:extLst xmlns:a="http://schemas.openxmlformats.org/drawingml/2006/main">
               <a:ext uri="{FF2B5EF4-FFF2-40B4-BE49-F238E27FC236}">
-                <a16:creationId xmlns:a16="http://schemas.microsoft.com/office/drawing/2014/main" id="{9FF15B3C-97CC-4AB4-98B0-AFC07F71BF4B}"/>
+                <a16:creationId xmlns:a16="http://schemas.microsoft.com/office/drawing/2014/main" id="{BAD644AF-E042-479F-9342-AA92247BF88F}"/>
               </a:ext>
             </a:extLst>
           </p:cNvPr>
@@ -9429,79 +9291,10 @@
           </a:p>
         </p:txBody>
       </p:sp>
-      <p:sp>
-        <p:nvSpPr>
-          <p:cNvPr id="8" name="">
-            <a:extLst xmlns:a="http://schemas.openxmlformats.org/drawingml/2006/main">
-              <a:ext uri="{FF2B5EF4-FFF2-40B4-BE49-F238E27FC236}">
-                <a16:creationId xmlns:a16="http://schemas.microsoft.com/office/drawing/2014/main" id="{EB025881-7200-44C6-8B2C-CF5C1B59AE95}"/>
-              </a:ext>
-            </a:extLst>
-          </p:cNvPr>
-          <p:cNvSpPr>
-            <a:spLocks xmlns:a="http://schemas.openxmlformats.org/drawingml/2006/main" noGrp="1"/>
-          </p:cNvSpPr>
-          <p:nvPr/>
-        </p:nvSpPr>
-        <p:spPr>
-          <a:xfrm xmlns:a="http://schemas.openxmlformats.org/drawingml/2006/main">
-            <a:off x="685800" y="5753100"/>
-            <a:ext cx="10820400" cy="228600"/>
-          </a:xfrm>
-          <a:prstGeom xmlns:a="http://schemas.openxmlformats.org/drawingml/2006/main" prst="rect">
-            <a:avLst/>
-          </a:prstGeom>
-          <a:noFill xmlns:a="http://schemas.openxmlformats.org/drawingml/2006/main"/>
-          <a:ln xmlns:a="http://schemas.openxmlformats.org/drawingml/2006/main" w="0">
-            <a:noFill/>
-            <a:prstDash val="solid"/>
-          </a:ln>
-        </p:spPr>
-        <p:txBody>
-          <a:bodyPr xmlns:a="http://schemas.openxmlformats.org/drawingml/2006/main">
-            <a:noAutofit/>
-          </a:bodyPr>
-          <a:lstStyle xmlns:a="http://schemas.openxmlformats.org/drawingml/2006/main">
-            <a:defPPr>
-              <a:defRPr sz="1125" b="0">
-                <a:solidFill>
-                  <a:srgbClr val="8A94A3"/>
-                </a:solidFill>
-                <a:latin typeface="Arial"/>
-                <a:ea typeface="Arial"/>
-                <a:cs typeface="Arial"/>
-              </a:defRPr>
-            </a:defPPr>
-          </a:lstStyle>
-          <a:p xmlns:a="http://schemas.openxmlformats.org/drawingml/2006/main">
-            <a:pPr>
-              <a:defRPr sz="1125" b="0">
-                <a:solidFill>
-                  <a:srgbClr val="8A94A3"/>
-                </a:solidFill>
-                <a:latin typeface="Arial"/>
-                <a:ea typeface="Arial"/>
-                <a:cs typeface="Arial"/>
-              </a:defRPr>
-            </a:pPr>
-            <a:r>
-              <a:rPr sz="1125" b="0">
-                <a:solidFill>
-                  <a:srgbClr val="8A94A3"/>
-                </a:solidFill>
-                <a:latin typeface="Arial"/>
-                <a:ea typeface="Arial"/>
-                <a:cs typeface="Arial"/>
-              </a:rPr>
-              <a:t>Engine output recorded on 16 October 2026 from the seeded dataset.</a:t>
-            </a:r>
-          </a:p>
-        </p:txBody>
-      </p:sp>
     </p:spTree>
     <p:extLst>
       <p:ext uri="{BB962C8B-B14F-4D97-AF65-F5344CB8AC3E}">
-        <p14:creationId xmlns:p14="http://schemas.microsoft.com/office/powerpoint/2010/main" val="1094589810"/>
+        <p14:creationId xmlns:p14="http://schemas.microsoft.com/office/powerpoint/2010/main" val="2135236058"/>
       </p:ext>
     </p:extLst>
   </p:cSld>
@@ -9529,10 +9322,10 @@
       </p:grpSpPr>
       <p:sp>
         <p:nvSpPr>
-          <p:cNvPr id="8" name="">
+          <p:cNvPr id="7" name="">
             <a:extLst xmlns:a="http://schemas.openxmlformats.org/drawingml/2006/main">
               <a:ext uri="{FF2B5EF4-FFF2-40B4-BE49-F238E27FC236}">
-                <a16:creationId xmlns:a16="http://schemas.microsoft.com/office/drawing/2014/main" id="{1F311D37-07E8-488C-8C7B-B120DA7E11D2}"/>
+                <a16:creationId xmlns:a16="http://schemas.microsoft.com/office/drawing/2014/main" id="{F6AB33A3-1D2B-4B6A-89F9-421E44D77CCD}"/>
               </a:ext>
             </a:extLst>
           </p:cNvPr>
@@ -9543,7 +9336,7 @@
         </p:nvSpPr>
         <p:spPr>
           <a:xfrm xmlns:a="http://schemas.openxmlformats.org/drawingml/2006/main">
-            <a:off x="9906000" y="552450"/>
+            <a:off x="9906000" y="6438900"/>
             <a:ext cx="1600200" cy="228600"/>
           </a:xfrm>
           <a:prstGeom xmlns:a="http://schemas.openxmlformats.org/drawingml/2006/main" prst="rect">
@@ -9601,7 +9394,7 @@
           <p:cNvPr id="2" name="slide-title">
             <a:extLst xmlns:a="http://schemas.openxmlformats.org/drawingml/2006/main">
               <a:ext uri="{FF2B5EF4-FFF2-40B4-BE49-F238E27FC236}">
-                <a16:creationId xmlns:a16="http://schemas.microsoft.com/office/drawing/2014/main" id="{2E82BF42-3665-4D05-97AD-363DB45282F3}"/>
+                <a16:creationId xmlns:a16="http://schemas.microsoft.com/office/drawing/2014/main" id="{C4661732-4C0C-44C9-9C2F-2E7B3473B1DD}"/>
               </a:ext>
             </a:extLst>
           </p:cNvPr>
@@ -9670,7 +9463,7 @@
           <p:cNvPr id="3" name="slide-lead">
             <a:extLst xmlns:a="http://schemas.openxmlformats.org/drawingml/2006/main">
               <a:ext uri="{FF2B5EF4-FFF2-40B4-BE49-F238E27FC236}">
-                <a16:creationId xmlns:a16="http://schemas.microsoft.com/office/drawing/2014/main" id="{A5BA9A03-5093-4D1D-835B-FE7B91F886F3}"/>
+                <a16:creationId xmlns:a16="http://schemas.microsoft.com/office/drawing/2014/main" id="{B1C3DDB2-EF2C-4B51-BFFA-487EC7673D82}"/>
               </a:ext>
             </a:extLst>
           </p:cNvPr>
@@ -9739,7 +9532,7 @@
           <p:cNvPr id="4" name="title-rule">
             <a:extLst xmlns:a="http://schemas.openxmlformats.org/drawingml/2006/main">
               <a:ext uri="{FF2B5EF4-FFF2-40B4-BE49-F238E27FC236}">
-                <a16:creationId xmlns:a16="http://schemas.microsoft.com/office/drawing/2014/main" id="{1794132C-75D2-4E85-965C-2F90783B0095}"/>
+                <a16:creationId xmlns:a16="http://schemas.microsoft.com/office/drawing/2014/main" id="{9B77AD4F-E588-41BF-AA49-88E0B7996C61}"/>
               </a:ext>
             </a:extLst>
           </p:cNvPr>
@@ -9770,7 +9563,7 @@
           <p:cNvPr id="5" name="">
             <a:extLst xmlns:a="http://schemas.openxmlformats.org/drawingml/2006/main">
               <a:ext uri="{FF2B5EF4-FFF2-40B4-BE49-F238E27FC236}">
-                <a16:creationId xmlns:a16="http://schemas.microsoft.com/office/drawing/2014/main" id="{511F74A1-6E80-4829-91E0-C253D0654D40}"/>
+                <a16:creationId xmlns:a16="http://schemas.microsoft.com/office/drawing/2014/main" id="{3DF161AF-57E5-45AC-853A-DE0B73F66DFB}"/>
               </a:ext>
             </a:extLst>
           </p:cNvPr>
@@ -9897,7 +9690,7 @@
           <p:cNvPr id="6" name="">
             <a:extLst xmlns:a="http://schemas.openxmlformats.org/drawingml/2006/main">
               <a:ext uri="{FF2B5EF4-FFF2-40B4-BE49-F238E27FC236}">
-                <a16:creationId xmlns:a16="http://schemas.microsoft.com/office/drawing/2014/main" id="{260403CA-A519-445D-B0D2-415DA19B229E}"/>
+                <a16:creationId xmlns:a16="http://schemas.microsoft.com/office/drawing/2014/main" id="{D99CF2FF-AD0F-4EB0-A649-E47931B7D451}"/>
               </a:ext>
             </a:extLst>
           </p:cNvPr>
@@ -9907,7 +9700,7 @@
           <p:nvPr/>
         </p:nvPicPr>
         <p:blipFill>
-          <a:blip xmlns:r="http://schemas.openxmlformats.org/officeDocument/2006/relationships" xmlns:a="http://schemas.openxmlformats.org/drawingml/2006/main" r:embed="Ra4394fff797840a7"/>
+          <a:blip xmlns:r="http://schemas.openxmlformats.org/officeDocument/2006/relationships" xmlns:a="http://schemas.openxmlformats.org/drawingml/2006/main" r:embed="R871afb5f267b44e4"/>
           <a:stretch xmlns:a="http://schemas.openxmlformats.org/drawingml/2006/main"/>
         </p:blipFill>
         <p:spPr>
@@ -9920,79 +9713,10 @@
           </a:prstGeom>
         </p:spPr>
       </p:pic>
-      <p:sp>
-        <p:nvSpPr>
-          <p:cNvPr id="7" name="">
-            <a:extLst xmlns:a="http://schemas.openxmlformats.org/drawingml/2006/main">
-              <a:ext uri="{FF2B5EF4-FFF2-40B4-BE49-F238E27FC236}">
-                <a16:creationId xmlns:a16="http://schemas.microsoft.com/office/drawing/2014/main" id="{EED12DB4-5595-4DCB-8E8E-F9A8177CEE93}"/>
-              </a:ext>
-            </a:extLst>
-          </p:cNvPr>
-          <p:cNvSpPr>
-            <a:spLocks xmlns:a="http://schemas.openxmlformats.org/drawingml/2006/main" noGrp="1"/>
-          </p:cNvSpPr>
-          <p:nvPr/>
-        </p:nvSpPr>
-        <p:spPr>
-          <a:xfrm xmlns:a="http://schemas.openxmlformats.org/drawingml/2006/main">
-            <a:off x="685800" y="5753100"/>
-            <a:ext cx="10820400" cy="228600"/>
-          </a:xfrm>
-          <a:prstGeom xmlns:a="http://schemas.openxmlformats.org/drawingml/2006/main" prst="rect">
-            <a:avLst/>
-          </a:prstGeom>
-          <a:noFill xmlns:a="http://schemas.openxmlformats.org/drawingml/2006/main"/>
-          <a:ln xmlns:a="http://schemas.openxmlformats.org/drawingml/2006/main" w="0">
-            <a:noFill/>
-            <a:prstDash val="solid"/>
-          </a:ln>
-        </p:spPr>
-        <p:txBody>
-          <a:bodyPr xmlns:a="http://schemas.openxmlformats.org/drawingml/2006/main">
-            <a:noAutofit/>
-          </a:bodyPr>
-          <a:lstStyle xmlns:a="http://schemas.openxmlformats.org/drawingml/2006/main">
-            <a:defPPr>
-              <a:defRPr sz="1125" b="0">
-                <a:solidFill>
-                  <a:srgbClr val="8A94A3"/>
-                </a:solidFill>
-                <a:latin typeface="Arial"/>
-                <a:ea typeface="Arial"/>
-                <a:cs typeface="Arial"/>
-              </a:defRPr>
-            </a:defPPr>
-          </a:lstStyle>
-          <a:p xmlns:a="http://schemas.openxmlformats.org/drawingml/2006/main">
-            <a:pPr>
-              <a:defRPr sz="1125" b="0">
-                <a:solidFill>
-                  <a:srgbClr val="8A94A3"/>
-                </a:solidFill>
-                <a:latin typeface="Arial"/>
-                <a:ea typeface="Arial"/>
-                <a:cs typeface="Arial"/>
-              </a:defRPr>
-            </a:pPr>
-            <a:r>
-              <a:rPr sz="1125" b="0">
-                <a:solidFill>
-                  <a:srgbClr val="8A94A3"/>
-                </a:solidFill>
-                <a:latin typeface="Arial"/>
-                <a:ea typeface="Arial"/>
-                <a:cs typeface="Arial"/>
-              </a:rPr>
-              <a:t>Figure: overall layered system architecture, Lab 3 submission.</a:t>
-            </a:r>
-          </a:p>
-        </p:txBody>
-      </p:sp>
     </p:spTree>
     <p:extLst>
       <p:ext uri="{BB962C8B-B14F-4D97-AF65-F5344CB8AC3E}">
-        <p14:creationId xmlns:p14="http://schemas.microsoft.com/office/powerpoint/2010/main" val="48228574"/>
+        <p14:creationId xmlns:p14="http://schemas.microsoft.com/office/powerpoint/2010/main" val="911732435"/>
       </p:ext>
     </p:extLst>
   </p:cSld>
@@ -10020,10 +9744,10 @@
       </p:grpSpPr>
       <p:sp>
         <p:nvSpPr>
-          <p:cNvPr id="8" name="">
+          <p:cNvPr id="7" name="">
             <a:extLst xmlns:a="http://schemas.openxmlformats.org/drawingml/2006/main">
               <a:ext uri="{FF2B5EF4-FFF2-40B4-BE49-F238E27FC236}">
-                <a16:creationId xmlns:a16="http://schemas.microsoft.com/office/drawing/2014/main" id="{C8E64BB8-A503-4639-B886-42D6C17C76CB}"/>
+                <a16:creationId xmlns:a16="http://schemas.microsoft.com/office/drawing/2014/main" id="{3631C4CA-6845-4D63-9FE5-B6D91B4D671D}"/>
               </a:ext>
             </a:extLst>
           </p:cNvPr>
@@ -10034,7 +9758,7 @@
         </p:nvSpPr>
         <p:spPr>
           <a:xfrm xmlns:a="http://schemas.openxmlformats.org/drawingml/2006/main">
-            <a:off x="9906000" y="552450"/>
+            <a:off x="9906000" y="6438900"/>
             <a:ext cx="1600200" cy="228600"/>
           </a:xfrm>
           <a:prstGeom xmlns:a="http://schemas.openxmlformats.org/drawingml/2006/main" prst="rect">
@@ -10092,7 +9816,7 @@
           <p:cNvPr id="2" name="slide-title">
             <a:extLst xmlns:a="http://schemas.openxmlformats.org/drawingml/2006/main">
               <a:ext uri="{FF2B5EF4-FFF2-40B4-BE49-F238E27FC236}">
-                <a16:creationId xmlns:a16="http://schemas.microsoft.com/office/drawing/2014/main" id="{03BBB228-39DB-4808-B098-C9799E333F13}"/>
+                <a16:creationId xmlns:a16="http://schemas.microsoft.com/office/drawing/2014/main" id="{C2BF4085-23B7-4BE7-83B2-B6DAE8709338}"/>
               </a:ext>
             </a:extLst>
           </p:cNvPr>
@@ -10161,7 +9885,7 @@
           <p:cNvPr id="3" name="slide-lead">
             <a:extLst xmlns:a="http://schemas.openxmlformats.org/drawingml/2006/main">
               <a:ext uri="{FF2B5EF4-FFF2-40B4-BE49-F238E27FC236}">
-                <a16:creationId xmlns:a16="http://schemas.microsoft.com/office/drawing/2014/main" id="{94706A7B-B90F-4875-BDCD-D122C81244BE}"/>
+                <a16:creationId xmlns:a16="http://schemas.microsoft.com/office/drawing/2014/main" id="{28453F5C-42BE-4DD1-8FD9-C45CD6B14668}"/>
               </a:ext>
             </a:extLst>
           </p:cNvPr>
@@ -10230,7 +9954,7 @@
           <p:cNvPr id="4" name="title-rule">
             <a:extLst xmlns:a="http://schemas.openxmlformats.org/drawingml/2006/main">
               <a:ext uri="{FF2B5EF4-FFF2-40B4-BE49-F238E27FC236}">
-                <a16:creationId xmlns:a16="http://schemas.microsoft.com/office/drawing/2014/main" id="{9525107D-F960-4D69-BA84-A80CB747DDE5}"/>
+                <a16:creationId xmlns:a16="http://schemas.microsoft.com/office/drawing/2014/main" id="{75650962-C0C1-4243-A4E6-CC0C62D710C8}"/>
               </a:ext>
             </a:extLst>
           </p:cNvPr>
@@ -10261,7 +9985,7 @@
           <p:cNvPr id="5" name="">
             <a:extLst xmlns:a="http://schemas.openxmlformats.org/drawingml/2006/main">
               <a:ext uri="{FF2B5EF4-FFF2-40B4-BE49-F238E27FC236}">
-                <a16:creationId xmlns:a16="http://schemas.microsoft.com/office/drawing/2014/main" id="{54C111E5-5337-428C-896B-F194C73FA9A8}"/>
+                <a16:creationId xmlns:a16="http://schemas.microsoft.com/office/drawing/2014/main" id="{908F8670-7D35-42B3-917F-C31570F96CD2}"/>
               </a:ext>
             </a:extLst>
           </p:cNvPr>
@@ -10388,7 +10112,7 @@
           <p:cNvPr id="6" name="">
             <a:extLst xmlns:a="http://schemas.openxmlformats.org/drawingml/2006/main">
               <a:ext uri="{FF2B5EF4-FFF2-40B4-BE49-F238E27FC236}">
-                <a16:creationId xmlns:a16="http://schemas.microsoft.com/office/drawing/2014/main" id="{649E0069-843C-489F-A721-3EF09C3DF436}"/>
+                <a16:creationId xmlns:a16="http://schemas.microsoft.com/office/drawing/2014/main" id="{A53B2633-F1C0-4BD9-B8BF-DFFA001B8F91}"/>
               </a:ext>
             </a:extLst>
           </p:cNvPr>
@@ -10398,7 +10122,7 @@
           <p:nvPr/>
         </p:nvPicPr>
         <p:blipFill>
-          <a:blip xmlns:r="http://schemas.openxmlformats.org/officeDocument/2006/relationships" xmlns:a="http://schemas.openxmlformats.org/drawingml/2006/main" r:embed="R4ec7883e7c8748e3"/>
+          <a:blip xmlns:r="http://schemas.openxmlformats.org/officeDocument/2006/relationships" xmlns:a="http://schemas.openxmlformats.org/drawingml/2006/main" r:embed="Rbddaccbd52f14bb5"/>
           <a:stretch xmlns:a="http://schemas.openxmlformats.org/drawingml/2006/main"/>
         </p:blipFill>
         <p:spPr>
@@ -10411,79 +10135,10 @@
           </a:prstGeom>
         </p:spPr>
       </p:pic>
-      <p:sp>
-        <p:nvSpPr>
-          <p:cNvPr id="7" name="">
-            <a:extLst xmlns:a="http://schemas.openxmlformats.org/drawingml/2006/main">
-              <a:ext uri="{FF2B5EF4-FFF2-40B4-BE49-F238E27FC236}">
-                <a16:creationId xmlns:a16="http://schemas.microsoft.com/office/drawing/2014/main" id="{E52FE573-8401-4ABB-A38C-5BEE91BFE6A0}"/>
-              </a:ext>
-            </a:extLst>
-          </p:cNvPr>
-          <p:cNvSpPr>
-            <a:spLocks xmlns:a="http://schemas.openxmlformats.org/drawingml/2006/main" noGrp="1"/>
-          </p:cNvSpPr>
-          <p:nvPr/>
-        </p:nvSpPr>
-        <p:spPr>
-          <a:xfrm xmlns:a="http://schemas.openxmlformats.org/drawingml/2006/main">
-            <a:off x="685800" y="5753100"/>
-            <a:ext cx="10820400" cy="228600"/>
-          </a:xfrm>
-          <a:prstGeom xmlns:a="http://schemas.openxmlformats.org/drawingml/2006/main" prst="rect">
-            <a:avLst/>
-          </a:prstGeom>
-          <a:noFill xmlns:a="http://schemas.openxmlformats.org/drawingml/2006/main"/>
-          <a:ln xmlns:a="http://schemas.openxmlformats.org/drawingml/2006/main" w="0">
-            <a:noFill/>
-            <a:prstDash val="solid"/>
-          </a:ln>
-        </p:spPr>
-        <p:txBody>
-          <a:bodyPr xmlns:a="http://schemas.openxmlformats.org/drawingml/2006/main">
-            <a:noAutofit/>
-          </a:bodyPr>
-          <a:lstStyle xmlns:a="http://schemas.openxmlformats.org/drawingml/2006/main">
-            <a:defPPr>
-              <a:defRPr sz="1125" b="0">
-                <a:solidFill>
-                  <a:srgbClr val="8A94A3"/>
-                </a:solidFill>
-                <a:latin typeface="Arial"/>
-                <a:ea typeface="Arial"/>
-                <a:cs typeface="Arial"/>
-              </a:defRPr>
-            </a:defPPr>
-          </a:lstStyle>
-          <a:p xmlns:a="http://schemas.openxmlformats.org/drawingml/2006/main">
-            <a:pPr>
-              <a:defRPr sz="1125" b="0">
-                <a:solidFill>
-                  <a:srgbClr val="8A94A3"/>
-                </a:solidFill>
-                <a:latin typeface="Arial"/>
-                <a:ea typeface="Arial"/>
-                <a:cs typeface="Arial"/>
-              </a:defRPr>
-            </a:pPr>
-            <a:r>
-              <a:rPr sz="1125" b="0">
-                <a:solidFill>
-                  <a:srgbClr val="8A94A3"/>
-                </a:solidFill>
-                <a:latin typeface="Arial"/>
-                <a:ea typeface="Arial"/>
-                <a:cs typeface="Arial"/>
-              </a:rPr>
-              <a:t>Figure: entity relationship diagram, Lab 4 submission.</a:t>
-            </a:r>
-          </a:p>
-        </p:txBody>
-      </p:sp>
     </p:spTree>
     <p:extLst>
       <p:ext uri="{BB962C8B-B14F-4D97-AF65-F5344CB8AC3E}">
-        <p14:creationId xmlns:p14="http://schemas.microsoft.com/office/powerpoint/2010/main" val="1363430436"/>
+        <p14:creationId xmlns:p14="http://schemas.microsoft.com/office/powerpoint/2010/main" val="1254669575"/>
       </p:ext>
     </p:extLst>
   </p:cSld>
@@ -10514,7 +10169,7 @@
           <p:cNvPr id="18" name="">
             <a:extLst xmlns:a="http://schemas.openxmlformats.org/drawingml/2006/main">
               <a:ext uri="{FF2B5EF4-FFF2-40B4-BE49-F238E27FC236}">
-                <a16:creationId xmlns:a16="http://schemas.microsoft.com/office/drawing/2014/main" id="{7319006A-F2AE-4C1C-B57F-01A7B3DF3BD3}"/>
+                <a16:creationId xmlns:a16="http://schemas.microsoft.com/office/drawing/2014/main" id="{F70E97CF-0F49-4F5C-A70E-7FF03688F1A0}"/>
               </a:ext>
             </a:extLst>
           </p:cNvPr>
@@ -10525,7 +10180,7 @@
         </p:nvSpPr>
         <p:spPr>
           <a:xfrm xmlns:a="http://schemas.openxmlformats.org/drawingml/2006/main">
-            <a:off x="9906000" y="552450"/>
+            <a:off x="9906000" y="6438900"/>
             <a:ext cx="1600200" cy="228600"/>
           </a:xfrm>
           <a:prstGeom xmlns:a="http://schemas.openxmlformats.org/drawingml/2006/main" prst="rect">
@@ -10583,7 +10238,7 @@
           <p:cNvPr id="2" name="slide-title">
             <a:extLst xmlns:a="http://schemas.openxmlformats.org/drawingml/2006/main">
               <a:ext uri="{FF2B5EF4-FFF2-40B4-BE49-F238E27FC236}">
-                <a16:creationId xmlns:a16="http://schemas.microsoft.com/office/drawing/2014/main" id="{C52C02D8-8BB6-44E0-8D1B-7BA686F91D61}"/>
+                <a16:creationId xmlns:a16="http://schemas.microsoft.com/office/drawing/2014/main" id="{2667E30E-5505-4335-BBF0-1307D4BB9F7E}"/>
               </a:ext>
             </a:extLst>
           </p:cNvPr>
@@ -10652,7 +10307,7 @@
           <p:cNvPr id="3" name="slide-lead">
             <a:extLst xmlns:a="http://schemas.openxmlformats.org/drawingml/2006/main">
               <a:ext uri="{FF2B5EF4-FFF2-40B4-BE49-F238E27FC236}">
-                <a16:creationId xmlns:a16="http://schemas.microsoft.com/office/drawing/2014/main" id="{AAAC7111-FCA2-468C-AA69-812E49D2E26E}"/>
+                <a16:creationId xmlns:a16="http://schemas.microsoft.com/office/drawing/2014/main" id="{0D9BCAB5-684A-4A1F-B7E0-5C298772527E}"/>
               </a:ext>
             </a:extLst>
           </p:cNvPr>
@@ -10721,7 +10376,7 @@
           <p:cNvPr id="4" name="title-rule">
             <a:extLst xmlns:a="http://schemas.openxmlformats.org/drawingml/2006/main">
               <a:ext uri="{FF2B5EF4-FFF2-40B4-BE49-F238E27FC236}">
-                <a16:creationId xmlns:a16="http://schemas.microsoft.com/office/drawing/2014/main" id="{DA7514CF-DBD0-400E-B533-0CBCAAF90E7B}"/>
+                <a16:creationId xmlns:a16="http://schemas.microsoft.com/office/drawing/2014/main" id="{88847184-A71C-4C78-99F6-4704A20B03C5}"/>
               </a:ext>
             </a:extLst>
           </p:cNvPr>
@@ -10752,7 +10407,7 @@
           <p:cNvPr id="5" name="">
             <a:extLst xmlns:a="http://schemas.openxmlformats.org/drawingml/2006/main">
               <a:ext uri="{FF2B5EF4-FFF2-40B4-BE49-F238E27FC236}">
-                <a16:creationId xmlns:a16="http://schemas.microsoft.com/office/drawing/2014/main" id="{285DA173-7525-4B0F-999D-418CAB128901}"/>
+                <a16:creationId xmlns:a16="http://schemas.microsoft.com/office/drawing/2014/main" id="{EBBBF95E-AAB5-4CB3-8077-A52EE469DE2C}"/>
               </a:ext>
             </a:extLst>
           </p:cNvPr>
@@ -10821,7 +10476,7 @@
           <p:cNvPr id="6" name="">
             <a:extLst xmlns:a="http://schemas.openxmlformats.org/drawingml/2006/main">
               <a:ext uri="{FF2B5EF4-FFF2-40B4-BE49-F238E27FC236}">
-                <a16:creationId xmlns:a16="http://schemas.microsoft.com/office/drawing/2014/main" id="{A3648B2B-AB85-4C6B-9B08-38E42DBC3EEE}"/>
+                <a16:creationId xmlns:a16="http://schemas.microsoft.com/office/drawing/2014/main" id="{D243C39D-D9D2-4B63-9014-2BD5F9FF0A21}"/>
               </a:ext>
             </a:extLst>
           </p:cNvPr>
@@ -10890,7 +10545,7 @@
           <p:cNvPr id="7" name="">
             <a:extLst xmlns:a="http://schemas.openxmlformats.org/drawingml/2006/main">
               <a:ext uri="{FF2B5EF4-FFF2-40B4-BE49-F238E27FC236}">
-                <a16:creationId xmlns:a16="http://schemas.microsoft.com/office/drawing/2014/main" id="{10CEF089-0D64-4431-92EB-325363A123EB}"/>
+                <a16:creationId xmlns:a16="http://schemas.microsoft.com/office/drawing/2014/main" id="{B59248E6-DC08-40FB-B4DF-67F9B3012F60}"/>
               </a:ext>
             </a:extLst>
           </p:cNvPr>
@@ -10959,7 +10614,7 @@
           <p:cNvPr id="8" name="">
             <a:extLst xmlns:a="http://schemas.openxmlformats.org/drawingml/2006/main">
               <a:ext uri="{FF2B5EF4-FFF2-40B4-BE49-F238E27FC236}">
-                <a16:creationId xmlns:a16="http://schemas.microsoft.com/office/drawing/2014/main" id="{532236D2-0839-4F1B-A41C-C643DFA1E5A7}"/>
+                <a16:creationId xmlns:a16="http://schemas.microsoft.com/office/drawing/2014/main" id="{18E72DD6-30A5-4D9E-B46D-0533D72ECE8E}"/>
               </a:ext>
             </a:extLst>
           </p:cNvPr>
@@ -11028,7 +10683,7 @@
           <p:cNvPr id="9" name="">
             <a:extLst xmlns:a="http://schemas.openxmlformats.org/drawingml/2006/main">
               <a:ext uri="{FF2B5EF4-FFF2-40B4-BE49-F238E27FC236}">
-                <a16:creationId xmlns:a16="http://schemas.microsoft.com/office/drawing/2014/main" id="{66A88774-18AD-4497-8295-EAEB316AA3AE}"/>
+                <a16:creationId xmlns:a16="http://schemas.microsoft.com/office/drawing/2014/main" id="{3FCB619C-5462-4014-9534-C0940DABE769}"/>
               </a:ext>
             </a:extLst>
           </p:cNvPr>
@@ -11097,7 +10752,7 @@
           <p:cNvPr id="10" name="">
             <a:extLst xmlns:a="http://schemas.openxmlformats.org/drawingml/2006/main">
               <a:ext uri="{FF2B5EF4-FFF2-40B4-BE49-F238E27FC236}">
-                <a16:creationId xmlns:a16="http://schemas.microsoft.com/office/drawing/2014/main" id="{5ADC71E2-4439-40FD-95B0-FBBDB62A7A4D}"/>
+                <a16:creationId xmlns:a16="http://schemas.microsoft.com/office/drawing/2014/main" id="{7B3C366D-DC0E-4229-BDBC-44DDA1898D61}"/>
               </a:ext>
             </a:extLst>
           </p:cNvPr>
@@ -11166,7 +10821,7 @@
           <p:cNvPr id="11" name="">
             <a:extLst xmlns:a="http://schemas.openxmlformats.org/drawingml/2006/main">
               <a:ext uri="{FF2B5EF4-FFF2-40B4-BE49-F238E27FC236}">
-                <a16:creationId xmlns:a16="http://schemas.microsoft.com/office/drawing/2014/main" id="{E9ACF140-0A44-4B52-8933-F80AB916FD62}"/>
+                <a16:creationId xmlns:a16="http://schemas.microsoft.com/office/drawing/2014/main" id="{0DCCDC48-09DB-48F8-ADFD-1FC992141924}"/>
               </a:ext>
             </a:extLst>
           </p:cNvPr>
@@ -11235,7 +10890,7 @@
           <p:cNvPr id="12" name="">
             <a:extLst xmlns:a="http://schemas.openxmlformats.org/drawingml/2006/main">
               <a:ext uri="{FF2B5EF4-FFF2-40B4-BE49-F238E27FC236}">
-                <a16:creationId xmlns:a16="http://schemas.microsoft.com/office/drawing/2014/main" id="{560BBB95-1645-47FA-B14F-699F8158F34E}"/>
+                <a16:creationId xmlns:a16="http://schemas.microsoft.com/office/drawing/2014/main" id="{38075E0A-0D78-4DB5-A4C4-4CEC0D930736}"/>
               </a:ext>
             </a:extLst>
           </p:cNvPr>
@@ -11304,7 +10959,7 @@
           <p:cNvPr id="13" name="">
             <a:extLst xmlns:a="http://schemas.openxmlformats.org/drawingml/2006/main">
               <a:ext uri="{FF2B5EF4-FFF2-40B4-BE49-F238E27FC236}">
-                <a16:creationId xmlns:a16="http://schemas.microsoft.com/office/drawing/2014/main" id="{9111F5AB-437A-4389-8E29-0A1B875FB220}"/>
+                <a16:creationId xmlns:a16="http://schemas.microsoft.com/office/drawing/2014/main" id="{23731B87-5D6B-40EA-A1E7-DA1AF3993769}"/>
               </a:ext>
             </a:extLst>
           </p:cNvPr>
@@ -11373,7 +11028,7 @@
           <p:cNvPr id="14" name="">
             <a:extLst xmlns:a="http://schemas.openxmlformats.org/drawingml/2006/main">
               <a:ext uri="{FF2B5EF4-FFF2-40B4-BE49-F238E27FC236}">
-                <a16:creationId xmlns:a16="http://schemas.microsoft.com/office/drawing/2014/main" id="{29EAAC76-6FD3-422D-BEF9-E6007E6012F6}"/>
+                <a16:creationId xmlns:a16="http://schemas.microsoft.com/office/drawing/2014/main" id="{83035B5B-7381-4EA6-BADB-9303251E276C}"/>
               </a:ext>
             </a:extLst>
           </p:cNvPr>
@@ -11442,7 +11097,7 @@
           <p:cNvPr id="15" name="">
             <a:extLst xmlns:a="http://schemas.openxmlformats.org/drawingml/2006/main">
               <a:ext uri="{FF2B5EF4-FFF2-40B4-BE49-F238E27FC236}">
-                <a16:creationId xmlns:a16="http://schemas.microsoft.com/office/drawing/2014/main" id="{A2C4B9BA-3684-4530-B21B-5FE84D096E54}"/>
+                <a16:creationId xmlns:a16="http://schemas.microsoft.com/office/drawing/2014/main" id="{9144F443-437B-4D89-B3D0-B06CA4E5A51A}"/>
               </a:ext>
             </a:extLst>
           </p:cNvPr>
@@ -11511,7 +11166,7 @@
           <p:cNvPr id="16" name="">
             <a:extLst xmlns:a="http://schemas.openxmlformats.org/drawingml/2006/main">
               <a:ext uri="{FF2B5EF4-FFF2-40B4-BE49-F238E27FC236}">
-                <a16:creationId xmlns:a16="http://schemas.microsoft.com/office/drawing/2014/main" id="{5F3FBEA9-0D72-4A13-B2F3-43EA8EB300E8}"/>
+                <a16:creationId xmlns:a16="http://schemas.microsoft.com/office/drawing/2014/main" id="{28925F70-DAFD-493B-8033-8427A143F7C1}"/>
               </a:ext>
             </a:extLst>
           </p:cNvPr>
@@ -11580,7 +11235,7 @@
           <p:cNvPr id="17" name="">
             <a:extLst xmlns:a="http://schemas.openxmlformats.org/drawingml/2006/main">
               <a:ext uri="{FF2B5EF4-FFF2-40B4-BE49-F238E27FC236}">
-                <a16:creationId xmlns:a16="http://schemas.microsoft.com/office/drawing/2014/main" id="{11603C69-CBE9-4F89-BEC9-834766960643}"/>
+                <a16:creationId xmlns:a16="http://schemas.microsoft.com/office/drawing/2014/main" id="{72A6D2B3-8666-4B0C-98C2-E85A2E0A8AFB}"/>
               </a:ext>
             </a:extLst>
           </p:cNvPr>
@@ -11705,7 +11360,7 @@
     </p:spTree>
     <p:extLst>
       <p:ext uri="{BB962C8B-B14F-4D97-AF65-F5344CB8AC3E}">
-        <p14:creationId xmlns:p14="http://schemas.microsoft.com/office/powerpoint/2010/main" val="1286252605"/>
+        <p14:creationId xmlns:p14="http://schemas.microsoft.com/office/powerpoint/2010/main" val="1088043896"/>
       </p:ext>
     </p:extLst>
   </p:cSld>

--- a/docs/FoodBridge_Project_Review.pptx
+++ b/docs/FoodBridge_Project_Review.pptx
@@ -1,35 +1,130 @@
 
 <file path=ppt/presentation.xml><?xml version="1.0" encoding="utf-8"?>
-<p:presentation xmlns:p="http://schemas.openxmlformats.org/presentationml/2006/main">
+<p:presentation xmlns:a="http://schemas.openxmlformats.org/drawingml/2006/main" xmlns:r="http://schemas.openxmlformats.org/officeDocument/2006/relationships" xmlns:p="http://schemas.openxmlformats.org/presentationml/2006/main">
   <p:sldMasterIdLst>
-    <p:sldMasterId xmlns:r="http://schemas.openxmlformats.org/officeDocument/2006/relationships" id="2147483648" r:id="R661f5caae9a141a0"/>
+    <p:sldMasterId id="2147483648" r:id="rId1"/>
   </p:sldMasterIdLst>
   <p:notesMasterIdLst>
-    <p:notesMasterId xmlns:r="http://schemas.openxmlformats.org/officeDocument/2006/relationships" r:id="Rcf2988f6731948ed"/>
+    <p:notesMasterId r:id="rId12"/>
   </p:notesMasterIdLst>
   <p:sldIdLst>
-    <p:sldId xmlns:r="http://schemas.openxmlformats.org/officeDocument/2006/relationships" id="256" r:id="Rd4d26265687f4f7c"/>
-    <p:sldId xmlns:r="http://schemas.openxmlformats.org/officeDocument/2006/relationships" id="257" r:id="Re6f11986d07a4a95"/>
-    <p:sldId xmlns:r="http://schemas.openxmlformats.org/officeDocument/2006/relationships" id="258" r:id="R967864c929a544e1"/>
-    <p:sldId xmlns:r="http://schemas.openxmlformats.org/officeDocument/2006/relationships" id="259" r:id="R0cc0f6e7463c4fdf"/>
-    <p:sldId xmlns:r="http://schemas.openxmlformats.org/officeDocument/2006/relationships" id="260" r:id="Rdfdc5eb7359d4bae"/>
-    <p:sldId xmlns:r="http://schemas.openxmlformats.org/officeDocument/2006/relationships" id="261" r:id="R45489e9026bf4799"/>
-    <p:sldId xmlns:r="http://schemas.openxmlformats.org/officeDocument/2006/relationships" id="262" r:id="R647abf8063de45e4"/>
-    <p:sldId xmlns:r="http://schemas.openxmlformats.org/officeDocument/2006/relationships" id="263" r:id="Rff092c7a4aa94fd6"/>
-    <p:sldId xmlns:r="http://schemas.openxmlformats.org/officeDocument/2006/relationships" id="264" r:id="R8923450c7be149a5"/>
-    <p:sldId xmlns:r="http://schemas.openxmlformats.org/officeDocument/2006/relationships" id="265" r:id="R3fd0dad00d414f9c"/>
+    <p:sldId id="256" r:id="rId2"/>
+    <p:sldId id="257" r:id="rId3"/>
+    <p:sldId id="258" r:id="rId4"/>
+    <p:sldId id="259" r:id="rId5"/>
+    <p:sldId id="260" r:id="rId6"/>
+    <p:sldId id="261" r:id="rId7"/>
+    <p:sldId id="262" r:id="rId8"/>
+    <p:sldId id="263" r:id="rId9"/>
+    <p:sldId id="264" r:id="rId10"/>
+    <p:sldId id="265" r:id="rId11"/>
   </p:sldIdLst>
   <p:sldSz cx="12192000" cy="6858000"/>
   <p:notesSz cx="6858000" cy="9144000"/>
+  <p:defaultTextStyle>
+    <a:defPPr>
+      <a:defRPr lang="en-US"/>
+    </a:defPPr>
+    <a:lvl1pPr marL="0" algn="l" defTabSz="914400" rtl="0" eaLnBrk="1" latinLnBrk="0" hangingPunct="1">
+      <a:defRPr sz="1800" kern="1200">
+        <a:solidFill>
+          <a:schemeClr val="tx1"/>
+        </a:solidFill>
+        <a:latin typeface="+mn-lt"/>
+        <a:ea typeface="+mn-ea"/>
+        <a:cs typeface="+mn-cs"/>
+      </a:defRPr>
+    </a:lvl1pPr>
+    <a:lvl2pPr marL="457200" algn="l" defTabSz="914400" rtl="0" eaLnBrk="1" latinLnBrk="0" hangingPunct="1">
+      <a:defRPr sz="1800" kern="1200">
+        <a:solidFill>
+          <a:schemeClr val="tx1"/>
+        </a:solidFill>
+        <a:latin typeface="+mn-lt"/>
+        <a:ea typeface="+mn-ea"/>
+        <a:cs typeface="+mn-cs"/>
+      </a:defRPr>
+    </a:lvl2pPr>
+    <a:lvl3pPr marL="914400" algn="l" defTabSz="914400" rtl="0" eaLnBrk="1" latinLnBrk="0" hangingPunct="1">
+      <a:defRPr sz="1800" kern="1200">
+        <a:solidFill>
+          <a:schemeClr val="tx1"/>
+        </a:solidFill>
+        <a:latin typeface="+mn-lt"/>
+        <a:ea typeface="+mn-ea"/>
+        <a:cs typeface="+mn-cs"/>
+      </a:defRPr>
+    </a:lvl3pPr>
+    <a:lvl4pPr marL="1371600" algn="l" defTabSz="914400" rtl="0" eaLnBrk="1" latinLnBrk="0" hangingPunct="1">
+      <a:defRPr sz="1800" kern="1200">
+        <a:solidFill>
+          <a:schemeClr val="tx1"/>
+        </a:solidFill>
+        <a:latin typeface="+mn-lt"/>
+        <a:ea typeface="+mn-ea"/>
+        <a:cs typeface="+mn-cs"/>
+      </a:defRPr>
+    </a:lvl4pPr>
+    <a:lvl5pPr marL="1828800" algn="l" defTabSz="914400" rtl="0" eaLnBrk="1" latinLnBrk="0" hangingPunct="1">
+      <a:defRPr sz="1800" kern="1200">
+        <a:solidFill>
+          <a:schemeClr val="tx1"/>
+        </a:solidFill>
+        <a:latin typeface="+mn-lt"/>
+        <a:ea typeface="+mn-ea"/>
+        <a:cs typeface="+mn-cs"/>
+      </a:defRPr>
+    </a:lvl5pPr>
+    <a:lvl6pPr marL="2286000" algn="l" defTabSz="914400" rtl="0" eaLnBrk="1" latinLnBrk="0" hangingPunct="1">
+      <a:defRPr sz="1800" kern="1200">
+        <a:solidFill>
+          <a:schemeClr val="tx1"/>
+        </a:solidFill>
+        <a:latin typeface="+mn-lt"/>
+        <a:ea typeface="+mn-ea"/>
+        <a:cs typeface="+mn-cs"/>
+      </a:defRPr>
+    </a:lvl6pPr>
+    <a:lvl7pPr marL="2743200" algn="l" defTabSz="914400" rtl="0" eaLnBrk="1" latinLnBrk="0" hangingPunct="1">
+      <a:defRPr sz="1800" kern="1200">
+        <a:solidFill>
+          <a:schemeClr val="tx1"/>
+        </a:solidFill>
+        <a:latin typeface="+mn-lt"/>
+        <a:ea typeface="+mn-ea"/>
+        <a:cs typeface="+mn-cs"/>
+      </a:defRPr>
+    </a:lvl7pPr>
+    <a:lvl8pPr marL="3200400" algn="l" defTabSz="914400" rtl="0" eaLnBrk="1" latinLnBrk="0" hangingPunct="1">
+      <a:defRPr sz="1800" kern="1200">
+        <a:solidFill>
+          <a:schemeClr val="tx1"/>
+        </a:solidFill>
+        <a:latin typeface="+mn-lt"/>
+        <a:ea typeface="+mn-ea"/>
+        <a:cs typeface="+mn-cs"/>
+      </a:defRPr>
+    </a:lvl8pPr>
+    <a:lvl9pPr marL="3657600" algn="l" defTabSz="914400" rtl="0" eaLnBrk="1" latinLnBrk="0" hangingPunct="1">
+      <a:defRPr sz="1800" kern="1200">
+        <a:solidFill>
+          <a:schemeClr val="tx1"/>
+        </a:solidFill>
+        <a:latin typeface="+mn-lt"/>
+        <a:ea typeface="+mn-ea"/>
+        <a:cs typeface="+mn-cs"/>
+      </a:defRPr>
+    </a:lvl9pPr>
+  </p:defaultTextStyle>
 </p:presentation>
 </file>
 
 <file path=ppt/notesMasters/notesMaster1.xml><?xml version="1.0" encoding="utf-8"?>
-<p:notesMaster xmlns:p="http://schemas.openxmlformats.org/presentationml/2006/main">
+<p:notesMaster xmlns:a="http://schemas.openxmlformats.org/drawingml/2006/main" xmlns:r="http://schemas.openxmlformats.org/officeDocument/2006/relationships" xmlns:p="http://schemas.openxmlformats.org/presentationml/2006/main">
   <p:cSld>
     <p:bg>
       <p:bgRef idx="1001">
-        <a:schemeClr xmlns:a="http://schemas.openxmlformats.org/drawingml/2006/main" val="bg1"/>
+        <a:schemeClr val="bg1"/>
       </p:bgRef>
     </p:bg>
     <p:spTree>
@@ -39,380 +134,164 @@
         <p:nvPr/>
       </p:nvGrpSpPr>
       <p:grpSpPr>
-        <a:xfrm xmlns:a="http://schemas.openxmlformats.org/drawingml/2006/main"/>
+        <a:xfrm>
+          <a:off x="0" y="0"/>
+          <a:ext cx="0" cy="0"/>
+          <a:chOff x="0" y="0"/>
+          <a:chExt cx="0" cy="0"/>
+        </a:xfrm>
       </p:grpSpPr>
       <p:sp>
         <p:nvSpPr>
           <p:cNvPr id="2" name="Header Placeholder"/>
-          <p:cNvSpPr/>
+          <p:cNvSpPr>
+            <a:spLocks noGrp="1"/>
+          </p:cNvSpPr>
           <p:nvPr>
             <p:ph type="hdr" sz="quarter"/>
           </p:nvPr>
         </p:nvSpPr>
         <p:spPr>
-          <a:prstGeom xmlns:a="http://schemas.openxmlformats.org/drawingml/2006/main" prst="rect">
+          <a:prstGeom prst="rect">
             <a:avLst/>
           </a:prstGeom>
         </p:spPr>
         <p:txBody>
-          <a:bodyPr xmlns:a="http://schemas.openxmlformats.org/drawingml/2006/main"/>
-          <a:lstStyle xmlns:a="http://schemas.openxmlformats.org/drawingml/2006/main"/>
-          <a:p xmlns:a="http://schemas.openxmlformats.org/drawingml/2006/main"/>
+          <a:bodyPr/>
+          <a:lstStyle/>
+          <a:p>
+            <a:endParaRPr/>
+          </a:p>
         </p:txBody>
       </p:sp>
       <p:sp>
         <p:nvSpPr>
           <p:cNvPr id="3" name="Date Placeholder"/>
-          <p:cNvSpPr/>
+          <p:cNvSpPr>
+            <a:spLocks noGrp="1"/>
+          </p:cNvSpPr>
           <p:nvPr>
             <p:ph type="dt" sz="quarter" idx="1"/>
           </p:nvPr>
         </p:nvSpPr>
         <p:spPr>
-          <a:prstGeom xmlns:a="http://schemas.openxmlformats.org/drawingml/2006/main" prst="rect">
+          <a:prstGeom prst="rect">
             <a:avLst/>
           </a:prstGeom>
         </p:spPr>
         <p:txBody>
-          <a:bodyPr xmlns:a="http://schemas.openxmlformats.org/drawingml/2006/main"/>
-          <a:lstStyle xmlns:a="http://schemas.openxmlformats.org/drawingml/2006/main"/>
-          <a:p xmlns:a="http://schemas.openxmlformats.org/drawingml/2006/main"/>
+          <a:bodyPr/>
+          <a:lstStyle/>
+          <a:p>
+            <a:endParaRPr/>
+          </a:p>
         </p:txBody>
       </p:sp>
       <p:sp>
         <p:nvSpPr>
           <p:cNvPr id="4" name="Slide Image Placeholder"/>
-          <p:cNvSpPr/>
+          <p:cNvSpPr>
+            <a:spLocks noGrp="1" noRot="1" noChangeAspect="1"/>
+          </p:cNvSpPr>
           <p:nvPr>
             <p:ph type="sldImg" idx="2"/>
           </p:nvPr>
         </p:nvSpPr>
         <p:spPr>
-          <a:prstGeom xmlns:a="http://schemas.openxmlformats.org/drawingml/2006/main" prst="rect">
+          <a:prstGeom prst="rect">
             <a:avLst/>
           </a:prstGeom>
         </p:spPr>
         <p:txBody>
-          <a:bodyPr xmlns:a="http://schemas.openxmlformats.org/drawingml/2006/main"/>
-          <a:lstStyle xmlns:a="http://schemas.openxmlformats.org/drawingml/2006/main"/>
-          <a:p xmlns:a="http://schemas.openxmlformats.org/drawingml/2006/main"/>
+          <a:bodyPr/>
+          <a:lstStyle/>
+          <a:p>
+            <a:endParaRPr/>
+          </a:p>
         </p:txBody>
       </p:sp>
       <p:sp>
         <p:nvSpPr>
           <p:cNvPr id="5" name="Notes Placeholder"/>
-          <p:cNvSpPr/>
+          <p:cNvSpPr>
+            <a:spLocks noGrp="1"/>
+          </p:cNvSpPr>
           <p:nvPr>
             <p:ph type="body" sz="quarter" idx="3"/>
           </p:nvPr>
         </p:nvSpPr>
         <p:spPr>
-          <a:prstGeom xmlns:a="http://schemas.openxmlformats.org/drawingml/2006/main" prst="rect">
+          <a:prstGeom prst="rect">
             <a:avLst/>
           </a:prstGeom>
         </p:spPr>
         <p:txBody>
-          <a:bodyPr xmlns:a="http://schemas.openxmlformats.org/drawingml/2006/main"/>
-          <a:lstStyle xmlns:a="http://schemas.openxmlformats.org/drawingml/2006/main"/>
-          <a:p xmlns:a="http://schemas.openxmlformats.org/drawingml/2006/main"/>
+          <a:bodyPr/>
+          <a:lstStyle/>
+          <a:p>
+            <a:endParaRPr/>
+          </a:p>
         </p:txBody>
       </p:sp>
       <p:sp>
         <p:nvSpPr>
           <p:cNvPr id="6" name="Footer Placeholder"/>
-          <p:cNvSpPr/>
+          <p:cNvSpPr>
+            <a:spLocks noGrp="1"/>
+          </p:cNvSpPr>
           <p:nvPr>
             <p:ph type="ftr" sz="quarter" idx="4"/>
           </p:nvPr>
         </p:nvSpPr>
         <p:spPr>
-          <a:prstGeom xmlns:a="http://schemas.openxmlformats.org/drawingml/2006/main" prst="rect">
+          <a:prstGeom prst="rect">
             <a:avLst/>
           </a:prstGeom>
         </p:spPr>
         <p:txBody>
-          <a:bodyPr xmlns:a="http://schemas.openxmlformats.org/drawingml/2006/main"/>
-          <a:lstStyle xmlns:a="http://schemas.openxmlformats.org/drawingml/2006/main"/>
-          <a:p xmlns:a="http://schemas.openxmlformats.org/drawingml/2006/main"/>
+          <a:bodyPr/>
+          <a:lstStyle/>
+          <a:p>
+            <a:endParaRPr/>
+          </a:p>
         </p:txBody>
       </p:sp>
       <p:sp>
         <p:nvSpPr>
           <p:cNvPr id="7" name="Slide Number Placeholder"/>
-          <p:cNvSpPr/>
+          <p:cNvSpPr>
+            <a:spLocks noGrp="1"/>
+          </p:cNvSpPr>
           <p:nvPr>
             <p:ph type="sldNum" sz="quarter" idx="5"/>
           </p:nvPr>
         </p:nvSpPr>
         <p:spPr>
-          <a:prstGeom xmlns:a="http://schemas.openxmlformats.org/drawingml/2006/main" prst="rect">
+          <a:prstGeom prst="rect">
             <a:avLst/>
           </a:prstGeom>
         </p:spPr>
         <p:txBody>
-          <a:bodyPr xmlns:a="http://schemas.openxmlformats.org/drawingml/2006/main"/>
-          <a:lstStyle xmlns:a="http://schemas.openxmlformats.org/drawingml/2006/main"/>
-          <a:p xmlns:a="http://schemas.openxmlformats.org/drawingml/2006/main"/>
+          <a:bodyPr/>
+          <a:lstStyle/>
+          <a:p>
+            <a:endParaRPr/>
+          </a:p>
         </p:txBody>
       </p:sp>
     </p:spTree>
   </p:cSld>
   <p:clrMap bg1="lt1" tx1="dk1" bg2="lt2" tx2="dk2" accent1="accent1" accent2="accent2" accent3="accent3" accent4="accent4" accent5="accent5" accent6="accent6" hlink="hlink" folHlink="folHlink"/>
   <p:notesStyle>
-    <a:lvl1pPr xmlns:a="http://schemas.openxmlformats.org/drawingml/2006/main" marL="0" algn="l" defTabSz="914400" rtl="0" eaLnBrk="1" latinLnBrk="0" hangingPunct="1">
+    <a:lvl1pPr marL="0" algn="l" defTabSz="914400" rtl="0" eaLnBrk="1" latinLnBrk="0" hangingPunct="1">
       <a:defRPr sz="1200" kern="1200"/>
     </a:lvl1pPr>
   </p:notesStyle>
 </p:notesMaster>
 </file>
 
-<file path=ppt/notesMasters/theme/theme3.xml><?xml version="1.0" encoding="utf-8"?>
-<a:theme xmlns:a="http://schemas.openxmlformats.org/drawingml/2006/main" name="ChatGPT">
-  <a:themeElements>
-    <a:clrScheme name="ChatGPT">
-      <a:dk1>
-        <a:srgbClr val="000000"/>
-      </a:dk1>
-      <a:lt1>
-        <a:srgbClr val="FFFFFF"/>
-      </a:lt1>
-      <a:dk2>
-        <a:srgbClr val="0E2841"/>
-      </a:dk2>
-      <a:lt2>
-        <a:srgbClr val="E8E8E8"/>
-      </a:lt2>
-      <a:accent1>
-        <a:srgbClr val="156082"/>
-      </a:accent1>
-      <a:accent2>
-        <a:srgbClr val="E97132"/>
-      </a:accent2>
-      <a:accent3>
-        <a:srgbClr val="196B24"/>
-      </a:accent3>
-      <a:accent4>
-        <a:srgbClr val="0F9ED5"/>
-      </a:accent4>
-      <a:accent5>
-        <a:srgbClr val="A02B93"/>
-      </a:accent5>
-      <a:accent6>
-        <a:srgbClr val="4EA72E"/>
-      </a:accent6>
-      <a:hlink>
-        <a:srgbClr val="467886"/>
-      </a:hlink>
-      <a:folHlink>
-        <a:srgbClr val="96607D"/>
-      </a:folHlink>
-    </a:clrScheme>
-    <a:fontScheme name="">
-      <a:majorFont>
-        <a:latin typeface="Aptos"/>
-        <a:ea typeface=""/>
-        <a:cs typeface=""/>
-      </a:majorFont>
-      <a:minorFont>
-        <a:latin typeface="Aptos"/>
-        <a:ea typeface=""/>
-        <a:cs typeface=""/>
-      </a:minorFont>
-    </a:fontScheme>
-    <a:fmtScheme name="ChatGPT">
-      <a:fillStyleLst>
-        <a:solidFill>
-          <a:schemeClr val="phClr"/>
-        </a:solidFill>
-        <a:gradFill>
-          <a:gsLst>
-            <a:gs pos="0">
-              <a:schemeClr val="phClr">
-                <a:tint val="67000"/>
-                <a:lumMod val="110000"/>
-                <a:satMod val="105000"/>
-              </a:schemeClr>
-            </a:gs>
-            <a:gs pos="50000">
-              <a:schemeClr val="phClr">
-                <a:tint val="73000"/>
-                <a:lumMod val="105000"/>
-                <a:satMod val="103000"/>
-              </a:schemeClr>
-            </a:gs>
-            <a:gs pos="100000">
-              <a:schemeClr val="phClr">
-                <a:tint val="81000"/>
-                <a:lumMod val="105000"/>
-                <a:satMod val="109000"/>
-              </a:schemeClr>
-            </a:gs>
-          </a:gsLst>
-          <a:lin ang="5400000" scaled="0"/>
-        </a:gradFill>
-        <a:gradFill>
-          <a:gsLst>
-            <a:gs pos="0">
-              <a:schemeClr val="phClr">
-                <a:tint val="94000"/>
-                <a:lumMod val="102000"/>
-                <a:satMod val="103000"/>
-              </a:schemeClr>
-            </a:gs>
-            <a:gs pos="50000">
-              <a:schemeClr val="phClr">
-                <a:shade val="100000"/>
-                <a:lumMod val="100000"/>
-                <a:satMod val="110000"/>
-              </a:schemeClr>
-            </a:gs>
-            <a:gs pos="100000">
-              <a:schemeClr val="phClr">
-                <a:shade val="78000"/>
-                <a:lumMod val="99000"/>
-                <a:satMod val="120000"/>
-              </a:schemeClr>
-            </a:gs>
-          </a:gsLst>
-          <a:lin ang="5400000" scaled="0"/>
-        </a:gradFill>
-      </a:fillStyleLst>
-      <a:lnStyleLst>
-        <a:ln w="12700">
-          <a:solidFill>
-            <a:schemeClr val="phClr"/>
-          </a:solidFill>
-          <a:prstDash val="solid"/>
-        </a:ln>
-        <a:ln w="19050">
-          <a:solidFill>
-            <a:schemeClr val="phClr"/>
-          </a:solidFill>
-          <a:prstDash val="solid"/>
-        </a:ln>
-        <a:ln w="25400">
-          <a:solidFill>
-            <a:schemeClr val="phClr"/>
-          </a:solidFill>
-          <a:prstDash val="solid"/>
-        </a:ln>
-      </a:lnStyleLst>
-      <a:effectStyleLst>
-        <a:effectStyle>
-          <a:effectLst/>
-        </a:effectStyle>
-        <a:effectStyle>
-          <a:effectLst/>
-        </a:effectStyle>
-        <a:effectStyle>
-          <a:effectLst>
-            <a:outerShdw blurRad="57150" dist="19050" dir="5400000">
-              <a:srgbClr val="000000">
-                <a:alpha val="16000"/>
-              </a:srgbClr>
-            </a:outerShdw>
-          </a:effectLst>
-        </a:effectStyle>
-        <a:effectStyle>
-          <a:effectLst>
-            <a:outerShdw blurRad="19050" dist="9525" dir="5400000">
-              <a:srgbClr val="000000">
-                <a:alpha val="6000"/>
-              </a:srgbClr>
-            </a:outerShdw>
-          </a:effectLst>
-        </a:effectStyle>
-        <a:effectStyle>
-          <a:effectLst>
-            <a:outerShdw blurRad="28575" dist="9525" dir="5400000">
-              <a:srgbClr val="000000">
-                <a:alpha val="8000"/>
-              </a:srgbClr>
-            </a:outerShdw>
-          </a:effectLst>
-        </a:effectStyle>
-        <a:effectStyle>
-          <a:effectLst>
-            <a:outerShdw blurRad="57150" dist="19050" dir="5400000">
-              <a:srgbClr val="000000">
-                <a:alpha val="10000"/>
-              </a:srgbClr>
-            </a:outerShdw>
-          </a:effectLst>
-        </a:effectStyle>
-        <a:effectStyle>
-          <a:effectLst>
-            <a:outerShdw blurRad="114300" dist="38100" dir="5400000">
-              <a:srgbClr val="000000">
-                <a:alpha val="12000"/>
-              </a:srgbClr>
-            </a:outerShdw>
-          </a:effectLst>
-        </a:effectStyle>
-        <a:effectStyle>
-          <a:effectLst>
-            <a:outerShdw blurRad="171450" dist="57150" dir="5400000">
-              <a:srgbClr val="000000">
-                <a:alpha val="16000"/>
-              </a:srgbClr>
-            </a:outerShdw>
-          </a:effectLst>
-        </a:effectStyle>
-        <a:effectStyle>
-          <a:effectLst>
-            <a:outerShdw blurRad="266700" dist="95250" dir="5400000">
-              <a:srgbClr val="000000">
-                <a:alpha val="24000"/>
-              </a:srgbClr>
-            </a:outerShdw>
-          </a:effectLst>
-        </a:effectStyle>
-      </a:effectStyleLst>
-      <a:bgFillStyleLst>
-        <a:solidFill>
-          <a:schemeClr val="phClr"/>
-        </a:solidFill>
-        <a:solidFill>
-          <a:schemeClr val="phClr">
-            <a:tint val="95000"/>
-            <a:satMod val="170000"/>
-          </a:schemeClr>
-        </a:solidFill>
-        <a:gradFill>
-          <a:gsLst>
-            <a:gs pos="0">
-              <a:schemeClr val="phClr">
-                <a:tint val="93000"/>
-                <a:shade val="98000"/>
-                <a:lumMod val="102000"/>
-                <a:satMod val="150000"/>
-              </a:schemeClr>
-            </a:gs>
-            <a:gs pos="50000">
-              <a:schemeClr val="phClr">
-                <a:tint val="98000"/>
-                <a:shade val="90000"/>
-                <a:lumMod val="103000"/>
-                <a:satMod val="130000"/>
-              </a:schemeClr>
-            </a:gs>
-            <a:gs pos="100000">
-              <a:schemeClr val="phClr">
-                <a:shade val="63000"/>
-                <a:satMod val="120000"/>
-              </a:schemeClr>
-            </a:gs>
-          </a:gsLst>
-          <a:lin ang="5400000" scaled="0"/>
-        </a:gradFill>
-      </a:bgFillStyleLst>
-    </a:fmtScheme>
-  </a:themeElements>
-</a:theme>
-</file>
-
 <file path=ppt/notesSlides/notesSlide1.xml><?xml version="1.0" encoding="utf-8"?>
-<p:notes xmlns:p="http://schemas.openxmlformats.org/presentationml/2006/main">
+<p:notes xmlns:a="http://schemas.openxmlformats.org/drawingml/2006/main" xmlns:r="http://schemas.openxmlformats.org/officeDocument/2006/relationships" xmlns:p="http://schemas.openxmlformats.org/presentationml/2006/main">
   <p:cSld>
     <p:spTree>
       <p:nvGrpSpPr>
@@ -421,16 +300,21 @@
         <p:nvPr/>
       </p:nvGrpSpPr>
       <p:grpSpPr>
-        <a:xfrm xmlns:a="http://schemas.openxmlformats.org/drawingml/2006/main"/>
+        <a:xfrm>
+          <a:off x="0" y="0"/>
+          <a:ext cx="0" cy="0"/>
+          <a:chOff x="0" y="0"/>
+          <a:chExt cx="0" cy="0"/>
+        </a:xfrm>
       </p:grpSpPr>
       <p:sp>
         <p:nvSpPr>
           <p:cNvPr id="2" name="Slide Image Placeholder 1"/>
           <p:cNvSpPr>
-            <a:spLocks xmlns:a="http://schemas.openxmlformats.org/drawingml/2006/main" noGrp="1"/>
+            <a:spLocks noGrp="1" noRot="1" noChangeAspect="1"/>
           </p:cNvSpPr>
           <p:nvPr>
-            <p:ph type="sldImg" idx="0"/>
+            <p:ph type="sldImg"/>
           </p:nvPr>
         </p:nvSpPr>
         <p:spPr/>
@@ -439,7 +323,7 @@
         <p:nvSpPr>
           <p:cNvPr id="3" name="Notes Placeholder 2"/>
           <p:cNvSpPr>
-            <a:spLocks xmlns:a="http://schemas.openxmlformats.org/drawingml/2006/main" noGrp="1"/>
+            <a:spLocks noGrp="1"/>
           </p:cNvSpPr>
           <p:nvPr>
             <p:ph type="body" idx="1"/>
@@ -447,12 +331,10 @@
         </p:nvSpPr>
         <p:spPr/>
         <p:txBody>
-          <a:bodyPr xmlns:a="http://schemas.openxmlformats.org/drawingml/2006/main"/>
-          <a:lstStyle xmlns:a="http://schemas.openxmlformats.org/drawingml/2006/main"/>
-          <a:p xmlns:a="http://schemas.openxmlformats.org/drawingml/2006/main">
-            <a:r>
-              <a:t>About 10 seconds. Title, then one sentence: this review covers how the platform works and what distinguishes it. Move on quickly.</a:t>
-            </a:r>
+          <a:bodyPr/>
+          <a:lstStyle/>
+          <a:p>
+            <a:endParaRPr dirty="0"/>
           </a:p>
         </p:txBody>
       </p:sp>
@@ -460,7 +342,7 @@
         <p:nvSpPr>
           <p:cNvPr id="4" name="Slide Number Placeholder 3"/>
           <p:cNvSpPr>
-            <a:spLocks xmlns:a="http://schemas.openxmlformats.org/drawingml/2006/main" noGrp="1"/>
+            <a:spLocks noGrp="1"/>
           </p:cNvSpPr>
           <p:nvPr>
             <p:ph type="sldNum" idx="5"/>
@@ -468,21 +350,23 @@
         </p:nvSpPr>
         <p:spPr/>
         <p:txBody>
-          <a:bodyPr xmlns:a="http://schemas.openxmlformats.org/drawingml/2006/main"/>
-          <a:lstStyle xmlns:a="http://schemas.openxmlformats.org/drawingml/2006/main"/>
-          <a:p xmlns:a="http://schemas.openxmlformats.org/drawingml/2006/main"/>
+          <a:bodyPr/>
+          <a:lstStyle/>
+          <a:p>
+            <a:endParaRPr/>
+          </a:p>
         </p:txBody>
       </p:sp>
     </p:spTree>
   </p:cSld>
   <p:clrMapOvr>
-    <a:masterClrMapping xmlns:a="http://schemas.openxmlformats.org/drawingml/2006/main"/>
+    <a:masterClrMapping/>
   </p:clrMapOvr>
 </p:notes>
 </file>
 
 <file path=ppt/notesSlides/notesSlide10.xml><?xml version="1.0" encoding="utf-8"?>
-<p:notes xmlns:p="http://schemas.openxmlformats.org/presentationml/2006/main">
+<p:notes xmlns:a="http://schemas.openxmlformats.org/drawingml/2006/main" xmlns:r="http://schemas.openxmlformats.org/officeDocument/2006/relationships" xmlns:p="http://schemas.openxmlformats.org/presentationml/2006/main">
   <p:cSld>
     <p:spTree>
       <p:nvGrpSpPr>
@@ -491,16 +375,21 @@
         <p:nvPr/>
       </p:nvGrpSpPr>
       <p:grpSpPr>
-        <a:xfrm xmlns:a="http://schemas.openxmlformats.org/drawingml/2006/main"/>
+        <a:xfrm>
+          <a:off x="0" y="0"/>
+          <a:ext cx="0" cy="0"/>
+          <a:chOff x="0" y="0"/>
+          <a:chExt cx="0" cy="0"/>
+        </a:xfrm>
       </p:grpSpPr>
       <p:sp>
         <p:nvSpPr>
           <p:cNvPr id="2" name="Slide Image Placeholder 1"/>
           <p:cNvSpPr>
-            <a:spLocks xmlns:a="http://schemas.openxmlformats.org/drawingml/2006/main" noGrp="1"/>
+            <a:spLocks noGrp="1" noRot="1" noChangeAspect="1"/>
           </p:cNvSpPr>
           <p:nvPr>
-            <p:ph type="sldImg" idx="0"/>
+            <p:ph type="sldImg"/>
           </p:nvPr>
         </p:nvSpPr>
         <p:spPr/>
@@ -509,7 +398,7 @@
         <p:nvSpPr>
           <p:cNvPr id="3" name="Notes Placeholder 2"/>
           <p:cNvSpPr>
-            <a:spLocks xmlns:a="http://schemas.openxmlformats.org/drawingml/2006/main" noGrp="1"/>
+            <a:spLocks noGrp="1"/>
           </p:cNvSpPr>
           <p:nvPr>
             <p:ph type="body" idx="1"/>
@@ -517,12 +406,10 @@
         </p:nvSpPr>
         <p:spPr/>
         <p:txBody>
-          <a:bodyPr xmlns:a="http://schemas.openxmlformats.org/drawingml/2006/main"/>
-          <a:lstStyle xmlns:a="http://schemas.openxmlformats.org/drawingml/2006/main"/>
-          <a:p xmlns:a="http://schemas.openxmlformats.org/drawingml/2006/main">
-            <a:r>
-              <a:t>About 20 seconds, then switch to the live demonstration. Open localhost:5173, sign in as administrator, open the Allocation Engine and use the urgent donation at the top of the queue. Preview decision reproduces the table on slide 6, then Run and allocate. Sign in as the recipient to accept, as the volunteer to collect, deliver and mark it delivered, then as the recipient again to confirm receipt. Finish on Reports and Analytics for the figures on slide 9.</a:t>
-            </a:r>
+          <a:bodyPr/>
+          <a:lstStyle/>
+          <a:p>
+            <a:endParaRPr dirty="0"/>
           </a:p>
         </p:txBody>
       </p:sp>
@@ -530,7 +417,7 @@
         <p:nvSpPr>
           <p:cNvPr id="4" name="Slide Number Placeholder 3"/>
           <p:cNvSpPr>
-            <a:spLocks xmlns:a="http://schemas.openxmlformats.org/drawingml/2006/main" noGrp="1"/>
+            <a:spLocks noGrp="1"/>
           </p:cNvSpPr>
           <p:nvPr>
             <p:ph type="sldNum" idx="5"/>
@@ -538,21 +425,23 @@
         </p:nvSpPr>
         <p:spPr/>
         <p:txBody>
-          <a:bodyPr xmlns:a="http://schemas.openxmlformats.org/drawingml/2006/main"/>
-          <a:lstStyle xmlns:a="http://schemas.openxmlformats.org/drawingml/2006/main"/>
-          <a:p xmlns:a="http://schemas.openxmlformats.org/drawingml/2006/main"/>
+          <a:bodyPr/>
+          <a:lstStyle/>
+          <a:p>
+            <a:endParaRPr/>
+          </a:p>
         </p:txBody>
       </p:sp>
     </p:spTree>
   </p:cSld>
   <p:clrMapOvr>
-    <a:masterClrMapping xmlns:a="http://schemas.openxmlformats.org/drawingml/2006/main"/>
+    <a:masterClrMapping/>
   </p:clrMapOvr>
 </p:notes>
 </file>
 
 <file path=ppt/notesSlides/notesSlide2.xml><?xml version="1.0" encoding="utf-8"?>
-<p:notes xmlns:p="http://schemas.openxmlformats.org/presentationml/2006/main">
+<p:notes xmlns:a="http://schemas.openxmlformats.org/drawingml/2006/main" xmlns:r="http://schemas.openxmlformats.org/officeDocument/2006/relationships" xmlns:p="http://schemas.openxmlformats.org/presentationml/2006/main">
   <p:cSld>
     <p:spTree>
       <p:nvGrpSpPr>
@@ -561,16 +450,21 @@
         <p:nvPr/>
       </p:nvGrpSpPr>
       <p:grpSpPr>
-        <a:xfrm xmlns:a="http://schemas.openxmlformats.org/drawingml/2006/main"/>
+        <a:xfrm>
+          <a:off x="0" y="0"/>
+          <a:ext cx="0" cy="0"/>
+          <a:chOff x="0" y="0"/>
+          <a:chExt cx="0" cy="0"/>
+        </a:xfrm>
       </p:grpSpPr>
       <p:sp>
         <p:nvSpPr>
           <p:cNvPr id="2" name="Slide Image Placeholder 1"/>
           <p:cNvSpPr>
-            <a:spLocks xmlns:a="http://schemas.openxmlformats.org/drawingml/2006/main" noGrp="1"/>
+            <a:spLocks noGrp="1" noRot="1" noChangeAspect="1"/>
           </p:cNvSpPr>
           <p:nvPr>
-            <p:ph type="sldImg" idx="0"/>
+            <p:ph type="sldImg"/>
           </p:nvPr>
         </p:nvSpPr>
         <p:spPr/>
@@ -579,7 +473,7 @@
         <p:nvSpPr>
           <p:cNvPr id="3" name="Notes Placeholder 2"/>
           <p:cNvSpPr>
-            <a:spLocks xmlns:a="http://schemas.openxmlformats.org/drawingml/2006/main" noGrp="1"/>
+            <a:spLocks noGrp="1"/>
           </p:cNvSpPr>
           <p:nvPr>
             <p:ph type="body" idx="1"/>
@@ -587,12 +481,10 @@
         </p:nvSpPr>
         <p:spPr/>
         <p:txBody>
-          <a:bodyPr xmlns:a="http://schemas.openxmlformats.org/drawingml/2006/main"/>
-          <a:lstStyle xmlns:a="http://schemas.openxmlformats.org/drawingml/2006/main"/>
-          <a:p xmlns:a="http://schemas.openxmlformats.org/drawingml/2006/main">
-            <a:r>
-              <a:t>About 30 seconds. The last two points are the gap this project fills: safety and justification. Do not elaborate here, slide 3 covers it. Note to self: this comparison is my own assessment from the requirement study, not a published benchmark.</a:t>
-            </a:r>
+          <a:bodyPr/>
+          <a:lstStyle/>
+          <a:p>
+            <a:endParaRPr dirty="0"/>
           </a:p>
         </p:txBody>
       </p:sp>
@@ -600,7 +492,7 @@
         <p:nvSpPr>
           <p:cNvPr id="4" name="Slide Number Placeholder 3"/>
           <p:cNvSpPr>
-            <a:spLocks xmlns:a="http://schemas.openxmlformats.org/drawingml/2006/main" noGrp="1"/>
+            <a:spLocks noGrp="1"/>
           </p:cNvSpPr>
           <p:nvPr>
             <p:ph type="sldNum" idx="5"/>
@@ -608,21 +500,23 @@
         </p:nvSpPr>
         <p:spPr/>
         <p:txBody>
-          <a:bodyPr xmlns:a="http://schemas.openxmlformats.org/drawingml/2006/main"/>
-          <a:lstStyle xmlns:a="http://schemas.openxmlformats.org/drawingml/2006/main"/>
-          <a:p xmlns:a="http://schemas.openxmlformats.org/drawingml/2006/main"/>
+          <a:bodyPr/>
+          <a:lstStyle/>
+          <a:p>
+            <a:endParaRPr/>
+          </a:p>
         </p:txBody>
       </p:sp>
     </p:spTree>
   </p:cSld>
   <p:clrMapOvr>
-    <a:masterClrMapping xmlns:a="http://schemas.openxmlformats.org/drawingml/2006/main"/>
+    <a:masterClrMapping/>
   </p:clrMapOvr>
 </p:notes>
 </file>
 
 <file path=ppt/notesSlides/notesSlide3.xml><?xml version="1.0" encoding="utf-8"?>
-<p:notes xmlns:p="http://schemas.openxmlformats.org/presentationml/2006/main">
+<p:notes xmlns:a="http://schemas.openxmlformats.org/drawingml/2006/main" xmlns:r="http://schemas.openxmlformats.org/officeDocument/2006/relationships" xmlns:p="http://schemas.openxmlformats.org/presentationml/2006/main">
   <p:cSld>
     <p:spTree>
       <p:nvGrpSpPr>
@@ -631,16 +525,21 @@
         <p:nvPr/>
       </p:nvGrpSpPr>
       <p:grpSpPr>
-        <a:xfrm xmlns:a="http://schemas.openxmlformats.org/drawingml/2006/main"/>
+        <a:xfrm>
+          <a:off x="0" y="0"/>
+          <a:ext cx="0" cy="0"/>
+          <a:chOff x="0" y="0"/>
+          <a:chExt cx="0" cy="0"/>
+        </a:xfrm>
       </p:grpSpPr>
       <p:sp>
         <p:nvSpPr>
           <p:cNvPr id="2" name="Slide Image Placeholder 1"/>
           <p:cNvSpPr>
-            <a:spLocks xmlns:a="http://schemas.openxmlformats.org/drawingml/2006/main" noGrp="1"/>
+            <a:spLocks noGrp="1" noRot="1" noChangeAspect="1"/>
           </p:cNvSpPr>
           <p:nvPr>
-            <p:ph type="sldImg" idx="0"/>
+            <p:ph type="sldImg"/>
           </p:nvPr>
         </p:nvSpPr>
         <p:spPr/>
@@ -649,7 +548,7 @@
         <p:nvSpPr>
           <p:cNvPr id="3" name="Notes Placeholder 2"/>
           <p:cNvSpPr>
-            <a:spLocks xmlns:a="http://schemas.openxmlformats.org/drawingml/2006/main" noGrp="1"/>
+            <a:spLocks noGrp="1"/>
           </p:cNvSpPr>
           <p:nvPr>
             <p:ph type="body" idx="1"/>
@@ -657,12 +556,10 @@
         </p:nvSpPr>
         <p:spPr/>
         <p:txBody>
-          <a:bodyPr xmlns:a="http://schemas.openxmlformats.org/drawingml/2006/main"/>
-          <a:lstStyle xmlns:a="http://schemas.openxmlformats.org/drawingml/2006/main"/>
-          <a:p xmlns:a="http://schemas.openxmlformats.org/drawingml/2006/main">
-            <a:r>
-              <a:t>About 40 seconds, and the main emphasis of the review. Read two rows only and state that the remaining four are in the table. Note to self: the comparison is my assessment from the requirement study, not a published benchmark.</a:t>
-            </a:r>
+          <a:bodyPr/>
+          <a:lstStyle/>
+          <a:p>
+            <a:endParaRPr dirty="0"/>
           </a:p>
         </p:txBody>
       </p:sp>
@@ -670,7 +567,7 @@
         <p:nvSpPr>
           <p:cNvPr id="4" name="Slide Number Placeholder 3"/>
           <p:cNvSpPr>
-            <a:spLocks xmlns:a="http://schemas.openxmlformats.org/drawingml/2006/main" noGrp="1"/>
+            <a:spLocks noGrp="1"/>
           </p:cNvSpPr>
           <p:nvPr>
             <p:ph type="sldNum" idx="5"/>
@@ -678,21 +575,23 @@
         </p:nvSpPr>
         <p:spPr/>
         <p:txBody>
-          <a:bodyPr xmlns:a="http://schemas.openxmlformats.org/drawingml/2006/main"/>
-          <a:lstStyle xmlns:a="http://schemas.openxmlformats.org/drawingml/2006/main"/>
-          <a:p xmlns:a="http://schemas.openxmlformats.org/drawingml/2006/main"/>
+          <a:bodyPr/>
+          <a:lstStyle/>
+          <a:p>
+            <a:endParaRPr/>
+          </a:p>
         </p:txBody>
       </p:sp>
     </p:spTree>
   </p:cSld>
   <p:clrMapOvr>
-    <a:masterClrMapping xmlns:a="http://schemas.openxmlformats.org/drawingml/2006/main"/>
+    <a:masterClrMapping/>
   </p:clrMapOvr>
 </p:notes>
 </file>
 
 <file path=ppt/notesSlides/notesSlide4.xml><?xml version="1.0" encoding="utf-8"?>
-<p:notes xmlns:p="http://schemas.openxmlformats.org/presentationml/2006/main">
+<p:notes xmlns:a="http://schemas.openxmlformats.org/drawingml/2006/main" xmlns:r="http://schemas.openxmlformats.org/officeDocument/2006/relationships" xmlns:p="http://schemas.openxmlformats.org/presentationml/2006/main">
   <p:cSld>
     <p:spTree>
       <p:nvGrpSpPr>
@@ -701,16 +600,21 @@
         <p:nvPr/>
       </p:nvGrpSpPr>
       <p:grpSpPr>
-        <a:xfrm xmlns:a="http://schemas.openxmlformats.org/drawingml/2006/main"/>
+        <a:xfrm>
+          <a:off x="0" y="0"/>
+          <a:ext cx="0" cy="0"/>
+          <a:chOff x="0" y="0"/>
+          <a:chExt cx="0" cy="0"/>
+        </a:xfrm>
       </p:grpSpPr>
       <p:sp>
         <p:nvSpPr>
           <p:cNvPr id="2" name="Slide Image Placeholder 1"/>
           <p:cNvSpPr>
-            <a:spLocks xmlns:a="http://schemas.openxmlformats.org/drawingml/2006/main" noGrp="1"/>
+            <a:spLocks noGrp="1" noRot="1" noChangeAspect="1"/>
           </p:cNvSpPr>
           <p:nvPr>
-            <p:ph type="sldImg" idx="0"/>
+            <p:ph type="sldImg"/>
           </p:nvPr>
         </p:nvSpPr>
         <p:spPr/>
@@ -719,7 +623,7 @@
         <p:nvSpPr>
           <p:cNvPr id="3" name="Notes Placeholder 2"/>
           <p:cNvSpPr>
-            <a:spLocks xmlns:a="http://schemas.openxmlformats.org/drawingml/2006/main" noGrp="1"/>
+            <a:spLocks noGrp="1"/>
           </p:cNvSpPr>
           <p:nvPr>
             <p:ph type="body" idx="1"/>
@@ -727,12 +631,10 @@
         </p:nvSpPr>
         <p:spPr/>
         <p:txBody>
-          <a:bodyPr xmlns:a="http://schemas.openxmlformats.org/drawingml/2006/main"/>
-          <a:lstStyle xmlns:a="http://schemas.openxmlformats.org/drawingml/2006/main"/>
-          <a:p xmlns:a="http://schemas.openxmlformats.org/drawingml/2006/main">
-            <a:r>
-              <a:t>About 25 seconds. Name the four actors and the sequence; the demonstration follows the same path on screen.</a:t>
-            </a:r>
+          <a:bodyPr/>
+          <a:lstStyle/>
+          <a:p>
+            <a:endParaRPr dirty="0"/>
           </a:p>
         </p:txBody>
       </p:sp>
@@ -740,7 +642,7 @@
         <p:nvSpPr>
           <p:cNvPr id="4" name="Slide Number Placeholder 3"/>
           <p:cNvSpPr>
-            <a:spLocks xmlns:a="http://schemas.openxmlformats.org/drawingml/2006/main" noGrp="1"/>
+            <a:spLocks noGrp="1"/>
           </p:cNvSpPr>
           <p:nvPr>
             <p:ph type="sldNum" idx="5"/>
@@ -748,21 +650,23 @@
         </p:nvSpPr>
         <p:spPr/>
         <p:txBody>
-          <a:bodyPr xmlns:a="http://schemas.openxmlformats.org/drawingml/2006/main"/>
-          <a:lstStyle xmlns:a="http://schemas.openxmlformats.org/drawingml/2006/main"/>
-          <a:p xmlns:a="http://schemas.openxmlformats.org/drawingml/2006/main"/>
+          <a:bodyPr/>
+          <a:lstStyle/>
+          <a:p>
+            <a:endParaRPr/>
+          </a:p>
         </p:txBody>
       </p:sp>
     </p:spTree>
   </p:cSld>
   <p:clrMapOvr>
-    <a:masterClrMapping xmlns:a="http://schemas.openxmlformats.org/drawingml/2006/main"/>
+    <a:masterClrMapping/>
   </p:clrMapOvr>
 </p:notes>
 </file>
 
 <file path=ppt/notesSlides/notesSlide5.xml><?xml version="1.0" encoding="utf-8"?>
-<p:notes xmlns:p="http://schemas.openxmlformats.org/presentationml/2006/main">
+<p:notes xmlns:a="http://schemas.openxmlformats.org/drawingml/2006/main" xmlns:r="http://schemas.openxmlformats.org/officeDocument/2006/relationships" xmlns:p="http://schemas.openxmlformats.org/presentationml/2006/main">
   <p:cSld>
     <p:spTree>
       <p:nvGrpSpPr>
@@ -771,16 +675,21 @@
         <p:nvPr/>
       </p:nvGrpSpPr>
       <p:grpSpPr>
-        <a:xfrm xmlns:a="http://schemas.openxmlformats.org/drawingml/2006/main"/>
+        <a:xfrm>
+          <a:off x="0" y="0"/>
+          <a:ext cx="0" cy="0"/>
+          <a:chOff x="0" y="0"/>
+          <a:chExt cx="0" cy="0"/>
+        </a:xfrm>
       </p:grpSpPr>
       <p:sp>
         <p:nvSpPr>
           <p:cNvPr id="2" name="Slide Image Placeholder 1"/>
           <p:cNvSpPr>
-            <a:spLocks xmlns:a="http://schemas.openxmlformats.org/drawingml/2006/main" noGrp="1"/>
+            <a:spLocks noGrp="1" noRot="1" noChangeAspect="1"/>
           </p:cNvSpPr>
           <p:nvPr>
-            <p:ph type="sldImg" idx="0"/>
+            <p:ph type="sldImg"/>
           </p:nvPr>
         </p:nvSpPr>
         <p:spPr/>
@@ -789,7 +698,7 @@
         <p:nvSpPr>
           <p:cNvPr id="3" name="Notes Placeholder 2"/>
           <p:cNvSpPr>
-            <a:spLocks xmlns:a="http://schemas.openxmlformats.org/drawingml/2006/main" noGrp="1"/>
+            <a:spLocks noGrp="1"/>
           </p:cNvSpPr>
           <p:nvPr>
             <p:ph type="body" idx="1"/>
@@ -797,12 +706,10 @@
         </p:nvSpPr>
         <p:spPr/>
         <p:txBody>
-          <a:bodyPr xmlns:a="http://schemas.openxmlformats.org/drawingml/2006/main"/>
-          <a:lstStyle xmlns:a="http://schemas.openxmlformats.org/drawingml/2006/main"/>
-          <a:p xmlns:a="http://schemas.openxmlformats.org/drawingml/2006/main">
-            <a:r>
-              <a:t>About 40 seconds. The four constraints first, then the six factors. Do not read every row aloud.</a:t>
-            </a:r>
+          <a:bodyPr/>
+          <a:lstStyle/>
+          <a:p>
+            <a:endParaRPr dirty="0"/>
           </a:p>
         </p:txBody>
       </p:sp>
@@ -810,7 +717,7 @@
         <p:nvSpPr>
           <p:cNvPr id="4" name="Slide Number Placeholder 3"/>
           <p:cNvSpPr>
-            <a:spLocks xmlns:a="http://schemas.openxmlformats.org/drawingml/2006/main" noGrp="1"/>
+            <a:spLocks noGrp="1"/>
           </p:cNvSpPr>
           <p:nvPr>
             <p:ph type="sldNum" idx="5"/>
@@ -818,21 +725,23 @@
         </p:nvSpPr>
         <p:spPr/>
         <p:txBody>
-          <a:bodyPr xmlns:a="http://schemas.openxmlformats.org/drawingml/2006/main"/>
-          <a:lstStyle xmlns:a="http://schemas.openxmlformats.org/drawingml/2006/main"/>
-          <a:p xmlns:a="http://schemas.openxmlformats.org/drawingml/2006/main"/>
+          <a:bodyPr/>
+          <a:lstStyle/>
+          <a:p>
+            <a:endParaRPr/>
+          </a:p>
         </p:txBody>
       </p:sp>
     </p:spTree>
   </p:cSld>
   <p:clrMapOvr>
-    <a:masterClrMapping xmlns:a="http://schemas.openxmlformats.org/drawingml/2006/main"/>
+    <a:masterClrMapping/>
   </p:clrMapOvr>
 </p:notes>
 </file>
 
 <file path=ppt/notesSlides/notesSlide6.xml><?xml version="1.0" encoding="utf-8"?>
-<p:notes xmlns:p="http://schemas.openxmlformats.org/presentationml/2006/main">
+<p:notes xmlns:a="http://schemas.openxmlformats.org/drawingml/2006/main" xmlns:r="http://schemas.openxmlformats.org/officeDocument/2006/relationships" xmlns:p="http://schemas.openxmlformats.org/presentationml/2006/main">
   <p:cSld>
     <p:spTree>
       <p:nvGrpSpPr>
@@ -841,16 +750,21 @@
         <p:nvPr/>
       </p:nvGrpSpPr>
       <p:grpSpPr>
-        <a:xfrm xmlns:a="http://schemas.openxmlformats.org/drawingml/2006/main"/>
+        <a:xfrm>
+          <a:off x="0" y="0"/>
+          <a:ext cx="0" cy="0"/>
+          <a:chOff x="0" y="0"/>
+          <a:chExt cx="0" cy="0"/>
+        </a:xfrm>
       </p:grpSpPr>
       <p:sp>
         <p:nvSpPr>
           <p:cNvPr id="2" name="Slide Image Placeholder 1"/>
           <p:cNvSpPr>
-            <a:spLocks xmlns:a="http://schemas.openxmlformats.org/drawingml/2006/main" noGrp="1"/>
+            <a:spLocks noGrp="1" noRot="1" noChangeAspect="1"/>
           </p:cNvSpPr>
           <p:nvPr>
-            <p:ph type="sldImg" idx="0"/>
+            <p:ph type="sldImg"/>
           </p:nvPr>
         </p:nvSpPr>
         <p:spPr/>
@@ -859,7 +773,7 @@
         <p:nvSpPr>
           <p:cNvPr id="3" name="Notes Placeholder 2"/>
           <p:cNvSpPr>
-            <a:spLocks xmlns:a="http://schemas.openxmlformats.org/drawingml/2006/main" noGrp="1"/>
+            <a:spLocks noGrp="1"/>
           </p:cNvSpPr>
           <p:nvPr>
             <p:ph type="body" idx="1"/>
@@ -867,12 +781,10 @@
         </p:nvSpPr>
         <p:spPr/>
         <p:txBody>
-          <a:bodyPr xmlns:a="http://schemas.openxmlformats.org/drawingml/2006/main"/>
-          <a:lstStyle xmlns:a="http://schemas.openxmlformats.org/drawingml/2006/main"/>
-          <a:p xmlns:a="http://schemas.openxmlformats.org/drawingml/2006/main">
-            <a:r>
-              <a:t>About 50 seconds, the key slide. State the rule, explain why it is a hard constraint rather than a score, give the three assumptions, then the recorded result. Note to self: these figures were recorded on 16 October 2026 from the seeded dataset.</a:t>
-            </a:r>
+          <a:bodyPr/>
+          <a:lstStyle/>
+          <a:p>
+            <a:endParaRPr dirty="0"/>
           </a:p>
         </p:txBody>
       </p:sp>
@@ -880,7 +792,7 @@
         <p:nvSpPr>
           <p:cNvPr id="4" name="Slide Number Placeholder 3"/>
           <p:cNvSpPr>
-            <a:spLocks xmlns:a="http://schemas.openxmlformats.org/drawingml/2006/main" noGrp="1"/>
+            <a:spLocks noGrp="1"/>
           </p:cNvSpPr>
           <p:nvPr>
             <p:ph type="sldNum" idx="5"/>
@@ -888,21 +800,23 @@
         </p:nvSpPr>
         <p:spPr/>
         <p:txBody>
-          <a:bodyPr xmlns:a="http://schemas.openxmlformats.org/drawingml/2006/main"/>
-          <a:lstStyle xmlns:a="http://schemas.openxmlformats.org/drawingml/2006/main"/>
-          <a:p xmlns:a="http://schemas.openxmlformats.org/drawingml/2006/main"/>
+          <a:bodyPr/>
+          <a:lstStyle/>
+          <a:p>
+            <a:endParaRPr/>
+          </a:p>
         </p:txBody>
       </p:sp>
     </p:spTree>
   </p:cSld>
   <p:clrMapOvr>
-    <a:masterClrMapping xmlns:a="http://schemas.openxmlformats.org/drawingml/2006/main"/>
+    <a:masterClrMapping/>
   </p:clrMapOvr>
 </p:notes>
 </file>
 
 <file path=ppt/notesSlides/notesSlide7.xml><?xml version="1.0" encoding="utf-8"?>
-<p:notes xmlns:p="http://schemas.openxmlformats.org/presentationml/2006/main">
+<p:notes xmlns:a="http://schemas.openxmlformats.org/drawingml/2006/main" xmlns:r="http://schemas.openxmlformats.org/officeDocument/2006/relationships" xmlns:p="http://schemas.openxmlformats.org/presentationml/2006/main">
   <p:cSld>
     <p:spTree>
       <p:nvGrpSpPr>
@@ -911,16 +825,21 @@
         <p:nvPr/>
       </p:nvGrpSpPr>
       <p:grpSpPr>
-        <a:xfrm xmlns:a="http://schemas.openxmlformats.org/drawingml/2006/main"/>
+        <a:xfrm>
+          <a:off x="0" y="0"/>
+          <a:ext cx="0" cy="0"/>
+          <a:chOff x="0" y="0"/>
+          <a:chExt cx="0" cy="0"/>
+        </a:xfrm>
       </p:grpSpPr>
       <p:sp>
         <p:nvSpPr>
           <p:cNvPr id="2" name="Slide Image Placeholder 1"/>
           <p:cNvSpPr>
-            <a:spLocks xmlns:a="http://schemas.openxmlformats.org/drawingml/2006/main" noGrp="1"/>
+            <a:spLocks noGrp="1" noRot="1" noChangeAspect="1"/>
           </p:cNvSpPr>
           <p:nvPr>
-            <p:ph type="sldImg" idx="0"/>
+            <p:ph type="sldImg"/>
           </p:nvPr>
         </p:nvSpPr>
         <p:spPr/>
@@ -929,7 +848,7 @@
         <p:nvSpPr>
           <p:cNvPr id="3" name="Notes Placeholder 2"/>
           <p:cNvSpPr>
-            <a:spLocks xmlns:a="http://schemas.openxmlformats.org/drawingml/2006/main" noGrp="1"/>
+            <a:spLocks noGrp="1"/>
           </p:cNvSpPr>
           <p:nvPr>
             <p:ph type="body" idx="1"/>
@@ -937,12 +856,10 @@
         </p:nvSpPr>
         <p:spPr/>
         <p:txBody>
-          <a:bodyPr xmlns:a="http://schemas.openxmlformats.org/drawingml/2006/main"/>
-          <a:lstStyle xmlns:a="http://schemas.openxmlformats.org/drawingml/2006/main"/>
-          <a:p xmlns:a="http://schemas.openxmlformats.org/drawingml/2006/main">
-            <a:r>
-              <a:t>About 30 seconds. Point at the submitted diagram, name the four layers, and mention JWT and the server side checks. Note to self: the diagram is from my Lab 3 submission. If asked how a box maps to the code: Login and Signup pages plus the four role dashboards, EnginePage and AnalyticsPage in React. AuthController, DonationController, RecipientController, VolunteerController, AllocationController, NotificationController, AnalyticsController and AdminController. AuthService, DonationService, RecipientService, VolunteerService, DeliveryService, AllocationEngineService, NotificationService, AnalyticsService and AdminService. Twelve Spring Data repositories over twelve MySQL tables. Supporting components: SecurityConfig with JwtService and JwtAuthFilter, jakarta validation on the request objects, GlobalExceptionHandler, AuditService, and transactional service methods. Logging runs through the framework logger, SLF4J.</a:t>
-            </a:r>
+          <a:bodyPr/>
+          <a:lstStyle/>
+          <a:p>
+            <a:endParaRPr dirty="0"/>
           </a:p>
         </p:txBody>
       </p:sp>
@@ -950,7 +867,7 @@
         <p:nvSpPr>
           <p:cNvPr id="4" name="Slide Number Placeholder 3"/>
           <p:cNvSpPr>
-            <a:spLocks xmlns:a="http://schemas.openxmlformats.org/drawingml/2006/main" noGrp="1"/>
+            <a:spLocks noGrp="1"/>
           </p:cNvSpPr>
           <p:nvPr>
             <p:ph type="sldNum" idx="5"/>
@@ -958,21 +875,23 @@
         </p:nvSpPr>
         <p:spPr/>
         <p:txBody>
-          <a:bodyPr xmlns:a="http://schemas.openxmlformats.org/drawingml/2006/main"/>
-          <a:lstStyle xmlns:a="http://schemas.openxmlformats.org/drawingml/2006/main"/>
-          <a:p xmlns:a="http://schemas.openxmlformats.org/drawingml/2006/main"/>
+          <a:bodyPr/>
+          <a:lstStyle/>
+          <a:p>
+            <a:endParaRPr/>
+          </a:p>
         </p:txBody>
       </p:sp>
     </p:spTree>
   </p:cSld>
   <p:clrMapOvr>
-    <a:masterClrMapping xmlns:a="http://schemas.openxmlformats.org/drawingml/2006/main"/>
+    <a:masterClrMapping/>
   </p:clrMapOvr>
 </p:notes>
 </file>
 
 <file path=ppt/notesSlides/notesSlide8.xml><?xml version="1.0" encoding="utf-8"?>
-<p:notes xmlns:p="http://schemas.openxmlformats.org/presentationml/2006/main">
+<p:notes xmlns:a="http://schemas.openxmlformats.org/drawingml/2006/main" xmlns:r="http://schemas.openxmlformats.org/officeDocument/2006/relationships" xmlns:p="http://schemas.openxmlformats.org/presentationml/2006/main">
   <p:cSld>
     <p:spTree>
       <p:nvGrpSpPr>
@@ -981,16 +900,21 @@
         <p:nvPr/>
       </p:nvGrpSpPr>
       <p:grpSpPr>
-        <a:xfrm xmlns:a="http://schemas.openxmlformats.org/drawingml/2006/main"/>
+        <a:xfrm>
+          <a:off x="0" y="0"/>
+          <a:ext cx="0" cy="0"/>
+          <a:chOff x="0" y="0"/>
+          <a:chExt cx="0" cy="0"/>
+        </a:xfrm>
       </p:grpSpPr>
       <p:sp>
         <p:nvSpPr>
           <p:cNvPr id="2" name="Slide Image Placeholder 1"/>
           <p:cNvSpPr>
-            <a:spLocks xmlns:a="http://schemas.openxmlformats.org/drawingml/2006/main" noGrp="1"/>
+            <a:spLocks noGrp="1" noRot="1" noChangeAspect="1"/>
           </p:cNvSpPr>
           <p:nvPr>
-            <p:ph type="sldImg" idx="0"/>
+            <p:ph type="sldImg"/>
           </p:nvPr>
         </p:nvSpPr>
         <p:spPr/>
@@ -999,7 +923,7 @@
         <p:nvSpPr>
           <p:cNvPr id="3" name="Notes Placeholder 2"/>
           <p:cNvSpPr>
-            <a:spLocks xmlns:a="http://schemas.openxmlformats.org/drawingml/2006/main" noGrp="1"/>
+            <a:spLocks noGrp="1"/>
           </p:cNvSpPr>
           <p:nvPr>
             <p:ph type="body" idx="1"/>
@@ -1007,12 +931,10 @@
         </p:nvSpPr>
         <p:spPr/>
         <p:txBody>
-          <a:bodyPr xmlns:a="http://schemas.openxmlformats.org/drawingml/2006/main"/>
-          <a:lstStyle xmlns:a="http://schemas.openxmlformats.org/drawingml/2006/main"/>
-          <a:p xmlns:a="http://schemas.openxmlformats.org/drawingml/2006/main">
-            <a:r>
-              <a:t>About 25 seconds. Twelve entities in third normal form, and the reason allocation, assignment and delivery are separate. Note to self: the diagram is from my Lab 4 submission.</a:t>
-            </a:r>
+          <a:bodyPr/>
+          <a:lstStyle/>
+          <a:p>
+            <a:endParaRPr dirty="0"/>
           </a:p>
         </p:txBody>
       </p:sp>
@@ -1020,7 +942,7 @@
         <p:nvSpPr>
           <p:cNvPr id="4" name="Slide Number Placeholder 3"/>
           <p:cNvSpPr>
-            <a:spLocks xmlns:a="http://schemas.openxmlformats.org/drawingml/2006/main" noGrp="1"/>
+            <a:spLocks noGrp="1"/>
           </p:cNvSpPr>
           <p:nvPr>
             <p:ph type="sldNum" idx="5"/>
@@ -1028,21 +950,23 @@
         </p:nvSpPr>
         <p:spPr/>
         <p:txBody>
-          <a:bodyPr xmlns:a="http://schemas.openxmlformats.org/drawingml/2006/main"/>
-          <a:lstStyle xmlns:a="http://schemas.openxmlformats.org/drawingml/2006/main"/>
-          <a:p xmlns:a="http://schemas.openxmlformats.org/drawingml/2006/main"/>
+          <a:bodyPr/>
+          <a:lstStyle/>
+          <a:p>
+            <a:endParaRPr/>
+          </a:p>
         </p:txBody>
       </p:sp>
     </p:spTree>
   </p:cSld>
   <p:clrMapOvr>
-    <a:masterClrMapping xmlns:a="http://schemas.openxmlformats.org/drawingml/2006/main"/>
+    <a:masterClrMapping/>
   </p:clrMapOvr>
 </p:notes>
 </file>
 
 <file path=ppt/notesSlides/notesSlide9.xml><?xml version="1.0" encoding="utf-8"?>
-<p:notes xmlns:p="http://schemas.openxmlformats.org/presentationml/2006/main">
+<p:notes xmlns:a="http://schemas.openxmlformats.org/drawingml/2006/main" xmlns:r="http://schemas.openxmlformats.org/officeDocument/2006/relationships" xmlns:p="http://schemas.openxmlformats.org/presentationml/2006/main">
   <p:cSld>
     <p:spTree>
       <p:nvGrpSpPr>
@@ -1051,16 +975,21 @@
         <p:nvPr/>
       </p:nvGrpSpPr>
       <p:grpSpPr>
-        <a:xfrm xmlns:a="http://schemas.openxmlformats.org/drawingml/2006/main"/>
+        <a:xfrm>
+          <a:off x="0" y="0"/>
+          <a:ext cx="0" cy="0"/>
+          <a:chOff x="0" y="0"/>
+          <a:chExt cx="0" cy="0"/>
+        </a:xfrm>
       </p:grpSpPr>
       <p:sp>
         <p:nvSpPr>
           <p:cNvPr id="2" name="Slide Image Placeholder 1"/>
           <p:cNvSpPr>
-            <a:spLocks xmlns:a="http://schemas.openxmlformats.org/drawingml/2006/main" noGrp="1"/>
+            <a:spLocks noGrp="1" noRot="1" noChangeAspect="1"/>
           </p:cNvSpPr>
           <p:nvPr>
-            <p:ph type="sldImg" idx="0"/>
+            <p:ph type="sldImg"/>
           </p:nvPr>
         </p:nvSpPr>
         <p:spPr/>
@@ -1069,7 +998,7 @@
         <p:nvSpPr>
           <p:cNvPr id="3" name="Notes Placeholder 2"/>
           <p:cNvSpPr>
-            <a:spLocks xmlns:a="http://schemas.openxmlformats.org/drawingml/2006/main" noGrp="1"/>
+            <a:spLocks noGrp="1"/>
           </p:cNvSpPr>
           <p:nvPr>
             <p:ph type="body" idx="1"/>
@@ -1077,12 +1006,10 @@
         </p:nvSpPr>
         <p:spPr/>
         <p:txBody>
-          <a:bodyPr xmlns:a="http://schemas.openxmlformats.org/drawingml/2006/main"/>
-          <a:lstStyle xmlns:a="http://schemas.openxmlformats.org/drawingml/2006/main"/>
-          <a:p xmlns:a="http://schemas.openxmlformats.org/drawingml/2006/main">
-            <a:r>
-              <a:t>About 30 seconds. Read two or three figures, then the verification lines. The live reports reproduce these numbers.</a:t>
-            </a:r>
+          <a:bodyPr/>
+          <a:lstStyle/>
+          <a:p>
+            <a:endParaRPr dirty="0"/>
           </a:p>
         </p:txBody>
       </p:sp>
@@ -1090,7 +1017,7 @@
         <p:nvSpPr>
           <p:cNvPr id="4" name="Slide Number Placeholder 3"/>
           <p:cNvSpPr>
-            <a:spLocks xmlns:a="http://schemas.openxmlformats.org/drawingml/2006/main" noGrp="1"/>
+            <a:spLocks noGrp="1"/>
           </p:cNvSpPr>
           <p:nvPr>
             <p:ph type="sldNum" idx="5"/>
@@ -1098,21 +1025,23 @@
         </p:nvSpPr>
         <p:spPr/>
         <p:txBody>
-          <a:bodyPr xmlns:a="http://schemas.openxmlformats.org/drawingml/2006/main"/>
-          <a:lstStyle xmlns:a="http://schemas.openxmlformats.org/drawingml/2006/main"/>
-          <a:p xmlns:a="http://schemas.openxmlformats.org/drawingml/2006/main"/>
+          <a:bodyPr/>
+          <a:lstStyle/>
+          <a:p>
+            <a:endParaRPr/>
+          </a:p>
         </p:txBody>
       </p:sp>
     </p:spTree>
   </p:cSld>
   <p:clrMapOvr>
-    <a:masterClrMapping xmlns:a="http://schemas.openxmlformats.org/drawingml/2006/main"/>
+    <a:masterClrMapping/>
   </p:clrMapOvr>
 </p:notes>
 </file>
 
 <file path=ppt/slideLayouts/slideLayout1.xml><?xml version="1.0" encoding="utf-8"?>
-<p:sldLayout xmlns:p="http://schemas.openxmlformats.org/presentationml/2006/main" type="title">
+<p:sldLayout xmlns:a="http://schemas.openxmlformats.org/drawingml/2006/main" xmlns:r="http://schemas.openxmlformats.org/officeDocument/2006/relationships" xmlns:p="http://schemas.openxmlformats.org/presentationml/2006/main" type="title">
   <p:cSld name="Title Slide">
     <p:spTree>
       <p:nvGrpSpPr>
@@ -1121,43 +1050,48 @@
         <p:nvPr/>
       </p:nvGrpSpPr>
       <p:grpSpPr>
-        <a:xfrm xmlns:a="http://schemas.openxmlformats.org/drawingml/2006/main"/>
+        <a:xfrm>
+          <a:off x="0" y="0"/>
+          <a:ext cx="0" cy="0"/>
+          <a:chOff x="0" y="0"/>
+          <a:chExt cx="0" cy="0"/>
+        </a:xfrm>
       </p:grpSpPr>
       <p:sp>
         <p:nvSpPr>
           <p:cNvPr id="3" name="Title">
-            <a:extLst xmlns:a="http://schemas.openxmlformats.org/drawingml/2006/main">
+            <a:extLst>
               <a:ext uri="{FF2B5EF4-FFF2-40B4-BE49-F238E27FC236}">
                 <a16:creationId xmlns:a16="http://schemas.microsoft.com/office/drawing/2014/main" id="{DA4EF8F4-6897-4A9D-924C-A135E95C1964}"/>
               </a:ext>
             </a:extLst>
           </p:cNvPr>
           <p:cNvSpPr>
-            <a:spLocks xmlns:a="http://schemas.openxmlformats.org/drawingml/2006/main" noGrp="1"/>
+            <a:spLocks noGrp="1"/>
           </p:cNvSpPr>
           <p:nvPr>
-            <p:ph type="title" idx="0"/>
+            <p:ph type="title"/>
           </p:nvPr>
         </p:nvSpPr>
         <p:spPr>
-          <a:xfrm xmlns:a="http://schemas.openxmlformats.org/drawingml/2006/main">
+          <a:xfrm>
             <a:off x="1219200" y="2590800"/>
             <a:ext cx="9753600" cy="990600"/>
           </a:xfrm>
-          <a:prstGeom xmlns:a="http://schemas.openxmlformats.org/drawingml/2006/main" prst="rect">
+          <a:prstGeom prst="rect">
             <a:avLst/>
           </a:prstGeom>
-          <a:noFill xmlns:a="http://schemas.openxmlformats.org/drawingml/2006/main"/>
-          <a:ln xmlns:a="http://schemas.openxmlformats.org/drawingml/2006/main">
+          <a:noFill/>
+          <a:ln>
             <a:noFill/>
             <a:prstDash val="solid"/>
           </a:ln>
         </p:spPr>
         <p:txBody>
-          <a:bodyPr xmlns:a="http://schemas.openxmlformats.org/drawingml/2006/main" wrap="square" lIns="0" tIns="0" rIns="0" bIns="0" anchor="ctr">
+          <a:bodyPr wrap="square" lIns="0" tIns="0" rIns="0" bIns="0" anchor="ctr">
             <a:normAutofit/>
           </a:bodyPr>
-          <a:lstStyle xmlns:a="http://schemas.openxmlformats.org/drawingml/2006/main">
+          <a:lstStyle>
             <a:defPPr algn="ctr">
               <a:defRPr sz="4800" b="1">
                 <a:solidFill>
@@ -1277,44 +1211,46 @@
               <a:buNone/>
             </a:lvl9pPr>
           </a:lstStyle>
-          <a:p xmlns:a="http://schemas.openxmlformats.org/drawingml/2006/main"/>
+          <a:p>
+            <a:endParaRPr/>
+          </a:p>
         </p:txBody>
       </p:sp>
       <p:sp>
         <p:nvSpPr>
           <p:cNvPr id="2" name="Subtitle">
-            <a:extLst xmlns:a="http://schemas.openxmlformats.org/drawingml/2006/main">
+            <a:extLst>
               <a:ext uri="{FF2B5EF4-FFF2-40B4-BE49-F238E27FC236}">
                 <a16:creationId xmlns:a16="http://schemas.microsoft.com/office/drawing/2014/main" id="{068137C7-15F3-45C1-B25F-D484218ACB7C}"/>
               </a:ext>
             </a:extLst>
           </p:cNvPr>
           <p:cNvSpPr>
-            <a:spLocks xmlns:a="http://schemas.openxmlformats.org/drawingml/2006/main" noGrp="1"/>
+            <a:spLocks noGrp="1"/>
           </p:cNvSpPr>
           <p:nvPr>
             <p:ph type="subTitle" idx="1"/>
           </p:nvPr>
         </p:nvSpPr>
         <p:spPr>
-          <a:xfrm xmlns:a="http://schemas.openxmlformats.org/drawingml/2006/main">
+          <a:xfrm>
             <a:off x="1828800" y="3771900"/>
             <a:ext cx="8534400" cy="762000"/>
           </a:xfrm>
-          <a:prstGeom xmlns:a="http://schemas.openxmlformats.org/drawingml/2006/main" prst="rect">
+          <a:prstGeom prst="rect">
             <a:avLst/>
           </a:prstGeom>
-          <a:noFill xmlns:a="http://schemas.openxmlformats.org/drawingml/2006/main"/>
-          <a:ln xmlns:a="http://schemas.openxmlformats.org/drawingml/2006/main">
+          <a:noFill/>
+          <a:ln>
             <a:noFill/>
             <a:prstDash val="solid"/>
           </a:ln>
         </p:spPr>
         <p:txBody>
-          <a:bodyPr xmlns:a="http://schemas.openxmlformats.org/drawingml/2006/main" wrap="square" lIns="0" tIns="0" rIns="0" bIns="0" anchor="ctr">
+          <a:bodyPr wrap="square" lIns="0" tIns="0" rIns="0" bIns="0" anchor="ctr">
             <a:normAutofit/>
           </a:bodyPr>
-          <a:lstStyle xmlns:a="http://schemas.openxmlformats.org/drawingml/2006/main">
+          <a:lstStyle>
             <a:defPPr algn="ctr">
               <a:defRPr sz="2100" b="0">
                 <a:solidFill>
@@ -1434,16 +1370,21 @@
               <a:buNone/>
             </a:lvl9pPr>
           </a:lstStyle>
-          <a:p xmlns:a="http://schemas.openxmlformats.org/drawingml/2006/main"/>
+          <a:p>
+            <a:endParaRPr/>
+          </a:p>
         </p:txBody>
       </p:sp>
     </p:spTree>
   </p:cSld>
+  <p:clrMapOvr>
+    <a:masterClrMapping/>
+  </p:clrMapOvr>
 </p:sldLayout>
 </file>
 
 <file path=ppt/slideLayouts/slideLayout2.xml><?xml version="1.0" encoding="utf-8"?>
-<p:sldLayout xmlns:p="http://schemas.openxmlformats.org/presentationml/2006/main">
+<p:sldLayout xmlns:a="http://schemas.openxmlformats.org/drawingml/2006/main" xmlns:r="http://schemas.openxmlformats.org/officeDocument/2006/relationships" xmlns:p="http://schemas.openxmlformats.org/presentationml/2006/main">
   <p:cSld name="Section Header">
     <p:spTree>
       <p:nvGrpSpPr>
@@ -1452,43 +1393,48 @@
         <p:nvPr/>
       </p:nvGrpSpPr>
       <p:grpSpPr>
-        <a:xfrm xmlns:a="http://schemas.openxmlformats.org/drawingml/2006/main"/>
+        <a:xfrm>
+          <a:off x="0" y="0"/>
+          <a:ext cx="0" cy="0"/>
+          <a:chOff x="0" y="0"/>
+          <a:chExt cx="0" cy="0"/>
+        </a:xfrm>
       </p:grpSpPr>
       <p:sp>
         <p:nvSpPr>
           <p:cNvPr id="2" name="Section title">
-            <a:extLst xmlns:a="http://schemas.openxmlformats.org/drawingml/2006/main">
+            <a:extLst>
               <a:ext uri="{FF2B5EF4-FFF2-40B4-BE49-F238E27FC236}">
                 <a16:creationId xmlns:a16="http://schemas.microsoft.com/office/drawing/2014/main" id="{7113DDF4-168F-44AB-8E88-B8A61A3453C1}"/>
               </a:ext>
             </a:extLst>
           </p:cNvPr>
           <p:cNvSpPr>
-            <a:spLocks xmlns:a="http://schemas.openxmlformats.org/drawingml/2006/main" noGrp="1"/>
+            <a:spLocks noGrp="1"/>
           </p:cNvSpPr>
           <p:nvPr>
-            <p:ph type="title" idx="0"/>
+            <p:ph type="title"/>
           </p:nvPr>
         </p:nvSpPr>
         <p:spPr>
-          <a:xfrm xmlns:a="http://schemas.openxmlformats.org/drawingml/2006/main">
+          <a:xfrm>
             <a:off x="1219200" y="2857500"/>
             <a:ext cx="9753600" cy="1143000"/>
           </a:xfrm>
-          <a:prstGeom xmlns:a="http://schemas.openxmlformats.org/drawingml/2006/main" prst="rect">
+          <a:prstGeom prst="rect">
             <a:avLst/>
           </a:prstGeom>
-          <a:noFill xmlns:a="http://schemas.openxmlformats.org/drawingml/2006/main"/>
-          <a:ln xmlns:a="http://schemas.openxmlformats.org/drawingml/2006/main">
+          <a:noFill/>
+          <a:ln>
             <a:noFill/>
             <a:prstDash val="solid"/>
           </a:ln>
         </p:spPr>
         <p:txBody>
-          <a:bodyPr xmlns:a="http://schemas.openxmlformats.org/drawingml/2006/main" wrap="square" lIns="0" tIns="0" rIns="0" bIns="0" anchor="ctr">
+          <a:bodyPr wrap="square" lIns="0" tIns="0" rIns="0" bIns="0" anchor="ctr">
             <a:normAutofit/>
           </a:bodyPr>
-          <a:lstStyle xmlns:a="http://schemas.openxmlformats.org/drawingml/2006/main">
+          <a:lstStyle>
             <a:defPPr algn="ctr">
               <a:defRPr sz="4200" b="1">
                 <a:solidFill>
@@ -1608,16 +1554,21 @@
               <a:buNone/>
             </a:lvl9pPr>
           </a:lstStyle>
-          <a:p xmlns:a="http://schemas.openxmlformats.org/drawingml/2006/main"/>
+          <a:p>
+            <a:endParaRPr/>
+          </a:p>
         </p:txBody>
       </p:sp>
     </p:spTree>
   </p:cSld>
+  <p:clrMapOvr>
+    <a:masterClrMapping/>
+  </p:clrMapOvr>
 </p:sldLayout>
 </file>
 
 <file path=ppt/slideLayouts/slideLayout3.xml><?xml version="1.0" encoding="utf-8"?>
-<p:sldLayout xmlns:p="http://schemas.openxmlformats.org/presentationml/2006/main">
+<p:sldLayout xmlns:a="http://schemas.openxmlformats.org/drawingml/2006/main" xmlns:r="http://schemas.openxmlformats.org/officeDocument/2006/relationships" xmlns:p="http://schemas.openxmlformats.org/presentationml/2006/main">
   <p:cSld name="Title and Body">
     <p:spTree>
       <p:nvGrpSpPr>
@@ -1626,43 +1577,48 @@
         <p:nvPr/>
       </p:nvGrpSpPr>
       <p:grpSpPr>
-        <a:xfrm xmlns:a="http://schemas.openxmlformats.org/drawingml/2006/main"/>
+        <a:xfrm>
+          <a:off x="0" y="0"/>
+          <a:ext cx="0" cy="0"/>
+          <a:chOff x="0" y="0"/>
+          <a:chExt cx="0" cy="0"/>
+        </a:xfrm>
       </p:grpSpPr>
       <p:sp>
         <p:nvSpPr>
           <p:cNvPr id="3" name="Title">
-            <a:extLst xmlns:a="http://schemas.openxmlformats.org/drawingml/2006/main">
+            <a:extLst>
               <a:ext uri="{FF2B5EF4-FFF2-40B4-BE49-F238E27FC236}">
                 <a16:creationId xmlns:a16="http://schemas.microsoft.com/office/drawing/2014/main" id="{19F22216-3B67-42DE-8400-762252DEA945}"/>
               </a:ext>
             </a:extLst>
           </p:cNvPr>
           <p:cNvSpPr>
-            <a:spLocks xmlns:a="http://schemas.openxmlformats.org/drawingml/2006/main" noGrp="1"/>
+            <a:spLocks noGrp="1"/>
           </p:cNvSpPr>
           <p:nvPr>
-            <p:ph type="title" idx="0"/>
+            <p:ph type="title"/>
           </p:nvPr>
         </p:nvSpPr>
         <p:spPr>
-          <a:xfrm xmlns:a="http://schemas.openxmlformats.org/drawingml/2006/main">
+          <a:xfrm>
             <a:off x="685800" y="533400"/>
             <a:ext cx="10820400" cy="838200"/>
           </a:xfrm>
-          <a:prstGeom xmlns:a="http://schemas.openxmlformats.org/drawingml/2006/main" prst="rect">
+          <a:prstGeom prst="rect">
             <a:avLst/>
           </a:prstGeom>
-          <a:noFill xmlns:a="http://schemas.openxmlformats.org/drawingml/2006/main"/>
-          <a:ln xmlns:a="http://schemas.openxmlformats.org/drawingml/2006/main">
+          <a:noFill/>
+          <a:ln>
             <a:noFill/>
             <a:prstDash val="solid"/>
           </a:ln>
         </p:spPr>
         <p:txBody>
-          <a:bodyPr xmlns:a="http://schemas.openxmlformats.org/drawingml/2006/main" wrap="square" lIns="0" tIns="0" rIns="0" bIns="0" anchor="t">
+          <a:bodyPr wrap="square" lIns="0" tIns="0" rIns="0" bIns="0" anchor="t">
             <a:normAutofit/>
           </a:bodyPr>
-          <a:lstStyle xmlns:a="http://schemas.openxmlformats.org/drawingml/2006/main">
+          <a:lstStyle>
             <a:defPPr algn="l">
               <a:defRPr sz="3300" b="1">
                 <a:solidFill>
@@ -1782,44 +1738,46 @@
               <a:buNone/>
             </a:lvl9pPr>
           </a:lstStyle>
-          <a:p xmlns:a="http://schemas.openxmlformats.org/drawingml/2006/main"/>
+          <a:p>
+            <a:endParaRPr/>
+          </a:p>
         </p:txBody>
       </p:sp>
       <p:sp>
         <p:nvSpPr>
           <p:cNvPr id="2" name="Body">
-            <a:extLst xmlns:a="http://schemas.openxmlformats.org/drawingml/2006/main">
+            <a:extLst>
               <a:ext uri="{FF2B5EF4-FFF2-40B4-BE49-F238E27FC236}">
                 <a16:creationId xmlns:a16="http://schemas.microsoft.com/office/drawing/2014/main" id="{1331B23D-57D0-4634-AE61-CBA25F49DAB2}"/>
               </a:ext>
             </a:extLst>
           </p:cNvPr>
           <p:cNvSpPr>
-            <a:spLocks xmlns:a="http://schemas.openxmlformats.org/drawingml/2006/main" noGrp="1"/>
+            <a:spLocks noGrp="1"/>
           </p:cNvSpPr>
           <p:nvPr>
             <p:ph type="body" idx="1"/>
           </p:nvPr>
         </p:nvSpPr>
         <p:spPr>
-          <a:xfrm xmlns:a="http://schemas.openxmlformats.org/drawingml/2006/main">
+          <a:xfrm>
             <a:off x="685800" y="1905000"/>
             <a:ext cx="10820400" cy="4267200"/>
           </a:xfrm>
-          <a:prstGeom xmlns:a="http://schemas.openxmlformats.org/drawingml/2006/main" prst="rect">
+          <a:prstGeom prst="rect">
             <a:avLst/>
           </a:prstGeom>
-          <a:noFill xmlns:a="http://schemas.openxmlformats.org/drawingml/2006/main"/>
-          <a:ln xmlns:a="http://schemas.openxmlformats.org/drawingml/2006/main">
+          <a:noFill/>
+          <a:ln>
             <a:noFill/>
             <a:prstDash val="solid"/>
           </a:ln>
         </p:spPr>
         <p:txBody>
-          <a:bodyPr xmlns:a="http://schemas.openxmlformats.org/drawingml/2006/main" wrap="square" lIns="0" tIns="0" rIns="0" bIns="0" anchor="t">
+          <a:bodyPr wrap="square" lIns="0" tIns="0" rIns="0" bIns="0" anchor="t">
             <a:normAutofit/>
           </a:bodyPr>
-          <a:lstStyle xmlns:a="http://schemas.openxmlformats.org/drawingml/2006/main">
+          <a:lstStyle>
             <a:defPPr algn="l">
               <a:defRPr sz="2250" b="0">
                 <a:solidFill>
@@ -1939,16 +1897,21 @@
               <a:buChar char="•"/>
             </a:lvl9pPr>
           </a:lstStyle>
-          <a:p xmlns:a="http://schemas.openxmlformats.org/drawingml/2006/main"/>
+          <a:p>
+            <a:endParaRPr/>
+          </a:p>
         </p:txBody>
       </p:sp>
     </p:spTree>
   </p:cSld>
+  <p:clrMapOvr>
+    <a:masterClrMapping/>
+  </p:clrMapOvr>
 </p:sldLayout>
 </file>
 
 <file path=ppt/slideLayouts/slideLayout4.xml><?xml version="1.0" encoding="utf-8"?>
-<p:sldLayout xmlns:p="http://schemas.openxmlformats.org/presentationml/2006/main">
+<p:sldLayout xmlns:a="http://schemas.openxmlformats.org/drawingml/2006/main" xmlns:r="http://schemas.openxmlformats.org/officeDocument/2006/relationships" xmlns:p="http://schemas.openxmlformats.org/presentationml/2006/main">
   <p:cSld name="Title and Two Column">
     <p:spTree>
       <p:nvGrpSpPr>
@@ -1957,43 +1920,48 @@
         <p:nvPr/>
       </p:nvGrpSpPr>
       <p:grpSpPr>
-        <a:xfrm xmlns:a="http://schemas.openxmlformats.org/drawingml/2006/main"/>
+        <a:xfrm>
+          <a:off x="0" y="0"/>
+          <a:ext cx="0" cy="0"/>
+          <a:chOff x="0" y="0"/>
+          <a:chExt cx="0" cy="0"/>
+        </a:xfrm>
       </p:grpSpPr>
       <p:sp>
         <p:nvSpPr>
           <p:cNvPr id="4" name="Title">
-            <a:extLst xmlns:a="http://schemas.openxmlformats.org/drawingml/2006/main">
+            <a:extLst>
               <a:ext uri="{FF2B5EF4-FFF2-40B4-BE49-F238E27FC236}">
                 <a16:creationId xmlns:a16="http://schemas.microsoft.com/office/drawing/2014/main" id="{1E9CD3E4-6D62-4AD6-A0FA-DA8FBF2C095A}"/>
               </a:ext>
             </a:extLst>
           </p:cNvPr>
           <p:cNvSpPr>
-            <a:spLocks xmlns:a="http://schemas.openxmlformats.org/drawingml/2006/main" noGrp="1"/>
+            <a:spLocks noGrp="1"/>
           </p:cNvSpPr>
           <p:nvPr>
-            <p:ph type="title" idx="0"/>
+            <p:ph type="title"/>
           </p:nvPr>
         </p:nvSpPr>
         <p:spPr>
-          <a:xfrm xmlns:a="http://schemas.openxmlformats.org/drawingml/2006/main">
+          <a:xfrm>
             <a:off x="685800" y="533400"/>
             <a:ext cx="10820400" cy="838200"/>
           </a:xfrm>
-          <a:prstGeom xmlns:a="http://schemas.openxmlformats.org/drawingml/2006/main" prst="rect">
+          <a:prstGeom prst="rect">
             <a:avLst/>
           </a:prstGeom>
-          <a:noFill xmlns:a="http://schemas.openxmlformats.org/drawingml/2006/main"/>
-          <a:ln xmlns:a="http://schemas.openxmlformats.org/drawingml/2006/main">
+          <a:noFill/>
+          <a:ln>
             <a:noFill/>
             <a:prstDash val="solid"/>
           </a:ln>
         </p:spPr>
         <p:txBody>
-          <a:bodyPr xmlns:a="http://schemas.openxmlformats.org/drawingml/2006/main" wrap="square" lIns="0" tIns="0" rIns="0" bIns="0" anchor="t">
+          <a:bodyPr wrap="square" lIns="0" tIns="0" rIns="0" bIns="0" anchor="t">
             <a:normAutofit/>
           </a:bodyPr>
-          <a:lstStyle xmlns:a="http://schemas.openxmlformats.org/drawingml/2006/main">
+          <a:lstStyle>
             <a:defPPr algn="l">
               <a:defRPr sz="3300" b="1">
                 <a:solidFill>
@@ -2113,44 +2081,46 @@
               <a:buNone/>
             </a:lvl9pPr>
           </a:lstStyle>
-          <a:p xmlns:a="http://schemas.openxmlformats.org/drawingml/2006/main"/>
+          <a:p>
+            <a:endParaRPr/>
+          </a:p>
         </p:txBody>
       </p:sp>
       <p:sp>
         <p:nvSpPr>
           <p:cNvPr id="2" name="Left column">
-            <a:extLst xmlns:a="http://schemas.openxmlformats.org/drawingml/2006/main">
+            <a:extLst>
               <a:ext uri="{FF2B5EF4-FFF2-40B4-BE49-F238E27FC236}">
                 <a16:creationId xmlns:a16="http://schemas.microsoft.com/office/drawing/2014/main" id="{AF432DEA-2B71-42F1-A0A0-9A2EEE4268FB}"/>
               </a:ext>
             </a:extLst>
           </p:cNvPr>
           <p:cNvSpPr>
-            <a:spLocks xmlns:a="http://schemas.openxmlformats.org/drawingml/2006/main" noGrp="1"/>
+            <a:spLocks noGrp="1"/>
           </p:cNvSpPr>
           <p:nvPr>
             <p:ph type="body" idx="1"/>
           </p:nvPr>
         </p:nvSpPr>
         <p:spPr>
-          <a:xfrm xmlns:a="http://schemas.openxmlformats.org/drawingml/2006/main">
+          <a:xfrm>
             <a:off x="685800" y="1905000"/>
             <a:ext cx="5029200" cy="4267200"/>
           </a:xfrm>
-          <a:prstGeom xmlns:a="http://schemas.openxmlformats.org/drawingml/2006/main" prst="rect">
+          <a:prstGeom prst="rect">
             <a:avLst/>
           </a:prstGeom>
-          <a:noFill xmlns:a="http://schemas.openxmlformats.org/drawingml/2006/main"/>
-          <a:ln xmlns:a="http://schemas.openxmlformats.org/drawingml/2006/main">
+          <a:noFill/>
+          <a:ln>
             <a:noFill/>
             <a:prstDash val="solid"/>
           </a:ln>
         </p:spPr>
         <p:txBody>
-          <a:bodyPr xmlns:a="http://schemas.openxmlformats.org/drawingml/2006/main" wrap="square" lIns="0" tIns="0" rIns="0" bIns="0" anchor="t">
+          <a:bodyPr wrap="square" lIns="0" tIns="0" rIns="0" bIns="0" anchor="t">
             <a:normAutofit/>
           </a:bodyPr>
-          <a:lstStyle xmlns:a="http://schemas.openxmlformats.org/drawingml/2006/main">
+          <a:lstStyle>
             <a:defPPr algn="l">
               <a:defRPr sz="2100" b="0">
                 <a:solidFill>
@@ -2270,44 +2240,46 @@
               <a:buChar char="•"/>
             </a:lvl9pPr>
           </a:lstStyle>
-          <a:p xmlns:a="http://schemas.openxmlformats.org/drawingml/2006/main"/>
+          <a:p>
+            <a:endParaRPr/>
+          </a:p>
         </p:txBody>
       </p:sp>
       <p:sp>
         <p:nvSpPr>
           <p:cNvPr id="3" name="Right column">
-            <a:extLst xmlns:a="http://schemas.openxmlformats.org/drawingml/2006/main">
+            <a:extLst>
               <a:ext uri="{FF2B5EF4-FFF2-40B4-BE49-F238E27FC236}">
                 <a16:creationId xmlns:a16="http://schemas.microsoft.com/office/drawing/2014/main" id="{1B01898F-9898-4690-8A1C-695EDC91DE0A}"/>
               </a:ext>
             </a:extLst>
           </p:cNvPr>
           <p:cNvSpPr>
-            <a:spLocks xmlns:a="http://schemas.openxmlformats.org/drawingml/2006/main" noGrp="1"/>
+            <a:spLocks noGrp="1"/>
           </p:cNvSpPr>
           <p:nvPr>
             <p:ph type="body" idx="2"/>
           </p:nvPr>
         </p:nvSpPr>
         <p:spPr>
-          <a:xfrm xmlns:a="http://schemas.openxmlformats.org/drawingml/2006/main">
+          <a:xfrm>
             <a:off x="6477000" y="1905000"/>
             <a:ext cx="5029200" cy="4267200"/>
           </a:xfrm>
-          <a:prstGeom xmlns:a="http://schemas.openxmlformats.org/drawingml/2006/main" prst="rect">
+          <a:prstGeom prst="rect">
             <a:avLst/>
           </a:prstGeom>
-          <a:noFill xmlns:a="http://schemas.openxmlformats.org/drawingml/2006/main"/>
-          <a:ln xmlns:a="http://schemas.openxmlformats.org/drawingml/2006/main">
+          <a:noFill/>
+          <a:ln>
             <a:noFill/>
             <a:prstDash val="solid"/>
           </a:ln>
         </p:spPr>
         <p:txBody>
-          <a:bodyPr xmlns:a="http://schemas.openxmlformats.org/drawingml/2006/main" wrap="square" lIns="0" tIns="0" rIns="0" bIns="0" anchor="t">
+          <a:bodyPr wrap="square" lIns="0" tIns="0" rIns="0" bIns="0" anchor="t">
             <a:normAutofit/>
           </a:bodyPr>
-          <a:lstStyle xmlns:a="http://schemas.openxmlformats.org/drawingml/2006/main">
+          <a:lstStyle>
             <a:defPPr algn="l">
               <a:defRPr sz="2100" b="0">
                 <a:solidFill>
@@ -2427,16 +2399,21 @@
               <a:buChar char="•"/>
             </a:lvl9pPr>
           </a:lstStyle>
-          <a:p xmlns:a="http://schemas.openxmlformats.org/drawingml/2006/main"/>
+          <a:p>
+            <a:endParaRPr/>
+          </a:p>
         </p:txBody>
       </p:sp>
     </p:spTree>
   </p:cSld>
+  <p:clrMapOvr>
+    <a:masterClrMapping/>
+  </p:clrMapOvr>
 </p:sldLayout>
 </file>
 
 <file path=ppt/slideLayouts/slideLayout5.xml><?xml version="1.0" encoding="utf-8"?>
-<p:sldLayout xmlns:p="http://schemas.openxmlformats.org/presentationml/2006/main">
+<p:sldLayout xmlns:a="http://schemas.openxmlformats.org/drawingml/2006/main" xmlns:r="http://schemas.openxmlformats.org/officeDocument/2006/relationships" xmlns:p="http://schemas.openxmlformats.org/presentationml/2006/main">
   <p:cSld name="Title and One Column">
     <p:spTree>
       <p:nvGrpSpPr>
@@ -2445,43 +2422,48 @@
         <p:nvPr/>
       </p:nvGrpSpPr>
       <p:grpSpPr>
-        <a:xfrm xmlns:a="http://schemas.openxmlformats.org/drawingml/2006/main"/>
+        <a:xfrm>
+          <a:off x="0" y="0"/>
+          <a:ext cx="0" cy="0"/>
+          <a:chOff x="0" y="0"/>
+          <a:chExt cx="0" cy="0"/>
+        </a:xfrm>
       </p:grpSpPr>
       <p:sp>
         <p:nvSpPr>
           <p:cNvPr id="3" name="Title">
-            <a:extLst xmlns:a="http://schemas.openxmlformats.org/drawingml/2006/main">
+            <a:extLst>
               <a:ext uri="{FF2B5EF4-FFF2-40B4-BE49-F238E27FC236}">
                 <a16:creationId xmlns:a16="http://schemas.microsoft.com/office/drawing/2014/main" id="{D75162E5-A0E7-4529-BEED-947250BCB88F}"/>
               </a:ext>
             </a:extLst>
           </p:cNvPr>
           <p:cNvSpPr>
-            <a:spLocks xmlns:a="http://schemas.openxmlformats.org/drawingml/2006/main" noGrp="1"/>
+            <a:spLocks noGrp="1"/>
           </p:cNvSpPr>
           <p:nvPr>
-            <p:ph type="title" idx="0"/>
+            <p:ph type="title"/>
           </p:nvPr>
         </p:nvSpPr>
         <p:spPr>
-          <a:xfrm xmlns:a="http://schemas.openxmlformats.org/drawingml/2006/main">
+          <a:xfrm>
             <a:off x="685800" y="533400"/>
             <a:ext cx="10820400" cy="838200"/>
           </a:xfrm>
-          <a:prstGeom xmlns:a="http://schemas.openxmlformats.org/drawingml/2006/main" prst="rect">
+          <a:prstGeom prst="rect">
             <a:avLst/>
           </a:prstGeom>
-          <a:noFill xmlns:a="http://schemas.openxmlformats.org/drawingml/2006/main"/>
-          <a:ln xmlns:a="http://schemas.openxmlformats.org/drawingml/2006/main">
+          <a:noFill/>
+          <a:ln>
             <a:noFill/>
             <a:prstDash val="solid"/>
           </a:ln>
         </p:spPr>
         <p:txBody>
-          <a:bodyPr xmlns:a="http://schemas.openxmlformats.org/drawingml/2006/main" wrap="square" lIns="0" tIns="0" rIns="0" bIns="0" anchor="t">
+          <a:bodyPr wrap="square" lIns="0" tIns="0" rIns="0" bIns="0" anchor="t">
             <a:normAutofit/>
           </a:bodyPr>
-          <a:lstStyle xmlns:a="http://schemas.openxmlformats.org/drawingml/2006/main">
+          <a:lstStyle>
             <a:defPPr algn="l">
               <a:defRPr sz="3300" b="1">
                 <a:solidFill>
@@ -2601,44 +2583,46 @@
               <a:buNone/>
             </a:lvl9pPr>
           </a:lstStyle>
-          <a:p xmlns:a="http://schemas.openxmlformats.org/drawingml/2006/main"/>
+          <a:p>
+            <a:endParaRPr/>
+          </a:p>
         </p:txBody>
       </p:sp>
       <p:sp>
         <p:nvSpPr>
           <p:cNvPr id="2" name="Left column">
-            <a:extLst xmlns:a="http://schemas.openxmlformats.org/drawingml/2006/main">
+            <a:extLst>
               <a:ext uri="{FF2B5EF4-FFF2-40B4-BE49-F238E27FC236}">
                 <a16:creationId xmlns:a16="http://schemas.microsoft.com/office/drawing/2014/main" id="{3206AB7A-4758-46F8-BE76-E50D90B06E98}"/>
               </a:ext>
             </a:extLst>
           </p:cNvPr>
           <p:cNvSpPr>
-            <a:spLocks xmlns:a="http://schemas.openxmlformats.org/drawingml/2006/main" noGrp="1"/>
+            <a:spLocks noGrp="1"/>
           </p:cNvSpPr>
           <p:nvPr>
             <p:ph type="body" idx="1"/>
           </p:nvPr>
         </p:nvSpPr>
         <p:spPr>
-          <a:xfrm xmlns:a="http://schemas.openxmlformats.org/drawingml/2006/main">
+          <a:xfrm>
             <a:off x="685800" y="1905000"/>
             <a:ext cx="5029200" cy="4267200"/>
           </a:xfrm>
-          <a:prstGeom xmlns:a="http://schemas.openxmlformats.org/drawingml/2006/main" prst="rect">
+          <a:prstGeom prst="rect">
             <a:avLst/>
           </a:prstGeom>
-          <a:noFill xmlns:a="http://schemas.openxmlformats.org/drawingml/2006/main"/>
-          <a:ln xmlns:a="http://schemas.openxmlformats.org/drawingml/2006/main">
+          <a:noFill/>
+          <a:ln>
             <a:noFill/>
             <a:prstDash val="solid"/>
           </a:ln>
         </p:spPr>
         <p:txBody>
-          <a:bodyPr xmlns:a="http://schemas.openxmlformats.org/drawingml/2006/main" wrap="square" lIns="0" tIns="0" rIns="0" bIns="0" anchor="t">
+          <a:bodyPr wrap="square" lIns="0" tIns="0" rIns="0" bIns="0" anchor="t">
             <a:normAutofit/>
           </a:bodyPr>
-          <a:lstStyle xmlns:a="http://schemas.openxmlformats.org/drawingml/2006/main">
+          <a:lstStyle>
             <a:defPPr algn="l">
               <a:defRPr sz="2250" b="0">
                 <a:solidFill>
@@ -2758,16 +2742,21 @@
               <a:buChar char="•"/>
             </a:lvl9pPr>
           </a:lstStyle>
-          <a:p xmlns:a="http://schemas.openxmlformats.org/drawingml/2006/main"/>
+          <a:p>
+            <a:endParaRPr/>
+          </a:p>
         </p:txBody>
       </p:sp>
     </p:spTree>
   </p:cSld>
+  <p:clrMapOvr>
+    <a:masterClrMapping/>
+  </p:clrMapOvr>
 </p:sldLayout>
 </file>
 
 <file path=ppt/slideLayouts/slideLayout6.xml><?xml version="1.0" encoding="utf-8"?>
-<p:sldLayout xmlns:p="http://schemas.openxmlformats.org/presentationml/2006/main" type="blank">
+<p:sldLayout xmlns:a="http://schemas.openxmlformats.org/drawingml/2006/main" xmlns:r="http://schemas.openxmlformats.org/officeDocument/2006/relationships" xmlns:p="http://schemas.openxmlformats.org/presentationml/2006/main" type="blank">
   <p:cSld name="Blank">
     <p:spTree>
       <p:nvGrpSpPr>
@@ -2776,19 +2765,27 @@
         <p:nvPr/>
       </p:nvGrpSpPr>
       <p:grpSpPr>
-        <a:xfrm xmlns:a="http://schemas.openxmlformats.org/drawingml/2006/main"/>
+        <a:xfrm>
+          <a:off x="0" y="0"/>
+          <a:ext cx="0" cy="0"/>
+          <a:chOff x="0" y="0"/>
+          <a:chExt cx="0" cy="0"/>
+        </a:xfrm>
       </p:grpSpPr>
     </p:spTree>
   </p:cSld>
+  <p:clrMapOvr>
+    <a:masterClrMapping/>
+  </p:clrMapOvr>
 </p:sldLayout>
 </file>
 
 <file path=ppt/slideMasters/slideMaster1.xml><?xml version="1.0" encoding="utf-8"?>
-<p:sldMaster xmlns:p="http://schemas.openxmlformats.org/presentationml/2006/main">
+<p:sldMaster xmlns:a="http://schemas.openxmlformats.org/drawingml/2006/main" xmlns:r="http://schemas.openxmlformats.org/officeDocument/2006/relationships" xmlns:p="http://schemas.openxmlformats.org/presentationml/2006/main">
   <p:cSld name="Master">
     <p:bg>
       <p:bgRef idx="1001">
-        <a:schemeClr xmlns:a="http://schemas.openxmlformats.org/drawingml/2006/main" val="bg1"/>
+        <a:schemeClr val="bg1"/>
       </p:bgRef>
     </p:bg>
     <p:spTree>
@@ -2798,22 +2795,27 @@
         <p:nvPr/>
       </p:nvGrpSpPr>
       <p:grpSpPr>
-        <a:xfrm xmlns:a="http://schemas.openxmlformats.org/drawingml/2006/main"/>
+        <a:xfrm>
+          <a:off x="0" y="0"/>
+          <a:ext cx="0" cy="0"/>
+          <a:chOff x="0" y="0"/>
+          <a:chExt cx="0" cy="0"/>
+        </a:xfrm>
       </p:grpSpPr>
     </p:spTree>
   </p:cSld>
   <p:clrMap bg1="lt1" tx1="dk1" bg2="lt2" tx2="dk2" accent1="accent1" accent2="accent2" accent3="accent3" accent4="accent4" accent5="accent5" accent6="accent6" hlink="hlink" folHlink="folHlink"/>
   <p:sldLayoutIdLst>
-    <p:sldLayoutId xmlns:r="http://schemas.openxmlformats.org/officeDocument/2006/relationships" id="2147483649" r:id="Refa7251a655f43d5"/>
-    <p:sldLayoutId xmlns:r="http://schemas.openxmlformats.org/officeDocument/2006/relationships" id="2147483650" r:id="Rbd5a86d0303a43cf"/>
-    <p:sldLayoutId xmlns:r="http://schemas.openxmlformats.org/officeDocument/2006/relationships" id="2147483651" r:id="R4c4e61da6d4f4f38"/>
-    <p:sldLayoutId xmlns:r="http://schemas.openxmlformats.org/officeDocument/2006/relationships" id="2147483652" r:id="R1fc36b5947dd4cfb"/>
-    <p:sldLayoutId xmlns:r="http://schemas.openxmlformats.org/officeDocument/2006/relationships" id="2147483653" r:id="Ra8f5841b5b3b43ad"/>
-    <p:sldLayoutId xmlns:r="http://schemas.openxmlformats.org/officeDocument/2006/relationships" id="2147483654" r:id="R7bbf1a806486429c"/>
+    <p:sldLayoutId id="2147483649" r:id="rId1"/>
+    <p:sldLayoutId id="2147483650" r:id="rId2"/>
+    <p:sldLayoutId id="2147483651" r:id="rId3"/>
+    <p:sldLayoutId id="2147483652" r:id="rId4"/>
+    <p:sldLayoutId id="2147483653" r:id="rId5"/>
+    <p:sldLayoutId id="2147483654" r:id="rId6"/>
   </p:sldLayoutIdLst>
   <p:txStyles>
     <p:titleStyle>
-      <a:lvl1pPr xmlns:a="http://schemas.openxmlformats.org/drawingml/2006/main" algn="l">
+      <a:lvl1pPr algn="l">
         <a:lnSpc>
           <a:spcPct val="90000"/>
         </a:lnSpc>
@@ -2832,7 +2834,7 @@
       </a:lvl1pPr>
     </p:titleStyle>
     <p:bodyStyle>
-      <a:lvl1pPr xmlns:a="http://schemas.openxmlformats.org/drawingml/2006/main" marL="228600" indent="-228600" algn="l">
+      <a:lvl1pPr marL="228600" indent="-228600" algn="l">
         <a:lnSpc>
           <a:spcPct val="90000"/>
         </a:lnSpc>
@@ -2849,7 +2851,7 @@
           <a:cs typeface="+mn-lt"/>
         </a:defRPr>
       </a:lvl1pPr>
-      <a:lvl2pPr xmlns:a="http://schemas.openxmlformats.org/drawingml/2006/main" marL="685800" indent="-228600" algn="l">
+      <a:lvl2pPr marL="685800" indent="-228600" algn="l">
         <a:lnSpc>
           <a:spcPct val="90000"/>
         </a:lnSpc>
@@ -2866,7 +2868,7 @@
           <a:cs typeface="+mn-lt"/>
         </a:defRPr>
       </a:lvl2pPr>
-      <a:lvl3pPr xmlns:a="http://schemas.openxmlformats.org/drawingml/2006/main" marL="1143000" indent="-228600" algn="l">
+      <a:lvl3pPr marL="1143000" indent="-228600" algn="l">
         <a:lnSpc>
           <a:spcPct val="90000"/>
         </a:lnSpc>
@@ -2883,7 +2885,7 @@
           <a:cs typeface="+mn-lt"/>
         </a:defRPr>
       </a:lvl3pPr>
-      <a:lvl4pPr xmlns:a="http://schemas.openxmlformats.org/drawingml/2006/main" marL="1600200" indent="-228600" algn="l">
+      <a:lvl4pPr marL="1600200" indent="-228600" algn="l">
         <a:lnSpc>
           <a:spcPct val="90000"/>
         </a:lnSpc>
@@ -2900,7 +2902,7 @@
           <a:cs typeface="+mn-lt"/>
         </a:defRPr>
       </a:lvl4pPr>
-      <a:lvl5pPr xmlns:a="http://schemas.openxmlformats.org/drawingml/2006/main" marL="2057400" indent="-228600" algn="l">
+      <a:lvl5pPr marL="2057400" indent="-228600" algn="l">
         <a:lnSpc>
           <a:spcPct val="90000"/>
         </a:lnSpc>
@@ -2917,7 +2919,7 @@
           <a:cs typeface="+mn-lt"/>
         </a:defRPr>
       </a:lvl5pPr>
-      <a:lvl6pPr xmlns:a="http://schemas.openxmlformats.org/drawingml/2006/main" marL="2514600" indent="-228600" algn="l">
+      <a:lvl6pPr marL="2514600" indent="-228600" algn="l">
         <a:lnSpc>
           <a:spcPct val="90000"/>
         </a:lnSpc>
@@ -2934,7 +2936,7 @@
           <a:cs typeface="+mn-lt"/>
         </a:defRPr>
       </a:lvl6pPr>
-      <a:lvl7pPr xmlns:a="http://schemas.openxmlformats.org/drawingml/2006/main" marL="2971800" indent="-228600" algn="l">
+      <a:lvl7pPr marL="2971800" indent="-228600" algn="l">
         <a:lnSpc>
           <a:spcPct val="90000"/>
         </a:lnSpc>
@@ -2951,7 +2953,7 @@
           <a:cs typeface="+mn-lt"/>
         </a:defRPr>
       </a:lvl7pPr>
-      <a:lvl8pPr xmlns:a="http://schemas.openxmlformats.org/drawingml/2006/main" marL="3429000" indent="-228600" algn="l">
+      <a:lvl8pPr marL="3429000" indent="-228600" algn="l">
         <a:lnSpc>
           <a:spcPct val="90000"/>
         </a:lnSpc>
@@ -2968,7 +2970,7 @@
           <a:cs typeface="+mn-lt"/>
         </a:defRPr>
       </a:lvl8pPr>
-      <a:lvl9pPr xmlns:a="http://schemas.openxmlformats.org/drawingml/2006/main" marL="3886200" indent="-228600" algn="l">
+      <a:lvl9pPr marL="3886200" indent="-228600" algn="l">
         <a:lnSpc>
           <a:spcPct val="90000"/>
         </a:lnSpc>
@@ -2987,7 +2989,7 @@
       </a:lvl9pPr>
     </p:bodyStyle>
     <p:otherStyle>
-      <a:lvl1pPr xmlns:a="http://schemas.openxmlformats.org/drawingml/2006/main" marL="0" algn="l">
+      <a:lvl1pPr marL="0" algn="l">
         <a:buNone/>
         <a:defRPr sz="1800">
           <a:solidFill>
@@ -2998,7 +3000,7 @@
           <a:cs typeface="+mn-lt"/>
         </a:defRPr>
       </a:lvl1pPr>
-      <a:lvl2pPr xmlns:a="http://schemas.openxmlformats.org/drawingml/2006/main" marL="457200" algn="l">
+      <a:lvl2pPr marL="457200" algn="l">
         <a:buNone/>
         <a:defRPr sz="1800">
           <a:solidFill>
@@ -3009,7 +3011,7 @@
           <a:cs typeface="+mn-lt"/>
         </a:defRPr>
       </a:lvl2pPr>
-      <a:lvl3pPr xmlns:a="http://schemas.openxmlformats.org/drawingml/2006/main" marL="914400" algn="l">
+      <a:lvl3pPr marL="914400" algn="l">
         <a:buNone/>
         <a:defRPr sz="1800">
           <a:solidFill>
@@ -3020,7 +3022,7 @@
           <a:cs typeface="+mn-lt"/>
         </a:defRPr>
       </a:lvl3pPr>
-      <a:lvl4pPr xmlns:a="http://schemas.openxmlformats.org/drawingml/2006/main" marL="1371600" algn="l">
+      <a:lvl4pPr marL="1371600" algn="l">
         <a:buNone/>
         <a:defRPr sz="1800">
           <a:solidFill>
@@ -3031,7 +3033,7 @@
           <a:cs typeface="+mn-lt"/>
         </a:defRPr>
       </a:lvl4pPr>
-      <a:lvl5pPr xmlns:a="http://schemas.openxmlformats.org/drawingml/2006/main" marL="1828800" algn="l">
+      <a:lvl5pPr marL="1828800" algn="l">
         <a:buNone/>
         <a:defRPr sz="1800">
           <a:solidFill>
@@ -3042,7 +3044,7 @@
           <a:cs typeface="+mn-lt"/>
         </a:defRPr>
       </a:lvl5pPr>
-      <a:lvl6pPr xmlns:a="http://schemas.openxmlformats.org/drawingml/2006/main" marL="2286000" algn="l">
+      <a:lvl6pPr marL="2286000" algn="l">
         <a:buNone/>
         <a:defRPr sz="1800">
           <a:solidFill>
@@ -3053,7 +3055,7 @@
           <a:cs typeface="+mn-lt"/>
         </a:defRPr>
       </a:lvl6pPr>
-      <a:lvl7pPr xmlns:a="http://schemas.openxmlformats.org/drawingml/2006/main" marL="2743200" algn="l">
+      <a:lvl7pPr marL="2743200" algn="l">
         <a:buNone/>
         <a:defRPr sz="1800">
           <a:solidFill>
@@ -3064,7 +3066,7 @@
           <a:cs typeface="+mn-lt"/>
         </a:defRPr>
       </a:lvl7pPr>
-      <a:lvl8pPr xmlns:a="http://schemas.openxmlformats.org/drawingml/2006/main" marL="3200400" algn="l">
+      <a:lvl8pPr marL="3200400" algn="l">
         <a:buNone/>
         <a:defRPr sz="1800">
           <a:solidFill>
@@ -3075,7 +3077,7 @@
           <a:cs typeface="+mn-lt"/>
         </a:defRPr>
       </a:lvl8pPr>
-      <a:lvl9pPr xmlns:a="http://schemas.openxmlformats.org/drawingml/2006/main" marL="3657600" algn="l">
+      <a:lvl9pPr marL="3657600" algn="l">
         <a:buNone/>
         <a:defRPr sz="1800">
           <a:solidFill>
@@ -3091,259 +3093,15 @@
 </p:sldMaster>
 </file>
 
-<file path=ppt/slideMasters/theme/theme2.xml><?xml version="1.0" encoding="utf-8"?>
-<a:theme xmlns:a="http://schemas.openxmlformats.org/drawingml/2006/main" name="ChatGPT">
-  <a:themeElements>
-    <a:clrScheme name="ChatGPT">
-      <a:dk1>
-        <a:srgbClr val="000000"/>
-      </a:dk1>
-      <a:lt1>
-        <a:srgbClr val="FFFFFF"/>
-      </a:lt1>
-      <a:dk2>
-        <a:srgbClr val="0E2841"/>
-      </a:dk2>
-      <a:lt2>
-        <a:srgbClr val="E8E8E8"/>
-      </a:lt2>
-      <a:accent1>
-        <a:srgbClr val="156082"/>
-      </a:accent1>
-      <a:accent2>
-        <a:srgbClr val="E97132"/>
-      </a:accent2>
-      <a:accent3>
-        <a:srgbClr val="196B24"/>
-      </a:accent3>
-      <a:accent4>
-        <a:srgbClr val="0F9ED5"/>
-      </a:accent4>
-      <a:accent5>
-        <a:srgbClr val="A02B93"/>
-      </a:accent5>
-      <a:accent6>
-        <a:srgbClr val="4EA72E"/>
-      </a:accent6>
-      <a:hlink>
-        <a:srgbClr val="467886"/>
-      </a:hlink>
-      <a:folHlink>
-        <a:srgbClr val="96607D"/>
-      </a:folHlink>
-    </a:clrScheme>
-    <a:fontScheme name="">
-      <a:majorFont>
-        <a:latin typeface="Aptos"/>
-        <a:ea typeface=""/>
-        <a:cs typeface=""/>
-      </a:majorFont>
-      <a:minorFont>
-        <a:latin typeface="Aptos"/>
-        <a:ea typeface=""/>
-        <a:cs typeface=""/>
-      </a:minorFont>
-    </a:fontScheme>
-    <a:fmtScheme name="ChatGPT">
-      <a:fillStyleLst>
-        <a:solidFill>
-          <a:schemeClr val="phClr"/>
-        </a:solidFill>
-        <a:gradFill>
-          <a:gsLst>
-            <a:gs pos="0">
-              <a:schemeClr val="phClr">
-                <a:tint val="67000"/>
-                <a:lumMod val="110000"/>
-                <a:satMod val="105000"/>
-              </a:schemeClr>
-            </a:gs>
-            <a:gs pos="50000">
-              <a:schemeClr val="phClr">
-                <a:tint val="73000"/>
-                <a:lumMod val="105000"/>
-                <a:satMod val="103000"/>
-              </a:schemeClr>
-            </a:gs>
-            <a:gs pos="100000">
-              <a:schemeClr val="phClr">
-                <a:tint val="81000"/>
-                <a:lumMod val="105000"/>
-                <a:satMod val="109000"/>
-              </a:schemeClr>
-            </a:gs>
-          </a:gsLst>
-          <a:lin ang="5400000" scaled="0"/>
-        </a:gradFill>
-        <a:gradFill>
-          <a:gsLst>
-            <a:gs pos="0">
-              <a:schemeClr val="phClr">
-                <a:tint val="94000"/>
-                <a:lumMod val="102000"/>
-                <a:satMod val="103000"/>
-              </a:schemeClr>
-            </a:gs>
-            <a:gs pos="50000">
-              <a:schemeClr val="phClr">
-                <a:shade val="100000"/>
-                <a:lumMod val="100000"/>
-                <a:satMod val="110000"/>
-              </a:schemeClr>
-            </a:gs>
-            <a:gs pos="100000">
-              <a:schemeClr val="phClr">
-                <a:shade val="78000"/>
-                <a:lumMod val="99000"/>
-                <a:satMod val="120000"/>
-              </a:schemeClr>
-            </a:gs>
-          </a:gsLst>
-          <a:lin ang="5400000" scaled="0"/>
-        </a:gradFill>
-      </a:fillStyleLst>
-      <a:lnStyleLst>
-        <a:ln w="12700">
-          <a:solidFill>
-            <a:schemeClr val="phClr"/>
-          </a:solidFill>
-          <a:prstDash val="solid"/>
-        </a:ln>
-        <a:ln w="19050">
-          <a:solidFill>
-            <a:schemeClr val="phClr"/>
-          </a:solidFill>
-          <a:prstDash val="solid"/>
-        </a:ln>
-        <a:ln w="25400">
-          <a:solidFill>
-            <a:schemeClr val="phClr"/>
-          </a:solidFill>
-          <a:prstDash val="solid"/>
-        </a:ln>
-      </a:lnStyleLst>
-      <a:effectStyleLst>
-        <a:effectStyle>
-          <a:effectLst/>
-        </a:effectStyle>
-        <a:effectStyle>
-          <a:effectLst/>
-        </a:effectStyle>
-        <a:effectStyle>
-          <a:effectLst>
-            <a:outerShdw blurRad="57150" dist="19050" dir="5400000">
-              <a:srgbClr val="000000">
-                <a:alpha val="16000"/>
-              </a:srgbClr>
-            </a:outerShdw>
-          </a:effectLst>
-        </a:effectStyle>
-        <a:effectStyle>
-          <a:effectLst>
-            <a:outerShdw blurRad="19050" dist="9525" dir="5400000">
-              <a:srgbClr val="000000">
-                <a:alpha val="6000"/>
-              </a:srgbClr>
-            </a:outerShdw>
-          </a:effectLst>
-        </a:effectStyle>
-        <a:effectStyle>
-          <a:effectLst>
-            <a:outerShdw blurRad="28575" dist="9525" dir="5400000">
-              <a:srgbClr val="000000">
-                <a:alpha val="8000"/>
-              </a:srgbClr>
-            </a:outerShdw>
-          </a:effectLst>
-        </a:effectStyle>
-        <a:effectStyle>
-          <a:effectLst>
-            <a:outerShdw blurRad="57150" dist="19050" dir="5400000">
-              <a:srgbClr val="000000">
-                <a:alpha val="10000"/>
-              </a:srgbClr>
-            </a:outerShdw>
-          </a:effectLst>
-        </a:effectStyle>
-        <a:effectStyle>
-          <a:effectLst>
-            <a:outerShdw blurRad="114300" dist="38100" dir="5400000">
-              <a:srgbClr val="000000">
-                <a:alpha val="12000"/>
-              </a:srgbClr>
-            </a:outerShdw>
-          </a:effectLst>
-        </a:effectStyle>
-        <a:effectStyle>
-          <a:effectLst>
-            <a:outerShdw blurRad="171450" dist="57150" dir="5400000">
-              <a:srgbClr val="000000">
-                <a:alpha val="16000"/>
-              </a:srgbClr>
-            </a:outerShdw>
-          </a:effectLst>
-        </a:effectStyle>
-        <a:effectStyle>
-          <a:effectLst>
-            <a:outerShdw blurRad="266700" dist="95250" dir="5400000">
-              <a:srgbClr val="000000">
-                <a:alpha val="24000"/>
-              </a:srgbClr>
-            </a:outerShdw>
-          </a:effectLst>
-        </a:effectStyle>
-      </a:effectStyleLst>
-      <a:bgFillStyleLst>
-        <a:solidFill>
-          <a:schemeClr val="phClr"/>
-        </a:solidFill>
-        <a:solidFill>
-          <a:schemeClr val="phClr">
-            <a:tint val="95000"/>
-            <a:satMod val="170000"/>
-          </a:schemeClr>
-        </a:solidFill>
-        <a:gradFill>
-          <a:gsLst>
-            <a:gs pos="0">
-              <a:schemeClr val="phClr">
-                <a:tint val="93000"/>
-                <a:shade val="98000"/>
-                <a:lumMod val="102000"/>
-                <a:satMod val="150000"/>
-              </a:schemeClr>
-            </a:gs>
-            <a:gs pos="50000">
-              <a:schemeClr val="phClr">
-                <a:tint val="98000"/>
-                <a:shade val="90000"/>
-                <a:lumMod val="103000"/>
-                <a:satMod val="130000"/>
-              </a:schemeClr>
-            </a:gs>
-            <a:gs pos="100000">
-              <a:schemeClr val="phClr">
-                <a:shade val="63000"/>
-                <a:satMod val="120000"/>
-              </a:schemeClr>
-            </a:gs>
-          </a:gsLst>
-          <a:lin ang="5400000" scaled="0"/>
-        </a:gradFill>
-      </a:bgFillStyleLst>
-    </a:fmtScheme>
-  </a:themeElements>
-</a:theme>
-</file>
-
 <file path=ppt/slides/slide1.xml><?xml version="1.0" encoding="utf-8"?>
-<p:sld xmlns:p="http://schemas.openxmlformats.org/presentationml/2006/main">
+<p:sld xmlns:a="http://schemas.openxmlformats.org/drawingml/2006/main" xmlns:r="http://schemas.openxmlformats.org/officeDocument/2006/relationships" xmlns:p="http://schemas.openxmlformats.org/presentationml/2006/main">
   <p:cSld>
     <p:bg>
       <p:bgPr>
-        <a:solidFill xmlns:a="http://schemas.openxmlformats.org/drawingml/2006/main">
+        <a:solidFill>
           <a:srgbClr val="FFFFFF"/>
         </a:solidFill>
+        <a:effectLst/>
       </p:bgPr>
     </p:bg>
     <p:spTree>
@@ -3353,69 +3111,74 @@
         <p:nvPr/>
       </p:nvGrpSpPr>
       <p:grpSpPr>
-        <a:xfrm xmlns:a="http://schemas.openxmlformats.org/drawingml/2006/main"/>
+        <a:xfrm>
+          <a:off x="0" y="0"/>
+          <a:ext cx="0" cy="0"/>
+          <a:chOff x="0" y="0"/>
+          <a:chExt cx="0" cy="0"/>
+        </a:xfrm>
       </p:grpSpPr>
       <p:pic>
         <p:nvPicPr>
-          <p:cNvPr id="7" name="">
-            <a:extLst xmlns:a="http://schemas.openxmlformats.org/drawingml/2006/main">
+          <p:cNvPr id="7" name="Picture 6">
+            <a:extLst>
               <a:ext uri="{FF2B5EF4-FFF2-40B4-BE49-F238E27FC236}">
                 <a16:creationId xmlns:a16="http://schemas.microsoft.com/office/drawing/2014/main" id="{09DECDE6-05D5-4895-A711-D95A2C6B7BCA}"/>
               </a:ext>
             </a:extLst>
           </p:cNvPr>
           <p:cNvPicPr>
-            <a:picLocks xmlns:a="http://schemas.openxmlformats.org/drawingml/2006/main" noChangeAspect="1"/>
+            <a:picLocks noChangeAspect="1"/>
           </p:cNvPicPr>
           <p:nvPr/>
         </p:nvPicPr>
         <p:blipFill>
-          <a:blip xmlns:r="http://schemas.openxmlformats.org/officeDocument/2006/relationships" xmlns:a="http://schemas.openxmlformats.org/drawingml/2006/main" r:embed="Rea9be181901148da"/>
-          <a:stretch xmlns:a="http://schemas.openxmlformats.org/drawingml/2006/main"/>
+          <a:blip r:embed="rId3"/>
+          <a:stretch/>
         </p:blipFill>
         <p:spPr>
-          <a:xfrm xmlns:a="http://schemas.openxmlformats.org/drawingml/2006/main">
+          <a:xfrm>
             <a:off x="685800" y="800100"/>
             <a:ext cx="800100" cy="800100"/>
           </a:xfrm>
-          <a:prstGeom xmlns:a="http://schemas.openxmlformats.org/drawingml/2006/main" prst="rect">
+          <a:prstGeom prst="rect">
             <a:avLst/>
           </a:prstGeom>
         </p:spPr>
       </p:pic>
       <p:sp>
         <p:nvSpPr>
-          <p:cNvPr id="2" name="">
-            <a:extLst xmlns:a="http://schemas.openxmlformats.org/drawingml/2006/main">
+          <p:cNvPr id="2" name="Rectangle 1">
+            <a:extLst>
               <a:ext uri="{FF2B5EF4-FFF2-40B4-BE49-F238E27FC236}">
                 <a16:creationId xmlns:a16="http://schemas.microsoft.com/office/drawing/2014/main" id="{315FCC8A-6F09-4748-9482-EFAC35EA8EB1}"/>
               </a:ext>
             </a:extLst>
           </p:cNvPr>
           <p:cNvSpPr>
-            <a:spLocks xmlns:a="http://schemas.openxmlformats.org/drawingml/2006/main" noGrp="1"/>
+            <a:spLocks noGrp="1"/>
           </p:cNvSpPr>
           <p:nvPr/>
         </p:nvSpPr>
         <p:spPr>
-          <a:xfrm xmlns:a="http://schemas.openxmlformats.org/drawingml/2006/main">
+          <a:xfrm>
             <a:off x="685800" y="2209800"/>
             <a:ext cx="10820400" cy="666750"/>
           </a:xfrm>
-          <a:prstGeom xmlns:a="http://schemas.openxmlformats.org/drawingml/2006/main" prst="rect">
+          <a:prstGeom prst="rect">
             <a:avLst/>
           </a:prstGeom>
-          <a:noFill xmlns:a="http://schemas.openxmlformats.org/drawingml/2006/main"/>
-          <a:ln xmlns:a="http://schemas.openxmlformats.org/drawingml/2006/main" w="0">
+          <a:noFill/>
+          <a:ln w="0">
             <a:noFill/>
             <a:prstDash val="solid"/>
           </a:ln>
         </p:spPr>
         <p:txBody>
-          <a:bodyPr xmlns:a="http://schemas.openxmlformats.org/drawingml/2006/main">
+          <a:bodyPr>
             <a:noAutofit/>
           </a:bodyPr>
-          <a:lstStyle xmlns:a="http://schemas.openxmlformats.org/drawingml/2006/main">
+          <a:lstStyle>
             <a:defPPr>
               <a:defRPr sz="3900" b="1">
                 <a:solidFill>
@@ -3427,7 +3190,7 @@
               </a:defRPr>
             </a:defPPr>
           </a:lstStyle>
-          <a:p xmlns:a="http://schemas.openxmlformats.org/drawingml/2006/main">
+          <a:p>
             <a:pPr>
               <a:defRPr sz="3900" b="1">
                 <a:solidFill>
@@ -3454,37 +3217,37 @@
       </p:sp>
       <p:sp>
         <p:nvSpPr>
-          <p:cNvPr id="3" name="">
-            <a:extLst xmlns:a="http://schemas.openxmlformats.org/drawingml/2006/main">
+          <p:cNvPr id="3" name="Rectangle 2">
+            <a:extLst>
               <a:ext uri="{FF2B5EF4-FFF2-40B4-BE49-F238E27FC236}">
                 <a16:creationId xmlns:a16="http://schemas.microsoft.com/office/drawing/2014/main" id="{755D249B-E1D0-4400-8782-39B3E005FF3D}"/>
               </a:ext>
             </a:extLst>
           </p:cNvPr>
           <p:cNvSpPr>
-            <a:spLocks xmlns:a="http://schemas.openxmlformats.org/drawingml/2006/main" noGrp="1"/>
+            <a:spLocks noGrp="1"/>
           </p:cNvSpPr>
           <p:nvPr/>
         </p:nvSpPr>
         <p:spPr>
-          <a:xfrm xmlns:a="http://schemas.openxmlformats.org/drawingml/2006/main">
+          <a:xfrm>
             <a:off x="685800" y="2933700"/>
             <a:ext cx="9525000" cy="381000"/>
           </a:xfrm>
-          <a:prstGeom xmlns:a="http://schemas.openxmlformats.org/drawingml/2006/main" prst="rect">
+          <a:prstGeom prst="rect">
             <a:avLst/>
           </a:prstGeom>
-          <a:noFill xmlns:a="http://schemas.openxmlformats.org/drawingml/2006/main"/>
-          <a:ln xmlns:a="http://schemas.openxmlformats.org/drawingml/2006/main" w="0">
+          <a:noFill/>
+          <a:ln w="0">
             <a:noFill/>
             <a:prstDash val="solid"/>
           </a:ln>
         </p:spPr>
         <p:txBody>
-          <a:bodyPr xmlns:a="http://schemas.openxmlformats.org/drawingml/2006/main">
+          <a:bodyPr>
             <a:noAutofit/>
           </a:bodyPr>
-          <a:lstStyle xmlns:a="http://schemas.openxmlformats.org/drawingml/2006/main">
+          <a:lstStyle>
             <a:defPPr>
               <a:defRPr sz="1650" b="0">
                 <a:solidFill>
@@ -3496,7 +3259,7 @@
               </a:defRPr>
             </a:defPPr>
           </a:lstStyle>
-          <a:p xmlns:a="http://schemas.openxmlformats.org/drawingml/2006/main">
+          <a:p>
             <a:pPr>
               <a:defRPr sz="1650" b="0">
                 <a:solidFill>
@@ -3523,68 +3286,75 @@
       </p:sp>
       <p:sp>
         <p:nvSpPr>
-          <p:cNvPr id="4" name="">
-            <a:extLst xmlns:a="http://schemas.openxmlformats.org/drawingml/2006/main">
+          <p:cNvPr id="4" name="Rectangle 3">
+            <a:extLst>
               <a:ext uri="{FF2B5EF4-FFF2-40B4-BE49-F238E27FC236}">
                 <a16:creationId xmlns:a16="http://schemas.microsoft.com/office/drawing/2014/main" id="{B7F877B4-FA49-412C-9F5A-2A6A250C1DA2}"/>
               </a:ext>
             </a:extLst>
           </p:cNvPr>
           <p:cNvSpPr>
-            <a:spLocks xmlns:a="http://schemas.openxmlformats.org/drawingml/2006/main" noGrp="1"/>
+            <a:spLocks noGrp="1"/>
           </p:cNvSpPr>
           <p:nvPr/>
         </p:nvSpPr>
         <p:spPr>
-          <a:xfrm xmlns:a="http://schemas.openxmlformats.org/drawingml/2006/main">
+          <a:xfrm>
             <a:off x="685800" y="3619500"/>
             <a:ext cx="2857500" cy="19050"/>
           </a:xfrm>
-          <a:prstGeom xmlns:a="http://schemas.openxmlformats.org/drawingml/2006/main" prst="rect">
+          <a:prstGeom prst="rect">
             <a:avLst/>
           </a:prstGeom>
-          <a:solidFill xmlns:a="http://schemas.openxmlformats.org/drawingml/2006/main">
+          <a:solidFill>
             <a:srgbClr val="0E7C57"/>
           </a:solidFill>
-          <a:ln xmlns:a="http://schemas.openxmlformats.org/drawingml/2006/main" w="0">
+          <a:ln w="0">
             <a:noFill/>
             <a:prstDash val="solid"/>
           </a:ln>
         </p:spPr>
-      </p:sp>
-      <p:sp>
-        <p:nvSpPr>
-          <p:cNvPr id="5" name="">
-            <a:extLst xmlns:a="http://schemas.openxmlformats.org/drawingml/2006/main">
+        <p:txBody>
+          <a:bodyPr/>
+          <a:lstStyle/>
+          <a:p>
+            <a:endParaRPr lang="en-US"/>
+          </a:p>
+        </p:txBody>
+      </p:sp>
+      <p:sp>
+        <p:nvSpPr>
+          <p:cNvPr id="5" name="Rectangle 4">
+            <a:extLst>
               <a:ext uri="{FF2B5EF4-FFF2-40B4-BE49-F238E27FC236}">
                 <a16:creationId xmlns:a16="http://schemas.microsoft.com/office/drawing/2014/main" id="{CD450E86-FB57-459C-B5FD-CEB2A48962B9}"/>
               </a:ext>
             </a:extLst>
           </p:cNvPr>
           <p:cNvSpPr>
-            <a:spLocks xmlns:a="http://schemas.openxmlformats.org/drawingml/2006/main" noGrp="1"/>
+            <a:spLocks noGrp="1"/>
           </p:cNvSpPr>
           <p:nvPr/>
         </p:nvSpPr>
         <p:spPr>
-          <a:xfrm xmlns:a="http://schemas.openxmlformats.org/drawingml/2006/main">
+          <a:xfrm>
             <a:off x="685800" y="3829050"/>
             <a:ext cx="10820400" cy="266700"/>
           </a:xfrm>
-          <a:prstGeom xmlns:a="http://schemas.openxmlformats.org/drawingml/2006/main" prst="rect">
+          <a:prstGeom prst="rect">
             <a:avLst/>
           </a:prstGeom>
-          <a:noFill xmlns:a="http://schemas.openxmlformats.org/drawingml/2006/main"/>
-          <a:ln xmlns:a="http://schemas.openxmlformats.org/drawingml/2006/main" w="0">
+          <a:noFill/>
+          <a:ln w="0">
             <a:noFill/>
             <a:prstDash val="solid"/>
           </a:ln>
         </p:spPr>
         <p:txBody>
-          <a:bodyPr xmlns:a="http://schemas.openxmlformats.org/drawingml/2006/main">
+          <a:bodyPr>
             <a:noAutofit/>
           </a:bodyPr>
-          <a:lstStyle xmlns:a="http://schemas.openxmlformats.org/drawingml/2006/main">
+          <a:lstStyle>
             <a:defPPr>
               <a:defRPr sz="1275" b="0">
                 <a:solidFill>
@@ -3596,7 +3366,7 @@
               </a:defRPr>
             </a:defPPr>
           </a:lstStyle>
-          <a:p xmlns:a="http://schemas.openxmlformats.org/drawingml/2006/main">
+          <a:p>
             <a:pPr>
               <a:defRPr sz="1275" b="0">
                 <a:solidFill>
@@ -3623,37 +3393,37 @@
       </p:sp>
       <p:sp>
         <p:nvSpPr>
-          <p:cNvPr id="6" name="">
-            <a:extLst xmlns:a="http://schemas.openxmlformats.org/drawingml/2006/main">
+          <p:cNvPr id="6" name="Rectangle 5">
+            <a:extLst>
               <a:ext uri="{FF2B5EF4-FFF2-40B4-BE49-F238E27FC236}">
                 <a16:creationId xmlns:a16="http://schemas.microsoft.com/office/drawing/2014/main" id="{C93D6AFF-ECD0-411E-916C-FD2C3D88A993}"/>
               </a:ext>
             </a:extLst>
           </p:cNvPr>
           <p:cNvSpPr>
-            <a:spLocks xmlns:a="http://schemas.openxmlformats.org/drawingml/2006/main" noGrp="1"/>
+            <a:spLocks noGrp="1"/>
           </p:cNvSpPr>
           <p:nvPr/>
         </p:nvSpPr>
         <p:spPr>
-          <a:xfrm xmlns:a="http://schemas.openxmlformats.org/drawingml/2006/main">
+          <a:xfrm>
             <a:off x="685800" y="4114800"/>
             <a:ext cx="10820400" cy="304800"/>
           </a:xfrm>
-          <a:prstGeom xmlns:a="http://schemas.openxmlformats.org/drawingml/2006/main" prst="rect">
+          <a:prstGeom prst="rect">
             <a:avLst/>
           </a:prstGeom>
-          <a:noFill xmlns:a="http://schemas.openxmlformats.org/drawingml/2006/main"/>
-          <a:ln xmlns:a="http://schemas.openxmlformats.org/drawingml/2006/main" w="0">
+          <a:noFill/>
+          <a:ln w="0">
             <a:noFill/>
             <a:prstDash val="solid"/>
           </a:ln>
         </p:spPr>
         <p:txBody>
-          <a:bodyPr xmlns:a="http://schemas.openxmlformats.org/drawingml/2006/main">
+          <a:bodyPr>
             <a:noAutofit/>
           </a:bodyPr>
-          <a:lstStyle xmlns:a="http://schemas.openxmlformats.org/drawingml/2006/main">
+          <a:lstStyle>
             <a:defPPr>
               <a:defRPr sz="1575" b="1">
                 <a:solidFill>
@@ -3665,7 +3435,7 @@
               </a:defRPr>
             </a:defPPr>
           </a:lstStyle>
-          <a:p xmlns:a="http://schemas.openxmlformats.org/drawingml/2006/main">
+          <a:p>
             <a:pPr>
               <a:defRPr sz="1575" b="1">
                 <a:solidFill>
@@ -3697,17 +3467,21 @@
       </p:ext>
     </p:extLst>
   </p:cSld>
+  <p:clrMapOvr>
+    <a:masterClrMapping/>
+  </p:clrMapOvr>
 </p:sld>
 </file>
 
 <file path=ppt/slides/slide10.xml><?xml version="1.0" encoding="utf-8"?>
-<p:sld xmlns:p="http://schemas.openxmlformats.org/presentationml/2006/main">
+<p:sld xmlns:a="http://schemas.openxmlformats.org/drawingml/2006/main" xmlns:r="http://schemas.openxmlformats.org/officeDocument/2006/relationships" xmlns:p="http://schemas.openxmlformats.org/presentationml/2006/main">
   <p:cSld>
     <p:bg>
       <p:bgPr>
-        <a:solidFill xmlns:a="http://schemas.openxmlformats.org/drawingml/2006/main">
+        <a:solidFill>
           <a:srgbClr val="FFFFFF"/>
         </a:solidFill>
+        <a:effectLst/>
       </p:bgPr>
     </p:bg>
     <p:spTree>
@@ -3717,41 +3491,46 @@
         <p:nvPr/>
       </p:nvGrpSpPr>
       <p:grpSpPr>
-        <a:xfrm xmlns:a="http://schemas.openxmlformats.org/drawingml/2006/main"/>
+        <a:xfrm>
+          <a:off x="0" y="0"/>
+          <a:ext cx="0" cy="0"/>
+          <a:chOff x="0" y="0"/>
+          <a:chExt cx="0" cy="0"/>
+        </a:xfrm>
       </p:grpSpPr>
       <p:sp>
         <p:nvSpPr>
-          <p:cNvPr id="9" name="">
-            <a:extLst xmlns:a="http://schemas.openxmlformats.org/drawingml/2006/main">
+          <p:cNvPr id="9" name="Rectangle 8">
+            <a:extLst>
               <a:ext uri="{FF2B5EF4-FFF2-40B4-BE49-F238E27FC236}">
                 <a16:creationId xmlns:a16="http://schemas.microsoft.com/office/drawing/2014/main" id="{7201B7E9-BFA3-40CA-953E-D70D50EBE5BB}"/>
               </a:ext>
             </a:extLst>
           </p:cNvPr>
           <p:cNvSpPr>
-            <a:spLocks xmlns:a="http://schemas.openxmlformats.org/drawingml/2006/main" noGrp="1"/>
+            <a:spLocks noGrp="1"/>
           </p:cNvSpPr>
           <p:nvPr/>
         </p:nvSpPr>
         <p:spPr>
-          <a:xfrm xmlns:a="http://schemas.openxmlformats.org/drawingml/2006/main">
+          <a:xfrm>
             <a:off x="9906000" y="6438900"/>
             <a:ext cx="1600200" cy="228600"/>
           </a:xfrm>
-          <a:prstGeom xmlns:a="http://schemas.openxmlformats.org/drawingml/2006/main" prst="rect">
+          <a:prstGeom prst="rect">
             <a:avLst/>
           </a:prstGeom>
-          <a:noFill xmlns:a="http://schemas.openxmlformats.org/drawingml/2006/main"/>
-          <a:ln xmlns:a="http://schemas.openxmlformats.org/drawingml/2006/main" w="0">
+          <a:noFill/>
+          <a:ln w="0">
             <a:noFill/>
             <a:prstDash val="solid"/>
           </a:ln>
         </p:spPr>
         <p:txBody>
-          <a:bodyPr xmlns:a="http://schemas.openxmlformats.org/drawingml/2006/main">
+          <a:bodyPr>
             <a:noAutofit/>
           </a:bodyPr>
-          <a:lstStyle xmlns:a="http://schemas.openxmlformats.org/drawingml/2006/main">
+          <a:lstStyle>
             <a:defPPr>
               <a:defRPr sz="975" b="0">
                 <a:solidFill>
@@ -3763,7 +3542,7 @@
               </a:defRPr>
             </a:defPPr>
           </a:lstStyle>
-          <a:p xmlns:a="http://schemas.openxmlformats.org/drawingml/2006/main">
+          <a:p>
             <a:pPr>
               <a:defRPr sz="975" b="0">
                 <a:solidFill>
@@ -3791,36 +3570,36 @@
       <p:sp>
         <p:nvSpPr>
           <p:cNvPr id="2" name="slide-title">
-            <a:extLst xmlns:a="http://schemas.openxmlformats.org/drawingml/2006/main">
+            <a:extLst>
               <a:ext uri="{FF2B5EF4-FFF2-40B4-BE49-F238E27FC236}">
                 <a16:creationId xmlns:a16="http://schemas.microsoft.com/office/drawing/2014/main" id="{16D3828C-E523-4DA7-A1BA-E8E8F8B73A50}"/>
               </a:ext>
             </a:extLst>
           </p:cNvPr>
           <p:cNvSpPr>
-            <a:spLocks xmlns:a="http://schemas.openxmlformats.org/drawingml/2006/main" noGrp="1"/>
+            <a:spLocks noGrp="1"/>
           </p:cNvSpPr>
           <p:nvPr/>
         </p:nvSpPr>
         <p:spPr>
-          <a:xfrm xmlns:a="http://schemas.openxmlformats.org/drawingml/2006/main">
+          <a:xfrm>
             <a:off x="685800" y="495300"/>
             <a:ext cx="10820400" cy="514350"/>
           </a:xfrm>
-          <a:prstGeom xmlns:a="http://schemas.openxmlformats.org/drawingml/2006/main" prst="rect">
+          <a:prstGeom prst="rect">
             <a:avLst/>
           </a:prstGeom>
-          <a:noFill xmlns:a="http://schemas.openxmlformats.org/drawingml/2006/main"/>
-          <a:ln xmlns:a="http://schemas.openxmlformats.org/drawingml/2006/main" w="0">
+          <a:noFill/>
+          <a:ln w="0">
             <a:noFill/>
             <a:prstDash val="solid"/>
           </a:ln>
         </p:spPr>
         <p:txBody>
-          <a:bodyPr xmlns:a="http://schemas.openxmlformats.org/drawingml/2006/main">
+          <a:bodyPr>
             <a:noAutofit/>
           </a:bodyPr>
-          <a:lstStyle xmlns:a="http://schemas.openxmlformats.org/drawingml/2006/main">
+          <a:lstStyle>
             <a:defPPr>
               <a:defRPr sz="3000" b="1">
                 <a:solidFill>
@@ -3832,7 +3611,7 @@
               </a:defRPr>
             </a:defPPr>
           </a:lstStyle>
-          <a:p xmlns:a="http://schemas.openxmlformats.org/drawingml/2006/main">
+          <a:p>
             <a:pPr>
               <a:defRPr sz="3000" b="1">
                 <a:solidFill>
@@ -3860,36 +3639,36 @@
       <p:sp>
         <p:nvSpPr>
           <p:cNvPr id="3" name="slide-lead">
-            <a:extLst xmlns:a="http://schemas.openxmlformats.org/drawingml/2006/main">
+            <a:extLst>
               <a:ext uri="{FF2B5EF4-FFF2-40B4-BE49-F238E27FC236}">
                 <a16:creationId xmlns:a16="http://schemas.microsoft.com/office/drawing/2014/main" id="{3A2569DB-B638-402D-BFCB-D41196E004F3}"/>
               </a:ext>
             </a:extLst>
           </p:cNvPr>
           <p:cNvSpPr>
-            <a:spLocks xmlns:a="http://schemas.openxmlformats.org/drawingml/2006/main" noGrp="1"/>
+            <a:spLocks noGrp="1"/>
           </p:cNvSpPr>
           <p:nvPr/>
         </p:nvSpPr>
         <p:spPr>
-          <a:xfrm xmlns:a="http://schemas.openxmlformats.org/drawingml/2006/main">
+          <a:xfrm>
             <a:off x="685800" y="1066800"/>
             <a:ext cx="10820400" cy="323850"/>
           </a:xfrm>
-          <a:prstGeom xmlns:a="http://schemas.openxmlformats.org/drawingml/2006/main" prst="rect">
+          <a:prstGeom prst="rect">
             <a:avLst/>
           </a:prstGeom>
-          <a:noFill xmlns:a="http://schemas.openxmlformats.org/drawingml/2006/main"/>
-          <a:ln xmlns:a="http://schemas.openxmlformats.org/drawingml/2006/main" w="0">
+          <a:noFill/>
+          <a:ln w="0">
             <a:noFill/>
             <a:prstDash val="solid"/>
           </a:ln>
         </p:spPr>
         <p:txBody>
-          <a:bodyPr xmlns:a="http://schemas.openxmlformats.org/drawingml/2006/main">
+          <a:bodyPr>
             <a:noAutofit/>
           </a:bodyPr>
-          <a:lstStyle xmlns:a="http://schemas.openxmlformats.org/drawingml/2006/main">
+          <a:lstStyle>
             <a:defPPr>
               <a:defRPr sz="1575" b="0">
                 <a:solidFill>
@@ -3901,7 +3680,7 @@
               </a:defRPr>
             </a:defPPr>
           </a:lstStyle>
-          <a:p xmlns:a="http://schemas.openxmlformats.org/drawingml/2006/main">
+          <a:p>
             <a:pPr>
               <a:defRPr sz="1575" b="0">
                 <a:solidFill>
@@ -3929,67 +3708,74 @@
       <p:sp>
         <p:nvSpPr>
           <p:cNvPr id="4" name="title-rule">
-            <a:extLst xmlns:a="http://schemas.openxmlformats.org/drawingml/2006/main">
+            <a:extLst>
               <a:ext uri="{FF2B5EF4-FFF2-40B4-BE49-F238E27FC236}">
                 <a16:creationId xmlns:a16="http://schemas.microsoft.com/office/drawing/2014/main" id="{207542C6-6C0D-4B25-B772-F3845AE5E4AB}"/>
               </a:ext>
             </a:extLst>
           </p:cNvPr>
           <p:cNvSpPr>
-            <a:spLocks xmlns:a="http://schemas.openxmlformats.org/drawingml/2006/main" noGrp="1"/>
+            <a:spLocks noGrp="1"/>
           </p:cNvSpPr>
           <p:nvPr/>
         </p:nvSpPr>
         <p:spPr>
-          <a:xfrm xmlns:a="http://schemas.openxmlformats.org/drawingml/2006/main">
+          <a:xfrm>
             <a:off x="685800" y="1504950"/>
             <a:ext cx="10820400" cy="9525"/>
           </a:xfrm>
-          <a:prstGeom xmlns:a="http://schemas.openxmlformats.org/drawingml/2006/main" prst="rect">
+          <a:prstGeom prst="rect">
             <a:avLst/>
           </a:prstGeom>
-          <a:solidFill xmlns:a="http://schemas.openxmlformats.org/drawingml/2006/main">
+          <a:solidFill>
             <a:srgbClr val="E1E5EA"/>
           </a:solidFill>
-          <a:ln xmlns:a="http://schemas.openxmlformats.org/drawingml/2006/main" w="0">
+          <a:ln w="0">
             <a:noFill/>
             <a:prstDash val="solid"/>
           </a:ln>
         </p:spPr>
-      </p:sp>
-      <p:sp>
-        <p:nvSpPr>
-          <p:cNvPr id="5" name="">
-            <a:extLst xmlns:a="http://schemas.openxmlformats.org/drawingml/2006/main">
+        <p:txBody>
+          <a:bodyPr/>
+          <a:lstStyle/>
+          <a:p>
+            <a:endParaRPr lang="en-US"/>
+          </a:p>
+        </p:txBody>
+      </p:sp>
+      <p:sp>
+        <p:nvSpPr>
+          <p:cNvPr id="5" name="Rectangle 4">
+            <a:extLst>
               <a:ext uri="{FF2B5EF4-FFF2-40B4-BE49-F238E27FC236}">
                 <a16:creationId xmlns:a16="http://schemas.microsoft.com/office/drawing/2014/main" id="{8E66396F-904F-4410-A714-44AE0B1CF44B}"/>
               </a:ext>
             </a:extLst>
           </p:cNvPr>
           <p:cNvSpPr>
-            <a:spLocks xmlns:a="http://schemas.openxmlformats.org/drawingml/2006/main" noGrp="1"/>
+            <a:spLocks noGrp="1"/>
           </p:cNvSpPr>
           <p:nvPr/>
         </p:nvSpPr>
         <p:spPr>
-          <a:xfrm xmlns:a="http://schemas.openxmlformats.org/drawingml/2006/main">
+          <a:xfrm>
             <a:off x="685800" y="1771650"/>
             <a:ext cx="10820400" cy="266700"/>
           </a:xfrm>
-          <a:prstGeom xmlns:a="http://schemas.openxmlformats.org/drawingml/2006/main" prst="rect">
+          <a:prstGeom prst="rect">
             <a:avLst/>
           </a:prstGeom>
-          <a:noFill xmlns:a="http://schemas.openxmlformats.org/drawingml/2006/main"/>
-          <a:ln xmlns:a="http://schemas.openxmlformats.org/drawingml/2006/main" w="0">
+          <a:noFill/>
+          <a:ln w="0">
             <a:noFill/>
             <a:prstDash val="solid"/>
           </a:ln>
         </p:spPr>
         <p:txBody>
-          <a:bodyPr xmlns:a="http://schemas.openxmlformats.org/drawingml/2006/main">
+          <a:bodyPr>
             <a:noAutofit/>
           </a:bodyPr>
-          <a:lstStyle xmlns:a="http://schemas.openxmlformats.org/drawingml/2006/main">
+          <a:lstStyle>
             <a:defPPr>
               <a:defRPr sz="1275" b="1">
                 <a:solidFill>
@@ -4001,7 +3787,7 @@
               </a:defRPr>
             </a:defPPr>
           </a:lstStyle>
-          <a:p xmlns:a="http://schemas.openxmlformats.org/drawingml/2006/main">
+          <a:p>
             <a:pPr>
               <a:defRPr sz="1275" b="1">
                 <a:solidFill>
@@ -4028,37 +3814,37 @@
       </p:sp>
       <p:sp>
         <p:nvSpPr>
-          <p:cNvPr id="6" name="">
-            <a:extLst xmlns:a="http://schemas.openxmlformats.org/drawingml/2006/main">
+          <p:cNvPr id="6" name="Rectangle 5">
+            <a:extLst>
               <a:ext uri="{FF2B5EF4-FFF2-40B4-BE49-F238E27FC236}">
                 <a16:creationId xmlns:a16="http://schemas.microsoft.com/office/drawing/2014/main" id="{1E0D7280-3947-4607-9201-4AA2304A7AE9}"/>
               </a:ext>
             </a:extLst>
           </p:cNvPr>
           <p:cNvSpPr>
-            <a:spLocks xmlns:a="http://schemas.openxmlformats.org/drawingml/2006/main" noGrp="1"/>
+            <a:spLocks noGrp="1"/>
           </p:cNvSpPr>
           <p:nvPr/>
         </p:nvSpPr>
         <p:spPr>
-          <a:xfrm xmlns:a="http://schemas.openxmlformats.org/drawingml/2006/main">
+          <a:xfrm>
             <a:off x="685800" y="2133600"/>
             <a:ext cx="4953000" cy="3619500"/>
           </a:xfrm>
-          <a:prstGeom xmlns:a="http://schemas.openxmlformats.org/drawingml/2006/main" prst="rect">
+          <a:prstGeom prst="rect">
             <a:avLst/>
           </a:prstGeom>
-          <a:noFill xmlns:a="http://schemas.openxmlformats.org/drawingml/2006/main"/>
-          <a:ln xmlns:a="http://schemas.openxmlformats.org/drawingml/2006/main" w="0">
+          <a:noFill/>
+          <a:ln w="0">
             <a:noFill/>
             <a:prstDash val="solid"/>
           </a:ln>
         </p:spPr>
         <p:txBody>
-          <a:bodyPr xmlns:a="http://schemas.openxmlformats.org/drawingml/2006/main">
+          <a:bodyPr>
             <a:noAutofit/>
           </a:bodyPr>
-          <a:lstStyle xmlns:a="http://schemas.openxmlformats.org/drawingml/2006/main">
+          <a:lstStyle>
             <a:defPPr>
               <a:defRPr sz="1275">
                 <a:solidFill>
@@ -4070,7 +3856,7 @@
               </a:defRPr>
             </a:defPPr>
           </a:lstStyle>
-          <a:p xmlns:a="http://schemas.openxmlformats.org/drawingml/2006/main">
+          <a:p>
             <a:pPr marL="228600" indent="-114300">
               <a:spcAft>
                 <a:spcPts val="1600"/>
@@ -4097,7 +3883,7 @@
               <a:t>Distances are calculated as straight lines; road routing and live traffic are not included.</a:t>
             </a:r>
           </a:p>
-          <a:p xmlns:a="http://schemas.openxmlformats.org/drawingml/2006/main">
+          <a:p>
             <a:pPr marL="228600" indent="-114300">
               <a:spcAft>
                 <a:spcPts val="1600"/>
@@ -4124,7 +3910,7 @@
               <a:t>A single average travel speed is applied to all volunteers.</a:t>
             </a:r>
           </a:p>
-          <a:p xmlns:a="http://schemas.openxmlformats.org/drawingml/2006/main">
+          <a:p>
             <a:pPr marL="228600" indent="-114300">
               <a:spcAft>
                 <a:spcPts val="1600"/>
@@ -4151,7 +3937,7 @@
               <a:t>Locations are stored as coordinates; there is no map input or address lookup.</a:t>
             </a:r>
           </a:p>
-          <a:p xmlns:a="http://schemas.openxmlformats.org/drawingml/2006/main">
+          <a:p>
             <a:pPr marL="228600" indent="-114300">
               <a:spcAft>
                 <a:spcPts val="1600"/>
@@ -4182,37 +3968,37 @@
       </p:sp>
       <p:sp>
         <p:nvSpPr>
-          <p:cNvPr id="7" name="">
-            <a:extLst xmlns:a="http://schemas.openxmlformats.org/drawingml/2006/main">
+          <p:cNvPr id="7" name="Rectangle 6">
+            <a:extLst>
               <a:ext uri="{FF2B5EF4-FFF2-40B4-BE49-F238E27FC236}">
                 <a16:creationId xmlns:a16="http://schemas.microsoft.com/office/drawing/2014/main" id="{D083D40C-D37F-464F-8663-5CD266E5350E}"/>
               </a:ext>
             </a:extLst>
           </p:cNvPr>
           <p:cNvSpPr>
-            <a:spLocks xmlns:a="http://schemas.openxmlformats.org/drawingml/2006/main" noGrp="1"/>
+            <a:spLocks noGrp="1"/>
           </p:cNvSpPr>
           <p:nvPr/>
         </p:nvSpPr>
         <p:spPr>
-          <a:xfrm xmlns:a="http://schemas.openxmlformats.org/drawingml/2006/main">
+          <a:xfrm>
             <a:off x="6477000" y="1771650"/>
             <a:ext cx="5029200" cy="266700"/>
           </a:xfrm>
-          <a:prstGeom xmlns:a="http://schemas.openxmlformats.org/drawingml/2006/main" prst="rect">
+          <a:prstGeom prst="rect">
             <a:avLst/>
           </a:prstGeom>
-          <a:noFill xmlns:a="http://schemas.openxmlformats.org/drawingml/2006/main"/>
-          <a:ln xmlns:a="http://schemas.openxmlformats.org/drawingml/2006/main" w="0">
+          <a:noFill/>
+          <a:ln w="0">
             <a:noFill/>
             <a:prstDash val="solid"/>
           </a:ln>
         </p:spPr>
         <p:txBody>
-          <a:bodyPr xmlns:a="http://schemas.openxmlformats.org/drawingml/2006/main">
+          <a:bodyPr>
             <a:noAutofit/>
           </a:bodyPr>
-          <a:lstStyle xmlns:a="http://schemas.openxmlformats.org/drawingml/2006/main">
+          <a:lstStyle>
             <a:defPPr>
               <a:defRPr sz="1275" b="1">
                 <a:solidFill>
@@ -4224,7 +4010,7 @@
               </a:defRPr>
             </a:defPPr>
           </a:lstStyle>
-          <a:p xmlns:a="http://schemas.openxmlformats.org/drawingml/2006/main">
+          <a:p>
             <a:pPr>
               <a:defRPr sz="1275" b="1">
                 <a:solidFill>
@@ -4251,37 +4037,37 @@
       </p:sp>
       <p:sp>
         <p:nvSpPr>
-          <p:cNvPr id="8" name="">
-            <a:extLst xmlns:a="http://schemas.openxmlformats.org/drawingml/2006/main">
+          <p:cNvPr id="8" name="Rectangle 7">
+            <a:extLst>
               <a:ext uri="{FF2B5EF4-FFF2-40B4-BE49-F238E27FC236}">
                 <a16:creationId xmlns:a16="http://schemas.microsoft.com/office/drawing/2014/main" id="{658C11AA-4C3B-464F-9204-C06F65BA4554}"/>
               </a:ext>
             </a:extLst>
           </p:cNvPr>
           <p:cNvSpPr>
-            <a:spLocks xmlns:a="http://schemas.openxmlformats.org/drawingml/2006/main" noGrp="1"/>
+            <a:spLocks noGrp="1"/>
           </p:cNvSpPr>
           <p:nvPr/>
         </p:nvSpPr>
         <p:spPr>
-          <a:xfrm xmlns:a="http://schemas.openxmlformats.org/drawingml/2006/main">
+          <a:xfrm>
             <a:off x="6477000" y="2133600"/>
             <a:ext cx="5029200" cy="3619500"/>
           </a:xfrm>
-          <a:prstGeom xmlns:a="http://schemas.openxmlformats.org/drawingml/2006/main" prst="rect">
+          <a:prstGeom prst="rect">
             <a:avLst/>
           </a:prstGeom>
-          <a:noFill xmlns:a="http://schemas.openxmlformats.org/drawingml/2006/main"/>
-          <a:ln xmlns:a="http://schemas.openxmlformats.org/drawingml/2006/main" w="0">
+          <a:noFill/>
+          <a:ln w="0">
             <a:noFill/>
             <a:prstDash val="solid"/>
           </a:ln>
         </p:spPr>
         <p:txBody>
-          <a:bodyPr xmlns:a="http://schemas.openxmlformats.org/drawingml/2006/main">
+          <a:bodyPr>
             <a:noAutofit/>
           </a:bodyPr>
-          <a:lstStyle xmlns:a="http://schemas.openxmlformats.org/drawingml/2006/main">
+          <a:lstStyle>
             <a:defPPr>
               <a:defRPr sz="1275">
                 <a:solidFill>
@@ -4293,7 +4079,7 @@
               </a:defRPr>
             </a:defPPr>
           </a:lstStyle>
-          <a:p xmlns:a="http://schemas.openxmlformats.org/drawingml/2006/main">
+          <a:p>
             <a:pPr marL="228600" indent="-114300">
               <a:spcAft>
                 <a:spcPts val="1600"/>
@@ -4320,7 +4106,7 @@
               <a:t>Route aware arrival estimates using a mapping service.</a:t>
             </a:r>
           </a:p>
-          <a:p xmlns:a="http://schemas.openxmlformats.org/drawingml/2006/main">
+          <a:p>
             <a:pPr marL="228600" indent="-114300">
               <a:spcAft>
                 <a:spcPts val="1600"/>
@@ -4347,7 +4133,7 @@
               <a:t>Map based location entry and per vehicle travel speeds.</a:t>
             </a:r>
           </a:p>
-          <a:p xmlns:a="http://schemas.openxmlformats.org/drawingml/2006/main">
+          <a:p>
             <a:pPr marL="228600" indent="-114300">
               <a:spcAft>
                 <a:spcPts val="1600"/>
@@ -4374,7 +4160,7 @@
               <a:t>A reliability score for volunteers derived from accept, decline and completion history.</a:t>
             </a:r>
           </a:p>
-          <a:p xmlns:a="http://schemas.openxmlformats.org/drawingml/2006/main">
+          <a:p>
             <a:pPr marL="228600" indent="-114300">
               <a:spcAft>
                 <a:spcPts val="1600"/>
@@ -4410,17 +4196,21 @@
       </p:ext>
     </p:extLst>
   </p:cSld>
+  <p:clrMapOvr>
+    <a:masterClrMapping/>
+  </p:clrMapOvr>
 </p:sld>
 </file>
 
 <file path=ppt/slides/slide2.xml><?xml version="1.0" encoding="utf-8"?>
-<p:sld xmlns:p="http://schemas.openxmlformats.org/presentationml/2006/main">
+<p:sld xmlns:a="http://schemas.openxmlformats.org/drawingml/2006/main" xmlns:r="http://schemas.openxmlformats.org/officeDocument/2006/relationships" xmlns:p="http://schemas.openxmlformats.org/presentationml/2006/main">
   <p:cSld>
     <p:bg>
       <p:bgPr>
-        <a:solidFill xmlns:a="http://schemas.openxmlformats.org/drawingml/2006/main">
+        <a:solidFill>
           <a:srgbClr val="FFFFFF"/>
         </a:solidFill>
+        <a:effectLst/>
       </p:bgPr>
     </p:bg>
     <p:spTree>
@@ -4430,41 +4220,46 @@
         <p:nvPr/>
       </p:nvGrpSpPr>
       <p:grpSpPr>
-        <a:xfrm xmlns:a="http://schemas.openxmlformats.org/drawingml/2006/main"/>
+        <a:xfrm>
+          <a:off x="0" y="0"/>
+          <a:ext cx="0" cy="0"/>
+          <a:chOff x="0" y="0"/>
+          <a:chExt cx="0" cy="0"/>
+        </a:xfrm>
       </p:grpSpPr>
       <p:sp>
         <p:nvSpPr>
-          <p:cNvPr id="6" name="">
-            <a:extLst xmlns:a="http://schemas.openxmlformats.org/drawingml/2006/main">
+          <p:cNvPr id="6" name="Rectangle 5">
+            <a:extLst>
               <a:ext uri="{FF2B5EF4-FFF2-40B4-BE49-F238E27FC236}">
                 <a16:creationId xmlns:a16="http://schemas.microsoft.com/office/drawing/2014/main" id="{72765F90-4ACA-40C8-B2C1-30FAF59637D4}"/>
               </a:ext>
             </a:extLst>
           </p:cNvPr>
           <p:cNvSpPr>
-            <a:spLocks xmlns:a="http://schemas.openxmlformats.org/drawingml/2006/main" noGrp="1"/>
+            <a:spLocks noGrp="1"/>
           </p:cNvSpPr>
           <p:nvPr/>
         </p:nvSpPr>
         <p:spPr>
-          <a:xfrm xmlns:a="http://schemas.openxmlformats.org/drawingml/2006/main">
+          <a:xfrm>
             <a:off x="9906000" y="6438900"/>
             <a:ext cx="1600200" cy="228600"/>
           </a:xfrm>
-          <a:prstGeom xmlns:a="http://schemas.openxmlformats.org/drawingml/2006/main" prst="rect">
+          <a:prstGeom prst="rect">
             <a:avLst/>
           </a:prstGeom>
-          <a:noFill xmlns:a="http://schemas.openxmlformats.org/drawingml/2006/main"/>
-          <a:ln xmlns:a="http://schemas.openxmlformats.org/drawingml/2006/main" w="0">
+          <a:noFill/>
+          <a:ln w="0">
             <a:noFill/>
             <a:prstDash val="solid"/>
           </a:ln>
         </p:spPr>
         <p:txBody>
-          <a:bodyPr xmlns:a="http://schemas.openxmlformats.org/drawingml/2006/main">
+          <a:bodyPr>
             <a:noAutofit/>
           </a:bodyPr>
-          <a:lstStyle xmlns:a="http://schemas.openxmlformats.org/drawingml/2006/main">
+          <a:lstStyle>
             <a:defPPr>
               <a:defRPr sz="975" b="0">
                 <a:solidFill>
@@ -4476,7 +4271,7 @@
               </a:defRPr>
             </a:defPPr>
           </a:lstStyle>
-          <a:p xmlns:a="http://schemas.openxmlformats.org/drawingml/2006/main">
+          <a:p>
             <a:pPr>
               <a:defRPr sz="975" b="0">
                 <a:solidFill>
@@ -4504,36 +4299,36 @@
       <p:sp>
         <p:nvSpPr>
           <p:cNvPr id="2" name="slide-title">
-            <a:extLst xmlns:a="http://schemas.openxmlformats.org/drawingml/2006/main">
+            <a:extLst>
               <a:ext uri="{FF2B5EF4-FFF2-40B4-BE49-F238E27FC236}">
                 <a16:creationId xmlns:a16="http://schemas.microsoft.com/office/drawing/2014/main" id="{A9707AC9-829B-40C0-85C9-760937993788}"/>
               </a:ext>
             </a:extLst>
           </p:cNvPr>
           <p:cNvSpPr>
-            <a:spLocks xmlns:a="http://schemas.openxmlformats.org/drawingml/2006/main" noGrp="1"/>
+            <a:spLocks noGrp="1"/>
           </p:cNvSpPr>
           <p:nvPr/>
         </p:nvSpPr>
         <p:spPr>
-          <a:xfrm xmlns:a="http://schemas.openxmlformats.org/drawingml/2006/main">
+          <a:xfrm>
             <a:off x="685800" y="495300"/>
             <a:ext cx="10820400" cy="514350"/>
           </a:xfrm>
-          <a:prstGeom xmlns:a="http://schemas.openxmlformats.org/drawingml/2006/main" prst="rect">
+          <a:prstGeom prst="rect">
             <a:avLst/>
           </a:prstGeom>
-          <a:noFill xmlns:a="http://schemas.openxmlformats.org/drawingml/2006/main"/>
-          <a:ln xmlns:a="http://schemas.openxmlformats.org/drawingml/2006/main" w="0">
+          <a:noFill/>
+          <a:ln w="0">
             <a:noFill/>
             <a:prstDash val="solid"/>
           </a:ln>
         </p:spPr>
         <p:txBody>
-          <a:bodyPr xmlns:a="http://schemas.openxmlformats.org/drawingml/2006/main">
+          <a:bodyPr>
             <a:noAutofit/>
           </a:bodyPr>
-          <a:lstStyle xmlns:a="http://schemas.openxmlformats.org/drawingml/2006/main">
+          <a:lstStyle>
             <a:defPPr>
               <a:defRPr sz="3000" b="1">
                 <a:solidFill>
@@ -4545,7 +4340,7 @@
               </a:defRPr>
             </a:defPPr>
           </a:lstStyle>
-          <a:p xmlns:a="http://schemas.openxmlformats.org/drawingml/2006/main">
+          <a:p>
             <a:pPr>
               <a:defRPr sz="3000" b="1">
                 <a:solidFill>
@@ -4573,36 +4368,36 @@
       <p:sp>
         <p:nvSpPr>
           <p:cNvPr id="3" name="slide-lead">
-            <a:extLst xmlns:a="http://schemas.openxmlformats.org/drawingml/2006/main">
+            <a:extLst>
               <a:ext uri="{FF2B5EF4-FFF2-40B4-BE49-F238E27FC236}">
                 <a16:creationId xmlns:a16="http://schemas.microsoft.com/office/drawing/2014/main" id="{3D419DEB-DB3F-48B6-B1AF-181CDA46462A}"/>
               </a:ext>
             </a:extLst>
           </p:cNvPr>
           <p:cNvSpPr>
-            <a:spLocks xmlns:a="http://schemas.openxmlformats.org/drawingml/2006/main" noGrp="1"/>
+            <a:spLocks noGrp="1"/>
           </p:cNvSpPr>
           <p:nvPr/>
         </p:nvSpPr>
         <p:spPr>
-          <a:xfrm xmlns:a="http://schemas.openxmlformats.org/drawingml/2006/main">
+          <a:xfrm>
             <a:off x="685800" y="1066800"/>
             <a:ext cx="10820400" cy="323850"/>
           </a:xfrm>
-          <a:prstGeom xmlns:a="http://schemas.openxmlformats.org/drawingml/2006/main" prst="rect">
+          <a:prstGeom prst="rect">
             <a:avLst/>
           </a:prstGeom>
-          <a:noFill xmlns:a="http://schemas.openxmlformats.org/drawingml/2006/main"/>
-          <a:ln xmlns:a="http://schemas.openxmlformats.org/drawingml/2006/main" w="0">
+          <a:noFill/>
+          <a:ln w="0">
             <a:noFill/>
             <a:prstDash val="solid"/>
           </a:ln>
         </p:spPr>
         <p:txBody>
-          <a:bodyPr xmlns:a="http://schemas.openxmlformats.org/drawingml/2006/main">
+          <a:bodyPr>
             <a:noAutofit/>
           </a:bodyPr>
-          <a:lstStyle xmlns:a="http://schemas.openxmlformats.org/drawingml/2006/main">
+          <a:lstStyle>
             <a:defPPr>
               <a:defRPr sz="1575" b="0">
                 <a:solidFill>
@@ -4614,7 +4409,7 @@
               </a:defRPr>
             </a:defPPr>
           </a:lstStyle>
-          <a:p xmlns:a="http://schemas.openxmlformats.org/drawingml/2006/main">
+          <a:p>
             <a:pPr>
               <a:defRPr sz="1575" b="0">
                 <a:solidFill>
@@ -4642,67 +4437,74 @@
       <p:sp>
         <p:nvSpPr>
           <p:cNvPr id="4" name="title-rule">
-            <a:extLst xmlns:a="http://schemas.openxmlformats.org/drawingml/2006/main">
+            <a:extLst>
               <a:ext uri="{FF2B5EF4-FFF2-40B4-BE49-F238E27FC236}">
                 <a16:creationId xmlns:a16="http://schemas.microsoft.com/office/drawing/2014/main" id="{EEFE9D56-619A-4851-BC6B-20D7BEB59178}"/>
               </a:ext>
             </a:extLst>
           </p:cNvPr>
           <p:cNvSpPr>
-            <a:spLocks xmlns:a="http://schemas.openxmlformats.org/drawingml/2006/main" noGrp="1"/>
+            <a:spLocks noGrp="1"/>
           </p:cNvSpPr>
           <p:nvPr/>
         </p:nvSpPr>
         <p:spPr>
-          <a:xfrm xmlns:a="http://schemas.openxmlformats.org/drawingml/2006/main">
+          <a:xfrm>
             <a:off x="685800" y="1504950"/>
             <a:ext cx="10820400" cy="9525"/>
           </a:xfrm>
-          <a:prstGeom xmlns:a="http://schemas.openxmlformats.org/drawingml/2006/main" prst="rect">
+          <a:prstGeom prst="rect">
             <a:avLst/>
           </a:prstGeom>
-          <a:solidFill xmlns:a="http://schemas.openxmlformats.org/drawingml/2006/main">
+          <a:solidFill>
             <a:srgbClr val="E1E5EA"/>
           </a:solidFill>
-          <a:ln xmlns:a="http://schemas.openxmlformats.org/drawingml/2006/main" w="0">
+          <a:ln w="0">
             <a:noFill/>
             <a:prstDash val="solid"/>
           </a:ln>
         </p:spPr>
-      </p:sp>
-      <p:sp>
-        <p:nvSpPr>
-          <p:cNvPr id="5" name="">
-            <a:extLst xmlns:a="http://schemas.openxmlformats.org/drawingml/2006/main">
+        <p:txBody>
+          <a:bodyPr/>
+          <a:lstStyle/>
+          <a:p>
+            <a:endParaRPr lang="en-US"/>
+          </a:p>
+        </p:txBody>
+      </p:sp>
+      <p:sp>
+        <p:nvSpPr>
+          <p:cNvPr id="5" name="Rectangle 4">
+            <a:extLst>
               <a:ext uri="{FF2B5EF4-FFF2-40B4-BE49-F238E27FC236}">
                 <a16:creationId xmlns:a16="http://schemas.microsoft.com/office/drawing/2014/main" id="{86F65AD4-161D-434E-A6F3-0747F052B2B0}"/>
               </a:ext>
             </a:extLst>
           </p:cNvPr>
           <p:cNvSpPr>
-            <a:spLocks xmlns:a="http://schemas.openxmlformats.org/drawingml/2006/main" noGrp="1"/>
+            <a:spLocks noGrp="1"/>
           </p:cNvSpPr>
           <p:nvPr/>
         </p:nvSpPr>
         <p:spPr>
-          <a:xfrm xmlns:a="http://schemas.openxmlformats.org/drawingml/2006/main">
+          <a:xfrm>
             <a:off x="685800" y="1905000"/>
             <a:ext cx="10820400" cy="3048000"/>
           </a:xfrm>
-          <a:prstGeom xmlns:a="http://schemas.openxmlformats.org/drawingml/2006/main" prst="rect">
+          <a:prstGeom prst="rect">
             <a:avLst/>
           </a:prstGeom>
-          <a:noFill xmlns:a="http://schemas.openxmlformats.org/drawingml/2006/main"/>
-          <a:ln xmlns:a="http://schemas.openxmlformats.org/drawingml/2006/main" w="0">
+          <a:noFill/>
+          <a:ln w="0">
             <a:noFill/>
             <a:prstDash val="solid"/>
           </a:ln>
         </p:spPr>
         <p:txBody>
-          <a:bodyPr xmlns:a="http://schemas.openxmlformats.org/drawingml/2006/main">
+          <a:bodyPr>
             <a:noAutofit/>
           </a:bodyPr>
-          <a:lstStyle xmlns:a="http://schemas.openxmlformats.org/drawingml/2006/main">
+          <a:lstStyle>
             <a:defPPr>
               <a:defRPr sz="1500">
                 <a:solidFill>
@@ -4714,7 +4516,7 @@
               </a:defRPr>
             </a:defPPr>
           </a:lstStyle>
-          <a:p xmlns:a="http://schemas.openxmlformats.org/drawingml/2006/main">
+          <a:p>
             <a:pPr marL="228600" indent="-114300">
               <a:spcAft>
                 <a:spcPts val="1800"/>
@@ -4741,7 +4543,7 @@
               <a:t>Donations are coordinated through telephone calls and messaging applications, which delays collection and results in lost donations.</a:t>
             </a:r>
           </a:p>
-          <a:p xmlns:a="http://schemas.openxmlformats.org/drawingml/2006/main">
+          <a:p>
             <a:pPr marL="228600" indent="-114300">
               <a:spcAft>
                 <a:spcPts val="1800"/>
@@ -4768,7 +4570,7 @@
               <a:t>Most donation platforms publish a listing and allocate the food to the first organization that claims it.</a:t>
             </a:r>
           </a:p>
-          <a:p xmlns:a="http://schemas.openxmlformats.org/drawingml/2006/main">
+          <a:p>
             <a:pPr marL="228600" indent="-114300">
               <a:spcAft>
                 <a:spcPts val="1800"/>
@@ -4795,7 +4597,7 @@
               <a:t>They do not verify that the food can reach the recipient before its safe consumption window closes.</a:t>
             </a:r>
           </a:p>
-          <a:p xmlns:a="http://schemas.openxmlformats.org/drawingml/2006/main">
+          <a:p>
             <a:pPr marL="228600" indent="-114300">
               <a:spcAft>
                 <a:spcPts val="1800"/>
@@ -4831,17 +4633,21 @@
       </p:ext>
     </p:extLst>
   </p:cSld>
+  <p:clrMapOvr>
+    <a:masterClrMapping/>
+  </p:clrMapOvr>
 </p:sld>
 </file>
 
 <file path=ppt/slides/slide3.xml><?xml version="1.0" encoding="utf-8"?>
-<p:sld xmlns:p="http://schemas.openxmlformats.org/presentationml/2006/main">
+<p:sld xmlns:a="http://schemas.openxmlformats.org/drawingml/2006/main" xmlns:r="http://schemas.openxmlformats.org/officeDocument/2006/relationships" xmlns:p="http://schemas.openxmlformats.org/presentationml/2006/main">
   <p:cSld>
     <p:bg>
       <p:bgPr>
-        <a:solidFill xmlns:a="http://schemas.openxmlformats.org/drawingml/2006/main">
+        <a:solidFill>
           <a:srgbClr val="FFFFFF"/>
         </a:solidFill>
+        <a:effectLst/>
       </p:bgPr>
     </p:bg>
     <p:spTree>
@@ -4851,41 +4657,46 @@
         <p:nvPr/>
       </p:nvGrpSpPr>
       <p:grpSpPr>
-        <a:xfrm xmlns:a="http://schemas.openxmlformats.org/drawingml/2006/main"/>
+        <a:xfrm>
+          <a:off x="0" y="0"/>
+          <a:ext cx="0" cy="0"/>
+          <a:chOff x="0" y="0"/>
+          <a:chExt cx="0" cy="0"/>
+        </a:xfrm>
       </p:grpSpPr>
       <p:sp>
         <p:nvSpPr>
-          <p:cNvPr id="6" name="">
-            <a:extLst xmlns:a="http://schemas.openxmlformats.org/drawingml/2006/main">
+          <p:cNvPr id="6" name="Rectangle 5">
+            <a:extLst>
               <a:ext uri="{FF2B5EF4-FFF2-40B4-BE49-F238E27FC236}">
                 <a16:creationId xmlns:a16="http://schemas.microsoft.com/office/drawing/2014/main" id="{5E7E55CB-E165-4805-B3E3-2CC2FA3E5143}"/>
               </a:ext>
             </a:extLst>
           </p:cNvPr>
           <p:cNvSpPr>
-            <a:spLocks xmlns:a="http://schemas.openxmlformats.org/drawingml/2006/main" noGrp="1"/>
+            <a:spLocks noGrp="1"/>
           </p:cNvSpPr>
           <p:nvPr/>
         </p:nvSpPr>
         <p:spPr>
-          <a:xfrm xmlns:a="http://schemas.openxmlformats.org/drawingml/2006/main">
+          <a:xfrm>
             <a:off x="9906000" y="6438900"/>
             <a:ext cx="1600200" cy="228600"/>
           </a:xfrm>
-          <a:prstGeom xmlns:a="http://schemas.openxmlformats.org/drawingml/2006/main" prst="rect">
+          <a:prstGeom prst="rect">
             <a:avLst/>
           </a:prstGeom>
-          <a:noFill xmlns:a="http://schemas.openxmlformats.org/drawingml/2006/main"/>
-          <a:ln xmlns:a="http://schemas.openxmlformats.org/drawingml/2006/main" w="0">
+          <a:noFill/>
+          <a:ln w="0">
             <a:noFill/>
             <a:prstDash val="solid"/>
           </a:ln>
         </p:spPr>
         <p:txBody>
-          <a:bodyPr xmlns:a="http://schemas.openxmlformats.org/drawingml/2006/main">
+          <a:bodyPr>
             <a:noAutofit/>
           </a:bodyPr>
-          <a:lstStyle xmlns:a="http://schemas.openxmlformats.org/drawingml/2006/main">
+          <a:lstStyle>
             <a:defPPr>
               <a:defRPr sz="975" b="0">
                 <a:solidFill>
@@ -4897,7 +4708,7 @@
               </a:defRPr>
             </a:defPPr>
           </a:lstStyle>
-          <a:p xmlns:a="http://schemas.openxmlformats.org/drawingml/2006/main">
+          <a:p>
             <a:pPr>
               <a:defRPr sz="975" b="0">
                 <a:solidFill>
@@ -4925,36 +4736,36 @@
       <p:sp>
         <p:nvSpPr>
           <p:cNvPr id="2" name="slide-title">
-            <a:extLst xmlns:a="http://schemas.openxmlformats.org/drawingml/2006/main">
+            <a:extLst>
               <a:ext uri="{FF2B5EF4-FFF2-40B4-BE49-F238E27FC236}">
                 <a16:creationId xmlns:a16="http://schemas.microsoft.com/office/drawing/2014/main" id="{822466C5-6B41-49A8-84FF-97EC1D0F14B1}"/>
               </a:ext>
             </a:extLst>
           </p:cNvPr>
           <p:cNvSpPr>
-            <a:spLocks xmlns:a="http://schemas.openxmlformats.org/drawingml/2006/main" noGrp="1"/>
+            <a:spLocks noGrp="1"/>
           </p:cNvSpPr>
           <p:nvPr/>
         </p:nvSpPr>
         <p:spPr>
-          <a:xfrm xmlns:a="http://schemas.openxmlformats.org/drawingml/2006/main">
+          <a:xfrm>
             <a:off x="685800" y="495300"/>
             <a:ext cx="10820400" cy="514350"/>
           </a:xfrm>
-          <a:prstGeom xmlns:a="http://schemas.openxmlformats.org/drawingml/2006/main" prst="rect">
+          <a:prstGeom prst="rect">
             <a:avLst/>
           </a:prstGeom>
-          <a:noFill xmlns:a="http://schemas.openxmlformats.org/drawingml/2006/main"/>
-          <a:ln xmlns:a="http://schemas.openxmlformats.org/drawingml/2006/main" w="0">
+          <a:noFill/>
+          <a:ln w="0">
             <a:noFill/>
             <a:prstDash val="solid"/>
           </a:ln>
         </p:spPr>
         <p:txBody>
-          <a:bodyPr xmlns:a="http://schemas.openxmlformats.org/drawingml/2006/main">
+          <a:bodyPr>
             <a:noAutofit/>
           </a:bodyPr>
-          <a:lstStyle xmlns:a="http://schemas.openxmlformats.org/drawingml/2006/main">
+          <a:lstStyle>
             <a:defPPr>
               <a:defRPr sz="3000" b="1">
                 <a:solidFill>
@@ -4966,7 +4777,7 @@
               </a:defRPr>
             </a:defPPr>
           </a:lstStyle>
-          <a:p xmlns:a="http://schemas.openxmlformats.org/drawingml/2006/main">
+          <a:p>
             <a:pPr>
               <a:defRPr sz="3000" b="1">
                 <a:solidFill>
@@ -4994,36 +4805,36 @@
       <p:sp>
         <p:nvSpPr>
           <p:cNvPr id="3" name="slide-lead">
-            <a:extLst xmlns:a="http://schemas.openxmlformats.org/drawingml/2006/main">
+            <a:extLst>
               <a:ext uri="{FF2B5EF4-FFF2-40B4-BE49-F238E27FC236}">
                 <a16:creationId xmlns:a16="http://schemas.microsoft.com/office/drawing/2014/main" id="{2BCB0ED5-FC35-417E-8563-EFCEDDE54759}"/>
               </a:ext>
             </a:extLst>
           </p:cNvPr>
           <p:cNvSpPr>
-            <a:spLocks xmlns:a="http://schemas.openxmlformats.org/drawingml/2006/main" noGrp="1"/>
+            <a:spLocks noGrp="1"/>
           </p:cNvSpPr>
           <p:nvPr/>
         </p:nvSpPr>
         <p:spPr>
-          <a:xfrm xmlns:a="http://schemas.openxmlformats.org/drawingml/2006/main">
+          <a:xfrm>
             <a:off x="685800" y="1066800"/>
             <a:ext cx="10820400" cy="323850"/>
           </a:xfrm>
-          <a:prstGeom xmlns:a="http://schemas.openxmlformats.org/drawingml/2006/main" prst="rect">
+          <a:prstGeom prst="rect">
             <a:avLst/>
           </a:prstGeom>
-          <a:noFill xmlns:a="http://schemas.openxmlformats.org/drawingml/2006/main"/>
-          <a:ln xmlns:a="http://schemas.openxmlformats.org/drawingml/2006/main" w="0">
+          <a:noFill/>
+          <a:ln w="0">
             <a:noFill/>
             <a:prstDash val="solid"/>
           </a:ln>
         </p:spPr>
         <p:txBody>
-          <a:bodyPr xmlns:a="http://schemas.openxmlformats.org/drawingml/2006/main">
+          <a:bodyPr>
             <a:noAutofit/>
           </a:bodyPr>
-          <a:lstStyle xmlns:a="http://schemas.openxmlformats.org/drawingml/2006/main">
+          <a:lstStyle>
             <a:defPPr>
               <a:defRPr sz="1575" b="0">
                 <a:solidFill>
@@ -5035,7 +4846,7 @@
               </a:defRPr>
             </a:defPPr>
           </a:lstStyle>
-          <a:p xmlns:a="http://schemas.openxmlformats.org/drawingml/2006/main">
+          <a:p>
             <a:pPr>
               <a:defRPr sz="1575" b="0">
                 <a:solidFill>
@@ -5063,38 +4874,45 @@
       <p:sp>
         <p:nvSpPr>
           <p:cNvPr id="4" name="title-rule">
-            <a:extLst xmlns:a="http://schemas.openxmlformats.org/drawingml/2006/main">
+            <a:extLst>
               <a:ext uri="{FF2B5EF4-FFF2-40B4-BE49-F238E27FC236}">
                 <a16:creationId xmlns:a16="http://schemas.microsoft.com/office/drawing/2014/main" id="{4AEB2AA4-A9EE-4883-8727-319D17A5B122}"/>
               </a:ext>
             </a:extLst>
           </p:cNvPr>
           <p:cNvSpPr>
-            <a:spLocks xmlns:a="http://schemas.openxmlformats.org/drawingml/2006/main" noGrp="1"/>
+            <a:spLocks noGrp="1"/>
           </p:cNvSpPr>
           <p:nvPr/>
         </p:nvSpPr>
         <p:spPr>
-          <a:xfrm xmlns:a="http://schemas.openxmlformats.org/drawingml/2006/main">
+          <a:xfrm>
             <a:off x="685800" y="1504950"/>
             <a:ext cx="10820400" cy="9525"/>
           </a:xfrm>
-          <a:prstGeom xmlns:a="http://schemas.openxmlformats.org/drawingml/2006/main" prst="rect">
+          <a:prstGeom prst="rect">
             <a:avLst/>
           </a:prstGeom>
-          <a:solidFill xmlns:a="http://schemas.openxmlformats.org/drawingml/2006/main">
+          <a:solidFill>
             <a:srgbClr val="E1E5EA"/>
           </a:solidFill>
-          <a:ln xmlns:a="http://schemas.openxmlformats.org/drawingml/2006/main" w="0">
+          <a:ln w="0">
             <a:noFill/>
             <a:prstDash val="solid"/>
           </a:ln>
         </p:spPr>
+        <p:txBody>
+          <a:bodyPr/>
+          <a:lstStyle/>
+          <a:p>
+            <a:endParaRPr lang="en-US"/>
+          </a:p>
+        </p:txBody>
       </p:sp>
       <p:graphicFrame>
         <p:nvGraphicFramePr>
-          <p:cNvPr id="5" name="">
-            <a:extLst xmlns:a="http://schemas.openxmlformats.org/drawingml/2006/main">
+          <p:cNvPr id="5" name="Table 4">
+            <a:extLst>
               <a:ext uri="{FF2B5EF4-FFF2-40B4-BE49-F238E27FC236}">
                 <a16:creationId xmlns:a16="http://schemas.microsoft.com/office/drawing/2014/main" id="{39553973-D5D2-42D0-8DD4-ECFC73924B3B}"/>
               </a:ext>
@@ -5104,24 +4922,40 @@
           <p:nvPr/>
         </p:nvGraphicFramePr>
         <p:xfrm>
-          <a:off xmlns:a="http://schemas.openxmlformats.org/drawingml/2006/main" x="685800" y="1866900"/>
-          <a:ext xmlns:a="http://schemas.openxmlformats.org/drawingml/2006/main" cx="10820400" cy="3543300"/>
+          <a:off x="685800" y="1866900"/>
+          <a:ext cx="10820400" cy="3543302"/>
         </p:xfrm>
-        <a:graphic xmlns:a="http://schemas.openxmlformats.org/drawingml/2006/main">
+        <a:graphic>
           <a:graphicData uri="http://schemas.openxmlformats.org/drawingml/2006/table">
             <a:tbl>
               <a:tblPr/>
               <a:tblGrid>
-                <a:gridCol w="2380488"/>
-                <a:gridCol w="3895344"/>
-                <a:gridCol w="4544568"/>
+                <a:gridCol w="2380488">
+                  <a:extLst>
+                    <a:ext uri="{9D8B030D-6E8A-4147-A177-3AD203B41FA5}">
+                      <a16:colId xmlns:a16="http://schemas.microsoft.com/office/drawing/2014/main" val="20000"/>
+                    </a:ext>
+                  </a:extLst>
+                </a:gridCol>
+                <a:gridCol w="3895344">
+                  <a:extLst>
+                    <a:ext uri="{9D8B030D-6E8A-4147-A177-3AD203B41FA5}">
+                      <a16:colId xmlns:a16="http://schemas.microsoft.com/office/drawing/2014/main" val="20001"/>
+                    </a:ext>
+                  </a:extLst>
+                </a:gridCol>
+                <a:gridCol w="4544568">
+                  <a:extLst>
+                    <a:ext uri="{9D8B030D-6E8A-4147-A177-3AD203B41FA5}">
+                      <a16:colId xmlns:a16="http://schemas.microsoft.com/office/drawing/2014/main" val="20002"/>
+                    </a:ext>
+                  </a:extLst>
+                </a:gridCol>
               </a:tblGrid>
               <a:tr h="506186">
                 <a:tc>
                   <a:txBody>
-                    <a:bodyPr>
-                      <a:noAutofit/>
-                    </a:bodyPr>
+                    <a:bodyPr/>
                     <a:lstStyle/>
                     <a:p>
                       <a:r>
@@ -5137,7 +4971,7 @@
                       </a:r>
                     </a:p>
                   </a:txBody>
-                  <a:tcPr marL="91440" marR="91440" marT="45720" marB="45720">
+                  <a:tcPr>
                     <a:solidFill>
                       <a:srgbClr val="F5F7F8"/>
                     </a:solidFill>
@@ -5145,9 +4979,7 @@
                 </a:tc>
                 <a:tc>
                   <a:txBody>
-                    <a:bodyPr>
-                      <a:noAutofit/>
-                    </a:bodyPr>
+                    <a:bodyPr/>
                     <a:lstStyle/>
                     <a:p>
                       <a:r>
@@ -5163,7 +4995,7 @@
                       </a:r>
                     </a:p>
                   </a:txBody>
-                  <a:tcPr marL="91440" marR="91440" marT="45720" marB="45720">
+                  <a:tcPr>
                     <a:solidFill>
                       <a:srgbClr val="F5F7F8"/>
                     </a:solidFill>
@@ -5171,9 +5003,7 @@
                 </a:tc>
                 <a:tc>
                   <a:txBody>
-                    <a:bodyPr>
-                      <a:noAutofit/>
-                    </a:bodyPr>
+                    <a:bodyPr/>
                     <a:lstStyle/>
                     <a:p>
                       <a:r>
@@ -5189,19 +5019,22 @@
                       </a:r>
                     </a:p>
                   </a:txBody>
-                  <a:tcPr marL="91440" marR="91440" marT="45720" marB="45720">
+                  <a:tcPr>
                     <a:solidFill>
                       <a:srgbClr val="F5F7F8"/>
                     </a:solidFill>
                   </a:tcPr>
                 </a:tc>
+                <a:extLst>
+                  <a:ext uri="{0D108BD9-81ED-4DB2-BD59-A6C34878D82A}">
+                    <a16:rowId xmlns:a16="http://schemas.microsoft.com/office/drawing/2014/main" val="10000"/>
+                  </a:ext>
+                </a:extLst>
               </a:tr>
               <a:tr h="506186">
                 <a:tc>
                   <a:txBody>
-                    <a:bodyPr>
-                      <a:noAutofit/>
-                    </a:bodyPr>
+                    <a:bodyPr/>
                     <a:lstStyle/>
                     <a:p>
                       <a:r>
@@ -5217,13 +5050,11 @@
                       </a:r>
                     </a:p>
                   </a:txBody>
-                  <a:tcPr marL="91440" marR="91440" marT="45720" marB="45720"/>
+                  <a:tcPr/>
                 </a:tc>
                 <a:tc>
                   <a:txBody>
-                    <a:bodyPr>
-                      <a:noAutofit/>
-                    </a:bodyPr>
+                    <a:bodyPr/>
                     <a:lstStyle/>
                     <a:p>
                       <a:r>
@@ -5239,13 +5070,11 @@
                       </a:r>
                     </a:p>
                   </a:txBody>
-                  <a:tcPr marL="91440" marR="91440" marT="45720" marB="45720"/>
+                  <a:tcPr/>
                 </a:tc>
                 <a:tc>
                   <a:txBody>
-                    <a:bodyPr>
-                      <a:noAutofit/>
-                    </a:bodyPr>
+                    <a:bodyPr/>
                     <a:lstStyle/>
                     <a:p>
                       <a:r>
@@ -5261,15 +5090,18 @@
                       </a:r>
                     </a:p>
                   </a:txBody>
-                  <a:tcPr marL="91440" marR="91440" marT="45720" marB="45720"/>
+                  <a:tcPr/>
                 </a:tc>
+                <a:extLst>
+                  <a:ext uri="{0D108BD9-81ED-4DB2-BD59-A6C34878D82A}">
+                    <a16:rowId xmlns:a16="http://schemas.microsoft.com/office/drawing/2014/main" val="10001"/>
+                  </a:ext>
+                </a:extLst>
               </a:tr>
               <a:tr h="506186">
                 <a:tc>
                   <a:txBody>
-                    <a:bodyPr>
-                      <a:noAutofit/>
-                    </a:bodyPr>
+                    <a:bodyPr/>
                     <a:lstStyle/>
                     <a:p>
                       <a:r>
@@ -5285,13 +5117,11 @@
                       </a:r>
                     </a:p>
                   </a:txBody>
-                  <a:tcPr marL="91440" marR="91440" marT="45720" marB="45720"/>
+                  <a:tcPr/>
                 </a:tc>
                 <a:tc>
                   <a:txBody>
-                    <a:bodyPr>
-                      <a:noAutofit/>
-                    </a:bodyPr>
+                    <a:bodyPr/>
                     <a:lstStyle/>
                     <a:p>
                       <a:r>
@@ -5307,13 +5137,11 @@
                       </a:r>
                     </a:p>
                   </a:txBody>
-                  <a:tcPr marL="91440" marR="91440" marT="45720" marB="45720"/>
+                  <a:tcPr/>
                 </a:tc>
                 <a:tc>
                   <a:txBody>
-                    <a:bodyPr>
-                      <a:noAutofit/>
-                    </a:bodyPr>
+                    <a:bodyPr/>
                     <a:lstStyle/>
                     <a:p>
                       <a:r>
@@ -5329,15 +5157,18 @@
                       </a:r>
                     </a:p>
                   </a:txBody>
-                  <a:tcPr marL="91440" marR="91440" marT="45720" marB="45720"/>
+                  <a:tcPr/>
                 </a:tc>
+                <a:extLst>
+                  <a:ext uri="{0D108BD9-81ED-4DB2-BD59-A6C34878D82A}">
+                    <a16:rowId xmlns:a16="http://schemas.microsoft.com/office/drawing/2014/main" val="10002"/>
+                  </a:ext>
+                </a:extLst>
               </a:tr>
               <a:tr h="506186">
                 <a:tc>
                   <a:txBody>
-                    <a:bodyPr>
-                      <a:noAutofit/>
-                    </a:bodyPr>
+                    <a:bodyPr/>
                     <a:lstStyle/>
                     <a:p>
                       <a:r>
@@ -5353,13 +5184,11 @@
                       </a:r>
                     </a:p>
                   </a:txBody>
-                  <a:tcPr marL="91440" marR="91440" marT="45720" marB="45720"/>
+                  <a:tcPr/>
                 </a:tc>
                 <a:tc>
                   <a:txBody>
-                    <a:bodyPr>
-                      <a:noAutofit/>
-                    </a:bodyPr>
+                    <a:bodyPr/>
                     <a:lstStyle/>
                     <a:p>
                       <a:r>
@@ -5375,13 +5204,11 @@
                       </a:r>
                     </a:p>
                   </a:txBody>
-                  <a:tcPr marL="91440" marR="91440" marT="45720" marB="45720"/>
+                  <a:tcPr/>
                 </a:tc>
                 <a:tc>
                   <a:txBody>
-                    <a:bodyPr>
-                      <a:noAutofit/>
-                    </a:bodyPr>
+                    <a:bodyPr/>
                     <a:lstStyle/>
                     <a:p>
                       <a:r>
@@ -5397,15 +5224,18 @@
                       </a:r>
                     </a:p>
                   </a:txBody>
-                  <a:tcPr marL="91440" marR="91440" marT="45720" marB="45720"/>
+                  <a:tcPr/>
                 </a:tc>
+                <a:extLst>
+                  <a:ext uri="{0D108BD9-81ED-4DB2-BD59-A6C34878D82A}">
+                    <a16:rowId xmlns:a16="http://schemas.microsoft.com/office/drawing/2014/main" val="10003"/>
+                  </a:ext>
+                </a:extLst>
               </a:tr>
               <a:tr h="506186">
                 <a:tc>
                   <a:txBody>
-                    <a:bodyPr>
-                      <a:noAutofit/>
-                    </a:bodyPr>
+                    <a:bodyPr/>
                     <a:lstStyle/>
                     <a:p>
                       <a:r>
@@ -5421,13 +5251,11 @@
                       </a:r>
                     </a:p>
                   </a:txBody>
-                  <a:tcPr marL="91440" marR="91440" marT="45720" marB="45720"/>
+                  <a:tcPr/>
                 </a:tc>
                 <a:tc>
                   <a:txBody>
-                    <a:bodyPr>
-                      <a:noAutofit/>
-                    </a:bodyPr>
+                    <a:bodyPr/>
                     <a:lstStyle/>
                     <a:p>
                       <a:r>
@@ -5443,13 +5271,11 @@
                       </a:r>
                     </a:p>
                   </a:txBody>
-                  <a:tcPr marL="91440" marR="91440" marT="45720" marB="45720"/>
+                  <a:tcPr/>
                 </a:tc>
                 <a:tc>
                   <a:txBody>
-                    <a:bodyPr>
-                      <a:noAutofit/>
-                    </a:bodyPr>
+                    <a:bodyPr/>
                     <a:lstStyle/>
                     <a:p>
                       <a:r>
@@ -5465,15 +5291,18 @@
                       </a:r>
                     </a:p>
                   </a:txBody>
-                  <a:tcPr marL="91440" marR="91440" marT="45720" marB="45720"/>
+                  <a:tcPr/>
                 </a:tc>
+                <a:extLst>
+                  <a:ext uri="{0D108BD9-81ED-4DB2-BD59-A6C34878D82A}">
+                    <a16:rowId xmlns:a16="http://schemas.microsoft.com/office/drawing/2014/main" val="10004"/>
+                  </a:ext>
+                </a:extLst>
               </a:tr>
               <a:tr h="506186">
                 <a:tc>
                   <a:txBody>
-                    <a:bodyPr>
-                      <a:noAutofit/>
-                    </a:bodyPr>
+                    <a:bodyPr/>
                     <a:lstStyle/>
                     <a:p>
                       <a:r>
@@ -5489,13 +5318,11 @@
                       </a:r>
                     </a:p>
                   </a:txBody>
-                  <a:tcPr marL="91440" marR="91440" marT="45720" marB="45720"/>
+                  <a:tcPr/>
                 </a:tc>
                 <a:tc>
                   <a:txBody>
-                    <a:bodyPr>
-                      <a:noAutofit/>
-                    </a:bodyPr>
+                    <a:bodyPr/>
                     <a:lstStyle/>
                     <a:p>
                       <a:r>
@@ -5511,13 +5338,11 @@
                       </a:r>
                     </a:p>
                   </a:txBody>
-                  <a:tcPr marL="91440" marR="91440" marT="45720" marB="45720"/>
+                  <a:tcPr/>
                 </a:tc>
                 <a:tc>
                   <a:txBody>
-                    <a:bodyPr>
-                      <a:noAutofit/>
-                    </a:bodyPr>
+                    <a:bodyPr/>
                     <a:lstStyle/>
                     <a:p>
                       <a:r>
@@ -5533,15 +5358,18 @@
                       </a:r>
                     </a:p>
                   </a:txBody>
-                  <a:tcPr marL="91440" marR="91440" marT="45720" marB="45720"/>
+                  <a:tcPr/>
                 </a:tc>
+                <a:extLst>
+                  <a:ext uri="{0D108BD9-81ED-4DB2-BD59-A6C34878D82A}">
+                    <a16:rowId xmlns:a16="http://schemas.microsoft.com/office/drawing/2014/main" val="10005"/>
+                  </a:ext>
+                </a:extLst>
               </a:tr>
               <a:tr h="506186">
                 <a:tc>
                   <a:txBody>
-                    <a:bodyPr>
-                      <a:noAutofit/>
-                    </a:bodyPr>
+                    <a:bodyPr/>
                     <a:lstStyle/>
                     <a:p>
                       <a:r>
@@ -5557,13 +5385,11 @@
                       </a:r>
                     </a:p>
                   </a:txBody>
-                  <a:tcPr marL="91440" marR="91440" marT="45720" marB="45720"/>
+                  <a:tcPr/>
                 </a:tc>
                 <a:tc>
                   <a:txBody>
-                    <a:bodyPr>
-                      <a:noAutofit/>
-                    </a:bodyPr>
+                    <a:bodyPr/>
                     <a:lstStyle/>
                     <a:p>
                       <a:r>
@@ -5579,13 +5405,11 @@
                       </a:r>
                     </a:p>
                   </a:txBody>
-                  <a:tcPr marL="91440" marR="91440" marT="45720" marB="45720"/>
+                  <a:tcPr/>
                 </a:tc>
                 <a:tc>
                   <a:txBody>
-                    <a:bodyPr>
-                      <a:noAutofit/>
-                    </a:bodyPr>
+                    <a:bodyPr/>
                     <a:lstStyle/>
                     <a:p>
                       <a:r>
@@ -5601,8 +5425,13 @@
                       </a:r>
                     </a:p>
                   </a:txBody>
-                  <a:tcPr marL="91440" marR="91440" marT="45720" marB="45720"/>
+                  <a:tcPr/>
                 </a:tc>
+                <a:extLst>
+                  <a:ext uri="{0D108BD9-81ED-4DB2-BD59-A6C34878D82A}">
+                    <a16:rowId xmlns:a16="http://schemas.microsoft.com/office/drawing/2014/main" val="10006"/>
+                  </a:ext>
+                </a:extLst>
               </a:tr>
             </a:tbl>
           </a:graphicData>
@@ -5615,17 +5444,21 @@
       </p:ext>
     </p:extLst>
   </p:cSld>
+  <p:clrMapOvr>
+    <a:masterClrMapping/>
+  </p:clrMapOvr>
 </p:sld>
 </file>
 
 <file path=ppt/slides/slide4.xml><?xml version="1.0" encoding="utf-8"?>
-<p:sld xmlns:p="http://schemas.openxmlformats.org/presentationml/2006/main">
+<p:sld xmlns:a="http://schemas.openxmlformats.org/drawingml/2006/main" xmlns:r="http://schemas.openxmlformats.org/officeDocument/2006/relationships" xmlns:p="http://schemas.openxmlformats.org/presentationml/2006/main">
   <p:cSld>
     <p:bg>
       <p:bgPr>
-        <a:solidFill xmlns:a="http://schemas.openxmlformats.org/drawingml/2006/main">
+        <a:solidFill>
           <a:srgbClr val="FFFFFF"/>
         </a:solidFill>
+        <a:effectLst/>
       </p:bgPr>
     </p:bg>
     <p:spTree>
@@ -5635,41 +5468,46 @@
         <p:nvPr/>
       </p:nvGrpSpPr>
       <p:grpSpPr>
-        <a:xfrm xmlns:a="http://schemas.openxmlformats.org/drawingml/2006/main"/>
+        <a:xfrm>
+          <a:off x="0" y="0"/>
+          <a:ext cx="0" cy="0"/>
+          <a:chOff x="0" y="0"/>
+          <a:chExt cx="0" cy="0"/>
+        </a:xfrm>
       </p:grpSpPr>
       <p:sp>
         <p:nvSpPr>
-          <p:cNvPr id="29" name="">
-            <a:extLst xmlns:a="http://schemas.openxmlformats.org/drawingml/2006/main">
+          <p:cNvPr id="29" name="Rectangle 28">
+            <a:extLst>
               <a:ext uri="{FF2B5EF4-FFF2-40B4-BE49-F238E27FC236}">
                 <a16:creationId xmlns:a16="http://schemas.microsoft.com/office/drawing/2014/main" id="{0C06C0DF-E129-4F18-B5BF-A5D18B6C1D94}"/>
               </a:ext>
             </a:extLst>
           </p:cNvPr>
           <p:cNvSpPr>
-            <a:spLocks xmlns:a="http://schemas.openxmlformats.org/drawingml/2006/main" noGrp="1"/>
+            <a:spLocks noGrp="1"/>
           </p:cNvSpPr>
           <p:nvPr/>
         </p:nvSpPr>
         <p:spPr>
-          <a:xfrm xmlns:a="http://schemas.openxmlformats.org/drawingml/2006/main">
+          <a:xfrm>
             <a:off x="9906000" y="6438900"/>
             <a:ext cx="1600200" cy="228600"/>
           </a:xfrm>
-          <a:prstGeom xmlns:a="http://schemas.openxmlformats.org/drawingml/2006/main" prst="rect">
+          <a:prstGeom prst="rect">
             <a:avLst/>
           </a:prstGeom>
-          <a:noFill xmlns:a="http://schemas.openxmlformats.org/drawingml/2006/main"/>
-          <a:ln xmlns:a="http://schemas.openxmlformats.org/drawingml/2006/main" w="0">
+          <a:noFill/>
+          <a:ln w="0">
             <a:noFill/>
             <a:prstDash val="solid"/>
           </a:ln>
         </p:spPr>
         <p:txBody>
-          <a:bodyPr xmlns:a="http://schemas.openxmlformats.org/drawingml/2006/main">
+          <a:bodyPr>
             <a:noAutofit/>
           </a:bodyPr>
-          <a:lstStyle xmlns:a="http://schemas.openxmlformats.org/drawingml/2006/main">
+          <a:lstStyle>
             <a:defPPr>
               <a:defRPr sz="975" b="0">
                 <a:solidFill>
@@ -5681,7 +5519,7 @@
               </a:defRPr>
             </a:defPPr>
           </a:lstStyle>
-          <a:p xmlns:a="http://schemas.openxmlformats.org/drawingml/2006/main">
+          <a:p>
             <a:pPr>
               <a:defRPr sz="975" b="0">
                 <a:solidFill>
@@ -5709,36 +5547,36 @@
       <p:sp>
         <p:nvSpPr>
           <p:cNvPr id="2" name="slide-title">
-            <a:extLst xmlns:a="http://schemas.openxmlformats.org/drawingml/2006/main">
+            <a:extLst>
               <a:ext uri="{FF2B5EF4-FFF2-40B4-BE49-F238E27FC236}">
                 <a16:creationId xmlns:a16="http://schemas.microsoft.com/office/drawing/2014/main" id="{07FDBC0C-976B-432C-B8F9-C4D85B1A526B}"/>
               </a:ext>
             </a:extLst>
           </p:cNvPr>
           <p:cNvSpPr>
-            <a:spLocks xmlns:a="http://schemas.openxmlformats.org/drawingml/2006/main" noGrp="1"/>
+            <a:spLocks noGrp="1"/>
           </p:cNvSpPr>
           <p:nvPr/>
         </p:nvSpPr>
         <p:spPr>
-          <a:xfrm xmlns:a="http://schemas.openxmlformats.org/drawingml/2006/main">
+          <a:xfrm>
             <a:off x="685800" y="495300"/>
             <a:ext cx="10820400" cy="514350"/>
           </a:xfrm>
-          <a:prstGeom xmlns:a="http://schemas.openxmlformats.org/drawingml/2006/main" prst="rect">
+          <a:prstGeom prst="rect">
             <a:avLst/>
           </a:prstGeom>
-          <a:noFill xmlns:a="http://schemas.openxmlformats.org/drawingml/2006/main"/>
-          <a:ln xmlns:a="http://schemas.openxmlformats.org/drawingml/2006/main" w="0">
+          <a:noFill/>
+          <a:ln w="0">
             <a:noFill/>
             <a:prstDash val="solid"/>
           </a:ln>
         </p:spPr>
         <p:txBody>
-          <a:bodyPr xmlns:a="http://schemas.openxmlformats.org/drawingml/2006/main">
+          <a:bodyPr>
             <a:noAutofit/>
           </a:bodyPr>
-          <a:lstStyle xmlns:a="http://schemas.openxmlformats.org/drawingml/2006/main">
+          <a:lstStyle>
             <a:defPPr>
               <a:defRPr sz="3000" b="1">
                 <a:solidFill>
@@ -5750,7 +5588,7 @@
               </a:defRPr>
             </a:defPPr>
           </a:lstStyle>
-          <a:p xmlns:a="http://schemas.openxmlformats.org/drawingml/2006/main">
+          <a:p>
             <a:pPr>
               <a:defRPr sz="3000" b="1">
                 <a:solidFill>
@@ -5778,36 +5616,36 @@
       <p:sp>
         <p:nvSpPr>
           <p:cNvPr id="3" name="slide-lead">
-            <a:extLst xmlns:a="http://schemas.openxmlformats.org/drawingml/2006/main">
+            <a:extLst>
               <a:ext uri="{FF2B5EF4-FFF2-40B4-BE49-F238E27FC236}">
                 <a16:creationId xmlns:a16="http://schemas.microsoft.com/office/drawing/2014/main" id="{79D4048E-7AB9-45DC-B07A-648C3079F25D}"/>
               </a:ext>
             </a:extLst>
           </p:cNvPr>
           <p:cNvSpPr>
-            <a:spLocks xmlns:a="http://schemas.openxmlformats.org/drawingml/2006/main" noGrp="1"/>
+            <a:spLocks noGrp="1"/>
           </p:cNvSpPr>
           <p:nvPr/>
         </p:nvSpPr>
         <p:spPr>
-          <a:xfrm xmlns:a="http://schemas.openxmlformats.org/drawingml/2006/main">
+          <a:xfrm>
             <a:off x="685800" y="1066800"/>
             <a:ext cx="10820400" cy="323850"/>
           </a:xfrm>
-          <a:prstGeom xmlns:a="http://schemas.openxmlformats.org/drawingml/2006/main" prst="rect">
+          <a:prstGeom prst="rect">
             <a:avLst/>
           </a:prstGeom>
-          <a:noFill xmlns:a="http://schemas.openxmlformats.org/drawingml/2006/main"/>
-          <a:ln xmlns:a="http://schemas.openxmlformats.org/drawingml/2006/main" w="0">
+          <a:noFill/>
+          <a:ln w="0">
             <a:noFill/>
             <a:prstDash val="solid"/>
           </a:ln>
         </p:spPr>
         <p:txBody>
-          <a:bodyPr xmlns:a="http://schemas.openxmlformats.org/drawingml/2006/main">
+          <a:bodyPr>
             <a:noAutofit/>
           </a:bodyPr>
-          <a:lstStyle xmlns:a="http://schemas.openxmlformats.org/drawingml/2006/main">
+          <a:lstStyle>
             <a:defPPr>
               <a:defRPr sz="1575" b="0">
                 <a:solidFill>
@@ -5819,7 +5657,7 @@
               </a:defRPr>
             </a:defPPr>
           </a:lstStyle>
-          <a:p xmlns:a="http://schemas.openxmlformats.org/drawingml/2006/main">
+          <a:p>
             <a:pPr>
               <a:defRPr sz="1575" b="0">
                 <a:solidFill>
@@ -5847,102 +5685,116 @@
       <p:sp>
         <p:nvSpPr>
           <p:cNvPr id="4" name="title-rule">
-            <a:extLst xmlns:a="http://schemas.openxmlformats.org/drawingml/2006/main">
+            <a:extLst>
               <a:ext uri="{FF2B5EF4-FFF2-40B4-BE49-F238E27FC236}">
                 <a16:creationId xmlns:a16="http://schemas.microsoft.com/office/drawing/2014/main" id="{27B41D9F-BC77-427D-AEB8-3115A1F246AC}"/>
               </a:ext>
             </a:extLst>
           </p:cNvPr>
           <p:cNvSpPr>
-            <a:spLocks xmlns:a="http://schemas.openxmlformats.org/drawingml/2006/main" noGrp="1"/>
+            <a:spLocks noGrp="1"/>
           </p:cNvSpPr>
           <p:nvPr/>
         </p:nvSpPr>
         <p:spPr>
-          <a:xfrm xmlns:a="http://schemas.openxmlformats.org/drawingml/2006/main">
+          <a:xfrm>
             <a:off x="685800" y="1504950"/>
             <a:ext cx="10820400" cy="9525"/>
           </a:xfrm>
-          <a:prstGeom xmlns:a="http://schemas.openxmlformats.org/drawingml/2006/main" prst="rect">
+          <a:prstGeom prst="rect">
             <a:avLst/>
           </a:prstGeom>
-          <a:solidFill xmlns:a="http://schemas.openxmlformats.org/drawingml/2006/main">
+          <a:solidFill>
             <a:srgbClr val="E1E5EA"/>
           </a:solidFill>
-          <a:ln xmlns:a="http://schemas.openxmlformats.org/drawingml/2006/main" w="0">
+          <a:ln w="0">
             <a:noFill/>
             <a:prstDash val="solid"/>
           </a:ln>
         </p:spPr>
+        <p:txBody>
+          <a:bodyPr/>
+          <a:lstStyle/>
+          <a:p>
+            <a:endParaRPr lang="en-US"/>
+          </a:p>
+        </p:txBody>
       </p:sp>
       <p:sp>
         <p:nvSpPr>
           <p:cNvPr id="5" name="flow-Donation registered">
-            <a:extLst xmlns:a="http://schemas.openxmlformats.org/drawingml/2006/main">
+            <a:extLst>
               <a:ext uri="{FF2B5EF4-FFF2-40B4-BE49-F238E27FC236}">
                 <a16:creationId xmlns:a16="http://schemas.microsoft.com/office/drawing/2014/main" id="{936C115E-4DA4-4143-8F2D-86FF6EE51F10}"/>
               </a:ext>
             </a:extLst>
           </p:cNvPr>
           <p:cNvSpPr>
-            <a:spLocks xmlns:a="http://schemas.openxmlformats.org/drawingml/2006/main" noGrp="1"/>
+            <a:spLocks noGrp="1"/>
           </p:cNvSpPr>
           <p:nvPr/>
         </p:nvSpPr>
         <p:spPr>
-          <a:xfrm xmlns:a="http://schemas.openxmlformats.org/drawingml/2006/main">
+          <a:xfrm>
             <a:off x="685800" y="2038350"/>
             <a:ext cx="1428750" cy="990600"/>
           </a:xfrm>
-          <a:prstGeom xmlns:a="http://schemas.openxmlformats.org/drawingml/2006/main" prst="roundRect">
+          <a:prstGeom prst="roundRect">
             <a:avLst>
               <a:gd name="adj" fmla="val 7692"/>
             </a:avLst>
           </a:prstGeom>
-          <a:solidFill xmlns:a="http://schemas.openxmlformats.org/drawingml/2006/main">
+          <a:solidFill>
             <a:srgbClr val="FFFFFF"/>
           </a:solidFill>
-          <a:ln xmlns:a="http://schemas.openxmlformats.org/drawingml/2006/main" w="9525">
+          <a:ln w="9525">
             <a:solidFill>
               <a:srgbClr val="E1E5EA"/>
             </a:solidFill>
             <a:prstDash val="solid"/>
           </a:ln>
         </p:spPr>
-      </p:sp>
-      <p:sp>
-        <p:nvSpPr>
-          <p:cNvPr id="6" name="">
-            <a:extLst xmlns:a="http://schemas.openxmlformats.org/drawingml/2006/main">
+        <p:txBody>
+          <a:bodyPr/>
+          <a:lstStyle/>
+          <a:p>
+            <a:endParaRPr lang="en-US"/>
+          </a:p>
+        </p:txBody>
+      </p:sp>
+      <p:sp>
+        <p:nvSpPr>
+          <p:cNvPr id="6" name="Rectangle 5">
+            <a:extLst>
               <a:ext uri="{FF2B5EF4-FFF2-40B4-BE49-F238E27FC236}">
                 <a16:creationId xmlns:a16="http://schemas.microsoft.com/office/drawing/2014/main" id="{99EE1ED6-201D-4EFD-B358-B1B49B0ABCC8}"/>
               </a:ext>
             </a:extLst>
           </p:cNvPr>
           <p:cNvSpPr>
-            <a:spLocks xmlns:a="http://schemas.openxmlformats.org/drawingml/2006/main" noGrp="1"/>
+            <a:spLocks noGrp="1"/>
           </p:cNvSpPr>
           <p:nvPr/>
         </p:nvSpPr>
         <p:spPr>
-          <a:xfrm xmlns:a="http://schemas.openxmlformats.org/drawingml/2006/main">
+          <a:xfrm>
             <a:off x="781050" y="2171700"/>
             <a:ext cx="1238250" cy="381000"/>
           </a:xfrm>
-          <a:prstGeom xmlns:a="http://schemas.openxmlformats.org/drawingml/2006/main" prst="rect">
+          <a:prstGeom prst="rect">
             <a:avLst/>
           </a:prstGeom>
-          <a:noFill xmlns:a="http://schemas.openxmlformats.org/drawingml/2006/main"/>
-          <a:ln xmlns:a="http://schemas.openxmlformats.org/drawingml/2006/main" w="0">
+          <a:noFill/>
+          <a:ln w="0">
             <a:noFill/>
             <a:prstDash val="solid"/>
           </a:ln>
         </p:spPr>
         <p:txBody>
-          <a:bodyPr xmlns:a="http://schemas.openxmlformats.org/drawingml/2006/main">
+          <a:bodyPr>
             <a:noAutofit/>
           </a:bodyPr>
-          <a:lstStyle xmlns:a="http://schemas.openxmlformats.org/drawingml/2006/main">
+          <a:lstStyle>
             <a:defPPr>
               <a:defRPr sz="1125" b="1">
                 <a:solidFill>
@@ -5954,7 +5806,7 @@
               </a:defRPr>
             </a:defPPr>
           </a:lstStyle>
-          <a:p xmlns:a="http://schemas.openxmlformats.org/drawingml/2006/main">
+          <a:p>
             <a:pPr>
               <a:defRPr sz="1125" b="1">
                 <a:solidFill>
@@ -5981,37 +5833,37 @@
       </p:sp>
       <p:sp>
         <p:nvSpPr>
-          <p:cNvPr id="7" name="">
-            <a:extLst xmlns:a="http://schemas.openxmlformats.org/drawingml/2006/main">
+          <p:cNvPr id="7" name="Rectangle 6">
+            <a:extLst>
               <a:ext uri="{FF2B5EF4-FFF2-40B4-BE49-F238E27FC236}">
                 <a16:creationId xmlns:a16="http://schemas.microsoft.com/office/drawing/2014/main" id="{961E156E-42A5-4D9B-A4A9-155BEC51EFF1}"/>
               </a:ext>
             </a:extLst>
           </p:cNvPr>
           <p:cNvSpPr>
-            <a:spLocks xmlns:a="http://schemas.openxmlformats.org/drawingml/2006/main" noGrp="1"/>
+            <a:spLocks noGrp="1"/>
           </p:cNvSpPr>
           <p:nvPr/>
         </p:nvSpPr>
         <p:spPr>
-          <a:xfrm xmlns:a="http://schemas.openxmlformats.org/drawingml/2006/main">
+          <a:xfrm>
             <a:off x="781050" y="2533650"/>
             <a:ext cx="1238250" cy="381000"/>
           </a:xfrm>
-          <a:prstGeom xmlns:a="http://schemas.openxmlformats.org/drawingml/2006/main" prst="rect">
+          <a:prstGeom prst="rect">
             <a:avLst/>
           </a:prstGeom>
-          <a:noFill xmlns:a="http://schemas.openxmlformats.org/drawingml/2006/main"/>
-          <a:ln xmlns:a="http://schemas.openxmlformats.org/drawingml/2006/main" w="0">
+          <a:noFill/>
+          <a:ln w="0">
             <a:noFill/>
             <a:prstDash val="solid"/>
           </a:ln>
         </p:spPr>
         <p:txBody>
-          <a:bodyPr xmlns:a="http://schemas.openxmlformats.org/drawingml/2006/main">
+          <a:bodyPr>
             <a:noAutofit/>
           </a:bodyPr>
-          <a:lstStyle xmlns:a="http://schemas.openxmlformats.org/drawingml/2006/main">
+          <a:lstStyle>
             <a:defPPr>
               <a:defRPr sz="938" b="0">
                 <a:solidFill>
@@ -6023,7 +5875,7 @@
               </a:defRPr>
             </a:defPPr>
           </a:lstStyle>
-          <a:p xmlns:a="http://schemas.openxmlformats.org/drawingml/2006/main">
+          <a:p>
             <a:pPr>
               <a:defRPr sz="938" b="0">
                 <a:solidFill>
@@ -6050,103 +5902,117 @@
       </p:sp>
       <p:sp>
         <p:nvSpPr>
-          <p:cNvPr id="8" name="">
-            <a:extLst xmlns:a="http://schemas.openxmlformats.org/drawingml/2006/main">
+          <p:cNvPr id="8" name="Right Arrow 7">
+            <a:extLst>
               <a:ext uri="{FF2B5EF4-FFF2-40B4-BE49-F238E27FC236}">
                 <a16:creationId xmlns:a16="http://schemas.microsoft.com/office/drawing/2014/main" id="{AAEEF22B-9EF2-4712-8CA4-12B3135BCB0C}"/>
               </a:ext>
             </a:extLst>
           </p:cNvPr>
           <p:cNvSpPr>
-            <a:spLocks xmlns:a="http://schemas.openxmlformats.org/drawingml/2006/main" noGrp="1"/>
+            <a:spLocks noGrp="1"/>
           </p:cNvSpPr>
           <p:nvPr/>
         </p:nvSpPr>
         <p:spPr>
-          <a:xfrm xmlns:a="http://schemas.openxmlformats.org/drawingml/2006/main">
+          <a:xfrm>
             <a:off x="2171700" y="2457450"/>
             <a:ext cx="228600" cy="152400"/>
           </a:xfrm>
-          <a:prstGeom xmlns:a="http://schemas.openxmlformats.org/drawingml/2006/main" prst="rightArrow">
+          <a:prstGeom prst="rightArrow">
             <a:avLst/>
           </a:prstGeom>
-          <a:solidFill xmlns:a="http://schemas.openxmlformats.org/drawingml/2006/main">
+          <a:solidFill>
             <a:srgbClr val="8A94A3"/>
           </a:solidFill>
-          <a:ln xmlns:a="http://schemas.openxmlformats.org/drawingml/2006/main" w="0">
+          <a:ln w="0">
             <a:noFill/>
             <a:prstDash val="solid"/>
           </a:ln>
         </p:spPr>
+        <p:txBody>
+          <a:bodyPr/>
+          <a:lstStyle/>
+          <a:p>
+            <a:endParaRPr lang="en-US"/>
+          </a:p>
+        </p:txBody>
       </p:sp>
       <p:sp>
         <p:nvSpPr>
           <p:cNvPr id="9" name="flow-Engine ranks recipients">
-            <a:extLst xmlns:a="http://schemas.openxmlformats.org/drawingml/2006/main">
+            <a:extLst>
               <a:ext uri="{FF2B5EF4-FFF2-40B4-BE49-F238E27FC236}">
                 <a16:creationId xmlns:a16="http://schemas.microsoft.com/office/drawing/2014/main" id="{1A81E838-6955-4931-88BB-130E1E596723}"/>
               </a:ext>
             </a:extLst>
           </p:cNvPr>
           <p:cNvSpPr>
-            <a:spLocks xmlns:a="http://schemas.openxmlformats.org/drawingml/2006/main" noGrp="1"/>
+            <a:spLocks noGrp="1"/>
           </p:cNvSpPr>
           <p:nvPr/>
         </p:nvSpPr>
         <p:spPr>
-          <a:xfrm xmlns:a="http://schemas.openxmlformats.org/drawingml/2006/main">
+          <a:xfrm>
             <a:off x="2457450" y="2038350"/>
             <a:ext cx="1428750" cy="990600"/>
           </a:xfrm>
-          <a:prstGeom xmlns:a="http://schemas.openxmlformats.org/drawingml/2006/main" prst="roundRect">
+          <a:prstGeom prst="roundRect">
             <a:avLst>
               <a:gd name="adj" fmla="val 7692"/>
             </a:avLst>
           </a:prstGeom>
-          <a:solidFill xmlns:a="http://schemas.openxmlformats.org/drawingml/2006/main">
+          <a:solidFill>
             <a:srgbClr val="FFFFFF"/>
           </a:solidFill>
-          <a:ln xmlns:a="http://schemas.openxmlformats.org/drawingml/2006/main" w="9525">
+          <a:ln w="9525">
             <a:solidFill>
               <a:srgbClr val="E1E5EA"/>
             </a:solidFill>
             <a:prstDash val="solid"/>
           </a:ln>
         </p:spPr>
-      </p:sp>
-      <p:sp>
-        <p:nvSpPr>
-          <p:cNvPr id="10" name="">
-            <a:extLst xmlns:a="http://schemas.openxmlformats.org/drawingml/2006/main">
+        <p:txBody>
+          <a:bodyPr/>
+          <a:lstStyle/>
+          <a:p>
+            <a:endParaRPr lang="en-US"/>
+          </a:p>
+        </p:txBody>
+      </p:sp>
+      <p:sp>
+        <p:nvSpPr>
+          <p:cNvPr id="10" name="Rectangle 9">
+            <a:extLst>
               <a:ext uri="{FF2B5EF4-FFF2-40B4-BE49-F238E27FC236}">
                 <a16:creationId xmlns:a16="http://schemas.microsoft.com/office/drawing/2014/main" id="{656472FD-8BF4-4615-BFED-FF7E4712CF45}"/>
               </a:ext>
             </a:extLst>
           </p:cNvPr>
           <p:cNvSpPr>
-            <a:spLocks xmlns:a="http://schemas.openxmlformats.org/drawingml/2006/main" noGrp="1"/>
+            <a:spLocks noGrp="1"/>
           </p:cNvSpPr>
           <p:nvPr/>
         </p:nvSpPr>
         <p:spPr>
-          <a:xfrm xmlns:a="http://schemas.openxmlformats.org/drawingml/2006/main">
+          <a:xfrm>
             <a:off x="2552700" y="2171700"/>
             <a:ext cx="1238250" cy="381000"/>
           </a:xfrm>
-          <a:prstGeom xmlns:a="http://schemas.openxmlformats.org/drawingml/2006/main" prst="rect">
+          <a:prstGeom prst="rect">
             <a:avLst/>
           </a:prstGeom>
-          <a:noFill xmlns:a="http://schemas.openxmlformats.org/drawingml/2006/main"/>
-          <a:ln xmlns:a="http://schemas.openxmlformats.org/drawingml/2006/main" w="0">
+          <a:noFill/>
+          <a:ln w="0">
             <a:noFill/>
             <a:prstDash val="solid"/>
           </a:ln>
         </p:spPr>
         <p:txBody>
-          <a:bodyPr xmlns:a="http://schemas.openxmlformats.org/drawingml/2006/main">
+          <a:bodyPr>
             <a:noAutofit/>
           </a:bodyPr>
-          <a:lstStyle xmlns:a="http://schemas.openxmlformats.org/drawingml/2006/main">
+          <a:lstStyle>
             <a:defPPr>
               <a:defRPr sz="1125" b="1">
                 <a:solidFill>
@@ -6158,7 +6024,7 @@
               </a:defRPr>
             </a:defPPr>
           </a:lstStyle>
-          <a:p xmlns:a="http://schemas.openxmlformats.org/drawingml/2006/main">
+          <a:p>
             <a:pPr>
               <a:defRPr sz="1125" b="1">
                 <a:solidFill>
@@ -6185,37 +6051,37 @@
       </p:sp>
       <p:sp>
         <p:nvSpPr>
-          <p:cNvPr id="11" name="">
-            <a:extLst xmlns:a="http://schemas.openxmlformats.org/drawingml/2006/main">
+          <p:cNvPr id="11" name="Rectangle 10">
+            <a:extLst>
               <a:ext uri="{FF2B5EF4-FFF2-40B4-BE49-F238E27FC236}">
                 <a16:creationId xmlns:a16="http://schemas.microsoft.com/office/drawing/2014/main" id="{1A872283-02A5-4C5F-BB7A-0F4C34033FF0}"/>
               </a:ext>
             </a:extLst>
           </p:cNvPr>
           <p:cNvSpPr>
-            <a:spLocks xmlns:a="http://schemas.openxmlformats.org/drawingml/2006/main" noGrp="1"/>
+            <a:spLocks noGrp="1"/>
           </p:cNvSpPr>
           <p:nvPr/>
         </p:nvSpPr>
         <p:spPr>
-          <a:xfrm xmlns:a="http://schemas.openxmlformats.org/drawingml/2006/main">
+          <a:xfrm>
             <a:off x="2552700" y="2533650"/>
             <a:ext cx="1238250" cy="381000"/>
           </a:xfrm>
-          <a:prstGeom xmlns:a="http://schemas.openxmlformats.org/drawingml/2006/main" prst="rect">
+          <a:prstGeom prst="rect">
             <a:avLst/>
           </a:prstGeom>
-          <a:noFill xmlns:a="http://schemas.openxmlformats.org/drawingml/2006/main"/>
-          <a:ln xmlns:a="http://schemas.openxmlformats.org/drawingml/2006/main" w="0">
+          <a:noFill/>
+          <a:ln w="0">
             <a:noFill/>
             <a:prstDash val="solid"/>
           </a:ln>
         </p:spPr>
         <p:txBody>
-          <a:bodyPr xmlns:a="http://schemas.openxmlformats.org/drawingml/2006/main">
+          <a:bodyPr>
             <a:noAutofit/>
           </a:bodyPr>
-          <a:lstStyle xmlns:a="http://schemas.openxmlformats.org/drawingml/2006/main">
+          <a:lstStyle>
             <a:defPPr>
               <a:defRPr sz="938" b="0">
                 <a:solidFill>
@@ -6227,7 +6093,7 @@
               </a:defRPr>
             </a:defPPr>
           </a:lstStyle>
-          <a:p xmlns:a="http://schemas.openxmlformats.org/drawingml/2006/main">
+          <a:p>
             <a:pPr>
               <a:defRPr sz="938" b="0">
                 <a:solidFill>
@@ -6254,103 +6120,117 @@
       </p:sp>
       <p:sp>
         <p:nvSpPr>
-          <p:cNvPr id="12" name="">
-            <a:extLst xmlns:a="http://schemas.openxmlformats.org/drawingml/2006/main">
+          <p:cNvPr id="12" name="Right Arrow 11">
+            <a:extLst>
               <a:ext uri="{FF2B5EF4-FFF2-40B4-BE49-F238E27FC236}">
                 <a16:creationId xmlns:a16="http://schemas.microsoft.com/office/drawing/2014/main" id="{55250DF7-AC58-4026-9F8F-E7AF61C8AAE7}"/>
               </a:ext>
             </a:extLst>
           </p:cNvPr>
           <p:cNvSpPr>
-            <a:spLocks xmlns:a="http://schemas.openxmlformats.org/drawingml/2006/main" noGrp="1"/>
+            <a:spLocks noGrp="1"/>
           </p:cNvSpPr>
           <p:nvPr/>
         </p:nvSpPr>
         <p:spPr>
-          <a:xfrm xmlns:a="http://schemas.openxmlformats.org/drawingml/2006/main">
+          <a:xfrm>
             <a:off x="3943350" y="2457450"/>
             <a:ext cx="228600" cy="152400"/>
           </a:xfrm>
-          <a:prstGeom xmlns:a="http://schemas.openxmlformats.org/drawingml/2006/main" prst="rightArrow">
+          <a:prstGeom prst="rightArrow">
             <a:avLst/>
           </a:prstGeom>
-          <a:solidFill xmlns:a="http://schemas.openxmlformats.org/drawingml/2006/main">
+          <a:solidFill>
             <a:srgbClr val="8A94A3"/>
           </a:solidFill>
-          <a:ln xmlns:a="http://schemas.openxmlformats.org/drawingml/2006/main" w="0">
+          <a:ln w="0">
             <a:noFill/>
             <a:prstDash val="solid"/>
           </a:ln>
         </p:spPr>
+        <p:txBody>
+          <a:bodyPr/>
+          <a:lstStyle/>
+          <a:p>
+            <a:endParaRPr lang="en-US"/>
+          </a:p>
+        </p:txBody>
       </p:sp>
       <p:sp>
         <p:nvSpPr>
           <p:cNvPr id="13" name="flow-Recipient accepts">
-            <a:extLst xmlns:a="http://schemas.openxmlformats.org/drawingml/2006/main">
+            <a:extLst>
               <a:ext uri="{FF2B5EF4-FFF2-40B4-BE49-F238E27FC236}">
                 <a16:creationId xmlns:a16="http://schemas.microsoft.com/office/drawing/2014/main" id="{8C46C6AB-9D50-4160-80A4-E1F3CBC359E0}"/>
               </a:ext>
             </a:extLst>
           </p:cNvPr>
           <p:cNvSpPr>
-            <a:spLocks xmlns:a="http://schemas.openxmlformats.org/drawingml/2006/main" noGrp="1"/>
+            <a:spLocks noGrp="1"/>
           </p:cNvSpPr>
           <p:nvPr/>
         </p:nvSpPr>
         <p:spPr>
-          <a:xfrm xmlns:a="http://schemas.openxmlformats.org/drawingml/2006/main">
+          <a:xfrm>
             <a:off x="4229100" y="2038350"/>
             <a:ext cx="1428750" cy="990600"/>
           </a:xfrm>
-          <a:prstGeom xmlns:a="http://schemas.openxmlformats.org/drawingml/2006/main" prst="roundRect">
+          <a:prstGeom prst="roundRect">
             <a:avLst>
               <a:gd name="adj" fmla="val 7692"/>
             </a:avLst>
           </a:prstGeom>
-          <a:solidFill xmlns:a="http://schemas.openxmlformats.org/drawingml/2006/main">
+          <a:solidFill>
             <a:srgbClr val="FFFFFF"/>
           </a:solidFill>
-          <a:ln xmlns:a="http://schemas.openxmlformats.org/drawingml/2006/main" w="9525">
+          <a:ln w="9525">
             <a:solidFill>
               <a:srgbClr val="E1E5EA"/>
             </a:solidFill>
             <a:prstDash val="solid"/>
           </a:ln>
         </p:spPr>
-      </p:sp>
-      <p:sp>
-        <p:nvSpPr>
-          <p:cNvPr id="14" name="">
-            <a:extLst xmlns:a="http://schemas.openxmlformats.org/drawingml/2006/main">
+        <p:txBody>
+          <a:bodyPr/>
+          <a:lstStyle/>
+          <a:p>
+            <a:endParaRPr lang="en-US"/>
+          </a:p>
+        </p:txBody>
+      </p:sp>
+      <p:sp>
+        <p:nvSpPr>
+          <p:cNvPr id="14" name="Rectangle 13">
+            <a:extLst>
               <a:ext uri="{FF2B5EF4-FFF2-40B4-BE49-F238E27FC236}">
                 <a16:creationId xmlns:a16="http://schemas.microsoft.com/office/drawing/2014/main" id="{F021F9E5-AC87-4D29-839D-45DDFBAA0F21}"/>
               </a:ext>
             </a:extLst>
           </p:cNvPr>
           <p:cNvSpPr>
-            <a:spLocks xmlns:a="http://schemas.openxmlformats.org/drawingml/2006/main" noGrp="1"/>
+            <a:spLocks noGrp="1"/>
           </p:cNvSpPr>
           <p:nvPr/>
         </p:nvSpPr>
         <p:spPr>
-          <a:xfrm xmlns:a="http://schemas.openxmlformats.org/drawingml/2006/main">
+          <a:xfrm>
             <a:off x="4324350" y="2171700"/>
             <a:ext cx="1238250" cy="381000"/>
           </a:xfrm>
-          <a:prstGeom xmlns:a="http://schemas.openxmlformats.org/drawingml/2006/main" prst="rect">
+          <a:prstGeom prst="rect">
             <a:avLst/>
           </a:prstGeom>
-          <a:noFill xmlns:a="http://schemas.openxmlformats.org/drawingml/2006/main"/>
-          <a:ln xmlns:a="http://schemas.openxmlformats.org/drawingml/2006/main" w="0">
+          <a:noFill/>
+          <a:ln w="0">
             <a:noFill/>
             <a:prstDash val="solid"/>
           </a:ln>
         </p:spPr>
         <p:txBody>
-          <a:bodyPr xmlns:a="http://schemas.openxmlformats.org/drawingml/2006/main">
+          <a:bodyPr>
             <a:noAutofit/>
           </a:bodyPr>
-          <a:lstStyle xmlns:a="http://schemas.openxmlformats.org/drawingml/2006/main">
+          <a:lstStyle>
             <a:defPPr>
               <a:defRPr sz="1125" b="1">
                 <a:solidFill>
@@ -6362,7 +6242,7 @@
               </a:defRPr>
             </a:defPPr>
           </a:lstStyle>
-          <a:p xmlns:a="http://schemas.openxmlformats.org/drawingml/2006/main">
+          <a:p>
             <a:pPr>
               <a:defRPr sz="1125" b="1">
                 <a:solidFill>
@@ -6389,37 +6269,37 @@
       </p:sp>
       <p:sp>
         <p:nvSpPr>
-          <p:cNvPr id="15" name="">
-            <a:extLst xmlns:a="http://schemas.openxmlformats.org/drawingml/2006/main">
+          <p:cNvPr id="15" name="Rectangle 14">
+            <a:extLst>
               <a:ext uri="{FF2B5EF4-FFF2-40B4-BE49-F238E27FC236}">
                 <a16:creationId xmlns:a16="http://schemas.microsoft.com/office/drawing/2014/main" id="{CAE87D52-CD57-4471-8E3F-7A8A1993F2B9}"/>
               </a:ext>
             </a:extLst>
           </p:cNvPr>
           <p:cNvSpPr>
-            <a:spLocks xmlns:a="http://schemas.openxmlformats.org/drawingml/2006/main" noGrp="1"/>
+            <a:spLocks noGrp="1"/>
           </p:cNvSpPr>
           <p:nvPr/>
         </p:nvSpPr>
         <p:spPr>
-          <a:xfrm xmlns:a="http://schemas.openxmlformats.org/drawingml/2006/main">
+          <a:xfrm>
             <a:off x="4324350" y="2533650"/>
             <a:ext cx="1238250" cy="381000"/>
           </a:xfrm>
-          <a:prstGeom xmlns:a="http://schemas.openxmlformats.org/drawingml/2006/main" prst="rect">
+          <a:prstGeom prst="rect">
             <a:avLst/>
           </a:prstGeom>
-          <a:noFill xmlns:a="http://schemas.openxmlformats.org/drawingml/2006/main"/>
-          <a:ln xmlns:a="http://schemas.openxmlformats.org/drawingml/2006/main" w="0">
+          <a:noFill/>
+          <a:ln w="0">
             <a:noFill/>
             <a:prstDash val="solid"/>
           </a:ln>
         </p:spPr>
         <p:txBody>
-          <a:bodyPr xmlns:a="http://schemas.openxmlformats.org/drawingml/2006/main">
+          <a:bodyPr>
             <a:noAutofit/>
           </a:bodyPr>
-          <a:lstStyle xmlns:a="http://schemas.openxmlformats.org/drawingml/2006/main">
+          <a:lstStyle>
             <a:defPPr>
               <a:defRPr sz="938" b="0">
                 <a:solidFill>
@@ -6431,7 +6311,7 @@
               </a:defRPr>
             </a:defPPr>
           </a:lstStyle>
-          <a:p xmlns:a="http://schemas.openxmlformats.org/drawingml/2006/main">
+          <a:p>
             <a:pPr>
               <a:defRPr sz="938" b="0">
                 <a:solidFill>
@@ -6458,103 +6338,117 @@
       </p:sp>
       <p:sp>
         <p:nvSpPr>
-          <p:cNvPr id="16" name="">
-            <a:extLst xmlns:a="http://schemas.openxmlformats.org/drawingml/2006/main">
+          <p:cNvPr id="16" name="Right Arrow 15">
+            <a:extLst>
               <a:ext uri="{FF2B5EF4-FFF2-40B4-BE49-F238E27FC236}">
                 <a16:creationId xmlns:a16="http://schemas.microsoft.com/office/drawing/2014/main" id="{E50C31C9-B8D2-4767-8F2F-D0E0FD567D38}"/>
               </a:ext>
             </a:extLst>
           </p:cNvPr>
           <p:cNvSpPr>
-            <a:spLocks xmlns:a="http://schemas.openxmlformats.org/drawingml/2006/main" noGrp="1"/>
+            <a:spLocks noGrp="1"/>
           </p:cNvSpPr>
           <p:nvPr/>
         </p:nvSpPr>
         <p:spPr>
-          <a:xfrm xmlns:a="http://schemas.openxmlformats.org/drawingml/2006/main">
+          <a:xfrm>
             <a:off x="5715000" y="2457450"/>
             <a:ext cx="228600" cy="152400"/>
           </a:xfrm>
-          <a:prstGeom xmlns:a="http://schemas.openxmlformats.org/drawingml/2006/main" prst="rightArrow">
+          <a:prstGeom prst="rightArrow">
             <a:avLst/>
           </a:prstGeom>
-          <a:solidFill xmlns:a="http://schemas.openxmlformats.org/drawingml/2006/main">
+          <a:solidFill>
             <a:srgbClr val="8A94A3"/>
           </a:solidFill>
-          <a:ln xmlns:a="http://schemas.openxmlformats.org/drawingml/2006/main" w="0">
+          <a:ln w="0">
             <a:noFill/>
             <a:prstDash val="solid"/>
           </a:ln>
         </p:spPr>
+        <p:txBody>
+          <a:bodyPr/>
+          <a:lstStyle/>
+          <a:p>
+            <a:endParaRPr lang="en-US"/>
+          </a:p>
+        </p:txBody>
       </p:sp>
       <p:sp>
         <p:nvSpPr>
           <p:cNvPr id="17" name="flow-Volunteer collects">
-            <a:extLst xmlns:a="http://schemas.openxmlformats.org/drawingml/2006/main">
+            <a:extLst>
               <a:ext uri="{FF2B5EF4-FFF2-40B4-BE49-F238E27FC236}">
                 <a16:creationId xmlns:a16="http://schemas.microsoft.com/office/drawing/2014/main" id="{5C68DFD4-2D3A-449C-8E68-0CB35E259AE5}"/>
               </a:ext>
             </a:extLst>
           </p:cNvPr>
           <p:cNvSpPr>
-            <a:spLocks xmlns:a="http://schemas.openxmlformats.org/drawingml/2006/main" noGrp="1"/>
+            <a:spLocks noGrp="1"/>
           </p:cNvSpPr>
           <p:nvPr/>
         </p:nvSpPr>
         <p:spPr>
-          <a:xfrm xmlns:a="http://schemas.openxmlformats.org/drawingml/2006/main">
+          <a:xfrm>
             <a:off x="6000750" y="2038350"/>
             <a:ext cx="1428750" cy="990600"/>
           </a:xfrm>
-          <a:prstGeom xmlns:a="http://schemas.openxmlformats.org/drawingml/2006/main" prst="roundRect">
+          <a:prstGeom prst="roundRect">
             <a:avLst>
               <a:gd name="adj" fmla="val 7692"/>
             </a:avLst>
           </a:prstGeom>
-          <a:solidFill xmlns:a="http://schemas.openxmlformats.org/drawingml/2006/main">
+          <a:solidFill>
             <a:srgbClr val="FFFFFF"/>
           </a:solidFill>
-          <a:ln xmlns:a="http://schemas.openxmlformats.org/drawingml/2006/main" w="9525">
+          <a:ln w="9525">
             <a:solidFill>
               <a:srgbClr val="E1E5EA"/>
             </a:solidFill>
             <a:prstDash val="solid"/>
           </a:ln>
         </p:spPr>
-      </p:sp>
-      <p:sp>
-        <p:nvSpPr>
-          <p:cNvPr id="18" name="">
-            <a:extLst xmlns:a="http://schemas.openxmlformats.org/drawingml/2006/main">
+        <p:txBody>
+          <a:bodyPr/>
+          <a:lstStyle/>
+          <a:p>
+            <a:endParaRPr lang="en-US"/>
+          </a:p>
+        </p:txBody>
+      </p:sp>
+      <p:sp>
+        <p:nvSpPr>
+          <p:cNvPr id="18" name="Rectangle 17">
+            <a:extLst>
               <a:ext uri="{FF2B5EF4-FFF2-40B4-BE49-F238E27FC236}">
                 <a16:creationId xmlns:a16="http://schemas.microsoft.com/office/drawing/2014/main" id="{7D9E8891-DC3E-4F8E-B6CE-424633B41A43}"/>
               </a:ext>
             </a:extLst>
           </p:cNvPr>
           <p:cNvSpPr>
-            <a:spLocks xmlns:a="http://schemas.openxmlformats.org/drawingml/2006/main" noGrp="1"/>
+            <a:spLocks noGrp="1"/>
           </p:cNvSpPr>
           <p:nvPr/>
         </p:nvSpPr>
         <p:spPr>
-          <a:xfrm xmlns:a="http://schemas.openxmlformats.org/drawingml/2006/main">
+          <a:xfrm>
             <a:off x="6096000" y="2171700"/>
             <a:ext cx="1238250" cy="381000"/>
           </a:xfrm>
-          <a:prstGeom xmlns:a="http://schemas.openxmlformats.org/drawingml/2006/main" prst="rect">
+          <a:prstGeom prst="rect">
             <a:avLst/>
           </a:prstGeom>
-          <a:noFill xmlns:a="http://schemas.openxmlformats.org/drawingml/2006/main"/>
-          <a:ln xmlns:a="http://schemas.openxmlformats.org/drawingml/2006/main" w="0">
+          <a:noFill/>
+          <a:ln w="0">
             <a:noFill/>
             <a:prstDash val="solid"/>
           </a:ln>
         </p:spPr>
         <p:txBody>
-          <a:bodyPr xmlns:a="http://schemas.openxmlformats.org/drawingml/2006/main">
+          <a:bodyPr>
             <a:noAutofit/>
           </a:bodyPr>
-          <a:lstStyle xmlns:a="http://schemas.openxmlformats.org/drawingml/2006/main">
+          <a:lstStyle>
             <a:defPPr>
               <a:defRPr sz="1125" b="1">
                 <a:solidFill>
@@ -6566,7 +6460,7 @@
               </a:defRPr>
             </a:defPPr>
           </a:lstStyle>
-          <a:p xmlns:a="http://schemas.openxmlformats.org/drawingml/2006/main">
+          <a:p>
             <a:pPr>
               <a:defRPr sz="1125" b="1">
                 <a:solidFill>
@@ -6593,37 +6487,37 @@
       </p:sp>
       <p:sp>
         <p:nvSpPr>
-          <p:cNvPr id="19" name="">
-            <a:extLst xmlns:a="http://schemas.openxmlformats.org/drawingml/2006/main">
+          <p:cNvPr id="19" name="Rectangle 18">
+            <a:extLst>
               <a:ext uri="{FF2B5EF4-FFF2-40B4-BE49-F238E27FC236}">
                 <a16:creationId xmlns:a16="http://schemas.microsoft.com/office/drawing/2014/main" id="{7EBAFA41-8CBD-4742-9848-DEC432E6AB62}"/>
               </a:ext>
             </a:extLst>
           </p:cNvPr>
           <p:cNvSpPr>
-            <a:spLocks xmlns:a="http://schemas.openxmlformats.org/drawingml/2006/main" noGrp="1"/>
+            <a:spLocks noGrp="1"/>
           </p:cNvSpPr>
           <p:nvPr/>
         </p:nvSpPr>
         <p:spPr>
-          <a:xfrm xmlns:a="http://schemas.openxmlformats.org/drawingml/2006/main">
+          <a:xfrm>
             <a:off x="6096000" y="2533650"/>
             <a:ext cx="1238250" cy="381000"/>
           </a:xfrm>
-          <a:prstGeom xmlns:a="http://schemas.openxmlformats.org/drawingml/2006/main" prst="rect">
+          <a:prstGeom prst="rect">
             <a:avLst/>
           </a:prstGeom>
-          <a:noFill xmlns:a="http://schemas.openxmlformats.org/drawingml/2006/main"/>
-          <a:ln xmlns:a="http://schemas.openxmlformats.org/drawingml/2006/main" w="0">
+          <a:noFill/>
+          <a:ln w="0">
             <a:noFill/>
             <a:prstDash val="solid"/>
           </a:ln>
         </p:spPr>
         <p:txBody>
-          <a:bodyPr xmlns:a="http://schemas.openxmlformats.org/drawingml/2006/main">
+          <a:bodyPr>
             <a:noAutofit/>
           </a:bodyPr>
-          <a:lstStyle xmlns:a="http://schemas.openxmlformats.org/drawingml/2006/main">
+          <a:lstStyle>
             <a:defPPr>
               <a:defRPr sz="938" b="0">
                 <a:solidFill>
@@ -6635,7 +6529,7 @@
               </a:defRPr>
             </a:defPPr>
           </a:lstStyle>
-          <a:p xmlns:a="http://schemas.openxmlformats.org/drawingml/2006/main">
+          <a:p>
             <a:pPr>
               <a:defRPr sz="938" b="0">
                 <a:solidFill>
@@ -6662,103 +6556,117 @@
       </p:sp>
       <p:sp>
         <p:nvSpPr>
-          <p:cNvPr id="20" name="">
-            <a:extLst xmlns:a="http://schemas.openxmlformats.org/drawingml/2006/main">
+          <p:cNvPr id="20" name="Right Arrow 19">
+            <a:extLst>
               <a:ext uri="{FF2B5EF4-FFF2-40B4-BE49-F238E27FC236}">
                 <a16:creationId xmlns:a16="http://schemas.microsoft.com/office/drawing/2014/main" id="{9F43274B-4013-48D9-AE58-C20348F586C4}"/>
               </a:ext>
             </a:extLst>
           </p:cNvPr>
           <p:cNvSpPr>
-            <a:spLocks xmlns:a="http://schemas.openxmlformats.org/drawingml/2006/main" noGrp="1"/>
+            <a:spLocks noGrp="1"/>
           </p:cNvSpPr>
           <p:nvPr/>
         </p:nvSpPr>
         <p:spPr>
-          <a:xfrm xmlns:a="http://schemas.openxmlformats.org/drawingml/2006/main">
+          <a:xfrm>
             <a:off x="7486650" y="2457450"/>
             <a:ext cx="228600" cy="152400"/>
           </a:xfrm>
-          <a:prstGeom xmlns:a="http://schemas.openxmlformats.org/drawingml/2006/main" prst="rightArrow">
+          <a:prstGeom prst="rightArrow">
             <a:avLst/>
           </a:prstGeom>
-          <a:solidFill xmlns:a="http://schemas.openxmlformats.org/drawingml/2006/main">
+          <a:solidFill>
             <a:srgbClr val="8A94A3"/>
           </a:solidFill>
-          <a:ln xmlns:a="http://schemas.openxmlformats.org/drawingml/2006/main" w="0">
+          <a:ln w="0">
             <a:noFill/>
             <a:prstDash val="solid"/>
           </a:ln>
         </p:spPr>
+        <p:txBody>
+          <a:bodyPr/>
+          <a:lstStyle/>
+          <a:p>
+            <a:endParaRPr lang="en-US"/>
+          </a:p>
+        </p:txBody>
       </p:sp>
       <p:sp>
         <p:nvSpPr>
           <p:cNvPr id="21" name="flow-Delivered">
-            <a:extLst xmlns:a="http://schemas.openxmlformats.org/drawingml/2006/main">
+            <a:extLst>
               <a:ext uri="{FF2B5EF4-FFF2-40B4-BE49-F238E27FC236}">
                 <a16:creationId xmlns:a16="http://schemas.microsoft.com/office/drawing/2014/main" id="{483686DF-8306-4487-9DC5-0DAD785AC3C7}"/>
               </a:ext>
             </a:extLst>
           </p:cNvPr>
           <p:cNvSpPr>
-            <a:spLocks xmlns:a="http://schemas.openxmlformats.org/drawingml/2006/main" noGrp="1"/>
+            <a:spLocks noGrp="1"/>
           </p:cNvSpPr>
           <p:nvPr/>
         </p:nvSpPr>
         <p:spPr>
-          <a:xfrm xmlns:a="http://schemas.openxmlformats.org/drawingml/2006/main">
+          <a:xfrm>
             <a:off x="7772400" y="2038350"/>
             <a:ext cx="1428750" cy="990600"/>
           </a:xfrm>
-          <a:prstGeom xmlns:a="http://schemas.openxmlformats.org/drawingml/2006/main" prst="roundRect">
+          <a:prstGeom prst="roundRect">
             <a:avLst>
               <a:gd name="adj" fmla="val 7692"/>
             </a:avLst>
           </a:prstGeom>
-          <a:solidFill xmlns:a="http://schemas.openxmlformats.org/drawingml/2006/main">
+          <a:solidFill>
             <a:srgbClr val="FFFFFF"/>
           </a:solidFill>
-          <a:ln xmlns:a="http://schemas.openxmlformats.org/drawingml/2006/main" w="9525">
+          <a:ln w="9525">
             <a:solidFill>
               <a:srgbClr val="E1E5EA"/>
             </a:solidFill>
             <a:prstDash val="solid"/>
           </a:ln>
         </p:spPr>
-      </p:sp>
-      <p:sp>
-        <p:nvSpPr>
-          <p:cNvPr id="22" name="">
-            <a:extLst xmlns:a="http://schemas.openxmlformats.org/drawingml/2006/main">
+        <p:txBody>
+          <a:bodyPr/>
+          <a:lstStyle/>
+          <a:p>
+            <a:endParaRPr lang="en-US"/>
+          </a:p>
+        </p:txBody>
+      </p:sp>
+      <p:sp>
+        <p:nvSpPr>
+          <p:cNvPr id="22" name="Rectangle 21">
+            <a:extLst>
               <a:ext uri="{FF2B5EF4-FFF2-40B4-BE49-F238E27FC236}">
                 <a16:creationId xmlns:a16="http://schemas.microsoft.com/office/drawing/2014/main" id="{84215A05-63C6-44CD-BBD5-15B1332AFA4F}"/>
               </a:ext>
             </a:extLst>
           </p:cNvPr>
           <p:cNvSpPr>
-            <a:spLocks xmlns:a="http://schemas.openxmlformats.org/drawingml/2006/main" noGrp="1"/>
+            <a:spLocks noGrp="1"/>
           </p:cNvSpPr>
           <p:nvPr/>
         </p:nvSpPr>
         <p:spPr>
-          <a:xfrm xmlns:a="http://schemas.openxmlformats.org/drawingml/2006/main">
+          <a:xfrm>
             <a:off x="7867650" y="2171700"/>
             <a:ext cx="1238250" cy="381000"/>
           </a:xfrm>
-          <a:prstGeom xmlns:a="http://schemas.openxmlformats.org/drawingml/2006/main" prst="rect">
+          <a:prstGeom prst="rect">
             <a:avLst/>
           </a:prstGeom>
-          <a:noFill xmlns:a="http://schemas.openxmlformats.org/drawingml/2006/main"/>
-          <a:ln xmlns:a="http://schemas.openxmlformats.org/drawingml/2006/main" w="0">
+          <a:noFill/>
+          <a:ln w="0">
             <a:noFill/>
             <a:prstDash val="solid"/>
           </a:ln>
         </p:spPr>
         <p:txBody>
-          <a:bodyPr xmlns:a="http://schemas.openxmlformats.org/drawingml/2006/main">
+          <a:bodyPr>
             <a:noAutofit/>
           </a:bodyPr>
-          <a:lstStyle xmlns:a="http://schemas.openxmlformats.org/drawingml/2006/main">
+          <a:lstStyle>
             <a:defPPr>
               <a:defRPr sz="1125" b="1">
                 <a:solidFill>
@@ -6770,7 +6678,7 @@
               </a:defRPr>
             </a:defPPr>
           </a:lstStyle>
-          <a:p xmlns:a="http://schemas.openxmlformats.org/drawingml/2006/main">
+          <a:p>
             <a:pPr>
               <a:defRPr sz="1125" b="1">
                 <a:solidFill>
@@ -6797,37 +6705,37 @@
       </p:sp>
       <p:sp>
         <p:nvSpPr>
-          <p:cNvPr id="23" name="">
-            <a:extLst xmlns:a="http://schemas.openxmlformats.org/drawingml/2006/main">
+          <p:cNvPr id="23" name="Rectangle 22">
+            <a:extLst>
               <a:ext uri="{FF2B5EF4-FFF2-40B4-BE49-F238E27FC236}">
                 <a16:creationId xmlns:a16="http://schemas.microsoft.com/office/drawing/2014/main" id="{16E0659A-F66E-422D-9587-5D1729DAB0FE}"/>
               </a:ext>
             </a:extLst>
           </p:cNvPr>
           <p:cNvSpPr>
-            <a:spLocks xmlns:a="http://schemas.openxmlformats.org/drawingml/2006/main" noGrp="1"/>
+            <a:spLocks noGrp="1"/>
           </p:cNvSpPr>
           <p:nvPr/>
         </p:nvSpPr>
         <p:spPr>
-          <a:xfrm xmlns:a="http://schemas.openxmlformats.org/drawingml/2006/main">
+          <a:xfrm>
             <a:off x="7867650" y="2533650"/>
             <a:ext cx="1238250" cy="381000"/>
           </a:xfrm>
-          <a:prstGeom xmlns:a="http://schemas.openxmlformats.org/drawingml/2006/main" prst="rect">
+          <a:prstGeom prst="rect">
             <a:avLst/>
           </a:prstGeom>
-          <a:noFill xmlns:a="http://schemas.openxmlformats.org/drawingml/2006/main"/>
-          <a:ln xmlns:a="http://schemas.openxmlformats.org/drawingml/2006/main" w="0">
+          <a:noFill/>
+          <a:ln w="0">
             <a:noFill/>
             <a:prstDash val="solid"/>
           </a:ln>
         </p:spPr>
         <p:txBody>
-          <a:bodyPr xmlns:a="http://schemas.openxmlformats.org/drawingml/2006/main">
+          <a:bodyPr>
             <a:noAutofit/>
           </a:bodyPr>
-          <a:lstStyle xmlns:a="http://schemas.openxmlformats.org/drawingml/2006/main">
+          <a:lstStyle>
             <a:defPPr>
               <a:defRPr sz="938" b="0">
                 <a:solidFill>
@@ -6839,7 +6747,7 @@
               </a:defRPr>
             </a:defPPr>
           </a:lstStyle>
-          <a:p xmlns:a="http://schemas.openxmlformats.org/drawingml/2006/main">
+          <a:p>
             <a:pPr>
               <a:defRPr sz="938" b="0">
                 <a:solidFill>
@@ -6866,103 +6774,117 @@
       </p:sp>
       <p:sp>
         <p:nvSpPr>
-          <p:cNvPr id="24" name="">
-            <a:extLst xmlns:a="http://schemas.openxmlformats.org/drawingml/2006/main">
+          <p:cNvPr id="24" name="Right Arrow 23">
+            <a:extLst>
               <a:ext uri="{FF2B5EF4-FFF2-40B4-BE49-F238E27FC236}">
                 <a16:creationId xmlns:a16="http://schemas.microsoft.com/office/drawing/2014/main" id="{95BAABE2-0F23-42E0-BA6F-0AF825713834}"/>
               </a:ext>
             </a:extLst>
           </p:cNvPr>
           <p:cNvSpPr>
-            <a:spLocks xmlns:a="http://schemas.openxmlformats.org/drawingml/2006/main" noGrp="1"/>
+            <a:spLocks noGrp="1"/>
           </p:cNvSpPr>
           <p:nvPr/>
         </p:nvSpPr>
         <p:spPr>
-          <a:xfrm xmlns:a="http://schemas.openxmlformats.org/drawingml/2006/main">
+          <a:xfrm>
             <a:off x="9258300" y="2457450"/>
             <a:ext cx="228600" cy="152400"/>
           </a:xfrm>
-          <a:prstGeom xmlns:a="http://schemas.openxmlformats.org/drawingml/2006/main" prst="rightArrow">
+          <a:prstGeom prst="rightArrow">
             <a:avLst/>
           </a:prstGeom>
-          <a:solidFill xmlns:a="http://schemas.openxmlformats.org/drawingml/2006/main">
+          <a:solidFill>
             <a:srgbClr val="8A94A3"/>
           </a:solidFill>
-          <a:ln xmlns:a="http://schemas.openxmlformats.org/drawingml/2006/main" w="0">
+          <a:ln w="0">
             <a:noFill/>
             <a:prstDash val="solid"/>
           </a:ln>
         </p:spPr>
+        <p:txBody>
+          <a:bodyPr/>
+          <a:lstStyle/>
+          <a:p>
+            <a:endParaRPr lang="en-US"/>
+          </a:p>
+        </p:txBody>
       </p:sp>
       <p:sp>
         <p:nvSpPr>
           <p:cNvPr id="25" name="flow-Reports update">
-            <a:extLst xmlns:a="http://schemas.openxmlformats.org/drawingml/2006/main">
+            <a:extLst>
               <a:ext uri="{FF2B5EF4-FFF2-40B4-BE49-F238E27FC236}">
                 <a16:creationId xmlns:a16="http://schemas.microsoft.com/office/drawing/2014/main" id="{D8399FE1-B71F-494C-A7F7-D53DEEF68E65}"/>
               </a:ext>
             </a:extLst>
           </p:cNvPr>
           <p:cNvSpPr>
-            <a:spLocks xmlns:a="http://schemas.openxmlformats.org/drawingml/2006/main" noGrp="1"/>
+            <a:spLocks noGrp="1"/>
           </p:cNvSpPr>
           <p:nvPr/>
         </p:nvSpPr>
         <p:spPr>
-          <a:xfrm xmlns:a="http://schemas.openxmlformats.org/drawingml/2006/main">
+          <a:xfrm>
             <a:off x="9544050" y="2038350"/>
             <a:ext cx="1428750" cy="990600"/>
           </a:xfrm>
-          <a:prstGeom xmlns:a="http://schemas.openxmlformats.org/drawingml/2006/main" prst="roundRect">
+          <a:prstGeom prst="roundRect">
             <a:avLst>
               <a:gd name="adj" fmla="val 7692"/>
             </a:avLst>
           </a:prstGeom>
-          <a:solidFill xmlns:a="http://schemas.openxmlformats.org/drawingml/2006/main">
+          <a:solidFill>
             <a:srgbClr val="FFFFFF"/>
           </a:solidFill>
-          <a:ln xmlns:a="http://schemas.openxmlformats.org/drawingml/2006/main" w="9525">
+          <a:ln w="9525">
             <a:solidFill>
               <a:srgbClr val="E1E5EA"/>
             </a:solidFill>
             <a:prstDash val="solid"/>
           </a:ln>
         </p:spPr>
-      </p:sp>
-      <p:sp>
-        <p:nvSpPr>
-          <p:cNvPr id="26" name="">
-            <a:extLst xmlns:a="http://schemas.openxmlformats.org/drawingml/2006/main">
+        <p:txBody>
+          <a:bodyPr/>
+          <a:lstStyle/>
+          <a:p>
+            <a:endParaRPr lang="en-US"/>
+          </a:p>
+        </p:txBody>
+      </p:sp>
+      <p:sp>
+        <p:nvSpPr>
+          <p:cNvPr id="26" name="Rectangle 25">
+            <a:extLst>
               <a:ext uri="{FF2B5EF4-FFF2-40B4-BE49-F238E27FC236}">
                 <a16:creationId xmlns:a16="http://schemas.microsoft.com/office/drawing/2014/main" id="{C0F455CA-3707-4FCC-AA4A-A7BBF0F8D1BB}"/>
               </a:ext>
             </a:extLst>
           </p:cNvPr>
           <p:cNvSpPr>
-            <a:spLocks xmlns:a="http://schemas.openxmlformats.org/drawingml/2006/main" noGrp="1"/>
+            <a:spLocks noGrp="1"/>
           </p:cNvSpPr>
           <p:nvPr/>
         </p:nvSpPr>
         <p:spPr>
-          <a:xfrm xmlns:a="http://schemas.openxmlformats.org/drawingml/2006/main">
+          <a:xfrm>
             <a:off x="9639300" y="2171700"/>
             <a:ext cx="1238250" cy="381000"/>
           </a:xfrm>
-          <a:prstGeom xmlns:a="http://schemas.openxmlformats.org/drawingml/2006/main" prst="rect">
+          <a:prstGeom prst="rect">
             <a:avLst/>
           </a:prstGeom>
-          <a:noFill xmlns:a="http://schemas.openxmlformats.org/drawingml/2006/main"/>
-          <a:ln xmlns:a="http://schemas.openxmlformats.org/drawingml/2006/main" w="0">
+          <a:noFill/>
+          <a:ln w="0">
             <a:noFill/>
             <a:prstDash val="solid"/>
           </a:ln>
         </p:spPr>
         <p:txBody>
-          <a:bodyPr xmlns:a="http://schemas.openxmlformats.org/drawingml/2006/main">
+          <a:bodyPr>
             <a:noAutofit/>
           </a:bodyPr>
-          <a:lstStyle xmlns:a="http://schemas.openxmlformats.org/drawingml/2006/main">
+          <a:lstStyle>
             <a:defPPr>
               <a:defRPr sz="1125" b="1">
                 <a:solidFill>
@@ -6974,7 +6896,7 @@
               </a:defRPr>
             </a:defPPr>
           </a:lstStyle>
-          <a:p xmlns:a="http://schemas.openxmlformats.org/drawingml/2006/main">
+          <a:p>
             <a:pPr>
               <a:defRPr sz="1125" b="1">
                 <a:solidFill>
@@ -7001,37 +6923,37 @@
       </p:sp>
       <p:sp>
         <p:nvSpPr>
-          <p:cNvPr id="27" name="">
-            <a:extLst xmlns:a="http://schemas.openxmlformats.org/drawingml/2006/main">
+          <p:cNvPr id="27" name="Rectangle 26">
+            <a:extLst>
               <a:ext uri="{FF2B5EF4-FFF2-40B4-BE49-F238E27FC236}">
                 <a16:creationId xmlns:a16="http://schemas.microsoft.com/office/drawing/2014/main" id="{3BB529E4-B8F5-4FF6-ABE1-B4B112E89BE2}"/>
               </a:ext>
             </a:extLst>
           </p:cNvPr>
           <p:cNvSpPr>
-            <a:spLocks xmlns:a="http://schemas.openxmlformats.org/drawingml/2006/main" noGrp="1"/>
+            <a:spLocks noGrp="1"/>
           </p:cNvSpPr>
           <p:nvPr/>
         </p:nvSpPr>
         <p:spPr>
-          <a:xfrm xmlns:a="http://schemas.openxmlformats.org/drawingml/2006/main">
+          <a:xfrm>
             <a:off x="9639300" y="2533650"/>
             <a:ext cx="1238250" cy="381000"/>
           </a:xfrm>
-          <a:prstGeom xmlns:a="http://schemas.openxmlformats.org/drawingml/2006/main" prst="rect">
+          <a:prstGeom prst="rect">
             <a:avLst/>
           </a:prstGeom>
-          <a:noFill xmlns:a="http://schemas.openxmlformats.org/drawingml/2006/main"/>
-          <a:ln xmlns:a="http://schemas.openxmlformats.org/drawingml/2006/main" w="0">
+          <a:noFill/>
+          <a:ln w="0">
             <a:noFill/>
             <a:prstDash val="solid"/>
           </a:ln>
         </p:spPr>
         <p:txBody>
-          <a:bodyPr xmlns:a="http://schemas.openxmlformats.org/drawingml/2006/main">
+          <a:bodyPr>
             <a:noAutofit/>
           </a:bodyPr>
-          <a:lstStyle xmlns:a="http://schemas.openxmlformats.org/drawingml/2006/main">
+          <a:lstStyle>
             <a:defPPr>
               <a:defRPr sz="938" b="0">
                 <a:solidFill>
@@ -7043,7 +6965,7 @@
               </a:defRPr>
             </a:defPPr>
           </a:lstStyle>
-          <a:p xmlns:a="http://schemas.openxmlformats.org/drawingml/2006/main">
+          <a:p>
             <a:pPr>
               <a:defRPr sz="938" b="0">
                 <a:solidFill>
@@ -7070,37 +6992,37 @@
       </p:sp>
       <p:sp>
         <p:nvSpPr>
-          <p:cNvPr id="28" name="">
-            <a:extLst xmlns:a="http://schemas.openxmlformats.org/drawingml/2006/main">
+          <p:cNvPr id="28" name="Rectangle 27">
+            <a:extLst>
               <a:ext uri="{FF2B5EF4-FFF2-40B4-BE49-F238E27FC236}">
                 <a16:creationId xmlns:a16="http://schemas.microsoft.com/office/drawing/2014/main" id="{01418101-A21B-49EB-9A6B-64F4C62C1528}"/>
               </a:ext>
             </a:extLst>
           </p:cNvPr>
           <p:cNvSpPr>
-            <a:spLocks xmlns:a="http://schemas.openxmlformats.org/drawingml/2006/main" noGrp="1"/>
+            <a:spLocks noGrp="1"/>
           </p:cNvSpPr>
           <p:nvPr/>
         </p:nvSpPr>
         <p:spPr>
-          <a:xfrm xmlns:a="http://schemas.openxmlformats.org/drawingml/2006/main">
+          <a:xfrm>
             <a:off x="685800" y="3543300"/>
             <a:ext cx="10820400" cy="2667000"/>
           </a:xfrm>
-          <a:prstGeom xmlns:a="http://schemas.openxmlformats.org/drawingml/2006/main" prst="rect">
+          <a:prstGeom prst="rect">
             <a:avLst/>
           </a:prstGeom>
-          <a:noFill xmlns:a="http://schemas.openxmlformats.org/drawingml/2006/main"/>
-          <a:ln xmlns:a="http://schemas.openxmlformats.org/drawingml/2006/main" w="0">
+          <a:noFill/>
+          <a:ln w="0">
             <a:noFill/>
             <a:prstDash val="solid"/>
           </a:ln>
         </p:spPr>
         <p:txBody>
-          <a:bodyPr xmlns:a="http://schemas.openxmlformats.org/drawingml/2006/main">
+          <a:bodyPr>
             <a:noAutofit/>
           </a:bodyPr>
-          <a:lstStyle xmlns:a="http://schemas.openxmlformats.org/drawingml/2006/main">
+          <a:lstStyle>
             <a:defPPr>
               <a:defRPr sz="1425">
                 <a:solidFill>
@@ -7112,7 +7034,7 @@
               </a:defRPr>
             </a:defPPr>
           </a:lstStyle>
-          <a:p xmlns:a="http://schemas.openxmlformats.org/drawingml/2006/main">
+          <a:p>
             <a:pPr marL="228600" indent="-114300">
               <a:spcAft>
                 <a:spcPts val="1600"/>
@@ -7139,7 +7061,7 @@
               <a:t>The workflow proceeds from donation registration to a confirmed delivery, with the allocation decision recorded at each stage.</a:t>
             </a:r>
           </a:p>
-          <a:p xmlns:a="http://schemas.openxmlformats.org/drawingml/2006/main">
+          <a:p>
             <a:pPr marL="228600" indent="-114300">
               <a:spcAft>
                 <a:spcPts val="1600"/>
@@ -7166,7 +7088,7 @@
               <a:t>Each role workspace exposes only the functions that the actor is authorised to perform.</a:t>
             </a:r>
           </a:p>
-          <a:p xmlns:a="http://schemas.openxmlformats.org/drawingml/2006/main">
+          <a:p>
             <a:pPr marL="228600" indent="-114300">
               <a:spcAft>
                 <a:spcPts val="1600"/>
@@ -7202,17 +7124,21 @@
       </p:ext>
     </p:extLst>
   </p:cSld>
+  <p:clrMapOvr>
+    <a:masterClrMapping/>
+  </p:clrMapOvr>
 </p:sld>
 </file>
 
 <file path=ppt/slides/slide5.xml><?xml version="1.0" encoding="utf-8"?>
-<p:sld xmlns:p="http://schemas.openxmlformats.org/presentationml/2006/main">
+<p:sld xmlns:a="http://schemas.openxmlformats.org/drawingml/2006/main" xmlns:r="http://schemas.openxmlformats.org/officeDocument/2006/relationships" xmlns:p="http://schemas.openxmlformats.org/presentationml/2006/main">
   <p:cSld>
     <p:bg>
       <p:bgPr>
-        <a:solidFill xmlns:a="http://schemas.openxmlformats.org/drawingml/2006/main">
+        <a:solidFill>
           <a:srgbClr val="FFFFFF"/>
         </a:solidFill>
+        <a:effectLst/>
       </p:bgPr>
     </p:bg>
     <p:spTree>
@@ -7222,41 +7148,46 @@
         <p:nvPr/>
       </p:nvGrpSpPr>
       <p:grpSpPr>
-        <a:xfrm xmlns:a="http://schemas.openxmlformats.org/drawingml/2006/main"/>
+        <a:xfrm>
+          <a:off x="0" y="0"/>
+          <a:ext cx="0" cy="0"/>
+          <a:chOff x="0" y="0"/>
+          <a:chExt cx="0" cy="0"/>
+        </a:xfrm>
       </p:grpSpPr>
       <p:sp>
         <p:nvSpPr>
-          <p:cNvPr id="17" name="">
-            <a:extLst xmlns:a="http://schemas.openxmlformats.org/drawingml/2006/main">
+          <p:cNvPr id="17" name="Rectangle 16">
+            <a:extLst>
               <a:ext uri="{FF2B5EF4-FFF2-40B4-BE49-F238E27FC236}">
                 <a16:creationId xmlns:a16="http://schemas.microsoft.com/office/drawing/2014/main" id="{D7F349BF-C9A2-4616-899B-49398AC81700}"/>
               </a:ext>
             </a:extLst>
           </p:cNvPr>
           <p:cNvSpPr>
-            <a:spLocks xmlns:a="http://schemas.openxmlformats.org/drawingml/2006/main" noGrp="1"/>
+            <a:spLocks noGrp="1"/>
           </p:cNvSpPr>
           <p:nvPr/>
         </p:nvSpPr>
         <p:spPr>
-          <a:xfrm xmlns:a="http://schemas.openxmlformats.org/drawingml/2006/main">
+          <a:xfrm>
             <a:off x="9906000" y="6438900"/>
             <a:ext cx="1600200" cy="228600"/>
           </a:xfrm>
-          <a:prstGeom xmlns:a="http://schemas.openxmlformats.org/drawingml/2006/main" prst="rect">
+          <a:prstGeom prst="rect">
             <a:avLst/>
           </a:prstGeom>
-          <a:noFill xmlns:a="http://schemas.openxmlformats.org/drawingml/2006/main"/>
-          <a:ln xmlns:a="http://schemas.openxmlformats.org/drawingml/2006/main" w="0">
+          <a:noFill/>
+          <a:ln w="0">
             <a:noFill/>
             <a:prstDash val="solid"/>
           </a:ln>
         </p:spPr>
         <p:txBody>
-          <a:bodyPr xmlns:a="http://schemas.openxmlformats.org/drawingml/2006/main">
+          <a:bodyPr>
             <a:noAutofit/>
           </a:bodyPr>
-          <a:lstStyle xmlns:a="http://schemas.openxmlformats.org/drawingml/2006/main">
+          <a:lstStyle>
             <a:defPPr>
               <a:defRPr sz="975" b="0">
                 <a:solidFill>
@@ -7268,7 +7199,7 @@
               </a:defRPr>
             </a:defPPr>
           </a:lstStyle>
-          <a:p xmlns:a="http://schemas.openxmlformats.org/drawingml/2006/main">
+          <a:p>
             <a:pPr>
               <a:defRPr sz="975" b="0">
                 <a:solidFill>
@@ -7296,36 +7227,36 @@
       <p:sp>
         <p:nvSpPr>
           <p:cNvPr id="2" name="slide-title">
-            <a:extLst xmlns:a="http://schemas.openxmlformats.org/drawingml/2006/main">
+            <a:extLst>
               <a:ext uri="{FF2B5EF4-FFF2-40B4-BE49-F238E27FC236}">
                 <a16:creationId xmlns:a16="http://schemas.microsoft.com/office/drawing/2014/main" id="{EDD3F5E9-5422-4723-903B-24624311A52C}"/>
               </a:ext>
             </a:extLst>
           </p:cNvPr>
           <p:cNvSpPr>
-            <a:spLocks xmlns:a="http://schemas.openxmlformats.org/drawingml/2006/main" noGrp="1"/>
+            <a:spLocks noGrp="1"/>
           </p:cNvSpPr>
           <p:nvPr/>
         </p:nvSpPr>
         <p:spPr>
-          <a:xfrm xmlns:a="http://schemas.openxmlformats.org/drawingml/2006/main">
+          <a:xfrm>
             <a:off x="685800" y="495300"/>
             <a:ext cx="10820400" cy="514350"/>
           </a:xfrm>
-          <a:prstGeom xmlns:a="http://schemas.openxmlformats.org/drawingml/2006/main" prst="rect">
+          <a:prstGeom prst="rect">
             <a:avLst/>
           </a:prstGeom>
-          <a:noFill xmlns:a="http://schemas.openxmlformats.org/drawingml/2006/main"/>
-          <a:ln xmlns:a="http://schemas.openxmlformats.org/drawingml/2006/main" w="0">
+          <a:noFill/>
+          <a:ln w="0">
             <a:noFill/>
             <a:prstDash val="solid"/>
           </a:ln>
         </p:spPr>
         <p:txBody>
-          <a:bodyPr xmlns:a="http://schemas.openxmlformats.org/drawingml/2006/main">
+          <a:bodyPr>
             <a:noAutofit/>
           </a:bodyPr>
-          <a:lstStyle xmlns:a="http://schemas.openxmlformats.org/drawingml/2006/main">
+          <a:lstStyle>
             <a:defPPr>
               <a:defRPr sz="3000" b="1">
                 <a:solidFill>
@@ -7337,7 +7268,7 @@
               </a:defRPr>
             </a:defPPr>
           </a:lstStyle>
-          <a:p xmlns:a="http://schemas.openxmlformats.org/drawingml/2006/main">
+          <a:p>
             <a:pPr>
               <a:defRPr sz="3000" b="1">
                 <a:solidFill>
@@ -7365,36 +7296,36 @@
       <p:sp>
         <p:nvSpPr>
           <p:cNvPr id="3" name="slide-lead">
-            <a:extLst xmlns:a="http://schemas.openxmlformats.org/drawingml/2006/main">
+            <a:extLst>
               <a:ext uri="{FF2B5EF4-FFF2-40B4-BE49-F238E27FC236}">
                 <a16:creationId xmlns:a16="http://schemas.microsoft.com/office/drawing/2014/main" id="{3D7911D9-C634-43B5-AA5D-4B622ADE2FA5}"/>
               </a:ext>
             </a:extLst>
           </p:cNvPr>
           <p:cNvSpPr>
-            <a:spLocks xmlns:a="http://schemas.openxmlformats.org/drawingml/2006/main" noGrp="1"/>
+            <a:spLocks noGrp="1"/>
           </p:cNvSpPr>
           <p:nvPr/>
         </p:nvSpPr>
         <p:spPr>
-          <a:xfrm xmlns:a="http://schemas.openxmlformats.org/drawingml/2006/main">
+          <a:xfrm>
             <a:off x="685800" y="1066800"/>
             <a:ext cx="10820400" cy="323850"/>
           </a:xfrm>
-          <a:prstGeom xmlns:a="http://schemas.openxmlformats.org/drawingml/2006/main" prst="rect">
+          <a:prstGeom prst="rect">
             <a:avLst/>
           </a:prstGeom>
-          <a:noFill xmlns:a="http://schemas.openxmlformats.org/drawingml/2006/main"/>
-          <a:ln xmlns:a="http://schemas.openxmlformats.org/drawingml/2006/main" w="0">
+          <a:noFill/>
+          <a:ln w="0">
             <a:noFill/>
             <a:prstDash val="solid"/>
           </a:ln>
         </p:spPr>
         <p:txBody>
-          <a:bodyPr xmlns:a="http://schemas.openxmlformats.org/drawingml/2006/main">
+          <a:bodyPr>
             <a:noAutofit/>
           </a:bodyPr>
-          <a:lstStyle xmlns:a="http://schemas.openxmlformats.org/drawingml/2006/main">
+          <a:lstStyle>
             <a:defPPr>
               <a:defRPr sz="1575" b="0">
                 <a:solidFill>
@@ -7406,7 +7337,7 @@
               </a:defRPr>
             </a:defPPr>
           </a:lstStyle>
-          <a:p xmlns:a="http://schemas.openxmlformats.org/drawingml/2006/main">
+          <a:p>
             <a:pPr>
               <a:defRPr sz="1575" b="0">
                 <a:solidFill>
@@ -7434,102 +7365,116 @@
       <p:sp>
         <p:nvSpPr>
           <p:cNvPr id="4" name="title-rule">
-            <a:extLst xmlns:a="http://schemas.openxmlformats.org/drawingml/2006/main">
+            <a:extLst>
               <a:ext uri="{FF2B5EF4-FFF2-40B4-BE49-F238E27FC236}">
                 <a16:creationId xmlns:a16="http://schemas.microsoft.com/office/drawing/2014/main" id="{01333EC2-C3C1-4D7C-8634-8452DD3FF2BE}"/>
               </a:ext>
             </a:extLst>
           </p:cNvPr>
           <p:cNvSpPr>
-            <a:spLocks xmlns:a="http://schemas.openxmlformats.org/drawingml/2006/main" noGrp="1"/>
+            <a:spLocks noGrp="1"/>
           </p:cNvSpPr>
           <p:nvPr/>
         </p:nvSpPr>
         <p:spPr>
-          <a:xfrm xmlns:a="http://schemas.openxmlformats.org/drawingml/2006/main">
+          <a:xfrm>
             <a:off x="685800" y="1504950"/>
             <a:ext cx="10820400" cy="9525"/>
           </a:xfrm>
-          <a:prstGeom xmlns:a="http://schemas.openxmlformats.org/drawingml/2006/main" prst="rect">
+          <a:prstGeom prst="rect">
             <a:avLst/>
           </a:prstGeom>
-          <a:solidFill xmlns:a="http://schemas.openxmlformats.org/drawingml/2006/main">
+          <a:solidFill>
             <a:srgbClr val="E1E5EA"/>
           </a:solidFill>
-          <a:ln xmlns:a="http://schemas.openxmlformats.org/drawingml/2006/main" w="0">
+          <a:ln w="0">
             <a:noFill/>
             <a:prstDash val="solid"/>
           </a:ln>
         </p:spPr>
+        <p:txBody>
+          <a:bodyPr/>
+          <a:lstStyle/>
+          <a:p>
+            <a:endParaRPr lang="en-US"/>
+          </a:p>
+        </p:txBody>
       </p:sp>
       <p:sp>
         <p:nvSpPr>
           <p:cNvPr id="5" name="flow-Verified organization">
-            <a:extLst xmlns:a="http://schemas.openxmlformats.org/drawingml/2006/main">
+            <a:extLst>
               <a:ext uri="{FF2B5EF4-FFF2-40B4-BE49-F238E27FC236}">
                 <a16:creationId xmlns:a16="http://schemas.microsoft.com/office/drawing/2014/main" id="{FCFE8D7E-E550-413E-B6E7-BC9C573CF6FD}"/>
               </a:ext>
             </a:extLst>
           </p:cNvPr>
           <p:cNvSpPr>
-            <a:spLocks xmlns:a="http://schemas.openxmlformats.org/drawingml/2006/main" noGrp="1"/>
+            <a:spLocks noGrp="1"/>
           </p:cNvSpPr>
           <p:nvPr/>
         </p:nvSpPr>
         <p:spPr>
-          <a:xfrm xmlns:a="http://schemas.openxmlformats.org/drawingml/2006/main">
+          <a:xfrm>
             <a:off x="685800" y="1828800"/>
             <a:ext cx="2286000" cy="514350"/>
           </a:xfrm>
-          <a:prstGeom xmlns:a="http://schemas.openxmlformats.org/drawingml/2006/main" prst="roundRect">
+          <a:prstGeom prst="roundRect">
             <a:avLst>
               <a:gd name="adj" fmla="val 14815"/>
             </a:avLst>
           </a:prstGeom>
-          <a:solidFill xmlns:a="http://schemas.openxmlformats.org/drawingml/2006/main">
+          <a:solidFill>
             <a:srgbClr val="FFFFFF"/>
           </a:solidFill>
-          <a:ln xmlns:a="http://schemas.openxmlformats.org/drawingml/2006/main" w="9525">
+          <a:ln w="9525">
             <a:solidFill>
               <a:srgbClr val="E1E5EA"/>
             </a:solidFill>
             <a:prstDash val="solid"/>
           </a:ln>
         </p:spPr>
-      </p:sp>
-      <p:sp>
-        <p:nvSpPr>
-          <p:cNvPr id="6" name="">
-            <a:extLst xmlns:a="http://schemas.openxmlformats.org/drawingml/2006/main">
+        <p:txBody>
+          <a:bodyPr/>
+          <a:lstStyle/>
+          <a:p>
+            <a:endParaRPr lang="en-US"/>
+          </a:p>
+        </p:txBody>
+      </p:sp>
+      <p:sp>
+        <p:nvSpPr>
+          <p:cNvPr id="6" name="Rectangle 5">
+            <a:extLst>
               <a:ext uri="{FF2B5EF4-FFF2-40B4-BE49-F238E27FC236}">
                 <a16:creationId xmlns:a16="http://schemas.microsoft.com/office/drawing/2014/main" id="{CA459886-9F03-4F7A-A983-698C834AAD19}"/>
               </a:ext>
             </a:extLst>
           </p:cNvPr>
           <p:cNvSpPr>
-            <a:spLocks xmlns:a="http://schemas.openxmlformats.org/drawingml/2006/main" noGrp="1"/>
+            <a:spLocks noGrp="1"/>
           </p:cNvSpPr>
           <p:nvPr/>
         </p:nvSpPr>
         <p:spPr>
-          <a:xfrm xmlns:a="http://schemas.openxmlformats.org/drawingml/2006/main">
+          <a:xfrm>
             <a:off x="781050" y="1962150"/>
             <a:ext cx="2095500" cy="381000"/>
           </a:xfrm>
-          <a:prstGeom xmlns:a="http://schemas.openxmlformats.org/drawingml/2006/main" prst="rect">
+          <a:prstGeom prst="rect">
             <a:avLst/>
           </a:prstGeom>
-          <a:noFill xmlns:a="http://schemas.openxmlformats.org/drawingml/2006/main"/>
-          <a:ln xmlns:a="http://schemas.openxmlformats.org/drawingml/2006/main" w="0">
+          <a:noFill/>
+          <a:ln w="0">
             <a:noFill/>
             <a:prstDash val="solid"/>
           </a:ln>
         </p:spPr>
         <p:txBody>
-          <a:bodyPr xmlns:a="http://schemas.openxmlformats.org/drawingml/2006/main">
+          <a:bodyPr>
             <a:noAutofit/>
           </a:bodyPr>
-          <a:lstStyle xmlns:a="http://schemas.openxmlformats.org/drawingml/2006/main">
+          <a:lstStyle>
             <a:defPPr>
               <a:defRPr sz="1125" b="1">
                 <a:solidFill>
@@ -7541,7 +7486,7 @@
               </a:defRPr>
             </a:defPPr>
           </a:lstStyle>
-          <a:p xmlns:a="http://schemas.openxmlformats.org/drawingml/2006/main">
+          <a:p>
             <a:pPr>
               <a:defRPr sz="1125" b="1">
                 <a:solidFill>
@@ -7568,103 +7513,117 @@
       </p:sp>
       <p:sp>
         <p:nvSpPr>
-          <p:cNvPr id="7" name="">
-            <a:extLst xmlns:a="http://schemas.openxmlformats.org/drawingml/2006/main">
+          <p:cNvPr id="7" name="Right Arrow 6">
+            <a:extLst>
               <a:ext uri="{FF2B5EF4-FFF2-40B4-BE49-F238E27FC236}">
                 <a16:creationId xmlns:a16="http://schemas.microsoft.com/office/drawing/2014/main" id="{612EA281-F375-464A-928F-731E463D0667}"/>
               </a:ext>
             </a:extLst>
           </p:cNvPr>
           <p:cNvSpPr>
-            <a:spLocks xmlns:a="http://schemas.openxmlformats.org/drawingml/2006/main" noGrp="1"/>
+            <a:spLocks noGrp="1"/>
           </p:cNvSpPr>
           <p:nvPr/>
         </p:nvSpPr>
         <p:spPr>
-          <a:xfrm xmlns:a="http://schemas.openxmlformats.org/drawingml/2006/main">
+          <a:xfrm>
             <a:off x="3028950" y="2085975"/>
             <a:ext cx="419100" cy="152400"/>
           </a:xfrm>
-          <a:prstGeom xmlns:a="http://schemas.openxmlformats.org/drawingml/2006/main" prst="rightArrow">
+          <a:prstGeom prst="rightArrow">
             <a:avLst/>
           </a:prstGeom>
-          <a:solidFill xmlns:a="http://schemas.openxmlformats.org/drawingml/2006/main">
+          <a:solidFill>
             <a:srgbClr val="8A94A3"/>
           </a:solidFill>
-          <a:ln xmlns:a="http://schemas.openxmlformats.org/drawingml/2006/main" w="0">
+          <a:ln w="0">
             <a:noFill/>
             <a:prstDash val="solid"/>
           </a:ln>
         </p:spPr>
+        <p:txBody>
+          <a:bodyPr/>
+          <a:lstStyle/>
+          <a:p>
+            <a:endParaRPr lang="en-US"/>
+          </a:p>
+        </p:txBody>
       </p:sp>
       <p:sp>
         <p:nvSpPr>
           <p:cNvPr id="8" name="flow-Sufficient free storage">
-            <a:extLst xmlns:a="http://schemas.openxmlformats.org/drawingml/2006/main">
+            <a:extLst>
               <a:ext uri="{FF2B5EF4-FFF2-40B4-BE49-F238E27FC236}">
                 <a16:creationId xmlns:a16="http://schemas.microsoft.com/office/drawing/2014/main" id="{45F1AF36-E3E6-46B2-A820-4910CC70D795}"/>
               </a:ext>
             </a:extLst>
           </p:cNvPr>
           <p:cNvSpPr>
-            <a:spLocks xmlns:a="http://schemas.openxmlformats.org/drawingml/2006/main" noGrp="1"/>
+            <a:spLocks noGrp="1"/>
           </p:cNvSpPr>
           <p:nvPr/>
         </p:nvSpPr>
         <p:spPr>
-          <a:xfrm xmlns:a="http://schemas.openxmlformats.org/drawingml/2006/main">
+          <a:xfrm>
             <a:off x="3505200" y="1828800"/>
             <a:ext cx="2286000" cy="514350"/>
           </a:xfrm>
-          <a:prstGeom xmlns:a="http://schemas.openxmlformats.org/drawingml/2006/main" prst="roundRect">
+          <a:prstGeom prst="roundRect">
             <a:avLst>
               <a:gd name="adj" fmla="val 14815"/>
             </a:avLst>
           </a:prstGeom>
-          <a:solidFill xmlns:a="http://schemas.openxmlformats.org/drawingml/2006/main">
+          <a:solidFill>
             <a:srgbClr val="FFFFFF"/>
           </a:solidFill>
-          <a:ln xmlns:a="http://schemas.openxmlformats.org/drawingml/2006/main" w="9525">
+          <a:ln w="9525">
             <a:solidFill>
               <a:srgbClr val="E1E5EA"/>
             </a:solidFill>
             <a:prstDash val="solid"/>
           </a:ln>
         </p:spPr>
-      </p:sp>
-      <p:sp>
-        <p:nvSpPr>
-          <p:cNvPr id="9" name="">
-            <a:extLst xmlns:a="http://schemas.openxmlformats.org/drawingml/2006/main">
+        <p:txBody>
+          <a:bodyPr/>
+          <a:lstStyle/>
+          <a:p>
+            <a:endParaRPr lang="en-US"/>
+          </a:p>
+        </p:txBody>
+      </p:sp>
+      <p:sp>
+        <p:nvSpPr>
+          <p:cNvPr id="9" name="Rectangle 8">
+            <a:extLst>
               <a:ext uri="{FF2B5EF4-FFF2-40B4-BE49-F238E27FC236}">
                 <a16:creationId xmlns:a16="http://schemas.microsoft.com/office/drawing/2014/main" id="{28753955-0EC9-4044-A6BE-51DB6C805B5F}"/>
               </a:ext>
             </a:extLst>
           </p:cNvPr>
           <p:cNvSpPr>
-            <a:spLocks xmlns:a="http://schemas.openxmlformats.org/drawingml/2006/main" noGrp="1"/>
+            <a:spLocks noGrp="1"/>
           </p:cNvSpPr>
           <p:nvPr/>
         </p:nvSpPr>
         <p:spPr>
-          <a:xfrm xmlns:a="http://schemas.openxmlformats.org/drawingml/2006/main">
+          <a:xfrm>
             <a:off x="3600450" y="1962150"/>
             <a:ext cx="2095500" cy="381000"/>
           </a:xfrm>
-          <a:prstGeom xmlns:a="http://schemas.openxmlformats.org/drawingml/2006/main" prst="rect">
+          <a:prstGeom prst="rect">
             <a:avLst/>
           </a:prstGeom>
-          <a:noFill xmlns:a="http://schemas.openxmlformats.org/drawingml/2006/main"/>
-          <a:ln xmlns:a="http://schemas.openxmlformats.org/drawingml/2006/main" w="0">
+          <a:noFill/>
+          <a:ln w="0">
             <a:noFill/>
             <a:prstDash val="solid"/>
           </a:ln>
         </p:spPr>
         <p:txBody>
-          <a:bodyPr xmlns:a="http://schemas.openxmlformats.org/drawingml/2006/main">
+          <a:bodyPr>
             <a:noAutofit/>
           </a:bodyPr>
-          <a:lstStyle xmlns:a="http://schemas.openxmlformats.org/drawingml/2006/main">
+          <a:lstStyle>
             <a:defPPr>
               <a:defRPr sz="1125" b="1">
                 <a:solidFill>
@@ -7676,7 +7635,7 @@
               </a:defRPr>
             </a:defPPr>
           </a:lstStyle>
-          <a:p xmlns:a="http://schemas.openxmlformats.org/drawingml/2006/main">
+          <a:p>
             <a:pPr>
               <a:defRPr sz="1125" b="1">
                 <a:solidFill>
@@ -7703,103 +7662,117 @@
       </p:sp>
       <p:sp>
         <p:nvSpPr>
-          <p:cNvPr id="10" name="">
-            <a:extLst xmlns:a="http://schemas.openxmlformats.org/drawingml/2006/main">
+          <p:cNvPr id="10" name="Right Arrow 9">
+            <a:extLst>
               <a:ext uri="{FF2B5EF4-FFF2-40B4-BE49-F238E27FC236}">
                 <a16:creationId xmlns:a16="http://schemas.microsoft.com/office/drawing/2014/main" id="{20AA4D0D-071C-486D-ACB2-06714E990659}"/>
               </a:ext>
             </a:extLst>
           </p:cNvPr>
           <p:cNvSpPr>
-            <a:spLocks xmlns:a="http://schemas.openxmlformats.org/drawingml/2006/main" noGrp="1"/>
+            <a:spLocks noGrp="1"/>
           </p:cNvSpPr>
           <p:nvPr/>
         </p:nvSpPr>
         <p:spPr>
-          <a:xfrm xmlns:a="http://schemas.openxmlformats.org/drawingml/2006/main">
+          <a:xfrm>
             <a:off x="5848350" y="2085975"/>
             <a:ext cx="419100" cy="152400"/>
           </a:xfrm>
-          <a:prstGeom xmlns:a="http://schemas.openxmlformats.org/drawingml/2006/main" prst="rightArrow">
+          <a:prstGeom prst="rightArrow">
             <a:avLst/>
           </a:prstGeom>
-          <a:solidFill xmlns:a="http://schemas.openxmlformats.org/drawingml/2006/main">
+          <a:solidFill>
             <a:srgbClr val="8A94A3"/>
           </a:solidFill>
-          <a:ln xmlns:a="http://schemas.openxmlformats.org/drawingml/2006/main" w="0">
+          <a:ln w="0">
             <a:noFill/>
             <a:prstDash val="solid"/>
           </a:ln>
         </p:spPr>
+        <p:txBody>
+          <a:bodyPr/>
+          <a:lstStyle/>
+          <a:p>
+            <a:endParaRPr lang="en-US"/>
+          </a:p>
+        </p:txBody>
       </p:sp>
       <p:sp>
         <p:nvSpPr>
           <p:cNvPr id="11" name="flow-Category accepted">
-            <a:extLst xmlns:a="http://schemas.openxmlformats.org/drawingml/2006/main">
+            <a:extLst>
               <a:ext uri="{FF2B5EF4-FFF2-40B4-BE49-F238E27FC236}">
                 <a16:creationId xmlns:a16="http://schemas.microsoft.com/office/drawing/2014/main" id="{3FC5D4D9-1B2C-4399-B7D5-AED2F2FA4966}"/>
               </a:ext>
             </a:extLst>
           </p:cNvPr>
           <p:cNvSpPr>
-            <a:spLocks xmlns:a="http://schemas.openxmlformats.org/drawingml/2006/main" noGrp="1"/>
+            <a:spLocks noGrp="1"/>
           </p:cNvSpPr>
           <p:nvPr/>
         </p:nvSpPr>
         <p:spPr>
-          <a:xfrm xmlns:a="http://schemas.openxmlformats.org/drawingml/2006/main">
+          <a:xfrm>
             <a:off x="6324600" y="1828800"/>
             <a:ext cx="2286000" cy="514350"/>
           </a:xfrm>
-          <a:prstGeom xmlns:a="http://schemas.openxmlformats.org/drawingml/2006/main" prst="roundRect">
+          <a:prstGeom prst="roundRect">
             <a:avLst>
               <a:gd name="adj" fmla="val 14815"/>
             </a:avLst>
           </a:prstGeom>
-          <a:solidFill xmlns:a="http://schemas.openxmlformats.org/drawingml/2006/main">
+          <a:solidFill>
             <a:srgbClr val="FFFFFF"/>
           </a:solidFill>
-          <a:ln xmlns:a="http://schemas.openxmlformats.org/drawingml/2006/main" w="9525">
+          <a:ln w="9525">
             <a:solidFill>
               <a:srgbClr val="E1E5EA"/>
             </a:solidFill>
             <a:prstDash val="solid"/>
           </a:ln>
         </p:spPr>
-      </p:sp>
-      <p:sp>
-        <p:nvSpPr>
-          <p:cNvPr id="12" name="">
-            <a:extLst xmlns:a="http://schemas.openxmlformats.org/drawingml/2006/main">
+        <p:txBody>
+          <a:bodyPr/>
+          <a:lstStyle/>
+          <a:p>
+            <a:endParaRPr lang="en-US"/>
+          </a:p>
+        </p:txBody>
+      </p:sp>
+      <p:sp>
+        <p:nvSpPr>
+          <p:cNvPr id="12" name="Rectangle 11">
+            <a:extLst>
               <a:ext uri="{FF2B5EF4-FFF2-40B4-BE49-F238E27FC236}">
                 <a16:creationId xmlns:a16="http://schemas.microsoft.com/office/drawing/2014/main" id="{97DAE427-1CA0-404D-8FB3-DBCD473CDB08}"/>
               </a:ext>
             </a:extLst>
           </p:cNvPr>
           <p:cNvSpPr>
-            <a:spLocks xmlns:a="http://schemas.openxmlformats.org/drawingml/2006/main" noGrp="1"/>
+            <a:spLocks noGrp="1"/>
           </p:cNvSpPr>
           <p:nvPr/>
         </p:nvSpPr>
         <p:spPr>
-          <a:xfrm xmlns:a="http://schemas.openxmlformats.org/drawingml/2006/main">
+          <a:xfrm>
             <a:off x="6419850" y="1962150"/>
             <a:ext cx="2095500" cy="381000"/>
           </a:xfrm>
-          <a:prstGeom xmlns:a="http://schemas.openxmlformats.org/drawingml/2006/main" prst="rect">
+          <a:prstGeom prst="rect">
             <a:avLst/>
           </a:prstGeom>
-          <a:noFill xmlns:a="http://schemas.openxmlformats.org/drawingml/2006/main"/>
-          <a:ln xmlns:a="http://schemas.openxmlformats.org/drawingml/2006/main" w="0">
+          <a:noFill/>
+          <a:ln w="0">
             <a:noFill/>
             <a:prstDash val="solid"/>
           </a:ln>
         </p:spPr>
         <p:txBody>
-          <a:bodyPr xmlns:a="http://schemas.openxmlformats.org/drawingml/2006/main">
+          <a:bodyPr>
             <a:noAutofit/>
           </a:bodyPr>
-          <a:lstStyle xmlns:a="http://schemas.openxmlformats.org/drawingml/2006/main">
+          <a:lstStyle>
             <a:defPPr>
               <a:defRPr sz="1125" b="1">
                 <a:solidFill>
@@ -7811,7 +7784,7 @@
               </a:defRPr>
             </a:defPPr>
           </a:lstStyle>
-          <a:p xmlns:a="http://schemas.openxmlformats.org/drawingml/2006/main">
+          <a:p>
             <a:pPr>
               <a:defRPr sz="1125" b="1">
                 <a:solidFill>
@@ -7838,103 +7811,117 @@
       </p:sp>
       <p:sp>
         <p:nvSpPr>
-          <p:cNvPr id="13" name="">
-            <a:extLst xmlns:a="http://schemas.openxmlformats.org/drawingml/2006/main">
+          <p:cNvPr id="13" name="Right Arrow 12">
+            <a:extLst>
               <a:ext uri="{FF2B5EF4-FFF2-40B4-BE49-F238E27FC236}">
                 <a16:creationId xmlns:a16="http://schemas.microsoft.com/office/drawing/2014/main" id="{3054E1B3-9D43-4356-BE29-9B85E9C4E2FD}"/>
               </a:ext>
             </a:extLst>
           </p:cNvPr>
           <p:cNvSpPr>
-            <a:spLocks xmlns:a="http://schemas.openxmlformats.org/drawingml/2006/main" noGrp="1"/>
+            <a:spLocks noGrp="1"/>
           </p:cNvSpPr>
           <p:nvPr/>
         </p:nvSpPr>
         <p:spPr>
-          <a:xfrm xmlns:a="http://schemas.openxmlformats.org/drawingml/2006/main">
+          <a:xfrm>
             <a:off x="8667750" y="2085975"/>
             <a:ext cx="419100" cy="152400"/>
           </a:xfrm>
-          <a:prstGeom xmlns:a="http://schemas.openxmlformats.org/drawingml/2006/main" prst="rightArrow">
+          <a:prstGeom prst="rightArrow">
             <a:avLst/>
           </a:prstGeom>
-          <a:solidFill xmlns:a="http://schemas.openxmlformats.org/drawingml/2006/main">
+          <a:solidFill>
             <a:srgbClr val="8A94A3"/>
           </a:solidFill>
-          <a:ln xmlns:a="http://schemas.openxmlformats.org/drawingml/2006/main" w="0">
+          <a:ln w="0">
             <a:noFill/>
             <a:prstDash val="solid"/>
           </a:ln>
         </p:spPr>
+        <p:txBody>
+          <a:bodyPr/>
+          <a:lstStyle/>
+          <a:p>
+            <a:endParaRPr lang="en-US"/>
+          </a:p>
+        </p:txBody>
       </p:sp>
       <p:sp>
         <p:nvSpPr>
           <p:cNvPr id="14" name="flow-Safe arrival feasible">
-            <a:extLst xmlns:a="http://schemas.openxmlformats.org/drawingml/2006/main">
+            <a:extLst>
               <a:ext uri="{FF2B5EF4-FFF2-40B4-BE49-F238E27FC236}">
                 <a16:creationId xmlns:a16="http://schemas.microsoft.com/office/drawing/2014/main" id="{1B705E18-EB67-4DE1-AAED-A2694734EE6D}"/>
               </a:ext>
             </a:extLst>
           </p:cNvPr>
           <p:cNvSpPr>
-            <a:spLocks xmlns:a="http://schemas.openxmlformats.org/drawingml/2006/main" noGrp="1"/>
+            <a:spLocks noGrp="1"/>
           </p:cNvSpPr>
           <p:nvPr/>
         </p:nvSpPr>
         <p:spPr>
-          <a:xfrm xmlns:a="http://schemas.openxmlformats.org/drawingml/2006/main">
+          <a:xfrm>
             <a:off x="9144000" y="1828800"/>
             <a:ext cx="2286000" cy="514350"/>
           </a:xfrm>
-          <a:prstGeom xmlns:a="http://schemas.openxmlformats.org/drawingml/2006/main" prst="roundRect">
+          <a:prstGeom prst="roundRect">
             <a:avLst>
               <a:gd name="adj" fmla="val 14815"/>
             </a:avLst>
           </a:prstGeom>
-          <a:solidFill xmlns:a="http://schemas.openxmlformats.org/drawingml/2006/main">
+          <a:solidFill>
             <a:srgbClr val="FFFFFF"/>
           </a:solidFill>
-          <a:ln xmlns:a="http://schemas.openxmlformats.org/drawingml/2006/main" w="9525">
+          <a:ln w="9525">
             <a:solidFill>
               <a:srgbClr val="E1E5EA"/>
             </a:solidFill>
             <a:prstDash val="solid"/>
           </a:ln>
         </p:spPr>
-      </p:sp>
-      <p:sp>
-        <p:nvSpPr>
-          <p:cNvPr id="15" name="">
-            <a:extLst xmlns:a="http://schemas.openxmlformats.org/drawingml/2006/main">
+        <p:txBody>
+          <a:bodyPr/>
+          <a:lstStyle/>
+          <a:p>
+            <a:endParaRPr lang="en-US"/>
+          </a:p>
+        </p:txBody>
+      </p:sp>
+      <p:sp>
+        <p:nvSpPr>
+          <p:cNvPr id="15" name="Rectangle 14">
+            <a:extLst>
               <a:ext uri="{FF2B5EF4-FFF2-40B4-BE49-F238E27FC236}">
                 <a16:creationId xmlns:a16="http://schemas.microsoft.com/office/drawing/2014/main" id="{79A6EAE7-EC5B-41DC-A91B-4551D7ED4AAB}"/>
               </a:ext>
             </a:extLst>
           </p:cNvPr>
           <p:cNvSpPr>
-            <a:spLocks xmlns:a="http://schemas.openxmlformats.org/drawingml/2006/main" noGrp="1"/>
+            <a:spLocks noGrp="1"/>
           </p:cNvSpPr>
           <p:nvPr/>
         </p:nvSpPr>
         <p:spPr>
-          <a:xfrm xmlns:a="http://schemas.openxmlformats.org/drawingml/2006/main">
+          <a:xfrm>
             <a:off x="9239250" y="1962150"/>
             <a:ext cx="2095500" cy="381000"/>
           </a:xfrm>
-          <a:prstGeom xmlns:a="http://schemas.openxmlformats.org/drawingml/2006/main" prst="rect">
+          <a:prstGeom prst="rect">
             <a:avLst/>
           </a:prstGeom>
-          <a:noFill xmlns:a="http://schemas.openxmlformats.org/drawingml/2006/main"/>
-          <a:ln xmlns:a="http://schemas.openxmlformats.org/drawingml/2006/main" w="0">
+          <a:noFill/>
+          <a:ln w="0">
             <a:noFill/>
             <a:prstDash val="solid"/>
           </a:ln>
         </p:spPr>
         <p:txBody>
-          <a:bodyPr xmlns:a="http://schemas.openxmlformats.org/drawingml/2006/main">
+          <a:bodyPr>
             <a:noAutofit/>
           </a:bodyPr>
-          <a:lstStyle xmlns:a="http://schemas.openxmlformats.org/drawingml/2006/main">
+          <a:lstStyle>
             <a:defPPr>
               <a:defRPr sz="1125" b="1">
                 <a:solidFill>
@@ -7946,7 +7933,7 @@
               </a:defRPr>
             </a:defPPr>
           </a:lstStyle>
-          <a:p xmlns:a="http://schemas.openxmlformats.org/drawingml/2006/main">
+          <a:p>
             <a:pPr>
               <a:defRPr sz="1125" b="1">
                 <a:solidFill>
@@ -7973,8 +7960,8 @@
       </p:sp>
       <p:graphicFrame>
         <p:nvGraphicFramePr>
-          <p:cNvPr id="16" name="">
-            <a:extLst xmlns:a="http://schemas.openxmlformats.org/drawingml/2006/main">
+          <p:cNvPr id="16" name="Table 15">
+            <a:extLst>
               <a:ext uri="{FF2B5EF4-FFF2-40B4-BE49-F238E27FC236}">
                 <a16:creationId xmlns:a16="http://schemas.microsoft.com/office/drawing/2014/main" id="{8F0C01D0-778F-4D23-9FAB-76D84FA0A109}"/>
               </a:ext>
@@ -7984,24 +7971,40 @@
           <p:nvPr/>
         </p:nvGraphicFramePr>
         <p:xfrm>
-          <a:off xmlns:a="http://schemas.openxmlformats.org/drawingml/2006/main" x="685800" y="2743200"/>
-          <a:ext xmlns:a="http://schemas.openxmlformats.org/drawingml/2006/main" cx="10820400" cy="2857500"/>
+          <a:off x="685800" y="2743200"/>
+          <a:ext cx="10820400" cy="2857498"/>
         </p:xfrm>
-        <a:graphic xmlns:a="http://schemas.openxmlformats.org/drawingml/2006/main">
+        <a:graphic>
           <a:graphicData uri="http://schemas.openxmlformats.org/drawingml/2006/table">
             <a:tbl>
               <a:tblPr/>
               <a:tblGrid>
-                <a:gridCol w="2095500"/>
-                <a:gridCol w="1047750"/>
-                <a:gridCol w="7677150"/>
+                <a:gridCol w="2095500">
+                  <a:extLst>
+                    <a:ext uri="{9D8B030D-6E8A-4147-A177-3AD203B41FA5}">
+                      <a16:colId xmlns:a16="http://schemas.microsoft.com/office/drawing/2014/main" val="20000"/>
+                    </a:ext>
+                  </a:extLst>
+                </a:gridCol>
+                <a:gridCol w="1047750">
+                  <a:extLst>
+                    <a:ext uri="{9D8B030D-6E8A-4147-A177-3AD203B41FA5}">
+                      <a16:colId xmlns:a16="http://schemas.microsoft.com/office/drawing/2014/main" val="20001"/>
+                    </a:ext>
+                  </a:extLst>
+                </a:gridCol>
+                <a:gridCol w="7677150">
+                  <a:extLst>
+                    <a:ext uri="{9D8B030D-6E8A-4147-A177-3AD203B41FA5}">
+                      <a16:colId xmlns:a16="http://schemas.microsoft.com/office/drawing/2014/main" val="20002"/>
+                    </a:ext>
+                  </a:extLst>
+                </a:gridCol>
               </a:tblGrid>
               <a:tr h="408214">
                 <a:tc>
                   <a:txBody>
-                    <a:bodyPr>
-                      <a:noAutofit/>
-                    </a:bodyPr>
+                    <a:bodyPr/>
                     <a:lstStyle/>
                     <a:p>
                       <a:r>
@@ -8017,7 +8020,7 @@
                       </a:r>
                     </a:p>
                   </a:txBody>
-                  <a:tcPr marL="91440" marR="91440" marT="45720" marB="45720">
+                  <a:tcPr>
                     <a:solidFill>
                       <a:srgbClr val="F5F7F8"/>
                     </a:solidFill>
@@ -8025,9 +8028,7 @@
                 </a:tc>
                 <a:tc>
                   <a:txBody>
-                    <a:bodyPr>
-                      <a:noAutofit/>
-                    </a:bodyPr>
+                    <a:bodyPr/>
                     <a:lstStyle/>
                     <a:p>
                       <a:r>
@@ -8043,7 +8044,7 @@
                       </a:r>
                     </a:p>
                   </a:txBody>
-                  <a:tcPr marL="91440" marR="91440" marT="45720" marB="45720">
+                  <a:tcPr>
                     <a:solidFill>
                       <a:srgbClr val="F5F7F8"/>
                     </a:solidFill>
@@ -8051,9 +8052,7 @@
                 </a:tc>
                 <a:tc>
                   <a:txBody>
-                    <a:bodyPr>
-                      <a:noAutofit/>
-                    </a:bodyPr>
+                    <a:bodyPr/>
                     <a:lstStyle/>
                     <a:p>
                       <a:r>
@@ -8069,19 +8068,22 @@
                       </a:r>
                     </a:p>
                   </a:txBody>
-                  <a:tcPr marL="91440" marR="91440" marT="45720" marB="45720">
+                  <a:tcPr>
                     <a:solidFill>
                       <a:srgbClr val="F5F7F8"/>
                     </a:solidFill>
                   </a:tcPr>
                 </a:tc>
+                <a:extLst>
+                  <a:ext uri="{0D108BD9-81ED-4DB2-BD59-A6C34878D82A}">
+                    <a16:rowId xmlns:a16="http://schemas.microsoft.com/office/drawing/2014/main" val="10000"/>
+                  </a:ext>
+                </a:extLst>
               </a:tr>
               <a:tr h="408214">
                 <a:tc>
                   <a:txBody>
-                    <a:bodyPr>
-                      <a:noAutofit/>
-                    </a:bodyPr>
+                    <a:bodyPr/>
                     <a:lstStyle/>
                     <a:p>
                       <a:r>
@@ -8097,13 +8099,11 @@
                       </a:r>
                     </a:p>
                   </a:txBody>
-                  <a:tcPr marL="91440" marR="91440" marT="45720" marB="45720"/>
+                  <a:tcPr/>
                 </a:tc>
                 <a:tc>
                   <a:txBody>
-                    <a:bodyPr>
-                      <a:noAutofit/>
-                    </a:bodyPr>
+                    <a:bodyPr/>
                     <a:lstStyle/>
                     <a:p>
                       <a:r>
@@ -8119,13 +8119,11 @@
                       </a:r>
                     </a:p>
                   </a:txBody>
-                  <a:tcPr marL="91440" marR="91440" marT="45720" marB="45720"/>
+                  <a:tcPr/>
                 </a:tc>
                 <a:tc>
                   <a:txBody>
-                    <a:bodyPr>
-                      <a:noAutofit/>
-                    </a:bodyPr>
+                    <a:bodyPr/>
                     <a:lstStyle/>
                     <a:p>
                       <a:r>
@@ -8141,15 +8139,18 @@
                       </a:r>
                     </a:p>
                   </a:txBody>
-                  <a:tcPr marL="91440" marR="91440" marT="45720" marB="45720"/>
+                  <a:tcPr/>
                 </a:tc>
+                <a:extLst>
+                  <a:ext uri="{0D108BD9-81ED-4DB2-BD59-A6C34878D82A}">
+                    <a16:rowId xmlns:a16="http://schemas.microsoft.com/office/drawing/2014/main" val="10001"/>
+                  </a:ext>
+                </a:extLst>
               </a:tr>
               <a:tr h="408214">
                 <a:tc>
                   <a:txBody>
-                    <a:bodyPr>
-                      <a:noAutofit/>
-                    </a:bodyPr>
+                    <a:bodyPr/>
                     <a:lstStyle/>
                     <a:p>
                       <a:r>
@@ -8165,13 +8166,11 @@
                       </a:r>
                     </a:p>
                   </a:txBody>
-                  <a:tcPr marL="91440" marR="91440" marT="45720" marB="45720"/>
+                  <a:tcPr/>
                 </a:tc>
                 <a:tc>
                   <a:txBody>
-                    <a:bodyPr>
-                      <a:noAutofit/>
-                    </a:bodyPr>
+                    <a:bodyPr/>
                     <a:lstStyle/>
                     <a:p>
                       <a:r>
@@ -8187,13 +8186,11 @@
                       </a:r>
                     </a:p>
                   </a:txBody>
-                  <a:tcPr marL="91440" marR="91440" marT="45720" marB="45720"/>
+                  <a:tcPr/>
                 </a:tc>
                 <a:tc>
                   <a:txBody>
-                    <a:bodyPr>
-                      <a:noAutofit/>
-                    </a:bodyPr>
+                    <a:bodyPr/>
                     <a:lstStyle/>
                     <a:p>
                       <a:r>
@@ -8209,15 +8206,18 @@
                       </a:r>
                     </a:p>
                   </a:txBody>
-                  <a:tcPr marL="91440" marR="91440" marT="45720" marB="45720"/>
+                  <a:tcPr/>
                 </a:tc>
+                <a:extLst>
+                  <a:ext uri="{0D108BD9-81ED-4DB2-BD59-A6C34878D82A}">
+                    <a16:rowId xmlns:a16="http://schemas.microsoft.com/office/drawing/2014/main" val="10002"/>
+                  </a:ext>
+                </a:extLst>
               </a:tr>
               <a:tr h="408214">
                 <a:tc>
                   <a:txBody>
-                    <a:bodyPr>
-                      <a:noAutofit/>
-                    </a:bodyPr>
+                    <a:bodyPr/>
                     <a:lstStyle/>
                     <a:p>
                       <a:r>
@@ -8233,13 +8233,11 @@
                       </a:r>
                     </a:p>
                   </a:txBody>
-                  <a:tcPr marL="91440" marR="91440" marT="45720" marB="45720"/>
+                  <a:tcPr/>
                 </a:tc>
                 <a:tc>
                   <a:txBody>
-                    <a:bodyPr>
-                      <a:noAutofit/>
-                    </a:bodyPr>
+                    <a:bodyPr/>
                     <a:lstStyle/>
                     <a:p>
                       <a:r>
@@ -8255,13 +8253,11 @@
                       </a:r>
                     </a:p>
                   </a:txBody>
-                  <a:tcPr marL="91440" marR="91440" marT="45720" marB="45720"/>
+                  <a:tcPr/>
                 </a:tc>
                 <a:tc>
                   <a:txBody>
-                    <a:bodyPr>
-                      <a:noAutofit/>
-                    </a:bodyPr>
+                    <a:bodyPr/>
                     <a:lstStyle/>
                     <a:p>
                       <a:r>
@@ -8277,15 +8273,18 @@
                       </a:r>
                     </a:p>
                   </a:txBody>
-                  <a:tcPr marL="91440" marR="91440" marT="45720" marB="45720"/>
+                  <a:tcPr/>
                 </a:tc>
+                <a:extLst>
+                  <a:ext uri="{0D108BD9-81ED-4DB2-BD59-A6C34878D82A}">
+                    <a16:rowId xmlns:a16="http://schemas.microsoft.com/office/drawing/2014/main" val="10003"/>
+                  </a:ext>
+                </a:extLst>
               </a:tr>
               <a:tr h="408214">
                 <a:tc>
                   <a:txBody>
-                    <a:bodyPr>
-                      <a:noAutofit/>
-                    </a:bodyPr>
+                    <a:bodyPr/>
                     <a:lstStyle/>
                     <a:p>
                       <a:r>
@@ -8301,13 +8300,11 @@
                       </a:r>
                     </a:p>
                   </a:txBody>
-                  <a:tcPr marL="91440" marR="91440" marT="45720" marB="45720"/>
+                  <a:tcPr/>
                 </a:tc>
                 <a:tc>
                   <a:txBody>
-                    <a:bodyPr>
-                      <a:noAutofit/>
-                    </a:bodyPr>
+                    <a:bodyPr/>
                     <a:lstStyle/>
                     <a:p>
                       <a:r>
@@ -8323,13 +8320,11 @@
                       </a:r>
                     </a:p>
                   </a:txBody>
-                  <a:tcPr marL="91440" marR="91440" marT="45720" marB="45720"/>
+                  <a:tcPr/>
                 </a:tc>
                 <a:tc>
                   <a:txBody>
-                    <a:bodyPr>
-                      <a:noAutofit/>
-                    </a:bodyPr>
+                    <a:bodyPr/>
                     <a:lstStyle/>
                     <a:p>
                       <a:r>
@@ -8345,15 +8340,18 @@
                       </a:r>
                     </a:p>
                   </a:txBody>
-                  <a:tcPr marL="91440" marR="91440" marT="45720" marB="45720"/>
+                  <a:tcPr/>
                 </a:tc>
+                <a:extLst>
+                  <a:ext uri="{0D108BD9-81ED-4DB2-BD59-A6C34878D82A}">
+                    <a16:rowId xmlns:a16="http://schemas.microsoft.com/office/drawing/2014/main" val="10004"/>
+                  </a:ext>
+                </a:extLst>
               </a:tr>
               <a:tr h="408214">
                 <a:tc>
                   <a:txBody>
-                    <a:bodyPr>
-                      <a:noAutofit/>
-                    </a:bodyPr>
+                    <a:bodyPr/>
                     <a:lstStyle/>
                     <a:p>
                       <a:r>
@@ -8369,13 +8367,11 @@
                       </a:r>
                     </a:p>
                   </a:txBody>
-                  <a:tcPr marL="91440" marR="91440" marT="45720" marB="45720"/>
+                  <a:tcPr/>
                 </a:tc>
                 <a:tc>
                   <a:txBody>
-                    <a:bodyPr>
-                      <a:noAutofit/>
-                    </a:bodyPr>
+                    <a:bodyPr/>
                     <a:lstStyle/>
                     <a:p>
                       <a:r>
@@ -8391,13 +8387,11 @@
                       </a:r>
                     </a:p>
                   </a:txBody>
-                  <a:tcPr marL="91440" marR="91440" marT="45720" marB="45720"/>
+                  <a:tcPr/>
                 </a:tc>
                 <a:tc>
                   <a:txBody>
-                    <a:bodyPr>
-                      <a:noAutofit/>
-                    </a:bodyPr>
+                    <a:bodyPr/>
                     <a:lstStyle/>
                     <a:p>
                       <a:r>
@@ -8413,15 +8407,18 @@
                       </a:r>
                     </a:p>
                   </a:txBody>
-                  <a:tcPr marL="91440" marR="91440" marT="45720" marB="45720"/>
+                  <a:tcPr/>
                 </a:tc>
+                <a:extLst>
+                  <a:ext uri="{0D108BD9-81ED-4DB2-BD59-A6C34878D82A}">
+                    <a16:rowId xmlns:a16="http://schemas.microsoft.com/office/drawing/2014/main" val="10005"/>
+                  </a:ext>
+                </a:extLst>
               </a:tr>
               <a:tr h="408214">
                 <a:tc>
                   <a:txBody>
-                    <a:bodyPr>
-                      <a:noAutofit/>
-                    </a:bodyPr>
+                    <a:bodyPr/>
                     <a:lstStyle/>
                     <a:p>
                       <a:r>
@@ -8437,13 +8434,11 @@
                       </a:r>
                     </a:p>
                   </a:txBody>
-                  <a:tcPr marL="91440" marR="91440" marT="45720" marB="45720"/>
+                  <a:tcPr/>
                 </a:tc>
                 <a:tc>
                   <a:txBody>
-                    <a:bodyPr>
-                      <a:noAutofit/>
-                    </a:bodyPr>
+                    <a:bodyPr/>
                     <a:lstStyle/>
                     <a:p>
                       <a:r>
@@ -8459,13 +8454,11 @@
                       </a:r>
                     </a:p>
                   </a:txBody>
-                  <a:tcPr marL="91440" marR="91440" marT="45720" marB="45720"/>
+                  <a:tcPr/>
                 </a:tc>
                 <a:tc>
                   <a:txBody>
-                    <a:bodyPr>
-                      <a:noAutofit/>
-                    </a:bodyPr>
+                    <a:bodyPr/>
                     <a:lstStyle/>
                     <a:p>
                       <a:r>
@@ -8481,8 +8474,13 @@
                       </a:r>
                     </a:p>
                   </a:txBody>
-                  <a:tcPr marL="91440" marR="91440" marT="45720" marB="45720"/>
+                  <a:tcPr/>
                 </a:tc>
+                <a:extLst>
+                  <a:ext uri="{0D108BD9-81ED-4DB2-BD59-A6C34878D82A}">
+                    <a16:rowId xmlns:a16="http://schemas.microsoft.com/office/drawing/2014/main" val="10006"/>
+                  </a:ext>
+                </a:extLst>
               </a:tr>
             </a:tbl>
           </a:graphicData>
@@ -8495,17 +8493,21 @@
       </p:ext>
     </p:extLst>
   </p:cSld>
+  <p:clrMapOvr>
+    <a:masterClrMapping/>
+  </p:clrMapOvr>
 </p:sld>
 </file>
 
 <file path=ppt/slides/slide6.xml><?xml version="1.0" encoding="utf-8"?>
-<p:sld xmlns:p="http://schemas.openxmlformats.org/presentationml/2006/main">
+<p:sld xmlns:a="http://schemas.openxmlformats.org/drawingml/2006/main" xmlns:r="http://schemas.openxmlformats.org/officeDocument/2006/relationships" xmlns:p="http://schemas.openxmlformats.org/presentationml/2006/main">
   <p:cSld>
     <p:bg>
       <p:bgPr>
-        <a:solidFill xmlns:a="http://schemas.openxmlformats.org/drawingml/2006/main">
+        <a:solidFill>
           <a:srgbClr val="FFFFFF"/>
         </a:solidFill>
+        <a:effectLst/>
       </p:bgPr>
     </p:bg>
     <p:spTree>
@@ -8515,41 +8517,46 @@
         <p:nvPr/>
       </p:nvGrpSpPr>
       <p:grpSpPr>
-        <a:xfrm xmlns:a="http://schemas.openxmlformats.org/drawingml/2006/main"/>
+        <a:xfrm>
+          <a:off x="0" y="0"/>
+          <a:ext cx="0" cy="0"/>
+          <a:chOff x="0" y="0"/>
+          <a:chExt cx="0" cy="0"/>
+        </a:xfrm>
       </p:grpSpPr>
       <p:sp>
         <p:nvSpPr>
-          <p:cNvPr id="8" name="">
-            <a:extLst xmlns:a="http://schemas.openxmlformats.org/drawingml/2006/main">
+          <p:cNvPr id="8" name="Rectangle 7">
+            <a:extLst>
               <a:ext uri="{FF2B5EF4-FFF2-40B4-BE49-F238E27FC236}">
                 <a16:creationId xmlns:a16="http://schemas.microsoft.com/office/drawing/2014/main" id="{B7AADA1C-6DE9-440B-8540-336CBEFCDE76}"/>
               </a:ext>
             </a:extLst>
           </p:cNvPr>
           <p:cNvSpPr>
-            <a:spLocks xmlns:a="http://schemas.openxmlformats.org/drawingml/2006/main" noGrp="1"/>
+            <a:spLocks noGrp="1"/>
           </p:cNvSpPr>
           <p:nvPr/>
         </p:nvSpPr>
         <p:spPr>
-          <a:xfrm xmlns:a="http://schemas.openxmlformats.org/drawingml/2006/main">
+          <a:xfrm>
             <a:off x="9906000" y="6438900"/>
             <a:ext cx="1600200" cy="228600"/>
           </a:xfrm>
-          <a:prstGeom xmlns:a="http://schemas.openxmlformats.org/drawingml/2006/main" prst="rect">
+          <a:prstGeom prst="rect">
             <a:avLst/>
           </a:prstGeom>
-          <a:noFill xmlns:a="http://schemas.openxmlformats.org/drawingml/2006/main"/>
-          <a:ln xmlns:a="http://schemas.openxmlformats.org/drawingml/2006/main" w="0">
+          <a:noFill/>
+          <a:ln w="0">
             <a:noFill/>
             <a:prstDash val="solid"/>
           </a:ln>
         </p:spPr>
         <p:txBody>
-          <a:bodyPr xmlns:a="http://schemas.openxmlformats.org/drawingml/2006/main">
+          <a:bodyPr>
             <a:noAutofit/>
           </a:bodyPr>
-          <a:lstStyle xmlns:a="http://schemas.openxmlformats.org/drawingml/2006/main">
+          <a:lstStyle>
             <a:defPPr>
               <a:defRPr sz="975" b="0">
                 <a:solidFill>
@@ -8561,7 +8568,7 @@
               </a:defRPr>
             </a:defPPr>
           </a:lstStyle>
-          <a:p xmlns:a="http://schemas.openxmlformats.org/drawingml/2006/main">
+          <a:p>
             <a:pPr>
               <a:defRPr sz="975" b="0">
                 <a:solidFill>
@@ -8589,36 +8596,36 @@
       <p:sp>
         <p:nvSpPr>
           <p:cNvPr id="2" name="slide-title">
-            <a:extLst xmlns:a="http://schemas.openxmlformats.org/drawingml/2006/main">
+            <a:extLst>
               <a:ext uri="{FF2B5EF4-FFF2-40B4-BE49-F238E27FC236}">
                 <a16:creationId xmlns:a16="http://schemas.microsoft.com/office/drawing/2014/main" id="{79FCAE7C-D0CC-4848-A662-F93FF61E6AAF}"/>
               </a:ext>
             </a:extLst>
           </p:cNvPr>
           <p:cNvSpPr>
-            <a:spLocks xmlns:a="http://schemas.openxmlformats.org/drawingml/2006/main" noGrp="1"/>
+            <a:spLocks noGrp="1"/>
           </p:cNvSpPr>
           <p:nvPr/>
         </p:nvSpPr>
         <p:spPr>
-          <a:xfrm xmlns:a="http://schemas.openxmlformats.org/drawingml/2006/main">
+          <a:xfrm>
             <a:off x="685800" y="495300"/>
             <a:ext cx="10820400" cy="514350"/>
           </a:xfrm>
-          <a:prstGeom xmlns:a="http://schemas.openxmlformats.org/drawingml/2006/main" prst="rect">
+          <a:prstGeom prst="rect">
             <a:avLst/>
           </a:prstGeom>
-          <a:noFill xmlns:a="http://schemas.openxmlformats.org/drawingml/2006/main"/>
-          <a:ln xmlns:a="http://schemas.openxmlformats.org/drawingml/2006/main" w="0">
+          <a:noFill/>
+          <a:ln w="0">
             <a:noFill/>
             <a:prstDash val="solid"/>
           </a:ln>
         </p:spPr>
         <p:txBody>
-          <a:bodyPr xmlns:a="http://schemas.openxmlformats.org/drawingml/2006/main">
+          <a:bodyPr>
             <a:noAutofit/>
           </a:bodyPr>
-          <a:lstStyle xmlns:a="http://schemas.openxmlformats.org/drawingml/2006/main">
+          <a:lstStyle>
             <a:defPPr>
               <a:defRPr sz="3000" b="1">
                 <a:solidFill>
@@ -8630,7 +8637,7 @@
               </a:defRPr>
             </a:defPPr>
           </a:lstStyle>
-          <a:p xmlns:a="http://schemas.openxmlformats.org/drawingml/2006/main">
+          <a:p>
             <a:pPr>
               <a:defRPr sz="3000" b="1">
                 <a:solidFill>
@@ -8658,36 +8665,36 @@
       <p:sp>
         <p:nvSpPr>
           <p:cNvPr id="3" name="slide-lead">
-            <a:extLst xmlns:a="http://schemas.openxmlformats.org/drawingml/2006/main">
+            <a:extLst>
               <a:ext uri="{FF2B5EF4-FFF2-40B4-BE49-F238E27FC236}">
                 <a16:creationId xmlns:a16="http://schemas.microsoft.com/office/drawing/2014/main" id="{78FD5C54-D8A3-47B7-8989-FCC6AFB5956A}"/>
               </a:ext>
             </a:extLst>
           </p:cNvPr>
           <p:cNvSpPr>
-            <a:spLocks xmlns:a="http://schemas.openxmlformats.org/drawingml/2006/main" noGrp="1"/>
+            <a:spLocks noGrp="1"/>
           </p:cNvSpPr>
           <p:nvPr/>
         </p:nvSpPr>
         <p:spPr>
-          <a:xfrm xmlns:a="http://schemas.openxmlformats.org/drawingml/2006/main">
+          <a:xfrm>
             <a:off x="685800" y="1066800"/>
             <a:ext cx="10820400" cy="323850"/>
           </a:xfrm>
-          <a:prstGeom xmlns:a="http://schemas.openxmlformats.org/drawingml/2006/main" prst="rect">
+          <a:prstGeom prst="rect">
             <a:avLst/>
           </a:prstGeom>
-          <a:noFill xmlns:a="http://schemas.openxmlformats.org/drawingml/2006/main"/>
-          <a:ln xmlns:a="http://schemas.openxmlformats.org/drawingml/2006/main" w="0">
+          <a:noFill/>
+          <a:ln w="0">
             <a:noFill/>
             <a:prstDash val="solid"/>
           </a:ln>
         </p:spPr>
         <p:txBody>
-          <a:bodyPr xmlns:a="http://schemas.openxmlformats.org/drawingml/2006/main">
+          <a:bodyPr>
             <a:noAutofit/>
           </a:bodyPr>
-          <a:lstStyle xmlns:a="http://schemas.openxmlformats.org/drawingml/2006/main">
+          <a:lstStyle>
             <a:defPPr>
               <a:defRPr sz="1575" b="0">
                 <a:solidFill>
@@ -8699,7 +8706,7 @@
               </a:defRPr>
             </a:defPPr>
           </a:lstStyle>
-          <a:p xmlns:a="http://schemas.openxmlformats.org/drawingml/2006/main">
+          <a:p>
             <a:pPr>
               <a:defRPr sz="1575" b="0">
                 <a:solidFill>
@@ -8727,67 +8734,74 @@
       <p:sp>
         <p:nvSpPr>
           <p:cNvPr id="4" name="title-rule">
-            <a:extLst xmlns:a="http://schemas.openxmlformats.org/drawingml/2006/main">
+            <a:extLst>
               <a:ext uri="{FF2B5EF4-FFF2-40B4-BE49-F238E27FC236}">
                 <a16:creationId xmlns:a16="http://schemas.microsoft.com/office/drawing/2014/main" id="{E29CE013-0FFB-4837-9FAB-D30CF6491C66}"/>
               </a:ext>
             </a:extLst>
           </p:cNvPr>
           <p:cNvSpPr>
-            <a:spLocks xmlns:a="http://schemas.openxmlformats.org/drawingml/2006/main" noGrp="1"/>
+            <a:spLocks noGrp="1"/>
           </p:cNvSpPr>
           <p:nvPr/>
         </p:nvSpPr>
         <p:spPr>
-          <a:xfrm xmlns:a="http://schemas.openxmlformats.org/drawingml/2006/main">
+          <a:xfrm>
             <a:off x="685800" y="1504950"/>
             <a:ext cx="10820400" cy="9525"/>
           </a:xfrm>
-          <a:prstGeom xmlns:a="http://schemas.openxmlformats.org/drawingml/2006/main" prst="rect">
+          <a:prstGeom prst="rect">
             <a:avLst/>
           </a:prstGeom>
-          <a:solidFill xmlns:a="http://schemas.openxmlformats.org/drawingml/2006/main">
+          <a:solidFill>
             <a:srgbClr val="E1E5EA"/>
           </a:solidFill>
-          <a:ln xmlns:a="http://schemas.openxmlformats.org/drawingml/2006/main" w="0">
+          <a:ln w="0">
             <a:noFill/>
             <a:prstDash val="solid"/>
           </a:ln>
         </p:spPr>
-      </p:sp>
-      <p:sp>
-        <p:nvSpPr>
-          <p:cNvPr id="5" name="">
-            <a:extLst xmlns:a="http://schemas.openxmlformats.org/drawingml/2006/main">
+        <p:txBody>
+          <a:bodyPr/>
+          <a:lstStyle/>
+          <a:p>
+            <a:endParaRPr lang="en-US"/>
+          </a:p>
+        </p:txBody>
+      </p:sp>
+      <p:sp>
+        <p:nvSpPr>
+          <p:cNvPr id="5" name="Rectangle 4">
+            <a:extLst>
               <a:ext uri="{FF2B5EF4-FFF2-40B4-BE49-F238E27FC236}">
                 <a16:creationId xmlns:a16="http://schemas.microsoft.com/office/drawing/2014/main" id="{AF8F83B1-C6AD-4EAB-B0F4-5060ACE56049}"/>
               </a:ext>
             </a:extLst>
           </p:cNvPr>
           <p:cNvSpPr>
-            <a:spLocks xmlns:a="http://schemas.openxmlformats.org/drawingml/2006/main" noGrp="1"/>
+            <a:spLocks noGrp="1"/>
           </p:cNvSpPr>
           <p:nvPr/>
         </p:nvSpPr>
         <p:spPr>
-          <a:xfrm xmlns:a="http://schemas.openxmlformats.org/drawingml/2006/main">
+          <a:xfrm>
             <a:off x="685800" y="1981200"/>
             <a:ext cx="5619750" cy="3048000"/>
           </a:xfrm>
-          <a:prstGeom xmlns:a="http://schemas.openxmlformats.org/drawingml/2006/main" prst="rect">
+          <a:prstGeom prst="rect">
             <a:avLst/>
           </a:prstGeom>
-          <a:noFill xmlns:a="http://schemas.openxmlformats.org/drawingml/2006/main"/>
-          <a:ln xmlns:a="http://schemas.openxmlformats.org/drawingml/2006/main" w="0">
+          <a:noFill/>
+          <a:ln w="0">
             <a:noFill/>
             <a:prstDash val="solid"/>
           </a:ln>
         </p:spPr>
         <p:txBody>
-          <a:bodyPr xmlns:a="http://schemas.openxmlformats.org/drawingml/2006/main">
+          <a:bodyPr>
             <a:noAutofit/>
           </a:bodyPr>
-          <a:lstStyle xmlns:a="http://schemas.openxmlformats.org/drawingml/2006/main">
+          <a:lstStyle>
             <a:defPPr>
               <a:defRPr sz="1275">
                 <a:solidFill>
@@ -8799,7 +8813,7 @@
               </a:defRPr>
             </a:defPPr>
           </a:lstStyle>
-          <a:p xmlns:a="http://schemas.openxmlformats.org/drawingml/2006/main">
+          <a:p>
             <a:pPr marL="228600" indent="-114300">
               <a:spcAft>
                 <a:spcPts val="1400"/>
@@ -8826,7 +8840,7 @@
               <a:t>The engine estimates the pickup to handover duration for each candidate organization from the travel distance and a handling allowance.</a:t>
             </a:r>
           </a:p>
-          <a:p xmlns:a="http://schemas.openxmlformats.org/drawingml/2006/main">
+          <a:p>
             <a:pPr marL="228600" indent="-114300">
               <a:spcAft>
                 <a:spcPts val="1400"/>
@@ -8853,7 +8867,7 @@
               <a:t>The estimate is compared with the remaining safe window, retaining sixty minutes for serving.</a:t>
             </a:r>
           </a:p>
-          <a:p xmlns:a="http://schemas.openxmlformats.org/drawingml/2006/main">
+          <a:p>
             <a:pPr marL="228600" indent="-114300">
               <a:spcAft>
                 <a:spcPts val="1400"/>
@@ -8880,7 +8894,7 @@
               <a:t>Organizations that cannot arrive in time are excluded, and the reason is stored on the allocation.</a:t>
             </a:r>
           </a:p>
-          <a:p xmlns:a="http://schemas.openxmlformats.org/drawingml/2006/main">
+          <a:p>
             <a:pPr marL="228600" indent="-114300">
               <a:spcAft>
                 <a:spcPts val="1400"/>
@@ -8911,8 +8925,8 @@
       </p:sp>
       <p:graphicFrame>
         <p:nvGraphicFramePr>
-          <p:cNvPr id="6" name="">
-            <a:extLst xmlns:a="http://schemas.openxmlformats.org/drawingml/2006/main">
+          <p:cNvPr id="6" name="Table 5">
+            <a:extLst>
               <a:ext uri="{FF2B5EF4-FFF2-40B4-BE49-F238E27FC236}">
                 <a16:creationId xmlns:a16="http://schemas.microsoft.com/office/drawing/2014/main" id="{47D2D87E-86B1-4AC7-BA20-AC599DC3424D}"/>
               </a:ext>
@@ -8922,24 +8936,40 @@
           <p:nvPr/>
         </p:nvGraphicFramePr>
         <p:xfrm>
-          <a:off xmlns:a="http://schemas.openxmlformats.org/drawingml/2006/main" x="6762750" y="1981200"/>
-          <a:ext xmlns:a="http://schemas.openxmlformats.org/drawingml/2006/main" cx="4743450" cy="2552700"/>
+          <a:off x="6762750" y="1981200"/>
+          <a:ext cx="4743450" cy="2552700"/>
         </p:xfrm>
-        <a:graphic xmlns:a="http://schemas.openxmlformats.org/drawingml/2006/main">
+        <a:graphic>
           <a:graphicData uri="http://schemas.openxmlformats.org/drawingml/2006/table">
             <a:tbl>
               <a:tblPr/>
               <a:tblGrid>
-                <a:gridCol w="1779411"/>
-                <a:gridCol w="1047750"/>
-                <a:gridCol w="1916289"/>
+                <a:gridCol w="1779411">
+                  <a:extLst>
+                    <a:ext uri="{9D8B030D-6E8A-4147-A177-3AD203B41FA5}">
+                      <a16:colId xmlns:a16="http://schemas.microsoft.com/office/drawing/2014/main" val="20000"/>
+                    </a:ext>
+                  </a:extLst>
+                </a:gridCol>
+                <a:gridCol w="1047750">
+                  <a:extLst>
+                    <a:ext uri="{9D8B030D-6E8A-4147-A177-3AD203B41FA5}">
+                      <a16:colId xmlns:a16="http://schemas.microsoft.com/office/drawing/2014/main" val="20001"/>
+                    </a:ext>
+                  </a:extLst>
+                </a:gridCol>
+                <a:gridCol w="1916289">
+                  <a:extLst>
+                    <a:ext uri="{9D8B030D-6E8A-4147-A177-3AD203B41FA5}">
+                      <a16:colId xmlns:a16="http://schemas.microsoft.com/office/drawing/2014/main" val="20002"/>
+                    </a:ext>
+                  </a:extLst>
+                </a:gridCol>
               </a:tblGrid>
               <a:tr h="638175">
                 <a:tc>
                   <a:txBody>
-                    <a:bodyPr>
-                      <a:noAutofit/>
-                    </a:bodyPr>
+                    <a:bodyPr/>
                     <a:lstStyle/>
                     <a:p>
                       <a:r>
@@ -8955,7 +8985,7 @@
                       </a:r>
                     </a:p>
                   </a:txBody>
-                  <a:tcPr marL="91440" marR="91440" marT="45720" marB="45720">
+                  <a:tcPr>
                     <a:solidFill>
                       <a:srgbClr val="F5F7F8"/>
                     </a:solidFill>
@@ -8963,9 +8993,7 @@
                 </a:tc>
                 <a:tc>
                   <a:txBody>
-                    <a:bodyPr>
-                      <a:noAutofit/>
-                    </a:bodyPr>
+                    <a:bodyPr/>
                     <a:lstStyle/>
                     <a:p>
                       <a:r>
@@ -8981,7 +9009,7 @@
                       </a:r>
                     </a:p>
                   </a:txBody>
-                  <a:tcPr marL="91440" marR="91440" marT="45720" marB="45720">
+                  <a:tcPr>
                     <a:solidFill>
                       <a:srgbClr val="F5F7F8"/>
                     </a:solidFill>
@@ -8989,9 +9017,7 @@
                 </a:tc>
                 <a:tc>
                   <a:txBody>
-                    <a:bodyPr>
-                      <a:noAutofit/>
-                    </a:bodyPr>
+                    <a:bodyPr/>
                     <a:lstStyle/>
                     <a:p>
                       <a:r>
@@ -9007,19 +9033,22 @@
                       </a:r>
                     </a:p>
                   </a:txBody>
-                  <a:tcPr marL="91440" marR="91440" marT="45720" marB="45720">
+                  <a:tcPr>
                     <a:solidFill>
                       <a:srgbClr val="F5F7F8"/>
                     </a:solidFill>
                   </a:tcPr>
                 </a:tc>
+                <a:extLst>
+                  <a:ext uri="{0D108BD9-81ED-4DB2-BD59-A6C34878D82A}">
+                    <a16:rowId xmlns:a16="http://schemas.microsoft.com/office/drawing/2014/main" val="10000"/>
+                  </a:ext>
+                </a:extLst>
               </a:tr>
               <a:tr h="638175">
                 <a:tc>
                   <a:txBody>
-                    <a:bodyPr>
-                      <a:noAutofit/>
-                    </a:bodyPr>
+                    <a:bodyPr/>
                     <a:lstStyle/>
                     <a:p>
                       <a:r>
@@ -9035,13 +9064,11 @@
                       </a:r>
                     </a:p>
                   </a:txBody>
-                  <a:tcPr marL="91440" marR="91440" marT="45720" marB="45720"/>
+                  <a:tcPr/>
                 </a:tc>
                 <a:tc>
                   <a:txBody>
-                    <a:bodyPr>
-                      <a:noAutofit/>
-                    </a:bodyPr>
+                    <a:bodyPr/>
                     <a:lstStyle/>
                     <a:p>
                       <a:r>
@@ -9057,13 +9084,11 @@
                       </a:r>
                     </a:p>
                   </a:txBody>
-                  <a:tcPr marL="91440" marR="91440" marT="45720" marB="45720"/>
+                  <a:tcPr/>
                 </a:tc>
                 <a:tc>
                   <a:txBody>
-                    <a:bodyPr>
-                      <a:noAutofit/>
-                    </a:bodyPr>
+                    <a:bodyPr/>
                     <a:lstStyle/>
                     <a:p>
                       <a:r>
@@ -9079,15 +9104,18 @@
                       </a:r>
                     </a:p>
                   </a:txBody>
-                  <a:tcPr marL="91440" marR="91440" marT="45720" marB="45720"/>
+                  <a:tcPr/>
                 </a:tc>
+                <a:extLst>
+                  <a:ext uri="{0D108BD9-81ED-4DB2-BD59-A6C34878D82A}">
+                    <a16:rowId xmlns:a16="http://schemas.microsoft.com/office/drawing/2014/main" val="10001"/>
+                  </a:ext>
+                </a:extLst>
               </a:tr>
               <a:tr h="638175">
                 <a:tc>
                   <a:txBody>
-                    <a:bodyPr>
-                      <a:noAutofit/>
-                    </a:bodyPr>
+                    <a:bodyPr/>
                     <a:lstStyle/>
                     <a:p>
                       <a:r>
@@ -9103,13 +9131,11 @@
                       </a:r>
                     </a:p>
                   </a:txBody>
-                  <a:tcPr marL="91440" marR="91440" marT="45720" marB="45720"/>
+                  <a:tcPr/>
                 </a:tc>
                 <a:tc>
                   <a:txBody>
-                    <a:bodyPr>
-                      <a:noAutofit/>
-                    </a:bodyPr>
+                    <a:bodyPr/>
                     <a:lstStyle/>
                     <a:p>
                       <a:r>
@@ -9125,13 +9151,11 @@
                       </a:r>
                     </a:p>
                   </a:txBody>
-                  <a:tcPr marL="91440" marR="91440" marT="45720" marB="45720"/>
+                  <a:tcPr/>
                 </a:tc>
                 <a:tc>
                   <a:txBody>
-                    <a:bodyPr>
-                      <a:noAutofit/>
-                    </a:bodyPr>
+                    <a:bodyPr/>
                     <a:lstStyle/>
                     <a:p>
                       <a:r>
@@ -9147,15 +9171,18 @@
                       </a:r>
                     </a:p>
                   </a:txBody>
-                  <a:tcPr marL="91440" marR="91440" marT="45720" marB="45720"/>
+                  <a:tcPr/>
                 </a:tc>
+                <a:extLst>
+                  <a:ext uri="{0D108BD9-81ED-4DB2-BD59-A6C34878D82A}">
+                    <a16:rowId xmlns:a16="http://schemas.microsoft.com/office/drawing/2014/main" val="10002"/>
+                  </a:ext>
+                </a:extLst>
               </a:tr>
               <a:tr h="638175">
                 <a:tc>
                   <a:txBody>
-                    <a:bodyPr>
-                      <a:noAutofit/>
-                    </a:bodyPr>
+                    <a:bodyPr/>
                     <a:lstStyle/>
                     <a:p>
                       <a:r>
@@ -9171,13 +9198,11 @@
                       </a:r>
                     </a:p>
                   </a:txBody>
-                  <a:tcPr marL="91440" marR="91440" marT="45720" marB="45720"/>
+                  <a:tcPr/>
                 </a:tc>
                 <a:tc>
                   <a:txBody>
-                    <a:bodyPr>
-                      <a:noAutofit/>
-                    </a:bodyPr>
+                    <a:bodyPr/>
                     <a:lstStyle/>
                     <a:p>
                       <a:r>
@@ -9193,13 +9218,11 @@
                       </a:r>
                     </a:p>
                   </a:txBody>
-                  <a:tcPr marL="91440" marR="91440" marT="45720" marB="45720"/>
+                  <a:tcPr/>
                 </a:tc>
                 <a:tc>
                   <a:txBody>
-                    <a:bodyPr>
-                      <a:noAutofit/>
-                    </a:bodyPr>
+                    <a:bodyPr/>
                     <a:lstStyle/>
                     <a:p>
                       <a:r>
@@ -9215,8 +9238,13 @@
                       </a:r>
                     </a:p>
                   </a:txBody>
-                  <a:tcPr marL="91440" marR="91440" marT="45720" marB="45720"/>
+                  <a:tcPr/>
                 </a:tc>
+                <a:extLst>
+                  <a:ext uri="{0D108BD9-81ED-4DB2-BD59-A6C34878D82A}">
+                    <a16:rowId xmlns:a16="http://schemas.microsoft.com/office/drawing/2014/main" val="10003"/>
+                  </a:ext>
+                </a:extLst>
               </a:tr>
             </a:tbl>
           </a:graphicData>
@@ -9224,37 +9252,37 @@
       </p:graphicFrame>
       <p:sp>
         <p:nvSpPr>
-          <p:cNvPr id="7" name="">
-            <a:extLst xmlns:a="http://schemas.openxmlformats.org/drawingml/2006/main">
+          <p:cNvPr id="7" name="Rectangle 6">
+            <a:extLst>
               <a:ext uri="{FF2B5EF4-FFF2-40B4-BE49-F238E27FC236}">
                 <a16:creationId xmlns:a16="http://schemas.microsoft.com/office/drawing/2014/main" id="{BAD644AF-E042-479F-9342-AA92247BF88F}"/>
               </a:ext>
             </a:extLst>
           </p:cNvPr>
           <p:cNvSpPr>
-            <a:spLocks xmlns:a="http://schemas.openxmlformats.org/drawingml/2006/main" noGrp="1"/>
+            <a:spLocks noGrp="1"/>
           </p:cNvSpPr>
           <p:nvPr/>
         </p:nvSpPr>
         <p:spPr>
-          <a:xfrm xmlns:a="http://schemas.openxmlformats.org/drawingml/2006/main">
+          <a:xfrm>
             <a:off x="6762750" y="4686300"/>
             <a:ext cx="4743450" cy="419100"/>
           </a:xfrm>
-          <a:prstGeom xmlns:a="http://schemas.openxmlformats.org/drawingml/2006/main" prst="rect">
+          <a:prstGeom prst="rect">
             <a:avLst/>
           </a:prstGeom>
-          <a:noFill xmlns:a="http://schemas.openxmlformats.org/drawingml/2006/main"/>
-          <a:ln xmlns:a="http://schemas.openxmlformats.org/drawingml/2006/main" w="0">
+          <a:noFill/>
+          <a:ln w="0">
             <a:noFill/>
             <a:prstDash val="solid"/>
           </a:ln>
         </p:spPr>
         <p:txBody>
-          <a:bodyPr xmlns:a="http://schemas.openxmlformats.org/drawingml/2006/main">
+          <a:bodyPr>
             <a:noAutofit/>
           </a:bodyPr>
-          <a:lstStyle xmlns:a="http://schemas.openxmlformats.org/drawingml/2006/main">
+          <a:lstStyle>
             <a:defPPr>
               <a:defRPr sz="1125" b="1">
                 <a:solidFill>
@@ -9266,7 +9294,7 @@
               </a:defRPr>
             </a:defPPr>
           </a:lstStyle>
-          <a:p xmlns:a="http://schemas.openxmlformats.org/drawingml/2006/main">
+          <a:p>
             <a:pPr>
               <a:defRPr sz="1125" b="1">
                 <a:solidFill>
@@ -9298,17 +9326,21 @@
       </p:ext>
     </p:extLst>
   </p:cSld>
+  <p:clrMapOvr>
+    <a:masterClrMapping/>
+  </p:clrMapOvr>
 </p:sld>
 </file>
 
 <file path=ppt/slides/slide7.xml><?xml version="1.0" encoding="utf-8"?>
-<p:sld xmlns:p="http://schemas.openxmlformats.org/presentationml/2006/main">
+<p:sld xmlns:a="http://schemas.openxmlformats.org/drawingml/2006/main" xmlns:r="http://schemas.openxmlformats.org/officeDocument/2006/relationships" xmlns:p="http://schemas.openxmlformats.org/presentationml/2006/main">
   <p:cSld>
     <p:bg>
       <p:bgPr>
-        <a:solidFill xmlns:a="http://schemas.openxmlformats.org/drawingml/2006/main">
+        <a:solidFill>
           <a:srgbClr val="FFFFFF"/>
         </a:solidFill>
+        <a:effectLst/>
       </p:bgPr>
     </p:bg>
     <p:spTree>
@@ -9318,41 +9350,46 @@
         <p:nvPr/>
       </p:nvGrpSpPr>
       <p:grpSpPr>
-        <a:xfrm xmlns:a="http://schemas.openxmlformats.org/drawingml/2006/main"/>
+        <a:xfrm>
+          <a:off x="0" y="0"/>
+          <a:ext cx="0" cy="0"/>
+          <a:chOff x="0" y="0"/>
+          <a:chExt cx="0" cy="0"/>
+        </a:xfrm>
       </p:grpSpPr>
       <p:sp>
         <p:nvSpPr>
-          <p:cNvPr id="7" name="">
-            <a:extLst xmlns:a="http://schemas.openxmlformats.org/drawingml/2006/main">
+          <p:cNvPr id="7" name="Rectangle 6">
+            <a:extLst>
               <a:ext uri="{FF2B5EF4-FFF2-40B4-BE49-F238E27FC236}">
                 <a16:creationId xmlns:a16="http://schemas.microsoft.com/office/drawing/2014/main" id="{F6AB33A3-1D2B-4B6A-89F9-421E44D77CCD}"/>
               </a:ext>
             </a:extLst>
           </p:cNvPr>
           <p:cNvSpPr>
-            <a:spLocks xmlns:a="http://schemas.openxmlformats.org/drawingml/2006/main" noGrp="1"/>
+            <a:spLocks noGrp="1"/>
           </p:cNvSpPr>
           <p:nvPr/>
         </p:nvSpPr>
         <p:spPr>
-          <a:xfrm xmlns:a="http://schemas.openxmlformats.org/drawingml/2006/main">
+          <a:xfrm>
             <a:off x="9906000" y="6438900"/>
             <a:ext cx="1600200" cy="228600"/>
           </a:xfrm>
-          <a:prstGeom xmlns:a="http://schemas.openxmlformats.org/drawingml/2006/main" prst="rect">
+          <a:prstGeom prst="rect">
             <a:avLst/>
           </a:prstGeom>
-          <a:noFill xmlns:a="http://schemas.openxmlformats.org/drawingml/2006/main"/>
-          <a:ln xmlns:a="http://schemas.openxmlformats.org/drawingml/2006/main" w="0">
+          <a:noFill/>
+          <a:ln w="0">
             <a:noFill/>
             <a:prstDash val="solid"/>
           </a:ln>
         </p:spPr>
         <p:txBody>
-          <a:bodyPr xmlns:a="http://schemas.openxmlformats.org/drawingml/2006/main">
+          <a:bodyPr>
             <a:noAutofit/>
           </a:bodyPr>
-          <a:lstStyle xmlns:a="http://schemas.openxmlformats.org/drawingml/2006/main">
+          <a:lstStyle>
             <a:defPPr>
               <a:defRPr sz="975" b="0">
                 <a:solidFill>
@@ -9364,7 +9401,7 @@
               </a:defRPr>
             </a:defPPr>
           </a:lstStyle>
-          <a:p xmlns:a="http://schemas.openxmlformats.org/drawingml/2006/main">
+          <a:p>
             <a:pPr>
               <a:defRPr sz="975" b="0">
                 <a:solidFill>
@@ -9392,36 +9429,36 @@
       <p:sp>
         <p:nvSpPr>
           <p:cNvPr id="2" name="slide-title">
-            <a:extLst xmlns:a="http://schemas.openxmlformats.org/drawingml/2006/main">
+            <a:extLst>
               <a:ext uri="{FF2B5EF4-FFF2-40B4-BE49-F238E27FC236}">
                 <a16:creationId xmlns:a16="http://schemas.microsoft.com/office/drawing/2014/main" id="{C4661732-4C0C-44C9-9C2F-2E7B3473B1DD}"/>
               </a:ext>
             </a:extLst>
           </p:cNvPr>
           <p:cNvSpPr>
-            <a:spLocks xmlns:a="http://schemas.openxmlformats.org/drawingml/2006/main" noGrp="1"/>
+            <a:spLocks noGrp="1"/>
           </p:cNvSpPr>
           <p:nvPr/>
         </p:nvSpPr>
         <p:spPr>
-          <a:xfrm xmlns:a="http://schemas.openxmlformats.org/drawingml/2006/main">
+          <a:xfrm>
             <a:off x="685800" y="495300"/>
             <a:ext cx="10820400" cy="514350"/>
           </a:xfrm>
-          <a:prstGeom xmlns:a="http://schemas.openxmlformats.org/drawingml/2006/main" prst="rect">
+          <a:prstGeom prst="rect">
             <a:avLst/>
           </a:prstGeom>
-          <a:noFill xmlns:a="http://schemas.openxmlformats.org/drawingml/2006/main"/>
-          <a:ln xmlns:a="http://schemas.openxmlformats.org/drawingml/2006/main" w="0">
+          <a:noFill/>
+          <a:ln w="0">
             <a:noFill/>
             <a:prstDash val="solid"/>
           </a:ln>
         </p:spPr>
         <p:txBody>
-          <a:bodyPr xmlns:a="http://schemas.openxmlformats.org/drawingml/2006/main">
+          <a:bodyPr>
             <a:noAutofit/>
           </a:bodyPr>
-          <a:lstStyle xmlns:a="http://schemas.openxmlformats.org/drawingml/2006/main">
+          <a:lstStyle>
             <a:defPPr>
               <a:defRPr sz="3000" b="1">
                 <a:solidFill>
@@ -9433,7 +9470,7 @@
               </a:defRPr>
             </a:defPPr>
           </a:lstStyle>
-          <a:p xmlns:a="http://schemas.openxmlformats.org/drawingml/2006/main">
+          <a:p>
             <a:pPr>
               <a:defRPr sz="3000" b="1">
                 <a:solidFill>
@@ -9461,36 +9498,36 @@
       <p:sp>
         <p:nvSpPr>
           <p:cNvPr id="3" name="slide-lead">
-            <a:extLst xmlns:a="http://schemas.openxmlformats.org/drawingml/2006/main">
+            <a:extLst>
               <a:ext uri="{FF2B5EF4-FFF2-40B4-BE49-F238E27FC236}">
                 <a16:creationId xmlns:a16="http://schemas.microsoft.com/office/drawing/2014/main" id="{B1C3DDB2-EF2C-4B51-BFFA-487EC7673D82}"/>
               </a:ext>
             </a:extLst>
           </p:cNvPr>
           <p:cNvSpPr>
-            <a:spLocks xmlns:a="http://schemas.openxmlformats.org/drawingml/2006/main" noGrp="1"/>
+            <a:spLocks noGrp="1"/>
           </p:cNvSpPr>
           <p:nvPr/>
         </p:nvSpPr>
         <p:spPr>
-          <a:xfrm xmlns:a="http://schemas.openxmlformats.org/drawingml/2006/main">
+          <a:xfrm>
             <a:off x="685800" y="1066800"/>
             <a:ext cx="10820400" cy="323850"/>
           </a:xfrm>
-          <a:prstGeom xmlns:a="http://schemas.openxmlformats.org/drawingml/2006/main" prst="rect">
+          <a:prstGeom prst="rect">
             <a:avLst/>
           </a:prstGeom>
-          <a:noFill xmlns:a="http://schemas.openxmlformats.org/drawingml/2006/main"/>
-          <a:ln xmlns:a="http://schemas.openxmlformats.org/drawingml/2006/main" w="0">
+          <a:noFill/>
+          <a:ln w="0">
             <a:noFill/>
             <a:prstDash val="solid"/>
           </a:ln>
         </p:spPr>
         <p:txBody>
-          <a:bodyPr xmlns:a="http://schemas.openxmlformats.org/drawingml/2006/main">
+          <a:bodyPr>
             <a:noAutofit/>
           </a:bodyPr>
-          <a:lstStyle xmlns:a="http://schemas.openxmlformats.org/drawingml/2006/main">
+          <a:lstStyle>
             <a:defPPr>
               <a:defRPr sz="1575" b="0">
                 <a:solidFill>
@@ -9502,7 +9539,7 @@
               </a:defRPr>
             </a:defPPr>
           </a:lstStyle>
-          <a:p xmlns:a="http://schemas.openxmlformats.org/drawingml/2006/main">
+          <a:p>
             <a:pPr>
               <a:defRPr sz="1575" b="0">
                 <a:solidFill>
@@ -9530,67 +9567,74 @@
       <p:sp>
         <p:nvSpPr>
           <p:cNvPr id="4" name="title-rule">
-            <a:extLst xmlns:a="http://schemas.openxmlformats.org/drawingml/2006/main">
+            <a:extLst>
               <a:ext uri="{FF2B5EF4-FFF2-40B4-BE49-F238E27FC236}">
                 <a16:creationId xmlns:a16="http://schemas.microsoft.com/office/drawing/2014/main" id="{9B77AD4F-E588-41BF-AA49-88E0B7996C61}"/>
               </a:ext>
             </a:extLst>
           </p:cNvPr>
           <p:cNvSpPr>
-            <a:spLocks xmlns:a="http://schemas.openxmlformats.org/drawingml/2006/main" noGrp="1"/>
+            <a:spLocks noGrp="1"/>
           </p:cNvSpPr>
           <p:nvPr/>
         </p:nvSpPr>
         <p:spPr>
-          <a:xfrm xmlns:a="http://schemas.openxmlformats.org/drawingml/2006/main">
+          <a:xfrm>
             <a:off x="685800" y="1504950"/>
             <a:ext cx="10820400" cy="9525"/>
           </a:xfrm>
-          <a:prstGeom xmlns:a="http://schemas.openxmlformats.org/drawingml/2006/main" prst="rect">
+          <a:prstGeom prst="rect">
             <a:avLst/>
           </a:prstGeom>
-          <a:solidFill xmlns:a="http://schemas.openxmlformats.org/drawingml/2006/main">
+          <a:solidFill>
             <a:srgbClr val="E1E5EA"/>
           </a:solidFill>
-          <a:ln xmlns:a="http://schemas.openxmlformats.org/drawingml/2006/main" w="0">
+          <a:ln w="0">
             <a:noFill/>
             <a:prstDash val="solid"/>
           </a:ln>
         </p:spPr>
-      </p:sp>
-      <p:sp>
-        <p:nvSpPr>
-          <p:cNvPr id="5" name="">
-            <a:extLst xmlns:a="http://schemas.openxmlformats.org/drawingml/2006/main">
+        <p:txBody>
+          <a:bodyPr/>
+          <a:lstStyle/>
+          <a:p>
+            <a:endParaRPr lang="en-US"/>
+          </a:p>
+        </p:txBody>
+      </p:sp>
+      <p:sp>
+        <p:nvSpPr>
+          <p:cNvPr id="5" name="Rectangle 4">
+            <a:extLst>
               <a:ext uri="{FF2B5EF4-FFF2-40B4-BE49-F238E27FC236}">
                 <a16:creationId xmlns:a16="http://schemas.microsoft.com/office/drawing/2014/main" id="{3DF161AF-57E5-45AC-853A-DE0B73F66DFB}"/>
               </a:ext>
             </a:extLst>
           </p:cNvPr>
           <p:cNvSpPr>
-            <a:spLocks xmlns:a="http://schemas.openxmlformats.org/drawingml/2006/main" noGrp="1"/>
+            <a:spLocks noGrp="1"/>
           </p:cNvSpPr>
           <p:nvPr/>
         </p:nvSpPr>
         <p:spPr>
-          <a:xfrm xmlns:a="http://schemas.openxmlformats.org/drawingml/2006/main">
+          <a:xfrm>
             <a:off x="685800" y="1981200"/>
             <a:ext cx="4476750" cy="2476500"/>
           </a:xfrm>
-          <a:prstGeom xmlns:a="http://schemas.openxmlformats.org/drawingml/2006/main" prst="rect">
+          <a:prstGeom prst="rect">
             <a:avLst/>
           </a:prstGeom>
-          <a:noFill xmlns:a="http://schemas.openxmlformats.org/drawingml/2006/main"/>
-          <a:ln xmlns:a="http://schemas.openxmlformats.org/drawingml/2006/main" w="0">
+          <a:noFill/>
+          <a:ln w="0">
             <a:noFill/>
             <a:prstDash val="solid"/>
           </a:ln>
         </p:spPr>
         <p:txBody>
-          <a:bodyPr xmlns:a="http://schemas.openxmlformats.org/drawingml/2006/main">
+          <a:bodyPr>
             <a:noAutofit/>
           </a:bodyPr>
-          <a:lstStyle xmlns:a="http://schemas.openxmlformats.org/drawingml/2006/main">
+          <a:lstStyle>
             <a:defPPr>
               <a:defRPr sz="1200">
                 <a:solidFill>
@@ -9602,7 +9646,7 @@
               </a:defRPr>
             </a:defPPr>
           </a:lstStyle>
-          <a:p xmlns:a="http://schemas.openxmlformats.org/drawingml/2006/main">
+          <a:p>
             <a:pPr marL="228600" indent="-114300">
               <a:spcAft>
                 <a:spcPts val="1600"/>
@@ -9629,7 +9673,7 @@
               <a:t>Four layers: React presentation, Spring Boot REST application, business logic including the allocation engine, and JPA over MySQL.</a:t>
             </a:r>
           </a:p>
-          <a:p xmlns:a="http://schemas.openxmlformats.org/drawingml/2006/main">
+          <a:p>
             <a:pPr marL="228600" indent="-114300">
               <a:spcAft>
                 <a:spcPts val="1600"/>
@@ -9656,7 +9700,7 @@
               <a:t>Authentication issues a JWT at login; the server verifies the role and the ownership of each record.</a:t>
             </a:r>
           </a:p>
-          <a:p xmlns:a="http://schemas.openxmlformats.org/drawingml/2006/main">
+          <a:p>
             <a:pPr marL="228600" indent="-114300">
               <a:spcAft>
                 <a:spcPts val="1600"/>
@@ -9687,28 +9731,28 @@
       </p:sp>
       <p:pic>
         <p:nvPicPr>
-          <p:cNvPr id="6" name="">
-            <a:extLst xmlns:a="http://schemas.openxmlformats.org/drawingml/2006/main">
+          <p:cNvPr id="6" name="Picture 5">
+            <a:extLst>
               <a:ext uri="{FF2B5EF4-FFF2-40B4-BE49-F238E27FC236}">
                 <a16:creationId xmlns:a16="http://schemas.microsoft.com/office/drawing/2014/main" id="{D99CF2FF-AD0F-4EB0-A649-E47931B7D451}"/>
               </a:ext>
             </a:extLst>
           </p:cNvPr>
           <p:cNvPicPr>
-            <a:picLocks xmlns:a="http://schemas.openxmlformats.org/drawingml/2006/main" noChangeAspect="1"/>
+            <a:picLocks noChangeAspect="1"/>
           </p:cNvPicPr>
           <p:nvPr/>
         </p:nvPicPr>
         <p:blipFill>
-          <a:blip xmlns:r="http://schemas.openxmlformats.org/officeDocument/2006/relationships" xmlns:a="http://schemas.openxmlformats.org/drawingml/2006/main" r:embed="R871afb5f267b44e4"/>
-          <a:stretch xmlns:a="http://schemas.openxmlformats.org/drawingml/2006/main"/>
+          <a:blip r:embed="rId3"/>
+          <a:stretch/>
         </p:blipFill>
         <p:spPr>
-          <a:xfrm xmlns:a="http://schemas.openxmlformats.org/drawingml/2006/main">
+          <a:xfrm>
             <a:off x="5689934" y="1676400"/>
             <a:ext cx="4812632" cy="4762500"/>
           </a:xfrm>
-          <a:prstGeom xmlns:a="http://schemas.openxmlformats.org/drawingml/2006/main" prst="rect">
+          <a:prstGeom prst="rect">
             <a:avLst/>
           </a:prstGeom>
         </p:spPr>
@@ -9720,17 +9764,21 @@
       </p:ext>
     </p:extLst>
   </p:cSld>
+  <p:clrMapOvr>
+    <a:masterClrMapping/>
+  </p:clrMapOvr>
 </p:sld>
 </file>
 
 <file path=ppt/slides/slide8.xml><?xml version="1.0" encoding="utf-8"?>
-<p:sld xmlns:p="http://schemas.openxmlformats.org/presentationml/2006/main">
+<p:sld xmlns:a="http://schemas.openxmlformats.org/drawingml/2006/main" xmlns:r="http://schemas.openxmlformats.org/officeDocument/2006/relationships" xmlns:p="http://schemas.openxmlformats.org/presentationml/2006/main">
   <p:cSld>
     <p:bg>
       <p:bgPr>
-        <a:solidFill xmlns:a="http://schemas.openxmlformats.org/drawingml/2006/main">
+        <a:solidFill>
           <a:srgbClr val="FFFFFF"/>
         </a:solidFill>
+        <a:effectLst/>
       </p:bgPr>
     </p:bg>
     <p:spTree>
@@ -9740,41 +9788,46 @@
         <p:nvPr/>
       </p:nvGrpSpPr>
       <p:grpSpPr>
-        <a:xfrm xmlns:a="http://schemas.openxmlformats.org/drawingml/2006/main"/>
+        <a:xfrm>
+          <a:off x="0" y="0"/>
+          <a:ext cx="0" cy="0"/>
+          <a:chOff x="0" y="0"/>
+          <a:chExt cx="0" cy="0"/>
+        </a:xfrm>
       </p:grpSpPr>
       <p:sp>
         <p:nvSpPr>
-          <p:cNvPr id="7" name="">
-            <a:extLst xmlns:a="http://schemas.openxmlformats.org/drawingml/2006/main">
+          <p:cNvPr id="7" name="Rectangle 6">
+            <a:extLst>
               <a:ext uri="{FF2B5EF4-FFF2-40B4-BE49-F238E27FC236}">
                 <a16:creationId xmlns:a16="http://schemas.microsoft.com/office/drawing/2014/main" id="{3631C4CA-6845-4D63-9FE5-B6D91B4D671D}"/>
               </a:ext>
             </a:extLst>
           </p:cNvPr>
           <p:cNvSpPr>
-            <a:spLocks xmlns:a="http://schemas.openxmlformats.org/drawingml/2006/main" noGrp="1"/>
+            <a:spLocks noGrp="1"/>
           </p:cNvSpPr>
           <p:nvPr/>
         </p:nvSpPr>
         <p:spPr>
-          <a:xfrm xmlns:a="http://schemas.openxmlformats.org/drawingml/2006/main">
+          <a:xfrm>
             <a:off x="9906000" y="6438900"/>
             <a:ext cx="1600200" cy="228600"/>
           </a:xfrm>
-          <a:prstGeom xmlns:a="http://schemas.openxmlformats.org/drawingml/2006/main" prst="rect">
+          <a:prstGeom prst="rect">
             <a:avLst/>
           </a:prstGeom>
-          <a:noFill xmlns:a="http://schemas.openxmlformats.org/drawingml/2006/main"/>
-          <a:ln xmlns:a="http://schemas.openxmlformats.org/drawingml/2006/main" w="0">
+          <a:noFill/>
+          <a:ln w="0">
             <a:noFill/>
             <a:prstDash val="solid"/>
           </a:ln>
         </p:spPr>
         <p:txBody>
-          <a:bodyPr xmlns:a="http://schemas.openxmlformats.org/drawingml/2006/main">
+          <a:bodyPr>
             <a:noAutofit/>
           </a:bodyPr>
-          <a:lstStyle xmlns:a="http://schemas.openxmlformats.org/drawingml/2006/main">
+          <a:lstStyle>
             <a:defPPr>
               <a:defRPr sz="975" b="0">
                 <a:solidFill>
@@ -9786,7 +9839,7 @@
               </a:defRPr>
             </a:defPPr>
           </a:lstStyle>
-          <a:p xmlns:a="http://schemas.openxmlformats.org/drawingml/2006/main">
+          <a:p>
             <a:pPr>
               <a:defRPr sz="975" b="0">
                 <a:solidFill>
@@ -9814,36 +9867,36 @@
       <p:sp>
         <p:nvSpPr>
           <p:cNvPr id="2" name="slide-title">
-            <a:extLst xmlns:a="http://schemas.openxmlformats.org/drawingml/2006/main">
+            <a:extLst>
               <a:ext uri="{FF2B5EF4-FFF2-40B4-BE49-F238E27FC236}">
                 <a16:creationId xmlns:a16="http://schemas.microsoft.com/office/drawing/2014/main" id="{C2BF4085-23B7-4BE7-83B2-B6DAE8709338}"/>
               </a:ext>
             </a:extLst>
           </p:cNvPr>
           <p:cNvSpPr>
-            <a:spLocks xmlns:a="http://schemas.openxmlformats.org/drawingml/2006/main" noGrp="1"/>
+            <a:spLocks noGrp="1"/>
           </p:cNvSpPr>
           <p:nvPr/>
         </p:nvSpPr>
         <p:spPr>
-          <a:xfrm xmlns:a="http://schemas.openxmlformats.org/drawingml/2006/main">
+          <a:xfrm>
             <a:off x="685800" y="495300"/>
             <a:ext cx="10820400" cy="514350"/>
           </a:xfrm>
-          <a:prstGeom xmlns:a="http://schemas.openxmlformats.org/drawingml/2006/main" prst="rect">
+          <a:prstGeom prst="rect">
             <a:avLst/>
           </a:prstGeom>
-          <a:noFill xmlns:a="http://schemas.openxmlformats.org/drawingml/2006/main"/>
-          <a:ln xmlns:a="http://schemas.openxmlformats.org/drawingml/2006/main" w="0">
+          <a:noFill/>
+          <a:ln w="0">
             <a:noFill/>
             <a:prstDash val="solid"/>
           </a:ln>
         </p:spPr>
         <p:txBody>
-          <a:bodyPr xmlns:a="http://schemas.openxmlformats.org/drawingml/2006/main">
+          <a:bodyPr>
             <a:noAutofit/>
           </a:bodyPr>
-          <a:lstStyle xmlns:a="http://schemas.openxmlformats.org/drawingml/2006/main">
+          <a:lstStyle>
             <a:defPPr>
               <a:defRPr sz="3000" b="1">
                 <a:solidFill>
@@ -9855,7 +9908,7 @@
               </a:defRPr>
             </a:defPPr>
           </a:lstStyle>
-          <a:p xmlns:a="http://schemas.openxmlformats.org/drawingml/2006/main">
+          <a:p>
             <a:pPr>
               <a:defRPr sz="3000" b="1">
                 <a:solidFill>
@@ -9883,36 +9936,36 @@
       <p:sp>
         <p:nvSpPr>
           <p:cNvPr id="3" name="slide-lead">
-            <a:extLst xmlns:a="http://schemas.openxmlformats.org/drawingml/2006/main">
+            <a:extLst>
               <a:ext uri="{FF2B5EF4-FFF2-40B4-BE49-F238E27FC236}">
                 <a16:creationId xmlns:a16="http://schemas.microsoft.com/office/drawing/2014/main" id="{28453F5C-42BE-4DD1-8FD9-C45CD6B14668}"/>
               </a:ext>
             </a:extLst>
           </p:cNvPr>
           <p:cNvSpPr>
-            <a:spLocks xmlns:a="http://schemas.openxmlformats.org/drawingml/2006/main" noGrp="1"/>
+            <a:spLocks noGrp="1"/>
           </p:cNvSpPr>
           <p:nvPr/>
         </p:nvSpPr>
         <p:spPr>
-          <a:xfrm xmlns:a="http://schemas.openxmlformats.org/drawingml/2006/main">
+          <a:xfrm>
             <a:off x="685800" y="1066800"/>
             <a:ext cx="10820400" cy="323850"/>
           </a:xfrm>
-          <a:prstGeom xmlns:a="http://schemas.openxmlformats.org/drawingml/2006/main" prst="rect">
+          <a:prstGeom prst="rect">
             <a:avLst/>
           </a:prstGeom>
-          <a:noFill xmlns:a="http://schemas.openxmlformats.org/drawingml/2006/main"/>
-          <a:ln xmlns:a="http://schemas.openxmlformats.org/drawingml/2006/main" w="0">
+          <a:noFill/>
+          <a:ln w="0">
             <a:noFill/>
             <a:prstDash val="solid"/>
           </a:ln>
         </p:spPr>
         <p:txBody>
-          <a:bodyPr xmlns:a="http://schemas.openxmlformats.org/drawingml/2006/main">
+          <a:bodyPr>
             <a:noAutofit/>
           </a:bodyPr>
-          <a:lstStyle xmlns:a="http://schemas.openxmlformats.org/drawingml/2006/main">
+          <a:lstStyle>
             <a:defPPr>
               <a:defRPr sz="1575" b="0">
                 <a:solidFill>
@@ -9924,7 +9977,7 @@
               </a:defRPr>
             </a:defPPr>
           </a:lstStyle>
-          <a:p xmlns:a="http://schemas.openxmlformats.org/drawingml/2006/main">
+          <a:p>
             <a:pPr>
               <a:defRPr sz="1575" b="0">
                 <a:solidFill>
@@ -9952,67 +10005,74 @@
       <p:sp>
         <p:nvSpPr>
           <p:cNvPr id="4" name="title-rule">
-            <a:extLst xmlns:a="http://schemas.openxmlformats.org/drawingml/2006/main">
+            <a:extLst>
               <a:ext uri="{FF2B5EF4-FFF2-40B4-BE49-F238E27FC236}">
                 <a16:creationId xmlns:a16="http://schemas.microsoft.com/office/drawing/2014/main" id="{75650962-C0C1-4243-A4E6-CC0C62D710C8}"/>
               </a:ext>
             </a:extLst>
           </p:cNvPr>
           <p:cNvSpPr>
-            <a:spLocks xmlns:a="http://schemas.openxmlformats.org/drawingml/2006/main" noGrp="1"/>
+            <a:spLocks noGrp="1"/>
           </p:cNvSpPr>
           <p:nvPr/>
         </p:nvSpPr>
         <p:spPr>
-          <a:xfrm xmlns:a="http://schemas.openxmlformats.org/drawingml/2006/main">
+          <a:xfrm>
             <a:off x="685800" y="1504950"/>
             <a:ext cx="10820400" cy="9525"/>
           </a:xfrm>
-          <a:prstGeom xmlns:a="http://schemas.openxmlformats.org/drawingml/2006/main" prst="rect">
+          <a:prstGeom prst="rect">
             <a:avLst/>
           </a:prstGeom>
-          <a:solidFill xmlns:a="http://schemas.openxmlformats.org/drawingml/2006/main">
+          <a:solidFill>
             <a:srgbClr val="E1E5EA"/>
           </a:solidFill>
-          <a:ln xmlns:a="http://schemas.openxmlformats.org/drawingml/2006/main" w="0">
+          <a:ln w="0">
             <a:noFill/>
             <a:prstDash val="solid"/>
           </a:ln>
         </p:spPr>
-      </p:sp>
-      <p:sp>
-        <p:nvSpPr>
-          <p:cNvPr id="5" name="">
-            <a:extLst xmlns:a="http://schemas.openxmlformats.org/drawingml/2006/main">
+        <p:txBody>
+          <a:bodyPr/>
+          <a:lstStyle/>
+          <a:p>
+            <a:endParaRPr lang="en-US"/>
+          </a:p>
+        </p:txBody>
+      </p:sp>
+      <p:sp>
+        <p:nvSpPr>
+          <p:cNvPr id="5" name="Rectangle 4">
+            <a:extLst>
               <a:ext uri="{FF2B5EF4-FFF2-40B4-BE49-F238E27FC236}">
                 <a16:creationId xmlns:a16="http://schemas.microsoft.com/office/drawing/2014/main" id="{908F8670-7D35-42B3-917F-C31570F96CD2}"/>
               </a:ext>
             </a:extLst>
           </p:cNvPr>
           <p:cNvSpPr>
-            <a:spLocks xmlns:a="http://schemas.openxmlformats.org/drawingml/2006/main" noGrp="1"/>
+            <a:spLocks noGrp="1"/>
           </p:cNvSpPr>
           <p:nvPr/>
         </p:nvSpPr>
         <p:spPr>
-          <a:xfrm xmlns:a="http://schemas.openxmlformats.org/drawingml/2006/main">
+          <a:xfrm>
             <a:off x="685800" y="2057400"/>
             <a:ext cx="4095750" cy="2286000"/>
           </a:xfrm>
-          <a:prstGeom xmlns:a="http://schemas.openxmlformats.org/drawingml/2006/main" prst="rect">
+          <a:prstGeom prst="rect">
             <a:avLst/>
           </a:prstGeom>
-          <a:noFill xmlns:a="http://schemas.openxmlformats.org/drawingml/2006/main"/>
-          <a:ln xmlns:a="http://schemas.openxmlformats.org/drawingml/2006/main" w="0">
+          <a:noFill/>
+          <a:ln w="0">
             <a:noFill/>
             <a:prstDash val="solid"/>
           </a:ln>
         </p:spPr>
         <p:txBody>
-          <a:bodyPr xmlns:a="http://schemas.openxmlformats.org/drawingml/2006/main">
+          <a:bodyPr>
             <a:noAutofit/>
           </a:bodyPr>
-          <a:lstStyle xmlns:a="http://schemas.openxmlformats.org/drawingml/2006/main">
+          <a:lstStyle>
             <a:defPPr>
               <a:defRPr sz="1200">
                 <a:solidFill>
@@ -10024,7 +10084,7 @@
               </a:defRPr>
             </a:defPPr>
           </a:lstStyle>
-          <a:p xmlns:a="http://schemas.openxmlformats.org/drawingml/2006/main">
+          <a:p>
             <a:pPr marL="228600" indent="-114300">
               <a:spcAft>
                 <a:spcPts val="1600"/>
@@ -10051,7 +10111,7 @@
               <a:t>Twelve entities in third normal form.</a:t>
             </a:r>
           </a:p>
-          <a:p xmlns:a="http://schemas.openxmlformats.org/drawingml/2006/main">
+          <a:p>
             <a:pPr marL="228600" indent="-114300">
               <a:spcAft>
                 <a:spcPts val="1600"/>
@@ -10078,7 +10138,7 @@
               <a:t>Allocation, assignment and delivery are modelled separately, so a decision, a task and a delivery are tracked independently.</a:t>
             </a:r>
           </a:p>
-          <a:p xmlns:a="http://schemas.openxmlformats.org/drawingml/2006/main">
+          <a:p>
             <a:pPr marL="228600" indent="-114300">
               <a:spcAft>
                 <a:spcPts val="1600"/>
@@ -10109,28 +10169,28 @@
       </p:sp>
       <p:pic>
         <p:nvPicPr>
-          <p:cNvPr id="6" name="">
-            <a:extLst xmlns:a="http://schemas.openxmlformats.org/drawingml/2006/main">
+          <p:cNvPr id="6" name="Picture 5">
+            <a:extLst>
               <a:ext uri="{FF2B5EF4-FFF2-40B4-BE49-F238E27FC236}">
                 <a16:creationId xmlns:a16="http://schemas.microsoft.com/office/drawing/2014/main" id="{A53B2633-F1C0-4BD9-B8BF-DFFA001B8F91}"/>
               </a:ext>
             </a:extLst>
           </p:cNvPr>
           <p:cNvPicPr>
-            <a:picLocks xmlns:a="http://schemas.openxmlformats.org/drawingml/2006/main" noChangeAspect="1"/>
+            <a:picLocks noChangeAspect="1"/>
           </p:cNvPicPr>
           <p:nvPr/>
         </p:nvPicPr>
         <p:blipFill>
-          <a:blip xmlns:r="http://schemas.openxmlformats.org/officeDocument/2006/relationships" xmlns:a="http://schemas.openxmlformats.org/drawingml/2006/main" r:embed="Rbddaccbd52f14bb5"/>
-          <a:stretch xmlns:a="http://schemas.openxmlformats.org/drawingml/2006/main"/>
+          <a:blip r:embed="rId3"/>
+          <a:stretch/>
         </p:blipFill>
         <p:spPr>
-          <a:xfrm xmlns:a="http://schemas.openxmlformats.org/drawingml/2006/main">
+          <a:xfrm>
             <a:off x="5145061" y="1638300"/>
             <a:ext cx="5902377" cy="4800600"/>
           </a:xfrm>
-          <a:prstGeom xmlns:a="http://schemas.openxmlformats.org/drawingml/2006/main" prst="rect">
+          <a:prstGeom prst="rect">
             <a:avLst/>
           </a:prstGeom>
         </p:spPr>
@@ -10142,17 +10202,21 @@
       </p:ext>
     </p:extLst>
   </p:cSld>
+  <p:clrMapOvr>
+    <a:masterClrMapping/>
+  </p:clrMapOvr>
 </p:sld>
 </file>
 
 <file path=ppt/slides/slide9.xml><?xml version="1.0" encoding="utf-8"?>
-<p:sld xmlns:p="http://schemas.openxmlformats.org/presentationml/2006/main">
+<p:sld xmlns:a="http://schemas.openxmlformats.org/drawingml/2006/main" xmlns:r="http://schemas.openxmlformats.org/officeDocument/2006/relationships" xmlns:p="http://schemas.openxmlformats.org/presentationml/2006/main">
   <p:cSld>
     <p:bg>
       <p:bgPr>
-        <a:solidFill xmlns:a="http://schemas.openxmlformats.org/drawingml/2006/main">
+        <a:solidFill>
           <a:srgbClr val="FFFFFF"/>
         </a:solidFill>
+        <a:effectLst/>
       </p:bgPr>
     </p:bg>
     <p:spTree>
@@ -10162,41 +10226,46 @@
         <p:nvPr/>
       </p:nvGrpSpPr>
       <p:grpSpPr>
-        <a:xfrm xmlns:a="http://schemas.openxmlformats.org/drawingml/2006/main"/>
+        <a:xfrm>
+          <a:off x="0" y="0"/>
+          <a:ext cx="0" cy="0"/>
+          <a:chOff x="0" y="0"/>
+          <a:chExt cx="0" cy="0"/>
+        </a:xfrm>
       </p:grpSpPr>
       <p:sp>
         <p:nvSpPr>
-          <p:cNvPr id="18" name="">
-            <a:extLst xmlns:a="http://schemas.openxmlformats.org/drawingml/2006/main">
+          <p:cNvPr id="18" name="Rectangle 17">
+            <a:extLst>
               <a:ext uri="{FF2B5EF4-FFF2-40B4-BE49-F238E27FC236}">
                 <a16:creationId xmlns:a16="http://schemas.microsoft.com/office/drawing/2014/main" id="{F70E97CF-0F49-4F5C-A70E-7FF03688F1A0}"/>
               </a:ext>
             </a:extLst>
           </p:cNvPr>
           <p:cNvSpPr>
-            <a:spLocks xmlns:a="http://schemas.openxmlformats.org/drawingml/2006/main" noGrp="1"/>
+            <a:spLocks noGrp="1"/>
           </p:cNvSpPr>
           <p:nvPr/>
         </p:nvSpPr>
         <p:spPr>
-          <a:xfrm xmlns:a="http://schemas.openxmlformats.org/drawingml/2006/main">
+          <a:xfrm>
             <a:off x="9906000" y="6438900"/>
             <a:ext cx="1600200" cy="228600"/>
           </a:xfrm>
-          <a:prstGeom xmlns:a="http://schemas.openxmlformats.org/drawingml/2006/main" prst="rect">
+          <a:prstGeom prst="rect">
             <a:avLst/>
           </a:prstGeom>
-          <a:noFill xmlns:a="http://schemas.openxmlformats.org/drawingml/2006/main"/>
-          <a:ln xmlns:a="http://schemas.openxmlformats.org/drawingml/2006/main" w="0">
+          <a:noFill/>
+          <a:ln w="0">
             <a:noFill/>
             <a:prstDash val="solid"/>
           </a:ln>
         </p:spPr>
         <p:txBody>
-          <a:bodyPr xmlns:a="http://schemas.openxmlformats.org/drawingml/2006/main">
+          <a:bodyPr>
             <a:noAutofit/>
           </a:bodyPr>
-          <a:lstStyle xmlns:a="http://schemas.openxmlformats.org/drawingml/2006/main">
+          <a:lstStyle>
             <a:defPPr>
               <a:defRPr sz="975" b="0">
                 <a:solidFill>
@@ -10208,7 +10277,7 @@
               </a:defRPr>
             </a:defPPr>
           </a:lstStyle>
-          <a:p xmlns:a="http://schemas.openxmlformats.org/drawingml/2006/main">
+          <a:p>
             <a:pPr>
               <a:defRPr sz="975" b="0">
                 <a:solidFill>
@@ -10236,36 +10305,36 @@
       <p:sp>
         <p:nvSpPr>
           <p:cNvPr id="2" name="slide-title">
-            <a:extLst xmlns:a="http://schemas.openxmlformats.org/drawingml/2006/main">
+            <a:extLst>
               <a:ext uri="{FF2B5EF4-FFF2-40B4-BE49-F238E27FC236}">
                 <a16:creationId xmlns:a16="http://schemas.microsoft.com/office/drawing/2014/main" id="{2667E30E-5505-4335-BBF0-1307D4BB9F7E}"/>
               </a:ext>
             </a:extLst>
           </p:cNvPr>
           <p:cNvSpPr>
-            <a:spLocks xmlns:a="http://schemas.openxmlformats.org/drawingml/2006/main" noGrp="1"/>
+            <a:spLocks noGrp="1"/>
           </p:cNvSpPr>
           <p:nvPr/>
         </p:nvSpPr>
         <p:spPr>
-          <a:xfrm xmlns:a="http://schemas.openxmlformats.org/drawingml/2006/main">
+          <a:xfrm>
             <a:off x="685800" y="495300"/>
             <a:ext cx="10820400" cy="514350"/>
           </a:xfrm>
-          <a:prstGeom xmlns:a="http://schemas.openxmlformats.org/drawingml/2006/main" prst="rect">
+          <a:prstGeom prst="rect">
             <a:avLst/>
           </a:prstGeom>
-          <a:noFill xmlns:a="http://schemas.openxmlformats.org/drawingml/2006/main"/>
-          <a:ln xmlns:a="http://schemas.openxmlformats.org/drawingml/2006/main" w="0">
+          <a:noFill/>
+          <a:ln w="0">
             <a:noFill/>
             <a:prstDash val="solid"/>
           </a:ln>
         </p:spPr>
         <p:txBody>
-          <a:bodyPr xmlns:a="http://schemas.openxmlformats.org/drawingml/2006/main">
+          <a:bodyPr>
             <a:noAutofit/>
           </a:bodyPr>
-          <a:lstStyle xmlns:a="http://schemas.openxmlformats.org/drawingml/2006/main">
+          <a:lstStyle>
             <a:defPPr>
               <a:defRPr sz="3000" b="1">
                 <a:solidFill>
@@ -10277,7 +10346,7 @@
               </a:defRPr>
             </a:defPPr>
           </a:lstStyle>
-          <a:p xmlns:a="http://schemas.openxmlformats.org/drawingml/2006/main">
+          <a:p>
             <a:pPr>
               <a:defRPr sz="3000" b="1">
                 <a:solidFill>
@@ -10305,36 +10374,36 @@
       <p:sp>
         <p:nvSpPr>
           <p:cNvPr id="3" name="slide-lead">
-            <a:extLst xmlns:a="http://schemas.openxmlformats.org/drawingml/2006/main">
+            <a:extLst>
               <a:ext uri="{FF2B5EF4-FFF2-40B4-BE49-F238E27FC236}">
                 <a16:creationId xmlns:a16="http://schemas.microsoft.com/office/drawing/2014/main" id="{0D9BCAB5-684A-4A1F-B7E0-5C298772527E}"/>
               </a:ext>
             </a:extLst>
           </p:cNvPr>
           <p:cNvSpPr>
-            <a:spLocks xmlns:a="http://schemas.openxmlformats.org/drawingml/2006/main" noGrp="1"/>
+            <a:spLocks noGrp="1"/>
           </p:cNvSpPr>
           <p:nvPr/>
         </p:nvSpPr>
         <p:spPr>
-          <a:xfrm xmlns:a="http://schemas.openxmlformats.org/drawingml/2006/main">
+          <a:xfrm>
             <a:off x="685800" y="1066800"/>
             <a:ext cx="10820400" cy="323850"/>
           </a:xfrm>
-          <a:prstGeom xmlns:a="http://schemas.openxmlformats.org/drawingml/2006/main" prst="rect">
+          <a:prstGeom prst="rect">
             <a:avLst/>
           </a:prstGeom>
-          <a:noFill xmlns:a="http://schemas.openxmlformats.org/drawingml/2006/main"/>
-          <a:ln xmlns:a="http://schemas.openxmlformats.org/drawingml/2006/main" w="0">
+          <a:noFill/>
+          <a:ln w="0">
             <a:noFill/>
             <a:prstDash val="solid"/>
           </a:ln>
         </p:spPr>
         <p:txBody>
-          <a:bodyPr xmlns:a="http://schemas.openxmlformats.org/drawingml/2006/main">
+          <a:bodyPr>
             <a:noAutofit/>
           </a:bodyPr>
-          <a:lstStyle xmlns:a="http://schemas.openxmlformats.org/drawingml/2006/main">
+          <a:lstStyle>
             <a:defPPr>
               <a:defRPr sz="1575" b="0">
                 <a:solidFill>
@@ -10346,7 +10415,7 @@
               </a:defRPr>
             </a:defPPr>
           </a:lstStyle>
-          <a:p xmlns:a="http://schemas.openxmlformats.org/drawingml/2006/main">
+          <a:p>
             <a:pPr>
               <a:defRPr sz="1575" b="0">
                 <a:solidFill>
@@ -10374,67 +10443,74 @@
       <p:sp>
         <p:nvSpPr>
           <p:cNvPr id="4" name="title-rule">
-            <a:extLst xmlns:a="http://schemas.openxmlformats.org/drawingml/2006/main">
+            <a:extLst>
               <a:ext uri="{FF2B5EF4-FFF2-40B4-BE49-F238E27FC236}">
                 <a16:creationId xmlns:a16="http://schemas.microsoft.com/office/drawing/2014/main" id="{88847184-A71C-4C78-99F6-4704A20B03C5}"/>
               </a:ext>
             </a:extLst>
           </p:cNvPr>
           <p:cNvSpPr>
-            <a:spLocks xmlns:a="http://schemas.openxmlformats.org/drawingml/2006/main" noGrp="1"/>
+            <a:spLocks noGrp="1"/>
           </p:cNvSpPr>
           <p:nvPr/>
         </p:nvSpPr>
         <p:spPr>
-          <a:xfrm xmlns:a="http://schemas.openxmlformats.org/drawingml/2006/main">
+          <a:xfrm>
             <a:off x="685800" y="1504950"/>
             <a:ext cx="10820400" cy="9525"/>
           </a:xfrm>
-          <a:prstGeom xmlns:a="http://schemas.openxmlformats.org/drawingml/2006/main" prst="rect">
+          <a:prstGeom prst="rect">
             <a:avLst/>
           </a:prstGeom>
-          <a:solidFill xmlns:a="http://schemas.openxmlformats.org/drawingml/2006/main">
+          <a:solidFill>
             <a:srgbClr val="E1E5EA"/>
           </a:solidFill>
-          <a:ln xmlns:a="http://schemas.openxmlformats.org/drawingml/2006/main" w="0">
+          <a:ln w="0">
             <a:noFill/>
             <a:prstDash val="solid"/>
           </a:ln>
         </p:spPr>
-      </p:sp>
-      <p:sp>
-        <p:nvSpPr>
-          <p:cNvPr id="5" name="">
-            <a:extLst xmlns:a="http://schemas.openxmlformats.org/drawingml/2006/main">
+        <p:txBody>
+          <a:bodyPr/>
+          <a:lstStyle/>
+          <a:p>
+            <a:endParaRPr lang="en-US"/>
+          </a:p>
+        </p:txBody>
+      </p:sp>
+      <p:sp>
+        <p:nvSpPr>
+          <p:cNvPr id="5" name="Rectangle 4">
+            <a:extLst>
               <a:ext uri="{FF2B5EF4-FFF2-40B4-BE49-F238E27FC236}">
                 <a16:creationId xmlns:a16="http://schemas.microsoft.com/office/drawing/2014/main" id="{EBBBF95E-AAB5-4CB3-8077-A52EE469DE2C}"/>
               </a:ext>
             </a:extLst>
           </p:cNvPr>
           <p:cNvSpPr>
-            <a:spLocks xmlns:a="http://schemas.openxmlformats.org/drawingml/2006/main" noGrp="1"/>
+            <a:spLocks noGrp="1"/>
           </p:cNvSpPr>
           <p:nvPr/>
         </p:nvSpPr>
         <p:spPr>
-          <a:xfrm xmlns:a="http://schemas.openxmlformats.org/drawingml/2006/main">
+          <a:xfrm>
             <a:off x="685800" y="1905000"/>
             <a:ext cx="3238500" cy="438150"/>
           </a:xfrm>
-          <a:prstGeom xmlns:a="http://schemas.openxmlformats.org/drawingml/2006/main" prst="rect">
+          <a:prstGeom prst="rect">
             <a:avLst/>
           </a:prstGeom>
-          <a:noFill xmlns:a="http://schemas.openxmlformats.org/drawingml/2006/main"/>
-          <a:ln xmlns:a="http://schemas.openxmlformats.org/drawingml/2006/main" w="0">
+          <a:noFill/>
+          <a:ln w="0">
             <a:noFill/>
             <a:prstDash val="solid"/>
           </a:ln>
         </p:spPr>
         <p:txBody>
-          <a:bodyPr xmlns:a="http://schemas.openxmlformats.org/drawingml/2006/main">
+          <a:bodyPr>
             <a:noAutofit/>
           </a:bodyPr>
-          <a:lstStyle xmlns:a="http://schemas.openxmlformats.org/drawingml/2006/main">
+          <a:lstStyle>
             <a:defPPr>
               <a:defRPr sz="2550" b="1">
                 <a:solidFill>
@@ -10446,7 +10522,7 @@
               </a:defRPr>
             </a:defPPr>
           </a:lstStyle>
-          <a:p xmlns:a="http://schemas.openxmlformats.org/drawingml/2006/main">
+          <a:p>
             <a:pPr>
               <a:defRPr sz="2550" b="1">
                 <a:solidFill>
@@ -10473,37 +10549,37 @@
       </p:sp>
       <p:sp>
         <p:nvSpPr>
-          <p:cNvPr id="6" name="">
-            <a:extLst xmlns:a="http://schemas.openxmlformats.org/drawingml/2006/main">
+          <p:cNvPr id="6" name="Rectangle 5">
+            <a:extLst>
               <a:ext uri="{FF2B5EF4-FFF2-40B4-BE49-F238E27FC236}">
                 <a16:creationId xmlns:a16="http://schemas.microsoft.com/office/drawing/2014/main" id="{D243C39D-D9D2-4B63-9014-2BD5F9FF0A21}"/>
               </a:ext>
             </a:extLst>
           </p:cNvPr>
           <p:cNvSpPr>
-            <a:spLocks xmlns:a="http://schemas.openxmlformats.org/drawingml/2006/main" noGrp="1"/>
+            <a:spLocks noGrp="1"/>
           </p:cNvSpPr>
           <p:nvPr/>
         </p:nvSpPr>
         <p:spPr>
-          <a:xfrm xmlns:a="http://schemas.openxmlformats.org/drawingml/2006/main">
+          <a:xfrm>
             <a:off x="685800" y="2362200"/>
             <a:ext cx="3238500" cy="304800"/>
           </a:xfrm>
-          <a:prstGeom xmlns:a="http://schemas.openxmlformats.org/drawingml/2006/main" prst="rect">
+          <a:prstGeom prst="rect">
             <a:avLst/>
           </a:prstGeom>
-          <a:noFill xmlns:a="http://schemas.openxmlformats.org/drawingml/2006/main"/>
-          <a:ln xmlns:a="http://schemas.openxmlformats.org/drawingml/2006/main" w="0">
+          <a:noFill/>
+          <a:ln w="0">
             <a:noFill/>
             <a:prstDash val="solid"/>
           </a:ln>
         </p:spPr>
         <p:txBody>
-          <a:bodyPr xmlns:a="http://schemas.openxmlformats.org/drawingml/2006/main">
+          <a:bodyPr>
             <a:noAutofit/>
           </a:bodyPr>
-          <a:lstStyle xmlns:a="http://schemas.openxmlformats.org/drawingml/2006/main">
+          <a:lstStyle>
             <a:defPPr>
               <a:defRPr sz="1200" b="0">
                 <a:solidFill>
@@ -10515,7 +10591,7 @@
               </a:defRPr>
             </a:defPPr>
           </a:lstStyle>
-          <a:p xmlns:a="http://schemas.openxmlformats.org/drawingml/2006/main">
+          <a:p>
             <a:pPr>
               <a:defRPr sz="1200" b="0">
                 <a:solidFill>
@@ -10542,37 +10618,37 @@
       </p:sp>
       <p:sp>
         <p:nvSpPr>
-          <p:cNvPr id="7" name="">
-            <a:extLst xmlns:a="http://schemas.openxmlformats.org/drawingml/2006/main">
+          <p:cNvPr id="7" name="Rectangle 6">
+            <a:extLst>
               <a:ext uri="{FF2B5EF4-FFF2-40B4-BE49-F238E27FC236}">
                 <a16:creationId xmlns:a16="http://schemas.microsoft.com/office/drawing/2014/main" id="{B59248E6-DC08-40FB-B4DF-67F9B3012F60}"/>
               </a:ext>
             </a:extLst>
           </p:cNvPr>
           <p:cNvSpPr>
-            <a:spLocks xmlns:a="http://schemas.openxmlformats.org/drawingml/2006/main" noGrp="1"/>
+            <a:spLocks noGrp="1"/>
           </p:cNvSpPr>
           <p:nvPr/>
         </p:nvSpPr>
         <p:spPr>
-          <a:xfrm xmlns:a="http://schemas.openxmlformats.org/drawingml/2006/main">
+          <a:xfrm>
             <a:off x="4305300" y="1905000"/>
             <a:ext cx="3238500" cy="438150"/>
           </a:xfrm>
-          <a:prstGeom xmlns:a="http://schemas.openxmlformats.org/drawingml/2006/main" prst="rect">
+          <a:prstGeom prst="rect">
             <a:avLst/>
           </a:prstGeom>
-          <a:noFill xmlns:a="http://schemas.openxmlformats.org/drawingml/2006/main"/>
-          <a:ln xmlns:a="http://schemas.openxmlformats.org/drawingml/2006/main" w="0">
+          <a:noFill/>
+          <a:ln w="0">
             <a:noFill/>
             <a:prstDash val="solid"/>
           </a:ln>
         </p:spPr>
         <p:txBody>
-          <a:bodyPr xmlns:a="http://schemas.openxmlformats.org/drawingml/2006/main">
+          <a:bodyPr>
             <a:noAutofit/>
           </a:bodyPr>
-          <a:lstStyle xmlns:a="http://schemas.openxmlformats.org/drawingml/2006/main">
+          <a:lstStyle>
             <a:defPPr>
               <a:defRPr sz="2550" b="1">
                 <a:solidFill>
@@ -10584,7 +10660,7 @@
               </a:defRPr>
             </a:defPPr>
           </a:lstStyle>
-          <a:p xmlns:a="http://schemas.openxmlformats.org/drawingml/2006/main">
+          <a:p>
             <a:pPr>
               <a:defRPr sz="2550" b="1">
                 <a:solidFill>
@@ -10611,37 +10687,37 @@
       </p:sp>
       <p:sp>
         <p:nvSpPr>
-          <p:cNvPr id="8" name="">
-            <a:extLst xmlns:a="http://schemas.openxmlformats.org/drawingml/2006/main">
+          <p:cNvPr id="8" name="Rectangle 7">
+            <a:extLst>
               <a:ext uri="{FF2B5EF4-FFF2-40B4-BE49-F238E27FC236}">
                 <a16:creationId xmlns:a16="http://schemas.microsoft.com/office/drawing/2014/main" id="{18E72DD6-30A5-4D9E-B46D-0533D72ECE8E}"/>
               </a:ext>
             </a:extLst>
           </p:cNvPr>
           <p:cNvSpPr>
-            <a:spLocks xmlns:a="http://schemas.openxmlformats.org/drawingml/2006/main" noGrp="1"/>
+            <a:spLocks noGrp="1"/>
           </p:cNvSpPr>
           <p:nvPr/>
         </p:nvSpPr>
         <p:spPr>
-          <a:xfrm xmlns:a="http://schemas.openxmlformats.org/drawingml/2006/main">
+          <a:xfrm>
             <a:off x="4305300" y="2362200"/>
             <a:ext cx="3238500" cy="304800"/>
           </a:xfrm>
-          <a:prstGeom xmlns:a="http://schemas.openxmlformats.org/drawingml/2006/main" prst="rect">
+          <a:prstGeom prst="rect">
             <a:avLst/>
           </a:prstGeom>
-          <a:noFill xmlns:a="http://schemas.openxmlformats.org/drawingml/2006/main"/>
-          <a:ln xmlns:a="http://schemas.openxmlformats.org/drawingml/2006/main" w="0">
+          <a:noFill/>
+          <a:ln w="0">
             <a:noFill/>
             <a:prstDash val="solid"/>
           </a:ln>
         </p:spPr>
         <p:txBody>
-          <a:bodyPr xmlns:a="http://schemas.openxmlformats.org/drawingml/2006/main">
+          <a:bodyPr>
             <a:noAutofit/>
           </a:bodyPr>
-          <a:lstStyle xmlns:a="http://schemas.openxmlformats.org/drawingml/2006/main">
+          <a:lstStyle>
             <a:defPPr>
               <a:defRPr sz="1200" b="0">
                 <a:solidFill>
@@ -10653,7 +10729,7 @@
               </a:defRPr>
             </a:defPPr>
           </a:lstStyle>
-          <a:p xmlns:a="http://schemas.openxmlformats.org/drawingml/2006/main">
+          <a:p>
             <a:pPr>
               <a:defRPr sz="1200" b="0">
                 <a:solidFill>
@@ -10680,37 +10756,37 @@
       </p:sp>
       <p:sp>
         <p:nvSpPr>
-          <p:cNvPr id="9" name="">
-            <a:extLst xmlns:a="http://schemas.openxmlformats.org/drawingml/2006/main">
+          <p:cNvPr id="9" name="Rectangle 8">
+            <a:extLst>
               <a:ext uri="{FF2B5EF4-FFF2-40B4-BE49-F238E27FC236}">
                 <a16:creationId xmlns:a16="http://schemas.microsoft.com/office/drawing/2014/main" id="{3FCB619C-5462-4014-9534-C0940DABE769}"/>
               </a:ext>
             </a:extLst>
           </p:cNvPr>
           <p:cNvSpPr>
-            <a:spLocks xmlns:a="http://schemas.openxmlformats.org/drawingml/2006/main" noGrp="1"/>
+            <a:spLocks noGrp="1"/>
           </p:cNvSpPr>
           <p:nvPr/>
         </p:nvSpPr>
         <p:spPr>
-          <a:xfrm xmlns:a="http://schemas.openxmlformats.org/drawingml/2006/main">
+          <a:xfrm>
             <a:off x="7924800" y="1905000"/>
             <a:ext cx="3238500" cy="438150"/>
           </a:xfrm>
-          <a:prstGeom xmlns:a="http://schemas.openxmlformats.org/drawingml/2006/main" prst="rect">
+          <a:prstGeom prst="rect">
             <a:avLst/>
           </a:prstGeom>
-          <a:noFill xmlns:a="http://schemas.openxmlformats.org/drawingml/2006/main"/>
-          <a:ln xmlns:a="http://schemas.openxmlformats.org/drawingml/2006/main" w="0">
+          <a:noFill/>
+          <a:ln w="0">
             <a:noFill/>
             <a:prstDash val="solid"/>
           </a:ln>
         </p:spPr>
         <p:txBody>
-          <a:bodyPr xmlns:a="http://schemas.openxmlformats.org/drawingml/2006/main">
+          <a:bodyPr>
             <a:noAutofit/>
           </a:bodyPr>
-          <a:lstStyle xmlns:a="http://schemas.openxmlformats.org/drawingml/2006/main">
+          <a:lstStyle>
             <a:defPPr>
               <a:defRPr sz="2550" b="1">
                 <a:solidFill>
@@ -10722,7 +10798,7 @@
               </a:defRPr>
             </a:defPPr>
           </a:lstStyle>
-          <a:p xmlns:a="http://schemas.openxmlformats.org/drawingml/2006/main">
+          <a:p>
             <a:pPr>
               <a:defRPr sz="2550" b="1">
                 <a:solidFill>
@@ -10749,37 +10825,37 @@
       </p:sp>
       <p:sp>
         <p:nvSpPr>
-          <p:cNvPr id="10" name="">
-            <a:extLst xmlns:a="http://schemas.openxmlformats.org/drawingml/2006/main">
+          <p:cNvPr id="10" name="Rectangle 9">
+            <a:extLst>
               <a:ext uri="{FF2B5EF4-FFF2-40B4-BE49-F238E27FC236}">
                 <a16:creationId xmlns:a16="http://schemas.microsoft.com/office/drawing/2014/main" id="{7B3C366D-DC0E-4229-BDBC-44DDA1898D61}"/>
               </a:ext>
             </a:extLst>
           </p:cNvPr>
           <p:cNvSpPr>
-            <a:spLocks xmlns:a="http://schemas.openxmlformats.org/drawingml/2006/main" noGrp="1"/>
+            <a:spLocks noGrp="1"/>
           </p:cNvSpPr>
           <p:nvPr/>
         </p:nvSpPr>
         <p:spPr>
-          <a:xfrm xmlns:a="http://schemas.openxmlformats.org/drawingml/2006/main">
+          <a:xfrm>
             <a:off x="7924800" y="2362200"/>
             <a:ext cx="3238500" cy="304800"/>
           </a:xfrm>
-          <a:prstGeom xmlns:a="http://schemas.openxmlformats.org/drawingml/2006/main" prst="rect">
+          <a:prstGeom prst="rect">
             <a:avLst/>
           </a:prstGeom>
-          <a:noFill xmlns:a="http://schemas.openxmlformats.org/drawingml/2006/main"/>
-          <a:ln xmlns:a="http://schemas.openxmlformats.org/drawingml/2006/main" w="0">
+          <a:noFill/>
+          <a:ln w="0">
             <a:noFill/>
             <a:prstDash val="solid"/>
           </a:ln>
         </p:spPr>
         <p:txBody>
-          <a:bodyPr xmlns:a="http://schemas.openxmlformats.org/drawingml/2006/main">
+          <a:bodyPr>
             <a:noAutofit/>
           </a:bodyPr>
-          <a:lstStyle xmlns:a="http://schemas.openxmlformats.org/drawingml/2006/main">
+          <a:lstStyle>
             <a:defPPr>
               <a:defRPr sz="1200" b="0">
                 <a:solidFill>
@@ -10791,7 +10867,7 @@
               </a:defRPr>
             </a:defPPr>
           </a:lstStyle>
-          <a:p xmlns:a="http://schemas.openxmlformats.org/drawingml/2006/main">
+          <a:p>
             <a:pPr>
               <a:defRPr sz="1200" b="0">
                 <a:solidFill>
@@ -10818,37 +10894,37 @@
       </p:sp>
       <p:sp>
         <p:nvSpPr>
-          <p:cNvPr id="11" name="">
-            <a:extLst xmlns:a="http://schemas.openxmlformats.org/drawingml/2006/main">
+          <p:cNvPr id="11" name="Rectangle 10">
+            <a:extLst>
               <a:ext uri="{FF2B5EF4-FFF2-40B4-BE49-F238E27FC236}">
                 <a16:creationId xmlns:a16="http://schemas.microsoft.com/office/drawing/2014/main" id="{0DCCDC48-09DB-48F8-ADFD-1FC992141924}"/>
               </a:ext>
             </a:extLst>
           </p:cNvPr>
           <p:cNvSpPr>
-            <a:spLocks xmlns:a="http://schemas.openxmlformats.org/drawingml/2006/main" noGrp="1"/>
+            <a:spLocks noGrp="1"/>
           </p:cNvSpPr>
           <p:nvPr/>
         </p:nvSpPr>
         <p:spPr>
-          <a:xfrm xmlns:a="http://schemas.openxmlformats.org/drawingml/2006/main">
+          <a:xfrm>
             <a:off x="685800" y="3028950"/>
             <a:ext cx="3238500" cy="438150"/>
           </a:xfrm>
-          <a:prstGeom xmlns:a="http://schemas.openxmlformats.org/drawingml/2006/main" prst="rect">
+          <a:prstGeom prst="rect">
             <a:avLst/>
           </a:prstGeom>
-          <a:noFill xmlns:a="http://schemas.openxmlformats.org/drawingml/2006/main"/>
-          <a:ln xmlns:a="http://schemas.openxmlformats.org/drawingml/2006/main" w="0">
+          <a:noFill/>
+          <a:ln w="0">
             <a:noFill/>
             <a:prstDash val="solid"/>
           </a:ln>
         </p:spPr>
         <p:txBody>
-          <a:bodyPr xmlns:a="http://schemas.openxmlformats.org/drawingml/2006/main">
+          <a:bodyPr>
             <a:noAutofit/>
           </a:bodyPr>
-          <a:lstStyle xmlns:a="http://schemas.openxmlformats.org/drawingml/2006/main">
+          <a:lstStyle>
             <a:defPPr>
               <a:defRPr sz="2550" b="1">
                 <a:solidFill>
@@ -10860,7 +10936,7 @@
               </a:defRPr>
             </a:defPPr>
           </a:lstStyle>
-          <a:p xmlns:a="http://schemas.openxmlformats.org/drawingml/2006/main">
+          <a:p>
             <a:pPr>
               <a:defRPr sz="2550" b="1">
                 <a:solidFill>
@@ -10887,37 +10963,37 @@
       </p:sp>
       <p:sp>
         <p:nvSpPr>
-          <p:cNvPr id="12" name="">
-            <a:extLst xmlns:a="http://schemas.openxmlformats.org/drawingml/2006/main">
+          <p:cNvPr id="12" name="Rectangle 11">
+            <a:extLst>
               <a:ext uri="{FF2B5EF4-FFF2-40B4-BE49-F238E27FC236}">
                 <a16:creationId xmlns:a16="http://schemas.microsoft.com/office/drawing/2014/main" id="{38075E0A-0D78-4DB5-A4C4-4CEC0D930736}"/>
               </a:ext>
             </a:extLst>
           </p:cNvPr>
           <p:cNvSpPr>
-            <a:spLocks xmlns:a="http://schemas.openxmlformats.org/drawingml/2006/main" noGrp="1"/>
+            <a:spLocks noGrp="1"/>
           </p:cNvSpPr>
           <p:nvPr/>
         </p:nvSpPr>
         <p:spPr>
-          <a:xfrm xmlns:a="http://schemas.openxmlformats.org/drawingml/2006/main">
+          <a:xfrm>
             <a:off x="685800" y="3486150"/>
             <a:ext cx="3238500" cy="304800"/>
           </a:xfrm>
-          <a:prstGeom xmlns:a="http://schemas.openxmlformats.org/drawingml/2006/main" prst="rect">
+          <a:prstGeom prst="rect">
             <a:avLst/>
           </a:prstGeom>
-          <a:noFill xmlns:a="http://schemas.openxmlformats.org/drawingml/2006/main"/>
-          <a:ln xmlns:a="http://schemas.openxmlformats.org/drawingml/2006/main" w="0">
+          <a:noFill/>
+          <a:ln w="0">
             <a:noFill/>
             <a:prstDash val="solid"/>
           </a:ln>
         </p:spPr>
         <p:txBody>
-          <a:bodyPr xmlns:a="http://schemas.openxmlformats.org/drawingml/2006/main">
+          <a:bodyPr>
             <a:noAutofit/>
           </a:bodyPr>
-          <a:lstStyle xmlns:a="http://schemas.openxmlformats.org/drawingml/2006/main">
+          <a:lstStyle>
             <a:defPPr>
               <a:defRPr sz="1200" b="0">
                 <a:solidFill>
@@ -10929,7 +11005,7 @@
               </a:defRPr>
             </a:defPPr>
           </a:lstStyle>
-          <a:p xmlns:a="http://schemas.openxmlformats.org/drawingml/2006/main">
+          <a:p>
             <a:pPr>
               <a:defRPr sz="1200" b="0">
                 <a:solidFill>
@@ -10956,37 +11032,37 @@
       </p:sp>
       <p:sp>
         <p:nvSpPr>
-          <p:cNvPr id="13" name="">
-            <a:extLst xmlns:a="http://schemas.openxmlformats.org/drawingml/2006/main">
+          <p:cNvPr id="13" name="Rectangle 12">
+            <a:extLst>
               <a:ext uri="{FF2B5EF4-FFF2-40B4-BE49-F238E27FC236}">
                 <a16:creationId xmlns:a16="http://schemas.microsoft.com/office/drawing/2014/main" id="{23731B87-5D6B-40EA-A1E7-DA1AF3993769}"/>
               </a:ext>
             </a:extLst>
           </p:cNvPr>
           <p:cNvSpPr>
-            <a:spLocks xmlns:a="http://schemas.openxmlformats.org/drawingml/2006/main" noGrp="1"/>
+            <a:spLocks noGrp="1"/>
           </p:cNvSpPr>
           <p:nvPr/>
         </p:nvSpPr>
         <p:spPr>
-          <a:xfrm xmlns:a="http://schemas.openxmlformats.org/drawingml/2006/main">
+          <a:xfrm>
             <a:off x="4305300" y="3028950"/>
             <a:ext cx="3238500" cy="438150"/>
           </a:xfrm>
-          <a:prstGeom xmlns:a="http://schemas.openxmlformats.org/drawingml/2006/main" prst="rect">
+          <a:prstGeom prst="rect">
             <a:avLst/>
           </a:prstGeom>
-          <a:noFill xmlns:a="http://schemas.openxmlformats.org/drawingml/2006/main"/>
-          <a:ln xmlns:a="http://schemas.openxmlformats.org/drawingml/2006/main" w="0">
+          <a:noFill/>
+          <a:ln w="0">
             <a:noFill/>
             <a:prstDash val="solid"/>
           </a:ln>
         </p:spPr>
         <p:txBody>
-          <a:bodyPr xmlns:a="http://schemas.openxmlformats.org/drawingml/2006/main">
+          <a:bodyPr>
             <a:noAutofit/>
           </a:bodyPr>
-          <a:lstStyle xmlns:a="http://schemas.openxmlformats.org/drawingml/2006/main">
+          <a:lstStyle>
             <a:defPPr>
               <a:defRPr sz="2550" b="1">
                 <a:solidFill>
@@ -10998,7 +11074,7 @@
               </a:defRPr>
             </a:defPPr>
           </a:lstStyle>
-          <a:p xmlns:a="http://schemas.openxmlformats.org/drawingml/2006/main">
+          <a:p>
             <a:pPr>
               <a:defRPr sz="2550" b="1">
                 <a:solidFill>
@@ -11025,37 +11101,37 @@
       </p:sp>
       <p:sp>
         <p:nvSpPr>
-          <p:cNvPr id="14" name="">
-            <a:extLst xmlns:a="http://schemas.openxmlformats.org/drawingml/2006/main">
+          <p:cNvPr id="14" name="Rectangle 13">
+            <a:extLst>
               <a:ext uri="{FF2B5EF4-FFF2-40B4-BE49-F238E27FC236}">
                 <a16:creationId xmlns:a16="http://schemas.microsoft.com/office/drawing/2014/main" id="{83035B5B-7381-4EA6-BADB-9303251E276C}"/>
               </a:ext>
             </a:extLst>
           </p:cNvPr>
           <p:cNvSpPr>
-            <a:spLocks xmlns:a="http://schemas.openxmlformats.org/drawingml/2006/main" noGrp="1"/>
+            <a:spLocks noGrp="1"/>
           </p:cNvSpPr>
           <p:nvPr/>
         </p:nvSpPr>
         <p:spPr>
-          <a:xfrm xmlns:a="http://schemas.openxmlformats.org/drawingml/2006/main">
+          <a:xfrm>
             <a:off x="4305300" y="3486150"/>
             <a:ext cx="3238500" cy="304800"/>
           </a:xfrm>
-          <a:prstGeom xmlns:a="http://schemas.openxmlformats.org/drawingml/2006/main" prst="rect">
+          <a:prstGeom prst="rect">
             <a:avLst/>
           </a:prstGeom>
-          <a:noFill xmlns:a="http://schemas.openxmlformats.org/drawingml/2006/main"/>
-          <a:ln xmlns:a="http://schemas.openxmlformats.org/drawingml/2006/main" w="0">
+          <a:noFill/>
+          <a:ln w="0">
             <a:noFill/>
             <a:prstDash val="solid"/>
           </a:ln>
         </p:spPr>
         <p:txBody>
-          <a:bodyPr xmlns:a="http://schemas.openxmlformats.org/drawingml/2006/main">
+          <a:bodyPr>
             <a:noAutofit/>
           </a:bodyPr>
-          <a:lstStyle xmlns:a="http://schemas.openxmlformats.org/drawingml/2006/main">
+          <a:lstStyle>
             <a:defPPr>
               <a:defRPr sz="1200" b="0">
                 <a:solidFill>
@@ -11067,7 +11143,7 @@
               </a:defRPr>
             </a:defPPr>
           </a:lstStyle>
-          <a:p xmlns:a="http://schemas.openxmlformats.org/drawingml/2006/main">
+          <a:p>
             <a:pPr>
               <a:defRPr sz="1200" b="0">
                 <a:solidFill>
@@ -11094,37 +11170,37 @@
       </p:sp>
       <p:sp>
         <p:nvSpPr>
-          <p:cNvPr id="15" name="">
-            <a:extLst xmlns:a="http://schemas.openxmlformats.org/drawingml/2006/main">
+          <p:cNvPr id="15" name="Rectangle 14">
+            <a:extLst>
               <a:ext uri="{FF2B5EF4-FFF2-40B4-BE49-F238E27FC236}">
                 <a16:creationId xmlns:a16="http://schemas.microsoft.com/office/drawing/2014/main" id="{9144F443-437B-4D89-B3D0-B06CA4E5A51A}"/>
               </a:ext>
             </a:extLst>
           </p:cNvPr>
           <p:cNvSpPr>
-            <a:spLocks xmlns:a="http://schemas.openxmlformats.org/drawingml/2006/main" noGrp="1"/>
+            <a:spLocks noGrp="1"/>
           </p:cNvSpPr>
           <p:nvPr/>
         </p:nvSpPr>
         <p:spPr>
-          <a:xfrm xmlns:a="http://schemas.openxmlformats.org/drawingml/2006/main">
+          <a:xfrm>
             <a:off x="7924800" y="3028950"/>
             <a:ext cx="3238500" cy="438150"/>
           </a:xfrm>
-          <a:prstGeom xmlns:a="http://schemas.openxmlformats.org/drawingml/2006/main" prst="rect">
+          <a:prstGeom prst="rect">
             <a:avLst/>
           </a:prstGeom>
-          <a:noFill xmlns:a="http://schemas.openxmlformats.org/drawingml/2006/main"/>
-          <a:ln xmlns:a="http://schemas.openxmlformats.org/drawingml/2006/main" w="0">
+          <a:noFill/>
+          <a:ln w="0">
             <a:noFill/>
             <a:prstDash val="solid"/>
           </a:ln>
         </p:spPr>
         <p:txBody>
-          <a:bodyPr xmlns:a="http://schemas.openxmlformats.org/drawingml/2006/main">
+          <a:bodyPr>
             <a:noAutofit/>
           </a:bodyPr>
-          <a:lstStyle xmlns:a="http://schemas.openxmlformats.org/drawingml/2006/main">
+          <a:lstStyle>
             <a:defPPr>
               <a:defRPr sz="2550" b="1">
                 <a:solidFill>
@@ -11136,7 +11212,7 @@
               </a:defRPr>
             </a:defPPr>
           </a:lstStyle>
-          <a:p xmlns:a="http://schemas.openxmlformats.org/drawingml/2006/main">
+          <a:p>
             <a:pPr>
               <a:defRPr sz="2550" b="1">
                 <a:solidFill>
@@ -11163,37 +11239,37 @@
       </p:sp>
       <p:sp>
         <p:nvSpPr>
-          <p:cNvPr id="16" name="">
-            <a:extLst xmlns:a="http://schemas.openxmlformats.org/drawingml/2006/main">
+          <p:cNvPr id="16" name="Rectangle 15">
+            <a:extLst>
               <a:ext uri="{FF2B5EF4-FFF2-40B4-BE49-F238E27FC236}">
                 <a16:creationId xmlns:a16="http://schemas.microsoft.com/office/drawing/2014/main" id="{28925F70-DAFD-493B-8033-8427A143F7C1}"/>
               </a:ext>
             </a:extLst>
           </p:cNvPr>
           <p:cNvSpPr>
-            <a:spLocks xmlns:a="http://schemas.openxmlformats.org/drawingml/2006/main" noGrp="1"/>
+            <a:spLocks noGrp="1"/>
           </p:cNvSpPr>
           <p:nvPr/>
         </p:nvSpPr>
         <p:spPr>
-          <a:xfrm xmlns:a="http://schemas.openxmlformats.org/drawingml/2006/main">
+          <a:xfrm>
             <a:off x="7924800" y="3486150"/>
             <a:ext cx="3238500" cy="304800"/>
           </a:xfrm>
-          <a:prstGeom xmlns:a="http://schemas.openxmlformats.org/drawingml/2006/main" prst="rect">
+          <a:prstGeom prst="rect">
             <a:avLst/>
           </a:prstGeom>
-          <a:noFill xmlns:a="http://schemas.openxmlformats.org/drawingml/2006/main"/>
-          <a:ln xmlns:a="http://schemas.openxmlformats.org/drawingml/2006/main" w="0">
+          <a:noFill/>
+          <a:ln w="0">
             <a:noFill/>
             <a:prstDash val="solid"/>
           </a:ln>
         </p:spPr>
         <p:txBody>
-          <a:bodyPr xmlns:a="http://schemas.openxmlformats.org/drawingml/2006/main">
+          <a:bodyPr>
             <a:noAutofit/>
           </a:bodyPr>
-          <a:lstStyle xmlns:a="http://schemas.openxmlformats.org/drawingml/2006/main">
+          <a:lstStyle>
             <a:defPPr>
               <a:defRPr sz="1200" b="0">
                 <a:solidFill>
@@ -11205,7 +11281,7 @@
               </a:defRPr>
             </a:defPPr>
           </a:lstStyle>
-          <a:p xmlns:a="http://schemas.openxmlformats.org/drawingml/2006/main">
+          <a:p>
             <a:pPr>
               <a:defRPr sz="1200" b="0">
                 <a:solidFill>
@@ -11232,37 +11308,37 @@
       </p:sp>
       <p:sp>
         <p:nvSpPr>
-          <p:cNvPr id="17" name="">
-            <a:extLst xmlns:a="http://schemas.openxmlformats.org/drawingml/2006/main">
+          <p:cNvPr id="17" name="Rectangle 16">
+            <a:extLst>
               <a:ext uri="{FF2B5EF4-FFF2-40B4-BE49-F238E27FC236}">
                 <a16:creationId xmlns:a16="http://schemas.microsoft.com/office/drawing/2014/main" id="{72A6D2B3-8666-4B0C-98C2-E85A2E0A8AFB}"/>
               </a:ext>
             </a:extLst>
           </p:cNvPr>
           <p:cNvSpPr>
-            <a:spLocks xmlns:a="http://schemas.openxmlformats.org/drawingml/2006/main" noGrp="1"/>
+            <a:spLocks noGrp="1"/>
           </p:cNvSpPr>
           <p:nvPr/>
         </p:nvSpPr>
         <p:spPr>
-          <a:xfrm xmlns:a="http://schemas.openxmlformats.org/drawingml/2006/main">
+          <a:xfrm>
             <a:off x="685800" y="4305300"/>
             <a:ext cx="10820400" cy="1905000"/>
           </a:xfrm>
-          <a:prstGeom xmlns:a="http://schemas.openxmlformats.org/drawingml/2006/main" prst="rect">
+          <a:prstGeom prst="rect">
             <a:avLst/>
           </a:prstGeom>
-          <a:noFill xmlns:a="http://schemas.openxmlformats.org/drawingml/2006/main"/>
-          <a:ln xmlns:a="http://schemas.openxmlformats.org/drawingml/2006/main" w="0">
+          <a:noFill/>
+          <a:ln w="0">
             <a:noFill/>
             <a:prstDash val="solid"/>
           </a:ln>
         </p:spPr>
         <p:txBody>
-          <a:bodyPr xmlns:a="http://schemas.openxmlformats.org/drawingml/2006/main">
+          <a:bodyPr>
             <a:noAutofit/>
           </a:bodyPr>
-          <a:lstStyle xmlns:a="http://schemas.openxmlformats.org/drawingml/2006/main">
+          <a:lstStyle>
             <a:defPPr>
               <a:defRPr sz="1275">
                 <a:solidFill>
@@ -11274,7 +11350,7 @@
               </a:defRPr>
             </a:defPPr>
           </a:lstStyle>
-          <a:p xmlns:a="http://schemas.openxmlformats.org/drawingml/2006/main">
+          <a:p>
             <a:pPr marL="228600" indent="-114300">
               <a:spcAft>
                 <a:spcPts val="1200"/>
@@ -11301,7 +11377,7 @@
               <a:t>Nine automated tests cover the eligibility constraints, the scoring model, the fairness factor, the arrival rule and access control.</a:t>
             </a:r>
           </a:p>
-          <a:p xmlns:a="http://schemas.openxmlformats.org/drawingml/2006/main">
+          <a:p>
             <a:pPr marL="228600" indent="-114300">
               <a:spcAft>
                 <a:spcPts val="1200"/>
@@ -11328,7 +11404,7 @@
               <a:t>Eighteen API checks confirm the role restrictions, including rejection of unauthorised requests with 401 and 403 responses.</a:t>
             </a:r>
           </a:p>
-          <a:p xmlns:a="http://schemas.openxmlformats.org/drawingml/2006/main">
+          <a:p>
             <a:pPr marL="228600" indent="-114300">
               <a:spcAft>
                 <a:spcPts val="1200"/>
@@ -11364,6 +11440,9 @@
       </p:ext>
     </p:extLst>
   </p:cSld>
+  <p:clrMapOvr>
+    <a:masterClrMapping/>
+  </p:clrMapOvr>
 </p:sld>
 </file>
 
@@ -11609,5 +11688,254 @@
       </a:bgFillStyleLst>
     </a:fmtScheme>
   </a:themeElements>
+  <a:objectDefaults/>
+  <a:extraClrSchemeLst/>
+</a:theme>
+</file>
+
+<file path=ppt/theme/theme2.xml><?xml version="1.0" encoding="utf-8"?>
+<a:theme xmlns:a="http://schemas.openxmlformats.org/drawingml/2006/main" name="ChatGPT">
+  <a:themeElements>
+    <a:clrScheme name="ChatGPT">
+      <a:dk1>
+        <a:srgbClr val="000000"/>
+      </a:dk1>
+      <a:lt1>
+        <a:srgbClr val="FFFFFF"/>
+      </a:lt1>
+      <a:dk2>
+        <a:srgbClr val="0E2841"/>
+      </a:dk2>
+      <a:lt2>
+        <a:srgbClr val="E8E8E8"/>
+      </a:lt2>
+      <a:accent1>
+        <a:srgbClr val="156082"/>
+      </a:accent1>
+      <a:accent2>
+        <a:srgbClr val="E97132"/>
+      </a:accent2>
+      <a:accent3>
+        <a:srgbClr val="196B24"/>
+      </a:accent3>
+      <a:accent4>
+        <a:srgbClr val="0F9ED5"/>
+      </a:accent4>
+      <a:accent5>
+        <a:srgbClr val="A02B93"/>
+      </a:accent5>
+      <a:accent6>
+        <a:srgbClr val="4EA72E"/>
+      </a:accent6>
+      <a:hlink>
+        <a:srgbClr val="467886"/>
+      </a:hlink>
+      <a:folHlink>
+        <a:srgbClr val="96607D"/>
+      </a:folHlink>
+    </a:clrScheme>
+    <a:fontScheme name="">
+      <a:majorFont>
+        <a:latin typeface="Aptos"/>
+        <a:ea typeface=""/>
+        <a:cs typeface=""/>
+      </a:majorFont>
+      <a:minorFont>
+        <a:latin typeface="Aptos"/>
+        <a:ea typeface=""/>
+        <a:cs typeface=""/>
+      </a:minorFont>
+    </a:fontScheme>
+    <a:fmtScheme name="ChatGPT">
+      <a:fillStyleLst>
+        <a:solidFill>
+          <a:schemeClr val="phClr"/>
+        </a:solidFill>
+        <a:gradFill>
+          <a:gsLst>
+            <a:gs pos="0">
+              <a:schemeClr val="phClr">
+                <a:tint val="67000"/>
+                <a:lumMod val="110000"/>
+                <a:satMod val="105000"/>
+              </a:schemeClr>
+            </a:gs>
+            <a:gs pos="50000">
+              <a:schemeClr val="phClr">
+                <a:tint val="73000"/>
+                <a:lumMod val="105000"/>
+                <a:satMod val="103000"/>
+              </a:schemeClr>
+            </a:gs>
+            <a:gs pos="100000">
+              <a:schemeClr val="phClr">
+                <a:tint val="81000"/>
+                <a:lumMod val="105000"/>
+                <a:satMod val="109000"/>
+              </a:schemeClr>
+            </a:gs>
+          </a:gsLst>
+          <a:lin ang="5400000" scaled="0"/>
+        </a:gradFill>
+        <a:gradFill>
+          <a:gsLst>
+            <a:gs pos="0">
+              <a:schemeClr val="phClr">
+                <a:tint val="94000"/>
+                <a:lumMod val="102000"/>
+                <a:satMod val="103000"/>
+              </a:schemeClr>
+            </a:gs>
+            <a:gs pos="50000">
+              <a:schemeClr val="phClr">
+                <a:shade val="100000"/>
+                <a:lumMod val="100000"/>
+                <a:satMod val="110000"/>
+              </a:schemeClr>
+            </a:gs>
+            <a:gs pos="100000">
+              <a:schemeClr val="phClr">
+                <a:shade val="78000"/>
+                <a:lumMod val="99000"/>
+                <a:satMod val="120000"/>
+              </a:schemeClr>
+            </a:gs>
+          </a:gsLst>
+          <a:lin ang="5400000" scaled="0"/>
+        </a:gradFill>
+      </a:fillStyleLst>
+      <a:lnStyleLst>
+        <a:ln w="12700">
+          <a:solidFill>
+            <a:schemeClr val="phClr"/>
+          </a:solidFill>
+          <a:prstDash val="solid"/>
+        </a:ln>
+        <a:ln w="19050">
+          <a:solidFill>
+            <a:schemeClr val="phClr"/>
+          </a:solidFill>
+          <a:prstDash val="solid"/>
+        </a:ln>
+        <a:ln w="25400">
+          <a:solidFill>
+            <a:schemeClr val="phClr"/>
+          </a:solidFill>
+          <a:prstDash val="solid"/>
+        </a:ln>
+      </a:lnStyleLst>
+      <a:effectStyleLst>
+        <a:effectStyle>
+          <a:effectLst/>
+        </a:effectStyle>
+        <a:effectStyle>
+          <a:effectLst/>
+        </a:effectStyle>
+        <a:effectStyle>
+          <a:effectLst>
+            <a:outerShdw blurRad="57150" dist="19050" dir="5400000">
+              <a:srgbClr val="000000">
+                <a:alpha val="16000"/>
+              </a:srgbClr>
+            </a:outerShdw>
+          </a:effectLst>
+        </a:effectStyle>
+        <a:effectStyle>
+          <a:effectLst>
+            <a:outerShdw blurRad="19050" dist="9525" dir="5400000">
+              <a:srgbClr val="000000">
+                <a:alpha val="6000"/>
+              </a:srgbClr>
+            </a:outerShdw>
+          </a:effectLst>
+        </a:effectStyle>
+        <a:effectStyle>
+          <a:effectLst>
+            <a:outerShdw blurRad="28575" dist="9525" dir="5400000">
+              <a:srgbClr val="000000">
+                <a:alpha val="8000"/>
+              </a:srgbClr>
+            </a:outerShdw>
+          </a:effectLst>
+        </a:effectStyle>
+        <a:effectStyle>
+          <a:effectLst>
+            <a:outerShdw blurRad="57150" dist="19050" dir="5400000">
+              <a:srgbClr val="000000">
+                <a:alpha val="10000"/>
+              </a:srgbClr>
+            </a:outerShdw>
+          </a:effectLst>
+        </a:effectStyle>
+        <a:effectStyle>
+          <a:effectLst>
+            <a:outerShdw blurRad="114300" dist="38100" dir="5400000">
+              <a:srgbClr val="000000">
+                <a:alpha val="12000"/>
+              </a:srgbClr>
+            </a:outerShdw>
+          </a:effectLst>
+        </a:effectStyle>
+        <a:effectStyle>
+          <a:effectLst>
+            <a:outerShdw blurRad="171450" dist="57150" dir="5400000">
+              <a:srgbClr val="000000">
+                <a:alpha val="16000"/>
+              </a:srgbClr>
+            </a:outerShdw>
+          </a:effectLst>
+        </a:effectStyle>
+        <a:effectStyle>
+          <a:effectLst>
+            <a:outerShdw blurRad="266700" dist="95250" dir="5400000">
+              <a:srgbClr val="000000">
+                <a:alpha val="24000"/>
+              </a:srgbClr>
+            </a:outerShdw>
+          </a:effectLst>
+        </a:effectStyle>
+      </a:effectStyleLst>
+      <a:bgFillStyleLst>
+        <a:solidFill>
+          <a:schemeClr val="phClr"/>
+        </a:solidFill>
+        <a:solidFill>
+          <a:schemeClr val="phClr">
+            <a:tint val="95000"/>
+            <a:satMod val="170000"/>
+          </a:schemeClr>
+        </a:solidFill>
+        <a:gradFill>
+          <a:gsLst>
+            <a:gs pos="0">
+              <a:schemeClr val="phClr">
+                <a:tint val="93000"/>
+                <a:shade val="98000"/>
+                <a:lumMod val="102000"/>
+                <a:satMod val="150000"/>
+              </a:schemeClr>
+            </a:gs>
+            <a:gs pos="50000">
+              <a:schemeClr val="phClr">
+                <a:tint val="98000"/>
+                <a:shade val="90000"/>
+                <a:lumMod val="103000"/>
+                <a:satMod val="130000"/>
+              </a:schemeClr>
+            </a:gs>
+            <a:gs pos="100000">
+              <a:schemeClr val="phClr">
+                <a:shade val="63000"/>
+                <a:satMod val="120000"/>
+              </a:schemeClr>
+            </a:gs>
+          </a:gsLst>
+          <a:lin ang="5400000" scaled="0"/>
+        </a:gradFill>
+      </a:bgFillStyleLst>
+    </a:fmtScheme>
+  </a:themeElements>
+  <a:objectDefaults/>
+  <a:extraClrSchemeLst/>
 </a:theme>
 </file>